--- a/docs/ativo/material_reuniao_orientador_v3.2.1.pptx
+++ b/docs/ativo/material_reuniao_orientador_v3.2.1.pptx
@@ -3273,18 +3273,6 @@
               <a:t>Reunião:  Junho de 2026 (segunda reunião do mês)</a:t>
             </a:r>
           </a:p>
-          <a:p>
-            <a:pPr>
-              <a:defRPr sz="1700">
-                <a:solidFill>
-                  <a:srgbClr val="3D424E"/>
-                </a:solidFill>
-              </a:defRPr>
-            </a:pPr>
-            <a:r>
-              <a:t>Versão da tese:  v3.2 — agora prescritiva, conforme feedback</a:t>
-            </a:r>
-          </a:p>
         </p:txBody>
       </p:sp>
     </p:spTree>
@@ -3559,41 +3547,6 @@
           </a:p>
         </p:txBody>
       </p:sp>
-      <p:sp>
-        <p:nvSpPr>
-          <p:cNvPr id="5" name="TextBox 4"/>
-          <p:cNvSpPr txBox="1"/>
-          <p:nvPr/>
-        </p:nvSpPr>
-        <p:spPr>
-          <a:xfrm>
-            <a:off x="457200" y="6400800"/>
-            <a:ext cx="11430000" cy="365760"/>
-          </a:xfrm>
-          <a:prstGeom prst="rect">
-            <a:avLst/>
-          </a:prstGeom>
-          <a:noFill/>
-        </p:spPr>
-        <p:txBody>
-          <a:bodyPr wrap="none">
-            <a:spAutoFit/>
-          </a:bodyPr>
-          <a:lstStyle/>
-          <a:p>
-            <a:pPr>
-              <a:defRPr sz="1500" i="1">
-                <a:solidFill>
-                  <a:srgbClr val="707682"/>
-                </a:solidFill>
-              </a:defRPr>
-            </a:pPr>
-            <a:r>
-              <a:t>Detalhes em _triagem.md, seção Rodada 2.6</a:t>
-            </a:r>
-          </a:p>
-        </p:txBody>
-      </p:sp>
     </p:spTree>
   </p:cSld>
   <p:clrMapOvr>
@@ -3723,7 +3676,7 @@
               </a:defRPr>
             </a:pPr>
             <a:r>
-              <a:t>Tese v3.2 escrita e disponível em 07_thesis_statement.md.</a:t>
+              <a:t>Nova versão da tese escrita e disponível.</a:t>
             </a:r>
           </a:p>
           <a:p>
@@ -3849,7 +3802,7 @@
               </a:defRPr>
             </a:pPr>
             <a:r>
-              <a:t>Vou detalhar a v3.2 na Parte 3 desta apresentação.</a:t>
+              <a:t>Vou detalhar a nova tese na Parte 3 desta apresentação.</a:t>
             </a:r>
           </a:p>
         </p:txBody>
@@ -4123,41 +4076,6 @@
           </a:p>
         </p:txBody>
       </p:sp>
-      <p:sp>
-        <p:nvSpPr>
-          <p:cNvPr id="5" name="TextBox 4"/>
-          <p:cNvSpPr txBox="1"/>
-          <p:nvPr/>
-        </p:nvSpPr>
-        <p:spPr>
-          <a:xfrm>
-            <a:off x="457200" y="6400800"/>
-            <a:ext cx="11430000" cy="365760"/>
-          </a:xfrm>
-          <a:prstGeom prst="rect">
-            <a:avLst/>
-          </a:prstGeom>
-          <a:noFill/>
-        </p:spPr>
-        <p:txBody>
-          <a:bodyPr wrap="none">
-            <a:spAutoFit/>
-          </a:bodyPr>
-          <a:lstStyle/>
-          <a:p>
-            <a:pPr>
-              <a:defRPr sz="1500" i="1">
-                <a:solidFill>
-                  <a:srgbClr val="707682"/>
-                </a:solidFill>
-              </a:defRPr>
-            </a:pPr>
-            <a:r>
-              <a:t>Arquivo permanente em _metricas_corpus.md — atualizo a cada nova rodada</a:t>
-            </a:r>
-          </a:p>
-        </p:txBody>
-      </p:sp>
     </p:spTree>
   </p:cSld>
   <p:clrMapOvr>
@@ -4296,7 +4214,7 @@
               </a:defRPr>
             </a:pPr>
             <a:r>
-              <a:t>v3.2 — agora prescritiva, com conceitos explicados</a:t>
+              <a:t>Agora prescritiva, com conceitos explicados</a:t>
             </a:r>
           </a:p>
         </p:txBody>
@@ -4349,7 +4267,7 @@
               </a:defRPr>
             </a:pPr>
             <a:r>
-              <a:t>A tese em uma frase clara (v3.2)</a:t>
+              <a:t>A tese em uma frase clara</a:t>
             </a:r>
           </a:p>
         </p:txBody>
@@ -4461,7 +4379,7 @@
               </a:defRPr>
             </a:pPr>
             <a:r>
-              <a:t>Comparação: v3.1 (semana passada) vs v3.2 (agora)</a:t>
+              <a:t>Comparação: antes (semana passada) vs agora</a:t>
             </a:r>
           </a:p>
         </p:txBody>
@@ -4565,7 +4483,7 @@
                             <a:srgbClr val="FFFFFF"/>
                           </a:solidFill>
                         </a:rPr>
-                        <a:t>v3.1 (diagnóstica)</a:t>
+                        <a:t>Antes (diagnóstica)</a:t>
                       </a:r>
                     </a:p>
                   </a:txBody>
@@ -4586,7 +4504,7 @@
                             <a:srgbClr val="FFFFFF"/>
                           </a:solidFill>
                         </a:rPr>
-                        <a:t>v3.2 (prescritiva, ATUAL)</a:t>
+                        <a:t>Agora (prescritiva)</a:t>
                       </a:r>
                     </a:p>
                   </a:txBody>
@@ -4956,7 +4874,7 @@
               </a:defRPr>
             </a:pPr>
             <a:r>
-              <a:t>Aprovação da v3.2 é o item principal desta reunião</a:t>
+              <a:t>Aprovação da nova versão é o item principal desta reunião</a:t>
             </a:r>
           </a:p>
         </p:txBody>
@@ -6184,7 +6102,7 @@
               </a:defRPr>
             </a:pPr>
             <a:r>
-              <a:t>O que vamos cobrir hoje</a:t>
+              <a:t>Principais alinhamentos e decisões</a:t>
             </a:r>
           </a:p>
         </p:txBody>
@@ -6280,7 +6198,7 @@
               </a:defRPr>
             </a:pPr>
             <a:r>
-              <a:t>Recap da v3.1 e dos seus pedidos</a:t>
+              <a:t>Recap da última reunião e orientações</a:t>
             </a:r>
           </a:p>
           <a:p>
@@ -6325,7 +6243,7 @@
               </a:defRPr>
             </a:pPr>
             <a:r>
-              <a:t>Parte 3 — Como a tese está sendo construída agora (v3.2)</a:t>
+              <a:t>Parte 3 — Como a tese está sendo construída agora</a:t>
             </a:r>
           </a:p>
           <a:p>
@@ -6371,41 +6289,6 @@
             </a:pPr>
             <a:r>
               <a:t>O que preciso decidir nesta reunião</a:t>
-            </a:r>
-          </a:p>
-        </p:txBody>
-      </p:sp>
-      <p:sp>
-        <p:nvSpPr>
-          <p:cNvPr id="5" name="TextBox 4"/>
-          <p:cNvSpPr txBox="1"/>
-          <p:nvPr/>
-        </p:nvSpPr>
-        <p:spPr>
-          <a:xfrm>
-            <a:off x="457200" y="6400800"/>
-            <a:ext cx="11430000" cy="365760"/>
-          </a:xfrm>
-          <a:prstGeom prst="rect">
-            <a:avLst/>
-          </a:prstGeom>
-          <a:noFill/>
-        </p:spPr>
-        <p:txBody>
-          <a:bodyPr wrap="none">
-            <a:spAutoFit/>
-          </a:bodyPr>
-          <a:lstStyle/>
-          <a:p>
-            <a:pPr>
-              <a:defRPr sz="1500" i="1">
-                <a:solidFill>
-                  <a:srgbClr val="707682"/>
-                </a:solidFill>
-              </a:defRPr>
-            </a:pPr>
-            <a:r>
-              <a:t>Material derivado da pesquisa em docs/ativo/ — todos os arquivos no GitHub</a:t>
             </a:r>
           </a:p>
         </p:txBody>
@@ -7910,7 +7793,7 @@
                             <a:srgbClr val="3D424E"/>
                           </a:solidFill>
                         </a:rPr>
-                        <a:t>Aprovação da v3.2 com você</a:t>
+                        <a:t>Aprovação da nova versão da tese com você</a:t>
                       </a:r>
                     </a:p>
                   </a:txBody>
@@ -8826,7 +8709,7 @@
               </a:defRPr>
             </a:pPr>
             <a:r>
-              <a:t>1. Aprovação da tese v3.2 (prescritiva, pipeline integrado)?</a:t>
+              <a:t>1. Aprovação da nova versão da tese (prescritiva, pipeline integrado)?</a:t>
             </a:r>
           </a:p>
           <a:p>
@@ -9090,7 +8973,7 @@
               </a:defRPr>
             </a:pPr>
             <a:r>
-              <a:t>Aprovação da tese v3.2 — decidir os 4 itens acima</a:t>
+              <a:t>Aprovação da nova versão da tese — decidir os 4 itens acima</a:t>
             </a:r>
           </a:p>
         </p:txBody>
@@ -9233,7 +9116,7 @@
               </a:defRPr>
             </a:pPr>
             <a:r>
-              <a:t>Recap da v3.1 e dos seus pedidos</a:t>
+              <a:t>Recap da última reunião e orientações</a:t>
             </a:r>
           </a:p>
         </p:txBody>
@@ -9286,7 +9169,7 @@
               </a:defRPr>
             </a:pPr>
             <a:r>
-              <a:t>Como a tese estava na última reunião (v3.1)</a:t>
+              <a:t>Como a tese estava na última reunião</a:t>
             </a:r>
           </a:p>
         </p:txBody>
@@ -9486,41 +9369,6 @@
           </a:p>
         </p:txBody>
       </p:sp>
-      <p:sp>
-        <p:nvSpPr>
-          <p:cNvPr id="5" name="TextBox 4"/>
-          <p:cNvSpPr txBox="1"/>
-          <p:nvPr/>
-        </p:nvSpPr>
-        <p:spPr>
-          <a:xfrm>
-            <a:off x="457200" y="6400800"/>
-            <a:ext cx="11430000" cy="365760"/>
-          </a:xfrm>
-          <a:prstGeom prst="rect">
-            <a:avLst/>
-          </a:prstGeom>
-          <a:noFill/>
-        </p:spPr>
-        <p:txBody>
-          <a:bodyPr wrap="none">
-            <a:spAutoFit/>
-          </a:bodyPr>
-          <a:lstStyle/>
-          <a:p>
-            <a:pPr>
-              <a:defRPr sz="1500" i="1">
-                <a:solidFill>
-                  <a:srgbClr val="707682"/>
-                </a:solidFill>
-              </a:defRPr>
-            </a:pPr>
-            <a:r>
-              <a:t>07_thesis_statement.md mantém histórico de versões (v3.0, v3.1, v3.2)</a:t>
-            </a:r>
-          </a:p>
-        </p:txBody>
-      </p:sp>
     </p:spTree>
   </p:cSld>
   <p:clrMapOvr>
@@ -9731,42 +9579,7 @@
               </a:defRPr>
             </a:pPr>
             <a:r>
-              <a:t>Estas 3 validações são a base sobre a qual estou construindo a v3.2.</a:t>
-            </a:r>
-          </a:p>
-        </p:txBody>
-      </p:sp>
-      <p:sp>
-        <p:nvSpPr>
-          <p:cNvPr id="5" name="TextBox 4"/>
-          <p:cNvSpPr txBox="1"/>
-          <p:nvPr/>
-        </p:nvSpPr>
-        <p:spPr>
-          <a:xfrm>
-            <a:off x="457200" y="6400800"/>
-            <a:ext cx="11430000" cy="365760"/>
-          </a:xfrm>
-          <a:prstGeom prst="rect">
-            <a:avLst/>
-          </a:prstGeom>
-          <a:noFill/>
-        </p:spPr>
-        <p:txBody>
-          <a:bodyPr wrap="none">
-            <a:spAutoFit/>
-          </a:bodyPr>
-          <a:lstStyle/>
-          <a:p>
-            <a:pPr>
-              <a:defRPr sz="1500" i="1">
-                <a:solidFill>
-                  <a:srgbClr val="707682"/>
-                </a:solidFill>
-              </a:defRPr>
-            </a:pPr>
-            <a:r>
-              <a:t>Registrado em docs/historico/reuniao_2026-06/README.md</a:t>
+              <a:t>Estas 3 validações são a base sobre a qual estou construindo a nova versão da tese.</a:t>
             </a:r>
           </a:p>
         </p:txBody>
@@ -10462,42 +10275,7 @@
               </a:defRPr>
             </a:pPr>
             <a:r>
-              <a:t>Cada um destes é base de algum baseline ou mecanismo do pipeline v3.2.</a:t>
-            </a:r>
-          </a:p>
-        </p:txBody>
-      </p:sp>
-      <p:sp>
-        <p:nvSpPr>
-          <p:cNvPr id="5" name="TextBox 4"/>
-          <p:cNvSpPr txBox="1"/>
-          <p:nvPr/>
-        </p:nvSpPr>
-        <p:spPr>
-          <a:xfrm>
-            <a:off x="457200" y="6400800"/>
-            <a:ext cx="11430000" cy="365760"/>
-          </a:xfrm>
-          <a:prstGeom prst="rect">
-            <a:avLst/>
-          </a:prstGeom>
-          <a:noFill/>
-        </p:spPr>
-        <p:txBody>
-          <a:bodyPr wrap="none">
-            <a:spAutoFit/>
-          </a:bodyPr>
-          <a:lstStyle/>
-          <a:p>
-            <a:pPr>
-              <a:defRPr sz="1500" i="1">
-                <a:solidFill>
-                  <a:srgbClr val="707682"/>
-                </a:solidFill>
-              </a:defRPr>
-            </a:pPr>
-            <a:r>
-              <a:t>Detalhes em docs/ativo/04_pesquisa_bibliografica/_triagem.md (Rodada 5)</a:t>
+              <a:t>Cada um destes é base de algum baseline ou mecanismo do pipeline.</a:t>
             </a:r>
           </a:p>
         </p:txBody>
@@ -10775,42 +10553,7 @@
               </a:defRPr>
             </a:pPr>
             <a:r>
-              <a:t>Vou expandir para as outras 19 após sua aprovação da v3.2.</a:t>
-            </a:r>
-          </a:p>
-        </p:txBody>
-      </p:sp>
-      <p:sp>
-        <p:nvSpPr>
-          <p:cNvPr id="5" name="TextBox 4"/>
-          <p:cNvSpPr txBox="1"/>
-          <p:nvPr/>
-        </p:nvSpPr>
-        <p:spPr>
-          <a:xfrm>
-            <a:off x="457200" y="6400800"/>
-            <a:ext cx="11430000" cy="365760"/>
-          </a:xfrm>
-          <a:prstGeom prst="rect">
-            <a:avLst/>
-          </a:prstGeom>
-          <a:noFill/>
-        </p:spPr>
-        <p:txBody>
-          <a:bodyPr wrap="none">
-            <a:spAutoFit/>
-          </a:bodyPr>
-          <a:lstStyle/>
-          <a:p>
-            <a:pPr>
-              <a:defRPr sz="1500" i="1">
-                <a:solidFill>
-                  <a:srgbClr val="707682"/>
-                </a:solidFill>
-              </a:defRPr>
-            </a:pPr>
-            <a:r>
-              <a:t>Exemplo concreto: ficha do FSCL (Park 2022) ganhou ~50 linhas de análise crítica</a:t>
+              <a:t>Vou expandir para as outras 19 após sua aprovação da nova versão da tese.</a:t>
             </a:r>
           </a:p>
         </p:txBody>

--- a/docs/ativo/material_reuniao_orientador_v3.2.1.pptx
+++ b/docs/ativo/material_reuniao_orientador_v3.2.1.pptx
@@ -5618,7 +5618,7 @@
               </a:defRPr>
             </a:pPr>
             <a:r>
-              <a:t>Madras et al. (ICML 2018) provaram teoricamente e mostraram empiricamente que, se você treina uma rede para ser justa em uma tarefa A, essa propriedade de ser justa é HERDADA por outras tarefas B que usem a mesma representação como ponto de partida.</a:t>
+              <a:t>Madras et al. (ICML 2018) provaram teoricamente e mostraram empiricamente que, ao treinar uma rede para ser justa em uma tarefa A, essa propriedade de ser justa é HERDADA por outras tarefas B que usem a mesma representação como ponto de partida.</a:t>
             </a:r>
           </a:p>
         </p:txBody>
@@ -5684,7 +5684,7 @@
               </a:defRPr>
             </a:pPr>
             <a:r>
-              <a:t>É o que sustenta a EXTENSÃO da nossa tese para face recognition. Se treinarmos fairness na classificação racial (Cap 2), a propriedade fair se transfere para reconhecimento facial (Cap 3) — não precisa re-treinar do zero. Esta é a demonstração empírica que você pediu.</a:t>
+              <a:t>É o que sustenta a EXTENSÃO da nossa tese para face recognition. Se treinarmos fairness na classificação racial (Cap 2), a propriedade fair se transfere para reconhecimento facial (Cap 3) — não precisa re-treinar do zero. Esta é a demonstração empírica que combinamos.</a:t>
             </a:r>
           </a:p>
         </p:txBody>
@@ -5750,7 +5750,7 @@
               </a:defRPr>
             </a:pPr>
             <a:r>
-              <a:t>Analogia: aprender ética profissional em medicina geral te torna mais ético também quando você se especializa em cardiologia. A propriedade 'ética' não depende da especialidade — está embutida no profissional.</a:t>
+              <a:t>Analogia: aprender ética profissional em medicina geral nos torna mais éticos também quando nos especializamos em cardiologia. A propriedade 'ética' não depende da especialidade — está embutida no profissional.</a:t>
             </a:r>
           </a:p>
         </p:txBody>
@@ -7793,7 +7793,7 @@
                             <a:srgbClr val="3D424E"/>
                           </a:solidFill>
                         </a:rPr>
-                        <a:t>Aprovação da nova versão da tese com você</a:t>
+                        <a:t>Aprovação conjunta da nova versão da tese</a:t>
                       </a:r>
                     </a:p>
                   </a:txBody>
@@ -8628,7 +8628,7 @@
               </a:defRPr>
             </a:pPr>
             <a:r>
-              <a:t>O que preciso decidir nesta reunião</a:t>
+              <a:t>O que precisamos decidir nesta reunião</a:t>
             </a:r>
           </a:p>
         </p:txBody>
@@ -8724,7 +8724,7 @@
               </a:defRPr>
             </a:pPr>
             <a:r>
-              <a:t>Se aprovar, sigo para o detalhamento metodológico.</a:t>
+              <a:t>Se aprovarmos, seguimos para o detalhamento metodológico.</a:t>
             </a:r>
           </a:p>
           <a:p>
@@ -8739,7 +8739,7 @@
               </a:defRPr>
             </a:pPr>
             <a:r>
-              <a:t>Se quiser ajustes, faço e te mostro antes de prosseguir.</a:t>
+              <a:t>Se houver ajustes, fazemos e revisamos juntos antes de prosseguir.</a:t>
             </a:r>
           </a:p>
           <a:p>
@@ -8823,7 +8823,7 @@
               </a:defRPr>
             </a:pPr>
             <a:r>
-              <a:t>Tenho preferência por RFW (mais escala, mais histórico) — mas quero sua opinião.</a:t>
+              <a:t>Temos preferência por RFW (mais escala, mais histórico) — precisamos validar essa escolha juntos.</a:t>
             </a:r>
           </a:p>
           <a:p>
@@ -8865,7 +8865,7 @@
               </a:defRPr>
             </a:pPr>
             <a:r>
-              <a:t>Posso fazer Rodada 6 se necessário, mas o corpus já está consistente.</a:t>
+              <a:t>Podemos fazer Rodada 6 se necessário, mas o corpus já está consistente.</a:t>
             </a:r>
           </a:p>
         </p:txBody>
@@ -9417,7 +9417,7 @@
               </a:defRPr>
             </a:pPr>
             <a:r>
-              <a:t>O que você validou na reunião</a:t>
+              <a:t>O que validamos na última reunião</a:t>
             </a:r>
           </a:p>
         </p:txBody>
@@ -9632,7 +9632,7 @@
               </a:defRPr>
             </a:pPr>
             <a:r>
-              <a:t>Os 4 pedidos que você fez</a:t>
+              <a:t>Os 4 pedidos que combinamos</a:t>
             </a:r>
           </a:p>
         </p:txBody>
@@ -9728,7 +9728,7 @@
               </a:defRPr>
             </a:pPr>
             <a:r>
-              <a:t>Quer enxergar não só o resultado, mas o rigor metodológico</a:t>
+              <a:t>Queremos enxergar não só o resultado, mas o rigor metodológico</a:t>
             </a:r>
           </a:p>
           <a:p>
@@ -9770,7 +9770,7 @@
               </a:defRPr>
             </a:pPr>
             <a:r>
-              <a:t>Sentiu falta de papers fundadores destes campos</a:t>
+              <a:t>Identificamos lacuna de papers fundadores destes campos</a:t>
             </a:r>
           </a:p>
           <a:p>
@@ -10553,7 +10553,7 @@
               </a:defRPr>
             </a:pPr>
             <a:r>
-              <a:t>Vou expandir para as outras 19 após sua aprovação da nova versão da tese.</a:t>
+              <a:t>Vamos expandir para as outras 19 após aprovação conjunta da nova versão da tese.</a:t>
             </a:r>
           </a:p>
         </p:txBody>

--- a/docs/ativo/material_reuniao_orientador_v3.2.1.pptx
+++ b/docs/ativo/material_reuniao_orientador_v3.2.1.pptx
@@ -9498,7 +9498,7 @@
               </a:defRPr>
             </a:pPr>
             <a:r>
-              <a:t>✓  Concordou que a evolução metodológica melhorou significativamente</a:t>
+              <a:t>✓  Concordamos que a evolução metodológica melhorou significativamente</a:t>
             </a:r>
           </a:p>
           <a:p>
@@ -9525,7 +9525,7 @@
               </a:defRPr>
             </a:pPr>
             <a:r>
-              <a:t>✓  Validou que o SOTA encontrado (FaceScanPaliGemma 75.7% F1) é mesmo o atual</a:t>
+              <a:t>✓  Validamos que o SOTA encontrado (FaceScanPaliGemma 75.7% F1) é mesmo o atual</a:t>
             </a:r>
           </a:p>
           <a:p>
@@ -9552,7 +9552,7 @@
               </a:defRPr>
             </a:pPr>
             <a:r>
-              <a:t>✓  Entendeu e validou a linha de pesquisa proposta</a:t>
+              <a:t>✓  Alinhamos e validamos a linha de pesquisa proposta</a:t>
             </a:r>
           </a:p>
           <a:p>

--- a/docs/ativo/material_reuniao_orientador_v3.2.1.pptx
+++ b/docs/ativo/material_reuniao_orientador_v3.2.1.pptx
@@ -3676,7 +3676,7 @@
               </a:defRPr>
             </a:pPr>
             <a:r>
-              <a:t>Nova versão da tese escrita e disponível.</a:t>
+              <a:t>Mudança central: deixa de ‘decompor o erro’ e passa a ‘construir um pipeline’</a:t>
             </a:r>
           </a:p>
           <a:p>
@@ -3690,6 +3690,9 @@
                 </a:solidFill>
               </a:defRPr>
             </a:pPr>
+            <a:r>
+              <a:t>que melhora fairness em race classification E em face recognition,</a:t>
+            </a:r>
           </a:p>
           <a:p>
             <a:pPr>
@@ -3703,7 +3706,7 @@
               </a:defRPr>
             </a:pPr>
             <a:r>
-              <a:t>Mudança central: deixa de ser ‘decompor o erro’ e passa a ser</a:t>
+              <a:t>usando tom de pele como sinal auxiliar.</a:t>
             </a:r>
           </a:p>
           <a:p>
@@ -3717,9 +3720,6 @@
                 </a:solidFill>
               </a:defRPr>
             </a:pPr>
-            <a:r>
-              <a:t>‘construir um pipeline que melhora fairness em race classification</a:t>
-            </a:r>
           </a:p>
           <a:p>
             <a:pPr>
@@ -3733,7 +3733,97 @@
               </a:defRPr>
             </a:pPr>
             <a:r>
-              <a:t>E em face recognition, usando tom de pele como sinal auxiliar’.</a:t>
+              <a:t>Pipeline construtivo em 6 etapas:</a:t>
+            </a:r>
+          </a:p>
+          <a:p>
+            <a:pPr lvl="1">
+              <a:spcAft>
+                <a:spcPts val="800"/>
+              </a:spcAft>
+              <a:defRPr sz="1700">
+                <a:solidFill>
+                  <a:srgbClr val="707682"/>
+                </a:solidFill>
+              </a:defRPr>
+            </a:pPr>
+            <a:r>
+              <a:t>1. Classificador de tom de pele (MST) — usar SkinToneNet pré-treinado</a:t>
+            </a:r>
+          </a:p>
+          <a:p>
+            <a:pPr lvl="1">
+              <a:spcAft>
+                <a:spcPts val="800"/>
+              </a:spcAft>
+              <a:defRPr sz="1700">
+                <a:solidFill>
+                  <a:srgbClr val="707682"/>
+                </a:solidFill>
+              </a:defRPr>
+            </a:pPr>
+            <a:r>
+              <a:t>2. Auditar FairFace e publicar a matriz pública MST × raça</a:t>
+            </a:r>
+          </a:p>
+          <a:p>
+            <a:pPr lvl="1">
+              <a:spcAft>
+                <a:spcPts val="800"/>
+              </a:spcAft>
+              <a:defRPr sz="1700">
+                <a:solidFill>
+                  <a:srgbClr val="707682"/>
+                </a:solidFill>
+              </a:defRPr>
+            </a:pPr>
+            <a:r>
+              <a:t>3. Race classifier com tom de pele como contexto (mecanismo FiLM)</a:t>
+            </a:r>
+          </a:p>
+          <a:p>
+            <a:pPr lvl="1">
+              <a:spcAft>
+                <a:spcPts val="800"/>
+              </a:spcAft>
+              <a:defRPr sz="1700">
+                <a:solidFill>
+                  <a:srgbClr val="707682"/>
+                </a:solidFill>
+              </a:defRPr>
+            </a:pPr>
+            <a:r>
+              <a:t>4. Comparar fairness COM vs SEM tom de pele, contra 6 baselines</a:t>
+            </a:r>
+          </a:p>
+          <a:p>
+            <a:pPr lvl="1">
+              <a:spcAft>
+                <a:spcPts val="800"/>
+              </a:spcAft>
+              <a:defRPr sz="1700">
+                <a:solidFill>
+                  <a:srgbClr val="707682"/>
+                </a:solidFill>
+              </a:defRPr>
+            </a:pPr>
+            <a:r>
+              <a:t>5. Aplicar pipeline a face recognition (RFW ou BFW)</a:t>
+            </a:r>
+          </a:p>
+          <a:p>
+            <a:pPr lvl="1">
+              <a:spcAft>
+                <a:spcPts val="800"/>
+              </a:spcAft>
+              <a:defRPr sz="1700">
+                <a:solidFill>
+                  <a:srgbClr val="707682"/>
+                </a:solidFill>
+              </a:defRPr>
+            </a:pPr>
+            <a:r>
+              <a:t>6. Medir melhora em Black/African e decomposição Latinx</a:t>
             </a:r>
           </a:p>
           <a:p>
@@ -3760,49 +3850,42 @@
               </a:defRPr>
             </a:pPr>
             <a:r>
-              <a:t>Q04 (mitigação) e Q10 (matriz tom × raça) deixam de ser capítulos</a:t>
-            </a:r>
-          </a:p>
-          <a:p>
-            <a:pPr>
-              <a:spcAft>
-                <a:spcPts val="800"/>
-              </a:spcAft>
-              <a:defRPr sz="2000" b="0">
-                <a:solidFill>
-                  <a:srgbClr val="3D424E"/>
-                </a:solidFill>
-              </a:defRPr>
-            </a:pPr>
-            <a:r>
-              <a:t>paralelos e viram pipeline UNIFICADO.</a:t>
-            </a:r>
-          </a:p>
-          <a:p>
-            <a:pPr>
-              <a:spcAft>
-                <a:spcPts val="800"/>
-              </a:spcAft>
-              <a:defRPr sz="2000" b="0">
-                <a:solidFill>
-                  <a:srgbClr val="3D424E"/>
-                </a:solidFill>
-              </a:defRPr>
-            </a:pPr>
-          </a:p>
-          <a:p>
-            <a:pPr>
-              <a:spcAft>
-                <a:spcPts val="800"/>
-              </a:spcAft>
-              <a:defRPr sz="2000" b="0">
-                <a:solidFill>
-                  <a:srgbClr val="3D424E"/>
-                </a:solidFill>
-              </a:defRPr>
-            </a:pPr>
-            <a:r>
-              <a:t>Vou detalhar a nova tese na Parte 3 desta apresentação.</a:t>
+              <a:t>Q04 (mitigação) e Q10 (matriz tom × raça) viram pipeline UNIFICADO.</a:t>
+            </a:r>
+          </a:p>
+        </p:txBody>
+      </p:sp>
+      <p:sp>
+        <p:nvSpPr>
+          <p:cNvPr id="5" name="TextBox 4"/>
+          <p:cNvSpPr txBox="1"/>
+          <p:nvPr/>
+        </p:nvSpPr>
+        <p:spPr>
+          <a:xfrm>
+            <a:off x="457200" y="6400800"/>
+            <a:ext cx="11430000" cy="365760"/>
+          </a:xfrm>
+          <a:prstGeom prst="rect">
+            <a:avLst/>
+          </a:prstGeom>
+          <a:noFill/>
+        </p:spPr>
+        <p:txBody>
+          <a:bodyPr wrap="none">
+            <a:spAutoFit/>
+          </a:bodyPr>
+          <a:lstStyle/>
+          <a:p>
+            <a:pPr>
+              <a:defRPr sz="1500" i="1">
+                <a:solidFill>
+                  <a:srgbClr val="707682"/>
+                </a:solidFill>
+              </a:defRPr>
+            </a:pPr>
+            <a:r>
+              <a:t>Cada etapa será detalhada com conceitos explicados na Parte 3</a:t>
             </a:r>
           </a:p>
         </p:txBody>

--- a/docs/ativo/material_reuniao_orientador_v3.2.1.pptx
+++ b/docs/ativo/material_reuniao_orientador_v3.2.1.pptx
@@ -31,7 +31,6 @@
     <p:sldId id="279" r:id="rId30"/>
     <p:sldId id="280" r:id="rId31"/>
     <p:sldId id="281" r:id="rId32"/>
-    <p:sldId id="282" r:id="rId33"/>
   </p:sldIdLst>
   <p:sldSz cx="12191695" cy="6858000" type="screen4x3"/>
   <p:notesSz cx="6858000" cy="9144000"/>
@@ -3826,68 +3825,6 @@
               <a:t>6. Medir melhora em Black/African e decomposição Latinx</a:t>
             </a:r>
           </a:p>
-          <a:p>
-            <a:pPr>
-              <a:spcAft>
-                <a:spcPts val="800"/>
-              </a:spcAft>
-              <a:defRPr sz="2000" b="0">
-                <a:solidFill>
-                  <a:srgbClr val="3D424E"/>
-                </a:solidFill>
-              </a:defRPr>
-            </a:pPr>
-          </a:p>
-          <a:p>
-            <a:pPr>
-              <a:spcAft>
-                <a:spcPts val="800"/>
-              </a:spcAft>
-              <a:defRPr sz="2000" b="0">
-                <a:solidFill>
-                  <a:srgbClr val="3D424E"/>
-                </a:solidFill>
-              </a:defRPr>
-            </a:pPr>
-            <a:r>
-              <a:t>Q04 (mitigação) e Q10 (matriz tom × raça) viram pipeline UNIFICADO.</a:t>
-            </a:r>
-          </a:p>
-        </p:txBody>
-      </p:sp>
-      <p:sp>
-        <p:nvSpPr>
-          <p:cNvPr id="5" name="TextBox 4"/>
-          <p:cNvSpPr txBox="1"/>
-          <p:nvPr/>
-        </p:nvSpPr>
-        <p:spPr>
-          <a:xfrm>
-            <a:off x="457200" y="6400800"/>
-            <a:ext cx="11430000" cy="365760"/>
-          </a:xfrm>
-          <a:prstGeom prst="rect">
-            <a:avLst/>
-          </a:prstGeom>
-          <a:noFill/>
-        </p:spPr>
-        <p:txBody>
-          <a:bodyPr wrap="none">
-            <a:spAutoFit/>
-          </a:bodyPr>
-          <a:lstStyle/>
-          <a:p>
-            <a:pPr>
-              <a:defRPr sz="1500" i="1">
-                <a:solidFill>
-                  <a:srgbClr val="707682"/>
-                </a:solidFill>
-              </a:defRPr>
-            </a:pPr>
-            <a:r>
-              <a:t>Cada etapa será detalhada com conceitos explicados na Parte 3</a:t>
-            </a:r>
-          </a:p>
         </p:txBody>
       </p:sp>
     </p:spTree>
@@ -4130,33 +4067,6 @@
               <a:t>✓  Cobertura temporal: 1972 a 2026 (54 anos de literatura, mediana 2020–2021)</a:t>
             </a:r>
           </a:p>
-          <a:p>
-            <a:pPr>
-              <a:spcAft>
-                <a:spcPts val="800"/>
-              </a:spcAft>
-              <a:defRPr sz="2000" b="0">
-                <a:solidFill>
-                  <a:srgbClr val="3D424E"/>
-                </a:solidFill>
-              </a:defRPr>
-            </a:pPr>
-          </a:p>
-          <a:p>
-            <a:pPr>
-              <a:spcAft>
-                <a:spcPts val="800"/>
-              </a:spcAft>
-              <a:defRPr sz="2000" b="0">
-                <a:solidFill>
-                  <a:srgbClr val="3D424E"/>
-                </a:solidFill>
-              </a:defRPr>
-            </a:pPr>
-            <a:r>
-              <a:t>✓  Autoria verificada em fonte primária: 29 de 29 (100%)</a:t>
-            </a:r>
-          </a:p>
         </p:txBody>
       </p:sp>
     </p:spTree>
@@ -4462,7 +4372,7 @@
               </a:defRPr>
             </a:pPr>
             <a:r>
-              <a:t>Comparação: antes (semana passada) vs agora</a:t>
+              <a:t>O que é a escala MST (Monk Skin Tone)?</a:t>
             </a:r>
           </a:p>
         </p:txBody>
@@ -4510,432 +4420,211 @@
           </a:p>
         </p:txBody>
       </p:sp>
-      <p:graphicFrame>
-        <p:nvGraphicFramePr>
-          <p:cNvPr id="4" name="Table 3"/>
-          <p:cNvGraphicFramePr>
-            <a:graphicFrameLocks noGrp="1"/>
-          </p:cNvGraphicFramePr>
+      <p:sp>
+        <p:nvSpPr>
+          <p:cNvPr id="4" name="Rounded Rectangle 3"/>
+          <p:cNvSpPr/>
           <p:nvPr/>
-        </p:nvGraphicFramePr>
-        <p:xfrm>
-          <a:off x="457200" y="1371600"/>
-          <a:ext cx="11430000" cy="4937760"/>
-        </p:xfrm>
-        <a:graphic>
-          <a:graphicData uri="http://schemas.openxmlformats.org/drawingml/2006/table">
-            <a:tbl>
-              <a:tblPr firstRow="1" bandRow="1">
-                <a:tableStyleId>{5C22544A-7EE6-4342-B048-85BDC9FD1C3A}</a:tableStyleId>
-              </a:tblPr>
-              <a:tblGrid>
-                <a:gridCol w="3810000"/>
-                <a:gridCol w="3810000"/>
-                <a:gridCol w="3810000"/>
-              </a:tblGrid>
-              <a:tr h="822960">
-                <a:tc>
-                  <a:txBody>
-                    <a:bodyPr/>
-                    <a:lstStyle/>
-                    <a:p>
-                      <a:r>
-                        <a:rPr b="1" sz="1600">
-                          <a:solidFill>
-                            <a:srgbClr val="FFFFFF"/>
-                          </a:solidFill>
-                        </a:rPr>
-                        <a:t>Dimensão</a:t>
-                      </a:r>
-                    </a:p>
-                  </a:txBody>
-                  <a:tcPr>
-                    <a:solidFill>
-                      <a:srgbClr val="1F2A4E"/>
-                    </a:solidFill>
-                  </a:tcPr>
-                </a:tc>
-                <a:tc>
-                  <a:txBody>
-                    <a:bodyPr/>
-                    <a:lstStyle/>
-                    <a:p>
-                      <a:r>
-                        <a:rPr b="1" sz="1600">
-                          <a:solidFill>
-                            <a:srgbClr val="FFFFFF"/>
-                          </a:solidFill>
-                        </a:rPr>
-                        <a:t>Antes (diagnóstica)</a:t>
-                      </a:r>
-                    </a:p>
-                  </a:txBody>
-                  <a:tcPr>
-                    <a:solidFill>
-                      <a:srgbClr val="1F2A4E"/>
-                    </a:solidFill>
-                  </a:tcPr>
-                </a:tc>
-                <a:tc>
-                  <a:txBody>
-                    <a:bodyPr/>
-                    <a:lstStyle/>
-                    <a:p>
-                      <a:r>
-                        <a:rPr b="1" sz="1600">
-                          <a:solidFill>
-                            <a:srgbClr val="FFFFFF"/>
-                          </a:solidFill>
-                        </a:rPr>
-                        <a:t>Agora (prescritiva)</a:t>
-                      </a:r>
-                    </a:p>
-                  </a:txBody>
-                  <a:tcPr>
-                    <a:solidFill>
-                      <a:srgbClr val="1F2A4E"/>
-                    </a:solidFill>
-                  </a:tcPr>
-                </a:tc>
-              </a:tr>
-              <a:tr h="822960">
-                <a:tc>
-                  <a:txBody>
-                    <a:bodyPr/>
-                    <a:lstStyle/>
-                    <a:p>
-                      <a:r>
-                        <a:rPr sz="1500">
-                          <a:solidFill>
-                            <a:srgbClr val="3D424E"/>
-                          </a:solidFill>
-                        </a:rPr>
-                        <a:t>Postura</a:t>
-                      </a:r>
-                    </a:p>
-                  </a:txBody>
-                  <a:tcPr>
-                    <a:solidFill>
-                      <a:srgbClr val="FFFFFF"/>
-                    </a:solidFill>
-                  </a:tcPr>
-                </a:tc>
-                <a:tc>
-                  <a:txBody>
-                    <a:bodyPr/>
-                    <a:lstStyle/>
-                    <a:p>
-                      <a:r>
-                        <a:rPr sz="1500">
-                          <a:solidFill>
-                            <a:srgbClr val="3D424E"/>
-                          </a:solidFill>
-                        </a:rPr>
-                        <a:t>Explicar por que o erro existe</a:t>
-                      </a:r>
-                    </a:p>
-                  </a:txBody>
-                  <a:tcPr>
-                    <a:solidFill>
-                      <a:srgbClr val="FFFFFF"/>
-                    </a:solidFill>
-                  </a:tcPr>
-                </a:tc>
-                <a:tc>
-                  <a:txBody>
-                    <a:bodyPr/>
-                    <a:lstStyle/>
-                    <a:p>
-                      <a:r>
-                        <a:rPr sz="1500">
-                          <a:solidFill>
-                            <a:srgbClr val="3D424E"/>
-                          </a:solidFill>
-                        </a:rPr>
-                        <a:t>Construir um pipeline que reduz o erro</a:t>
-                      </a:r>
-                    </a:p>
-                  </a:txBody>
-                  <a:tcPr>
-                    <a:solidFill>
-                      <a:srgbClr val="FFFFFF"/>
-                    </a:solidFill>
-                  </a:tcPr>
-                </a:tc>
-              </a:tr>
-              <a:tr h="822960">
-                <a:tc>
-                  <a:txBody>
-                    <a:bodyPr/>
-                    <a:lstStyle/>
-                    <a:p>
-                      <a:r>
-                        <a:rPr sz="1500">
-                          <a:solidFill>
-                            <a:srgbClr val="3D424E"/>
-                          </a:solidFill>
-                        </a:rPr>
-                        <a:t>Saída prática</a:t>
-                      </a:r>
-                    </a:p>
-                  </a:txBody>
-                  <a:tcPr>
-                    <a:solidFill>
-                      <a:srgbClr val="E8EAED"/>
-                    </a:solidFill>
-                  </a:tcPr>
-                </a:tc>
-                <a:tc>
-                  <a:txBody>
-                    <a:bodyPr/>
-                    <a:lstStyle/>
-                    <a:p>
-                      <a:r>
-                        <a:rPr sz="1500">
-                          <a:solidFill>
-                            <a:srgbClr val="3D424E"/>
-                          </a:solidFill>
-                        </a:rPr>
-                        <a:t>Análise post-hoc</a:t>
-                      </a:r>
-                    </a:p>
-                  </a:txBody>
-                  <a:tcPr>
-                    <a:solidFill>
-                      <a:srgbClr val="E8EAED"/>
-                    </a:solidFill>
-                  </a:tcPr>
-                </a:tc>
-                <a:tc>
-                  <a:txBody>
-                    <a:bodyPr/>
-                    <a:lstStyle/>
-                    <a:p>
-                      <a:r>
-                        <a:rPr sz="1500">
-                          <a:solidFill>
-                            <a:srgbClr val="3D424E"/>
-                          </a:solidFill>
-                        </a:rPr>
-                        <a:t>Modelo treinado deployável</a:t>
-                      </a:r>
-                    </a:p>
-                  </a:txBody>
-                  <a:tcPr>
-                    <a:solidFill>
-                      <a:srgbClr val="E8EAED"/>
-                    </a:solidFill>
-                  </a:tcPr>
-                </a:tc>
-              </a:tr>
-              <a:tr h="822960">
-                <a:tc>
-                  <a:txBody>
-                    <a:bodyPr/>
-                    <a:lstStyle/>
-                    <a:p>
-                      <a:r>
-                        <a:rPr sz="1500">
-                          <a:solidFill>
-                            <a:srgbClr val="3D424E"/>
-                          </a:solidFill>
-                        </a:rPr>
-                        <a:t>Tarefa</a:t>
-                      </a:r>
-                    </a:p>
-                  </a:txBody>
-                  <a:tcPr>
-                    <a:solidFill>
-                      <a:srgbClr val="FFFFFF"/>
-                    </a:solidFill>
-                  </a:tcPr>
-                </a:tc>
-                <a:tc>
-                  <a:txBody>
-                    <a:bodyPr/>
-                    <a:lstStyle/>
-                    <a:p>
-                      <a:r>
-                        <a:rPr sz="1500">
-                          <a:solidFill>
-                            <a:srgbClr val="3D424E"/>
-                          </a:solidFill>
-                        </a:rPr>
-                        <a:t>Apenas classification</a:t>
-                      </a:r>
-                    </a:p>
-                  </a:txBody>
-                  <a:tcPr>
-                    <a:solidFill>
-                      <a:srgbClr val="FFFFFF"/>
-                    </a:solidFill>
-                  </a:tcPr>
-                </a:tc>
-                <a:tc>
-                  <a:txBody>
-                    <a:bodyPr/>
-                    <a:lstStyle/>
-                    <a:p>
-                      <a:r>
-                        <a:rPr sz="1500">
-                          <a:solidFill>
-                            <a:srgbClr val="3D424E"/>
-                          </a:solidFill>
-                        </a:rPr>
-                        <a:t>Classification + Face recognition</a:t>
-                      </a:r>
-                    </a:p>
-                  </a:txBody>
-                  <a:tcPr>
-                    <a:solidFill>
-                      <a:srgbClr val="FFFFFF"/>
-                    </a:solidFill>
-                  </a:tcPr>
-                </a:tc>
-              </a:tr>
-              <a:tr h="822960">
-                <a:tc>
-                  <a:txBody>
-                    <a:bodyPr/>
-                    <a:lstStyle/>
-                    <a:p>
-                      <a:r>
-                        <a:rPr sz="1500">
-                          <a:solidFill>
-                            <a:srgbClr val="3D424E"/>
-                          </a:solidFill>
-                        </a:rPr>
-                        <a:t>Q04 e Q10</a:t>
-                      </a:r>
-                    </a:p>
-                  </a:txBody>
-                  <a:tcPr>
-                    <a:solidFill>
-                      <a:srgbClr val="E8EAED"/>
-                    </a:solidFill>
-                  </a:tcPr>
-                </a:tc>
-                <a:tc>
-                  <a:txBody>
-                    <a:bodyPr/>
-                    <a:lstStyle/>
-                    <a:p>
-                      <a:r>
-                        <a:rPr sz="1500">
-                          <a:solidFill>
-                            <a:srgbClr val="3D424E"/>
-                          </a:solidFill>
-                        </a:rPr>
-                        <a:t>Capítulos paralelos</a:t>
-                      </a:r>
-                    </a:p>
-                  </a:txBody>
-                  <a:tcPr>
-                    <a:solidFill>
-                      <a:srgbClr val="E8EAED"/>
-                    </a:solidFill>
-                  </a:tcPr>
-                </a:tc>
-                <a:tc>
-                  <a:txBody>
-                    <a:bodyPr/>
-                    <a:lstStyle/>
-                    <a:p>
-                      <a:r>
-                        <a:rPr sz="1500">
-                          <a:solidFill>
-                            <a:srgbClr val="3D424E"/>
-                          </a:solidFill>
-                        </a:rPr>
-                        <a:t>Pipeline unificado</a:t>
-                      </a:r>
-                    </a:p>
-                  </a:txBody>
-                  <a:tcPr>
-                    <a:solidFill>
-                      <a:srgbClr val="E8EAED"/>
-                    </a:solidFill>
-                  </a:tcPr>
-                </a:tc>
-              </a:tr>
-              <a:tr h="822960">
-                <a:tc>
-                  <a:txBody>
-                    <a:bodyPr/>
-                    <a:lstStyle/>
-                    <a:p>
-                      <a:r>
-                        <a:rPr sz="1500">
-                          <a:solidFill>
-                            <a:srgbClr val="3D424E"/>
-                          </a:solidFill>
-                        </a:rPr>
-                        <a:t>Critério de sucesso</a:t>
-                      </a:r>
-                    </a:p>
-                  </a:txBody>
-                  <a:tcPr>
-                    <a:solidFill>
-                      <a:srgbClr val="FFFFFF"/>
-                    </a:solidFill>
-                  </a:tcPr>
-                </a:tc>
-                <a:tc>
-                  <a:txBody>
-                    <a:bodyPr/>
-                    <a:lstStyle/>
-                    <a:p>
-                      <a:r>
-                        <a:rPr sz="1500">
-                          <a:solidFill>
-                            <a:srgbClr val="3D424E"/>
-                          </a:solidFill>
-                        </a:rPr>
-                        <a:t>Decomposição irredutível vs redutível</a:t>
-                      </a:r>
-                    </a:p>
-                  </a:txBody>
-                  <a:tcPr>
-                    <a:solidFill>
-                      <a:srgbClr val="FFFFFF"/>
-                    </a:solidFill>
-                  </a:tcPr>
-                </a:tc>
-                <a:tc>
-                  <a:txBody>
-                    <a:bodyPr/>
-                    <a:lstStyle/>
-                    <a:p>
-                      <a:r>
-                        <a:rPr sz="1500">
-                          <a:solidFill>
-                            <a:srgbClr val="3D424E"/>
-                          </a:solidFill>
-                        </a:rPr>
-                        <a:t>Melhora mensurável em métricas concretas</a:t>
-                      </a:r>
-                    </a:p>
-                  </a:txBody>
-                  <a:tcPr>
-                    <a:solidFill>
-                      <a:srgbClr val="FFFFFF"/>
-                    </a:solidFill>
-                  </a:tcPr>
-                </a:tc>
-              </a:tr>
-            </a:tbl>
-          </a:graphicData>
-        </a:graphic>
-      </p:graphicFrame>
-      <p:sp>
-        <p:nvSpPr>
-          <p:cNvPr id="5" name="TextBox 4"/>
+        </p:nvSpPr>
+        <p:spPr>
+          <a:xfrm>
+            <a:off x="548640" y="1463040"/>
+            <a:ext cx="11064240" cy="1554480"/>
+          </a:xfrm>
+          <a:prstGeom prst="roundRect">
+            <a:avLst/>
+          </a:prstGeom>
+          <a:solidFill>
+            <a:srgbClr val="E8EAED"/>
+          </a:solidFill>
+          <a:ln>
+            <a:noFill/>
+          </a:ln>
+        </p:spPr>
+        <p:style>
+          <a:lnRef idx="1">
+            <a:schemeClr val="accent1"/>
+          </a:lnRef>
+          <a:fillRef idx="3">
+            <a:schemeClr val="accent1"/>
+          </a:fillRef>
+          <a:effectRef idx="2">
+            <a:schemeClr val="accent1"/>
+          </a:effectRef>
+          <a:fontRef idx="minor">
+            <a:schemeClr val="lt1"/>
+          </a:fontRef>
+        </p:style>
+        <p:txBody>
+          <a:bodyPr rtlCol="0" anchor="ctr" wrap="square" lIns="274320" rIns="274320" tIns="137160"/>
+          <a:lstStyle/>
+          <a:p>
+            <a:pPr algn="ctr">
+              <a:defRPr sz="1500" b="1">
+                <a:solidFill>
+                  <a:srgbClr val="1F2A4E"/>
+                </a:solidFill>
+              </a:defRPr>
+            </a:pPr>
+            <a:r>
+              <a:t>Em palavras simples</a:t>
+            </a:r>
+          </a:p>
+          <a:p>
+            <a:pPr>
+              <a:defRPr sz="1800">
+                <a:solidFill>
+                  <a:srgbClr val="3D424E"/>
+                </a:solidFill>
+              </a:defRPr>
+            </a:pPr>
+            <a:r>
+              <a:t>Uma escala de 10 tons de pele (do tom 1 mais claro ao tom 10 mais escuro), criada em 2023 pelo sociólogo Dr. Ellis Monk (Harvard) em parceria com o Google. Foi desenhada especificamente para auditar fairness em sistemas de IA — não é a escala antiga de dermatologia (Fitzpatrick), que tem viés para pele clara.</a:t>
+            </a:r>
+          </a:p>
+        </p:txBody>
+      </p:sp>
+      <p:sp>
+        <p:nvSpPr>
+          <p:cNvPr id="5" name="Rounded Rectangle 4"/>
+          <p:cNvSpPr/>
+          <p:nvPr/>
+        </p:nvSpPr>
+        <p:spPr>
+          <a:xfrm>
+            <a:off x="548640" y="3200400"/>
+            <a:ext cx="11064240" cy="1554480"/>
+          </a:xfrm>
+          <a:prstGeom prst="roundRect">
+            <a:avLst/>
+          </a:prstGeom>
+          <a:solidFill>
+            <a:srgbClr val="FFFFFF"/>
+          </a:solidFill>
+          <a:ln w="12700">
+            <a:solidFill>
+              <a:srgbClr val="1F2A4E"/>
+            </a:solidFill>
+          </a:ln>
+        </p:spPr>
+        <p:style>
+          <a:lnRef idx="1">
+            <a:schemeClr val="accent1"/>
+          </a:lnRef>
+          <a:fillRef idx="3">
+            <a:schemeClr val="accent1"/>
+          </a:fillRef>
+          <a:effectRef idx="2">
+            <a:schemeClr val="accent1"/>
+          </a:effectRef>
+          <a:fontRef idx="minor">
+            <a:schemeClr val="lt1"/>
+          </a:fontRef>
+        </p:style>
+        <p:txBody>
+          <a:bodyPr rtlCol="0" anchor="ctr" wrap="square" lIns="274320" rIns="274320" tIns="137160"/>
+          <a:lstStyle/>
+          <a:p>
+            <a:pPr algn="ctr">
+              <a:defRPr sz="1500" b="1">
+                <a:solidFill>
+                  <a:srgbClr val="1F2A4E"/>
+                </a:solidFill>
+              </a:defRPr>
+            </a:pPr>
+            <a:r>
+              <a:t>Por que importa para a tese</a:t>
+            </a:r>
+          </a:p>
+          <a:p>
+            <a:pPr>
+              <a:defRPr sz="1800">
+                <a:solidFill>
+                  <a:srgbClr val="3D424E"/>
+                </a:solidFill>
+              </a:defRPr>
+            </a:pPr>
+            <a:r>
+              <a:t>Nossa tese precisa medir tom de pele de forma confiável e granular. MST é o padrão moderno aceito pela comunidade de fairness research (publicado em NeurIPS 2023). Substituir a Fitzpatrick pela MST evita 3 problemas conhecidos da escala antiga.</a:t>
+            </a:r>
+          </a:p>
+        </p:txBody>
+      </p:sp>
+      <p:sp>
+        <p:nvSpPr>
+          <p:cNvPr id="6" name="Rounded Rectangle 5"/>
+          <p:cNvSpPr/>
+          <p:nvPr/>
+        </p:nvSpPr>
+        <p:spPr>
+          <a:xfrm>
+            <a:off x="548640" y="4937760"/>
+            <a:ext cx="11064240" cy="1463040"/>
+          </a:xfrm>
+          <a:prstGeom prst="roundRect">
+            <a:avLst/>
+          </a:prstGeom>
+          <a:solidFill>
+            <a:srgbClr val="FFFFFF"/>
+          </a:solidFill>
+          <a:ln w="12700">
+            <a:solidFill>
+              <a:srgbClr val="2E7D32"/>
+            </a:solidFill>
+          </a:ln>
+        </p:spPr>
+        <p:style>
+          <a:lnRef idx="1">
+            <a:schemeClr val="accent1"/>
+          </a:lnRef>
+          <a:fillRef idx="3">
+            <a:schemeClr val="accent1"/>
+          </a:fillRef>
+          <a:effectRef idx="2">
+            <a:schemeClr val="accent1"/>
+          </a:effectRef>
+          <a:fontRef idx="minor">
+            <a:schemeClr val="lt1"/>
+          </a:fontRef>
+        </p:style>
+        <p:txBody>
+          <a:bodyPr rtlCol="0" anchor="ctr" wrap="square" lIns="274320" rIns="274320" tIns="137160"/>
+          <a:lstStyle/>
+          <a:p>
+            <a:pPr algn="ctr">
+              <a:defRPr sz="1500" b="1">
+                <a:solidFill>
+                  <a:srgbClr val="2E7D32"/>
+                </a:solidFill>
+              </a:defRPr>
+            </a:pPr>
+            <a:r>
+              <a:t>Exemplo concreto</a:t>
+            </a:r>
+          </a:p>
+          <a:p>
+            <a:pPr>
+              <a:defRPr sz="1700">
+                <a:solidFill>
+                  <a:srgbClr val="3D424E"/>
+                </a:solidFill>
+              </a:defRPr>
+            </a:pPr>
+            <a:r>
+              <a:t>A Fitzpatrick (1975) tem só 6 tons, sendo 3 deles para variações de 'pele considerada branca'. Um terço dos próprios dermatologistas confunde Fitzpatrick com classificação racial — erro categorial endêmico.</a:t>
+            </a:r>
+          </a:p>
+        </p:txBody>
+      </p:sp>
+      <p:sp>
+        <p:nvSpPr>
+          <p:cNvPr id="7" name="TextBox 6"/>
           <p:cNvSpPr txBox="1"/>
           <p:nvPr/>
         </p:nvSpPr>
         <p:spPr>
           <a:xfrm>
-            <a:off x="457200" y="6400800"/>
+            <a:off x="457200" y="6446520"/>
             <a:ext cx="11430000" cy="365760"/>
           </a:xfrm>
           <a:prstGeom prst="rect">
@@ -4950,14 +4639,14 @@
           <a:lstStyle/>
           <a:p>
             <a:pPr>
-              <a:defRPr sz="1500" i="1">
+              <a:defRPr sz="1400" i="1">
                 <a:solidFill>
                   <a:srgbClr val="707682"/>
                 </a:solidFill>
               </a:defRPr>
             </a:pPr>
             <a:r>
-              <a:t>Aprovação da nova versão é o item principal desta reunião</a:t>
+              <a:t>Classificador MST pré-treinado validado pela Rodada 6 (SkinToneNet, Pereira 2026)</a:t>
             </a:r>
           </a:p>
         </p:txBody>
@@ -5010,7 +4699,7 @@
               </a:defRPr>
             </a:pPr>
             <a:r>
-              <a:t>O que é a escala MST (Monk Skin Tone)?</a:t>
+              <a:t>O que é FiLM (Feature-wise Linear Modulation)?</a:t>
             </a:r>
           </a:p>
         </p:txBody>
@@ -5117,7 +4806,7 @@
               </a:defRPr>
             </a:pPr>
             <a:r>
-              <a:t>Uma escala de 10 tons de pele (do tom 1 mais claro ao tom 10 mais escuro), criada em 2023 pelo sociólogo Dr. Ellis Monk (Harvard) em parceria com o Google. Foi desenhada especificamente para auditar fairness em sistemas de IA — não é a escala antiga de dermatologia (Fitzpatrick), que tem viés para pele clara.</a:t>
+              <a:t>Uma técnica de redes neurais (Perez et al., AAAI 2018) que permite uma rede ‘consultar’ uma fonte de contexto extra ao tomar decisões. Tecnicamente: ela modula as features intermediárias por uma transformação aprendida a partir do contexto. Não muda a arquitetura — é uma camada que se adiciona.</a:t>
             </a:r>
           </a:p>
         </p:txBody>
@@ -5183,7 +4872,7 @@
               </a:defRPr>
             </a:pPr>
             <a:r>
-              <a:t>Nossa tese precisa medir tom de pele de forma confiável e granular. MST é o padrão moderno aceito pela comunidade de fairness research (publicado em NeurIPS 2023). Substituir a Fitzpatrick pela MST evita 3 problemas conhecidos da escala antiga.</a:t>
+              <a:t>É o mecanismo formal que torna nossa proposta operacional. Sem FiLM, a ideia 'usar tom de pele como contexto' seria vaga. Com FiLM, é matemática e código concreto. Custo computacional: menos de 1% sobre o backbone.</a:t>
             </a:r>
           </a:p>
         </p:txBody>
@@ -5249,7 +4938,7 @@
               </a:defRPr>
             </a:pPr>
             <a:r>
-              <a:t>A Fitzpatrick (1975) tem só 6 tons, sendo 3 deles para variações de 'pele considerada branca'. Um terço dos próprios dermatologistas confunde Fitzpatrick com classificação racial — erro categorial endêmico.</a:t>
+              <a:t>Analogia: imagine um médico fazendo diagnóstico. Antes de decidir, ele consulta o exame complementar (ECG, raio-X). FiLM faz isso para a rede de raça: antes de decidir, ela 'consulta' a rede de tom de pele.</a:t>
             </a:r>
           </a:p>
         </p:txBody>
@@ -5302,7 +4991,7 @@
               </a:defRPr>
             </a:pPr>
             <a:r>
-              <a:t>O que é FiLM (Feature-wise Linear Modulation)?</a:t>
+              <a:t>O que é fair transferência (LAFTR)?</a:t>
             </a:r>
           </a:p>
         </p:txBody>
@@ -5409,7 +5098,7 @@
               </a:defRPr>
             </a:pPr>
             <a:r>
-              <a:t>Uma técnica de redes neurais (Perez et al., AAAI 2018) que permite uma rede ‘consultar’ uma fonte de contexto extra ao tomar decisões. Tecnicamente: ela modula as features intermediárias por uma transformação aprendida a partir do contexto. Não muda a arquitetura — é uma camada que se adiciona.</a:t>
+              <a:t>Madras et al. (ICML 2018) provaram teoricamente e mostraram empiricamente que, ao treinar uma rede para ser justa em uma tarefa A, essa propriedade de ser justa é HERDADA por outras tarefas B que usem a mesma representação como ponto de partida.</a:t>
             </a:r>
           </a:p>
         </p:txBody>
@@ -5475,7 +5164,7 @@
               </a:defRPr>
             </a:pPr>
             <a:r>
-              <a:t>É o mecanismo formal que torna nossa proposta operacional. Sem FiLM, a ideia 'usar tom de pele como contexto' seria vaga. Com FiLM, é matemática e código concreto. Custo computacional: menos de 1% sobre o backbone.</a:t>
+              <a:t>É o que sustenta a EXTENSÃO da nossa tese para face recognition. Se treinarmos fairness na classificação racial (Cap 2), a propriedade fair se transfere para reconhecimento facial (Cap 3) — não precisa re-treinar do zero. Esta é a demonstração empírica que combinamos.</a:t>
             </a:r>
           </a:p>
         </p:txBody>
@@ -5541,7 +5230,42 @@
               </a:defRPr>
             </a:pPr>
             <a:r>
-              <a:t>Analogia: imagine um médico fazendo diagnóstico. Antes de decidir, ele consulta o exame complementar (ECG, raio-X). FiLM faz isso para a rede de raça: antes de decidir, ela 'consulta' a rede de tom de pele.</a:t>
+              <a:t>Analogia: aprender ética profissional em medicina geral nos torna mais éticos também quando nos especializamos em cardiologia. A propriedade 'ética' não depende da especialidade — está embutida no profissional.</a:t>
+            </a:r>
+          </a:p>
+        </p:txBody>
+      </p:sp>
+      <p:sp>
+        <p:nvSpPr>
+          <p:cNvPr id="7" name="TextBox 6"/>
+          <p:cNvSpPr txBox="1"/>
+          <p:nvPr/>
+        </p:nvSpPr>
+        <p:spPr>
+          <a:xfrm>
+            <a:off x="457200" y="6446520"/>
+            <a:ext cx="11430000" cy="365760"/>
+          </a:xfrm>
+          <a:prstGeom prst="rect">
+            <a:avLst/>
+          </a:prstGeom>
+          <a:noFill/>
+        </p:spPr>
+        <p:txBody>
+          <a:bodyPr wrap="none">
+            <a:spAutoFit/>
+          </a:bodyPr>
+          <a:lstStyle/>
+          <a:p>
+            <a:pPr>
+              <a:defRPr sz="1400" i="1">
+                <a:solidFill>
+                  <a:srgbClr val="707682"/>
+                </a:solidFill>
+              </a:defRPr>
+            </a:pPr>
+            <a:r>
+              <a:t>Reforço empírico via Aguirre &amp; Dredze 2023 (Rodada 6) — fair transfer em multi-task confirmado</a:t>
             </a:r>
           </a:p>
         </p:txBody>
@@ -5581,7 +5305,7 @@
           <a:noFill/>
         </p:spPr>
         <p:txBody>
-          <a:bodyPr wrap="none">
+          <a:bodyPr wrap="square">
             <a:spAutoFit/>
           </a:bodyPr>
           <a:lstStyle/>
@@ -5594,7 +5318,7 @@
               </a:defRPr>
             </a:pPr>
             <a:r>
-              <a:t>O que é fair transferência (LAFTR)?</a:t>
+              <a:t>O pipeline em 6 etapas</a:t>
             </a:r>
           </a:p>
         </p:txBody>
@@ -5644,196 +5368,238 @@
       </p:sp>
       <p:sp>
         <p:nvSpPr>
-          <p:cNvPr id="4" name="Rounded Rectangle 3"/>
-          <p:cNvSpPr/>
+          <p:cNvPr id="4" name="TextBox 3"/>
+          <p:cNvSpPr txBox="1"/>
           <p:nvPr/>
         </p:nvSpPr>
         <p:spPr>
           <a:xfrm>
-            <a:off x="548640" y="1463040"/>
-            <a:ext cx="11064240" cy="1554480"/>
-          </a:xfrm>
-          <a:prstGeom prst="roundRect">
+            <a:off x="548640" y="1371600"/>
+            <a:ext cx="11247120" cy="4937760"/>
+          </a:xfrm>
+          <a:prstGeom prst="rect">
             <a:avLst/>
           </a:prstGeom>
-          <a:solidFill>
-            <a:srgbClr val="E8EAED"/>
-          </a:solidFill>
-          <a:ln>
-            <a:noFill/>
-          </a:ln>
-        </p:spPr>
-        <p:style>
-          <a:lnRef idx="1">
-            <a:schemeClr val="accent1"/>
-          </a:lnRef>
-          <a:fillRef idx="3">
-            <a:schemeClr val="accent1"/>
-          </a:fillRef>
-          <a:effectRef idx="2">
-            <a:schemeClr val="accent1"/>
-          </a:effectRef>
-          <a:fontRef idx="minor">
-            <a:schemeClr val="lt1"/>
-          </a:fontRef>
-        </p:style>
-        <p:txBody>
-          <a:bodyPr rtlCol="0" anchor="ctr" wrap="square" lIns="274320" rIns="274320" tIns="137160"/>
-          <a:lstStyle/>
-          <a:p>
-            <a:pPr algn="ctr">
-              <a:defRPr sz="1500" b="1">
-                <a:solidFill>
-                  <a:srgbClr val="1F2A4E"/>
-                </a:solidFill>
-              </a:defRPr>
-            </a:pPr>
-            <a:r>
-              <a:t>Em palavras simples</a:t>
-            </a:r>
-          </a:p>
-          <a:p>
-            <a:pPr>
-              <a:defRPr sz="1800">
-                <a:solidFill>
-                  <a:srgbClr val="3D424E"/>
-                </a:solidFill>
-              </a:defRPr>
-            </a:pPr>
-            <a:r>
-              <a:t>Madras et al. (ICML 2018) provaram teoricamente e mostraram empiricamente que, ao treinar uma rede para ser justa em uma tarefa A, essa propriedade de ser justa é HERDADA por outras tarefas B que usem a mesma representação como ponto de partida.</a:t>
-            </a:r>
-          </a:p>
-        </p:txBody>
-      </p:sp>
-      <p:sp>
-        <p:nvSpPr>
-          <p:cNvPr id="5" name="Rounded Rectangle 4"/>
-          <p:cNvSpPr/>
+          <a:noFill/>
+        </p:spPr>
+        <p:txBody>
+          <a:bodyPr wrap="square">
+            <a:spAutoFit/>
+          </a:bodyPr>
+          <a:lstStyle/>
+          <a:p>
+            <a:pPr>
+              <a:spcAft>
+                <a:spcPts val="800"/>
+              </a:spcAft>
+              <a:defRPr sz="2000" b="0">
+                <a:solidFill>
+                  <a:srgbClr val="3D424E"/>
+                </a:solidFill>
+              </a:defRPr>
+            </a:pPr>
+            <a:r>
+              <a:t>Etapa 1 — Treinar um classificador de tom de pele (MST)</a:t>
+            </a:r>
+          </a:p>
+          <a:p>
+            <a:pPr lvl="1">
+              <a:spcAft>
+                <a:spcPts val="800"/>
+              </a:spcAft>
+              <a:defRPr sz="1700">
+                <a:solidFill>
+                  <a:srgbClr val="707682"/>
+                </a:solidFill>
+              </a:defRPr>
+            </a:pPr>
+            <a:r>
+              <a:t>Dados: MST-E (Schumann 2023) + Casual Conversations (Meta 2021)</a:t>
+            </a:r>
+          </a:p>
+          <a:p>
+            <a:pPr>
+              <a:spcAft>
+                <a:spcPts val="800"/>
+              </a:spcAft>
+              <a:defRPr sz="2000" b="0">
+                <a:solidFill>
+                  <a:srgbClr val="3D424E"/>
+                </a:solidFill>
+              </a:defRPr>
+            </a:pPr>
+            <a:r>
+              <a:t>Etapa 2 — Auditar o FairFace: como tom de pele se distribui entre as 7 raças?</a:t>
+            </a:r>
+          </a:p>
+          <a:p>
+            <a:pPr lvl="1">
+              <a:spcAft>
+                <a:spcPts val="800"/>
+              </a:spcAft>
+              <a:defRPr sz="1700">
+                <a:solidFill>
+                  <a:srgbClr val="707682"/>
+                </a:solidFill>
+              </a:defRPr>
+            </a:pPr>
+            <a:r>
+              <a:t>Aplicar o classificador MST sobre 10.954 imagens; validar manualmente um subset</a:t>
+            </a:r>
+          </a:p>
+          <a:p>
+            <a:pPr>
+              <a:spcAft>
+                <a:spcPts val="800"/>
+              </a:spcAft>
+              <a:defRPr sz="2000" b="0">
+                <a:solidFill>
+                  <a:srgbClr val="3D424E"/>
+                </a:solidFill>
+              </a:defRPr>
+            </a:pPr>
+            <a:r>
+              <a:t>Etapa 3 — Treinar o classificador de raça USANDO tom de pele como contexto (via FiLM)</a:t>
+            </a:r>
+          </a:p>
+          <a:p>
+            <a:pPr lvl="1">
+              <a:spcAft>
+                <a:spcPts val="800"/>
+              </a:spcAft>
+              <a:defRPr sz="1700">
+                <a:solidFill>
+                  <a:srgbClr val="707682"/>
+                </a:solidFill>
+              </a:defRPr>
+            </a:pPr>
+            <a:r>
+              <a:t>Backbone: ConvNeXt-T (rede moderna, 28 milhões de parâmetros — leve)</a:t>
+            </a:r>
+          </a:p>
+          <a:p>
+            <a:pPr>
+              <a:spcAft>
+                <a:spcPts val="800"/>
+              </a:spcAft>
+              <a:defRPr sz="2000" b="0">
+                <a:solidFill>
+                  <a:srgbClr val="3D424E"/>
+                </a:solidFill>
+              </a:defRPr>
+            </a:pPr>
+            <a:r>
+              <a:t>Etapa 4 — Comparar fairness: COM tom de pele vs SEM</a:t>
+            </a:r>
+          </a:p>
+          <a:p>
+            <a:pPr lvl="1">
+              <a:spcAft>
+                <a:spcPts val="800"/>
+              </a:spcAft>
+              <a:defRPr sz="1700">
+                <a:solidFill>
+                  <a:srgbClr val="707682"/>
+                </a:solidFill>
+              </a:defRPr>
+            </a:pPr>
+            <a:r>
+              <a:t>Baselines: ConvNeXt-T puro, FSCL+, Group DRO, Adversarial debiasing</a:t>
+            </a:r>
+          </a:p>
+          <a:p>
+            <a:pPr>
+              <a:spcAft>
+                <a:spcPts val="800"/>
+              </a:spcAft>
+              <a:defRPr sz="2000" b="0">
+                <a:solidFill>
+                  <a:srgbClr val="3D424E"/>
+                </a:solidFill>
+              </a:defRPr>
+            </a:pPr>
+            <a:r>
+              <a:t>Etapa 5 — Aplicar pipeline idêntico em reconhecimento facial (RFW ou BFW)</a:t>
+            </a:r>
+          </a:p>
+          <a:p>
+            <a:pPr lvl="1">
+              <a:spcAft>
+                <a:spcPts val="800"/>
+              </a:spcAft>
+              <a:defRPr sz="1700">
+                <a:solidFill>
+                  <a:srgbClr val="707682"/>
+                </a:solidFill>
+              </a:defRPr>
+            </a:pPr>
+            <a:r>
+              <a:t>Verificar transferência da propriedade fair</a:t>
+            </a:r>
+          </a:p>
+          <a:p>
+            <a:pPr>
+              <a:spcAft>
+                <a:spcPts val="800"/>
+              </a:spcAft>
+              <a:defRPr sz="2000" b="0">
+                <a:solidFill>
+                  <a:srgbClr val="3D424E"/>
+                </a:solidFill>
+              </a:defRPr>
+            </a:pPr>
+            <a:r>
+              <a:t>Etapa 6 — Medir se Black/African melhora especificamente</a:t>
+            </a:r>
+          </a:p>
+          <a:p>
+            <a:pPr lvl="1">
+              <a:spcAft>
+                <a:spcPts val="800"/>
+              </a:spcAft>
+              <a:defRPr sz="1700">
+                <a:solidFill>
+                  <a:srgbClr val="707682"/>
+                </a:solidFill>
+              </a:defRPr>
+            </a:pPr>
+            <a:r>
+              <a:t>Métrica: TAR @ FAR fixo por raça</a:t>
+            </a:r>
+          </a:p>
+        </p:txBody>
+      </p:sp>
+      <p:sp>
+        <p:nvSpPr>
+          <p:cNvPr id="5" name="TextBox 4"/>
+          <p:cNvSpPr txBox="1"/>
           <p:nvPr/>
         </p:nvSpPr>
         <p:spPr>
           <a:xfrm>
-            <a:off x="548640" y="3200400"/>
-            <a:ext cx="11064240" cy="1554480"/>
-          </a:xfrm>
-          <a:prstGeom prst="roundRect">
+            <a:off x="457200" y="6400800"/>
+            <a:ext cx="11430000" cy="365760"/>
+          </a:xfrm>
+          <a:prstGeom prst="rect">
             <a:avLst/>
           </a:prstGeom>
-          <a:solidFill>
-            <a:srgbClr val="FFFFFF"/>
-          </a:solidFill>
-          <a:ln w="12700">
-            <a:solidFill>
-              <a:srgbClr val="1F2A4E"/>
-            </a:solidFill>
-          </a:ln>
-        </p:spPr>
-        <p:style>
-          <a:lnRef idx="1">
-            <a:schemeClr val="accent1"/>
-          </a:lnRef>
-          <a:fillRef idx="3">
-            <a:schemeClr val="accent1"/>
-          </a:fillRef>
-          <a:effectRef idx="2">
-            <a:schemeClr val="accent1"/>
-          </a:effectRef>
-          <a:fontRef idx="minor">
-            <a:schemeClr val="lt1"/>
-          </a:fontRef>
-        </p:style>
-        <p:txBody>
-          <a:bodyPr rtlCol="0" anchor="ctr" wrap="square" lIns="274320" rIns="274320" tIns="137160"/>
-          <a:lstStyle/>
-          <a:p>
-            <a:pPr algn="ctr">
-              <a:defRPr sz="1500" b="1">
-                <a:solidFill>
-                  <a:srgbClr val="1F2A4E"/>
-                </a:solidFill>
-              </a:defRPr>
-            </a:pPr>
-            <a:r>
-              <a:t>Por que importa para a tese</a:t>
-            </a:r>
-          </a:p>
-          <a:p>
-            <a:pPr>
-              <a:defRPr sz="1800">
-                <a:solidFill>
-                  <a:srgbClr val="3D424E"/>
-                </a:solidFill>
-              </a:defRPr>
-            </a:pPr>
-            <a:r>
-              <a:t>É o que sustenta a EXTENSÃO da nossa tese para face recognition. Se treinarmos fairness na classificação racial (Cap 2), a propriedade fair se transfere para reconhecimento facial (Cap 3) — não precisa re-treinar do zero. Esta é a demonstração empírica que combinamos.</a:t>
-            </a:r>
-          </a:p>
-        </p:txBody>
-      </p:sp>
-      <p:sp>
-        <p:nvSpPr>
-          <p:cNvPr id="6" name="Rounded Rectangle 5"/>
-          <p:cNvSpPr/>
-          <p:nvPr/>
-        </p:nvSpPr>
-        <p:spPr>
-          <a:xfrm>
-            <a:off x="548640" y="4937760"/>
-            <a:ext cx="11064240" cy="1463040"/>
-          </a:xfrm>
-          <a:prstGeom prst="roundRect">
-            <a:avLst/>
-          </a:prstGeom>
-          <a:solidFill>
-            <a:srgbClr val="FFFFFF"/>
-          </a:solidFill>
-          <a:ln w="12700">
-            <a:solidFill>
-              <a:srgbClr val="2E7D32"/>
-            </a:solidFill>
-          </a:ln>
-        </p:spPr>
-        <p:style>
-          <a:lnRef idx="1">
-            <a:schemeClr val="accent1"/>
-          </a:lnRef>
-          <a:fillRef idx="3">
-            <a:schemeClr val="accent1"/>
-          </a:fillRef>
-          <a:effectRef idx="2">
-            <a:schemeClr val="accent1"/>
-          </a:effectRef>
-          <a:fontRef idx="minor">
-            <a:schemeClr val="lt1"/>
-          </a:fontRef>
-        </p:style>
-        <p:txBody>
-          <a:bodyPr rtlCol="0" anchor="ctr" wrap="square" lIns="274320" rIns="274320" tIns="137160"/>
-          <a:lstStyle/>
-          <a:p>
-            <a:pPr algn="ctr">
-              <a:defRPr sz="1500" b="1">
-                <a:solidFill>
-                  <a:srgbClr val="2E7D32"/>
-                </a:solidFill>
-              </a:defRPr>
-            </a:pPr>
-            <a:r>
-              <a:t>Exemplo concreto</a:t>
-            </a:r>
-          </a:p>
-          <a:p>
-            <a:pPr>
-              <a:defRPr sz="1700">
-                <a:solidFill>
-                  <a:srgbClr val="3D424E"/>
-                </a:solidFill>
-              </a:defRPr>
-            </a:pPr>
-            <a:r>
-              <a:t>Analogia: aprender ética profissional em medicina geral nos torna mais éticos também quando nos especializamos em cardiologia. A propriedade 'ética' não depende da especialidade — está embutida no profissional.</a:t>
+          <a:noFill/>
+        </p:spPr>
+        <p:txBody>
+          <a:bodyPr wrap="none">
+            <a:spAutoFit/>
+          </a:bodyPr>
+          <a:lstStyle/>
+          <a:p>
+            <a:pPr>
+              <a:defRPr sz="1500" i="1">
+                <a:solidFill>
+                  <a:srgbClr val="707682"/>
+                </a:solidFill>
+              </a:defRPr>
+            </a:pPr>
+            <a:r>
+              <a:t>Etapas 1, 4 e 5 reforçadas pela Rodada 6 (SkinToneNet, Adversarial debiasing, fair transfer empírico)</a:t>
             </a:r>
           </a:p>
         </p:txBody>
@@ -5886,7 +5652,7 @@
               </a:defRPr>
             </a:pPr>
             <a:r>
-              <a:t>O pipeline em 6 etapas</a:t>
+              <a:t>As métricas que vamos reportar — explicação simples</a:t>
             </a:r>
           </a:p>
         </p:txBody>
@@ -5967,7 +5733,7 @@
               </a:defRPr>
             </a:pPr>
             <a:r>
-              <a:t>Etapa 1 — Treinar um classificador de tom de pele (MST)</a:t>
+              <a:t>F1 macro — média das pontuações em todas as 7 raças, tratando todas igualmente.</a:t>
             </a:r>
           </a:p>
           <a:p>
@@ -5982,7 +5748,7 @@
               </a:defRPr>
             </a:pPr>
             <a:r>
-              <a:t>Dados: MST-E (Schumann 2023) + Casual Conversations (Meta 2021)</a:t>
+              <a:t>Quanto maior, melhor. SOTA atual = 75% (FaceScanPaliGemma).</a:t>
             </a:r>
           </a:p>
           <a:p>
@@ -5996,8 +5762,20 @@
                 </a:solidFill>
               </a:defRPr>
             </a:pPr>
-            <a:r>
-              <a:t>Etapa 2 — Auditar o FairFace: como tom de pele se distribui entre as 7 raças?</a:t>
+          </a:p>
+          <a:p>
+            <a:pPr>
+              <a:spcAft>
+                <a:spcPts val="800"/>
+              </a:spcAft>
+              <a:defRPr sz="2000" b="0">
+                <a:solidFill>
+                  <a:srgbClr val="3D424E"/>
+                </a:solidFill>
+              </a:defRPr>
+            </a:pPr>
+            <a:r>
+              <a:t>DR (Disparity Ratio) — razão entre a melhor e a pior raça.</a:t>
             </a:r>
           </a:p>
           <a:p>
@@ -6012,7 +5790,7 @@
               </a:defRPr>
             </a:pPr>
             <a:r>
-              <a:t>Aplicar o classificador MST sobre 10.954 imagens; validar manualmente um subset</a:t>
+              <a:t>Quanto mais perto de 1.0, mais justo. Latinx vs Black hoje = 60% / 90% = 0.67.</a:t>
             </a:r>
           </a:p>
           <a:p>
@@ -6026,8 +5804,20 @@
                 </a:solidFill>
               </a:defRPr>
             </a:pPr>
-            <a:r>
-              <a:t>Etapa 3 — Treinar o classificador de raça USANDO tom de pele como contexto (via FiLM)</a:t>
+          </a:p>
+          <a:p>
+            <a:pPr>
+              <a:spcAft>
+                <a:spcPts val="800"/>
+              </a:spcAft>
+              <a:defRPr sz="2000" b="0">
+                <a:solidFill>
+                  <a:srgbClr val="3D424E"/>
+                </a:solidFill>
+              </a:defRPr>
+            </a:pPr>
+            <a:r>
+              <a:t>Worst-class F1 — pontuação na raça em que o modelo se sai pior.</a:t>
             </a:r>
           </a:p>
           <a:p>
@@ -6042,7 +5832,7 @@
               </a:defRPr>
             </a:pPr>
             <a:r>
-              <a:t>Backbone: ConvNeXt-T (rede moderna, 28 milhões de parâmetros — leve)</a:t>
+              <a:t>Hoje = 60% (Latinx). Quanto maior, melhor o pior caso.</a:t>
             </a:r>
           </a:p>
           <a:p>
@@ -6056,8 +5846,20 @@
                 </a:solidFill>
               </a:defRPr>
             </a:pPr>
-            <a:r>
-              <a:t>Etapa 4 — Comparar fairness: COM tom de pele vs SEM</a:t>
+          </a:p>
+          <a:p>
+            <a:pPr>
+              <a:spcAft>
+                <a:spcPts val="800"/>
+              </a:spcAft>
+              <a:defRPr sz="2000" b="0">
+                <a:solidFill>
+                  <a:srgbClr val="3D424E"/>
+                </a:solidFill>
+              </a:defRPr>
+            </a:pPr>
+            <a:r>
+              <a:t>Por que 3 métricas e não uma?</a:t>
             </a:r>
           </a:p>
           <a:p>
@@ -6072,22 +5874,7 @@
               </a:defRPr>
             </a:pPr>
             <a:r>
-              <a:t>Baselines: ConvNeXt-T puro, FSCL+, Group DRO, Adversarial debiasing</a:t>
-            </a:r>
-          </a:p>
-          <a:p>
-            <a:pPr>
-              <a:spcAft>
-                <a:spcPts val="800"/>
-              </a:spcAft>
-              <a:defRPr sz="2000" b="0">
-                <a:solidFill>
-                  <a:srgbClr val="3D424E"/>
-                </a:solidFill>
-              </a:defRPr>
-            </a:pPr>
-            <a:r>
-              <a:t>Etapa 5 — Aplicar pipeline idêntico em reconhecimento facial (RFW ou BFW)</a:t>
+              <a:t>Teorema da impossibilidade (Kleinberg et al. 2017): não existe métrica única</a:t>
             </a:r>
           </a:p>
           <a:p>
@@ -6102,37 +5889,7 @@
               </a:defRPr>
             </a:pPr>
             <a:r>
-              <a:t>Verificar transferência da propriedade fair</a:t>
-            </a:r>
-          </a:p>
-          <a:p>
-            <a:pPr>
-              <a:spcAft>
-                <a:spcPts val="800"/>
-              </a:spcAft>
-              <a:defRPr sz="2000" b="0">
-                <a:solidFill>
-                  <a:srgbClr val="3D424E"/>
-                </a:solidFill>
-              </a:defRPr>
-            </a:pPr>
-            <a:r>
-              <a:t>Etapa 6 — Medir se Black/African melhora especificamente</a:t>
-            </a:r>
-          </a:p>
-          <a:p>
-            <a:pPr lvl="1">
-              <a:spcAft>
-                <a:spcPts val="800"/>
-              </a:spcAft>
-              <a:defRPr sz="1700">
-                <a:solidFill>
-                  <a:srgbClr val="707682"/>
-                </a:solidFill>
-              </a:defRPr>
-            </a:pPr>
-            <a:r>
-              <a:t>Métrica: TAR @ FAR fixo por raça</a:t>
+              <a:t>de fairness. Reportar 3 simultaneamente é a forma honesta de comunicar trade-offs.</a:t>
             </a:r>
           </a:p>
         </p:txBody>
@@ -6385,296 +6142,6 @@
 </file>
 
 <file path=ppt/slides/slide20.xml><?xml version="1.0" encoding="utf-8"?>
-<p:sld xmlns:a="http://schemas.openxmlformats.org/drawingml/2006/main" xmlns:p="http://schemas.openxmlformats.org/presentationml/2006/main" xmlns:r="http://schemas.openxmlformats.org/officeDocument/2006/relationships">
-  <p:cSld>
-    <p:spTree>
-      <p:nvGrpSpPr>
-        <p:cNvPr id="1" name=""/>
-        <p:cNvGrpSpPr/>
-        <p:nvPr/>
-      </p:nvGrpSpPr>
-      <p:grpSpPr/>
-      <p:sp>
-        <p:nvSpPr>
-          <p:cNvPr id="2" name="TextBox 1"/>
-          <p:cNvSpPr txBox="1"/>
-          <p:nvPr/>
-        </p:nvSpPr>
-        <p:spPr>
-          <a:xfrm>
-            <a:off x="457200" y="365760"/>
-            <a:ext cx="11430000" cy="822960"/>
-          </a:xfrm>
-          <a:prstGeom prst="rect">
-            <a:avLst/>
-          </a:prstGeom>
-          <a:noFill/>
-        </p:spPr>
-        <p:txBody>
-          <a:bodyPr wrap="square">
-            <a:spAutoFit/>
-          </a:bodyPr>
-          <a:lstStyle/>
-          <a:p>
-            <a:pPr>
-              <a:defRPr sz="3000" b="1">
-                <a:solidFill>
-                  <a:srgbClr val="1F2A4E"/>
-                </a:solidFill>
-              </a:defRPr>
-            </a:pPr>
-            <a:r>
-              <a:t>As métricas que vamos reportar — explicação simples</a:t>
-            </a:r>
-          </a:p>
-        </p:txBody>
-      </p:sp>
-      <p:sp>
-        <p:nvSpPr>
-          <p:cNvPr id="3" name="Rectangle 2"/>
-          <p:cNvSpPr/>
-          <p:nvPr/>
-        </p:nvSpPr>
-        <p:spPr>
-          <a:xfrm>
-            <a:off x="457200" y="1143000"/>
-            <a:ext cx="11430000" cy="45720"/>
-          </a:xfrm>
-          <a:prstGeom prst="rect">
-            <a:avLst/>
-          </a:prstGeom>
-          <a:solidFill>
-            <a:srgbClr val="1F2A4E"/>
-          </a:solidFill>
-          <a:ln>
-            <a:noFill/>
-          </a:ln>
-        </p:spPr>
-        <p:style>
-          <a:lnRef idx="1">
-            <a:schemeClr val="accent1"/>
-          </a:lnRef>
-          <a:fillRef idx="3">
-            <a:schemeClr val="accent1"/>
-          </a:fillRef>
-          <a:effectRef idx="2">
-            <a:schemeClr val="accent1"/>
-          </a:effectRef>
-          <a:fontRef idx="minor">
-            <a:schemeClr val="lt1"/>
-          </a:fontRef>
-        </p:style>
-        <p:txBody>
-          <a:bodyPr rtlCol="0" anchor="ctr"/>
-          <a:lstStyle/>
-          <a:p>
-            <a:pPr algn="ctr"/>
-          </a:p>
-        </p:txBody>
-      </p:sp>
-      <p:sp>
-        <p:nvSpPr>
-          <p:cNvPr id="4" name="TextBox 3"/>
-          <p:cNvSpPr txBox="1"/>
-          <p:nvPr/>
-        </p:nvSpPr>
-        <p:spPr>
-          <a:xfrm>
-            <a:off x="548640" y="1371600"/>
-            <a:ext cx="11247120" cy="4937760"/>
-          </a:xfrm>
-          <a:prstGeom prst="rect">
-            <a:avLst/>
-          </a:prstGeom>
-          <a:noFill/>
-        </p:spPr>
-        <p:txBody>
-          <a:bodyPr wrap="square">
-            <a:spAutoFit/>
-          </a:bodyPr>
-          <a:lstStyle/>
-          <a:p>
-            <a:pPr>
-              <a:spcAft>
-                <a:spcPts val="800"/>
-              </a:spcAft>
-              <a:defRPr sz="2000" b="0">
-                <a:solidFill>
-                  <a:srgbClr val="3D424E"/>
-                </a:solidFill>
-              </a:defRPr>
-            </a:pPr>
-            <a:r>
-              <a:t>F1 macro — média das pontuações em todas as 7 raças, tratando todas igualmente.</a:t>
-            </a:r>
-          </a:p>
-          <a:p>
-            <a:pPr lvl="1">
-              <a:spcAft>
-                <a:spcPts val="800"/>
-              </a:spcAft>
-              <a:defRPr sz="1700">
-                <a:solidFill>
-                  <a:srgbClr val="707682"/>
-                </a:solidFill>
-              </a:defRPr>
-            </a:pPr>
-            <a:r>
-              <a:t>Quanto maior, melhor. SOTA atual = 75% (FaceScanPaliGemma).</a:t>
-            </a:r>
-          </a:p>
-          <a:p>
-            <a:pPr>
-              <a:spcAft>
-                <a:spcPts val="800"/>
-              </a:spcAft>
-              <a:defRPr sz="2000" b="0">
-                <a:solidFill>
-                  <a:srgbClr val="3D424E"/>
-                </a:solidFill>
-              </a:defRPr>
-            </a:pPr>
-          </a:p>
-          <a:p>
-            <a:pPr>
-              <a:spcAft>
-                <a:spcPts val="800"/>
-              </a:spcAft>
-              <a:defRPr sz="2000" b="0">
-                <a:solidFill>
-                  <a:srgbClr val="3D424E"/>
-                </a:solidFill>
-              </a:defRPr>
-            </a:pPr>
-            <a:r>
-              <a:t>DR (Disparity Ratio) — razão entre a melhor e a pior raça.</a:t>
-            </a:r>
-          </a:p>
-          <a:p>
-            <a:pPr lvl="1">
-              <a:spcAft>
-                <a:spcPts val="800"/>
-              </a:spcAft>
-              <a:defRPr sz="1700">
-                <a:solidFill>
-                  <a:srgbClr val="707682"/>
-                </a:solidFill>
-              </a:defRPr>
-            </a:pPr>
-            <a:r>
-              <a:t>Quanto mais perto de 1.0, mais justo. Latinx vs Black hoje = 60% / 90% = 0.67.</a:t>
-            </a:r>
-          </a:p>
-          <a:p>
-            <a:pPr>
-              <a:spcAft>
-                <a:spcPts val="800"/>
-              </a:spcAft>
-              <a:defRPr sz="2000" b="0">
-                <a:solidFill>
-                  <a:srgbClr val="3D424E"/>
-                </a:solidFill>
-              </a:defRPr>
-            </a:pPr>
-          </a:p>
-          <a:p>
-            <a:pPr>
-              <a:spcAft>
-                <a:spcPts val="800"/>
-              </a:spcAft>
-              <a:defRPr sz="2000" b="0">
-                <a:solidFill>
-                  <a:srgbClr val="3D424E"/>
-                </a:solidFill>
-              </a:defRPr>
-            </a:pPr>
-            <a:r>
-              <a:t>Worst-class F1 — pontuação na raça em que o modelo se sai pior.</a:t>
-            </a:r>
-          </a:p>
-          <a:p>
-            <a:pPr lvl="1">
-              <a:spcAft>
-                <a:spcPts val="800"/>
-              </a:spcAft>
-              <a:defRPr sz="1700">
-                <a:solidFill>
-                  <a:srgbClr val="707682"/>
-                </a:solidFill>
-              </a:defRPr>
-            </a:pPr>
-            <a:r>
-              <a:t>Hoje = 60% (Latinx). Quanto maior, melhor o pior caso.</a:t>
-            </a:r>
-          </a:p>
-          <a:p>
-            <a:pPr>
-              <a:spcAft>
-                <a:spcPts val="800"/>
-              </a:spcAft>
-              <a:defRPr sz="2000" b="0">
-                <a:solidFill>
-                  <a:srgbClr val="3D424E"/>
-                </a:solidFill>
-              </a:defRPr>
-            </a:pPr>
-          </a:p>
-          <a:p>
-            <a:pPr>
-              <a:spcAft>
-                <a:spcPts val="800"/>
-              </a:spcAft>
-              <a:defRPr sz="2000" b="0">
-                <a:solidFill>
-                  <a:srgbClr val="3D424E"/>
-                </a:solidFill>
-              </a:defRPr>
-            </a:pPr>
-            <a:r>
-              <a:t>Por que 3 métricas e não uma?</a:t>
-            </a:r>
-          </a:p>
-          <a:p>
-            <a:pPr lvl="1">
-              <a:spcAft>
-                <a:spcPts val="800"/>
-              </a:spcAft>
-              <a:defRPr sz="1700">
-                <a:solidFill>
-                  <a:srgbClr val="707682"/>
-                </a:solidFill>
-              </a:defRPr>
-            </a:pPr>
-            <a:r>
-              <a:t>Teorema da impossibilidade (Kleinberg et al. 2017): não existe métrica única</a:t>
-            </a:r>
-          </a:p>
-          <a:p>
-            <a:pPr lvl="1">
-              <a:spcAft>
-                <a:spcPts val="800"/>
-              </a:spcAft>
-              <a:defRPr sz="1700">
-                <a:solidFill>
-                  <a:srgbClr val="707682"/>
-                </a:solidFill>
-              </a:defRPr>
-            </a:pPr>
-            <a:r>
-              <a:t>de fairness. Reportar 3 simultaneamente é a forma honesta de comunicar trade-offs.</a:t>
-            </a:r>
-          </a:p>
-        </p:txBody>
-      </p:sp>
-    </p:spTree>
-  </p:cSld>
-  <p:clrMapOvr>
-    <a:masterClrMapping/>
-  </p:clrMapOvr>
-</p:sld>
-</file>
-
-<file path=ppt/slides/slide21.xml><?xml version="1.0" encoding="utf-8"?>
 <p:sld xmlns:a="http://schemas.openxmlformats.org/drawingml/2006/main" xmlns:p="http://schemas.openxmlformats.org/presentationml/2006/main" xmlns:r="http://schemas.openxmlformats.org/officeDocument/2006/relationships">
   <p:cSld>
     <p:spTree>
@@ -7209,7 +6676,150 @@
               </a:defRPr>
             </a:pPr>
             <a:r>
-              <a:t>H1, H4 e H5 são as hipóteses centrais. Plano B documentado caso refutadas.</a:t>
+              <a:t>H5 em revisão após Pangelinan 2023 (Rodada 6): pixel info pode ser confounder — discussão na pauta</a:t>
+            </a:r>
+          </a:p>
+        </p:txBody>
+      </p:sp>
+    </p:spTree>
+  </p:cSld>
+  <p:clrMapOvr>
+    <a:masterClrMapping/>
+  </p:clrMapOvr>
+</p:sld>
+</file>
+
+<file path=ppt/slides/slide21.xml><?xml version="1.0" encoding="utf-8"?>
+<p:sld xmlns:a="http://schemas.openxmlformats.org/drawingml/2006/main" xmlns:p="http://schemas.openxmlformats.org/presentationml/2006/main" xmlns:r="http://schemas.openxmlformats.org/officeDocument/2006/relationships">
+  <p:cSld>
+    <p:spTree>
+      <p:nvGrpSpPr>
+        <p:cNvPr id="1" name=""/>
+        <p:cNvGrpSpPr/>
+        <p:nvPr/>
+      </p:nvGrpSpPr>
+      <p:grpSpPr/>
+      <p:sp>
+        <p:nvSpPr>
+          <p:cNvPr id="2" name="Rectangle 1"/>
+          <p:cNvSpPr/>
+          <p:nvPr/>
+        </p:nvSpPr>
+        <p:spPr>
+          <a:xfrm>
+            <a:off x="0" y="0"/>
+            <a:ext cx="12191695" cy="6858000"/>
+          </a:xfrm>
+          <a:prstGeom prst="rect">
+            <a:avLst/>
+          </a:prstGeom>
+          <a:solidFill>
+            <a:srgbClr val="1F2A4E"/>
+          </a:solidFill>
+          <a:ln>
+            <a:noFill/>
+          </a:ln>
+        </p:spPr>
+        <p:style>
+          <a:lnRef idx="1">
+            <a:schemeClr val="accent1"/>
+          </a:lnRef>
+          <a:fillRef idx="3">
+            <a:schemeClr val="accent1"/>
+          </a:fillRef>
+          <a:effectRef idx="2">
+            <a:schemeClr val="accent1"/>
+          </a:effectRef>
+          <a:fontRef idx="minor">
+            <a:schemeClr val="lt1"/>
+          </a:fontRef>
+        </p:style>
+        <p:txBody>
+          <a:bodyPr rtlCol="0" anchor="ctr"/>
+          <a:lstStyle/>
+          <a:p>
+            <a:pPr algn="ctr"/>
+          </a:p>
+        </p:txBody>
+      </p:sp>
+      <p:sp>
+        <p:nvSpPr>
+          <p:cNvPr id="3" name="TextBox 2"/>
+          <p:cNvSpPr txBox="1"/>
+          <p:nvPr/>
+        </p:nvSpPr>
+        <p:spPr>
+          <a:xfrm>
+            <a:off x="731520" y="1371600"/>
+            <a:ext cx="2743200" cy="2743200"/>
+          </a:xfrm>
+          <a:prstGeom prst="rect">
+            <a:avLst/>
+          </a:prstGeom>
+          <a:noFill/>
+        </p:spPr>
+        <p:txBody>
+          <a:bodyPr wrap="none">
+            <a:spAutoFit/>
+          </a:bodyPr>
+          <a:lstStyle/>
+          <a:p>
+            <a:pPr>
+              <a:defRPr sz="13000" b="1">
+                <a:solidFill>
+                  <a:srgbClr val="FFFFFF"/>
+                </a:solidFill>
+              </a:defRPr>
+            </a:pPr>
+            <a:r>
+              <a:t>4</a:t>
+            </a:r>
+          </a:p>
+        </p:txBody>
+      </p:sp>
+      <p:sp>
+        <p:nvSpPr>
+          <p:cNvPr id="4" name="TextBox 3"/>
+          <p:cNvSpPr txBox="1"/>
+          <p:nvPr/>
+        </p:nvSpPr>
+        <p:spPr>
+          <a:xfrm>
+            <a:off x="3931920" y="2286000"/>
+            <a:ext cx="7772400" cy="1828800"/>
+          </a:xfrm>
+          <a:prstGeom prst="rect">
+            <a:avLst/>
+          </a:prstGeom>
+          <a:noFill/>
+        </p:spPr>
+        <p:txBody>
+          <a:bodyPr wrap="square">
+            <a:spAutoFit/>
+          </a:bodyPr>
+          <a:lstStyle/>
+          <a:p>
+            <a:pPr>
+              <a:defRPr sz="3600" b="1">
+                <a:solidFill>
+                  <a:srgbClr val="FFFFFF"/>
+                </a:solidFill>
+              </a:defRPr>
+            </a:pPr>
+            <a:r>
+              <a:t>Próximos passos</a:t>
+            </a:r>
+          </a:p>
+          <a:p>
+            <a:pPr>
+              <a:defRPr sz="2000">
+                <a:solidFill>
+                  <a:srgbClr val="E8EAED"/>
+                </a:solidFill>
+              </a:defRPr>
+            </a:pPr>
+            <a:r>
+              <a:t>Plano experimental e calendário</a:t>
             </a:r>
           </a:p>
         </p:txBody>
@@ -7234,14 +6844,49 @@
       <p:grpSpPr/>
       <p:sp>
         <p:nvSpPr>
-          <p:cNvPr id="2" name="Rectangle 1"/>
+          <p:cNvPr id="2" name="TextBox 1"/>
+          <p:cNvSpPr txBox="1"/>
+          <p:nvPr/>
+        </p:nvSpPr>
+        <p:spPr>
+          <a:xfrm>
+            <a:off x="457200" y="365760"/>
+            <a:ext cx="11430000" cy="822960"/>
+          </a:xfrm>
+          <a:prstGeom prst="rect">
+            <a:avLst/>
+          </a:prstGeom>
+          <a:noFill/>
+        </p:spPr>
+        <p:txBody>
+          <a:bodyPr wrap="square">
+            <a:spAutoFit/>
+          </a:bodyPr>
+          <a:lstStyle/>
+          <a:p>
+            <a:pPr>
+              <a:defRPr sz="3000" b="1">
+                <a:solidFill>
+                  <a:srgbClr val="1F2A4E"/>
+                </a:solidFill>
+              </a:defRPr>
+            </a:pPr>
+            <a:r>
+              <a:t>Os 3 capítulos experimentais</a:t>
+            </a:r>
+          </a:p>
+        </p:txBody>
+      </p:sp>
+      <p:sp>
+        <p:nvSpPr>
+          <p:cNvPr id="3" name="Rectangle 2"/>
           <p:cNvSpPr/>
           <p:nvPr/>
         </p:nvSpPr>
         <p:spPr>
           <a:xfrm>
-            <a:off x="0" y="0"/>
-            <a:ext cx="12191695" cy="6858000"/>
+            <a:off x="457200" y="1143000"/>
+            <a:ext cx="11430000" cy="45720"/>
           </a:xfrm>
           <a:prstGeom prst="rect">
             <a:avLst/>
@@ -7277,14 +6922,14 @@
       </p:sp>
       <p:sp>
         <p:nvSpPr>
-          <p:cNvPr id="3" name="TextBox 2"/>
+          <p:cNvPr id="4" name="TextBox 3"/>
           <p:cNvSpPr txBox="1"/>
           <p:nvPr/>
         </p:nvSpPr>
         <p:spPr>
           <a:xfrm>
-            <a:off x="731520" y="1371600"/>
-            <a:ext cx="2743200" cy="2743200"/>
+            <a:off x="548640" y="1371600"/>
+            <a:ext cx="11247120" cy="4937760"/>
           </a:xfrm>
           <a:prstGeom prst="rect">
             <a:avLst/>
@@ -7292,67 +6937,212 @@
           <a:noFill/>
         </p:spPr>
         <p:txBody>
-          <a:bodyPr wrap="none">
-            <a:spAutoFit/>
-          </a:bodyPr>
-          <a:lstStyle/>
-          <a:p>
-            <a:pPr>
-              <a:defRPr sz="13000" b="1">
-                <a:solidFill>
-                  <a:srgbClr val="FFFFFF"/>
-                </a:solidFill>
-              </a:defRPr>
-            </a:pPr>
-            <a:r>
-              <a:t>4</a:t>
-            </a:r>
-          </a:p>
-        </p:txBody>
-      </p:sp>
-      <p:sp>
-        <p:nvSpPr>
-          <p:cNvPr id="4" name="TextBox 3"/>
-          <p:cNvSpPr txBox="1"/>
-          <p:nvPr/>
-        </p:nvSpPr>
-        <p:spPr>
-          <a:xfrm>
-            <a:off x="3931920" y="2286000"/>
-            <a:ext cx="7772400" cy="1828800"/>
-          </a:xfrm>
-          <a:prstGeom prst="rect">
-            <a:avLst/>
-          </a:prstGeom>
-          <a:noFill/>
-        </p:spPr>
-        <p:txBody>
           <a:bodyPr wrap="square">
             <a:spAutoFit/>
           </a:bodyPr>
           <a:lstStyle/>
           <a:p>
             <a:pPr>
-              <a:defRPr sz="3600" b="1">
-                <a:solidFill>
-                  <a:srgbClr val="FFFFFF"/>
-                </a:solidFill>
-              </a:defRPr>
-            </a:pPr>
-            <a:r>
-              <a:t>Próximos passos</a:t>
-            </a:r>
-          </a:p>
-          <a:p>
-            <a:pPr>
-              <a:defRPr sz="2000">
-                <a:solidFill>
-                  <a:srgbClr val="E8EAED"/>
-                </a:solidFill>
-              </a:defRPr>
-            </a:pPr>
-            <a:r>
-              <a:t>Plano experimental e calendário</a:t>
+              <a:spcAft>
+                <a:spcPts val="800"/>
+              </a:spcAft>
+              <a:defRPr sz="2000" b="0">
+                <a:solidFill>
+                  <a:srgbClr val="3D424E"/>
+                </a:solidFill>
+              </a:defRPr>
+            </a:pPr>
+            <a:r>
+              <a:t>Capítulo 1 (~4 semanas) — Construir o classificador de tom</a:t>
+            </a:r>
+          </a:p>
+          <a:p>
+            <a:pPr lvl="1">
+              <a:spcAft>
+                <a:spcPts val="800"/>
+              </a:spcAft>
+              <a:defRPr sz="1700">
+                <a:solidFill>
+                  <a:srgbClr val="707682"/>
+                </a:solidFill>
+              </a:defRPr>
+            </a:pPr>
+            <a:r>
+              <a:t>Treinar sobre MST-E + Casual Conversations</a:t>
+            </a:r>
+          </a:p>
+          <a:p>
+            <a:pPr lvl="1">
+              <a:spcAft>
+                <a:spcPts val="800"/>
+              </a:spcAft>
+              <a:defRPr sz="1700">
+                <a:solidFill>
+                  <a:srgbClr val="707682"/>
+                </a:solidFill>
+              </a:defRPr>
+            </a:pPr>
+            <a:r>
+              <a:t>Aplicar no FairFace e construir a matriz pública tom × raça</a:t>
+            </a:r>
+          </a:p>
+          <a:p>
+            <a:pPr lvl="1">
+              <a:spcAft>
+                <a:spcPts val="800"/>
+              </a:spcAft>
+              <a:defRPr sz="1700">
+                <a:solidFill>
+                  <a:srgbClr val="707682"/>
+                </a:solidFill>
+              </a:defRPr>
+            </a:pPr>
+            <a:r>
+              <a:t>Testa H3 (Latinx tem spread amplo)</a:t>
+            </a:r>
+          </a:p>
+          <a:p>
+            <a:pPr>
+              <a:spcAft>
+                <a:spcPts val="800"/>
+              </a:spcAft>
+              <a:defRPr sz="2000" b="0">
+                <a:solidFill>
+                  <a:srgbClr val="3D424E"/>
+                </a:solidFill>
+              </a:defRPr>
+            </a:pPr>
+          </a:p>
+          <a:p>
+            <a:pPr>
+              <a:spcAft>
+                <a:spcPts val="800"/>
+              </a:spcAft>
+              <a:defRPr sz="2000" b="0">
+                <a:solidFill>
+                  <a:srgbClr val="3D424E"/>
+                </a:solidFill>
+              </a:defRPr>
+            </a:pPr>
+            <a:r>
+              <a:t>Capítulo 2 (~10-12 semanas) — Classificador de raça com tom como contexto</a:t>
+            </a:r>
+          </a:p>
+          <a:p>
+            <a:pPr lvl="1">
+              <a:spcAft>
+                <a:spcPts val="800"/>
+              </a:spcAft>
+              <a:defRPr sz="1700">
+                <a:solidFill>
+                  <a:srgbClr val="707682"/>
+                </a:solidFill>
+              </a:defRPr>
+            </a:pPr>
+            <a:r>
+              <a:t>Pipeline ConvNeXt-T + FiLM, comparado com 4 baselines independentes</a:t>
+            </a:r>
+          </a:p>
+          <a:p>
+            <a:pPr lvl="1">
+              <a:spcAft>
+                <a:spcPts val="800"/>
+              </a:spcAft>
+              <a:defRPr sz="1700">
+                <a:solidFill>
+                  <a:srgbClr val="707682"/>
+                </a:solidFill>
+              </a:defRPr>
+            </a:pPr>
+            <a:r>
+              <a:t>3 seeds para significância estatística</a:t>
+            </a:r>
+          </a:p>
+          <a:p>
+            <a:pPr lvl="1">
+              <a:spcAft>
+                <a:spcPts val="800"/>
+              </a:spcAft>
+              <a:defRPr sz="1700">
+                <a:solidFill>
+                  <a:srgbClr val="707682"/>
+                </a:solidFill>
+              </a:defRPr>
+            </a:pPr>
+            <a:r>
+              <a:t>Testa H1 (pipeline funciona), H2 (Latinx é estrutural), H4 (overlap explica erros)</a:t>
+            </a:r>
+          </a:p>
+          <a:p>
+            <a:pPr>
+              <a:spcAft>
+                <a:spcPts val="800"/>
+              </a:spcAft>
+              <a:defRPr sz="2000" b="0">
+                <a:solidFill>
+                  <a:srgbClr val="3D424E"/>
+                </a:solidFill>
+              </a:defRPr>
+            </a:pPr>
+          </a:p>
+          <a:p>
+            <a:pPr>
+              <a:spcAft>
+                <a:spcPts val="800"/>
+              </a:spcAft>
+              <a:defRPr sz="2000" b="0">
+                <a:solidFill>
+                  <a:srgbClr val="3D424E"/>
+                </a:solidFill>
+              </a:defRPr>
+            </a:pPr>
+            <a:r>
+              <a:t>Capítulo 3 (~6 semanas) — Aplicar a reconhecimento facial</a:t>
+            </a:r>
+          </a:p>
+          <a:p>
+            <a:pPr lvl="1">
+              <a:spcAft>
+                <a:spcPts val="800"/>
+              </a:spcAft>
+              <a:defRPr sz="1700">
+                <a:solidFill>
+                  <a:srgbClr val="707682"/>
+                </a:solidFill>
+              </a:defRPr>
+            </a:pPr>
+            <a:r>
+              <a:t>Mesmo pipeline em RFW ou BFW (datasets que já estão catalogados)</a:t>
+            </a:r>
+          </a:p>
+          <a:p>
+            <a:pPr lvl="1">
+              <a:spcAft>
+                <a:spcPts val="800"/>
+              </a:spcAft>
+              <a:defRPr sz="1700">
+                <a:solidFill>
+                  <a:srgbClr val="707682"/>
+                </a:solidFill>
+              </a:defRPr>
+            </a:pPr>
+            <a:r>
+              <a:t>Foco em accuracy de Black/African</a:t>
+            </a:r>
+          </a:p>
+          <a:p>
+            <a:pPr lvl="1">
+              <a:spcAft>
+                <a:spcPts val="800"/>
+              </a:spcAft>
+              <a:defRPr sz="1700">
+                <a:solidFill>
+                  <a:srgbClr val="707682"/>
+                </a:solidFill>
+              </a:defRPr>
+            </a:pPr>
+            <a:r>
+              <a:t>Testa H5 (fair transferência funciona)</a:t>
             </a:r>
           </a:p>
         </p:txBody>
@@ -7366,329 +7156,6 @@
 </file>
 
 <file path=ppt/slides/slide23.xml><?xml version="1.0" encoding="utf-8"?>
-<p:sld xmlns:a="http://schemas.openxmlformats.org/drawingml/2006/main" xmlns:p="http://schemas.openxmlformats.org/presentationml/2006/main" xmlns:r="http://schemas.openxmlformats.org/officeDocument/2006/relationships">
-  <p:cSld>
-    <p:spTree>
-      <p:nvGrpSpPr>
-        <p:cNvPr id="1" name=""/>
-        <p:cNvGrpSpPr/>
-        <p:nvPr/>
-      </p:nvGrpSpPr>
-      <p:grpSpPr/>
-      <p:sp>
-        <p:nvSpPr>
-          <p:cNvPr id="2" name="TextBox 1"/>
-          <p:cNvSpPr txBox="1"/>
-          <p:nvPr/>
-        </p:nvSpPr>
-        <p:spPr>
-          <a:xfrm>
-            <a:off x="457200" y="365760"/>
-            <a:ext cx="11430000" cy="822960"/>
-          </a:xfrm>
-          <a:prstGeom prst="rect">
-            <a:avLst/>
-          </a:prstGeom>
-          <a:noFill/>
-        </p:spPr>
-        <p:txBody>
-          <a:bodyPr wrap="square">
-            <a:spAutoFit/>
-          </a:bodyPr>
-          <a:lstStyle/>
-          <a:p>
-            <a:pPr>
-              <a:defRPr sz="3000" b="1">
-                <a:solidFill>
-                  <a:srgbClr val="1F2A4E"/>
-                </a:solidFill>
-              </a:defRPr>
-            </a:pPr>
-            <a:r>
-              <a:t>Os 3 capítulos experimentais</a:t>
-            </a:r>
-          </a:p>
-        </p:txBody>
-      </p:sp>
-      <p:sp>
-        <p:nvSpPr>
-          <p:cNvPr id="3" name="Rectangle 2"/>
-          <p:cNvSpPr/>
-          <p:nvPr/>
-        </p:nvSpPr>
-        <p:spPr>
-          <a:xfrm>
-            <a:off x="457200" y="1143000"/>
-            <a:ext cx="11430000" cy="45720"/>
-          </a:xfrm>
-          <a:prstGeom prst="rect">
-            <a:avLst/>
-          </a:prstGeom>
-          <a:solidFill>
-            <a:srgbClr val="1F2A4E"/>
-          </a:solidFill>
-          <a:ln>
-            <a:noFill/>
-          </a:ln>
-        </p:spPr>
-        <p:style>
-          <a:lnRef idx="1">
-            <a:schemeClr val="accent1"/>
-          </a:lnRef>
-          <a:fillRef idx="3">
-            <a:schemeClr val="accent1"/>
-          </a:fillRef>
-          <a:effectRef idx="2">
-            <a:schemeClr val="accent1"/>
-          </a:effectRef>
-          <a:fontRef idx="minor">
-            <a:schemeClr val="lt1"/>
-          </a:fontRef>
-        </p:style>
-        <p:txBody>
-          <a:bodyPr rtlCol="0" anchor="ctr"/>
-          <a:lstStyle/>
-          <a:p>
-            <a:pPr algn="ctr"/>
-          </a:p>
-        </p:txBody>
-      </p:sp>
-      <p:sp>
-        <p:nvSpPr>
-          <p:cNvPr id="4" name="TextBox 3"/>
-          <p:cNvSpPr txBox="1"/>
-          <p:nvPr/>
-        </p:nvSpPr>
-        <p:spPr>
-          <a:xfrm>
-            <a:off x="548640" y="1371600"/>
-            <a:ext cx="11247120" cy="4937760"/>
-          </a:xfrm>
-          <a:prstGeom prst="rect">
-            <a:avLst/>
-          </a:prstGeom>
-          <a:noFill/>
-        </p:spPr>
-        <p:txBody>
-          <a:bodyPr wrap="square">
-            <a:spAutoFit/>
-          </a:bodyPr>
-          <a:lstStyle/>
-          <a:p>
-            <a:pPr>
-              <a:spcAft>
-                <a:spcPts val="800"/>
-              </a:spcAft>
-              <a:defRPr sz="2000" b="0">
-                <a:solidFill>
-                  <a:srgbClr val="3D424E"/>
-                </a:solidFill>
-              </a:defRPr>
-            </a:pPr>
-            <a:r>
-              <a:t>Capítulo 1 (~4 semanas) — Construir o classificador de tom</a:t>
-            </a:r>
-          </a:p>
-          <a:p>
-            <a:pPr lvl="1">
-              <a:spcAft>
-                <a:spcPts val="800"/>
-              </a:spcAft>
-              <a:defRPr sz="1700">
-                <a:solidFill>
-                  <a:srgbClr val="707682"/>
-                </a:solidFill>
-              </a:defRPr>
-            </a:pPr>
-            <a:r>
-              <a:t>Treinar sobre MST-E + Casual Conversations</a:t>
-            </a:r>
-          </a:p>
-          <a:p>
-            <a:pPr lvl="1">
-              <a:spcAft>
-                <a:spcPts val="800"/>
-              </a:spcAft>
-              <a:defRPr sz="1700">
-                <a:solidFill>
-                  <a:srgbClr val="707682"/>
-                </a:solidFill>
-              </a:defRPr>
-            </a:pPr>
-            <a:r>
-              <a:t>Aplicar no FairFace e construir a matriz pública tom × raça</a:t>
-            </a:r>
-          </a:p>
-          <a:p>
-            <a:pPr lvl="1">
-              <a:spcAft>
-                <a:spcPts val="800"/>
-              </a:spcAft>
-              <a:defRPr sz="1700">
-                <a:solidFill>
-                  <a:srgbClr val="707682"/>
-                </a:solidFill>
-              </a:defRPr>
-            </a:pPr>
-            <a:r>
-              <a:t>Testa H3 (Latinx tem spread amplo)</a:t>
-            </a:r>
-          </a:p>
-          <a:p>
-            <a:pPr>
-              <a:spcAft>
-                <a:spcPts val="800"/>
-              </a:spcAft>
-              <a:defRPr sz="2000" b="0">
-                <a:solidFill>
-                  <a:srgbClr val="3D424E"/>
-                </a:solidFill>
-              </a:defRPr>
-            </a:pPr>
-          </a:p>
-          <a:p>
-            <a:pPr>
-              <a:spcAft>
-                <a:spcPts val="800"/>
-              </a:spcAft>
-              <a:defRPr sz="2000" b="0">
-                <a:solidFill>
-                  <a:srgbClr val="3D424E"/>
-                </a:solidFill>
-              </a:defRPr>
-            </a:pPr>
-            <a:r>
-              <a:t>Capítulo 2 (~10-12 semanas) — Classificador de raça com tom como contexto</a:t>
-            </a:r>
-          </a:p>
-          <a:p>
-            <a:pPr lvl="1">
-              <a:spcAft>
-                <a:spcPts val="800"/>
-              </a:spcAft>
-              <a:defRPr sz="1700">
-                <a:solidFill>
-                  <a:srgbClr val="707682"/>
-                </a:solidFill>
-              </a:defRPr>
-            </a:pPr>
-            <a:r>
-              <a:t>Pipeline ConvNeXt-T + FiLM, comparado com 4 baselines independentes</a:t>
-            </a:r>
-          </a:p>
-          <a:p>
-            <a:pPr lvl="1">
-              <a:spcAft>
-                <a:spcPts val="800"/>
-              </a:spcAft>
-              <a:defRPr sz="1700">
-                <a:solidFill>
-                  <a:srgbClr val="707682"/>
-                </a:solidFill>
-              </a:defRPr>
-            </a:pPr>
-            <a:r>
-              <a:t>3 seeds para significância estatística</a:t>
-            </a:r>
-          </a:p>
-          <a:p>
-            <a:pPr lvl="1">
-              <a:spcAft>
-                <a:spcPts val="800"/>
-              </a:spcAft>
-              <a:defRPr sz="1700">
-                <a:solidFill>
-                  <a:srgbClr val="707682"/>
-                </a:solidFill>
-              </a:defRPr>
-            </a:pPr>
-            <a:r>
-              <a:t>Testa H1 (pipeline funciona), H2 (Latinx é estrutural), H4 (overlap explica erros)</a:t>
-            </a:r>
-          </a:p>
-          <a:p>
-            <a:pPr>
-              <a:spcAft>
-                <a:spcPts val="800"/>
-              </a:spcAft>
-              <a:defRPr sz="2000" b="0">
-                <a:solidFill>
-                  <a:srgbClr val="3D424E"/>
-                </a:solidFill>
-              </a:defRPr>
-            </a:pPr>
-          </a:p>
-          <a:p>
-            <a:pPr>
-              <a:spcAft>
-                <a:spcPts val="800"/>
-              </a:spcAft>
-              <a:defRPr sz="2000" b="0">
-                <a:solidFill>
-                  <a:srgbClr val="3D424E"/>
-                </a:solidFill>
-              </a:defRPr>
-            </a:pPr>
-            <a:r>
-              <a:t>Capítulo 3 (~6 semanas) — Aplicar a reconhecimento facial</a:t>
-            </a:r>
-          </a:p>
-          <a:p>
-            <a:pPr lvl="1">
-              <a:spcAft>
-                <a:spcPts val="800"/>
-              </a:spcAft>
-              <a:defRPr sz="1700">
-                <a:solidFill>
-                  <a:srgbClr val="707682"/>
-                </a:solidFill>
-              </a:defRPr>
-            </a:pPr>
-            <a:r>
-              <a:t>Mesmo pipeline em RFW ou BFW (datasets que já estão catalogados)</a:t>
-            </a:r>
-          </a:p>
-          <a:p>
-            <a:pPr lvl="1">
-              <a:spcAft>
-                <a:spcPts val="800"/>
-              </a:spcAft>
-              <a:defRPr sz="1700">
-                <a:solidFill>
-                  <a:srgbClr val="707682"/>
-                </a:solidFill>
-              </a:defRPr>
-            </a:pPr>
-            <a:r>
-              <a:t>Foco em accuracy de Black/African</a:t>
-            </a:r>
-          </a:p>
-          <a:p>
-            <a:pPr lvl="1">
-              <a:spcAft>
-                <a:spcPts val="800"/>
-              </a:spcAft>
-              <a:defRPr sz="1700">
-                <a:solidFill>
-                  <a:srgbClr val="707682"/>
-                </a:solidFill>
-              </a:defRPr>
-            </a:pPr>
-            <a:r>
-              <a:t>Testa H5 (fair transferência funciona)</a:t>
-            </a:r>
-          </a:p>
-        </p:txBody>
-      </p:sp>
-    </p:spTree>
-  </p:cSld>
-  <p:clrMapOvr>
-    <a:masterClrMapping/>
-  </p:clrMapOvr>
-</p:sld>
-</file>
-
-<file path=ppt/slides/slide24.xml><?xml version="1.0" encoding="utf-8"?>
 <p:sld xmlns:a="http://schemas.openxmlformats.org/drawingml/2006/main" xmlns:p="http://schemas.openxmlformats.org/presentationml/2006/main" xmlns:r="http://schemas.openxmlformats.org/officeDocument/2006/relationships">
   <p:cSld>
     <p:spTree>
@@ -8396,7 +7863,7 @@
 </p:sld>
 </file>
 
-<file path=ppt/slides/slide25.xml><?xml version="1.0" encoding="utf-8"?>
+<file path=ppt/slides/slide24.xml><?xml version="1.0" encoding="utf-8"?>
 <p:sld xmlns:a="http://schemas.openxmlformats.org/drawingml/2006/main" xmlns:p="http://schemas.openxmlformats.org/presentationml/2006/main" xmlns:r="http://schemas.openxmlformats.org/officeDocument/2006/relationships">
   <p:cSld>
     <p:spTree>
@@ -8671,7 +8138,7 @@
 </p:sld>
 </file>
 
-<file path=ppt/slides/slide26.xml><?xml version="1.0" encoding="utf-8"?>
+<file path=ppt/slides/slide25.xml><?xml version="1.0" encoding="utf-8"?>
 <p:sld xmlns:a="http://schemas.openxmlformats.org/drawingml/2006/main" xmlns:p="http://schemas.openxmlformats.org/presentationml/2006/main" xmlns:r="http://schemas.openxmlformats.org/officeDocument/2006/relationships">
   <p:cSld>
     <p:spTree>
@@ -8961,7 +8428,7 @@
 </p:sld>
 </file>
 
-<file path=ppt/slides/slide27.xml><?xml version="1.0" encoding="utf-8"?>
+<file path=ppt/slides/slide26.xml><?xml version="1.0" encoding="utf-8"?>
 <p:sld xmlns:a="http://schemas.openxmlformats.org/drawingml/2006/main" xmlns:p="http://schemas.openxmlformats.org/presentationml/2006/main" xmlns:r="http://schemas.openxmlformats.org/officeDocument/2006/relationships">
   <p:cSld>
     <p:spTree>

--- a/docs/ativo/material_reuniao_orientador_v3.2.1.pptx
+++ b/docs/ativo/material_reuniao_orientador_v3.2.1.pptx
@@ -31,6 +31,13 @@
     <p:sldId id="279" r:id="rId30"/>
     <p:sldId id="280" r:id="rId31"/>
     <p:sldId id="281" r:id="rId32"/>
+    <p:sldId id="282" r:id="rId33"/>
+    <p:sldId id="283" r:id="rId34"/>
+    <p:sldId id="284" r:id="rId35"/>
+    <p:sldId id="285" r:id="rId36"/>
+    <p:sldId id="286" r:id="rId37"/>
+    <p:sldId id="287" r:id="rId38"/>
+    <p:sldId id="288" r:id="rId39"/>
   </p:sldIdLst>
   <p:sldSz cx="12191695" cy="6858000" type="screen4x3"/>
   <p:notesSz cx="6858000" cy="9144000"/>
@@ -3526,7 +3533,7 @@
               </a:defRPr>
             </a:pPr>
             <a:r>
-              <a:t>Bônus: validação cruzada confirmou também o baseline ResNet-34 = 72%</a:t>
+              <a:t>Achados adicionais: validação cruzada confirmou também o baseline ResNet-34 = 72%</a:t>
             </a:r>
           </a:p>
           <a:p>
@@ -3675,37 +3682,7 @@
               </a:defRPr>
             </a:pPr>
             <a:r>
-              <a:t>Mudança central: deixa de ‘decompor o erro’ e passa a ‘construir um pipeline’</a:t>
-            </a:r>
-          </a:p>
-          <a:p>
-            <a:pPr>
-              <a:spcAft>
-                <a:spcPts val="800"/>
-              </a:spcAft>
-              <a:defRPr sz="2000" b="0">
-                <a:solidFill>
-                  <a:srgbClr val="3D424E"/>
-                </a:solidFill>
-              </a:defRPr>
-            </a:pPr>
-            <a:r>
-              <a:t>que melhora fairness em race classification E em face recognition,</a:t>
-            </a:r>
-          </a:p>
-          <a:p>
-            <a:pPr>
-              <a:spcAft>
-                <a:spcPts val="800"/>
-              </a:spcAft>
-              <a:defRPr sz="2000" b="0">
-                <a:solidFill>
-                  <a:srgbClr val="3D424E"/>
-                </a:solidFill>
-              </a:defRPr>
-            </a:pPr>
-            <a:r>
-              <a:t>usando tom de pele como sinal auxiliar.</a:t>
+              <a:t>Mudança central: deixa de ‘decompor o erro’ e passa a ‘construir um pipeline’ que melhora fairness em race classification E em face recognition, usando tom de pele como sinal auxiliar.</a:t>
             </a:r>
           </a:p>
           <a:p>
@@ -3875,7 +3852,7 @@
               </a:defRPr>
             </a:pPr>
             <a:r>
-              <a:t>Big numbers da pesquisa hoje</a:t>
+              <a:t>Big numbers da pesquisa atualmente</a:t>
             </a:r>
           </a:p>
         </p:txBody>
@@ -6953,7 +6930,7 @@
               </a:defRPr>
             </a:pPr>
             <a:r>
-              <a:t>Capítulo 1 (~4 semanas) — Construir o classificador de tom</a:t>
+              <a:t>Capítulo 1 — Construir o classificador de tom</a:t>
             </a:r>
           </a:p>
           <a:p>
@@ -7025,7 +7002,7 @@
               </a:defRPr>
             </a:pPr>
             <a:r>
-              <a:t>Capítulo 2 (~10-12 semanas) — Classificador de raça com tom como contexto</a:t>
+              <a:t>Capítulo 2 — Classificador de raça com tom como contexto</a:t>
             </a:r>
           </a:p>
           <a:p>
@@ -7097,7 +7074,7 @@
               </a:defRPr>
             </a:pPr>
             <a:r>
-              <a:t>Capítulo 3 (~6 semanas) — Aplicar a reconhecimento facial</a:t>
+              <a:t>Capítulo 3 — Aplicar a reconhecimento facial</a:t>
             </a:r>
           </a:p>
           <a:p>
@@ -7903,7 +7880,7 @@
               </a:defRPr>
             </a:pPr>
             <a:r>
-              <a:t>Riscos identificados e como mitigá-los</a:t>
+              <a:t>O que precisamos decidir nesta reunião</a:t>
             </a:r>
           </a:p>
         </p:txBody>
@@ -7984,7 +7961,7 @@
               </a:defRPr>
             </a:pPr>
             <a:r>
-              <a:t>Risco 1 — Alguma hipótese ser refutada</a:t>
+              <a:t>1. Aprovação da nova versão da tese (prescritiva, pipeline integrado)?</a:t>
             </a:r>
           </a:p>
           <a:p>
@@ -7999,7 +7976,22 @@
               </a:defRPr>
             </a:pPr>
             <a:r>
-              <a:t>Plano B documentado. Observação negativa é resultado científico válido.</a:t>
+              <a:t>Se aprovarmos, seguimos para o detalhamento metodológico.</a:t>
+            </a:r>
+          </a:p>
+          <a:p>
+            <a:pPr lvl="1">
+              <a:spcAft>
+                <a:spcPts val="800"/>
+              </a:spcAft>
+              <a:defRPr sz="1700">
+                <a:solidFill>
+                  <a:srgbClr val="707682"/>
+                </a:solidFill>
+              </a:defRPr>
+            </a:pPr>
+            <a:r>
+              <a:t>Se houver ajustes, fazemos e revisamos juntos antes de prosseguir.</a:t>
             </a:r>
           </a:p>
           <a:p>
@@ -8026,7 +8018,7 @@
               </a:defRPr>
             </a:pPr>
             <a:r>
-              <a:t>Risco 2 — Recrutar anotadores diversos para validação manual MST</a:t>
+              <a:t>2. Alguma das 5 hipóteses precisa ser reformulada?</a:t>
             </a:r>
           </a:p>
           <a:p>
@@ -8041,7 +8033,7 @@
               </a:defRPr>
             </a:pPr>
             <a:r>
-              <a:t>Vou usar Prolific Academic com filtros regionais. Custo estimado: $1400 para 700 imagens × 3 anotadores.</a:t>
+              <a:t>São o esqueleto da dissertação — se uma estiver mal formulada, melhor descobrir agora.</a:t>
             </a:r>
           </a:p>
           <a:p>
@@ -8068,7 +8060,7 @@
               </a:defRPr>
             </a:pPr>
             <a:r>
-              <a:t>Risco 3 — Adaptação multi-classe das técnicas baseline</a:t>
+              <a:t>3. Escolha definitiva entre RFW e BFW para o Capítulo 3?</a:t>
             </a:r>
           </a:p>
           <a:p>
@@ -8083,7 +8075,7 @@
               </a:defRPr>
             </a:pPr>
             <a:r>
-              <a:t>Código open-source disponível para todos: FSCL+, Group DRO, FineFACE, Adversarial.</a:t>
+              <a:t>Temos preferência por RFW (mais escala, mais histórico) — precisamos validar essa escolha juntos.</a:t>
             </a:r>
           </a:p>
           <a:p>
@@ -8110,7 +8102,7 @@
               </a:defRPr>
             </a:pPr>
             <a:r>
-              <a:t>Risco 4 — Compute</a:t>
+              <a:t>4. Alguma nova frente de literatura que ficou faltando?</a:t>
             </a:r>
           </a:p>
           <a:p>
@@ -8125,7 +8117,7 @@
               </a:defRPr>
             </a:pPr>
             <a:r>
-              <a:t>ConvNeXt-T é leve (28M parâmetros). Estimativa ~200–400 GPU-horas para Cap 2 completo.</a:t>
+              <a:t>Podemos fazer Rodada 6 se necessário, mas o corpus já está consistente.</a:t>
             </a:r>
           </a:p>
         </p:txBody>
@@ -8150,49 +8142,14 @@
       <p:grpSpPr/>
       <p:sp>
         <p:nvSpPr>
-          <p:cNvPr id="2" name="TextBox 1"/>
-          <p:cNvSpPr txBox="1"/>
-          <p:nvPr/>
-        </p:nvSpPr>
-        <p:spPr>
-          <a:xfrm>
-            <a:off x="457200" y="365760"/>
-            <a:ext cx="11430000" cy="822960"/>
-          </a:xfrm>
-          <a:prstGeom prst="rect">
-            <a:avLst/>
-          </a:prstGeom>
-          <a:noFill/>
-        </p:spPr>
-        <p:txBody>
-          <a:bodyPr wrap="square">
-            <a:spAutoFit/>
-          </a:bodyPr>
-          <a:lstStyle/>
-          <a:p>
-            <a:pPr>
-              <a:defRPr sz="3000" b="1">
-                <a:solidFill>
-                  <a:srgbClr val="1F2A4E"/>
-                </a:solidFill>
-              </a:defRPr>
-            </a:pPr>
-            <a:r>
-              <a:t>O que precisamos decidir nesta reunião</a:t>
-            </a:r>
-          </a:p>
-        </p:txBody>
-      </p:sp>
-      <p:sp>
-        <p:nvSpPr>
-          <p:cNvPr id="3" name="Rectangle 2"/>
+          <p:cNvPr id="2" name="Rectangle 1"/>
           <p:cNvSpPr/>
           <p:nvPr/>
         </p:nvSpPr>
         <p:spPr>
           <a:xfrm>
-            <a:off x="457200" y="1143000"/>
-            <a:ext cx="11430000" cy="45720"/>
+            <a:off x="0" y="0"/>
+            <a:ext cx="12191695" cy="6858000"/>
           </a:xfrm>
           <a:prstGeom prst="rect">
             <a:avLst/>
@@ -8228,14 +8185,14 @@
       </p:sp>
       <p:sp>
         <p:nvSpPr>
-          <p:cNvPr id="4" name="TextBox 3"/>
+          <p:cNvPr id="3" name="TextBox 2"/>
           <p:cNvSpPr txBox="1"/>
           <p:nvPr/>
         </p:nvSpPr>
         <p:spPr>
           <a:xfrm>
-            <a:off x="548640" y="1371600"/>
-            <a:ext cx="11247120" cy="4937760"/>
+            <a:off x="914400" y="2286000"/>
+            <a:ext cx="10332720" cy="2286000"/>
           </a:xfrm>
           <a:prstGeom prst="rect">
             <a:avLst/>
@@ -8248,174 +8205,27 @@
           </a:bodyPr>
           <a:lstStyle/>
           <a:p>
-            <a:pPr>
-              <a:spcAft>
-                <a:spcPts val="800"/>
-              </a:spcAft>
-              <a:defRPr sz="2000" b="0">
-                <a:solidFill>
-                  <a:srgbClr val="3D424E"/>
-                </a:solidFill>
-              </a:defRPr>
-            </a:pPr>
-            <a:r>
-              <a:t>1. Aprovação da nova versão da tese (prescritiva, pipeline integrado)?</a:t>
-            </a:r>
-          </a:p>
-          <a:p>
-            <a:pPr lvl="1">
-              <a:spcAft>
-                <a:spcPts val="800"/>
-              </a:spcAft>
-              <a:defRPr sz="1700">
-                <a:solidFill>
-                  <a:srgbClr val="707682"/>
-                </a:solidFill>
-              </a:defRPr>
-            </a:pPr>
-            <a:r>
-              <a:t>Se aprovarmos, seguimos para o detalhamento metodológico.</a:t>
-            </a:r>
-          </a:p>
-          <a:p>
-            <a:pPr lvl="1">
-              <a:spcAft>
-                <a:spcPts val="800"/>
-              </a:spcAft>
-              <a:defRPr sz="1700">
-                <a:solidFill>
-                  <a:srgbClr val="707682"/>
-                </a:solidFill>
-              </a:defRPr>
-            </a:pPr>
-            <a:r>
-              <a:t>Se houver ajustes, fazemos e revisamos juntos antes de prosseguir.</a:t>
-            </a:r>
-          </a:p>
-          <a:p>
-            <a:pPr>
-              <a:spcAft>
-                <a:spcPts val="800"/>
-              </a:spcAft>
-              <a:defRPr sz="2000" b="0">
-                <a:solidFill>
-                  <a:srgbClr val="3D424E"/>
-                </a:solidFill>
-              </a:defRPr>
-            </a:pPr>
-          </a:p>
-          <a:p>
-            <a:pPr>
-              <a:spcAft>
-                <a:spcPts val="800"/>
-              </a:spcAft>
-              <a:defRPr sz="2000" b="0">
-                <a:solidFill>
-                  <a:srgbClr val="3D424E"/>
-                </a:solidFill>
-              </a:defRPr>
-            </a:pPr>
-            <a:r>
-              <a:t>2. Alguma das 5 hipóteses precisa ser reformulada?</a:t>
-            </a:r>
-          </a:p>
-          <a:p>
-            <a:pPr lvl="1">
-              <a:spcAft>
-                <a:spcPts val="800"/>
-              </a:spcAft>
-              <a:defRPr sz="1700">
-                <a:solidFill>
-                  <a:srgbClr val="707682"/>
-                </a:solidFill>
-              </a:defRPr>
-            </a:pPr>
-            <a:r>
-              <a:t>São o esqueleto da dissertação — se uma estiver mal formulada, melhor descobrir agora.</a:t>
-            </a:r>
-          </a:p>
-          <a:p>
-            <a:pPr>
-              <a:spcAft>
-                <a:spcPts val="800"/>
-              </a:spcAft>
-              <a:defRPr sz="2000" b="0">
-                <a:solidFill>
-                  <a:srgbClr val="3D424E"/>
-                </a:solidFill>
-              </a:defRPr>
-            </a:pPr>
-          </a:p>
-          <a:p>
-            <a:pPr>
-              <a:spcAft>
-                <a:spcPts val="800"/>
-              </a:spcAft>
-              <a:defRPr sz="2000" b="0">
-                <a:solidFill>
-                  <a:srgbClr val="3D424E"/>
-                </a:solidFill>
-              </a:defRPr>
-            </a:pPr>
-            <a:r>
-              <a:t>3. Escolha definitiva entre RFW e BFW para o Capítulo 3?</a:t>
-            </a:r>
-          </a:p>
-          <a:p>
-            <a:pPr lvl="1">
-              <a:spcAft>
-                <a:spcPts val="800"/>
-              </a:spcAft>
-              <a:defRPr sz="1700">
-                <a:solidFill>
-                  <a:srgbClr val="707682"/>
-                </a:solidFill>
-              </a:defRPr>
-            </a:pPr>
-            <a:r>
-              <a:t>Temos preferência por RFW (mais escala, mais histórico) — precisamos validar essa escolha juntos.</a:t>
-            </a:r>
-          </a:p>
-          <a:p>
-            <a:pPr>
-              <a:spcAft>
-                <a:spcPts val="800"/>
-              </a:spcAft>
-              <a:defRPr sz="2000" b="0">
-                <a:solidFill>
-                  <a:srgbClr val="3D424E"/>
-                </a:solidFill>
-              </a:defRPr>
-            </a:pPr>
-          </a:p>
-          <a:p>
-            <a:pPr>
-              <a:spcAft>
-                <a:spcPts val="800"/>
-              </a:spcAft>
-              <a:defRPr sz="2000" b="0">
-                <a:solidFill>
-                  <a:srgbClr val="3D424E"/>
-                </a:solidFill>
-              </a:defRPr>
-            </a:pPr>
-            <a:r>
-              <a:t>4. Alguma nova frente de literatura que ficou faltando?</a:t>
-            </a:r>
-          </a:p>
-          <a:p>
-            <a:pPr lvl="1">
-              <a:spcAft>
-                <a:spcPts val="800"/>
-              </a:spcAft>
-              <a:defRPr sz="1700">
-                <a:solidFill>
-                  <a:srgbClr val="707682"/>
-                </a:solidFill>
-              </a:defRPr>
-            </a:pPr>
-            <a:r>
-              <a:t>Podemos fazer Rodada 6 se necessário, mas o corpus já está consistente.</a:t>
+            <a:pPr algn="ctr">
+              <a:defRPr sz="4800" b="1">
+                <a:solidFill>
+                  <a:srgbClr val="FFFFFF"/>
+                </a:solidFill>
+              </a:defRPr>
+            </a:pPr>
+            <a:r>
+              <a:t>Discussão e feedback</a:t>
+            </a:r>
+          </a:p>
+          <a:p>
+            <a:pPr algn="ctr">
+              <a:defRPr sz="2200">
+                <a:solidFill>
+                  <a:srgbClr val="E8EAED"/>
+                </a:solidFill>
+              </a:defRPr>
+            </a:pPr>
+            <a:r>
+              <a:t>Aprovação da nova versão da tese — decidir os 4 itens acima</a:t>
             </a:r>
           </a:p>
         </p:txBody>
@@ -8489,8 +8299,43 @@
         </p:nvSpPr>
         <p:spPr>
           <a:xfrm>
-            <a:off x="914400" y="2286000"/>
-            <a:ext cx="10332720" cy="2286000"/>
+            <a:off x="731520" y="1371600"/>
+            <a:ext cx="2743200" cy="2743200"/>
+          </a:xfrm>
+          <a:prstGeom prst="rect">
+            <a:avLst/>
+          </a:prstGeom>
+          <a:noFill/>
+        </p:spPr>
+        <p:txBody>
+          <a:bodyPr wrap="none">
+            <a:spAutoFit/>
+          </a:bodyPr>
+          <a:lstStyle/>
+          <a:p>
+            <a:pPr>
+              <a:defRPr sz="13000" b="1">
+                <a:solidFill>
+                  <a:srgbClr val="FFFFFF"/>
+                </a:solidFill>
+              </a:defRPr>
+            </a:pPr>
+            <a:r>
+              <a:t>★</a:t>
+            </a:r>
+          </a:p>
+        </p:txBody>
+      </p:sp>
+      <p:sp>
+        <p:nvSpPr>
+          <p:cNvPr id="4" name="TextBox 3"/>
+          <p:cNvSpPr txBox="1"/>
+          <p:nvPr/>
+        </p:nvSpPr>
+        <p:spPr>
+          <a:xfrm>
+            <a:off x="3931920" y="2286000"/>
+            <a:ext cx="7772400" cy="1828800"/>
           </a:xfrm>
           <a:prstGeom prst="rect">
             <a:avLst/>
@@ -8503,27 +8348,1048 @@
           </a:bodyPr>
           <a:lstStyle/>
           <a:p>
+            <a:pPr>
+              <a:defRPr sz="3600" b="1">
+                <a:solidFill>
+                  <a:srgbClr val="FFFFFF"/>
+                </a:solidFill>
+              </a:defRPr>
+            </a:pPr>
+            <a:r>
+              <a:t>Slides de apoio</a:t>
+            </a:r>
+          </a:p>
+          <a:p>
+            <a:pPr>
+              <a:defRPr sz="2000">
+                <a:solidFill>
+                  <a:srgbClr val="E8EAED"/>
+                </a:solidFill>
+              </a:defRPr>
+            </a:pPr>
+            <a:r>
+              <a:t>Material complementar para consulta durante a discussão</a:t>
+            </a:r>
+          </a:p>
+        </p:txBody>
+      </p:sp>
+    </p:spTree>
+  </p:cSld>
+  <p:clrMapOvr>
+    <a:masterClrMapping/>
+  </p:clrMapOvr>
+</p:sld>
+</file>
+
+<file path=ppt/slides/slide27.xml><?xml version="1.0" encoding="utf-8"?>
+<p:sld xmlns:a="http://schemas.openxmlformats.org/drawingml/2006/main" xmlns:p="http://schemas.openxmlformats.org/presentationml/2006/main" xmlns:r="http://schemas.openxmlformats.org/officeDocument/2006/relationships">
+  <p:cSld>
+    <p:spTree>
+      <p:nvGrpSpPr>
+        <p:cNvPr id="1" name=""/>
+        <p:cNvGrpSpPr/>
+        <p:nvPr/>
+      </p:nvGrpSpPr>
+      <p:grpSpPr/>
+      <p:sp>
+        <p:nvSpPr>
+          <p:cNvPr id="2" name="TextBox 1"/>
+          <p:cNvSpPr txBox="1"/>
+          <p:nvPr/>
+        </p:nvSpPr>
+        <p:spPr>
+          <a:xfrm>
+            <a:off x="457200" y="365760"/>
+            <a:ext cx="11430000" cy="822960"/>
+          </a:xfrm>
+          <a:prstGeom prst="rect">
+            <a:avLst/>
+          </a:prstGeom>
+          <a:noFill/>
+        </p:spPr>
+        <p:txBody>
+          <a:bodyPr wrap="none">
+            <a:spAutoFit/>
+          </a:bodyPr>
+          <a:lstStyle/>
+          <a:p>
+            <a:pPr>
+              <a:defRPr sz="2800" b="1">
+                <a:solidFill>
+                  <a:srgbClr val="1F2A4E"/>
+                </a:solidFill>
+              </a:defRPr>
+            </a:pPr>
+            <a:r>
+              <a:t>As 14 perguntas de pesquisa respondidas</a:t>
+            </a:r>
+          </a:p>
+        </p:txBody>
+      </p:sp>
+      <p:sp>
+        <p:nvSpPr>
+          <p:cNvPr id="3" name="Rectangle 2"/>
+          <p:cNvSpPr/>
+          <p:nvPr/>
+        </p:nvSpPr>
+        <p:spPr>
+          <a:xfrm>
+            <a:off x="457200" y="1097280"/>
+            <a:ext cx="11430000" cy="45720"/>
+          </a:xfrm>
+          <a:prstGeom prst="rect">
+            <a:avLst/>
+          </a:prstGeom>
+          <a:solidFill>
+            <a:srgbClr val="1F2A4E"/>
+          </a:solidFill>
+          <a:ln>
+            <a:noFill/>
+          </a:ln>
+        </p:spPr>
+        <p:style>
+          <a:lnRef idx="1">
+            <a:schemeClr val="accent1"/>
+          </a:lnRef>
+          <a:fillRef idx="3">
+            <a:schemeClr val="accent1"/>
+          </a:fillRef>
+          <a:effectRef idx="2">
+            <a:schemeClr val="accent1"/>
+          </a:effectRef>
+          <a:fontRef idx="minor">
+            <a:schemeClr val="lt1"/>
+          </a:fontRef>
+        </p:style>
+        <p:txBody>
+          <a:bodyPr rtlCol="0" anchor="ctr"/>
+          <a:lstStyle/>
+          <a:p>
+            <a:pPr algn="ctr"/>
+          </a:p>
+        </p:txBody>
+      </p:sp>
+      <p:sp>
+        <p:nvSpPr>
+          <p:cNvPr id="4" name="TextBox 3"/>
+          <p:cNvSpPr txBox="1"/>
+          <p:nvPr/>
+        </p:nvSpPr>
+        <p:spPr>
+          <a:xfrm>
+            <a:off x="548640" y="1280160"/>
+            <a:ext cx="5577840" cy="5029200"/>
+          </a:xfrm>
+          <a:prstGeom prst="rect">
+            <a:avLst/>
+          </a:prstGeom>
+          <a:noFill/>
+        </p:spPr>
+        <p:txBody>
+          <a:bodyPr wrap="square">
+            <a:spAutoFit/>
+          </a:bodyPr>
+          <a:lstStyle/>
+          <a:p>
+            <a:pPr>
+              <a:spcAft>
+                <a:spcPts val="600"/>
+              </a:spcAft>
+            </a:pPr>
+            <a:r>
+              <a:rPr b="1" sz="1300">
+                <a:solidFill>
+                  <a:srgbClr val="1F2A4E"/>
+                </a:solidFill>
+              </a:rPr>
+              <a:t>Q01  </a:t>
+            </a:r>
+            <a:r>
+              <a:rPr sz="1300">
+                <a:solidFill>
+                  <a:srgbClr val="3D424E"/>
+                </a:solidFill>
+              </a:rPr>
+              <a:t>Existem melhores datasets para corrigir fairness em biometria facial de raças?</a:t>
+            </a:r>
+          </a:p>
+          <a:p>
+            <a:pPr>
+              <a:spcAft>
+                <a:spcPts val="600"/>
+              </a:spcAft>
+            </a:pPr>
+            <a:r>
+              <a:rPr b="1" sz="1300">
+                <a:solidFill>
+                  <a:srgbClr val="1F2A4E"/>
+                </a:solidFill>
+              </a:rPr>
+              <a:t>Q02  </a:t>
+            </a:r>
+            <a:r>
+              <a:rPr sz="1300">
+                <a:solidFill>
+                  <a:srgbClr val="3D424E"/>
+                </a:solidFill>
+              </a:rPr>
+              <a:t>Qual o dataset mais utilizado nos estudos de fairness?</a:t>
+            </a:r>
+          </a:p>
+          <a:p>
+            <a:pPr>
+              <a:spcAft>
+                <a:spcPts val="600"/>
+              </a:spcAft>
+            </a:pPr>
+            <a:r>
+              <a:rPr b="1" sz="1300">
+                <a:solidFill>
+                  <a:srgbClr val="1F2A4E"/>
+                </a:solidFill>
+              </a:rPr>
+              <a:t>Q03  </a:t>
+            </a:r>
+            <a:r>
+              <a:rPr sz="1300">
+                <a:solidFill>
+                  <a:srgbClr val="3D424E"/>
+                </a:solidFill>
+              </a:rPr>
+              <a:t>Qual o split oficial do FairFace e por que diferentes papers usam splits distintos?</a:t>
+            </a:r>
+          </a:p>
+          <a:p>
+            <a:pPr>
+              <a:spcAft>
+                <a:spcPts val="600"/>
+              </a:spcAft>
+            </a:pPr>
+            <a:r>
+              <a:rPr b="1" sz="1300">
+                <a:solidFill>
+                  <a:srgbClr val="1F2A4E"/>
+                </a:solidFill>
+              </a:rPr>
+              <a:t>Q04  </a:t>
+            </a:r>
+            <a:r>
+              <a:rPr sz="1300">
+                <a:solidFill>
+                  <a:srgbClr val="3D424E"/>
+                </a:solidFill>
+              </a:rPr>
+              <a:t>Quais técnicas de mitigação algorítmica já foram testadas em FairFace race 7-class?</a:t>
+            </a:r>
+          </a:p>
+          <a:p>
+            <a:pPr>
+              <a:spcAft>
+                <a:spcPts val="600"/>
+              </a:spcAft>
+            </a:pPr>
+            <a:r>
+              <a:rPr b="1" sz="1300">
+                <a:solidFill>
+                  <a:srgbClr val="1F2A4E"/>
+                </a:solidFill>
+              </a:rPr>
+              <a:t>Q05  </a:t>
+            </a:r>
+            <a:r>
+              <a:rPr sz="1300">
+                <a:solidFill>
+                  <a:srgbClr val="3D424E"/>
+                </a:solidFill>
+              </a:rPr>
+              <a:t>Existe consenso sobre métrica de fairness para classificação multi-classe?</a:t>
+            </a:r>
+          </a:p>
+          <a:p>
+            <a:pPr>
+              <a:spcAft>
+                <a:spcPts val="600"/>
+              </a:spcAft>
+            </a:pPr>
+            <a:r>
+              <a:rPr b="1" sz="1300">
+                <a:solidFill>
+                  <a:srgbClr val="1F2A4E"/>
+                </a:solidFill>
+              </a:rPr>
+              <a:t>Q06  </a:t>
+            </a:r>
+            <a:r>
+              <a:rPr sz="1300">
+                <a:solidFill>
+                  <a:srgbClr val="3D424E"/>
+                </a:solidFill>
+              </a:rPr>
+              <a:t>O baseline ResNet-34 = 72% acurácia é teto da arquitetura ou da metodologia?</a:t>
+            </a:r>
+          </a:p>
+          <a:p>
+            <a:pPr>
+              <a:spcAft>
+                <a:spcPts val="600"/>
+              </a:spcAft>
+            </a:pPr>
+            <a:r>
+              <a:rPr b="1" sz="1300">
+                <a:solidFill>
+                  <a:srgbClr val="1F2A4E"/>
+                </a:solidFill>
+              </a:rPr>
+              <a:t>Q07  </a:t>
+            </a:r>
+            <a:r>
+              <a:rPr sz="1300">
+                <a:solidFill>
+                  <a:srgbClr val="3D424E"/>
+                </a:solidFill>
+              </a:rPr>
+              <a:t>Existe pesquisa de fairness em biometria facial sem usar FairFace?</a:t>
+            </a:r>
+          </a:p>
+        </p:txBody>
+      </p:sp>
+      <p:sp>
+        <p:nvSpPr>
+          <p:cNvPr id="5" name="TextBox 4"/>
+          <p:cNvSpPr txBox="1"/>
+          <p:nvPr/>
+        </p:nvSpPr>
+        <p:spPr>
+          <a:xfrm>
+            <a:off x="6263640" y="1280160"/>
+            <a:ext cx="5577840" cy="5029200"/>
+          </a:xfrm>
+          <a:prstGeom prst="rect">
+            <a:avLst/>
+          </a:prstGeom>
+          <a:noFill/>
+        </p:spPr>
+        <p:txBody>
+          <a:bodyPr wrap="square">
+            <a:spAutoFit/>
+          </a:bodyPr>
+          <a:lstStyle/>
+          <a:p>
+            <a:pPr>
+              <a:spcAft>
+                <a:spcPts val="600"/>
+              </a:spcAft>
+            </a:pPr>
+            <a:r>
+              <a:rPr b="1" sz="1300">
+                <a:solidFill>
+                  <a:srgbClr val="1F2A4E"/>
+                </a:solidFill>
+              </a:rPr>
+              <a:t>Q08  </a:t>
+            </a:r>
+            <a:r>
+              <a:rPr sz="1300">
+                <a:solidFill>
+                  <a:srgbClr val="3D424E"/>
+                </a:solidFill>
+              </a:rPr>
+              <a:t>Por que os estudos tentam sempre fazer merge de classes raciais?</a:t>
+            </a:r>
+          </a:p>
+          <a:p>
+            <a:pPr>
+              <a:spcAft>
+                <a:spcPts val="600"/>
+              </a:spcAft>
+            </a:pPr>
+            <a:r>
+              <a:rPr b="1" sz="1300">
+                <a:solidFill>
+                  <a:srgbClr val="1F2A4E"/>
+                </a:solidFill>
+              </a:rPr>
+              <a:t>Q09  </a:t>
+            </a:r>
+            <a:r>
+              <a:rPr sz="1300">
+                <a:solidFill>
+                  <a:srgbClr val="3D424E"/>
+                </a:solidFill>
+              </a:rPr>
+              <a:t>7 classes é realmente a taxonomia correta para fairness racial facial?</a:t>
+            </a:r>
+          </a:p>
+          <a:p>
+            <a:pPr>
+              <a:spcAft>
+                <a:spcPts val="600"/>
+              </a:spcAft>
+            </a:pPr>
+            <a:r>
+              <a:rPr b="1" sz="1300">
+                <a:solidFill>
+                  <a:srgbClr val="1F2A4E"/>
+                </a:solidFill>
+              </a:rPr>
+              <a:t>Q10  </a:t>
+            </a:r>
+            <a:r>
+              <a:rPr sz="1300">
+                <a:solidFill>
+                  <a:srgbClr val="3D424E"/>
+                </a:solidFill>
+              </a:rPr>
+              <a:t>Existe matriz associativa Fitzpatrick/MST × FairFace 7-race?</a:t>
+            </a:r>
+          </a:p>
+          <a:p>
+            <a:pPr>
+              <a:spcAft>
+                <a:spcPts val="600"/>
+              </a:spcAft>
+            </a:pPr>
+            <a:r>
+              <a:rPr b="1" sz="1300">
+                <a:solidFill>
+                  <a:srgbClr val="1F2A4E"/>
+                </a:solidFill>
+              </a:rPr>
+              <a:t>Q11  </a:t>
+            </a:r>
+            <a:r>
+              <a:rPr sz="1300">
+                <a:solidFill>
+                  <a:srgbClr val="3D424E"/>
+                </a:solidFill>
+              </a:rPr>
+              <a:t>As 7 categorias raciais do FairFace têm fundamento biológico ou socio-político?</a:t>
+            </a:r>
+          </a:p>
+          <a:p>
+            <a:pPr>
+              <a:spcAft>
+                <a:spcPts val="600"/>
+              </a:spcAft>
+            </a:pPr>
+            <a:r>
+              <a:rPr b="1" sz="1300">
+                <a:solidFill>
+                  <a:srgbClr val="1F2A4E"/>
+                </a:solidFill>
+              </a:rPr>
+              <a:t>Q12  </a:t>
+            </a:r>
+            <a:r>
+              <a:rPr sz="1300">
+                <a:solidFill>
+                  <a:srgbClr val="3D424E"/>
+                </a:solidFill>
+              </a:rPr>
+              <a:t>Como antropologia forense moderna trata 'raça'?</a:t>
+            </a:r>
+          </a:p>
+          <a:p>
+            <a:pPr>
+              <a:spcAft>
+                <a:spcPts val="600"/>
+              </a:spcAft>
+            </a:pPr>
+            <a:r>
+              <a:rPr b="1" sz="1300">
+                <a:solidFill>
+                  <a:srgbClr val="1F2A4E"/>
+                </a:solidFill>
+              </a:rPr>
+              <a:t>Q13  </a:t>
+            </a:r>
+            <a:r>
+              <a:rPr sz="1300">
+                <a:solidFill>
+                  <a:srgbClr val="3D424E"/>
+                </a:solidFill>
+              </a:rPr>
+              <a:t>Origem e propósito da escala Fitzpatrick — para que foi criada?</a:t>
+            </a:r>
+          </a:p>
+          <a:p>
+            <a:pPr>
+              <a:spcAft>
+                <a:spcPts val="600"/>
+              </a:spcAft>
+            </a:pPr>
+            <a:r>
+              <a:rPr b="1" sz="1300">
+                <a:solidFill>
+                  <a:srgbClr val="1F2A4E"/>
+                </a:solidFill>
+              </a:rPr>
+              <a:t>Q14  </a:t>
+            </a:r>
+            <a:r>
+              <a:rPr sz="1300">
+                <a:solidFill>
+                  <a:srgbClr val="3D424E"/>
+                </a:solidFill>
+              </a:rPr>
+              <a:t>Quantos tons de pele existem cientificamente?</a:t>
+            </a:r>
+          </a:p>
+        </p:txBody>
+      </p:sp>
+      <p:sp>
+        <p:nvSpPr>
+          <p:cNvPr id="6" name="TextBox 5"/>
+          <p:cNvSpPr txBox="1"/>
+          <p:nvPr/>
+        </p:nvSpPr>
+        <p:spPr>
+          <a:xfrm>
+            <a:off x="457200" y="6446520"/>
+            <a:ext cx="11430000" cy="365760"/>
+          </a:xfrm>
+          <a:prstGeom prst="rect">
+            <a:avLst/>
+          </a:prstGeom>
+          <a:noFill/>
+        </p:spPr>
+        <p:txBody>
+          <a:bodyPr wrap="none">
+            <a:spAutoFit/>
+          </a:bodyPr>
+          <a:lstStyle/>
+          <a:p>
+            <a:pPr>
+              <a:defRPr sz="1300" i="1">
+                <a:solidFill>
+                  <a:srgbClr val="707682"/>
+                </a:solidFill>
+              </a:defRPr>
+            </a:pPr>
+            <a:r>
+              <a:t>Detalhamento completo em docs/ativo/04_pesquisa_bibliografica/_perguntas.md</a:t>
+            </a:r>
+          </a:p>
+        </p:txBody>
+      </p:sp>
+    </p:spTree>
+  </p:cSld>
+  <p:clrMapOvr>
+    <a:masterClrMapping/>
+  </p:clrMapOvr>
+</p:sld>
+</file>
+
+<file path=ppt/slides/slide28.xml><?xml version="1.0" encoding="utf-8"?>
+<p:sld xmlns:a="http://schemas.openxmlformats.org/drawingml/2006/main" xmlns:p="http://schemas.openxmlformats.org/presentationml/2006/main" xmlns:r="http://schemas.openxmlformats.org/officeDocument/2006/relationships">
+  <p:cSld>
+    <p:spTree>
+      <p:nvGrpSpPr>
+        <p:cNvPr id="1" name=""/>
+        <p:cNvGrpSpPr/>
+        <p:nvPr/>
+      </p:nvGrpSpPr>
+      <p:grpSpPr/>
+      <p:sp>
+        <p:nvSpPr>
+          <p:cNvPr id="2" name="TextBox 1"/>
+          <p:cNvSpPr txBox="1"/>
+          <p:nvPr/>
+        </p:nvSpPr>
+        <p:spPr>
+          <a:xfrm>
+            <a:off x="457200" y="365760"/>
+            <a:ext cx="11430000" cy="822960"/>
+          </a:xfrm>
+          <a:prstGeom prst="rect">
+            <a:avLst/>
+          </a:prstGeom>
+          <a:noFill/>
+        </p:spPr>
+        <p:txBody>
+          <a:bodyPr wrap="none">
+            <a:spAutoFit/>
+          </a:bodyPr>
+          <a:lstStyle/>
+          <a:p>
+            <a:pPr>
+              <a:defRPr sz="2400" b="1">
+                <a:solidFill>
+                  <a:srgbClr val="1F2A4E"/>
+                </a:solidFill>
+              </a:defRPr>
+            </a:pPr>
+            <a:r>
+              <a:t>Pangelinan et al. (2023) — Causas de variação demográfica em FR</a:t>
+            </a:r>
+          </a:p>
+        </p:txBody>
+      </p:sp>
+      <p:sp>
+        <p:nvSpPr>
+          <p:cNvPr id="3" name="TextBox 2"/>
+          <p:cNvSpPr txBox="1"/>
+          <p:nvPr/>
+        </p:nvSpPr>
+        <p:spPr>
+          <a:xfrm>
+            <a:off x="457200" y="1051560"/>
+            <a:ext cx="11430000" cy="365760"/>
+          </a:xfrm>
+          <a:prstGeom prst="rect">
+            <a:avLst/>
+          </a:prstGeom>
+          <a:noFill/>
+        </p:spPr>
+        <p:txBody>
+          <a:bodyPr wrap="none">
+            <a:spAutoFit/>
+          </a:bodyPr>
+          <a:lstStyle/>
+          <a:p>
+            <a:pPr>
+              <a:defRPr sz="1400" i="1">
+                <a:solidFill>
+                  <a:srgbClr val="707682"/>
+                </a:solidFill>
+              </a:defRPr>
+            </a:pPr>
+            <a:r>
+              <a:t>arXiv:2304.07175 — autores Notre Dame / Florida Tech</a:t>
+            </a:r>
+          </a:p>
+        </p:txBody>
+      </p:sp>
+      <p:sp>
+        <p:nvSpPr>
+          <p:cNvPr id="4" name="Rectangle 3"/>
+          <p:cNvSpPr/>
+          <p:nvPr/>
+        </p:nvSpPr>
+        <p:spPr>
+          <a:xfrm>
+            <a:off x="457200" y="1463040"/>
+            <a:ext cx="11430000" cy="45720"/>
+          </a:xfrm>
+          <a:prstGeom prst="rect">
+            <a:avLst/>
+          </a:prstGeom>
+          <a:solidFill>
+            <a:srgbClr val="C0392B"/>
+          </a:solidFill>
+          <a:ln>
+            <a:noFill/>
+          </a:ln>
+        </p:spPr>
+        <p:style>
+          <a:lnRef idx="1">
+            <a:schemeClr val="accent1"/>
+          </a:lnRef>
+          <a:fillRef idx="3">
+            <a:schemeClr val="accent1"/>
+          </a:fillRef>
+          <a:effectRef idx="2">
+            <a:schemeClr val="accent1"/>
+          </a:effectRef>
+          <a:fontRef idx="minor">
+            <a:schemeClr val="lt1"/>
+          </a:fontRef>
+        </p:style>
+        <p:txBody>
+          <a:bodyPr rtlCol="0" anchor="ctr"/>
+          <a:lstStyle/>
+          <a:p>
+            <a:pPr algn="ctr"/>
+          </a:p>
+        </p:txBody>
+      </p:sp>
+      <p:sp>
+        <p:nvSpPr>
+          <p:cNvPr id="5" name="Rounded Rectangle 4"/>
+          <p:cNvSpPr/>
+          <p:nvPr/>
+        </p:nvSpPr>
+        <p:spPr>
+          <a:xfrm>
+            <a:off x="548640" y="1828800"/>
+            <a:ext cx="11064240" cy="2103120"/>
+          </a:xfrm>
+          <a:prstGeom prst="roundRect">
+            <a:avLst/>
+          </a:prstGeom>
+          <a:solidFill>
+            <a:srgbClr val="E8EAED"/>
+          </a:solidFill>
+          <a:ln>
+            <a:noFill/>
+          </a:ln>
+        </p:spPr>
+        <p:style>
+          <a:lnRef idx="1">
+            <a:schemeClr val="accent1"/>
+          </a:lnRef>
+          <a:fillRef idx="3">
+            <a:schemeClr val="accent1"/>
+          </a:fillRef>
+          <a:effectRef idx="2">
+            <a:schemeClr val="accent1"/>
+          </a:effectRef>
+          <a:fontRef idx="minor">
+            <a:schemeClr val="lt1"/>
+          </a:fontRef>
+        </p:style>
+        <p:txBody>
+          <a:bodyPr rtlCol="0" anchor="ctr" wrap="square" lIns="274320" rIns="274320" tIns="137160"/>
+          <a:lstStyle/>
+          <a:p>
             <a:pPr algn="ctr">
-              <a:defRPr sz="4800" b="1">
-                <a:solidFill>
-                  <a:srgbClr val="FFFFFF"/>
-                </a:solidFill>
-              </a:defRPr>
-            </a:pPr>
-            <a:r>
-              <a:t>Discussão e feedback</a:t>
-            </a:r>
-          </a:p>
+              <a:defRPr sz="1400" b="1">
+                <a:solidFill>
+                  <a:srgbClr val="1F2A4E"/>
+                </a:solidFill>
+              </a:defRPr>
+            </a:pPr>
+            <a:r>
+              <a:t>O que defende</a:t>
+            </a:r>
+          </a:p>
+          <a:p>
+            <a:pPr>
+              <a:defRPr sz="1600">
+                <a:solidFill>
+                  <a:srgbClr val="3D424E"/>
+                </a:solidFill>
+              </a:defRPr>
+            </a:pPr>
+            <a:r>
+              <a:t>Analisa POR QUE a accuracy de face recognition varia entre grupos demográficos. Conclui que diferenças de pixel info da face nas imagens de teste explicam mais variação do que tom de pele direto.</a:t>
+            </a:r>
+          </a:p>
+        </p:txBody>
+      </p:sp>
+      <p:sp>
+        <p:nvSpPr>
+          <p:cNvPr id="6" name="Rounded Rectangle 5"/>
+          <p:cNvSpPr/>
+          <p:nvPr/>
+        </p:nvSpPr>
+        <p:spPr>
+          <a:xfrm>
+            <a:off x="548640" y="4114800"/>
+            <a:ext cx="11064240" cy="2194560"/>
+          </a:xfrm>
+          <a:prstGeom prst="roundRect">
+            <a:avLst/>
+          </a:prstGeom>
+          <a:solidFill>
+            <a:srgbClr val="FFFFFF"/>
+          </a:solidFill>
+          <a:ln w="19050">
+            <a:solidFill>
+              <a:srgbClr val="C0392B"/>
+            </a:solidFill>
+          </a:ln>
+        </p:spPr>
+        <p:style>
+          <a:lnRef idx="1">
+            <a:schemeClr val="accent1"/>
+          </a:lnRef>
+          <a:fillRef idx="3">
+            <a:schemeClr val="accent1"/>
+          </a:fillRef>
+          <a:effectRef idx="2">
+            <a:schemeClr val="accent1"/>
+          </a:effectRef>
+          <a:fontRef idx="minor">
+            <a:schemeClr val="lt1"/>
+          </a:fontRef>
+        </p:style>
+        <p:txBody>
+          <a:bodyPr rtlCol="0" anchor="ctr" wrap="square" lIns="274320" rIns="274320" tIns="137160"/>
+          <a:lstStyle/>
           <a:p>
             <a:pPr algn="ctr">
-              <a:defRPr sz="2200">
-                <a:solidFill>
-                  <a:srgbClr val="E8EAED"/>
-                </a:solidFill>
-              </a:defRPr>
-            </a:pPr>
-            <a:r>
-              <a:t>Aprovação da nova versão da tese — decidir os 4 itens acima</a:t>
+              <a:defRPr sz="1400" b="1">
+                <a:solidFill>
+                  <a:srgbClr val="C0392B"/>
+                </a:solidFill>
+              </a:defRPr>
+            </a:pPr>
+            <a:r>
+              <a:t>Impacto na nossa tese</a:t>
+            </a:r>
+          </a:p>
+          <a:p>
+            <a:pPr>
+              <a:defRPr sz="1600">
+                <a:solidFill>
+                  <a:srgbClr val="3D424E"/>
+                </a:solidFill>
+              </a:defRPr>
+            </a:pPr>
+            <a:r>
+              <a:t>Refutação potencial de H5. Para FR (verificação 1:1), pixel info pode ser causa primária. Motivou reformulação de H5 em discussão na pauta de hoje.</a:t>
+            </a:r>
+          </a:p>
+        </p:txBody>
+      </p:sp>
+    </p:spTree>
+  </p:cSld>
+  <p:clrMapOvr>
+    <a:masterClrMapping/>
+  </p:clrMapOvr>
+</p:sld>
+</file>
+
+<file path=ppt/slides/slide29.xml><?xml version="1.0" encoding="utf-8"?>
+<p:sld xmlns:a="http://schemas.openxmlformats.org/drawingml/2006/main" xmlns:p="http://schemas.openxmlformats.org/presentationml/2006/main" xmlns:r="http://schemas.openxmlformats.org/officeDocument/2006/relationships">
+  <p:cSld>
+    <p:spTree>
+      <p:nvGrpSpPr>
+        <p:cNvPr id="1" name=""/>
+        <p:cNvGrpSpPr/>
+        <p:nvPr/>
+      </p:nvGrpSpPr>
+      <p:grpSpPr/>
+      <p:sp>
+        <p:nvSpPr>
+          <p:cNvPr id="2" name="TextBox 1"/>
+          <p:cNvSpPr txBox="1"/>
+          <p:nvPr/>
+        </p:nvSpPr>
+        <p:spPr>
+          <a:xfrm>
+            <a:off x="457200" y="365760"/>
+            <a:ext cx="11430000" cy="822960"/>
+          </a:xfrm>
+          <a:prstGeom prst="rect">
+            <a:avLst/>
+          </a:prstGeom>
+          <a:noFill/>
+        </p:spPr>
+        <p:txBody>
+          <a:bodyPr wrap="none">
+            <a:spAutoFit/>
+          </a:bodyPr>
+          <a:lstStyle/>
+          <a:p>
+            <a:pPr>
+              <a:defRPr sz="2400" b="1">
+                <a:solidFill>
+                  <a:srgbClr val="1F2A4E"/>
+                </a:solidFill>
+              </a:defRPr>
+            </a:pPr>
+            <a:r>
+              <a:t>Pereira et al. (2026) — SkinToneNet + dataset STW</a:t>
+            </a:r>
+          </a:p>
+        </p:txBody>
+      </p:sp>
+      <p:sp>
+        <p:nvSpPr>
+          <p:cNvPr id="3" name="TextBox 2"/>
+          <p:cNvSpPr txBox="1"/>
+          <p:nvPr/>
+        </p:nvSpPr>
+        <p:spPr>
+          <a:xfrm>
+            <a:off x="457200" y="1051560"/>
+            <a:ext cx="11430000" cy="365760"/>
+          </a:xfrm>
+          <a:prstGeom prst="rect">
+            <a:avLst/>
+          </a:prstGeom>
+          <a:noFill/>
+        </p:spPr>
+        <p:txBody>
+          <a:bodyPr wrap="none">
+            <a:spAutoFit/>
+          </a:bodyPr>
+          <a:lstStyle/>
+          <a:p>
+            <a:pPr>
+              <a:defRPr sz="1400" i="1">
+                <a:solidFill>
+                  <a:srgbClr val="707682"/>
+                </a:solidFill>
+              </a:defRPr>
+            </a:pPr>
+            <a:r>
+              <a:t>arXiv:2603.02475 — autores ICMC-USP / IMPA</a:t>
+            </a:r>
+          </a:p>
+        </p:txBody>
+      </p:sp>
+      <p:sp>
+        <p:nvSpPr>
+          <p:cNvPr id="4" name="Rectangle 3"/>
+          <p:cNvSpPr/>
+          <p:nvPr/>
+        </p:nvSpPr>
+        <p:spPr>
+          <a:xfrm>
+            <a:off x="457200" y="1463040"/>
+            <a:ext cx="11430000" cy="45720"/>
+          </a:xfrm>
+          <a:prstGeom prst="rect">
+            <a:avLst/>
+          </a:prstGeom>
+          <a:solidFill>
+            <a:srgbClr val="2E7D32"/>
+          </a:solidFill>
+          <a:ln>
+            <a:noFill/>
+          </a:ln>
+        </p:spPr>
+        <p:style>
+          <a:lnRef idx="1">
+            <a:schemeClr val="accent1"/>
+          </a:lnRef>
+          <a:fillRef idx="3">
+            <a:schemeClr val="accent1"/>
+          </a:fillRef>
+          <a:effectRef idx="2">
+            <a:schemeClr val="accent1"/>
+          </a:effectRef>
+          <a:fontRef idx="minor">
+            <a:schemeClr val="lt1"/>
+          </a:fontRef>
+        </p:style>
+        <p:txBody>
+          <a:bodyPr rtlCol="0" anchor="ctr"/>
+          <a:lstStyle/>
+          <a:p>
+            <a:pPr algn="ctr"/>
+          </a:p>
+        </p:txBody>
+      </p:sp>
+      <p:sp>
+        <p:nvSpPr>
+          <p:cNvPr id="5" name="Rounded Rectangle 4"/>
+          <p:cNvSpPr/>
+          <p:nvPr/>
+        </p:nvSpPr>
+        <p:spPr>
+          <a:xfrm>
+            <a:off x="548640" y="1828800"/>
+            <a:ext cx="11064240" cy="2103120"/>
+          </a:xfrm>
+          <a:prstGeom prst="roundRect">
+            <a:avLst/>
+          </a:prstGeom>
+          <a:solidFill>
+            <a:srgbClr val="E8EAED"/>
+          </a:solidFill>
+          <a:ln>
+            <a:noFill/>
+          </a:ln>
+        </p:spPr>
+        <p:style>
+          <a:lnRef idx="1">
+            <a:schemeClr val="accent1"/>
+          </a:lnRef>
+          <a:fillRef idx="3">
+            <a:schemeClr val="accent1"/>
+          </a:fillRef>
+          <a:effectRef idx="2">
+            <a:schemeClr val="accent1"/>
+          </a:effectRef>
+          <a:fontRef idx="minor">
+            <a:schemeClr val="lt1"/>
+          </a:fontRef>
+        </p:style>
+        <p:txBody>
+          <a:bodyPr rtlCol="0" anchor="ctr" wrap="square" lIns="274320" rIns="274320" tIns="137160"/>
+          <a:lstStyle/>
+          <a:p>
+            <a:pPr algn="ctr">
+              <a:defRPr sz="1400" b="1">
+                <a:solidFill>
+                  <a:srgbClr val="1F2A4E"/>
+                </a:solidFill>
+              </a:defRPr>
+            </a:pPr>
+            <a:r>
+              <a:t>O que defende</a:t>
+            </a:r>
+          </a:p>
+          <a:p>
+            <a:pPr>
+              <a:defRPr sz="1600">
+                <a:solidFill>
+                  <a:srgbClr val="3D424E"/>
+                </a:solidFill>
+              </a:defRPr>
+            </a:pPr>
+            <a:r>
+              <a:t>Propõe classificador MST (ViT-Small fine-tuned) treinado em dataset STW (42 mil imagens, 3,5 mil indivíduos, MST 10 classes). Audita FairFace e reporta ausência sistêmica de MST 6-10. NÃO publica matriz cruzada MST × raça.</a:t>
+            </a:r>
+          </a:p>
+        </p:txBody>
+      </p:sp>
+      <p:sp>
+        <p:nvSpPr>
+          <p:cNvPr id="6" name="Rounded Rectangle 5"/>
+          <p:cNvSpPr/>
+          <p:nvPr/>
+        </p:nvSpPr>
+        <p:spPr>
+          <a:xfrm>
+            <a:off x="548640" y="4114800"/>
+            <a:ext cx="11064240" cy="2194560"/>
+          </a:xfrm>
+          <a:prstGeom prst="roundRect">
+            <a:avLst/>
+          </a:prstGeom>
+          <a:solidFill>
+            <a:srgbClr val="FFFFFF"/>
+          </a:solidFill>
+          <a:ln w="19050">
+            <a:solidFill>
+              <a:srgbClr val="2E7D32"/>
+            </a:solidFill>
+          </a:ln>
+        </p:spPr>
+        <p:style>
+          <a:lnRef idx="1">
+            <a:schemeClr val="accent1"/>
+          </a:lnRef>
+          <a:fillRef idx="3">
+            <a:schemeClr val="accent1"/>
+          </a:fillRef>
+          <a:effectRef idx="2">
+            <a:schemeClr val="accent1"/>
+          </a:effectRef>
+          <a:fontRef idx="minor">
+            <a:schemeClr val="lt1"/>
+          </a:fontRef>
+        </p:style>
+        <p:txBody>
+          <a:bodyPr rtlCol="0" anchor="ctr" wrap="square" lIns="274320" rIns="274320" tIns="137160"/>
+          <a:lstStyle/>
+          <a:p>
+            <a:pPr algn="ctr">
+              <a:defRPr sz="1400" b="1">
+                <a:solidFill>
+                  <a:srgbClr val="2E7D32"/>
+                </a:solidFill>
+              </a:defRPr>
+            </a:pPr>
+            <a:r>
+              <a:t>Impacto na nossa tese</a:t>
+            </a:r>
+          </a:p>
+          <a:p>
+            <a:pPr>
+              <a:defRPr sz="1600">
+                <a:solidFill>
+                  <a:srgbClr val="3D424E"/>
+                </a:solidFill>
+              </a:defRPr>
+            </a:pPr>
+            <a:r>
+              <a:t>Insumo direto do nosso pipeline: usar SkinToneNet pré-treinado em vez de treinar do zero. Nossa contribuição C2 (matriz cruzada) segue original. Economiza ~3 semanas de cronograma.</a:t>
             </a:r>
           </a:p>
         </p:txBody>
@@ -8679,6 +9545,1050 @@
 </p:sld>
 </file>
 
+<file path=ppt/slides/slide30.xml><?xml version="1.0" encoding="utf-8"?>
+<p:sld xmlns:a="http://schemas.openxmlformats.org/drawingml/2006/main" xmlns:p="http://schemas.openxmlformats.org/presentationml/2006/main" xmlns:r="http://schemas.openxmlformats.org/officeDocument/2006/relationships">
+  <p:cSld>
+    <p:spTree>
+      <p:nvGrpSpPr>
+        <p:cNvPr id="1" name=""/>
+        <p:cNvGrpSpPr/>
+        <p:nvPr/>
+      </p:nvGrpSpPr>
+      <p:grpSpPr/>
+      <p:sp>
+        <p:nvSpPr>
+          <p:cNvPr id="2" name="TextBox 1"/>
+          <p:cNvSpPr txBox="1"/>
+          <p:nvPr/>
+        </p:nvSpPr>
+        <p:spPr>
+          <a:xfrm>
+            <a:off x="457200" y="365760"/>
+            <a:ext cx="11430000" cy="822960"/>
+          </a:xfrm>
+          <a:prstGeom prst="rect">
+            <a:avLst/>
+          </a:prstGeom>
+          <a:noFill/>
+        </p:spPr>
+        <p:txBody>
+          <a:bodyPr wrap="none">
+            <a:spAutoFit/>
+          </a:bodyPr>
+          <a:lstStyle/>
+          <a:p>
+            <a:pPr>
+              <a:defRPr sz="2400" b="1">
+                <a:solidFill>
+                  <a:srgbClr val="1F2A4E"/>
+                </a:solidFill>
+              </a:defRPr>
+            </a:pPr>
+            <a:r>
+              <a:t>Dooley et al. (2022) — Fairer architectures make for fairer FR</a:t>
+            </a:r>
+          </a:p>
+        </p:txBody>
+      </p:sp>
+      <p:sp>
+        <p:nvSpPr>
+          <p:cNvPr id="3" name="TextBox 2"/>
+          <p:cNvSpPr txBox="1"/>
+          <p:nvPr/>
+        </p:nvSpPr>
+        <p:spPr>
+          <a:xfrm>
+            <a:off x="457200" y="1051560"/>
+            <a:ext cx="11430000" cy="365760"/>
+          </a:xfrm>
+          <a:prstGeom prst="rect">
+            <a:avLst/>
+          </a:prstGeom>
+          <a:noFill/>
+        </p:spPr>
+        <p:txBody>
+          <a:bodyPr wrap="none">
+            <a:spAutoFit/>
+          </a:bodyPr>
+          <a:lstStyle/>
+          <a:p>
+            <a:pPr>
+              <a:defRPr sz="1400" i="1">
+                <a:solidFill>
+                  <a:srgbClr val="707682"/>
+                </a:solidFill>
+              </a:defRPr>
+            </a:pPr>
+            <a:r>
+              <a:t>arXiv:2210.09943 — NAS search para FR fairness</a:t>
+            </a:r>
+          </a:p>
+        </p:txBody>
+      </p:sp>
+      <p:sp>
+        <p:nvSpPr>
+          <p:cNvPr id="4" name="Rectangle 3"/>
+          <p:cNvSpPr/>
+          <p:nvPr/>
+        </p:nvSpPr>
+        <p:spPr>
+          <a:xfrm>
+            <a:off x="457200" y="1463040"/>
+            <a:ext cx="11430000" cy="45720"/>
+          </a:xfrm>
+          <a:prstGeom prst="rect">
+            <a:avLst/>
+          </a:prstGeom>
+          <a:solidFill>
+            <a:srgbClr val="1F2A4E"/>
+          </a:solidFill>
+          <a:ln>
+            <a:noFill/>
+          </a:ln>
+        </p:spPr>
+        <p:style>
+          <a:lnRef idx="1">
+            <a:schemeClr val="accent1"/>
+          </a:lnRef>
+          <a:fillRef idx="3">
+            <a:schemeClr val="accent1"/>
+          </a:fillRef>
+          <a:effectRef idx="2">
+            <a:schemeClr val="accent1"/>
+          </a:effectRef>
+          <a:fontRef idx="minor">
+            <a:schemeClr val="lt1"/>
+          </a:fontRef>
+        </p:style>
+        <p:txBody>
+          <a:bodyPr rtlCol="0" anchor="ctr"/>
+          <a:lstStyle/>
+          <a:p>
+            <a:pPr algn="ctr"/>
+          </a:p>
+        </p:txBody>
+      </p:sp>
+      <p:sp>
+        <p:nvSpPr>
+          <p:cNvPr id="5" name="Rounded Rectangle 4"/>
+          <p:cNvSpPr/>
+          <p:nvPr/>
+        </p:nvSpPr>
+        <p:spPr>
+          <a:xfrm>
+            <a:off x="548640" y="1828800"/>
+            <a:ext cx="11064240" cy="2103120"/>
+          </a:xfrm>
+          <a:prstGeom prst="roundRect">
+            <a:avLst/>
+          </a:prstGeom>
+          <a:solidFill>
+            <a:srgbClr val="E8EAED"/>
+          </a:solidFill>
+          <a:ln>
+            <a:noFill/>
+          </a:ln>
+        </p:spPr>
+        <p:style>
+          <a:lnRef idx="1">
+            <a:schemeClr val="accent1"/>
+          </a:lnRef>
+          <a:fillRef idx="3">
+            <a:schemeClr val="accent1"/>
+          </a:fillRef>
+          <a:effectRef idx="2">
+            <a:schemeClr val="accent1"/>
+          </a:effectRef>
+          <a:fontRef idx="minor">
+            <a:schemeClr val="lt1"/>
+          </a:fontRef>
+        </p:style>
+        <p:txBody>
+          <a:bodyPr rtlCol="0" anchor="ctr" wrap="square" lIns="274320" rIns="274320" tIns="137160"/>
+          <a:lstStyle/>
+          <a:p>
+            <a:pPr algn="ctr">
+              <a:defRPr sz="1400" b="1">
+                <a:solidFill>
+                  <a:srgbClr val="1F2A4E"/>
+                </a:solidFill>
+              </a:defRPr>
+            </a:pPr>
+            <a:r>
+              <a:t>O que defende</a:t>
+            </a:r>
+          </a:p>
+          <a:p>
+            <a:pPr>
+              <a:defRPr sz="1600">
+                <a:solidFill>
+                  <a:srgbClr val="3D424E"/>
+                </a:solidFill>
+              </a:defRPr>
+            </a:pPr>
+            <a:r>
+              <a:t>Argumenta que biases são inerentes a arquiteturas neurais. Faz busca de arquitetura (NAS) jointly com hiperparâmetros e produz modelos que Pareto-dominam baselines de mitigação tradicionais.</a:t>
+            </a:r>
+          </a:p>
+        </p:txBody>
+      </p:sp>
+      <p:sp>
+        <p:nvSpPr>
+          <p:cNvPr id="6" name="Rounded Rectangle 5"/>
+          <p:cNvSpPr/>
+          <p:nvPr/>
+        </p:nvSpPr>
+        <p:spPr>
+          <a:xfrm>
+            <a:off x="548640" y="4114800"/>
+            <a:ext cx="11064240" cy="2194560"/>
+          </a:xfrm>
+          <a:prstGeom prst="roundRect">
+            <a:avLst/>
+          </a:prstGeom>
+          <a:solidFill>
+            <a:srgbClr val="FFFFFF"/>
+          </a:solidFill>
+          <a:ln w="19050">
+            <a:solidFill>
+              <a:srgbClr val="1F2A4E"/>
+            </a:solidFill>
+          </a:ln>
+        </p:spPr>
+        <p:style>
+          <a:lnRef idx="1">
+            <a:schemeClr val="accent1"/>
+          </a:lnRef>
+          <a:fillRef idx="3">
+            <a:schemeClr val="accent1"/>
+          </a:fillRef>
+          <a:effectRef idx="2">
+            <a:schemeClr val="accent1"/>
+          </a:effectRef>
+          <a:fontRef idx="minor">
+            <a:schemeClr val="lt1"/>
+          </a:fontRef>
+        </p:style>
+        <p:txBody>
+          <a:bodyPr rtlCol="0" anchor="ctr" wrap="square" lIns="274320" rIns="274320" tIns="137160"/>
+          <a:lstStyle/>
+          <a:p>
+            <a:pPr algn="ctr">
+              <a:defRPr sz="1400" b="1">
+                <a:solidFill>
+                  <a:srgbClr val="1F2A4E"/>
+                </a:solidFill>
+              </a:defRPr>
+            </a:pPr>
+            <a:r>
+              <a:t>Impacto na nossa tese</a:t>
+            </a:r>
+          </a:p>
+          <a:p>
+            <a:pPr>
+              <a:defRPr sz="1600">
+                <a:solidFill>
+                  <a:srgbClr val="3D424E"/>
+                </a:solidFill>
+              </a:defRPr>
+            </a:pPr>
+            <a:r>
+              <a:t>Reforça nossa H2: trocar a arquitetura por si só importa. Valida escolha de ConvNeXt-T como backbone moderno. Se H1 falhar mas ConvNeXt-T puro já reduzir disparity, parte do efeito é arquitetural.</a:t>
+            </a:r>
+          </a:p>
+        </p:txBody>
+      </p:sp>
+    </p:spTree>
+  </p:cSld>
+  <p:clrMapOvr>
+    <a:masterClrMapping/>
+  </p:clrMapOvr>
+</p:sld>
+</file>
+
+<file path=ppt/slides/slide31.xml><?xml version="1.0" encoding="utf-8"?>
+<p:sld xmlns:a="http://schemas.openxmlformats.org/drawingml/2006/main" xmlns:p="http://schemas.openxmlformats.org/presentationml/2006/main" xmlns:r="http://schemas.openxmlformats.org/officeDocument/2006/relationships">
+  <p:cSld>
+    <p:spTree>
+      <p:nvGrpSpPr>
+        <p:cNvPr id="1" name=""/>
+        <p:cNvGrpSpPr/>
+        <p:nvPr/>
+      </p:nvGrpSpPr>
+      <p:grpSpPr/>
+      <p:sp>
+        <p:nvSpPr>
+          <p:cNvPr id="2" name="TextBox 1"/>
+          <p:cNvSpPr txBox="1"/>
+          <p:nvPr/>
+        </p:nvSpPr>
+        <p:spPr>
+          <a:xfrm>
+            <a:off x="457200" y="365760"/>
+            <a:ext cx="11430000" cy="822960"/>
+          </a:xfrm>
+          <a:prstGeom prst="rect">
+            <a:avLst/>
+          </a:prstGeom>
+          <a:noFill/>
+        </p:spPr>
+        <p:txBody>
+          <a:bodyPr wrap="none">
+            <a:spAutoFit/>
+          </a:bodyPr>
+          <a:lstStyle/>
+          <a:p>
+            <a:pPr>
+              <a:defRPr sz="2400" b="1">
+                <a:solidFill>
+                  <a:srgbClr val="1F2A4E"/>
+                </a:solidFill>
+              </a:defRPr>
+            </a:pPr>
+            <a:r>
+              <a:t>Aguirre &amp; Dredze (2023) — Transferring fairness via multi-task</a:t>
+            </a:r>
+          </a:p>
+        </p:txBody>
+      </p:sp>
+      <p:sp>
+        <p:nvSpPr>
+          <p:cNvPr id="3" name="TextBox 2"/>
+          <p:cNvSpPr txBox="1"/>
+          <p:nvPr/>
+        </p:nvSpPr>
+        <p:spPr>
+          <a:xfrm>
+            <a:off x="457200" y="1051560"/>
+            <a:ext cx="11430000" cy="365760"/>
+          </a:xfrm>
+          <a:prstGeom prst="rect">
+            <a:avLst/>
+          </a:prstGeom>
+          <a:noFill/>
+        </p:spPr>
+        <p:txBody>
+          <a:bodyPr wrap="none">
+            <a:spAutoFit/>
+          </a:bodyPr>
+          <a:lstStyle/>
+          <a:p>
+            <a:pPr>
+              <a:defRPr sz="1400" i="1">
+                <a:solidFill>
+                  <a:srgbClr val="707682"/>
+                </a:solidFill>
+              </a:defRPr>
+            </a:pPr>
+            <a:r>
+              <a:t>arXiv:2305.12671 — Johns Hopkins</a:t>
+            </a:r>
+          </a:p>
+        </p:txBody>
+      </p:sp>
+      <p:sp>
+        <p:nvSpPr>
+          <p:cNvPr id="4" name="Rectangle 3"/>
+          <p:cNvSpPr/>
+          <p:nvPr/>
+        </p:nvSpPr>
+        <p:spPr>
+          <a:xfrm>
+            <a:off x="457200" y="1463040"/>
+            <a:ext cx="11430000" cy="45720"/>
+          </a:xfrm>
+          <a:prstGeom prst="rect">
+            <a:avLst/>
+          </a:prstGeom>
+          <a:solidFill>
+            <a:srgbClr val="1F2A4E"/>
+          </a:solidFill>
+          <a:ln>
+            <a:noFill/>
+          </a:ln>
+        </p:spPr>
+        <p:style>
+          <a:lnRef idx="1">
+            <a:schemeClr val="accent1"/>
+          </a:lnRef>
+          <a:fillRef idx="3">
+            <a:schemeClr val="accent1"/>
+          </a:fillRef>
+          <a:effectRef idx="2">
+            <a:schemeClr val="accent1"/>
+          </a:effectRef>
+          <a:fontRef idx="minor">
+            <a:schemeClr val="lt1"/>
+          </a:fontRef>
+        </p:style>
+        <p:txBody>
+          <a:bodyPr rtlCol="0" anchor="ctr"/>
+          <a:lstStyle/>
+          <a:p>
+            <a:pPr algn="ctr"/>
+          </a:p>
+        </p:txBody>
+      </p:sp>
+      <p:sp>
+        <p:nvSpPr>
+          <p:cNvPr id="5" name="Rounded Rectangle 4"/>
+          <p:cNvSpPr/>
+          <p:nvPr/>
+        </p:nvSpPr>
+        <p:spPr>
+          <a:xfrm>
+            <a:off x="548640" y="1828800"/>
+            <a:ext cx="11064240" cy="2103120"/>
+          </a:xfrm>
+          <a:prstGeom prst="roundRect">
+            <a:avLst/>
+          </a:prstGeom>
+          <a:solidFill>
+            <a:srgbClr val="E8EAED"/>
+          </a:solidFill>
+          <a:ln>
+            <a:noFill/>
+          </a:ln>
+        </p:spPr>
+        <p:style>
+          <a:lnRef idx="1">
+            <a:schemeClr val="accent1"/>
+          </a:lnRef>
+          <a:fillRef idx="3">
+            <a:schemeClr val="accent1"/>
+          </a:fillRef>
+          <a:effectRef idx="2">
+            <a:schemeClr val="accent1"/>
+          </a:effectRef>
+          <a:fontRef idx="minor">
+            <a:schemeClr val="lt1"/>
+          </a:fontRef>
+        </p:style>
+        <p:txBody>
+          <a:bodyPr rtlCol="0" anchor="ctr" wrap="square" lIns="274320" rIns="274320" tIns="137160"/>
+          <a:lstStyle/>
+          <a:p>
+            <a:pPr algn="ctr">
+              <a:defRPr sz="1400" b="1">
+                <a:solidFill>
+                  <a:srgbClr val="1F2A4E"/>
+                </a:solidFill>
+              </a:defRPr>
+            </a:pPr>
+            <a:r>
+              <a:t>O que defende</a:t>
+            </a:r>
+          </a:p>
+          <a:p>
+            <a:pPr>
+              <a:defRPr sz="1600">
+                <a:solidFill>
+                  <a:srgbClr val="3D424E"/>
+                </a:solidFill>
+              </a:defRPr>
+            </a:pPr>
+            <a:r>
+              <a:t>Adapta uma fairness loss single-task para um framework multi-task e demonstra empiricamente que objetivos de fairness demográfico SE TRANSFEREM entre tarefas que compartilham representação. Domínio dos experimentos é NLP.</a:t>
+            </a:r>
+          </a:p>
+        </p:txBody>
+      </p:sp>
+      <p:sp>
+        <p:nvSpPr>
+          <p:cNvPr id="6" name="Rounded Rectangle 5"/>
+          <p:cNvSpPr/>
+          <p:nvPr/>
+        </p:nvSpPr>
+        <p:spPr>
+          <a:xfrm>
+            <a:off x="548640" y="4114800"/>
+            <a:ext cx="11064240" cy="2194560"/>
+          </a:xfrm>
+          <a:prstGeom prst="roundRect">
+            <a:avLst/>
+          </a:prstGeom>
+          <a:solidFill>
+            <a:srgbClr val="FFFFFF"/>
+          </a:solidFill>
+          <a:ln w="19050">
+            <a:solidFill>
+              <a:srgbClr val="1F2A4E"/>
+            </a:solidFill>
+          </a:ln>
+        </p:spPr>
+        <p:style>
+          <a:lnRef idx="1">
+            <a:schemeClr val="accent1"/>
+          </a:lnRef>
+          <a:fillRef idx="3">
+            <a:schemeClr val="accent1"/>
+          </a:fillRef>
+          <a:effectRef idx="2">
+            <a:schemeClr val="accent1"/>
+          </a:effectRef>
+          <a:fontRef idx="minor">
+            <a:schemeClr val="lt1"/>
+          </a:fontRef>
+        </p:style>
+        <p:txBody>
+          <a:bodyPr rtlCol="0" anchor="ctr" wrap="square" lIns="274320" rIns="274320" tIns="137160"/>
+          <a:lstStyle/>
+          <a:p>
+            <a:pPr algn="ctr">
+              <a:defRPr sz="1400" b="1">
+                <a:solidFill>
+                  <a:srgbClr val="1F2A4E"/>
+                </a:solidFill>
+              </a:defRPr>
+            </a:pPr>
+            <a:r>
+              <a:t>Impacto na nossa tese</a:t>
+            </a:r>
+          </a:p>
+          <a:p>
+            <a:pPr>
+              <a:defRPr sz="1600">
+                <a:solidFill>
+                  <a:srgbClr val="3D424E"/>
+                </a:solidFill>
+              </a:defRPr>
+            </a:pPr>
+            <a:r>
+              <a:t>Reforço empírico do princípio teórico do LAFTR (Madras 2018). Fortalece as etapas 3 e 5 do pipeline (race classifier condicionado e extensão para FR).</a:t>
+            </a:r>
+          </a:p>
+        </p:txBody>
+      </p:sp>
+    </p:spTree>
+  </p:cSld>
+  <p:clrMapOvr>
+    <a:masterClrMapping/>
+  </p:clrMapOvr>
+</p:sld>
+</file>
+
+<file path=ppt/slides/slide32.xml><?xml version="1.0" encoding="utf-8"?>
+<p:sld xmlns:a="http://schemas.openxmlformats.org/drawingml/2006/main" xmlns:p="http://schemas.openxmlformats.org/presentationml/2006/main" xmlns:r="http://schemas.openxmlformats.org/officeDocument/2006/relationships">
+  <p:cSld>
+    <p:spTree>
+      <p:nvGrpSpPr>
+        <p:cNvPr id="1" name=""/>
+        <p:cNvGrpSpPr/>
+        <p:nvPr/>
+      </p:nvGrpSpPr>
+      <p:grpSpPr/>
+      <p:sp>
+        <p:nvSpPr>
+          <p:cNvPr id="2" name="TextBox 1"/>
+          <p:cNvSpPr txBox="1"/>
+          <p:nvPr/>
+        </p:nvSpPr>
+        <p:spPr>
+          <a:xfrm>
+            <a:off x="457200" y="365760"/>
+            <a:ext cx="11430000" cy="822960"/>
+          </a:xfrm>
+          <a:prstGeom prst="rect">
+            <a:avLst/>
+          </a:prstGeom>
+          <a:noFill/>
+        </p:spPr>
+        <p:txBody>
+          <a:bodyPr wrap="none">
+            <a:spAutoFit/>
+          </a:bodyPr>
+          <a:lstStyle/>
+          <a:p>
+            <a:pPr>
+              <a:defRPr sz="2400" b="1">
+                <a:solidFill>
+                  <a:srgbClr val="1F2A4E"/>
+                </a:solidFill>
+              </a:defRPr>
+            </a:pPr>
+            <a:r>
+              <a:t>Kolla &amp; Savadamuthu (2022) — Impact of racial distribution in training</a:t>
+            </a:r>
+          </a:p>
+        </p:txBody>
+      </p:sp>
+      <p:sp>
+        <p:nvSpPr>
+          <p:cNvPr id="3" name="TextBox 2"/>
+          <p:cNvSpPr txBox="1"/>
+          <p:nvPr/>
+        </p:nvSpPr>
+        <p:spPr>
+          <a:xfrm>
+            <a:off x="457200" y="1051560"/>
+            <a:ext cx="11430000" cy="365760"/>
+          </a:xfrm>
+          <a:prstGeom prst="rect">
+            <a:avLst/>
+          </a:prstGeom>
+          <a:noFill/>
+        </p:spPr>
+        <p:txBody>
+          <a:bodyPr wrap="none">
+            <a:spAutoFit/>
+          </a:bodyPr>
+          <a:lstStyle/>
+          <a:p>
+            <a:pPr>
+              <a:defRPr sz="1400" i="1">
+                <a:solidFill>
+                  <a:srgbClr val="707682"/>
+                </a:solidFill>
+              </a:defRPr>
+            </a:pPr>
+            <a:r>
+              <a:t>arXiv:2211.14498 — WACVW 2023 (IEEE/CVF)</a:t>
+            </a:r>
+          </a:p>
+        </p:txBody>
+      </p:sp>
+      <p:sp>
+        <p:nvSpPr>
+          <p:cNvPr id="4" name="Rectangle 3"/>
+          <p:cNvSpPr/>
+          <p:nvPr/>
+        </p:nvSpPr>
+        <p:spPr>
+          <a:xfrm>
+            <a:off x="457200" y="1463040"/>
+            <a:ext cx="11430000" cy="45720"/>
+          </a:xfrm>
+          <a:prstGeom prst="rect">
+            <a:avLst/>
+          </a:prstGeom>
+          <a:solidFill>
+            <a:srgbClr val="1F2A4E"/>
+          </a:solidFill>
+          <a:ln>
+            <a:noFill/>
+          </a:ln>
+        </p:spPr>
+        <p:style>
+          <a:lnRef idx="1">
+            <a:schemeClr val="accent1"/>
+          </a:lnRef>
+          <a:fillRef idx="3">
+            <a:schemeClr val="accent1"/>
+          </a:fillRef>
+          <a:effectRef idx="2">
+            <a:schemeClr val="accent1"/>
+          </a:effectRef>
+          <a:fontRef idx="minor">
+            <a:schemeClr val="lt1"/>
+          </a:fontRef>
+        </p:style>
+        <p:txBody>
+          <a:bodyPr rtlCol="0" anchor="ctr"/>
+          <a:lstStyle/>
+          <a:p>
+            <a:pPr algn="ctr"/>
+          </a:p>
+        </p:txBody>
+      </p:sp>
+      <p:sp>
+        <p:nvSpPr>
+          <p:cNvPr id="5" name="Rounded Rectangle 4"/>
+          <p:cNvSpPr/>
+          <p:nvPr/>
+        </p:nvSpPr>
+        <p:spPr>
+          <a:xfrm>
+            <a:off x="548640" y="1828800"/>
+            <a:ext cx="11064240" cy="2103120"/>
+          </a:xfrm>
+          <a:prstGeom prst="roundRect">
+            <a:avLst/>
+          </a:prstGeom>
+          <a:solidFill>
+            <a:srgbClr val="E8EAED"/>
+          </a:solidFill>
+          <a:ln>
+            <a:noFill/>
+          </a:ln>
+        </p:spPr>
+        <p:style>
+          <a:lnRef idx="1">
+            <a:schemeClr val="accent1"/>
+          </a:lnRef>
+          <a:fillRef idx="3">
+            <a:schemeClr val="accent1"/>
+          </a:fillRef>
+          <a:effectRef idx="2">
+            <a:schemeClr val="accent1"/>
+          </a:effectRef>
+          <a:fontRef idx="minor">
+            <a:schemeClr val="lt1"/>
+          </a:fontRef>
+        </p:style>
+        <p:txBody>
+          <a:bodyPr rtlCol="0" anchor="ctr" wrap="square" lIns="274320" rIns="274320" tIns="137160"/>
+          <a:lstStyle/>
+          <a:p>
+            <a:pPr algn="ctr">
+              <a:defRPr sz="1400" b="1">
+                <a:solidFill>
+                  <a:srgbClr val="1F2A4E"/>
+                </a:solidFill>
+              </a:defRPr>
+            </a:pPr>
+            <a:r>
+              <a:t>O que defende</a:t>
+            </a:r>
+          </a:p>
+          <a:p>
+            <a:pPr>
+              <a:defRPr sz="1600">
+                <a:solidFill>
+                  <a:srgbClr val="3D424E"/>
+                </a:solidFill>
+              </a:defRPr>
+            </a:pPr>
+            <a:r>
+              <a:t>Investiga o efeito da distribuição racial nos dados de treino sobre disparities de face recognition. Conclui que distribuição uniforme de raças NO TREINO sozinha não garante FR sem viés.</a:t>
+            </a:r>
+          </a:p>
+        </p:txBody>
+      </p:sp>
+      <p:sp>
+        <p:nvSpPr>
+          <p:cNvPr id="6" name="Rounded Rectangle 5"/>
+          <p:cNvSpPr/>
+          <p:nvPr/>
+        </p:nvSpPr>
+        <p:spPr>
+          <a:xfrm>
+            <a:off x="548640" y="4114800"/>
+            <a:ext cx="11064240" cy="2194560"/>
+          </a:xfrm>
+          <a:prstGeom prst="roundRect">
+            <a:avLst/>
+          </a:prstGeom>
+          <a:solidFill>
+            <a:srgbClr val="FFFFFF"/>
+          </a:solidFill>
+          <a:ln w="19050">
+            <a:solidFill>
+              <a:srgbClr val="1F2A4E"/>
+            </a:solidFill>
+          </a:ln>
+        </p:spPr>
+        <p:style>
+          <a:lnRef idx="1">
+            <a:schemeClr val="accent1"/>
+          </a:lnRef>
+          <a:fillRef idx="3">
+            <a:schemeClr val="accent1"/>
+          </a:fillRef>
+          <a:effectRef idx="2">
+            <a:schemeClr val="accent1"/>
+          </a:effectRef>
+          <a:fontRef idx="minor">
+            <a:schemeClr val="lt1"/>
+          </a:fontRef>
+        </p:style>
+        <p:txBody>
+          <a:bodyPr rtlCol="0" anchor="ctr" wrap="square" lIns="274320" rIns="274320" tIns="137160"/>
+          <a:lstStyle/>
+          <a:p>
+            <a:pPr algn="ctr">
+              <a:defRPr sz="1400" b="1">
+                <a:solidFill>
+                  <a:srgbClr val="1F2A4E"/>
+                </a:solidFill>
+              </a:defRPr>
+            </a:pPr>
+            <a:r>
+              <a:t>Impacto na nossa tese</a:t>
+            </a:r>
+          </a:p>
+          <a:p>
+            <a:pPr>
+              <a:defRPr sz="1600">
+                <a:solidFill>
+                  <a:srgbClr val="3D424E"/>
+                </a:solidFill>
+              </a:defRPr>
+            </a:pPr>
+            <a:r>
+              <a:t>Reforça necessidade de intervenção arquitetural além de balanceamento de dados. FairFace já é balanceado e o gap Latinx persiste — coerente com a tese de que precisamos do FiLM-conditioning.</a:t>
+            </a:r>
+          </a:p>
+        </p:txBody>
+      </p:sp>
+    </p:spTree>
+  </p:cSld>
+  <p:clrMapOvr>
+    <a:masterClrMapping/>
+  </p:clrMapOvr>
+</p:sld>
+</file>
+
+<file path=ppt/slides/slide33.xml><?xml version="1.0" encoding="utf-8"?>
+<p:sld xmlns:a="http://schemas.openxmlformats.org/drawingml/2006/main" xmlns:p="http://schemas.openxmlformats.org/presentationml/2006/main" xmlns:r="http://schemas.openxmlformats.org/officeDocument/2006/relationships">
+  <p:cSld>
+    <p:spTree>
+      <p:nvGrpSpPr>
+        <p:cNvPr id="1" name=""/>
+        <p:cNvGrpSpPr/>
+        <p:nvPr/>
+      </p:nvGrpSpPr>
+      <p:grpSpPr/>
+      <p:sp>
+        <p:nvSpPr>
+          <p:cNvPr id="2" name="TextBox 1"/>
+          <p:cNvSpPr txBox="1"/>
+          <p:nvPr/>
+        </p:nvSpPr>
+        <p:spPr>
+          <a:xfrm>
+            <a:off x="457200" y="365760"/>
+            <a:ext cx="11430000" cy="822960"/>
+          </a:xfrm>
+          <a:prstGeom prst="rect">
+            <a:avLst/>
+          </a:prstGeom>
+          <a:noFill/>
+        </p:spPr>
+        <p:txBody>
+          <a:bodyPr wrap="none">
+            <a:spAutoFit/>
+          </a:bodyPr>
+          <a:lstStyle/>
+          <a:p>
+            <a:pPr>
+              <a:defRPr sz="2400" b="1">
+                <a:solidFill>
+                  <a:srgbClr val="1F2A4E"/>
+                </a:solidFill>
+              </a:defRPr>
+            </a:pPr>
+            <a:r>
+              <a:t>Liu et al. (2025) — BNMR Bayesian meta-learning</a:t>
+            </a:r>
+          </a:p>
+        </p:txBody>
+      </p:sp>
+      <p:sp>
+        <p:nvSpPr>
+          <p:cNvPr id="3" name="TextBox 2"/>
+          <p:cNvSpPr txBox="1"/>
+          <p:nvPr/>
+        </p:nvSpPr>
+        <p:spPr>
+          <a:xfrm>
+            <a:off x="457200" y="1051560"/>
+            <a:ext cx="11430000" cy="365760"/>
+          </a:xfrm>
+          <a:prstGeom prst="rect">
+            <a:avLst/>
+          </a:prstGeom>
+          <a:noFill/>
+        </p:spPr>
+        <p:txBody>
+          <a:bodyPr wrap="none">
+            <a:spAutoFit/>
+          </a:bodyPr>
+          <a:lstStyle/>
+          <a:p>
+            <a:pPr>
+              <a:defRPr sz="1400" i="1">
+                <a:solidFill>
+                  <a:srgbClr val="707682"/>
+                </a:solidFill>
+              </a:defRPr>
+            </a:pPr>
+            <a:r>
+              <a:t>arXiv:2505.01699 — ACM FAccT 2025</a:t>
+            </a:r>
+          </a:p>
+        </p:txBody>
+      </p:sp>
+      <p:sp>
+        <p:nvSpPr>
+          <p:cNvPr id="4" name="Rectangle 3"/>
+          <p:cNvSpPr/>
+          <p:nvPr/>
+        </p:nvSpPr>
+        <p:spPr>
+          <a:xfrm>
+            <a:off x="457200" y="1463040"/>
+            <a:ext cx="11430000" cy="45720"/>
+          </a:xfrm>
+          <a:prstGeom prst="rect">
+            <a:avLst/>
+          </a:prstGeom>
+          <a:solidFill>
+            <a:srgbClr val="1F2A4E"/>
+          </a:solidFill>
+          <a:ln>
+            <a:noFill/>
+          </a:ln>
+        </p:spPr>
+        <p:style>
+          <a:lnRef idx="1">
+            <a:schemeClr val="accent1"/>
+          </a:lnRef>
+          <a:fillRef idx="3">
+            <a:schemeClr val="accent1"/>
+          </a:fillRef>
+          <a:effectRef idx="2">
+            <a:schemeClr val="accent1"/>
+          </a:effectRef>
+          <a:fontRef idx="minor">
+            <a:schemeClr val="lt1"/>
+          </a:fontRef>
+        </p:style>
+        <p:txBody>
+          <a:bodyPr rtlCol="0" anchor="ctr"/>
+          <a:lstStyle/>
+          <a:p>
+            <a:pPr algn="ctr"/>
+          </a:p>
+        </p:txBody>
+      </p:sp>
+      <p:sp>
+        <p:nvSpPr>
+          <p:cNvPr id="5" name="Rounded Rectangle 4"/>
+          <p:cNvSpPr/>
+          <p:nvPr/>
+        </p:nvSpPr>
+        <p:spPr>
+          <a:xfrm>
+            <a:off x="548640" y="1828800"/>
+            <a:ext cx="11064240" cy="2103120"/>
+          </a:xfrm>
+          <a:prstGeom prst="roundRect">
+            <a:avLst/>
+          </a:prstGeom>
+          <a:solidFill>
+            <a:srgbClr val="E8EAED"/>
+          </a:solidFill>
+          <a:ln>
+            <a:noFill/>
+          </a:ln>
+        </p:spPr>
+        <p:style>
+          <a:lnRef idx="1">
+            <a:schemeClr val="accent1"/>
+          </a:lnRef>
+          <a:fillRef idx="3">
+            <a:schemeClr val="accent1"/>
+          </a:fillRef>
+          <a:effectRef idx="2">
+            <a:schemeClr val="accent1"/>
+          </a:effectRef>
+          <a:fontRef idx="minor">
+            <a:schemeClr val="lt1"/>
+          </a:fontRef>
+        </p:style>
+        <p:txBody>
+          <a:bodyPr rtlCol="0" anchor="ctr" wrap="square" lIns="274320" rIns="274320" tIns="137160"/>
+          <a:lstStyle/>
+          <a:p>
+            <a:pPr algn="ctr">
+              <a:defRPr sz="1400" b="1">
+                <a:solidFill>
+                  <a:srgbClr val="1F2A4E"/>
+                </a:solidFill>
+              </a:defRPr>
+            </a:pPr>
+            <a:r>
+              <a:t>O que defende</a:t>
+            </a:r>
+          </a:p>
+          <a:p>
+            <a:pPr>
+              <a:defRPr sz="1600">
+                <a:solidFill>
+                  <a:srgbClr val="3D424E"/>
+                </a:solidFill>
+              </a:defRPr>
+            </a:pPr>
+            <a:r>
+              <a:t>Propõe BNMR (Bayesian Network-informed Meta Reweighting): uma rede bayesiana calibra meta-learning de reweighting de amostras durante treino, tracking de viés do modelo em tempo real.</a:t>
+            </a:r>
+          </a:p>
+        </p:txBody>
+      </p:sp>
+      <p:sp>
+        <p:nvSpPr>
+          <p:cNvPr id="6" name="Rounded Rectangle 5"/>
+          <p:cNvSpPr/>
+          <p:nvPr/>
+        </p:nvSpPr>
+        <p:spPr>
+          <a:xfrm>
+            <a:off x="548640" y="4114800"/>
+            <a:ext cx="11064240" cy="2194560"/>
+          </a:xfrm>
+          <a:prstGeom prst="roundRect">
+            <a:avLst/>
+          </a:prstGeom>
+          <a:solidFill>
+            <a:srgbClr val="FFFFFF"/>
+          </a:solidFill>
+          <a:ln w="19050">
+            <a:solidFill>
+              <a:srgbClr val="1F2A4E"/>
+            </a:solidFill>
+          </a:ln>
+        </p:spPr>
+        <p:style>
+          <a:lnRef idx="1">
+            <a:schemeClr val="accent1"/>
+          </a:lnRef>
+          <a:fillRef idx="3">
+            <a:schemeClr val="accent1"/>
+          </a:fillRef>
+          <a:effectRef idx="2">
+            <a:schemeClr val="accent1"/>
+          </a:effectRef>
+          <a:fontRef idx="minor">
+            <a:schemeClr val="lt1"/>
+          </a:fontRef>
+        </p:style>
+        <p:txBody>
+          <a:bodyPr rtlCol="0" anchor="ctr" wrap="square" lIns="274320" rIns="274320" tIns="137160"/>
+          <a:lstStyle/>
+          <a:p>
+            <a:pPr algn="ctr">
+              <a:defRPr sz="1400" b="1">
+                <a:solidFill>
+                  <a:srgbClr val="1F2A4E"/>
+                </a:solidFill>
+              </a:defRPr>
+            </a:pPr>
+            <a:r>
+              <a:t>Impacto na nossa tese</a:t>
+            </a:r>
+          </a:p>
+          <a:p>
+            <a:pPr>
+              <a:defRPr sz="1600">
+                <a:solidFill>
+                  <a:srgbClr val="3D424E"/>
+                </a:solidFill>
+              </a:defRPr>
+            </a:pPr>
+            <a:r>
+              <a:t>Baseline competitivo recente. Mecanismo é ortogonal ao nosso (sample reweighting vs FiLM-conditioning). Candidato a baseline forte do Cap 2 para comparação justa.</a:t>
+            </a:r>
+          </a:p>
+        </p:txBody>
+      </p:sp>
+    </p:spTree>
+  </p:cSld>
+  <p:clrMapOvr>
+    <a:masterClrMapping/>
+  </p:clrMapOvr>
+</p:sld>
+</file>
+
 <file path=ppt/slides/slide4.xml><?xml version="1.0" encoding="utf-8"?>
 <p:sld xmlns:a="http://schemas.openxmlformats.org/drawingml/2006/main" xmlns:p="http://schemas.openxmlformats.org/presentationml/2006/main" xmlns:r="http://schemas.openxmlformats.org/officeDocument/2006/relationships">
   <p:cSld>
@@ -8827,67 +10737,7 @@
               </a:defRPr>
             </a:pPr>
             <a:r>
-              <a:t>“O limite atual de 75% F1 em classificação racial sobre o FairFace não é só</a:t>
-            </a:r>
-          </a:p>
-          <a:p>
-            <a:pPr>
-              <a:spcAft>
-                <a:spcPts val="800"/>
-              </a:spcAft>
-              <a:defRPr sz="2000" b="0">
-                <a:solidFill>
-                  <a:srgbClr val="3D424E"/>
-                </a:solidFill>
-              </a:defRPr>
-            </a:pPr>
-            <a:r>
-              <a:t>problema de arquitetura nem só problema de método. Tem um componente</a:t>
-            </a:r>
-          </a:p>
-          <a:p>
-            <a:pPr>
-              <a:spcAft>
-                <a:spcPts val="800"/>
-              </a:spcAft>
-              <a:defRPr sz="2000" b="0">
-                <a:solidFill>
-                  <a:srgbClr val="3D424E"/>
-                </a:solidFill>
-              </a:defRPr>
-            </a:pPr>
-            <a:r>
-              <a:t>fenotípico irredutível: as raças se sobrepõem em tom de pele, especialmente</a:t>
-            </a:r>
-          </a:p>
-          <a:p>
-            <a:pPr>
-              <a:spcAft>
-                <a:spcPts val="800"/>
-              </a:spcAft>
-              <a:defRPr sz="2000" b="0">
-                <a:solidFill>
-                  <a:srgbClr val="3D424E"/>
-                </a:solidFill>
-              </a:defRPr>
-            </a:pPr>
-            <a:r>
-              <a:t>Latinx. A dissertação ia construir a primeira matriz pública dessa</a:t>
-            </a:r>
-          </a:p>
-          <a:p>
-            <a:pPr>
-              <a:spcAft>
-                <a:spcPts val="800"/>
-              </a:spcAft>
-              <a:defRPr sz="2000" b="0">
-                <a:solidFill>
-                  <a:srgbClr val="3D424E"/>
-                </a:solidFill>
-              </a:defRPr>
-            </a:pPr>
-            <a:r>
-              <a:t>sobreposição e quantificar o que dá para reduzir vs o que é estrutural.”</a:t>
+              <a:t>“O limite atual de 75% F1 em classificação racial sobre o FairFace não é só problema de arquitetura nem só problema de método. Tem um componente fenotípico irredutível: as raças se sobrepõem em tom de pele, especialmente Latinx. A dissertação ia construir a primeira matriz pública dessa sobreposição e quantificar o que dá para reduzir vs o que é estrutural.”</a:t>
             </a:r>
           </a:p>
           <a:p>

--- a/docs/ativo/material_reuniao_orientador_v3.2.1.pptx
+++ b/docs/ativo/material_reuniao_orientador_v3.2.1.pptx
@@ -3852,7 +3852,7 @@
               </a:defRPr>
             </a:pPr>
             <a:r>
-              <a:t>Big numbers da pesquisa atualmente</a:t>
+              <a:t>Triagem do corpus de pesquisa</a:t>
             </a:r>
           </a:p>
         </p:txBody>
@@ -3933,7 +3933,7 @@
               </a:defRPr>
             </a:pPr>
             <a:r>
-              <a:t>✓  29 fichas catalogadas no corpus (era 23 na semana passada)</a:t>
+              <a:t>Dos 57 papers avaliados, aprovamos 29 como fichas do corpus.</a:t>
             </a:r>
           </a:p>
           <a:p>
@@ -3960,7 +3960,67 @@
               </a:defRPr>
             </a:pPr>
             <a:r>
-              <a:t>✓  ~57 papers avaliados ao todo (29 aprovados + 6 rejeitados explicitamente + outros descartados)</a:t>
+              <a:t>Aprovação seguiu os critérios de seleção acordados:</a:t>
+            </a:r>
+          </a:p>
+          <a:p>
+            <a:pPr lvl="1">
+              <a:spcAft>
+                <a:spcPts val="800"/>
+              </a:spcAft>
+              <a:defRPr sz="1700">
+                <a:solidFill>
+                  <a:srgbClr val="707682"/>
+                </a:solidFill>
+              </a:defRPr>
+            </a:pPr>
+            <a:r>
+              <a:t>Venue científico forte (top conferences ou journals peer-reviewed)</a:t>
+            </a:r>
+          </a:p>
+          <a:p>
+            <a:pPr lvl="1">
+              <a:spcAft>
+                <a:spcPts val="800"/>
+              </a:spcAft>
+              <a:defRPr sz="1700">
+                <a:solidFill>
+                  <a:srgbClr val="707682"/>
+                </a:solidFill>
+              </a:defRPr>
+            </a:pPr>
+            <a:r>
+              <a:t>Citações acima do threshold do ano de publicação</a:t>
+            </a:r>
+          </a:p>
+          <a:p>
+            <a:pPr lvl="1">
+              <a:spcAft>
+                <a:spcPts val="800"/>
+              </a:spcAft>
+              <a:defRPr sz="1700">
+                <a:solidFill>
+                  <a:srgbClr val="707682"/>
+                </a:solidFill>
+              </a:defRPr>
+            </a:pPr>
+            <a:r>
+              <a:t>Aplicabilidade direta a uma das 14 perguntas de pesquisa</a:t>
+            </a:r>
+          </a:p>
+          <a:p>
+            <a:pPr lvl="1">
+              <a:spcAft>
+                <a:spcPts val="800"/>
+              </a:spcAft>
+              <a:defRPr sz="1700">
+                <a:solidFill>
+                  <a:srgbClr val="707682"/>
+                </a:solidFill>
+              </a:defRPr>
+            </a:pPr>
+            <a:r>
+              <a:t>Aprovação por exceção (cobertura única) com justificativa registrada</a:t>
             </a:r>
           </a:p>
           <a:p>
@@ -3987,61 +4047,7 @@
               </a:defRPr>
             </a:pPr>
             <a:r>
-              <a:t>✓  7 tracks temáticos cobertos (era 6; Track G NOVO: Mecanismos ML / Redes Neurais)</a:t>
-            </a:r>
-          </a:p>
-          <a:p>
-            <a:pPr>
-              <a:spcAft>
-                <a:spcPts val="800"/>
-              </a:spcAft>
-              <a:defRPr sz="2000" b="0">
-                <a:solidFill>
-                  <a:srgbClr val="3D424E"/>
-                </a:solidFill>
-              </a:defRPr>
-            </a:pPr>
-          </a:p>
-          <a:p>
-            <a:pPr>
-              <a:spcAft>
-                <a:spcPts val="800"/>
-              </a:spcAft>
-              <a:defRPr sz="2000" b="0">
-                <a:solidFill>
-                  <a:srgbClr val="3D424E"/>
-                </a:solidFill>
-              </a:defRPr>
-            </a:pPr>
-            <a:r>
-              <a:t>✓  14 perguntas de pesquisa formalmente respondidas (Q01–Q14)</a:t>
-            </a:r>
-          </a:p>
-          <a:p>
-            <a:pPr>
-              <a:spcAft>
-                <a:spcPts val="800"/>
-              </a:spcAft>
-              <a:defRPr sz="2000" b="0">
-                <a:solidFill>
-                  <a:srgbClr val="3D424E"/>
-                </a:solidFill>
-              </a:defRPr>
-            </a:pPr>
-          </a:p>
-          <a:p>
-            <a:pPr>
-              <a:spcAft>
-                <a:spcPts val="800"/>
-              </a:spcAft>
-              <a:defRPr sz="2000" b="0">
-                <a:solidFill>
-                  <a:srgbClr val="3D424E"/>
-                </a:solidFill>
-              </a:defRPr>
-            </a:pPr>
-            <a:r>
-              <a:t>✓  Cobertura temporal: 1972 a 2026 (54 anos de literatura, mediana 2020–2021)</a:t>
+              <a:t>Cada decisão (aprovado / standby / descartado) tem data e justificativa em _triagem.md.</a:t>
             </a:r>
           </a:p>
         </p:txBody>
@@ -4669,7 +4675,7 @@
           <a:lstStyle/>
           <a:p>
             <a:pPr>
-              <a:defRPr sz="3000" b="1">
+              <a:defRPr sz="2800" b="1">
                 <a:solidFill>
                   <a:srgbClr val="1F2A4E"/>
                 </a:solidFill>
@@ -4689,7 +4695,7 @@
         </p:nvSpPr>
         <p:spPr>
           <a:xfrm>
-            <a:off x="457200" y="1143000"/>
+            <a:off x="457200" y="1097280"/>
             <a:ext cx="11430000" cy="45720"/>
           </a:xfrm>
           <a:prstGeom prst="rect">
@@ -4732,8 +4738,8 @@
         </p:nvSpPr>
         <p:spPr>
           <a:xfrm>
-            <a:off x="548640" y="1463040"/>
-            <a:ext cx="11064240" cy="1554480"/>
+            <a:off x="548640" y="1371600"/>
+            <a:ext cx="11064240" cy="2103120"/>
           </a:xfrm>
           <a:prstGeom prst="roundRect">
             <a:avLst/>
@@ -4764,26 +4770,50 @@
           <a:lstStyle/>
           <a:p>
             <a:pPr algn="ctr">
-              <a:defRPr sz="1500" b="1">
+              <a:defRPr sz="1400" b="1">
                 <a:solidFill>
                   <a:srgbClr val="1F2A4E"/>
                 </a:solidFill>
               </a:defRPr>
             </a:pPr>
             <a:r>
-              <a:t>Em palavras simples</a:t>
-            </a:r>
-          </a:p>
-          <a:p>
-            <a:pPr>
-              <a:defRPr sz="1800">
+              <a:t>Formulação matemática (Perez et al. 2018, AAAI)</a:t>
+            </a:r>
+          </a:p>
+          <a:p>
+            <a:pPr>
+              <a:defRPr sz="1500">
                 <a:solidFill>
                   <a:srgbClr val="3D424E"/>
                 </a:solidFill>
               </a:defRPr>
             </a:pPr>
             <a:r>
-              <a:t>Uma técnica de redes neurais (Perez et al., AAAI 2018) que permite uma rede ‘consultar’ uma fonte de contexto extra ao tomar decisões. Tecnicamente: ela modula as features intermediárias por uma transformação aprendida a partir do contexto. Não muda a arquitetura — é uma camada que se adiciona.</a:t>
+              <a:t>Dada uma feature map intermediária F do backbone e um vetor de contexto z (no nosso caso, vetor MST de 10 dimensões saído do SkinToneNet):</a:t>
+            </a:r>
+          </a:p>
+          <a:p>
+            <a:pPr>
+              <a:defRPr sz="1700" b="1">
+                <a:solidFill>
+                  <a:srgbClr val="1F2A4E"/>
+                </a:solidFill>
+              </a:defRPr>
+            </a:pPr>
+            <a:r>
+              <a:t>    FiLM(F | γ, β) = γ ⊙ F + β       onde γ = fγ(z) e β = fβ(z)</a:t>
+            </a:r>
+          </a:p>
+          <a:p>
+            <a:pPr>
+              <a:defRPr sz="1400">
+                <a:solidFill>
+                  <a:srgbClr val="3D424E"/>
+                </a:solidFill>
+              </a:defRPr>
+            </a:pPr>
+            <a:r>
+              <a:t>fγ e fβ são duas pequenas MLPs treináveis que mapeiam o contexto z para os parâmetros de modulação (γ, β) por canal. O símbolo ⊙ é multiplicação elemento-a-elemento.</a:t>
             </a:r>
           </a:p>
         </p:txBody>
@@ -4796,8 +4826,8 @@
         </p:nvSpPr>
         <p:spPr>
           <a:xfrm>
-            <a:off x="548640" y="3200400"/>
-            <a:ext cx="11064240" cy="1554480"/>
+            <a:off x="548640" y="3657600"/>
+            <a:ext cx="11064240" cy="2103120"/>
           </a:xfrm>
           <a:prstGeom prst="roundRect">
             <a:avLst/>
@@ -4805,7 +4835,7 @@
           <a:solidFill>
             <a:srgbClr val="FFFFFF"/>
           </a:solidFill>
-          <a:ln w="12700">
+          <a:ln w="19050">
             <a:solidFill>
               <a:srgbClr val="1F2A4E"/>
             </a:solidFill>
@@ -4830,26 +4860,74 @@
           <a:lstStyle/>
           <a:p>
             <a:pPr algn="ctr">
-              <a:defRPr sz="1500" b="1">
+              <a:defRPr sz="1400" b="1">
                 <a:solidFill>
                   <a:srgbClr val="1F2A4E"/>
                 </a:solidFill>
               </a:defRPr>
             </a:pPr>
             <a:r>
-              <a:t>Por que importa para a tese</a:t>
-            </a:r>
-          </a:p>
-          <a:p>
-            <a:pPr>
-              <a:defRPr sz="1800">
+              <a:t>Como aplicar no nosso pipeline (receita prática)</a:t>
+            </a:r>
+          </a:p>
+          <a:p>
+            <a:pPr>
+              <a:spcAft>
+                <a:spcPts val="200"/>
+              </a:spcAft>
+              <a:defRPr sz="1400">
                 <a:solidFill>
                   <a:srgbClr val="3D424E"/>
                 </a:solidFill>
               </a:defRPr>
             </a:pPr>
             <a:r>
-              <a:t>É o mecanismo formal que torna nossa proposta operacional. Sem FiLM, a ideia 'usar tom de pele como contexto' seria vaga. Com FiLM, é matemática e código concreto. Custo computacional: menos de 1% sobre o backbone.</a:t>
+              <a:t>1. Extrair vetor MST z ∈ ℝ¹⁰ da imagem usando o SkinToneNet pré-treinado.</a:t>
+            </a:r>
+          </a:p>
+          <a:p>
+            <a:pPr>
+              <a:spcAft>
+                <a:spcPts val="200"/>
+              </a:spcAft>
+              <a:defRPr sz="1400">
+                <a:solidFill>
+                  <a:srgbClr val="3D424E"/>
+                </a:solidFill>
+              </a:defRPr>
+            </a:pPr>
+            <a:r>
+              <a:t>2. Para cada bloco residual do ConvNeXt-T, inserir um bloco FiLM que recebe z e produz (γ, β).</a:t>
+            </a:r>
+          </a:p>
+          <a:p>
+            <a:pPr>
+              <a:spcAft>
+                <a:spcPts val="200"/>
+              </a:spcAft>
+              <a:defRPr sz="1400">
+                <a:solidFill>
+                  <a:srgbClr val="3D424E"/>
+                </a:solidFill>
+              </a:defRPr>
+            </a:pPr>
+            <a:r>
+              <a:t>3. Modular as features intermediárias F do bloco: F' = γ ⊙ F + β.</a:t>
+            </a:r>
+          </a:p>
+          <a:p>
+            <a:pPr>
+              <a:spcAft>
+                <a:spcPts val="200"/>
+              </a:spcAft>
+              <a:defRPr sz="1400">
+                <a:solidFill>
+                  <a:srgbClr val="3D424E"/>
+                </a:solidFill>
+              </a:defRPr>
+            </a:pPr>
+            <a:r>
+              <a:t>4. Backbone e cabeça de classificação treinam normalmente; só os parâmetros das MLPs (fγ, fβ) são novos.</a:t>
             </a:r>
           </a:p>
         </p:txBody>
@@ -4862,8 +4940,8 @@
         </p:nvSpPr>
         <p:spPr>
           <a:xfrm>
-            <a:off x="548640" y="4937760"/>
-            <a:ext cx="11064240" cy="1463040"/>
+            <a:off x="548640" y="5943600"/>
+            <a:ext cx="11064240" cy="822960"/>
           </a:xfrm>
           <a:prstGeom prst="roundRect">
             <a:avLst/>
@@ -4871,7 +4949,7 @@
           <a:solidFill>
             <a:srgbClr val="FFFFFF"/>
           </a:solidFill>
-          <a:ln w="12700">
+          <a:ln w="19050">
             <a:solidFill>
               <a:srgbClr val="2E7D32"/>
             </a:solidFill>
@@ -4892,30 +4970,30 @@
           </a:fontRef>
         </p:style>
         <p:txBody>
-          <a:bodyPr rtlCol="0" anchor="ctr" wrap="square" lIns="274320" rIns="274320" tIns="137160"/>
+          <a:bodyPr rtlCol="0" anchor="ctr" wrap="square" lIns="274320" rIns="274320" tIns="91440"/>
           <a:lstStyle/>
           <a:p>
             <a:pPr algn="ctr">
-              <a:defRPr sz="1500" b="1">
+              <a:defRPr sz="1300" b="1">
                 <a:solidFill>
                   <a:srgbClr val="2E7D32"/>
                 </a:solidFill>
               </a:defRPr>
             </a:pPr>
             <a:r>
-              <a:t>Exemplo concreto</a:t>
-            </a:r>
-          </a:p>
-          <a:p>
-            <a:pPr>
-              <a:defRPr sz="1700">
+              <a:t>Por que importa para a tese</a:t>
+            </a:r>
+          </a:p>
+          <a:p>
+            <a:pPr>
+              <a:defRPr sz="1300">
                 <a:solidFill>
                   <a:srgbClr val="3D424E"/>
                 </a:solidFill>
               </a:defRPr>
             </a:pPr>
             <a:r>
-              <a:t>Analogia: imagine um médico fazendo diagnóstico. Antes de decidir, ele consulta o exame complementar (ECG, raio-X). FiLM faz isso para a rede de raça: antes de decidir, ela 'consulta' a rede de tom de pele.</a:t>
+              <a:t>Sem FiLM, 'usar tom de pele como contexto' seria vaga. Com FiLM, é matemática e código concreto — qualquer revisor consegue reproduzir.</a:t>
             </a:r>
           </a:p>
         </p:txBody>
@@ -4961,7 +5039,7 @@
           <a:lstStyle/>
           <a:p>
             <a:pPr>
-              <a:defRPr sz="3000" b="1">
+              <a:defRPr sz="2800" b="1">
                 <a:solidFill>
                   <a:srgbClr val="1F2A4E"/>
                 </a:solidFill>
@@ -4981,7 +5059,7 @@
         </p:nvSpPr>
         <p:spPr>
           <a:xfrm>
-            <a:off x="457200" y="1143000"/>
+            <a:off x="457200" y="1097280"/>
             <a:ext cx="11430000" cy="45720"/>
           </a:xfrm>
           <a:prstGeom prst="rect">
@@ -5024,8 +5102,8 @@
         </p:nvSpPr>
         <p:spPr>
           <a:xfrm>
-            <a:off x="548640" y="1463040"/>
-            <a:ext cx="11064240" cy="1554480"/>
+            <a:off x="548640" y="1371600"/>
+            <a:ext cx="11064240" cy="2194560"/>
           </a:xfrm>
           <a:prstGeom prst="roundRect">
             <a:avLst/>
@@ -5056,26 +5134,89 @@
           <a:lstStyle/>
           <a:p>
             <a:pPr algn="ctr">
-              <a:defRPr sz="1500" b="1">
+              <a:defRPr sz="1400" b="1">
                 <a:solidFill>
                   <a:srgbClr val="1F2A4E"/>
                 </a:solidFill>
               </a:defRPr>
             </a:pPr>
             <a:r>
-              <a:t>Em palavras simples</a:t>
-            </a:r>
-          </a:p>
-          <a:p>
-            <a:pPr>
-              <a:defRPr sz="1800">
+              <a:t>Formalização teórica (Madras et al. 2018, ICML)</a:t>
+            </a:r>
+          </a:p>
+          <a:p>
+            <a:pPr>
+              <a:spcAft>
+                <a:spcPts val="200"/>
+              </a:spcAft>
+              <a:defRPr sz="1300">
                 <a:solidFill>
                   <a:srgbClr val="3D424E"/>
                 </a:solidFill>
               </a:defRPr>
             </a:pPr>
             <a:r>
-              <a:t>Madras et al. (ICML 2018) provaram teoricamente e mostraram empiricamente que, ao treinar uma rede para ser justa em uma tarefa A, essa propriedade de ser justa é HERDADA por outras tarefas B que usem a mesma representação como ponto de partida.</a:t>
+              <a:t>Encoder e: X → Z      mapeia entrada para representação latente Z</a:t>
+            </a:r>
+          </a:p>
+          <a:p>
+            <a:pPr>
+              <a:spcAft>
+                <a:spcPts val="200"/>
+              </a:spcAft>
+              <a:defRPr sz="1300">
+                <a:solidFill>
+                  <a:srgbClr val="3D424E"/>
+                </a:solidFill>
+              </a:defRPr>
+            </a:pPr>
+            <a:r>
+              <a:t>Classificador c: Z → Y      prediz a tarefa de interesse</a:t>
+            </a:r>
+          </a:p>
+          <a:p>
+            <a:pPr>
+              <a:spcAft>
+                <a:spcPts val="200"/>
+              </a:spcAft>
+              <a:defRPr sz="1300">
+                <a:solidFill>
+                  <a:srgbClr val="3D424E"/>
+                </a:solidFill>
+              </a:defRPr>
+            </a:pPr>
+            <a:r>
+              <a:t>Adversário a: Z → S      tenta prever atributo sensível S a partir de Z</a:t>
+            </a:r>
+          </a:p>
+          <a:p>
+            <a:pPr>
+              <a:spcAft>
+                <a:spcPts val="200"/>
+              </a:spcAft>
+              <a:defRPr sz="1300" b="1">
+                <a:solidFill>
+                  <a:srgbClr val="1F2A4E"/>
+                </a:solidFill>
+              </a:defRPr>
+            </a:pPr>
+            <a:r>
+              <a:t>Objetivo:    min_{e,c} max_a  [ L_clf(c(e(X)), Y)  +  λ · L_adv(a(e(X)), S) ]</a:t>
+            </a:r>
+          </a:p>
+          <a:p>
+            <a:pPr>
+              <a:spcAft>
+                <a:spcPts val="200"/>
+              </a:spcAft>
+              <a:defRPr sz="1300" b="1">
+                <a:solidFill>
+                  <a:srgbClr val="1F2A4E"/>
+                </a:solidFill>
+              </a:defRPr>
+            </a:pPr>
+            <a:r>
+              <a:t>Resultado teórico: se a falha (L_adv → 0), então Z é fair sob demographic parity / equalized odds.</a:t>
             </a:r>
           </a:p>
         </p:txBody>
@@ -5088,8 +5229,8 @@
         </p:nvSpPr>
         <p:spPr>
           <a:xfrm>
-            <a:off x="548640" y="3200400"/>
-            <a:ext cx="11064240" cy="1554480"/>
+            <a:off x="548640" y="3703320"/>
+            <a:ext cx="11064240" cy="1737360"/>
           </a:xfrm>
           <a:prstGeom prst="roundRect">
             <a:avLst/>
@@ -5097,7 +5238,7 @@
           <a:solidFill>
             <a:srgbClr val="FFFFFF"/>
           </a:solidFill>
-          <a:ln w="12700">
+          <a:ln w="19050">
             <a:solidFill>
               <a:srgbClr val="1F2A4E"/>
             </a:solidFill>
@@ -5122,26 +5263,38 @@
           <a:lstStyle/>
           <a:p>
             <a:pPr algn="ctr">
-              <a:defRPr sz="1500" b="1">
+              <a:defRPr sz="1400" b="1">
                 <a:solidFill>
                   <a:srgbClr val="1F2A4E"/>
                 </a:solidFill>
               </a:defRPr>
             </a:pPr>
             <a:r>
-              <a:t>Por que importa para a tese</a:t>
-            </a:r>
-          </a:p>
-          <a:p>
-            <a:pPr>
-              <a:defRPr sz="1800">
+              <a:t>Garantia de transferência (Teorema 1, Madras 2018)</a:t>
+            </a:r>
+          </a:p>
+          <a:p>
+            <a:pPr>
+              <a:defRPr sz="1400">
                 <a:solidFill>
                   <a:srgbClr val="3D424E"/>
                 </a:solidFill>
               </a:defRPr>
             </a:pPr>
             <a:r>
-              <a:t>É o que sustenta a EXTENSÃO da nossa tese para face recognition. Se treinarmos fairness na classificação racial (Cap 2), a propriedade fair se transfere para reconhecimento facial (Cap 3) — não precisa re-treinar do zero. Esta é a demonstração empírica que combinamos.</a:t>
+              <a:t>Para QUALQUER classificador downstream c' treinado sobre a mesma representação Z, a violação de fairness de c' é limitada superiormente pela violação de fairness em c. Em palavras simples: a propriedade fair é PROPRIEDADE DA REPRESENTAÇÃO Z, não da tarefa específica.</a:t>
+            </a:r>
+          </a:p>
+          <a:p>
+            <a:pPr>
+              <a:defRPr sz="1300">
+                <a:solidFill>
+                  <a:srgbClr val="3D424E"/>
+                </a:solidFill>
+              </a:defRPr>
+            </a:pPr>
+            <a:r>
+              <a:t>Implicação: ao treinar fair em race classification (Cap 2), o backbone passa a Z fair. Reaproveitamos esse mesmo Z em face recognition (Cap 3) sem re-treinar fairness do zero.</a:t>
             </a:r>
           </a:p>
         </p:txBody>
@@ -5154,8 +5307,8 @@
         </p:nvSpPr>
         <p:spPr>
           <a:xfrm>
-            <a:off x="548640" y="4937760"/>
-            <a:ext cx="11064240" cy="1463040"/>
+            <a:off x="548640" y="5577840"/>
+            <a:ext cx="11064240" cy="1188720"/>
           </a:xfrm>
           <a:prstGeom prst="roundRect">
             <a:avLst/>
@@ -5163,7 +5316,7 @@
           <a:solidFill>
             <a:srgbClr val="FFFFFF"/>
           </a:solidFill>
-          <a:ln w="12700">
+          <a:ln w="19050">
             <a:solidFill>
               <a:srgbClr val="2E7D32"/>
             </a:solidFill>
@@ -5184,30 +5337,30 @@
           </a:fontRef>
         </p:style>
         <p:txBody>
-          <a:bodyPr rtlCol="0" anchor="ctr" wrap="square" lIns="274320" rIns="274320" tIns="137160"/>
+          <a:bodyPr rtlCol="0" anchor="ctr" wrap="square" lIns="274320" rIns="274320" tIns="91440"/>
           <a:lstStyle/>
           <a:p>
             <a:pPr algn="ctr">
-              <a:defRPr sz="1500" b="1">
+              <a:defRPr sz="1300" b="1">
                 <a:solidFill>
                   <a:srgbClr val="2E7D32"/>
                 </a:solidFill>
               </a:defRPr>
             </a:pPr>
             <a:r>
-              <a:t>Exemplo concreto</a:t>
-            </a:r>
-          </a:p>
-          <a:p>
-            <a:pPr>
-              <a:defRPr sz="1700">
+              <a:t>Evidência empírica complementar</a:t>
+            </a:r>
+          </a:p>
+          <a:p>
+            <a:pPr>
+              <a:defRPr sz="1300">
                 <a:solidFill>
                   <a:srgbClr val="3D424E"/>
                 </a:solidFill>
               </a:defRPr>
             </a:pPr>
             <a:r>
-              <a:t>Analogia: aprender ética profissional em medicina geral nos torna mais éticos também quando nos especializamos em cardiologia. A propriedade 'ética' não depende da especialidade — está embutida no profissional.</a:t>
+              <a:t>Aguirre &amp; Dredze 2023 (arXiv:2305.12671) — confirmaram empiricamente que objetivos de fairness demográfico SE TRANSFEREM entre tarefas que compartilham representação (domínio NLP, mas princípio é independente da modalidade).</a:t>
             </a:r>
           </a:p>
         </p:txBody>
@@ -5235,14 +5388,14 @@
           <a:lstStyle/>
           <a:p>
             <a:pPr>
-              <a:defRPr sz="1400" i="1">
+              <a:defRPr sz="1300" i="1">
                 <a:solidFill>
                   <a:srgbClr val="707682"/>
                 </a:solidFill>
               </a:defRPr>
             </a:pPr>
             <a:r>
-              <a:t>Reforço empírico via Aguirre &amp; Dredze 2023 (Rodada 6) — fair transfer em multi-task confirmado</a:t>
+              <a:t>H5 em revisão após Pangelinan 2023 (Rodada 6): pixel info pode ser confounder adicional em FR — discussão na pauta</a:t>
             </a:r>
           </a:p>
         </p:txBody>
@@ -5629,7 +5782,7 @@
               </a:defRPr>
             </a:pPr>
             <a:r>
-              <a:t>As métricas que vamos reportar — explicação simples</a:t>
+              <a:t>As métricas que vamos reportar — todas públicas e estabelecidas</a:t>
             </a:r>
           </a:p>
         </p:txBody>
@@ -5710,7 +5863,7 @@
               </a:defRPr>
             </a:pPr>
             <a:r>
-              <a:t>F1 macro — média das pontuações em todas as 7 raças, tratando todas igualmente.</a:t>
+              <a:t>F1 macro — média das pontuações nas 7 raças, tratando todas igualmente</a:t>
             </a:r>
           </a:p>
           <a:p>
@@ -5725,6 +5878,21 @@
               </a:defRPr>
             </a:pPr>
             <a:r>
+              <a:t>Referência: van Rijsbergen 1979 (livro Information Retrieval). Implementação: sklearn.metrics.f1_score(average='macro').</a:t>
+            </a:r>
+          </a:p>
+          <a:p>
+            <a:pPr lvl="1">
+              <a:spcAft>
+                <a:spcPts val="800"/>
+              </a:spcAft>
+              <a:defRPr sz="1700">
+                <a:solidFill>
+                  <a:srgbClr val="707682"/>
+                </a:solidFill>
+              </a:defRPr>
+            </a:pPr>
+            <a:r>
               <a:t>Quanto maior, melhor. SOTA atual = 75% (FaceScanPaliGemma).</a:t>
             </a:r>
           </a:p>
@@ -5752,7 +5920,7 @@
               </a:defRPr>
             </a:pPr>
             <a:r>
-              <a:t>DR (Disparity Ratio) — razão entre a melhor e a pior raça.</a:t>
+              <a:t>DR (Disparity Ratio) — razão entre a melhor e a pior raça</a:t>
             </a:r>
           </a:p>
           <a:p>
@@ -5767,7 +5935,22 @@
               </a:defRPr>
             </a:pPr>
             <a:r>
-              <a:t>Quanto mais perto de 1.0, mais justo. Latinx vs Black hoje = 60% / 90% = 0.67.</a:t>
+              <a:t>Referência: Hardt, Price &amp; Srebro 2016 (NeurIPS) — Equal Opportunity / Equalized Odds.</a:t>
+            </a:r>
+          </a:p>
+          <a:p>
+            <a:pPr lvl="1">
+              <a:spcAft>
+                <a:spcPts val="800"/>
+              </a:spcAft>
+              <a:defRPr sz="1700">
+                <a:solidFill>
+                  <a:srgbClr val="707682"/>
+                </a:solidFill>
+              </a:defRPr>
+            </a:pPr>
+            <a:r>
+              <a:t>Quanto mais perto de 1.0, mais justo. Latinx vs Black atualmente = 60% / 90% = 0.67.</a:t>
             </a:r>
           </a:p>
           <a:p>
@@ -5794,7 +5977,7 @@
               </a:defRPr>
             </a:pPr>
             <a:r>
-              <a:t>Worst-class F1 — pontuação na raça em que o modelo se sai pior.</a:t>
+              <a:t>Worst-class F1 — pontuação na raça em que o modelo se sai pior</a:t>
             </a:r>
           </a:p>
           <a:p>
@@ -5809,7 +5992,22 @@
               </a:defRPr>
             </a:pPr>
             <a:r>
-              <a:t>Hoje = 60% (Latinx). Quanto maior, melhor o pior caso.</a:t>
+              <a:t>Referência: Sagawa et al. 2020 (ICLR) — Group DRO. Métrica = min_g F1(g).</a:t>
+            </a:r>
+          </a:p>
+          <a:p>
+            <a:pPr lvl="1">
+              <a:spcAft>
+                <a:spcPts val="800"/>
+              </a:spcAft>
+              <a:defRPr sz="1700">
+                <a:solidFill>
+                  <a:srgbClr val="707682"/>
+                </a:solidFill>
+              </a:defRPr>
+            </a:pPr>
+            <a:r>
+              <a:t>Atualmente = 60% (Latinx). Quanto maior, melhor o pior caso.</a:t>
             </a:r>
           </a:p>
           <a:p>
@@ -5851,22 +6049,42 @@
               </a:defRPr>
             </a:pPr>
             <a:r>
-              <a:t>Teorema da impossibilidade (Kleinberg et al. 2017): não existe métrica única</a:t>
-            </a:r>
-          </a:p>
-          <a:p>
-            <a:pPr lvl="1">
-              <a:spcAft>
-                <a:spcPts val="800"/>
-              </a:spcAft>
-              <a:defRPr sz="1700">
+              <a:t>Teorema da impossibilidade (Kleinberg, Mullainathan &amp; Raghavan 2017, ITCS): não existe métrica única de fairness — reportar as 3 é forma honesta de comunicar trade-offs.</a:t>
+            </a:r>
+          </a:p>
+        </p:txBody>
+      </p:sp>
+      <p:sp>
+        <p:nvSpPr>
+          <p:cNvPr id="5" name="TextBox 4"/>
+          <p:cNvSpPr txBox="1"/>
+          <p:nvPr/>
+        </p:nvSpPr>
+        <p:spPr>
+          <a:xfrm>
+            <a:off x="457200" y="6400800"/>
+            <a:ext cx="11430000" cy="365760"/>
+          </a:xfrm>
+          <a:prstGeom prst="rect">
+            <a:avLst/>
+          </a:prstGeom>
+          <a:noFill/>
+        </p:spPr>
+        <p:txBody>
+          <a:bodyPr wrap="none">
+            <a:spAutoFit/>
+          </a:bodyPr>
+          <a:lstStyle/>
+          <a:p>
+            <a:pPr>
+              <a:defRPr sz="1500" i="1">
                 <a:solidFill>
                   <a:srgbClr val="707682"/>
                 </a:solidFill>
               </a:defRPr>
             </a:pPr>
             <a:r>
-              <a:t>de fairness. Reportar 3 simultaneamente é a forma honesta de comunicar trade-offs.</a:t>
+              <a:t>Todas as 3 métricas + teorema da impossibilidade já têm ficha catalogada no corpus</a:t>
             </a:r>
           </a:p>
         </p:txBody>
@@ -6836,329 +7054,6 @@
           <a:noFill/>
         </p:spPr>
         <p:txBody>
-          <a:bodyPr wrap="square">
-            <a:spAutoFit/>
-          </a:bodyPr>
-          <a:lstStyle/>
-          <a:p>
-            <a:pPr>
-              <a:defRPr sz="3000" b="1">
-                <a:solidFill>
-                  <a:srgbClr val="1F2A4E"/>
-                </a:solidFill>
-              </a:defRPr>
-            </a:pPr>
-            <a:r>
-              <a:t>Os 3 capítulos experimentais</a:t>
-            </a:r>
-          </a:p>
-        </p:txBody>
-      </p:sp>
-      <p:sp>
-        <p:nvSpPr>
-          <p:cNvPr id="3" name="Rectangle 2"/>
-          <p:cNvSpPr/>
-          <p:nvPr/>
-        </p:nvSpPr>
-        <p:spPr>
-          <a:xfrm>
-            <a:off x="457200" y="1143000"/>
-            <a:ext cx="11430000" cy="45720"/>
-          </a:xfrm>
-          <a:prstGeom prst="rect">
-            <a:avLst/>
-          </a:prstGeom>
-          <a:solidFill>
-            <a:srgbClr val="1F2A4E"/>
-          </a:solidFill>
-          <a:ln>
-            <a:noFill/>
-          </a:ln>
-        </p:spPr>
-        <p:style>
-          <a:lnRef idx="1">
-            <a:schemeClr val="accent1"/>
-          </a:lnRef>
-          <a:fillRef idx="3">
-            <a:schemeClr val="accent1"/>
-          </a:fillRef>
-          <a:effectRef idx="2">
-            <a:schemeClr val="accent1"/>
-          </a:effectRef>
-          <a:fontRef idx="minor">
-            <a:schemeClr val="lt1"/>
-          </a:fontRef>
-        </p:style>
-        <p:txBody>
-          <a:bodyPr rtlCol="0" anchor="ctr"/>
-          <a:lstStyle/>
-          <a:p>
-            <a:pPr algn="ctr"/>
-          </a:p>
-        </p:txBody>
-      </p:sp>
-      <p:sp>
-        <p:nvSpPr>
-          <p:cNvPr id="4" name="TextBox 3"/>
-          <p:cNvSpPr txBox="1"/>
-          <p:nvPr/>
-        </p:nvSpPr>
-        <p:spPr>
-          <a:xfrm>
-            <a:off x="548640" y="1371600"/>
-            <a:ext cx="11247120" cy="4937760"/>
-          </a:xfrm>
-          <a:prstGeom prst="rect">
-            <a:avLst/>
-          </a:prstGeom>
-          <a:noFill/>
-        </p:spPr>
-        <p:txBody>
-          <a:bodyPr wrap="square">
-            <a:spAutoFit/>
-          </a:bodyPr>
-          <a:lstStyle/>
-          <a:p>
-            <a:pPr>
-              <a:spcAft>
-                <a:spcPts val="800"/>
-              </a:spcAft>
-              <a:defRPr sz="2000" b="0">
-                <a:solidFill>
-                  <a:srgbClr val="3D424E"/>
-                </a:solidFill>
-              </a:defRPr>
-            </a:pPr>
-            <a:r>
-              <a:t>Capítulo 1 — Construir o classificador de tom</a:t>
-            </a:r>
-          </a:p>
-          <a:p>
-            <a:pPr lvl="1">
-              <a:spcAft>
-                <a:spcPts val="800"/>
-              </a:spcAft>
-              <a:defRPr sz="1700">
-                <a:solidFill>
-                  <a:srgbClr val="707682"/>
-                </a:solidFill>
-              </a:defRPr>
-            </a:pPr>
-            <a:r>
-              <a:t>Treinar sobre MST-E + Casual Conversations</a:t>
-            </a:r>
-          </a:p>
-          <a:p>
-            <a:pPr lvl="1">
-              <a:spcAft>
-                <a:spcPts val="800"/>
-              </a:spcAft>
-              <a:defRPr sz="1700">
-                <a:solidFill>
-                  <a:srgbClr val="707682"/>
-                </a:solidFill>
-              </a:defRPr>
-            </a:pPr>
-            <a:r>
-              <a:t>Aplicar no FairFace e construir a matriz pública tom × raça</a:t>
-            </a:r>
-          </a:p>
-          <a:p>
-            <a:pPr lvl="1">
-              <a:spcAft>
-                <a:spcPts val="800"/>
-              </a:spcAft>
-              <a:defRPr sz="1700">
-                <a:solidFill>
-                  <a:srgbClr val="707682"/>
-                </a:solidFill>
-              </a:defRPr>
-            </a:pPr>
-            <a:r>
-              <a:t>Testa H3 (Latinx tem spread amplo)</a:t>
-            </a:r>
-          </a:p>
-          <a:p>
-            <a:pPr>
-              <a:spcAft>
-                <a:spcPts val="800"/>
-              </a:spcAft>
-              <a:defRPr sz="2000" b="0">
-                <a:solidFill>
-                  <a:srgbClr val="3D424E"/>
-                </a:solidFill>
-              </a:defRPr>
-            </a:pPr>
-          </a:p>
-          <a:p>
-            <a:pPr>
-              <a:spcAft>
-                <a:spcPts val="800"/>
-              </a:spcAft>
-              <a:defRPr sz="2000" b="0">
-                <a:solidFill>
-                  <a:srgbClr val="3D424E"/>
-                </a:solidFill>
-              </a:defRPr>
-            </a:pPr>
-            <a:r>
-              <a:t>Capítulo 2 — Classificador de raça com tom como contexto</a:t>
-            </a:r>
-          </a:p>
-          <a:p>
-            <a:pPr lvl="1">
-              <a:spcAft>
-                <a:spcPts val="800"/>
-              </a:spcAft>
-              <a:defRPr sz="1700">
-                <a:solidFill>
-                  <a:srgbClr val="707682"/>
-                </a:solidFill>
-              </a:defRPr>
-            </a:pPr>
-            <a:r>
-              <a:t>Pipeline ConvNeXt-T + FiLM, comparado com 4 baselines independentes</a:t>
-            </a:r>
-          </a:p>
-          <a:p>
-            <a:pPr lvl="1">
-              <a:spcAft>
-                <a:spcPts val="800"/>
-              </a:spcAft>
-              <a:defRPr sz="1700">
-                <a:solidFill>
-                  <a:srgbClr val="707682"/>
-                </a:solidFill>
-              </a:defRPr>
-            </a:pPr>
-            <a:r>
-              <a:t>3 seeds para significância estatística</a:t>
-            </a:r>
-          </a:p>
-          <a:p>
-            <a:pPr lvl="1">
-              <a:spcAft>
-                <a:spcPts val="800"/>
-              </a:spcAft>
-              <a:defRPr sz="1700">
-                <a:solidFill>
-                  <a:srgbClr val="707682"/>
-                </a:solidFill>
-              </a:defRPr>
-            </a:pPr>
-            <a:r>
-              <a:t>Testa H1 (pipeline funciona), H2 (Latinx é estrutural), H4 (overlap explica erros)</a:t>
-            </a:r>
-          </a:p>
-          <a:p>
-            <a:pPr>
-              <a:spcAft>
-                <a:spcPts val="800"/>
-              </a:spcAft>
-              <a:defRPr sz="2000" b="0">
-                <a:solidFill>
-                  <a:srgbClr val="3D424E"/>
-                </a:solidFill>
-              </a:defRPr>
-            </a:pPr>
-          </a:p>
-          <a:p>
-            <a:pPr>
-              <a:spcAft>
-                <a:spcPts val="800"/>
-              </a:spcAft>
-              <a:defRPr sz="2000" b="0">
-                <a:solidFill>
-                  <a:srgbClr val="3D424E"/>
-                </a:solidFill>
-              </a:defRPr>
-            </a:pPr>
-            <a:r>
-              <a:t>Capítulo 3 — Aplicar a reconhecimento facial</a:t>
-            </a:r>
-          </a:p>
-          <a:p>
-            <a:pPr lvl="1">
-              <a:spcAft>
-                <a:spcPts val="800"/>
-              </a:spcAft>
-              <a:defRPr sz="1700">
-                <a:solidFill>
-                  <a:srgbClr val="707682"/>
-                </a:solidFill>
-              </a:defRPr>
-            </a:pPr>
-            <a:r>
-              <a:t>Mesmo pipeline em RFW ou BFW (datasets que já estão catalogados)</a:t>
-            </a:r>
-          </a:p>
-          <a:p>
-            <a:pPr lvl="1">
-              <a:spcAft>
-                <a:spcPts val="800"/>
-              </a:spcAft>
-              <a:defRPr sz="1700">
-                <a:solidFill>
-                  <a:srgbClr val="707682"/>
-                </a:solidFill>
-              </a:defRPr>
-            </a:pPr>
-            <a:r>
-              <a:t>Foco em accuracy de Black/African</a:t>
-            </a:r>
-          </a:p>
-          <a:p>
-            <a:pPr lvl="1">
-              <a:spcAft>
-                <a:spcPts val="800"/>
-              </a:spcAft>
-              <a:defRPr sz="1700">
-                <a:solidFill>
-                  <a:srgbClr val="707682"/>
-                </a:solidFill>
-              </a:defRPr>
-            </a:pPr>
-            <a:r>
-              <a:t>Testa H5 (fair transferência funciona)</a:t>
-            </a:r>
-          </a:p>
-        </p:txBody>
-      </p:sp>
-    </p:spTree>
-  </p:cSld>
-  <p:clrMapOvr>
-    <a:masterClrMapping/>
-  </p:clrMapOvr>
-</p:sld>
-</file>
-
-<file path=ppt/slides/slide23.xml><?xml version="1.0" encoding="utf-8"?>
-<p:sld xmlns:a="http://schemas.openxmlformats.org/drawingml/2006/main" xmlns:p="http://schemas.openxmlformats.org/presentationml/2006/main" xmlns:r="http://schemas.openxmlformats.org/officeDocument/2006/relationships">
-  <p:cSld>
-    <p:spTree>
-      <p:nvGrpSpPr>
-        <p:cNvPr id="1" name=""/>
-        <p:cNvGrpSpPr/>
-        <p:nvPr/>
-      </p:nvGrpSpPr>
-      <p:grpSpPr/>
-      <p:sp>
-        <p:nvSpPr>
-          <p:cNvPr id="2" name="TextBox 1"/>
-          <p:cNvSpPr txBox="1"/>
-          <p:nvPr/>
-        </p:nvSpPr>
-        <p:spPr>
-          <a:xfrm>
-            <a:off x="457200" y="365760"/>
-            <a:ext cx="11430000" cy="822960"/>
-          </a:xfrm>
-          <a:prstGeom prst="rect">
-            <a:avLst/>
-          </a:prstGeom>
-          <a:noFill/>
-        </p:spPr>
-        <p:txBody>
           <a:bodyPr wrap="none">
             <a:spAutoFit/>
           </a:bodyPr>
@@ -7243,7 +7138,7 @@
                 <a:gridCol w="3810000"/>
                 <a:gridCol w="3810000"/>
               </a:tblGrid>
-              <a:tr h="548640">
+              <a:tr h="493776">
                 <a:tc>
                   <a:txBody>
                     <a:bodyPr/>
@@ -7308,7 +7203,7 @@
                   </a:tcPr>
                 </a:tc>
               </a:tr>
-              <a:tr h="548640">
+              <a:tr h="493776">
                 <a:tc>
                   <a:txBody>
                     <a:bodyPr/>
@@ -7373,7 +7268,7 @@
                   </a:tcPr>
                 </a:tc>
               </a:tr>
-              <a:tr h="548640">
+              <a:tr h="493776">
                 <a:tc>
                   <a:txBody>
                     <a:bodyPr/>
@@ -7385,7 +7280,7 @@
                             <a:srgbClr val="3D424E"/>
                           </a:solidFill>
                         </a:rPr>
-                        <a:t>Setup metodológico</a:t>
+                        <a:t>Submissão para qualificação</a:t>
                       </a:r>
                     </a:p>
                   </a:txBody>
@@ -7406,7 +7301,7 @@
                             <a:srgbClr val="3D424E"/>
                           </a:solidFill>
                         </a:rPr>
-                        <a:t>2 semanas</a:t>
+                        <a:t>+2 semanas após aprovação</a:t>
                       </a:r>
                     </a:p>
                   </a:txBody>
@@ -7427,7 +7322,7 @@
                             <a:srgbClr val="3D424E"/>
                           </a:solidFill>
                         </a:rPr>
-                        <a:t>Documentos com especificações detalhadas</a:t>
+                        <a:t>Documento de qualificação ao programa</a:t>
                       </a:r>
                     </a:p>
                   </a:txBody>
@@ -7438,7 +7333,72 @@
                   </a:tcPr>
                 </a:tc>
               </a:tr>
-              <a:tr h="548640">
+              <a:tr h="493776">
+                <a:tc>
+                  <a:txBody>
+                    <a:bodyPr/>
+                    <a:lstStyle/>
+                    <a:p>
+                      <a:r>
+                        <a:rPr sz="1500">
+                          <a:solidFill>
+                            <a:srgbClr val="3D424E"/>
+                          </a:solidFill>
+                        </a:rPr>
+                        <a:t>Setup metodológico</a:t>
+                      </a:r>
+                    </a:p>
+                  </a:txBody>
+                  <a:tcPr>
+                    <a:solidFill>
+                      <a:srgbClr val="FFFFFF"/>
+                    </a:solidFill>
+                  </a:tcPr>
+                </a:tc>
+                <a:tc>
+                  <a:txBody>
+                    <a:bodyPr/>
+                    <a:lstStyle/>
+                    <a:p>
+                      <a:r>
+                        <a:rPr sz="1500">
+                          <a:solidFill>
+                            <a:srgbClr val="3D424E"/>
+                          </a:solidFill>
+                        </a:rPr>
+                        <a:t>2 semanas</a:t>
+                      </a:r>
+                    </a:p>
+                  </a:txBody>
+                  <a:tcPr>
+                    <a:solidFill>
+                      <a:srgbClr val="FFFFFF"/>
+                    </a:solidFill>
+                  </a:tcPr>
+                </a:tc>
+                <a:tc>
+                  <a:txBody>
+                    <a:bodyPr/>
+                    <a:lstStyle/>
+                    <a:p>
+                      <a:r>
+                        <a:rPr sz="1500">
+                          <a:solidFill>
+                            <a:srgbClr val="3D424E"/>
+                          </a:solidFill>
+                        </a:rPr>
+                        <a:t>Documentos com especificações detalhadas</a:t>
+                      </a:r>
+                    </a:p>
+                  </a:txBody>
+                  <a:tcPr>
+                    <a:solidFill>
+                      <a:srgbClr val="FFFFFF"/>
+                    </a:solidFill>
+                  </a:tcPr>
+                </a:tc>
+              </a:tr>
+              <a:tr h="493776">
                 <a:tc>
                   <a:txBody>
                     <a:bodyPr/>
@@ -7451,6 +7411,201 @@
                           </a:solidFill>
                         </a:rPr>
                         <a:t>Capítulo 1 — Classificador MST + matriz</a:t>
+                      </a:r>
+                    </a:p>
+                  </a:txBody>
+                  <a:tcPr>
+                    <a:solidFill>
+                      <a:srgbClr val="E8EAED"/>
+                    </a:solidFill>
+                  </a:tcPr>
+                </a:tc>
+                <a:tc>
+                  <a:txBody>
+                    <a:bodyPr/>
+                    <a:lstStyle/>
+                    <a:p>
+                      <a:r>
+                        <a:rPr sz="1500">
+                          <a:solidFill>
+                            <a:srgbClr val="3D424E"/>
+                          </a:solidFill>
+                        </a:rPr>
+                        <a:t>4 semanas</a:t>
+                      </a:r>
+                    </a:p>
+                  </a:txBody>
+                  <a:tcPr>
+                    <a:solidFill>
+                      <a:srgbClr val="E8EAED"/>
+                    </a:solidFill>
+                  </a:tcPr>
+                </a:tc>
+                <a:tc>
+                  <a:txBody>
+                    <a:bodyPr/>
+                    <a:lstStyle/>
+                    <a:p>
+                      <a:r>
+                        <a:rPr sz="1500">
+                          <a:solidFill>
+                            <a:srgbClr val="3D424E"/>
+                          </a:solidFill>
+                        </a:rPr>
+                        <a:t>Resultado de H3</a:t>
+                      </a:r>
+                    </a:p>
+                  </a:txBody>
+                  <a:tcPr>
+                    <a:solidFill>
+                      <a:srgbClr val="E8EAED"/>
+                    </a:solidFill>
+                  </a:tcPr>
+                </a:tc>
+              </a:tr>
+              <a:tr h="493776">
+                <a:tc>
+                  <a:txBody>
+                    <a:bodyPr/>
+                    <a:lstStyle/>
+                    <a:p>
+                      <a:r>
+                        <a:rPr sz="1500">
+                          <a:solidFill>
+                            <a:srgbClr val="3D424E"/>
+                          </a:solidFill>
+                        </a:rPr>
+                        <a:t>Capítulo 2 — Race + condicionamento</a:t>
+                      </a:r>
+                    </a:p>
+                  </a:txBody>
+                  <a:tcPr>
+                    <a:solidFill>
+                      <a:srgbClr val="FFFFFF"/>
+                    </a:solidFill>
+                  </a:tcPr>
+                </a:tc>
+                <a:tc>
+                  <a:txBody>
+                    <a:bodyPr/>
+                    <a:lstStyle/>
+                    <a:p>
+                      <a:r>
+                        <a:rPr sz="1500">
+                          <a:solidFill>
+                            <a:srgbClr val="3D424E"/>
+                          </a:solidFill>
+                        </a:rPr>
+                        <a:t>10–12 semanas</a:t>
+                      </a:r>
+                    </a:p>
+                  </a:txBody>
+                  <a:tcPr>
+                    <a:solidFill>
+                      <a:srgbClr val="FFFFFF"/>
+                    </a:solidFill>
+                  </a:tcPr>
+                </a:tc>
+                <a:tc>
+                  <a:txBody>
+                    <a:bodyPr/>
+                    <a:lstStyle/>
+                    <a:p>
+                      <a:r>
+                        <a:rPr sz="1500">
+                          <a:solidFill>
+                            <a:srgbClr val="3D424E"/>
+                          </a:solidFill>
+                        </a:rPr>
+                        <a:t>Resultados de H1, H2, H4</a:t>
+                      </a:r>
+                    </a:p>
+                  </a:txBody>
+                  <a:tcPr>
+                    <a:solidFill>
+                      <a:srgbClr val="FFFFFF"/>
+                    </a:solidFill>
+                  </a:tcPr>
+                </a:tc>
+              </a:tr>
+              <a:tr h="493776">
+                <a:tc>
+                  <a:txBody>
+                    <a:bodyPr/>
+                    <a:lstStyle/>
+                    <a:p>
+                      <a:r>
+                        <a:rPr sz="1500">
+                          <a:solidFill>
+                            <a:srgbClr val="3D424E"/>
+                          </a:solidFill>
+                        </a:rPr>
+                        <a:t>Capítulo 3 — Face recognition</a:t>
+                      </a:r>
+                    </a:p>
+                  </a:txBody>
+                  <a:tcPr>
+                    <a:solidFill>
+                      <a:srgbClr val="E8EAED"/>
+                    </a:solidFill>
+                  </a:tcPr>
+                </a:tc>
+                <a:tc>
+                  <a:txBody>
+                    <a:bodyPr/>
+                    <a:lstStyle/>
+                    <a:p>
+                      <a:r>
+                        <a:rPr sz="1500">
+                          <a:solidFill>
+                            <a:srgbClr val="3D424E"/>
+                          </a:solidFill>
+                        </a:rPr>
+                        <a:t>6 semanas</a:t>
+                      </a:r>
+                    </a:p>
+                  </a:txBody>
+                  <a:tcPr>
+                    <a:solidFill>
+                      <a:srgbClr val="E8EAED"/>
+                    </a:solidFill>
+                  </a:tcPr>
+                </a:tc>
+                <a:tc>
+                  <a:txBody>
+                    <a:bodyPr/>
+                    <a:lstStyle/>
+                    <a:p>
+                      <a:r>
+                        <a:rPr sz="1500">
+                          <a:solidFill>
+                            <a:srgbClr val="3D424E"/>
+                          </a:solidFill>
+                        </a:rPr>
+                        <a:t>Resultado de H5</a:t>
+                      </a:r>
+                    </a:p>
+                  </a:txBody>
+                  <a:tcPr>
+                    <a:solidFill>
+                      <a:srgbClr val="E8EAED"/>
+                    </a:solidFill>
+                  </a:tcPr>
+                </a:tc>
+              </a:tr>
+              <a:tr h="493776">
+                <a:tc>
+                  <a:txBody>
+                    <a:bodyPr/>
+                    <a:lstStyle/>
+                    <a:p>
+                      <a:r>
+                        <a:rPr sz="1500">
+                          <a:solidFill>
+                            <a:srgbClr val="3D424E"/>
+                          </a:solidFill>
+                        </a:rPr>
+                        <a:t>Síntese final</a:t>
                       </a:r>
                     </a:p>
                   </a:txBody>
@@ -7492,7 +7647,7 @@
                             <a:srgbClr val="3D424E"/>
                           </a:solidFill>
                         </a:rPr>
-                        <a:t>Resultado de H3</a:t>
+                        <a:t>Decomposição do erro Latinx</a:t>
                       </a:r>
                     </a:p>
                   </a:txBody>
@@ -7503,7 +7658,7 @@
                   </a:tcPr>
                 </a:tc>
               </a:tr>
-              <a:tr h="548640">
+              <a:tr h="493776">
                 <a:tc>
                   <a:txBody>
                     <a:bodyPr/>
@@ -7515,7 +7670,7 @@
                             <a:srgbClr val="3D424E"/>
                           </a:solidFill>
                         </a:rPr>
-                        <a:t>Capítulo 2 — Race + condicionamento</a:t>
+                        <a:t>Escrita dos capítulos</a:t>
                       </a:r>
                     </a:p>
                   </a:txBody>
@@ -7536,7 +7691,7 @@
                             <a:srgbClr val="3D424E"/>
                           </a:solidFill>
                         </a:rPr>
-                        <a:t>10–12 semanas</a:t>
+                        <a:t>8–12 semanas (paralelo)</a:t>
                       </a:r>
                     </a:p>
                   </a:txBody>
@@ -7557,7 +7712,7 @@
                             <a:srgbClr val="3D424E"/>
                           </a:solidFill>
                         </a:rPr>
-                        <a:t>Resultados de H1, H2, H4</a:t>
+                        <a:t>Texto final da dissertação</a:t>
                       </a:r>
                     </a:p>
                   </a:txBody>
@@ -7568,7 +7723,7 @@
                   </a:tcPr>
                 </a:tc>
               </a:tr>
-              <a:tr h="548640">
+              <a:tr h="493776">
                 <a:tc>
                   <a:txBody>
                     <a:bodyPr/>
@@ -7580,7 +7735,7 @@
                             <a:srgbClr val="3D424E"/>
                           </a:solidFill>
                         </a:rPr>
-                        <a:t>Capítulo 3 — Face recognition</a:t>
+                        <a:t>Defesa prevista</a:t>
                       </a:r>
                     </a:p>
                   </a:txBody>
@@ -7601,7 +7756,7 @@
                             <a:srgbClr val="3D424E"/>
                           </a:solidFill>
                         </a:rPr>
-                        <a:t>6 semanas</a:t>
+                        <a:t>~ Janeiro–Março de 2027</a:t>
                       </a:r>
                     </a:p>
                   </a:txBody>
@@ -7622,7 +7777,7 @@
                             <a:srgbClr val="3D424E"/>
                           </a:solidFill>
                         </a:rPr>
-                        <a:t>Resultado de H5</a:t>
+                        <a:t>Total: ~28–32 semanas ativas</a:t>
                       </a:r>
                     </a:p>
                   </a:txBody>
@@ -7633,205 +7788,333 @@
                   </a:tcPr>
                 </a:tc>
               </a:tr>
-              <a:tr h="548640">
-                <a:tc>
-                  <a:txBody>
-                    <a:bodyPr/>
-                    <a:lstStyle/>
-                    <a:p>
-                      <a:r>
-                        <a:rPr sz="1500">
-                          <a:solidFill>
-                            <a:srgbClr val="3D424E"/>
-                          </a:solidFill>
-                        </a:rPr>
-                        <a:t>Síntese final</a:t>
-                      </a:r>
-                    </a:p>
-                  </a:txBody>
-                  <a:tcPr>
-                    <a:solidFill>
-                      <a:srgbClr val="E8EAED"/>
-                    </a:solidFill>
-                  </a:tcPr>
-                </a:tc>
-                <a:tc>
-                  <a:txBody>
-                    <a:bodyPr/>
-                    <a:lstStyle/>
-                    <a:p>
-                      <a:r>
-                        <a:rPr sz="1500">
-                          <a:solidFill>
-                            <a:srgbClr val="3D424E"/>
-                          </a:solidFill>
-                        </a:rPr>
-                        <a:t>4 semanas</a:t>
-                      </a:r>
-                    </a:p>
-                  </a:txBody>
-                  <a:tcPr>
-                    <a:solidFill>
-                      <a:srgbClr val="E8EAED"/>
-                    </a:solidFill>
-                  </a:tcPr>
-                </a:tc>
-                <a:tc>
-                  <a:txBody>
-                    <a:bodyPr/>
-                    <a:lstStyle/>
-                    <a:p>
-                      <a:r>
-                        <a:rPr sz="1500">
-                          <a:solidFill>
-                            <a:srgbClr val="3D424E"/>
-                          </a:solidFill>
-                        </a:rPr>
-                        <a:t>Decomposição do erro Latinx</a:t>
-                      </a:r>
-                    </a:p>
-                  </a:txBody>
-                  <a:tcPr>
-                    <a:solidFill>
-                      <a:srgbClr val="E8EAED"/>
-                    </a:solidFill>
-                  </a:tcPr>
-                </a:tc>
-              </a:tr>
-              <a:tr h="548640">
-                <a:tc>
-                  <a:txBody>
-                    <a:bodyPr/>
-                    <a:lstStyle/>
-                    <a:p>
-                      <a:r>
-                        <a:rPr sz="1500">
-                          <a:solidFill>
-                            <a:srgbClr val="3D424E"/>
-                          </a:solidFill>
-                        </a:rPr>
-                        <a:t>Escrita dos capítulos</a:t>
-                      </a:r>
-                    </a:p>
-                  </a:txBody>
-                  <a:tcPr>
-                    <a:solidFill>
-                      <a:srgbClr val="FFFFFF"/>
-                    </a:solidFill>
-                  </a:tcPr>
-                </a:tc>
-                <a:tc>
-                  <a:txBody>
-                    <a:bodyPr/>
-                    <a:lstStyle/>
-                    <a:p>
-                      <a:r>
-                        <a:rPr sz="1500">
-                          <a:solidFill>
-                            <a:srgbClr val="3D424E"/>
-                          </a:solidFill>
-                        </a:rPr>
-                        <a:t>8–12 semanas (paralelo)</a:t>
-                      </a:r>
-                    </a:p>
-                  </a:txBody>
-                  <a:tcPr>
-                    <a:solidFill>
-                      <a:srgbClr val="FFFFFF"/>
-                    </a:solidFill>
-                  </a:tcPr>
-                </a:tc>
-                <a:tc>
-                  <a:txBody>
-                    <a:bodyPr/>
-                    <a:lstStyle/>
-                    <a:p>
-                      <a:r>
-                        <a:rPr sz="1500">
-                          <a:solidFill>
-                            <a:srgbClr val="3D424E"/>
-                          </a:solidFill>
-                        </a:rPr>
-                        <a:t>Texto final da dissertação</a:t>
-                      </a:r>
-                    </a:p>
-                  </a:txBody>
-                  <a:tcPr>
-                    <a:solidFill>
-                      <a:srgbClr val="FFFFFF"/>
-                    </a:solidFill>
-                  </a:tcPr>
-                </a:tc>
-              </a:tr>
-              <a:tr h="548640">
-                <a:tc>
-                  <a:txBody>
-                    <a:bodyPr/>
-                    <a:lstStyle/>
-                    <a:p>
-                      <a:r>
-                        <a:rPr sz="1500">
-                          <a:solidFill>
-                            <a:srgbClr val="3D424E"/>
-                          </a:solidFill>
-                        </a:rPr>
-                        <a:t>Defesa prevista</a:t>
-                      </a:r>
-                    </a:p>
-                  </a:txBody>
-                  <a:tcPr>
-                    <a:solidFill>
-                      <a:srgbClr val="E8EAED"/>
-                    </a:solidFill>
-                  </a:tcPr>
-                </a:tc>
-                <a:tc>
-                  <a:txBody>
-                    <a:bodyPr/>
-                    <a:lstStyle/>
-                    <a:p>
-                      <a:r>
-                        <a:rPr sz="1500">
-                          <a:solidFill>
-                            <a:srgbClr val="3D424E"/>
-                          </a:solidFill>
-                        </a:rPr>
-                        <a:t>~ Janeiro–Março de 2027</a:t>
-                      </a:r>
-                    </a:p>
-                  </a:txBody>
-                  <a:tcPr>
-                    <a:solidFill>
-                      <a:srgbClr val="E8EAED"/>
-                    </a:solidFill>
-                  </a:tcPr>
-                </a:tc>
-                <a:tc>
-                  <a:txBody>
-                    <a:bodyPr/>
-                    <a:lstStyle/>
-                    <a:p>
-                      <a:r>
-                        <a:rPr sz="1500">
-                          <a:solidFill>
-                            <a:srgbClr val="3D424E"/>
-                          </a:solidFill>
-                        </a:rPr>
-                        <a:t>Total: ~28–32 semanas ativas</a:t>
-                      </a:r>
-                    </a:p>
-                  </a:txBody>
-                  <a:tcPr>
-                    <a:solidFill>
-                      <a:srgbClr val="E8EAED"/>
-                    </a:solidFill>
-                  </a:tcPr>
-                </a:tc>
-              </a:tr>
             </a:tbl>
           </a:graphicData>
         </a:graphic>
       </p:graphicFrame>
+    </p:spTree>
+  </p:cSld>
+  <p:clrMapOvr>
+    <a:masterClrMapping/>
+  </p:clrMapOvr>
+</p:sld>
+</file>
+
+<file path=ppt/slides/slide23.xml><?xml version="1.0" encoding="utf-8"?>
+<p:sld xmlns:a="http://schemas.openxmlformats.org/drawingml/2006/main" xmlns:p="http://schemas.openxmlformats.org/presentationml/2006/main" xmlns:r="http://schemas.openxmlformats.org/officeDocument/2006/relationships">
+  <p:cSld>
+    <p:spTree>
+      <p:nvGrpSpPr>
+        <p:cNvPr id="1" name=""/>
+        <p:cNvGrpSpPr/>
+        <p:nvPr/>
+      </p:nvGrpSpPr>
+      <p:grpSpPr/>
+      <p:sp>
+        <p:nvSpPr>
+          <p:cNvPr id="2" name="TextBox 1"/>
+          <p:cNvSpPr txBox="1"/>
+          <p:nvPr/>
+        </p:nvSpPr>
+        <p:spPr>
+          <a:xfrm>
+            <a:off x="457200" y="365760"/>
+            <a:ext cx="11430000" cy="822960"/>
+          </a:xfrm>
+          <a:prstGeom prst="rect">
+            <a:avLst/>
+          </a:prstGeom>
+          <a:noFill/>
+        </p:spPr>
+        <p:txBody>
+          <a:bodyPr wrap="square">
+            <a:spAutoFit/>
+          </a:bodyPr>
+          <a:lstStyle/>
+          <a:p>
+            <a:pPr>
+              <a:defRPr sz="3000" b="1">
+                <a:solidFill>
+                  <a:srgbClr val="1F2A4E"/>
+                </a:solidFill>
+              </a:defRPr>
+            </a:pPr>
+            <a:r>
+              <a:t>Os 3 capítulos experimentais</a:t>
+            </a:r>
+          </a:p>
+        </p:txBody>
+      </p:sp>
+      <p:sp>
+        <p:nvSpPr>
+          <p:cNvPr id="3" name="Rectangle 2"/>
+          <p:cNvSpPr/>
+          <p:nvPr/>
+        </p:nvSpPr>
+        <p:spPr>
+          <a:xfrm>
+            <a:off x="457200" y="1143000"/>
+            <a:ext cx="11430000" cy="45720"/>
+          </a:xfrm>
+          <a:prstGeom prst="rect">
+            <a:avLst/>
+          </a:prstGeom>
+          <a:solidFill>
+            <a:srgbClr val="1F2A4E"/>
+          </a:solidFill>
+          <a:ln>
+            <a:noFill/>
+          </a:ln>
+        </p:spPr>
+        <p:style>
+          <a:lnRef idx="1">
+            <a:schemeClr val="accent1"/>
+          </a:lnRef>
+          <a:fillRef idx="3">
+            <a:schemeClr val="accent1"/>
+          </a:fillRef>
+          <a:effectRef idx="2">
+            <a:schemeClr val="accent1"/>
+          </a:effectRef>
+          <a:fontRef idx="minor">
+            <a:schemeClr val="lt1"/>
+          </a:fontRef>
+        </p:style>
+        <p:txBody>
+          <a:bodyPr rtlCol="0" anchor="ctr"/>
+          <a:lstStyle/>
+          <a:p>
+            <a:pPr algn="ctr"/>
+          </a:p>
+        </p:txBody>
+      </p:sp>
+      <p:sp>
+        <p:nvSpPr>
+          <p:cNvPr id="4" name="TextBox 3"/>
+          <p:cNvSpPr txBox="1"/>
+          <p:nvPr/>
+        </p:nvSpPr>
+        <p:spPr>
+          <a:xfrm>
+            <a:off x="548640" y="1371600"/>
+            <a:ext cx="11247120" cy="4937760"/>
+          </a:xfrm>
+          <a:prstGeom prst="rect">
+            <a:avLst/>
+          </a:prstGeom>
+          <a:noFill/>
+        </p:spPr>
+        <p:txBody>
+          <a:bodyPr wrap="square">
+            <a:spAutoFit/>
+          </a:bodyPr>
+          <a:lstStyle/>
+          <a:p>
+            <a:pPr>
+              <a:spcAft>
+                <a:spcPts val="800"/>
+              </a:spcAft>
+              <a:defRPr sz="2000" b="0">
+                <a:solidFill>
+                  <a:srgbClr val="3D424E"/>
+                </a:solidFill>
+              </a:defRPr>
+            </a:pPr>
+            <a:r>
+              <a:t>Capítulo 1 — Construir o classificador de tom</a:t>
+            </a:r>
+          </a:p>
+          <a:p>
+            <a:pPr lvl="1">
+              <a:spcAft>
+                <a:spcPts val="800"/>
+              </a:spcAft>
+              <a:defRPr sz="1700">
+                <a:solidFill>
+                  <a:srgbClr val="707682"/>
+                </a:solidFill>
+              </a:defRPr>
+            </a:pPr>
+            <a:r>
+              <a:t>Treinar sobre MST-E + Casual Conversations</a:t>
+            </a:r>
+          </a:p>
+          <a:p>
+            <a:pPr lvl="1">
+              <a:spcAft>
+                <a:spcPts val="800"/>
+              </a:spcAft>
+              <a:defRPr sz="1700">
+                <a:solidFill>
+                  <a:srgbClr val="707682"/>
+                </a:solidFill>
+              </a:defRPr>
+            </a:pPr>
+            <a:r>
+              <a:t>Aplicar no FairFace e construir a matriz pública tom × raça</a:t>
+            </a:r>
+          </a:p>
+          <a:p>
+            <a:pPr lvl="1">
+              <a:spcAft>
+                <a:spcPts val="800"/>
+              </a:spcAft>
+              <a:defRPr sz="1700">
+                <a:solidFill>
+                  <a:srgbClr val="707682"/>
+                </a:solidFill>
+              </a:defRPr>
+            </a:pPr>
+            <a:r>
+              <a:t>Testa H3 (Latinx tem spread amplo)</a:t>
+            </a:r>
+          </a:p>
+          <a:p>
+            <a:pPr>
+              <a:spcAft>
+                <a:spcPts val="800"/>
+              </a:spcAft>
+              <a:defRPr sz="2000" b="0">
+                <a:solidFill>
+                  <a:srgbClr val="3D424E"/>
+                </a:solidFill>
+              </a:defRPr>
+            </a:pPr>
+          </a:p>
+          <a:p>
+            <a:pPr>
+              <a:spcAft>
+                <a:spcPts val="800"/>
+              </a:spcAft>
+              <a:defRPr sz="2000" b="0">
+                <a:solidFill>
+                  <a:srgbClr val="3D424E"/>
+                </a:solidFill>
+              </a:defRPr>
+            </a:pPr>
+            <a:r>
+              <a:t>Capítulo 2 — Classificador de raça com tom como contexto</a:t>
+            </a:r>
+          </a:p>
+          <a:p>
+            <a:pPr lvl="1">
+              <a:spcAft>
+                <a:spcPts val="800"/>
+              </a:spcAft>
+              <a:defRPr sz="1700">
+                <a:solidFill>
+                  <a:srgbClr val="707682"/>
+                </a:solidFill>
+              </a:defRPr>
+            </a:pPr>
+            <a:r>
+              <a:t>Pipeline ConvNeXt-T + FiLM, comparado com 4 baselines independentes</a:t>
+            </a:r>
+          </a:p>
+          <a:p>
+            <a:pPr lvl="1">
+              <a:spcAft>
+                <a:spcPts val="800"/>
+              </a:spcAft>
+              <a:defRPr sz="1700">
+                <a:solidFill>
+                  <a:srgbClr val="707682"/>
+                </a:solidFill>
+              </a:defRPr>
+            </a:pPr>
+            <a:r>
+              <a:t>3 seeds para significância estatística</a:t>
+            </a:r>
+          </a:p>
+          <a:p>
+            <a:pPr lvl="1">
+              <a:spcAft>
+                <a:spcPts val="800"/>
+              </a:spcAft>
+              <a:defRPr sz="1700">
+                <a:solidFill>
+                  <a:srgbClr val="707682"/>
+                </a:solidFill>
+              </a:defRPr>
+            </a:pPr>
+            <a:r>
+              <a:t>Testa H1 (pipeline funciona), H2 (Latinx é estrutural), H4 (overlap explica erros)</a:t>
+            </a:r>
+          </a:p>
+          <a:p>
+            <a:pPr>
+              <a:spcAft>
+                <a:spcPts val="800"/>
+              </a:spcAft>
+              <a:defRPr sz="2000" b="0">
+                <a:solidFill>
+                  <a:srgbClr val="3D424E"/>
+                </a:solidFill>
+              </a:defRPr>
+            </a:pPr>
+          </a:p>
+          <a:p>
+            <a:pPr>
+              <a:spcAft>
+                <a:spcPts val="800"/>
+              </a:spcAft>
+              <a:defRPr sz="2000" b="0">
+                <a:solidFill>
+                  <a:srgbClr val="3D424E"/>
+                </a:solidFill>
+              </a:defRPr>
+            </a:pPr>
+            <a:r>
+              <a:t>Capítulo 3 — Aplicar a reconhecimento facial</a:t>
+            </a:r>
+          </a:p>
+          <a:p>
+            <a:pPr lvl="1">
+              <a:spcAft>
+                <a:spcPts val="800"/>
+              </a:spcAft>
+              <a:defRPr sz="1700">
+                <a:solidFill>
+                  <a:srgbClr val="707682"/>
+                </a:solidFill>
+              </a:defRPr>
+            </a:pPr>
+            <a:r>
+              <a:t>Mesmo pipeline em RFW ou BFW (datasets que já estão catalogados)</a:t>
+            </a:r>
+          </a:p>
+          <a:p>
+            <a:pPr lvl="1">
+              <a:spcAft>
+                <a:spcPts val="800"/>
+              </a:spcAft>
+              <a:defRPr sz="1700">
+                <a:solidFill>
+                  <a:srgbClr val="707682"/>
+                </a:solidFill>
+              </a:defRPr>
+            </a:pPr>
+            <a:r>
+              <a:t>Foco em accuracy de Black/African</a:t>
+            </a:r>
+          </a:p>
+          <a:p>
+            <a:pPr lvl="1">
+              <a:spcAft>
+                <a:spcPts val="800"/>
+              </a:spcAft>
+              <a:defRPr sz="1700">
+                <a:solidFill>
+                  <a:srgbClr val="707682"/>
+                </a:solidFill>
+              </a:defRPr>
+            </a:pPr>
+            <a:r>
+              <a:t>Testa H5 (fair transferência funciona)</a:t>
+            </a:r>
+          </a:p>
+        </p:txBody>
+      </p:sp>
     </p:spTree>
   </p:cSld>
   <p:clrMapOvr>

--- a/docs/ativo/material_reuniao_orientador_v3.2.1.pptx
+++ b/docs/ativo/material_reuniao_orientador_v3.2.1.pptx
@@ -11047,7 +11047,97 @@
               </a:defRPr>
             </a:pPr>
             <a:r>
-              <a:t>Corpus naquele momento: 23 fichas catalogadas, 6 tracks temáticos.</a:t>
+              <a:t>Corpus naquele momento: 23 fichas catalogadas em 6 tracks temáticos:</a:t>
+            </a:r>
+          </a:p>
+          <a:p>
+            <a:pPr lvl="1">
+              <a:spcAft>
+                <a:spcPts val="800"/>
+              </a:spcAft>
+              <a:defRPr sz="1700">
+                <a:solidFill>
+                  <a:srgbClr val="707682"/>
+                </a:solidFill>
+              </a:defRPr>
+            </a:pPr>
+            <a:r>
+              <a:t>Track A — Race classification (alvo direto da dissertação)</a:t>
+            </a:r>
+          </a:p>
+          <a:p>
+            <a:pPr lvl="1">
+              <a:spcAft>
+                <a:spcPts val="800"/>
+              </a:spcAft>
+              <a:defRPr sz="1700">
+                <a:solidFill>
+                  <a:srgbClr val="707682"/>
+                </a:solidFill>
+              </a:defRPr>
+            </a:pPr>
+            <a:r>
+              <a:t>Track B — Face recognition fairness (paralelo)</a:t>
+            </a:r>
+          </a:p>
+          <a:p>
+            <a:pPr lvl="1">
+              <a:spcAft>
+                <a:spcPts val="800"/>
+              </a:spcAft>
+              <a:defRPr sz="1700">
+                <a:solidFill>
+                  <a:srgbClr val="707682"/>
+                </a:solidFill>
+              </a:defRPr>
+            </a:pPr>
+            <a:r>
+              <a:t>Track C — Skin tone como dimensão alternativa</a:t>
+            </a:r>
+          </a:p>
+          <a:p>
+            <a:pPr lvl="1">
+              <a:spcAft>
+                <a:spcPts val="800"/>
+              </a:spcAft>
+              <a:defRPr sz="1700">
+                <a:solidFill>
+                  <a:srgbClr val="707682"/>
+                </a:solidFill>
+              </a:defRPr>
+            </a:pPr>
+            <a:r>
+              <a:t>Track D — Mitigação algorítmica (técnicas)</a:t>
+            </a:r>
+          </a:p>
+          <a:p>
+            <a:pPr lvl="1">
+              <a:spcAft>
+                <a:spcPts val="800"/>
+              </a:spcAft>
+              <a:defRPr sz="1700">
+                <a:solidFill>
+                  <a:srgbClr val="707682"/>
+                </a:solidFill>
+              </a:defRPr>
+            </a:pPr>
+            <a:r>
+              <a:t>Track E — Auditoria e metodologia</a:t>
+            </a:r>
+          </a:p>
+          <a:p>
+            <a:pPr lvl="1">
+              <a:spcAft>
+                <a:spcPts val="800"/>
+              </a:spcAft>
+              <a:defRPr sz="1700">
+                <a:solidFill>
+                  <a:srgbClr val="707682"/>
+                </a:solidFill>
+              </a:defRPr>
+            </a:pPr>
+            <a:r>
+              <a:t>Track F — Fundamentação científica de raça e tom de pele</a:t>
             </a:r>
           </a:p>
         </p:txBody>

--- a/docs/ativo/material_reuniao_orientador_v3.2.1.pptx
+++ b/docs/ativo/material_reuniao_orientador_v3.2.1.pptx
@@ -37,7 +37,6 @@
     <p:sldId id="285" r:id="rId36"/>
     <p:sldId id="286" r:id="rId37"/>
     <p:sldId id="287" r:id="rId38"/>
-    <p:sldId id="288" r:id="rId39"/>
   </p:sldIdLst>
   <p:sldSz cx="12191695" cy="6858000" type="screen4x3"/>
   <p:notesSz cx="6858000" cy="9144000"/>
@@ -3329,7 +3328,7 @@
               </a:defRPr>
             </a:pPr>
             <a:r>
-              <a:t>Resposta ao pedido 3: double-check do SOTA</a:t>
+              <a:t>Resposta ao pedido 4: reformular para PRESCRITIVA</a:t>
             </a:r>
           </a:p>
         </p:txBody>
@@ -3410,7 +3409,7 @@
               </a:defRPr>
             </a:pPr>
             <a:r>
-              <a:t>Executei a Rodada 2.6 com janela expandida fevereiro–junho de 2026.</a:t>
+              <a:t>Mudança central: deixa de ‘decompor o erro’ e passa a ‘construir um pipeline’ que melhora fairness em race classification E em face recognition, usando tom de pele como sinal auxiliar.</a:t>
             </a:r>
           </a:p>
           <a:p>
@@ -3437,34 +3436,7 @@
               </a:defRPr>
             </a:pPr>
             <a:r>
-              <a:t>Fonte: 12 papers que citam o FaceScanPaliGemma no Semantic Scholar.</a:t>
-            </a:r>
-          </a:p>
-          <a:p>
-            <a:pPr>
-              <a:spcAft>
-                <a:spcPts val="800"/>
-              </a:spcAft>
-              <a:defRPr sz="2000" b="0">
-                <a:solidFill>
-                  <a:srgbClr val="3D424E"/>
-                </a:solidFill>
-              </a:defRPr>
-            </a:pPr>
-          </a:p>
-          <a:p>
-            <a:pPr>
-              <a:spcAft>
-                <a:spcPts val="800"/>
-              </a:spcAft>
-              <a:defRPr sz="2000" b="0">
-                <a:solidFill>
-                  <a:srgbClr val="3D424E"/>
-                </a:solidFill>
-              </a:defRPr>
-            </a:pPr>
-            <a:r>
-              <a:t>Resultado: NENHUM dos 12 papers usa FairFace race 7-class como métrica principal.</a:t>
+              <a:t>Pipeline construtivo em 6 etapas:</a:t>
             </a:r>
           </a:p>
           <a:p>
@@ -3479,61 +3451,7 @@
               </a:defRPr>
             </a:pPr>
             <a:r>
-              <a:t>Citantes trabalham em tarefas diferentes: gender, age, emotion, detection, audit, etc.</a:t>
-            </a:r>
-          </a:p>
-          <a:p>
-            <a:pPr>
-              <a:spcAft>
-                <a:spcPts val="800"/>
-              </a:spcAft>
-              <a:defRPr sz="2000" b="0">
-                <a:solidFill>
-                  <a:srgbClr val="3D424E"/>
-                </a:solidFill>
-              </a:defRPr>
-            </a:pPr>
-          </a:p>
-          <a:p>
-            <a:pPr>
-              <a:spcAft>
-                <a:spcPts val="800"/>
-              </a:spcAft>
-              <a:defRPr sz="2000" b="0">
-                <a:solidFill>
-                  <a:srgbClr val="3D424E"/>
-                </a:solidFill>
-              </a:defRPr>
-            </a:pPr>
-            <a:r>
-              <a:t>Conclusão: FaceScanPaliGemma 75.7% F1 segue sendo o SOTA único em junho/2026.</a:t>
-            </a:r>
-          </a:p>
-          <a:p>
-            <a:pPr>
-              <a:spcAft>
-                <a:spcPts val="800"/>
-              </a:spcAft>
-              <a:defRPr sz="2000" b="0">
-                <a:solidFill>
-                  <a:srgbClr val="3D424E"/>
-                </a:solidFill>
-              </a:defRPr>
-            </a:pPr>
-          </a:p>
-          <a:p>
-            <a:pPr>
-              <a:spcAft>
-                <a:spcPts val="800"/>
-              </a:spcAft>
-              <a:defRPr sz="2000" b="0">
-                <a:solidFill>
-                  <a:srgbClr val="3D424E"/>
-                </a:solidFill>
-              </a:defRPr>
-            </a:pPr>
-            <a:r>
-              <a:t>Achados adicionais: validação cruzada confirmou também o baseline ResNet-34 = 72%</a:t>
+              <a:t>1. Classificador de tom de pele (MST) — usar SkinToneNet pré-treinado</a:t>
             </a:r>
           </a:p>
           <a:p>
@@ -3548,7 +3466,67 @@
               </a:defRPr>
             </a:pPr>
             <a:r>
-              <a:t>Reportado por AlDahoul (2024/26) E por Lin (FairGRAPE 2022) independentemente</a:t>
+              <a:t>2. Auditar FairFace e publicar a matriz pública MST × raça</a:t>
+            </a:r>
+          </a:p>
+          <a:p>
+            <a:pPr lvl="1">
+              <a:spcAft>
+                <a:spcPts val="800"/>
+              </a:spcAft>
+              <a:defRPr sz="1700">
+                <a:solidFill>
+                  <a:srgbClr val="707682"/>
+                </a:solidFill>
+              </a:defRPr>
+            </a:pPr>
+            <a:r>
+              <a:t>3. Race classifier com tom de pele como contexto (mecanismo FiLM)</a:t>
+            </a:r>
+          </a:p>
+          <a:p>
+            <a:pPr lvl="1">
+              <a:spcAft>
+                <a:spcPts val="800"/>
+              </a:spcAft>
+              <a:defRPr sz="1700">
+                <a:solidFill>
+                  <a:srgbClr val="707682"/>
+                </a:solidFill>
+              </a:defRPr>
+            </a:pPr>
+            <a:r>
+              <a:t>4. Comparar fairness COM vs SEM tom de pele, contra 6 baselines</a:t>
+            </a:r>
+          </a:p>
+          <a:p>
+            <a:pPr lvl="1">
+              <a:spcAft>
+                <a:spcPts val="800"/>
+              </a:spcAft>
+              <a:defRPr sz="1700">
+                <a:solidFill>
+                  <a:srgbClr val="707682"/>
+                </a:solidFill>
+              </a:defRPr>
+            </a:pPr>
+            <a:r>
+              <a:t>5. Aplicar pipeline a face recognition (RFW ou BFW)</a:t>
+            </a:r>
+          </a:p>
+          <a:p>
+            <a:pPr lvl="1">
+              <a:spcAft>
+                <a:spcPts val="800"/>
+              </a:spcAft>
+              <a:defRPr sz="1700">
+                <a:solidFill>
+                  <a:srgbClr val="707682"/>
+                </a:solidFill>
+              </a:defRPr>
+            </a:pPr>
+            <a:r>
+              <a:t>6. Medir melhora em Black/African e decomposição Latinx</a:t>
             </a:r>
           </a:p>
         </p:txBody>
@@ -3601,7 +3579,7 @@
               </a:defRPr>
             </a:pPr>
             <a:r>
-              <a:t>Resposta ao pedido 4: reformular para PRESCRITIVA</a:t>
+              <a:t>Triagem do corpus de pesquisa</a:t>
             </a:r>
           </a:p>
         </p:txBody>
@@ -3682,7 +3660,7 @@
               </a:defRPr>
             </a:pPr>
             <a:r>
-              <a:t>Mudança central: deixa de ‘decompor o erro’ e passa a ‘construir um pipeline’ que melhora fairness em race classification E em face recognition, usando tom de pele como sinal auxiliar.</a:t>
+              <a:t>Dos 57 papers avaliados, aprovamos 29 como fichas do corpus.</a:t>
             </a:r>
           </a:p>
           <a:p>
@@ -3709,7 +3687,7 @@
               </a:defRPr>
             </a:pPr>
             <a:r>
-              <a:t>Pipeline construtivo em 6 etapas:</a:t>
+              <a:t>Aprovação seguiu os critérios de seleção acordados:</a:t>
             </a:r>
           </a:p>
           <a:p>
@@ -3724,7 +3702,7 @@
               </a:defRPr>
             </a:pPr>
             <a:r>
-              <a:t>1. Classificador de tom de pele (MST) — usar SkinToneNet pré-treinado</a:t>
+              <a:t>Venue científico forte (top conferences ou journals peer-reviewed)</a:t>
             </a:r>
           </a:p>
           <a:p>
@@ -3739,7 +3717,7 @@
               </a:defRPr>
             </a:pPr>
             <a:r>
-              <a:t>2. Auditar FairFace e publicar a matriz pública MST × raça</a:t>
+              <a:t>Citações acima do threshold do ano de publicação</a:t>
             </a:r>
           </a:p>
           <a:p>
@@ -3754,7 +3732,7 @@
               </a:defRPr>
             </a:pPr>
             <a:r>
-              <a:t>3. Race classifier com tom de pele como contexto (mecanismo FiLM)</a:t>
+              <a:t>Aplicabilidade direta a uma das 14 perguntas de pesquisa</a:t>
             </a:r>
           </a:p>
           <a:p>
@@ -3769,37 +3747,34 @@
               </a:defRPr>
             </a:pPr>
             <a:r>
-              <a:t>4. Comparar fairness COM vs SEM tom de pele, contra 6 baselines</a:t>
-            </a:r>
-          </a:p>
-          <a:p>
-            <a:pPr lvl="1">
+              <a:t>Aprovação por exceção (cobertura única) com justificativa registrada</a:t>
+            </a:r>
+          </a:p>
+          <a:p>
+            <a:pPr>
               <a:spcAft>
                 <a:spcPts val="800"/>
               </a:spcAft>
-              <a:defRPr sz="1700">
-                <a:solidFill>
-                  <a:srgbClr val="707682"/>
-                </a:solidFill>
-              </a:defRPr>
-            </a:pPr>
-            <a:r>
-              <a:t>5. Aplicar pipeline a face recognition (RFW ou BFW)</a:t>
-            </a:r>
-          </a:p>
-          <a:p>
-            <a:pPr lvl="1">
+              <a:defRPr sz="2000" b="0">
+                <a:solidFill>
+                  <a:srgbClr val="3D424E"/>
+                </a:solidFill>
+              </a:defRPr>
+            </a:pPr>
+          </a:p>
+          <a:p>
+            <a:pPr>
               <a:spcAft>
                 <a:spcPts val="800"/>
               </a:spcAft>
-              <a:defRPr sz="1700">
-                <a:solidFill>
-                  <a:srgbClr val="707682"/>
-                </a:solidFill>
-              </a:defRPr>
-            </a:pPr>
-            <a:r>
-              <a:t>6. Medir melhora em Black/African e decomposição Latinx</a:t>
+              <a:defRPr sz="2000" b="0">
+                <a:solidFill>
+                  <a:srgbClr val="3D424E"/>
+                </a:solidFill>
+              </a:defRPr>
+            </a:pPr>
+            <a:r>
+              <a:t>Cada decisão (aprovado / standby / descartado) tem data e justificativa registradas.</a:t>
             </a:r>
           </a:p>
         </p:txBody>
@@ -3824,49 +3799,14 @@
       <p:grpSpPr/>
       <p:sp>
         <p:nvSpPr>
-          <p:cNvPr id="2" name="TextBox 1"/>
-          <p:cNvSpPr txBox="1"/>
-          <p:nvPr/>
-        </p:nvSpPr>
-        <p:spPr>
-          <a:xfrm>
-            <a:off x="457200" y="365760"/>
-            <a:ext cx="11430000" cy="822960"/>
-          </a:xfrm>
-          <a:prstGeom prst="rect">
-            <a:avLst/>
-          </a:prstGeom>
-          <a:noFill/>
-        </p:spPr>
-        <p:txBody>
-          <a:bodyPr wrap="square">
-            <a:spAutoFit/>
-          </a:bodyPr>
-          <a:lstStyle/>
-          <a:p>
-            <a:pPr>
-              <a:defRPr sz="3000" b="1">
-                <a:solidFill>
-                  <a:srgbClr val="1F2A4E"/>
-                </a:solidFill>
-              </a:defRPr>
-            </a:pPr>
-            <a:r>
-              <a:t>Triagem do corpus de pesquisa</a:t>
-            </a:r>
-          </a:p>
-        </p:txBody>
-      </p:sp>
-      <p:sp>
-        <p:nvSpPr>
-          <p:cNvPr id="3" name="Rectangle 2"/>
+          <p:cNvPr id="2" name="Rectangle 1"/>
           <p:cNvSpPr/>
           <p:nvPr/>
         </p:nvSpPr>
         <p:spPr>
           <a:xfrm>
-            <a:off x="457200" y="1143000"/>
-            <a:ext cx="11430000" cy="45720"/>
+            <a:off x="0" y="0"/>
+            <a:ext cx="12191695" cy="6858000"/>
           </a:xfrm>
           <a:prstGeom prst="rect">
             <a:avLst/>
@@ -3902,14 +3842,49 @@
       </p:sp>
       <p:sp>
         <p:nvSpPr>
+          <p:cNvPr id="3" name="TextBox 2"/>
+          <p:cNvSpPr txBox="1"/>
+          <p:nvPr/>
+        </p:nvSpPr>
+        <p:spPr>
+          <a:xfrm>
+            <a:off x="731520" y="1371600"/>
+            <a:ext cx="2743200" cy="2743200"/>
+          </a:xfrm>
+          <a:prstGeom prst="rect">
+            <a:avLst/>
+          </a:prstGeom>
+          <a:noFill/>
+        </p:spPr>
+        <p:txBody>
+          <a:bodyPr wrap="none">
+            <a:spAutoFit/>
+          </a:bodyPr>
+          <a:lstStyle/>
+          <a:p>
+            <a:pPr>
+              <a:defRPr sz="13000" b="1">
+                <a:solidFill>
+                  <a:srgbClr val="FFFFFF"/>
+                </a:solidFill>
+              </a:defRPr>
+            </a:pPr>
+            <a:r>
+              <a:t>3</a:t>
+            </a:r>
+          </a:p>
+        </p:txBody>
+      </p:sp>
+      <p:sp>
+        <p:nvSpPr>
           <p:cNvPr id="4" name="TextBox 3"/>
           <p:cNvSpPr txBox="1"/>
           <p:nvPr/>
         </p:nvSpPr>
         <p:spPr>
           <a:xfrm>
-            <a:off x="548640" y="1371600"/>
-            <a:ext cx="11247120" cy="4937760"/>
+            <a:off x="3931920" y="2286000"/>
+            <a:ext cx="7772400" cy="1828800"/>
           </a:xfrm>
           <a:prstGeom prst="rect">
             <a:avLst/>
@@ -3923,131 +3898,26 @@
           <a:lstStyle/>
           <a:p>
             <a:pPr>
-              <a:spcAft>
-                <a:spcPts val="800"/>
-              </a:spcAft>
-              <a:defRPr sz="2000" b="0">
-                <a:solidFill>
-                  <a:srgbClr val="3D424E"/>
-                </a:solidFill>
-              </a:defRPr>
-            </a:pPr>
-            <a:r>
-              <a:t>Dos 57 papers avaliados, aprovamos 29 como fichas do corpus.</a:t>
-            </a:r>
-          </a:p>
-          <a:p>
-            <a:pPr>
-              <a:spcAft>
-                <a:spcPts val="800"/>
-              </a:spcAft>
-              <a:defRPr sz="2000" b="0">
-                <a:solidFill>
-                  <a:srgbClr val="3D424E"/>
-                </a:solidFill>
-              </a:defRPr>
-            </a:pPr>
-          </a:p>
-          <a:p>
-            <a:pPr>
-              <a:spcAft>
-                <a:spcPts val="800"/>
-              </a:spcAft>
-              <a:defRPr sz="2000" b="0">
-                <a:solidFill>
-                  <a:srgbClr val="3D424E"/>
-                </a:solidFill>
-              </a:defRPr>
-            </a:pPr>
-            <a:r>
-              <a:t>Aprovação seguiu os critérios de seleção acordados:</a:t>
-            </a:r>
-          </a:p>
-          <a:p>
-            <a:pPr lvl="1">
-              <a:spcAft>
-                <a:spcPts val="800"/>
-              </a:spcAft>
-              <a:defRPr sz="1700">
-                <a:solidFill>
-                  <a:srgbClr val="707682"/>
-                </a:solidFill>
-              </a:defRPr>
-            </a:pPr>
-            <a:r>
-              <a:t>Venue científico forte (top conferences ou journals peer-reviewed)</a:t>
-            </a:r>
-          </a:p>
-          <a:p>
-            <a:pPr lvl="1">
-              <a:spcAft>
-                <a:spcPts val="800"/>
-              </a:spcAft>
-              <a:defRPr sz="1700">
-                <a:solidFill>
-                  <a:srgbClr val="707682"/>
-                </a:solidFill>
-              </a:defRPr>
-            </a:pPr>
-            <a:r>
-              <a:t>Citações acima do threshold do ano de publicação</a:t>
-            </a:r>
-          </a:p>
-          <a:p>
-            <a:pPr lvl="1">
-              <a:spcAft>
-                <a:spcPts val="800"/>
-              </a:spcAft>
-              <a:defRPr sz="1700">
-                <a:solidFill>
-                  <a:srgbClr val="707682"/>
-                </a:solidFill>
-              </a:defRPr>
-            </a:pPr>
-            <a:r>
-              <a:t>Aplicabilidade direta a uma das 14 perguntas de pesquisa</a:t>
-            </a:r>
-          </a:p>
-          <a:p>
-            <a:pPr lvl="1">
-              <a:spcAft>
-                <a:spcPts val="800"/>
-              </a:spcAft>
-              <a:defRPr sz="1700">
-                <a:solidFill>
-                  <a:srgbClr val="707682"/>
-                </a:solidFill>
-              </a:defRPr>
-            </a:pPr>
-            <a:r>
-              <a:t>Aprovação por exceção (cobertura única) com justificativa registrada</a:t>
-            </a:r>
-          </a:p>
-          <a:p>
-            <a:pPr>
-              <a:spcAft>
-                <a:spcPts val="800"/>
-              </a:spcAft>
-              <a:defRPr sz="2000" b="0">
-                <a:solidFill>
-                  <a:srgbClr val="3D424E"/>
-                </a:solidFill>
-              </a:defRPr>
-            </a:pPr>
-          </a:p>
-          <a:p>
-            <a:pPr>
-              <a:spcAft>
-                <a:spcPts val="800"/>
-              </a:spcAft>
-              <a:defRPr sz="2000" b="0">
-                <a:solidFill>
-                  <a:srgbClr val="3D424E"/>
-                </a:solidFill>
-              </a:defRPr>
-            </a:pPr>
-            <a:r>
-              <a:t>Cada decisão (aprovado / standby / descartado) tem data e justificativa em _triagem.md.</a:t>
+              <a:defRPr sz="3600" b="1">
+                <a:solidFill>
+                  <a:srgbClr val="FFFFFF"/>
+                </a:solidFill>
+              </a:defRPr>
+            </a:pPr>
+            <a:r>
+              <a:t>Como a tese está sendo construída</a:t>
+            </a:r>
+          </a:p>
+          <a:p>
+            <a:pPr>
+              <a:defRPr sz="2000">
+                <a:solidFill>
+                  <a:srgbClr val="E8EAED"/>
+                </a:solidFill>
+              </a:defRPr>
+            </a:pPr>
+            <a:r>
+              <a:t>Agora prescritiva, com conceitos explicados</a:t>
             </a:r>
           </a:p>
         </p:txBody>
@@ -4072,23 +3942,60 @@
       <p:grpSpPr/>
       <p:sp>
         <p:nvSpPr>
-          <p:cNvPr id="2" name="Rectangle 1"/>
+          <p:cNvPr id="2" name="TextBox 1"/>
+          <p:cNvSpPr txBox="1"/>
+          <p:nvPr/>
+        </p:nvSpPr>
+        <p:spPr>
+          <a:xfrm>
+            <a:off x="457200" y="365760"/>
+            <a:ext cx="11430000" cy="822960"/>
+          </a:xfrm>
+          <a:prstGeom prst="rect">
+            <a:avLst/>
+          </a:prstGeom>
+          <a:noFill/>
+        </p:spPr>
+        <p:txBody>
+          <a:bodyPr wrap="none">
+            <a:spAutoFit/>
+          </a:bodyPr>
+          <a:lstStyle/>
+          <a:p>
+            <a:pPr>
+              <a:defRPr sz="3000" b="1">
+                <a:solidFill>
+                  <a:srgbClr val="1F2A4E"/>
+                </a:solidFill>
+              </a:defRPr>
+            </a:pPr>
+            <a:r>
+              <a:t>A tese em uma frase clara</a:t>
+            </a:r>
+          </a:p>
+        </p:txBody>
+      </p:sp>
+      <p:sp>
+        <p:nvSpPr>
+          <p:cNvPr id="3" name="Rounded Rectangle 2"/>
           <p:cNvSpPr/>
           <p:nvPr/>
         </p:nvSpPr>
         <p:spPr>
           <a:xfrm>
-            <a:off x="0" y="0"/>
-            <a:ext cx="12191695" cy="6858000"/>
-          </a:xfrm>
-          <a:prstGeom prst="rect">
+            <a:off x="731520" y="1554480"/>
+            <a:ext cx="10698480" cy="4937760"/>
+          </a:xfrm>
+          <a:prstGeom prst="roundRect">
             <a:avLst/>
           </a:prstGeom>
           <a:solidFill>
-            <a:srgbClr val="1F2A4E"/>
+            <a:srgbClr val="E8EAED"/>
           </a:solidFill>
-          <a:ln>
-            <a:noFill/>
+          <a:ln w="25400">
+            <a:solidFill>
+              <a:srgbClr val="1F2A4E"/>
+            </a:solidFill>
           </a:ln>
         </p:spPr>
         <p:style>
@@ -4106,91 +4013,23 @@
           </a:fontRef>
         </p:style>
         <p:txBody>
-          <a:bodyPr rtlCol="0" anchor="ctr"/>
-          <a:lstStyle/>
-          <a:p>
-            <a:pPr algn="ctr"/>
-          </a:p>
-        </p:txBody>
-      </p:sp>
-      <p:sp>
-        <p:nvSpPr>
-          <p:cNvPr id="3" name="TextBox 2"/>
-          <p:cNvSpPr txBox="1"/>
-          <p:nvPr/>
-        </p:nvSpPr>
-        <p:spPr>
-          <a:xfrm>
-            <a:off x="731520" y="1371600"/>
-            <a:ext cx="2743200" cy="2743200"/>
-          </a:xfrm>
-          <a:prstGeom prst="rect">
-            <a:avLst/>
-          </a:prstGeom>
-          <a:noFill/>
-        </p:spPr>
-        <p:txBody>
-          <a:bodyPr wrap="none">
-            <a:spAutoFit/>
-          </a:bodyPr>
-          <a:lstStyle/>
-          <a:p>
-            <a:pPr>
-              <a:defRPr sz="13000" b="1">
-                <a:solidFill>
-                  <a:srgbClr val="FFFFFF"/>
-                </a:solidFill>
-              </a:defRPr>
-            </a:pPr>
-            <a:r>
-              <a:t>3</a:t>
-            </a:r>
-          </a:p>
-        </p:txBody>
-      </p:sp>
-      <p:sp>
-        <p:nvSpPr>
-          <p:cNvPr id="4" name="TextBox 3"/>
-          <p:cNvSpPr txBox="1"/>
-          <p:nvPr/>
-        </p:nvSpPr>
-        <p:spPr>
-          <a:xfrm>
-            <a:off x="3931920" y="2286000"/>
-            <a:ext cx="7772400" cy="1828800"/>
-          </a:xfrm>
-          <a:prstGeom prst="rect">
-            <a:avLst/>
-          </a:prstGeom>
-          <a:noFill/>
-        </p:spPr>
-        <p:txBody>
-          <a:bodyPr wrap="square">
-            <a:spAutoFit/>
-          </a:bodyPr>
-          <a:lstStyle/>
-          <a:p>
-            <a:pPr>
-              <a:defRPr sz="3600" b="1">
-                <a:solidFill>
-                  <a:srgbClr val="FFFFFF"/>
-                </a:solidFill>
-              </a:defRPr>
-            </a:pPr>
-            <a:r>
-              <a:t>Como a tese está sendo construída</a:t>
-            </a:r>
-          </a:p>
-          <a:p>
-            <a:pPr>
+          <a:bodyPr rtlCol="0" anchor="ctr" wrap="square" lIns="457200" rIns="457200" tIns="365760"/>
+          <a:lstStyle/>
+          <a:p>
+            <a:pPr algn="l">
               <a:defRPr sz="2000">
                 <a:solidFill>
-                  <a:srgbClr val="E8EAED"/>
-                </a:solidFill>
-              </a:defRPr>
-            </a:pPr>
-            <a:r>
-              <a:t>Agora prescritiva, com conceitos explicados</a:t>
+                  <a:srgbClr val="1F2A4E"/>
+                </a:solidFill>
+              </a:defRPr>
+            </a:pPr>
+            <a:r>
+              <a:t>Treinar uma rede neural para reconhecer o tom de pele de uma foto, e usar essa informação como contexto extra ao treinar uma rede de classificação racial, melhora as métricas de fairness (a paridade entre raças). Essa melhoria também se transfere para tarefas downstream de reconhecimento facial, beneficiando especialmente grupos sub-representados (Black/African).</a:t>
+            </a:r>
+            <a:br/>
+            <a:br/>
+            <a:r>
+              <a:t>Em outras palavras: o tom de pele é informação que o classificador de raça precisa ter explicitamente — não pode descobrir sozinho.</a:t>
             </a:r>
           </a:p>
         </p:txBody>
@@ -4243,32 +4082,30 @@
               </a:defRPr>
             </a:pPr>
             <a:r>
-              <a:t>A tese em uma frase clara</a:t>
-            </a:r>
-          </a:p>
-        </p:txBody>
-      </p:sp>
-      <p:sp>
-        <p:nvSpPr>
-          <p:cNvPr id="3" name="Rounded Rectangle 2"/>
+              <a:t>O que é a escala MST (Monk Skin Tone)?</a:t>
+            </a:r>
+          </a:p>
+        </p:txBody>
+      </p:sp>
+      <p:sp>
+        <p:nvSpPr>
+          <p:cNvPr id="3" name="Rectangle 2"/>
           <p:cNvSpPr/>
           <p:nvPr/>
         </p:nvSpPr>
         <p:spPr>
           <a:xfrm>
-            <a:off x="731520" y="1554480"/>
-            <a:ext cx="10698480" cy="4937760"/>
-          </a:xfrm>
-          <a:prstGeom prst="roundRect">
+            <a:off x="457200" y="1143000"/>
+            <a:ext cx="11430000" cy="45720"/>
+          </a:xfrm>
+          <a:prstGeom prst="rect">
             <a:avLst/>
           </a:prstGeom>
           <a:solidFill>
-            <a:srgbClr val="E8EAED"/>
+            <a:srgbClr val="1F2A4E"/>
           </a:solidFill>
-          <a:ln w="25400">
-            <a:solidFill>
-              <a:srgbClr val="1F2A4E"/>
-            </a:solidFill>
+          <a:ln>
+            <a:noFill/>
           </a:ln>
         </p:spPr>
         <p:style>
@@ -4286,23 +4123,240 @@
           </a:fontRef>
         </p:style>
         <p:txBody>
-          <a:bodyPr rtlCol="0" anchor="ctr" wrap="square" lIns="457200" rIns="457200" tIns="365760"/>
-          <a:lstStyle/>
-          <a:p>
-            <a:pPr algn="l">
-              <a:defRPr sz="2000">
+          <a:bodyPr rtlCol="0" anchor="ctr"/>
+          <a:lstStyle/>
+          <a:p>
+            <a:pPr algn="ctr"/>
+          </a:p>
+        </p:txBody>
+      </p:sp>
+      <p:sp>
+        <p:nvSpPr>
+          <p:cNvPr id="4" name="Rounded Rectangle 3"/>
+          <p:cNvSpPr/>
+          <p:nvPr/>
+        </p:nvSpPr>
+        <p:spPr>
+          <a:xfrm>
+            <a:off x="548640" y="1463040"/>
+            <a:ext cx="11064240" cy="1554480"/>
+          </a:xfrm>
+          <a:prstGeom prst="roundRect">
+            <a:avLst/>
+          </a:prstGeom>
+          <a:solidFill>
+            <a:srgbClr val="E8EAED"/>
+          </a:solidFill>
+          <a:ln>
+            <a:noFill/>
+          </a:ln>
+        </p:spPr>
+        <p:style>
+          <a:lnRef idx="1">
+            <a:schemeClr val="accent1"/>
+          </a:lnRef>
+          <a:fillRef idx="3">
+            <a:schemeClr val="accent1"/>
+          </a:fillRef>
+          <a:effectRef idx="2">
+            <a:schemeClr val="accent1"/>
+          </a:effectRef>
+          <a:fontRef idx="minor">
+            <a:schemeClr val="lt1"/>
+          </a:fontRef>
+        </p:style>
+        <p:txBody>
+          <a:bodyPr rtlCol="0" anchor="ctr" wrap="square" lIns="274320" rIns="274320" tIns="137160"/>
+          <a:lstStyle/>
+          <a:p>
+            <a:pPr algn="ctr">
+              <a:defRPr sz="1500" b="1">
                 <a:solidFill>
                   <a:srgbClr val="1F2A4E"/>
                 </a:solidFill>
               </a:defRPr>
             </a:pPr>
             <a:r>
-              <a:t>Treinar uma rede neural para reconhecer o tom de pele de uma foto, e usar essa informação como contexto extra ao treinar uma rede de classificação racial, melhora as métricas de fairness (a paridade entre raças). Essa melhoria também se transfere para tarefas downstream de reconhecimento facial, beneficiando especialmente grupos sub-representados (Black/African).</a:t>
-            </a:r>
-            <a:br/>
-            <a:br/>
-            <a:r>
-              <a:t>Em outras palavras: o tom de pele é informação que o classificador de raça precisa ter explicitamente — não pode descobrir sozinho.</a:t>
+              <a:t>Em palavras simples</a:t>
+            </a:r>
+          </a:p>
+          <a:p>
+            <a:pPr>
+              <a:defRPr sz="1800">
+                <a:solidFill>
+                  <a:srgbClr val="3D424E"/>
+                </a:solidFill>
+              </a:defRPr>
+            </a:pPr>
+            <a:r>
+              <a:t>Uma escala de 10 tons de pele (do tom 1 mais claro ao tom 10 mais escuro), criada em 2023 pelo sociólogo Dr. Ellis Monk (Harvard) em parceria com o Google. Foi desenhada especificamente para auditar fairness em sistemas de IA — não é a escala antiga de dermatologia (Fitzpatrick), que tem viés para pele clara.</a:t>
+            </a:r>
+          </a:p>
+        </p:txBody>
+      </p:sp>
+      <p:sp>
+        <p:nvSpPr>
+          <p:cNvPr id="5" name="Rounded Rectangle 4"/>
+          <p:cNvSpPr/>
+          <p:nvPr/>
+        </p:nvSpPr>
+        <p:spPr>
+          <a:xfrm>
+            <a:off x="548640" y="3200400"/>
+            <a:ext cx="11064240" cy="1554480"/>
+          </a:xfrm>
+          <a:prstGeom prst="roundRect">
+            <a:avLst/>
+          </a:prstGeom>
+          <a:solidFill>
+            <a:srgbClr val="FFFFFF"/>
+          </a:solidFill>
+          <a:ln w="12700">
+            <a:solidFill>
+              <a:srgbClr val="1F2A4E"/>
+            </a:solidFill>
+          </a:ln>
+        </p:spPr>
+        <p:style>
+          <a:lnRef idx="1">
+            <a:schemeClr val="accent1"/>
+          </a:lnRef>
+          <a:fillRef idx="3">
+            <a:schemeClr val="accent1"/>
+          </a:fillRef>
+          <a:effectRef idx="2">
+            <a:schemeClr val="accent1"/>
+          </a:effectRef>
+          <a:fontRef idx="minor">
+            <a:schemeClr val="lt1"/>
+          </a:fontRef>
+        </p:style>
+        <p:txBody>
+          <a:bodyPr rtlCol="0" anchor="ctr" wrap="square" lIns="274320" rIns="274320" tIns="137160"/>
+          <a:lstStyle/>
+          <a:p>
+            <a:pPr algn="ctr">
+              <a:defRPr sz="1500" b="1">
+                <a:solidFill>
+                  <a:srgbClr val="1F2A4E"/>
+                </a:solidFill>
+              </a:defRPr>
+            </a:pPr>
+            <a:r>
+              <a:t>Por que importa para a tese</a:t>
+            </a:r>
+          </a:p>
+          <a:p>
+            <a:pPr>
+              <a:defRPr sz="1800">
+                <a:solidFill>
+                  <a:srgbClr val="3D424E"/>
+                </a:solidFill>
+              </a:defRPr>
+            </a:pPr>
+            <a:r>
+              <a:t>Nossa tese precisa medir tom de pele de forma confiável e granular. MST é o padrão moderno aceito pela comunidade de fairness research (publicado em NeurIPS 2023). Substituir a Fitzpatrick pela MST evita 3 problemas conhecidos da escala antiga.</a:t>
+            </a:r>
+          </a:p>
+        </p:txBody>
+      </p:sp>
+      <p:sp>
+        <p:nvSpPr>
+          <p:cNvPr id="6" name="Rounded Rectangle 5"/>
+          <p:cNvSpPr/>
+          <p:nvPr/>
+        </p:nvSpPr>
+        <p:spPr>
+          <a:xfrm>
+            <a:off x="548640" y="4937760"/>
+            <a:ext cx="11064240" cy="1463040"/>
+          </a:xfrm>
+          <a:prstGeom prst="roundRect">
+            <a:avLst/>
+          </a:prstGeom>
+          <a:solidFill>
+            <a:srgbClr val="FFFFFF"/>
+          </a:solidFill>
+          <a:ln w="12700">
+            <a:solidFill>
+              <a:srgbClr val="2E7D32"/>
+            </a:solidFill>
+          </a:ln>
+        </p:spPr>
+        <p:style>
+          <a:lnRef idx="1">
+            <a:schemeClr val="accent1"/>
+          </a:lnRef>
+          <a:fillRef idx="3">
+            <a:schemeClr val="accent1"/>
+          </a:fillRef>
+          <a:effectRef idx="2">
+            <a:schemeClr val="accent1"/>
+          </a:effectRef>
+          <a:fontRef idx="minor">
+            <a:schemeClr val="lt1"/>
+          </a:fontRef>
+        </p:style>
+        <p:txBody>
+          <a:bodyPr rtlCol="0" anchor="ctr" wrap="square" lIns="274320" rIns="274320" tIns="137160"/>
+          <a:lstStyle/>
+          <a:p>
+            <a:pPr algn="ctr">
+              <a:defRPr sz="1500" b="1">
+                <a:solidFill>
+                  <a:srgbClr val="2E7D32"/>
+                </a:solidFill>
+              </a:defRPr>
+            </a:pPr>
+            <a:r>
+              <a:t>Exemplo concreto</a:t>
+            </a:r>
+          </a:p>
+          <a:p>
+            <a:pPr>
+              <a:defRPr sz="1700">
+                <a:solidFill>
+                  <a:srgbClr val="3D424E"/>
+                </a:solidFill>
+              </a:defRPr>
+            </a:pPr>
+            <a:r>
+              <a:t>A Fitzpatrick (1975) tem só 6 tons, sendo 3 deles para variações de 'pele considerada branca'. Um terço dos próprios dermatologistas confunde Fitzpatrick com classificação racial — erro categorial endêmico.</a:t>
+            </a:r>
+          </a:p>
+        </p:txBody>
+      </p:sp>
+      <p:sp>
+        <p:nvSpPr>
+          <p:cNvPr id="7" name="TextBox 6"/>
+          <p:cNvSpPr txBox="1"/>
+          <p:nvPr/>
+        </p:nvSpPr>
+        <p:spPr>
+          <a:xfrm>
+            <a:off x="457200" y="6446520"/>
+            <a:ext cx="11430000" cy="365760"/>
+          </a:xfrm>
+          <a:prstGeom prst="rect">
+            <a:avLst/>
+          </a:prstGeom>
+          <a:noFill/>
+        </p:spPr>
+        <p:txBody>
+          <a:bodyPr wrap="none">
+            <a:spAutoFit/>
+          </a:bodyPr>
+          <a:lstStyle/>
+          <a:p>
+            <a:pPr>
+              <a:defRPr sz="1400" i="1">
+                <a:solidFill>
+                  <a:srgbClr val="707682"/>
+                </a:solidFill>
+              </a:defRPr>
+            </a:pPr>
+            <a:r>
+              <a:t>Classificador MST pré-treinado validado pela Rodada 6 (SkinToneNet, Pereira 2026)</a:t>
             </a:r>
           </a:p>
         </p:txBody>
@@ -4348,14 +4402,14 @@
           <a:lstStyle/>
           <a:p>
             <a:pPr>
-              <a:defRPr sz="3000" b="1">
+              <a:defRPr sz="2800" b="1">
                 <a:solidFill>
                   <a:srgbClr val="1F2A4E"/>
                 </a:solidFill>
               </a:defRPr>
             </a:pPr>
             <a:r>
-              <a:t>O que é a escala MST (Monk Skin Tone)?</a:t>
+              <a:t>O que é FiLM (Feature-wise Linear Modulation)?</a:t>
             </a:r>
           </a:p>
         </p:txBody>
@@ -4368,7 +4422,7 @@
         </p:nvSpPr>
         <p:spPr>
           <a:xfrm>
-            <a:off x="457200" y="1143000"/>
+            <a:off x="457200" y="1097280"/>
             <a:ext cx="11430000" cy="45720"/>
           </a:xfrm>
           <a:prstGeom prst="rect">
@@ -4405,14 +4459,397 @@
       </p:sp>
       <p:sp>
         <p:nvSpPr>
-          <p:cNvPr id="4" name="Rounded Rectangle 3"/>
+          <p:cNvPr id="4" name="TextBox 3"/>
+          <p:cNvSpPr txBox="1"/>
+          <p:nvPr/>
+        </p:nvSpPr>
+        <p:spPr>
+          <a:xfrm>
+            <a:off x="548640" y="1280160"/>
+            <a:ext cx="11064240" cy="640080"/>
+          </a:xfrm>
+          <a:prstGeom prst="rect">
+            <a:avLst/>
+          </a:prstGeom>
+          <a:noFill/>
+        </p:spPr>
+        <p:txBody>
+          <a:bodyPr wrap="none">
+            <a:spAutoFit/>
+          </a:bodyPr>
+          <a:lstStyle/>
+          <a:p>
+            <a:pPr>
+              <a:defRPr sz="1600" i="1">
+                <a:solidFill>
+                  <a:srgbClr val="3D424E"/>
+                </a:solidFill>
+              </a:defRPr>
+            </a:pPr>
+            <a:r>
+              <a:t>Em palavras simples: uma camada que permite à rede de raça 'consultar' o tom de pele antes de decidir.</a:t>
+            </a:r>
+          </a:p>
+        </p:txBody>
+      </p:sp>
+      <p:sp>
+        <p:nvSpPr>
+          <p:cNvPr id="5" name="Rounded Rectangle 4"/>
           <p:cNvSpPr/>
           <p:nvPr/>
         </p:nvSpPr>
         <p:spPr>
           <a:xfrm>
-            <a:off x="548640" y="1463040"/>
-            <a:ext cx="11064240" cy="1554480"/>
+            <a:off x="548640" y="2103120"/>
+            <a:ext cx="3200400" cy="1280160"/>
+          </a:xfrm>
+          <a:prstGeom prst="roundRect">
+            <a:avLst/>
+          </a:prstGeom>
+          <a:solidFill>
+            <a:srgbClr val="E8EAED"/>
+          </a:solidFill>
+          <a:ln w="19050">
+            <a:solidFill>
+              <a:srgbClr val="1F2A4E"/>
+            </a:solidFill>
+          </a:ln>
+        </p:spPr>
+        <p:style>
+          <a:lnRef idx="1">
+            <a:schemeClr val="accent1"/>
+          </a:lnRef>
+          <a:fillRef idx="3">
+            <a:schemeClr val="accent1"/>
+          </a:fillRef>
+          <a:effectRef idx="2">
+            <a:schemeClr val="accent1"/>
+          </a:effectRef>
+          <a:fontRef idx="minor">
+            <a:schemeClr val="lt1"/>
+          </a:fontRef>
+        </p:style>
+        <p:txBody>
+          <a:bodyPr rtlCol="0" anchor="ctr" wrap="square" lIns="182880" rIns="182880" tIns="137160"/>
+          <a:lstStyle/>
+          <a:p>
+            <a:pPr algn="ctr">
+              <a:defRPr sz="1400" b="1">
+                <a:solidFill>
+                  <a:srgbClr val="1F2A4E"/>
+                </a:solidFill>
+              </a:defRPr>
+            </a:pPr>
+            <a:r>
+              <a:t>1.  Reconhecer tom de pele</a:t>
+            </a:r>
+          </a:p>
+          <a:p>
+            <a:pPr>
+              <a:defRPr sz="1200">
+                <a:solidFill>
+                  <a:srgbClr val="3D424E"/>
+                </a:solidFill>
+              </a:defRPr>
+            </a:pPr>
+            <a:r>
+              <a:t>SkinToneNet olha para a foto e devolve um vetor de tom (MST 1 a 10).</a:t>
+            </a:r>
+          </a:p>
+        </p:txBody>
+      </p:sp>
+      <p:sp>
+        <p:nvSpPr>
+          <p:cNvPr id="6" name="Right Arrow 5"/>
+          <p:cNvSpPr/>
+          <p:nvPr/>
+        </p:nvSpPr>
+        <p:spPr>
+          <a:xfrm>
+            <a:off x="3794759" y="2560320"/>
+            <a:ext cx="457200" cy="365760"/>
+          </a:xfrm>
+          <a:prstGeom prst="rightArrow">
+            <a:avLst/>
+          </a:prstGeom>
+          <a:solidFill>
+            <a:srgbClr val="1F2A4E"/>
+          </a:solidFill>
+          <a:ln>
+            <a:noFill/>
+          </a:ln>
+        </p:spPr>
+        <p:style>
+          <a:lnRef idx="1">
+            <a:schemeClr val="accent1"/>
+          </a:lnRef>
+          <a:fillRef idx="3">
+            <a:schemeClr val="accent1"/>
+          </a:fillRef>
+          <a:effectRef idx="2">
+            <a:schemeClr val="accent1"/>
+          </a:effectRef>
+          <a:fontRef idx="minor">
+            <a:schemeClr val="lt1"/>
+          </a:fontRef>
+        </p:style>
+        <p:txBody>
+          <a:bodyPr rtlCol="0" anchor="ctr"/>
+          <a:lstStyle/>
+          <a:p>
+            <a:pPr algn="ctr"/>
+          </a:p>
+        </p:txBody>
+      </p:sp>
+      <p:sp>
+        <p:nvSpPr>
+          <p:cNvPr id="7" name="Rounded Rectangle 6"/>
+          <p:cNvSpPr/>
+          <p:nvPr/>
+        </p:nvSpPr>
+        <p:spPr>
+          <a:xfrm>
+            <a:off x="4297679" y="2103120"/>
+            <a:ext cx="3200400" cy="1280160"/>
+          </a:xfrm>
+          <a:prstGeom prst="roundRect">
+            <a:avLst/>
+          </a:prstGeom>
+          <a:solidFill>
+            <a:srgbClr val="1F2A4E"/>
+          </a:solidFill>
+          <a:ln>
+            <a:noFill/>
+          </a:ln>
+        </p:spPr>
+        <p:style>
+          <a:lnRef idx="1">
+            <a:schemeClr val="accent1"/>
+          </a:lnRef>
+          <a:fillRef idx="3">
+            <a:schemeClr val="accent1"/>
+          </a:fillRef>
+          <a:effectRef idx="2">
+            <a:schemeClr val="accent1"/>
+          </a:effectRef>
+          <a:fontRef idx="minor">
+            <a:schemeClr val="lt1"/>
+          </a:fontRef>
+        </p:style>
+        <p:txBody>
+          <a:bodyPr rtlCol="0" anchor="ctr" wrap="square" lIns="182880" rIns="182880" tIns="137160"/>
+          <a:lstStyle/>
+          <a:p>
+            <a:pPr algn="ctr">
+              <a:defRPr sz="1400" b="1">
+                <a:solidFill>
+                  <a:srgbClr val="FFFFFF"/>
+                </a:solidFill>
+              </a:defRPr>
+            </a:pPr>
+            <a:r>
+              <a:t>2.  Camada FiLM</a:t>
+            </a:r>
+          </a:p>
+          <a:p>
+            <a:pPr>
+              <a:defRPr sz="1200">
+                <a:solidFill>
+                  <a:srgbClr val="E8EAED"/>
+                </a:solidFill>
+              </a:defRPr>
+            </a:pPr>
+            <a:r>
+              <a:t>Usa o vetor de tom para ajustar as features intermediárias da rede de raça.</a:t>
+            </a:r>
+          </a:p>
+        </p:txBody>
+      </p:sp>
+      <p:sp>
+        <p:nvSpPr>
+          <p:cNvPr id="8" name="Right Arrow 7"/>
+          <p:cNvSpPr/>
+          <p:nvPr/>
+        </p:nvSpPr>
+        <p:spPr>
+          <a:xfrm>
+            <a:off x="7543800" y="2560320"/>
+            <a:ext cx="457200" cy="365760"/>
+          </a:xfrm>
+          <a:prstGeom prst="rightArrow">
+            <a:avLst/>
+          </a:prstGeom>
+          <a:solidFill>
+            <a:srgbClr val="1F2A4E"/>
+          </a:solidFill>
+          <a:ln>
+            <a:noFill/>
+          </a:ln>
+        </p:spPr>
+        <p:style>
+          <a:lnRef idx="1">
+            <a:schemeClr val="accent1"/>
+          </a:lnRef>
+          <a:fillRef idx="3">
+            <a:schemeClr val="accent1"/>
+          </a:fillRef>
+          <a:effectRef idx="2">
+            <a:schemeClr val="accent1"/>
+          </a:effectRef>
+          <a:fontRef idx="minor">
+            <a:schemeClr val="lt1"/>
+          </a:fontRef>
+        </p:style>
+        <p:txBody>
+          <a:bodyPr rtlCol="0" anchor="ctr"/>
+          <a:lstStyle/>
+          <a:p>
+            <a:pPr algn="ctr"/>
+          </a:p>
+        </p:txBody>
+      </p:sp>
+      <p:sp>
+        <p:nvSpPr>
+          <p:cNvPr id="9" name="Rounded Rectangle 8"/>
+          <p:cNvSpPr/>
+          <p:nvPr/>
+        </p:nvSpPr>
+        <p:spPr>
+          <a:xfrm>
+            <a:off x="8046719" y="2103120"/>
+            <a:ext cx="3200400" cy="1280160"/>
+          </a:xfrm>
+          <a:prstGeom prst="roundRect">
+            <a:avLst/>
+          </a:prstGeom>
+          <a:solidFill>
+            <a:srgbClr val="E8EAED"/>
+          </a:solidFill>
+          <a:ln w="19050">
+            <a:solidFill>
+              <a:srgbClr val="1F2A4E"/>
+            </a:solidFill>
+          </a:ln>
+        </p:spPr>
+        <p:style>
+          <a:lnRef idx="1">
+            <a:schemeClr val="accent1"/>
+          </a:lnRef>
+          <a:fillRef idx="3">
+            <a:schemeClr val="accent1"/>
+          </a:fillRef>
+          <a:effectRef idx="2">
+            <a:schemeClr val="accent1"/>
+          </a:effectRef>
+          <a:fontRef idx="minor">
+            <a:schemeClr val="lt1"/>
+          </a:fontRef>
+        </p:style>
+        <p:txBody>
+          <a:bodyPr rtlCol="0" anchor="ctr" wrap="square" lIns="182880" rIns="182880" tIns="137160"/>
+          <a:lstStyle/>
+          <a:p>
+            <a:pPr algn="ctr">
+              <a:defRPr sz="1400" b="1">
+                <a:solidFill>
+                  <a:srgbClr val="1F2A4E"/>
+                </a:solidFill>
+              </a:defRPr>
+            </a:pPr>
+            <a:r>
+              <a:t>3.  Decidir a raça</a:t>
+            </a:r>
+          </a:p>
+          <a:p>
+            <a:pPr>
+              <a:defRPr sz="1200">
+                <a:solidFill>
+                  <a:srgbClr val="3D424E"/>
+                </a:solidFill>
+              </a:defRPr>
+            </a:pPr>
+            <a:r>
+              <a:t>ConvNeXt-T decide entre as 7 raças do FairFace já com o tom como contexto.</a:t>
+            </a:r>
+          </a:p>
+        </p:txBody>
+      </p:sp>
+      <p:sp>
+        <p:nvSpPr>
+          <p:cNvPr id="10" name="Rounded Rectangle 9"/>
+          <p:cNvSpPr/>
+          <p:nvPr/>
+        </p:nvSpPr>
+        <p:spPr>
+          <a:xfrm>
+            <a:off x="548640" y="4023360"/>
+            <a:ext cx="11064240" cy="1188720"/>
+          </a:xfrm>
+          <a:prstGeom prst="roundRect">
+            <a:avLst/>
+          </a:prstGeom>
+          <a:solidFill>
+            <a:srgbClr val="FFFFFF"/>
+          </a:solidFill>
+          <a:ln w="19050">
+            <a:solidFill>
+              <a:srgbClr val="2E7D32"/>
+            </a:solidFill>
+          </a:ln>
+        </p:spPr>
+        <p:style>
+          <a:lnRef idx="1">
+            <a:schemeClr val="accent1"/>
+          </a:lnRef>
+          <a:fillRef idx="3">
+            <a:schemeClr val="accent1"/>
+          </a:fillRef>
+          <a:effectRef idx="2">
+            <a:schemeClr val="accent1"/>
+          </a:effectRef>
+          <a:fontRef idx="minor">
+            <a:schemeClr val="lt1"/>
+          </a:fontRef>
+        </p:style>
+        <p:txBody>
+          <a:bodyPr rtlCol="0" anchor="ctr" wrap="square" lIns="274320" rIns="274320" tIns="137160"/>
+          <a:lstStyle/>
+          <a:p>
+            <a:pPr algn="ctr">
+              <a:defRPr sz="1400" b="1">
+                <a:solidFill>
+                  <a:srgbClr val="2E7D32"/>
+                </a:solidFill>
+              </a:defRPr>
+            </a:pPr>
+            <a:r>
+              <a:t>Analogia</a:t>
+            </a:r>
+          </a:p>
+          <a:p>
+            <a:pPr>
+              <a:defRPr sz="1400">
+                <a:solidFill>
+                  <a:srgbClr val="3D424E"/>
+                </a:solidFill>
+              </a:defRPr>
+            </a:pPr>
+            <a:r>
+              <a:t>Um médico fazendo diagnóstico. Antes de decidir, ele consulta um exame complementar (ECG, raio-X). FiLM faz isso para a rede de raça: antes de decidir, ela 'consulta' a saída do classificador de tom de pele.</a:t>
+            </a:r>
+          </a:p>
+        </p:txBody>
+      </p:sp>
+      <p:sp>
+        <p:nvSpPr>
+          <p:cNvPr id="11" name="Rounded Rectangle 10"/>
+          <p:cNvSpPr/>
+          <p:nvPr/>
+        </p:nvSpPr>
+        <p:spPr>
+          <a:xfrm>
+            <a:off x="548640" y="5394960"/>
+            <a:ext cx="11064240" cy="1097280"/>
           </a:xfrm>
           <a:prstGeom prst="roundRect">
             <a:avLst/>
@@ -4443,193 +4880,26 @@
           <a:lstStyle/>
           <a:p>
             <a:pPr algn="ctr">
-              <a:defRPr sz="1500" b="1">
+              <a:defRPr sz="1400" b="1">
                 <a:solidFill>
                   <a:srgbClr val="1F2A4E"/>
                 </a:solidFill>
               </a:defRPr>
             </a:pPr>
             <a:r>
-              <a:t>Em palavras simples</a:t>
-            </a:r>
-          </a:p>
-          <a:p>
-            <a:pPr>
-              <a:defRPr sz="1800">
+              <a:t>Por que importa para a tese</a:t>
+            </a:r>
+          </a:p>
+          <a:p>
+            <a:pPr>
+              <a:defRPr sz="1400">
                 <a:solidFill>
                   <a:srgbClr val="3D424E"/>
                 </a:solidFill>
               </a:defRPr>
             </a:pPr>
             <a:r>
-              <a:t>Uma escala de 10 tons de pele (do tom 1 mais claro ao tom 10 mais escuro), criada em 2023 pelo sociólogo Dr. Ellis Monk (Harvard) em parceria com o Google. Foi desenhada especificamente para auditar fairness em sistemas de IA — não é a escala antiga de dermatologia (Fitzpatrick), que tem viés para pele clara.</a:t>
-            </a:r>
-          </a:p>
-        </p:txBody>
-      </p:sp>
-      <p:sp>
-        <p:nvSpPr>
-          <p:cNvPr id="5" name="Rounded Rectangle 4"/>
-          <p:cNvSpPr/>
-          <p:nvPr/>
-        </p:nvSpPr>
-        <p:spPr>
-          <a:xfrm>
-            <a:off x="548640" y="3200400"/>
-            <a:ext cx="11064240" cy="1554480"/>
-          </a:xfrm>
-          <a:prstGeom prst="roundRect">
-            <a:avLst/>
-          </a:prstGeom>
-          <a:solidFill>
-            <a:srgbClr val="FFFFFF"/>
-          </a:solidFill>
-          <a:ln w="12700">
-            <a:solidFill>
-              <a:srgbClr val="1F2A4E"/>
-            </a:solidFill>
-          </a:ln>
-        </p:spPr>
-        <p:style>
-          <a:lnRef idx="1">
-            <a:schemeClr val="accent1"/>
-          </a:lnRef>
-          <a:fillRef idx="3">
-            <a:schemeClr val="accent1"/>
-          </a:fillRef>
-          <a:effectRef idx="2">
-            <a:schemeClr val="accent1"/>
-          </a:effectRef>
-          <a:fontRef idx="minor">
-            <a:schemeClr val="lt1"/>
-          </a:fontRef>
-        </p:style>
-        <p:txBody>
-          <a:bodyPr rtlCol="0" anchor="ctr" wrap="square" lIns="274320" rIns="274320" tIns="137160"/>
-          <a:lstStyle/>
-          <a:p>
-            <a:pPr algn="ctr">
-              <a:defRPr sz="1500" b="1">
-                <a:solidFill>
-                  <a:srgbClr val="1F2A4E"/>
-                </a:solidFill>
-              </a:defRPr>
-            </a:pPr>
-            <a:r>
-              <a:t>Por que importa para a tese</a:t>
-            </a:r>
-          </a:p>
-          <a:p>
-            <a:pPr>
-              <a:defRPr sz="1800">
-                <a:solidFill>
-                  <a:srgbClr val="3D424E"/>
-                </a:solidFill>
-              </a:defRPr>
-            </a:pPr>
-            <a:r>
-              <a:t>Nossa tese precisa medir tom de pele de forma confiável e granular. MST é o padrão moderno aceito pela comunidade de fairness research (publicado em NeurIPS 2023). Substituir a Fitzpatrick pela MST evita 3 problemas conhecidos da escala antiga.</a:t>
-            </a:r>
-          </a:p>
-        </p:txBody>
-      </p:sp>
-      <p:sp>
-        <p:nvSpPr>
-          <p:cNvPr id="6" name="Rounded Rectangle 5"/>
-          <p:cNvSpPr/>
-          <p:nvPr/>
-        </p:nvSpPr>
-        <p:spPr>
-          <a:xfrm>
-            <a:off x="548640" y="4937760"/>
-            <a:ext cx="11064240" cy="1463040"/>
-          </a:xfrm>
-          <a:prstGeom prst="roundRect">
-            <a:avLst/>
-          </a:prstGeom>
-          <a:solidFill>
-            <a:srgbClr val="FFFFFF"/>
-          </a:solidFill>
-          <a:ln w="12700">
-            <a:solidFill>
-              <a:srgbClr val="2E7D32"/>
-            </a:solidFill>
-          </a:ln>
-        </p:spPr>
-        <p:style>
-          <a:lnRef idx="1">
-            <a:schemeClr val="accent1"/>
-          </a:lnRef>
-          <a:fillRef idx="3">
-            <a:schemeClr val="accent1"/>
-          </a:fillRef>
-          <a:effectRef idx="2">
-            <a:schemeClr val="accent1"/>
-          </a:effectRef>
-          <a:fontRef idx="minor">
-            <a:schemeClr val="lt1"/>
-          </a:fontRef>
-        </p:style>
-        <p:txBody>
-          <a:bodyPr rtlCol="0" anchor="ctr" wrap="square" lIns="274320" rIns="274320" tIns="137160"/>
-          <a:lstStyle/>
-          <a:p>
-            <a:pPr algn="ctr">
-              <a:defRPr sz="1500" b="1">
-                <a:solidFill>
-                  <a:srgbClr val="2E7D32"/>
-                </a:solidFill>
-              </a:defRPr>
-            </a:pPr>
-            <a:r>
-              <a:t>Exemplo concreto</a:t>
-            </a:r>
-          </a:p>
-          <a:p>
-            <a:pPr>
-              <a:defRPr sz="1700">
-                <a:solidFill>
-                  <a:srgbClr val="3D424E"/>
-                </a:solidFill>
-              </a:defRPr>
-            </a:pPr>
-            <a:r>
-              <a:t>A Fitzpatrick (1975) tem só 6 tons, sendo 3 deles para variações de 'pele considerada branca'. Um terço dos próprios dermatologistas confunde Fitzpatrick com classificação racial — erro categorial endêmico.</a:t>
-            </a:r>
-          </a:p>
-        </p:txBody>
-      </p:sp>
-      <p:sp>
-        <p:nvSpPr>
-          <p:cNvPr id="7" name="TextBox 6"/>
-          <p:cNvSpPr txBox="1"/>
-          <p:nvPr/>
-        </p:nvSpPr>
-        <p:spPr>
-          <a:xfrm>
-            <a:off x="457200" y="6446520"/>
-            <a:ext cx="11430000" cy="365760"/>
-          </a:xfrm>
-          <a:prstGeom prst="rect">
-            <a:avLst/>
-          </a:prstGeom>
-          <a:noFill/>
-        </p:spPr>
-        <p:txBody>
-          <a:bodyPr wrap="none">
-            <a:spAutoFit/>
-          </a:bodyPr>
-          <a:lstStyle/>
-          <a:p>
-            <a:pPr>
-              <a:defRPr sz="1400" i="1">
-                <a:solidFill>
-                  <a:srgbClr val="707682"/>
-                </a:solidFill>
-              </a:defRPr>
-            </a:pPr>
-            <a:r>
-              <a:t>Classificador MST pré-treinado validado pela Rodada 6 (SkinToneNet, Pereira 2026)</a:t>
+              <a:t>Sem FiLM, 'usar tom de pele como contexto' seria uma ideia vaga. Com FiLM, vira mecanismo concreto e reproduzível, validado em mais de 600 papers desde 2018 (Perez et al., AAAI 2018).</a:t>
             </a:r>
           </a:p>
         </p:txBody>
@@ -4682,7 +4952,7 @@
               </a:defRPr>
             </a:pPr>
             <a:r>
-              <a:t>O que é FiLM (Feature-wise Linear Modulation)?</a:t>
+              <a:t>O que é fair transferência (LAFTR)?</a:t>
             </a:r>
           </a:p>
         </p:txBody>
@@ -4732,14 +5002,49 @@
       </p:sp>
       <p:sp>
         <p:nvSpPr>
-          <p:cNvPr id="4" name="Rounded Rectangle 3"/>
+          <p:cNvPr id="4" name="TextBox 3"/>
+          <p:cNvSpPr txBox="1"/>
+          <p:nvPr/>
+        </p:nvSpPr>
+        <p:spPr>
+          <a:xfrm>
+            <a:off x="548640" y="1280160"/>
+            <a:ext cx="11064240" cy="640080"/>
+          </a:xfrm>
+          <a:prstGeom prst="rect">
+            <a:avLst/>
+          </a:prstGeom>
+          <a:noFill/>
+        </p:spPr>
+        <p:txBody>
+          <a:bodyPr wrap="none">
+            <a:spAutoFit/>
+          </a:bodyPr>
+          <a:lstStyle/>
+          <a:p>
+            <a:pPr>
+              <a:defRPr sz="1500" i="1">
+                <a:solidFill>
+                  <a:srgbClr val="3D424E"/>
+                </a:solidFill>
+              </a:defRPr>
+            </a:pPr>
+            <a:r>
+              <a:t>Em palavras simples: se uma rede aprendeu a ser justa em uma tarefa, ela carrega essa propriedade para outras tarefas que usem a mesma representação interna.</a:t>
+            </a:r>
+          </a:p>
+        </p:txBody>
+      </p:sp>
+      <p:sp>
+        <p:nvSpPr>
+          <p:cNvPr id="5" name="Rounded Rectangle 4"/>
           <p:cNvSpPr/>
           <p:nvPr/>
         </p:nvSpPr>
         <p:spPr>
           <a:xfrm>
-            <a:off x="548640" y="1371600"/>
-            <a:ext cx="11064240" cy="2103120"/>
+            <a:off x="548640" y="2286000"/>
+            <a:ext cx="3840480" cy="1463040"/>
           </a:xfrm>
           <a:prstGeom prst="roundRect">
             <a:avLst/>
@@ -4747,8 +5052,10 @@
           <a:solidFill>
             <a:srgbClr val="E8EAED"/>
           </a:solidFill>
-          <a:ln>
-            <a:noFill/>
+          <a:ln w="19050">
+            <a:solidFill>
+              <a:srgbClr val="1F2A4E"/>
+            </a:solidFill>
           </a:ln>
         </p:spPr>
         <p:style>
@@ -4766,7 +5073,7 @@
           </a:fontRef>
         </p:style>
         <p:txBody>
-          <a:bodyPr rtlCol="0" anchor="ctr" wrap="square" lIns="274320" rIns="274320" tIns="137160"/>
+          <a:bodyPr rtlCol="0" anchor="ctr" wrap="square" lIns="182880" rIns="182880" tIns="137160"/>
           <a:lstStyle/>
           <a:p>
             <a:pPr algn="ctr">
@@ -4777,57 +5084,249 @@
               </a:defRPr>
             </a:pPr>
             <a:r>
-              <a:t>Formulação matemática (Perez et al. 2018, AAAI)</a:t>
-            </a:r>
-          </a:p>
-          <a:p>
-            <a:pPr>
-              <a:defRPr sz="1500">
+              <a:t>Cap 2 — Race classification</a:t>
+            </a:r>
+          </a:p>
+          <a:p>
+            <a:pPr>
+              <a:defRPr sz="1200">
                 <a:solidFill>
                   <a:srgbClr val="3D424E"/>
                 </a:solidFill>
               </a:defRPr>
             </a:pPr>
             <a:r>
-              <a:t>Dada uma feature map intermediária F do backbone e um vetor de contexto z (no nosso caso, vetor MST de 10 dimensões saído do SkinToneNet):</a:t>
-            </a:r>
-          </a:p>
-          <a:p>
-            <a:pPr>
-              <a:defRPr sz="1700" b="1">
+              <a:t>Treinamos a rede com objetivo fair sobre tom de pele e raça. O backbone aprende uma representação que é, por construção, mais equilibrada entre grupos.</a:t>
+            </a:r>
+          </a:p>
+        </p:txBody>
+      </p:sp>
+      <p:sp>
+        <p:nvSpPr>
+          <p:cNvPr id="6" name="Right Arrow 5"/>
+          <p:cNvSpPr/>
+          <p:nvPr/>
+        </p:nvSpPr>
+        <p:spPr>
+          <a:xfrm>
+            <a:off x="4480560" y="2788920"/>
+            <a:ext cx="822960" cy="457200"/>
+          </a:xfrm>
+          <a:prstGeom prst="rightArrow">
+            <a:avLst/>
+          </a:prstGeom>
+          <a:solidFill>
+            <a:srgbClr val="1F2A4E"/>
+          </a:solidFill>
+          <a:ln>
+            <a:noFill/>
+          </a:ln>
+        </p:spPr>
+        <p:style>
+          <a:lnRef idx="1">
+            <a:schemeClr val="accent1"/>
+          </a:lnRef>
+          <a:fillRef idx="3">
+            <a:schemeClr val="accent1"/>
+          </a:fillRef>
+          <a:effectRef idx="2">
+            <a:schemeClr val="accent1"/>
+          </a:effectRef>
+          <a:fontRef idx="minor">
+            <a:schemeClr val="lt1"/>
+          </a:fontRef>
+        </p:style>
+        <p:txBody>
+          <a:bodyPr rtlCol="0" anchor="ctr"/>
+          <a:lstStyle/>
+          <a:p>
+            <a:pPr algn="ctr"/>
+          </a:p>
+        </p:txBody>
+      </p:sp>
+      <p:sp>
+        <p:nvSpPr>
+          <p:cNvPr id="7" name="Rounded Rectangle 6"/>
+          <p:cNvSpPr/>
+          <p:nvPr/>
+        </p:nvSpPr>
+        <p:spPr>
+          <a:xfrm>
+            <a:off x="5394960" y="2286000"/>
+            <a:ext cx="2194560" cy="1463040"/>
+          </a:xfrm>
+          <a:prstGeom prst="roundRect">
+            <a:avLst/>
+          </a:prstGeom>
+          <a:solidFill>
+            <a:srgbClr val="1F2A4E"/>
+          </a:solidFill>
+          <a:ln>
+            <a:noFill/>
+          </a:ln>
+        </p:spPr>
+        <p:style>
+          <a:lnRef idx="1">
+            <a:schemeClr val="accent1"/>
+          </a:lnRef>
+          <a:fillRef idx="3">
+            <a:schemeClr val="accent1"/>
+          </a:fillRef>
+          <a:effectRef idx="2">
+            <a:schemeClr val="accent1"/>
+          </a:effectRef>
+          <a:fontRef idx="minor">
+            <a:schemeClr val="lt1"/>
+          </a:fontRef>
+        </p:style>
+        <p:txBody>
+          <a:bodyPr rtlCol="0" anchor="ctr" wrap="square" lIns="137160" rIns="137160" tIns="182880"/>
+          <a:lstStyle/>
+          <a:p>
+            <a:pPr algn="ctr">
+              <a:defRPr sz="1400" b="1">
+                <a:solidFill>
+                  <a:srgbClr val="FFFFFF"/>
+                </a:solidFill>
+              </a:defRPr>
+            </a:pPr>
+            <a:r>
+              <a:t>Backbone fair</a:t>
+            </a:r>
+          </a:p>
+          <a:p>
+            <a:pPr algn="ctr">
+              <a:defRPr sz="1100">
+                <a:solidFill>
+                  <a:srgbClr val="E8EAED"/>
+                </a:solidFill>
+              </a:defRPr>
+            </a:pPr>
+            <a:r>
+              <a:t>A propriedade fair fica embutida AQUI.</a:t>
+            </a:r>
+          </a:p>
+        </p:txBody>
+      </p:sp>
+      <p:sp>
+        <p:nvSpPr>
+          <p:cNvPr id="8" name="Right Arrow 7"/>
+          <p:cNvSpPr/>
+          <p:nvPr/>
+        </p:nvSpPr>
+        <p:spPr>
+          <a:xfrm>
+            <a:off x="7680960" y="2788920"/>
+            <a:ext cx="822960" cy="457200"/>
+          </a:xfrm>
+          <a:prstGeom prst="rightArrow">
+            <a:avLst/>
+          </a:prstGeom>
+          <a:solidFill>
+            <a:srgbClr val="1F2A4E"/>
+          </a:solidFill>
+          <a:ln>
+            <a:noFill/>
+          </a:ln>
+        </p:spPr>
+        <p:style>
+          <a:lnRef idx="1">
+            <a:schemeClr val="accent1"/>
+          </a:lnRef>
+          <a:fillRef idx="3">
+            <a:schemeClr val="accent1"/>
+          </a:fillRef>
+          <a:effectRef idx="2">
+            <a:schemeClr val="accent1"/>
+          </a:effectRef>
+          <a:fontRef idx="minor">
+            <a:schemeClr val="lt1"/>
+          </a:fontRef>
+        </p:style>
+        <p:txBody>
+          <a:bodyPr rtlCol="0" anchor="ctr"/>
+          <a:lstStyle/>
+          <a:p>
+            <a:pPr algn="ctr"/>
+          </a:p>
+        </p:txBody>
+      </p:sp>
+      <p:sp>
+        <p:nvSpPr>
+          <p:cNvPr id="9" name="Rounded Rectangle 8"/>
+          <p:cNvSpPr/>
+          <p:nvPr/>
+        </p:nvSpPr>
+        <p:spPr>
+          <a:xfrm>
+            <a:off x="8595360" y="2286000"/>
+            <a:ext cx="3017520" cy="1463040"/>
+          </a:xfrm>
+          <a:prstGeom prst="roundRect">
+            <a:avLst/>
+          </a:prstGeom>
+          <a:solidFill>
+            <a:srgbClr val="E8EAED"/>
+          </a:solidFill>
+          <a:ln w="19050">
+            <a:solidFill>
+              <a:srgbClr val="1F2A4E"/>
+            </a:solidFill>
+          </a:ln>
+        </p:spPr>
+        <p:style>
+          <a:lnRef idx="1">
+            <a:schemeClr val="accent1"/>
+          </a:lnRef>
+          <a:fillRef idx="3">
+            <a:schemeClr val="accent1"/>
+          </a:fillRef>
+          <a:effectRef idx="2">
+            <a:schemeClr val="accent1"/>
+          </a:effectRef>
+          <a:fontRef idx="minor">
+            <a:schemeClr val="lt1"/>
+          </a:fontRef>
+        </p:style>
+        <p:txBody>
+          <a:bodyPr rtlCol="0" anchor="ctr" wrap="square" lIns="182880" rIns="182880" tIns="137160"/>
+          <a:lstStyle/>
+          <a:p>
+            <a:pPr algn="ctr">
+              <a:defRPr sz="1400" b="1">
                 <a:solidFill>
                   <a:srgbClr val="1F2A4E"/>
                 </a:solidFill>
               </a:defRPr>
             </a:pPr>
             <a:r>
-              <a:t>    FiLM(F | γ, β) = γ ⊙ F + β       onde γ = fγ(z) e β = fβ(z)</a:t>
-            </a:r>
-          </a:p>
-          <a:p>
-            <a:pPr>
-              <a:defRPr sz="1400">
+              <a:t>Cap 3 — Face recognition</a:t>
+            </a:r>
+          </a:p>
+          <a:p>
+            <a:pPr>
+              <a:defRPr sz="1200">
                 <a:solidFill>
                   <a:srgbClr val="3D424E"/>
                 </a:solidFill>
               </a:defRPr>
             </a:pPr>
             <a:r>
-              <a:t>fγ e fβ são duas pequenas MLPs treináveis que mapeiam o contexto z para os parâmetros de modulação (γ, β) por canal. O símbolo ⊙ é multiplicação elemento-a-elemento.</a:t>
-            </a:r>
-          </a:p>
-        </p:txBody>
-      </p:sp>
-      <p:sp>
-        <p:nvSpPr>
-          <p:cNvPr id="5" name="Rounded Rectangle 4"/>
+              <a:t>Reaproveitamos o mesmo backbone. Como ele já é fair, a tarefa nova herda essa propriedade — sem precisar re-treinar do zero.</a:t>
+            </a:r>
+          </a:p>
+        </p:txBody>
+      </p:sp>
+      <p:sp>
+        <p:nvSpPr>
+          <p:cNvPr id="10" name="Rounded Rectangle 9"/>
           <p:cNvSpPr/>
           <p:nvPr/>
         </p:nvSpPr>
         <p:spPr>
           <a:xfrm>
-            <a:off x="548640" y="3657600"/>
-            <a:ext cx="11064240" cy="2103120"/>
+            <a:off x="548640" y="3931920"/>
+            <a:ext cx="11064240" cy="1371600"/>
           </a:xfrm>
           <a:prstGeom prst="roundRect">
             <a:avLst/>
@@ -4867,81 +5366,33 @@
               </a:defRPr>
             </a:pPr>
             <a:r>
-              <a:t>Como aplicar no nosso pipeline (receita prática)</a:t>
-            </a:r>
-          </a:p>
-          <a:p>
-            <a:pPr>
-              <a:spcAft>
-                <a:spcPts val="200"/>
-              </a:spcAft>
-              <a:defRPr sz="1400">
+              <a:t>O que Madras et al. 2018 (ICML) provam</a:t>
+            </a:r>
+          </a:p>
+          <a:p>
+            <a:pPr>
+              <a:defRPr sz="1300">
                 <a:solidFill>
                   <a:srgbClr val="3D424E"/>
                 </a:solidFill>
               </a:defRPr>
             </a:pPr>
             <a:r>
-              <a:t>1. Extrair vetor MST z ∈ ℝ¹⁰ da imagem usando o SkinToneNet pré-treinado.</a:t>
-            </a:r>
-          </a:p>
-          <a:p>
-            <a:pPr>
-              <a:spcAft>
-                <a:spcPts val="200"/>
-              </a:spcAft>
-              <a:defRPr sz="1400">
-                <a:solidFill>
-                  <a:srgbClr val="3D424E"/>
-                </a:solidFill>
-              </a:defRPr>
-            </a:pPr>
-            <a:r>
-              <a:t>2. Para cada bloco residual do ConvNeXt-T, inserir um bloco FiLM que recebe z e produz (γ, β).</a:t>
-            </a:r>
-          </a:p>
-          <a:p>
-            <a:pPr>
-              <a:spcAft>
-                <a:spcPts val="200"/>
-              </a:spcAft>
-              <a:defRPr sz="1400">
-                <a:solidFill>
-                  <a:srgbClr val="3D424E"/>
-                </a:solidFill>
-              </a:defRPr>
-            </a:pPr>
-            <a:r>
-              <a:t>3. Modular as features intermediárias F do bloco: F' = γ ⊙ F + β.</a:t>
-            </a:r>
-          </a:p>
-          <a:p>
-            <a:pPr>
-              <a:spcAft>
-                <a:spcPts val="200"/>
-              </a:spcAft>
-              <a:defRPr sz="1400">
-                <a:solidFill>
-                  <a:srgbClr val="3D424E"/>
-                </a:solidFill>
-              </a:defRPr>
-            </a:pPr>
-            <a:r>
-              <a:t>4. Backbone e cabeça de classificação treinam normalmente; só os parâmetros das MLPs (fγ, fβ) são novos.</a:t>
-            </a:r>
-          </a:p>
-        </p:txBody>
-      </p:sp>
-      <p:sp>
-        <p:nvSpPr>
-          <p:cNvPr id="6" name="Rounded Rectangle 5"/>
+              <a:t>A fairness é PROPRIEDADE DA REPRESENTAÇÃO INTERNA — não da tarefa específica. Qualquer classificador downstream que use a mesma representação herda um limite superior de injustiça. É essa garantia teórica que sustenta a extensão da nossa tese para face recognition (Cap 3).</a:t>
+            </a:r>
+          </a:p>
+        </p:txBody>
+      </p:sp>
+      <p:sp>
+        <p:nvSpPr>
+          <p:cNvPr id="11" name="Rounded Rectangle 10"/>
           <p:cNvSpPr/>
           <p:nvPr/>
         </p:nvSpPr>
         <p:spPr>
           <a:xfrm>
-            <a:off x="548640" y="5943600"/>
-            <a:ext cx="11064240" cy="822960"/>
+            <a:off x="548640" y="5440680"/>
+            <a:ext cx="11064240" cy="914400"/>
           </a:xfrm>
           <a:prstGeom prst="roundRect">
             <a:avLst/>
@@ -4981,7 +5432,7 @@
               </a:defRPr>
             </a:pPr>
             <a:r>
-              <a:t>Por que importa para a tese</a:t>
+              <a:t>Analogia</a:t>
             </a:r>
           </a:p>
           <a:p>
@@ -4993,7 +5444,42 @@
               </a:defRPr>
             </a:pPr>
             <a:r>
-              <a:t>Sem FiLM, 'usar tom de pele como contexto' seria vaga. Com FiLM, é matemática e código concreto — qualquer revisor consegue reproduzir.</a:t>
+              <a:t>Aprender ética profissional em medicina geral nos torna mais éticos também quando nos especializamos em cardiologia. A 'ética' é uma propriedade do profissional, não da especialidade.</a:t>
+            </a:r>
+          </a:p>
+        </p:txBody>
+      </p:sp>
+      <p:sp>
+        <p:nvSpPr>
+          <p:cNvPr id="12" name="TextBox 11"/>
+          <p:cNvSpPr txBox="1"/>
+          <p:nvPr/>
+        </p:nvSpPr>
+        <p:spPr>
+          <a:xfrm>
+            <a:off x="457200" y="6446520"/>
+            <a:ext cx="11430000" cy="365760"/>
+          </a:xfrm>
+          <a:prstGeom prst="rect">
+            <a:avLst/>
+          </a:prstGeom>
+          <a:noFill/>
+        </p:spPr>
+        <p:txBody>
+          <a:bodyPr wrap="none">
+            <a:spAutoFit/>
+          </a:bodyPr>
+          <a:lstStyle/>
+          <a:p>
+            <a:pPr>
+              <a:defRPr sz="1200" i="1">
+                <a:solidFill>
+                  <a:srgbClr val="707682"/>
+                </a:solidFill>
+              </a:defRPr>
+            </a:pPr>
+            <a:r>
+              <a:t>H5 em revisão após Pangelinan 2023 (Rodada 6): pixel info pode ser confounder adicional em FR — discussão na pauta</a:t>
             </a:r>
           </a:p>
         </p:txBody>
@@ -5033,20 +5519,20 @@
           <a:noFill/>
         </p:spPr>
         <p:txBody>
-          <a:bodyPr wrap="none">
+          <a:bodyPr wrap="square">
             <a:spAutoFit/>
           </a:bodyPr>
           <a:lstStyle/>
           <a:p>
             <a:pPr>
-              <a:defRPr sz="2800" b="1">
+              <a:defRPr sz="3000" b="1">
                 <a:solidFill>
                   <a:srgbClr val="1F2A4E"/>
                 </a:solidFill>
               </a:defRPr>
             </a:pPr>
             <a:r>
-              <a:t>O que é fair transferência (LAFTR)?</a:t>
+              <a:t>O pipeline em 6 etapas</a:t>
             </a:r>
           </a:p>
         </p:txBody>
@@ -5059,7 +5545,7 @@
         </p:nvSpPr>
         <p:spPr>
           <a:xfrm>
-            <a:off x="457200" y="1097280"/>
+            <a:off x="457200" y="1143000"/>
             <a:ext cx="11430000" cy="45720"/>
           </a:xfrm>
           <a:prstGeom prst="rect">
@@ -5096,284 +5582,216 @@
       </p:sp>
       <p:sp>
         <p:nvSpPr>
-          <p:cNvPr id="4" name="Rounded Rectangle 3"/>
-          <p:cNvSpPr/>
+          <p:cNvPr id="4" name="TextBox 3"/>
+          <p:cNvSpPr txBox="1"/>
           <p:nvPr/>
         </p:nvSpPr>
         <p:spPr>
           <a:xfrm>
             <a:off x="548640" y="1371600"/>
-            <a:ext cx="11064240" cy="2194560"/>
-          </a:xfrm>
-          <a:prstGeom prst="roundRect">
-            <a:avLst/>
-          </a:prstGeom>
-          <a:solidFill>
-            <a:srgbClr val="E8EAED"/>
-          </a:solidFill>
-          <a:ln>
-            <a:noFill/>
-          </a:ln>
-        </p:spPr>
-        <p:style>
-          <a:lnRef idx="1">
-            <a:schemeClr val="accent1"/>
-          </a:lnRef>
-          <a:fillRef idx="3">
-            <a:schemeClr val="accent1"/>
-          </a:fillRef>
-          <a:effectRef idx="2">
-            <a:schemeClr val="accent1"/>
-          </a:effectRef>
-          <a:fontRef idx="minor">
-            <a:schemeClr val="lt1"/>
-          </a:fontRef>
-        </p:style>
-        <p:txBody>
-          <a:bodyPr rtlCol="0" anchor="ctr" wrap="square" lIns="274320" rIns="274320" tIns="137160"/>
-          <a:lstStyle/>
-          <a:p>
-            <a:pPr algn="ctr">
-              <a:defRPr sz="1400" b="1">
-                <a:solidFill>
-                  <a:srgbClr val="1F2A4E"/>
-                </a:solidFill>
-              </a:defRPr>
-            </a:pPr>
-            <a:r>
-              <a:t>Formalização teórica (Madras et al. 2018, ICML)</a:t>
-            </a:r>
-          </a:p>
+            <a:ext cx="11247120" cy="4937760"/>
+          </a:xfrm>
+          <a:prstGeom prst="rect">
+            <a:avLst/>
+          </a:prstGeom>
+          <a:noFill/>
+        </p:spPr>
+        <p:txBody>
+          <a:bodyPr wrap="square">
+            <a:spAutoFit/>
+          </a:bodyPr>
+          <a:lstStyle/>
           <a:p>
             <a:pPr>
               <a:spcAft>
-                <a:spcPts val="200"/>
+                <a:spcPts val="800"/>
               </a:spcAft>
-              <a:defRPr sz="1300">
+              <a:defRPr sz="2000" b="0">
                 <a:solidFill>
                   <a:srgbClr val="3D424E"/>
                 </a:solidFill>
               </a:defRPr>
             </a:pPr>
             <a:r>
-              <a:t>Encoder e: X → Z      mapeia entrada para representação latente Z</a:t>
-            </a:r>
-          </a:p>
-          <a:p>
-            <a:pPr>
+              <a:t>Etapa 1 — Treinar um classificador de tom de pele (MST)</a:t>
+            </a:r>
+          </a:p>
+          <a:p>
+            <a:pPr lvl="1">
               <a:spcAft>
-                <a:spcPts val="200"/>
+                <a:spcPts val="800"/>
               </a:spcAft>
-              <a:defRPr sz="1300">
+              <a:defRPr sz="1700">
+                <a:solidFill>
+                  <a:srgbClr val="707682"/>
+                </a:solidFill>
+              </a:defRPr>
+            </a:pPr>
+            <a:r>
+              <a:t>Dados: MST-E (Schumann 2023) + Casual Conversations (Meta 2021)</a:t>
+            </a:r>
+          </a:p>
+          <a:p>
+            <a:pPr>
+              <a:spcAft>
+                <a:spcPts val="800"/>
+              </a:spcAft>
+              <a:defRPr sz="2000" b="0">
                 <a:solidFill>
                   <a:srgbClr val="3D424E"/>
                 </a:solidFill>
               </a:defRPr>
             </a:pPr>
             <a:r>
-              <a:t>Classificador c: Z → Y      prediz a tarefa de interesse</a:t>
-            </a:r>
-          </a:p>
-          <a:p>
-            <a:pPr>
+              <a:t>Etapa 2 — Auditar o FairFace: como tom de pele se distribui entre as 7 raças?</a:t>
+            </a:r>
+          </a:p>
+          <a:p>
+            <a:pPr lvl="1">
               <a:spcAft>
-                <a:spcPts val="200"/>
+                <a:spcPts val="800"/>
               </a:spcAft>
-              <a:defRPr sz="1300">
+              <a:defRPr sz="1700">
+                <a:solidFill>
+                  <a:srgbClr val="707682"/>
+                </a:solidFill>
+              </a:defRPr>
+            </a:pPr>
+            <a:r>
+              <a:t>Aplicar o classificador MST sobre 10.954 imagens; validar manualmente um subset</a:t>
+            </a:r>
+          </a:p>
+          <a:p>
+            <a:pPr>
+              <a:spcAft>
+                <a:spcPts val="800"/>
+              </a:spcAft>
+              <a:defRPr sz="2000" b="0">
                 <a:solidFill>
                   <a:srgbClr val="3D424E"/>
                 </a:solidFill>
               </a:defRPr>
             </a:pPr>
             <a:r>
-              <a:t>Adversário a: Z → S      tenta prever atributo sensível S a partir de Z</a:t>
-            </a:r>
-          </a:p>
-          <a:p>
-            <a:pPr>
+              <a:t>Etapa 3 — Treinar o classificador de raça USANDO tom de pele como contexto (via FiLM)</a:t>
+            </a:r>
+          </a:p>
+          <a:p>
+            <a:pPr lvl="1">
               <a:spcAft>
-                <a:spcPts val="200"/>
+                <a:spcPts val="800"/>
               </a:spcAft>
-              <a:defRPr sz="1300" b="1">
-                <a:solidFill>
-                  <a:srgbClr val="1F2A4E"/>
-                </a:solidFill>
-              </a:defRPr>
-            </a:pPr>
-            <a:r>
-              <a:t>Objetivo:    min_{e,c} max_a  [ L_clf(c(e(X)), Y)  +  λ · L_adv(a(e(X)), S) ]</a:t>
+              <a:defRPr sz="1700">
+                <a:solidFill>
+                  <a:srgbClr val="707682"/>
+                </a:solidFill>
+              </a:defRPr>
+            </a:pPr>
+            <a:r>
+              <a:t>Backbone: ConvNeXt-T (rede moderna, 28 milhões de parâmetros — leve)</a:t>
             </a:r>
           </a:p>
           <a:p>
             <a:pPr>
               <a:spcAft>
-                <a:spcPts val="200"/>
+                <a:spcPts val="800"/>
               </a:spcAft>
-              <a:defRPr sz="1300" b="1">
-                <a:solidFill>
-                  <a:srgbClr val="1F2A4E"/>
-                </a:solidFill>
-              </a:defRPr>
-            </a:pPr>
-            <a:r>
-              <a:t>Resultado teórico: se a falha (L_adv → 0), então Z é fair sob demographic parity / equalized odds.</a:t>
-            </a:r>
-          </a:p>
-        </p:txBody>
-      </p:sp>
-      <p:sp>
-        <p:nvSpPr>
-          <p:cNvPr id="5" name="Rounded Rectangle 4"/>
-          <p:cNvSpPr/>
-          <p:nvPr/>
-        </p:nvSpPr>
-        <p:spPr>
-          <a:xfrm>
-            <a:off x="548640" y="3703320"/>
-            <a:ext cx="11064240" cy="1737360"/>
-          </a:xfrm>
-          <a:prstGeom prst="roundRect">
-            <a:avLst/>
-          </a:prstGeom>
-          <a:solidFill>
-            <a:srgbClr val="FFFFFF"/>
-          </a:solidFill>
-          <a:ln w="19050">
-            <a:solidFill>
-              <a:srgbClr val="1F2A4E"/>
-            </a:solidFill>
-          </a:ln>
-        </p:spPr>
-        <p:style>
-          <a:lnRef idx="1">
-            <a:schemeClr val="accent1"/>
-          </a:lnRef>
-          <a:fillRef idx="3">
-            <a:schemeClr val="accent1"/>
-          </a:fillRef>
-          <a:effectRef idx="2">
-            <a:schemeClr val="accent1"/>
-          </a:effectRef>
-          <a:fontRef idx="minor">
-            <a:schemeClr val="lt1"/>
-          </a:fontRef>
-        </p:style>
-        <p:txBody>
-          <a:bodyPr rtlCol="0" anchor="ctr" wrap="square" lIns="274320" rIns="274320" tIns="137160"/>
-          <a:lstStyle/>
-          <a:p>
-            <a:pPr algn="ctr">
-              <a:defRPr sz="1400" b="1">
-                <a:solidFill>
-                  <a:srgbClr val="1F2A4E"/>
-                </a:solidFill>
-              </a:defRPr>
-            </a:pPr>
-            <a:r>
-              <a:t>Garantia de transferência (Teorema 1, Madras 2018)</a:t>
-            </a:r>
-          </a:p>
-          <a:p>
-            <a:pPr>
-              <a:defRPr sz="1400">
+              <a:defRPr sz="2000" b="0">
                 <a:solidFill>
                   <a:srgbClr val="3D424E"/>
                 </a:solidFill>
               </a:defRPr>
             </a:pPr>
             <a:r>
-              <a:t>Para QUALQUER classificador downstream c' treinado sobre a mesma representação Z, a violação de fairness de c' é limitada superiormente pela violação de fairness em c. Em palavras simples: a propriedade fair é PROPRIEDADE DA REPRESENTAÇÃO Z, não da tarefa específica.</a:t>
-            </a:r>
-          </a:p>
-          <a:p>
-            <a:pPr>
-              <a:defRPr sz="1300">
+              <a:t>Etapa 4 — Comparar fairness: COM tom de pele vs SEM</a:t>
+            </a:r>
+          </a:p>
+          <a:p>
+            <a:pPr lvl="1">
+              <a:spcAft>
+                <a:spcPts val="800"/>
+              </a:spcAft>
+              <a:defRPr sz="1700">
+                <a:solidFill>
+                  <a:srgbClr val="707682"/>
+                </a:solidFill>
+              </a:defRPr>
+            </a:pPr>
+            <a:r>
+              <a:t>Baselines: ConvNeXt-T puro, FSCL+, Group DRO, Adversarial debiasing</a:t>
+            </a:r>
+          </a:p>
+          <a:p>
+            <a:pPr>
+              <a:spcAft>
+                <a:spcPts val="800"/>
+              </a:spcAft>
+              <a:defRPr sz="2000" b="0">
                 <a:solidFill>
                   <a:srgbClr val="3D424E"/>
                 </a:solidFill>
               </a:defRPr>
             </a:pPr>
             <a:r>
-              <a:t>Implicação: ao treinar fair em race classification (Cap 2), o backbone passa a Z fair. Reaproveitamos esse mesmo Z em face recognition (Cap 3) sem re-treinar fairness do zero.</a:t>
-            </a:r>
-          </a:p>
-        </p:txBody>
-      </p:sp>
-      <p:sp>
-        <p:nvSpPr>
-          <p:cNvPr id="6" name="Rounded Rectangle 5"/>
-          <p:cNvSpPr/>
-          <p:nvPr/>
-        </p:nvSpPr>
-        <p:spPr>
-          <a:xfrm>
-            <a:off x="548640" y="5577840"/>
-            <a:ext cx="11064240" cy="1188720"/>
-          </a:xfrm>
-          <a:prstGeom prst="roundRect">
-            <a:avLst/>
-          </a:prstGeom>
-          <a:solidFill>
-            <a:srgbClr val="FFFFFF"/>
-          </a:solidFill>
-          <a:ln w="19050">
-            <a:solidFill>
-              <a:srgbClr val="2E7D32"/>
-            </a:solidFill>
-          </a:ln>
-        </p:spPr>
-        <p:style>
-          <a:lnRef idx="1">
-            <a:schemeClr val="accent1"/>
-          </a:lnRef>
-          <a:fillRef idx="3">
-            <a:schemeClr val="accent1"/>
-          </a:fillRef>
-          <a:effectRef idx="2">
-            <a:schemeClr val="accent1"/>
-          </a:effectRef>
-          <a:fontRef idx="minor">
-            <a:schemeClr val="lt1"/>
-          </a:fontRef>
-        </p:style>
-        <p:txBody>
-          <a:bodyPr rtlCol="0" anchor="ctr" wrap="square" lIns="274320" rIns="274320" tIns="91440"/>
-          <a:lstStyle/>
-          <a:p>
-            <a:pPr algn="ctr">
-              <a:defRPr sz="1300" b="1">
-                <a:solidFill>
-                  <a:srgbClr val="2E7D32"/>
-                </a:solidFill>
-              </a:defRPr>
-            </a:pPr>
-            <a:r>
-              <a:t>Evidência empírica complementar</a:t>
-            </a:r>
-          </a:p>
-          <a:p>
-            <a:pPr>
-              <a:defRPr sz="1300">
+              <a:t>Etapa 5 — Aplicar pipeline idêntico em reconhecimento facial (RFW ou BFW)</a:t>
+            </a:r>
+          </a:p>
+          <a:p>
+            <a:pPr lvl="1">
+              <a:spcAft>
+                <a:spcPts val="800"/>
+              </a:spcAft>
+              <a:defRPr sz="1700">
+                <a:solidFill>
+                  <a:srgbClr val="707682"/>
+                </a:solidFill>
+              </a:defRPr>
+            </a:pPr>
+            <a:r>
+              <a:t>Verificar transferência da propriedade fair</a:t>
+            </a:r>
+          </a:p>
+          <a:p>
+            <a:pPr>
+              <a:spcAft>
+                <a:spcPts val="800"/>
+              </a:spcAft>
+              <a:defRPr sz="2000" b="0">
                 <a:solidFill>
                   <a:srgbClr val="3D424E"/>
                 </a:solidFill>
               </a:defRPr>
             </a:pPr>
             <a:r>
-              <a:t>Aguirre &amp; Dredze 2023 (arXiv:2305.12671) — confirmaram empiricamente que objetivos de fairness demográfico SE TRANSFEREM entre tarefas que compartilham representação (domínio NLP, mas princípio é independente da modalidade).</a:t>
-            </a:r>
-          </a:p>
-        </p:txBody>
-      </p:sp>
-      <p:sp>
-        <p:nvSpPr>
-          <p:cNvPr id="7" name="TextBox 6"/>
+              <a:t>Etapa 6 — Medir se Black/African melhora especificamente</a:t>
+            </a:r>
+          </a:p>
+          <a:p>
+            <a:pPr lvl="1">
+              <a:spcAft>
+                <a:spcPts val="800"/>
+              </a:spcAft>
+              <a:defRPr sz="1700">
+                <a:solidFill>
+                  <a:srgbClr val="707682"/>
+                </a:solidFill>
+              </a:defRPr>
+            </a:pPr>
+            <a:r>
+              <a:t>Métrica: TAR @ FAR fixo por raça</a:t>
+            </a:r>
+          </a:p>
+        </p:txBody>
+      </p:sp>
+      <p:sp>
+        <p:nvSpPr>
+          <p:cNvPr id="5" name="TextBox 4"/>
           <p:cNvSpPr txBox="1"/>
           <p:nvPr/>
         </p:nvSpPr>
         <p:spPr>
           <a:xfrm>
-            <a:off x="457200" y="6446520"/>
+            <a:off x="457200" y="6400800"/>
             <a:ext cx="11430000" cy="365760"/>
           </a:xfrm>
           <a:prstGeom prst="rect">
@@ -5388,14 +5806,14 @@
           <a:lstStyle/>
           <a:p>
             <a:pPr>
-              <a:defRPr sz="1300" i="1">
+              <a:defRPr sz="1500" i="1">
                 <a:solidFill>
                   <a:srgbClr val="707682"/>
                 </a:solidFill>
               </a:defRPr>
             </a:pPr>
             <a:r>
-              <a:t>H5 em revisão após Pangelinan 2023 (Rodada 6): pixel info pode ser confounder adicional em FR — discussão na pauta</a:t>
+              <a:t>Etapas 1, 4 e 5 reforçadas pela Rodada 6 (SkinToneNet, Adversarial debiasing, fair transfer empírico)</a:t>
             </a:r>
           </a:p>
         </p:txBody>
@@ -5435,20 +5853,20 @@
           <a:noFill/>
         </p:spPr>
         <p:txBody>
-          <a:bodyPr wrap="square">
+          <a:bodyPr wrap="none">
             <a:spAutoFit/>
           </a:bodyPr>
           <a:lstStyle/>
           <a:p>
             <a:pPr>
-              <a:defRPr sz="3000" b="1">
+              <a:defRPr sz="2600" b="1">
                 <a:solidFill>
                   <a:srgbClr val="1F2A4E"/>
                 </a:solidFill>
               </a:defRPr>
             </a:pPr>
             <a:r>
-              <a:t>O pipeline em 6 etapas</a:t>
+              <a:t>As métricas que vamos reportar — todas públicas e estabelecidas</a:t>
             </a:r>
           </a:p>
         </p:txBody>
@@ -5461,7 +5879,7 @@
         </p:nvSpPr>
         <p:spPr>
           <a:xfrm>
-            <a:off x="457200" y="1143000"/>
+            <a:off x="457200" y="1097280"/>
             <a:ext cx="11430000" cy="45720"/>
           </a:xfrm>
           <a:prstGeom prst="rect">
@@ -5498,238 +5916,314 @@
       </p:sp>
       <p:sp>
         <p:nvSpPr>
-          <p:cNvPr id="4" name="TextBox 3"/>
-          <p:cNvSpPr txBox="1"/>
-          <p:nvPr/>
-        </p:nvSpPr>
-        <p:spPr>
-          <a:xfrm>
-            <a:off x="548640" y="1371600"/>
-            <a:ext cx="11247120" cy="4937760"/>
-          </a:xfrm>
-          <a:prstGeom prst="rect">
-            <a:avLst/>
-          </a:prstGeom>
-          <a:noFill/>
-        </p:spPr>
-        <p:txBody>
-          <a:bodyPr wrap="square">
-            <a:spAutoFit/>
-          </a:bodyPr>
-          <a:lstStyle/>
-          <a:p>
-            <a:pPr>
-              <a:spcAft>
-                <a:spcPts val="800"/>
-              </a:spcAft>
-              <a:defRPr sz="2000" b="0">
+          <p:cNvPr id="4" name="Rounded Rectangle 3"/>
+          <p:cNvSpPr/>
+          <p:nvPr/>
+        </p:nvSpPr>
+        <p:spPr>
+          <a:xfrm>
+            <a:off x="548640" y="1325880"/>
+            <a:ext cx="11064240" cy="1325880"/>
+          </a:xfrm>
+          <a:prstGeom prst="roundRect">
+            <a:avLst/>
+          </a:prstGeom>
+          <a:solidFill>
+            <a:srgbClr val="E8EAED"/>
+          </a:solidFill>
+          <a:ln>
+            <a:noFill/>
+          </a:ln>
+        </p:spPr>
+        <p:style>
+          <a:lnRef idx="1">
+            <a:schemeClr val="accent1"/>
+          </a:lnRef>
+          <a:fillRef idx="3">
+            <a:schemeClr val="accent1"/>
+          </a:fillRef>
+          <a:effectRef idx="2">
+            <a:schemeClr val="accent1"/>
+          </a:effectRef>
+          <a:fontRef idx="minor">
+            <a:schemeClr val="lt1"/>
+          </a:fontRef>
+        </p:style>
+        <p:txBody>
+          <a:bodyPr rtlCol="0" anchor="ctr" wrap="square" lIns="274320" rIns="274320" tIns="91440"/>
+          <a:lstStyle/>
+          <a:p>
+            <a:pPr algn="ctr"/>
+            <a:r>
+              <a:rPr sz="1500" b="1">
+                <a:solidFill>
+                  <a:srgbClr val="1F2A4E"/>
+                </a:solidFill>
+              </a:rPr>
+              <a:t>F1 macro</a:t>
+            </a:r>
+            <a:r>
+              <a:rPr sz="1300">
                 <a:solidFill>
                   <a:srgbClr val="3D424E"/>
                 </a:solidFill>
-              </a:defRPr>
-            </a:pPr>
-            <a:r>
-              <a:t>Etapa 1 — Treinar um classificador de tom de pele (MST)</a:t>
-            </a:r>
-          </a:p>
-          <a:p>
-            <a:pPr lvl="1">
-              <a:spcAft>
-                <a:spcPts val="800"/>
-              </a:spcAft>
-              <a:defRPr sz="1700">
+              </a:rPr>
+              <a:t>  —  Média das pontuações nas 7 raças, tratando todas igualmente</a:t>
+            </a:r>
+          </a:p>
+          <a:p>
+            <a:pPr>
+              <a:defRPr sz="1100" i="1">
                 <a:solidFill>
                   <a:srgbClr val="707682"/>
                 </a:solidFill>
               </a:defRPr>
             </a:pPr>
             <a:r>
-              <a:t>Dados: MST-E (Schumann 2023) + Casual Conversations (Meta 2021)</a:t>
-            </a:r>
-          </a:p>
-          <a:p>
-            <a:pPr>
-              <a:spcAft>
-                <a:spcPts val="800"/>
-              </a:spcAft>
-              <a:defRPr sz="2000" b="0">
+              <a:t>Referência: van Rijsbergen 1979 (Information Retrieval)</a:t>
+            </a:r>
+          </a:p>
+          <a:p>
+            <a:pPr>
+              <a:defRPr sz="1200">
                 <a:solidFill>
                   <a:srgbClr val="3D424E"/>
                 </a:solidFill>
               </a:defRPr>
             </a:pPr>
             <a:r>
-              <a:t>Etapa 2 — Auditar o FairFace: como tom de pele se distribui entre as 7 raças?</a:t>
-            </a:r>
-          </a:p>
-          <a:p>
-            <a:pPr lvl="1">
-              <a:spcAft>
-                <a:spcPts val="800"/>
-              </a:spcAft>
-              <a:defRPr sz="1700">
+              <a:t>Quanto maior, melhor. SOTA atual = 75% (FaceScanPaliGemma).</a:t>
+            </a:r>
+          </a:p>
+        </p:txBody>
+      </p:sp>
+      <p:sp>
+        <p:nvSpPr>
+          <p:cNvPr id="5" name="Rounded Rectangle 4"/>
+          <p:cNvSpPr/>
+          <p:nvPr/>
+        </p:nvSpPr>
+        <p:spPr>
+          <a:xfrm>
+            <a:off x="548640" y="2788920"/>
+            <a:ext cx="11064240" cy="1325880"/>
+          </a:xfrm>
+          <a:prstGeom prst="roundRect">
+            <a:avLst/>
+          </a:prstGeom>
+          <a:solidFill>
+            <a:srgbClr val="E8EAED"/>
+          </a:solidFill>
+          <a:ln>
+            <a:noFill/>
+          </a:ln>
+        </p:spPr>
+        <p:style>
+          <a:lnRef idx="1">
+            <a:schemeClr val="accent1"/>
+          </a:lnRef>
+          <a:fillRef idx="3">
+            <a:schemeClr val="accent1"/>
+          </a:fillRef>
+          <a:effectRef idx="2">
+            <a:schemeClr val="accent1"/>
+          </a:effectRef>
+          <a:fontRef idx="minor">
+            <a:schemeClr val="lt1"/>
+          </a:fontRef>
+        </p:style>
+        <p:txBody>
+          <a:bodyPr rtlCol="0" anchor="ctr" wrap="square" lIns="274320" rIns="274320" tIns="91440"/>
+          <a:lstStyle/>
+          <a:p>
+            <a:pPr algn="ctr"/>
+            <a:r>
+              <a:rPr sz="1500" b="1">
+                <a:solidFill>
+                  <a:srgbClr val="1F2A4E"/>
+                </a:solidFill>
+              </a:rPr>
+              <a:t>DR (Disparity Ratio)</a:t>
+            </a:r>
+            <a:r>
+              <a:rPr sz="1300">
+                <a:solidFill>
+                  <a:srgbClr val="3D424E"/>
+                </a:solidFill>
+              </a:rPr>
+              <a:t>  —  Razão entre a melhor e a pior raça</a:t>
+            </a:r>
+          </a:p>
+          <a:p>
+            <a:pPr>
+              <a:defRPr sz="1100" i="1">
                 <a:solidFill>
                   <a:srgbClr val="707682"/>
                 </a:solidFill>
               </a:defRPr>
             </a:pPr>
             <a:r>
-              <a:t>Aplicar o classificador MST sobre 10.954 imagens; validar manualmente um subset</a:t>
-            </a:r>
-          </a:p>
-          <a:p>
-            <a:pPr>
-              <a:spcAft>
-                <a:spcPts val="800"/>
-              </a:spcAft>
-              <a:defRPr sz="2000" b="0">
+              <a:t>Referência: Hardt, Price &amp; Srebro 2016 (NeurIPS) — Equal Opportunity</a:t>
+            </a:r>
+          </a:p>
+          <a:p>
+            <a:pPr>
+              <a:defRPr sz="1200">
                 <a:solidFill>
                   <a:srgbClr val="3D424E"/>
                 </a:solidFill>
               </a:defRPr>
             </a:pPr>
             <a:r>
-              <a:t>Etapa 3 — Treinar o classificador de raça USANDO tom de pele como contexto (via FiLM)</a:t>
-            </a:r>
-          </a:p>
-          <a:p>
-            <a:pPr lvl="1">
-              <a:spcAft>
-                <a:spcPts val="800"/>
-              </a:spcAft>
-              <a:defRPr sz="1700">
+              <a:t>Mais perto de 1.0 = mais justo. Latinx vs Black atual = 60%/90% = 0.67.</a:t>
+            </a:r>
+          </a:p>
+        </p:txBody>
+      </p:sp>
+      <p:sp>
+        <p:nvSpPr>
+          <p:cNvPr id="6" name="Rounded Rectangle 5"/>
+          <p:cNvSpPr/>
+          <p:nvPr/>
+        </p:nvSpPr>
+        <p:spPr>
+          <a:xfrm>
+            <a:off x="548640" y="4251960"/>
+            <a:ext cx="11064240" cy="1325880"/>
+          </a:xfrm>
+          <a:prstGeom prst="roundRect">
+            <a:avLst/>
+          </a:prstGeom>
+          <a:solidFill>
+            <a:srgbClr val="E8EAED"/>
+          </a:solidFill>
+          <a:ln>
+            <a:noFill/>
+          </a:ln>
+        </p:spPr>
+        <p:style>
+          <a:lnRef idx="1">
+            <a:schemeClr val="accent1"/>
+          </a:lnRef>
+          <a:fillRef idx="3">
+            <a:schemeClr val="accent1"/>
+          </a:fillRef>
+          <a:effectRef idx="2">
+            <a:schemeClr val="accent1"/>
+          </a:effectRef>
+          <a:fontRef idx="minor">
+            <a:schemeClr val="lt1"/>
+          </a:fontRef>
+        </p:style>
+        <p:txBody>
+          <a:bodyPr rtlCol="0" anchor="ctr" wrap="square" lIns="274320" rIns="274320" tIns="91440"/>
+          <a:lstStyle/>
+          <a:p>
+            <a:pPr algn="ctr"/>
+            <a:r>
+              <a:rPr sz="1500" b="1">
+                <a:solidFill>
+                  <a:srgbClr val="1F2A4E"/>
+                </a:solidFill>
+              </a:rPr>
+              <a:t>Worst-class F1</a:t>
+            </a:r>
+            <a:r>
+              <a:rPr sz="1300">
+                <a:solidFill>
+                  <a:srgbClr val="3D424E"/>
+                </a:solidFill>
+              </a:rPr>
+              <a:t>  —  Pontuação na raça em que o modelo se sai pior</a:t>
+            </a:r>
+          </a:p>
+          <a:p>
+            <a:pPr>
+              <a:defRPr sz="1100" i="1">
                 <a:solidFill>
                   <a:srgbClr val="707682"/>
                 </a:solidFill>
               </a:defRPr>
             </a:pPr>
             <a:r>
-              <a:t>Backbone: ConvNeXt-T (rede moderna, 28 milhões de parâmetros — leve)</a:t>
-            </a:r>
-          </a:p>
-          <a:p>
-            <a:pPr>
-              <a:spcAft>
-                <a:spcPts val="800"/>
-              </a:spcAft>
-              <a:defRPr sz="2000" b="0">
+              <a:t>Referência: Sagawa et al. 2020 (ICLR) — Group DRO. Métrica = min_g F1(g)</a:t>
+            </a:r>
+          </a:p>
+          <a:p>
+            <a:pPr>
+              <a:defRPr sz="1200">
                 <a:solidFill>
                   <a:srgbClr val="3D424E"/>
                 </a:solidFill>
               </a:defRPr>
             </a:pPr>
             <a:r>
-              <a:t>Etapa 4 — Comparar fairness: COM tom de pele vs SEM</a:t>
-            </a:r>
-          </a:p>
-          <a:p>
-            <a:pPr lvl="1">
-              <a:spcAft>
-                <a:spcPts val="800"/>
-              </a:spcAft>
-              <a:defRPr sz="1700">
-                <a:solidFill>
-                  <a:srgbClr val="707682"/>
-                </a:solidFill>
-              </a:defRPr>
-            </a:pPr>
-            <a:r>
-              <a:t>Baselines: ConvNeXt-T puro, FSCL+, Group DRO, Adversarial debiasing</a:t>
-            </a:r>
-          </a:p>
-          <a:p>
-            <a:pPr>
-              <a:spcAft>
-                <a:spcPts val="800"/>
-              </a:spcAft>
-              <a:defRPr sz="2000" b="0">
+              <a:t>Atualmente = 60% (Latinx). Quanto maior, melhor o pior caso.</a:t>
+            </a:r>
+          </a:p>
+        </p:txBody>
+      </p:sp>
+      <p:sp>
+        <p:nvSpPr>
+          <p:cNvPr id="7" name="Rounded Rectangle 6"/>
+          <p:cNvSpPr/>
+          <p:nvPr/>
+        </p:nvSpPr>
+        <p:spPr>
+          <a:xfrm>
+            <a:off x="548640" y="5715000"/>
+            <a:ext cx="11064240" cy="868680"/>
+          </a:xfrm>
+          <a:prstGeom prst="roundRect">
+            <a:avLst/>
+          </a:prstGeom>
+          <a:solidFill>
+            <a:srgbClr val="FFFFFF"/>
+          </a:solidFill>
+          <a:ln w="19050">
+            <a:solidFill>
+              <a:srgbClr val="C0392B"/>
+            </a:solidFill>
+          </a:ln>
+        </p:spPr>
+        <p:style>
+          <a:lnRef idx="1">
+            <a:schemeClr val="accent1"/>
+          </a:lnRef>
+          <a:fillRef idx="3">
+            <a:schemeClr val="accent1"/>
+          </a:fillRef>
+          <a:effectRef idx="2">
+            <a:schemeClr val="accent1"/>
+          </a:effectRef>
+          <a:fontRef idx="minor">
+            <a:schemeClr val="lt1"/>
+          </a:fontRef>
+        </p:style>
+        <p:txBody>
+          <a:bodyPr rtlCol="0" anchor="ctr" wrap="square" lIns="274320" rIns="274320" tIns="91440"/>
+          <a:lstStyle/>
+          <a:p>
+            <a:pPr algn="ctr"/>
+            <a:r>
+              <a:rPr sz="1300" b="1">
+                <a:solidFill>
+                  <a:srgbClr val="C0392B"/>
+                </a:solidFill>
+              </a:rPr>
+              <a:t>Por que 3 métricas e não uma?</a:t>
+            </a:r>
+          </a:p>
+          <a:p>
+            <a:pPr>
+              <a:defRPr sz="1200">
                 <a:solidFill>
                   <a:srgbClr val="3D424E"/>
                 </a:solidFill>
               </a:defRPr>
             </a:pPr>
             <a:r>
-              <a:t>Etapa 5 — Aplicar pipeline idêntico em reconhecimento facial (RFW ou BFW)</a:t>
-            </a:r>
-          </a:p>
-          <a:p>
-            <a:pPr lvl="1">
-              <a:spcAft>
-                <a:spcPts val="800"/>
-              </a:spcAft>
-              <a:defRPr sz="1700">
-                <a:solidFill>
-                  <a:srgbClr val="707682"/>
-                </a:solidFill>
-              </a:defRPr>
-            </a:pPr>
-            <a:r>
-              <a:t>Verificar transferência da propriedade fair</a:t>
-            </a:r>
-          </a:p>
-          <a:p>
-            <a:pPr>
-              <a:spcAft>
-                <a:spcPts val="800"/>
-              </a:spcAft>
-              <a:defRPr sz="2000" b="0">
-                <a:solidFill>
-                  <a:srgbClr val="3D424E"/>
-                </a:solidFill>
-              </a:defRPr>
-            </a:pPr>
-            <a:r>
-              <a:t>Etapa 6 — Medir se Black/African melhora especificamente</a:t>
-            </a:r>
-          </a:p>
-          <a:p>
-            <a:pPr lvl="1">
-              <a:spcAft>
-                <a:spcPts val="800"/>
-              </a:spcAft>
-              <a:defRPr sz="1700">
-                <a:solidFill>
-                  <a:srgbClr val="707682"/>
-                </a:solidFill>
-              </a:defRPr>
-            </a:pPr>
-            <a:r>
-              <a:t>Métrica: TAR @ FAR fixo por raça</a:t>
-            </a:r>
-          </a:p>
-        </p:txBody>
-      </p:sp>
-      <p:sp>
-        <p:nvSpPr>
-          <p:cNvPr id="5" name="TextBox 4"/>
-          <p:cNvSpPr txBox="1"/>
-          <p:nvPr/>
-        </p:nvSpPr>
-        <p:spPr>
-          <a:xfrm>
-            <a:off x="457200" y="6400800"/>
-            <a:ext cx="11430000" cy="365760"/>
-          </a:xfrm>
-          <a:prstGeom prst="rect">
-            <a:avLst/>
-          </a:prstGeom>
-          <a:noFill/>
-        </p:spPr>
-        <p:txBody>
-          <a:bodyPr wrap="none">
-            <a:spAutoFit/>
-          </a:bodyPr>
-          <a:lstStyle/>
-          <a:p>
-            <a:pPr>
-              <a:defRPr sz="1500" i="1">
-                <a:solidFill>
-                  <a:srgbClr val="707682"/>
-                </a:solidFill>
-              </a:defRPr>
-            </a:pPr>
-            <a:r>
-              <a:t>Etapas 1, 4 e 5 reforçadas pela Rodada 6 (SkinToneNet, Adversarial debiasing, fair transfer empírico)</a:t>
+              <a:t>Teorema da impossibilidade (Kleinberg, Mullainathan &amp; Raghavan 2017, ITCS): não existe métrica única de fairness — reportar as 3 simultaneamente é a forma honesta de comunicar trade-offs.</a:t>
             </a:r>
           </a:p>
         </p:txBody>
@@ -5743,600 +6237,6 @@
 </file>
 
 <file path=ppt/slides/slide19.xml><?xml version="1.0" encoding="utf-8"?>
-<p:sld xmlns:a="http://schemas.openxmlformats.org/drawingml/2006/main" xmlns:p="http://schemas.openxmlformats.org/presentationml/2006/main" xmlns:r="http://schemas.openxmlformats.org/officeDocument/2006/relationships">
-  <p:cSld>
-    <p:spTree>
-      <p:nvGrpSpPr>
-        <p:cNvPr id="1" name=""/>
-        <p:cNvGrpSpPr/>
-        <p:nvPr/>
-      </p:nvGrpSpPr>
-      <p:grpSpPr/>
-      <p:sp>
-        <p:nvSpPr>
-          <p:cNvPr id="2" name="TextBox 1"/>
-          <p:cNvSpPr txBox="1"/>
-          <p:nvPr/>
-        </p:nvSpPr>
-        <p:spPr>
-          <a:xfrm>
-            <a:off x="457200" y="365760"/>
-            <a:ext cx="11430000" cy="822960"/>
-          </a:xfrm>
-          <a:prstGeom prst="rect">
-            <a:avLst/>
-          </a:prstGeom>
-          <a:noFill/>
-        </p:spPr>
-        <p:txBody>
-          <a:bodyPr wrap="square">
-            <a:spAutoFit/>
-          </a:bodyPr>
-          <a:lstStyle/>
-          <a:p>
-            <a:pPr>
-              <a:defRPr sz="3000" b="1">
-                <a:solidFill>
-                  <a:srgbClr val="1F2A4E"/>
-                </a:solidFill>
-              </a:defRPr>
-            </a:pPr>
-            <a:r>
-              <a:t>As métricas que vamos reportar — todas públicas e estabelecidas</a:t>
-            </a:r>
-          </a:p>
-        </p:txBody>
-      </p:sp>
-      <p:sp>
-        <p:nvSpPr>
-          <p:cNvPr id="3" name="Rectangle 2"/>
-          <p:cNvSpPr/>
-          <p:nvPr/>
-        </p:nvSpPr>
-        <p:spPr>
-          <a:xfrm>
-            <a:off x="457200" y="1143000"/>
-            <a:ext cx="11430000" cy="45720"/>
-          </a:xfrm>
-          <a:prstGeom prst="rect">
-            <a:avLst/>
-          </a:prstGeom>
-          <a:solidFill>
-            <a:srgbClr val="1F2A4E"/>
-          </a:solidFill>
-          <a:ln>
-            <a:noFill/>
-          </a:ln>
-        </p:spPr>
-        <p:style>
-          <a:lnRef idx="1">
-            <a:schemeClr val="accent1"/>
-          </a:lnRef>
-          <a:fillRef idx="3">
-            <a:schemeClr val="accent1"/>
-          </a:fillRef>
-          <a:effectRef idx="2">
-            <a:schemeClr val="accent1"/>
-          </a:effectRef>
-          <a:fontRef idx="minor">
-            <a:schemeClr val="lt1"/>
-          </a:fontRef>
-        </p:style>
-        <p:txBody>
-          <a:bodyPr rtlCol="0" anchor="ctr"/>
-          <a:lstStyle/>
-          <a:p>
-            <a:pPr algn="ctr"/>
-          </a:p>
-        </p:txBody>
-      </p:sp>
-      <p:sp>
-        <p:nvSpPr>
-          <p:cNvPr id="4" name="TextBox 3"/>
-          <p:cNvSpPr txBox="1"/>
-          <p:nvPr/>
-        </p:nvSpPr>
-        <p:spPr>
-          <a:xfrm>
-            <a:off x="548640" y="1371600"/>
-            <a:ext cx="11247120" cy="4937760"/>
-          </a:xfrm>
-          <a:prstGeom prst="rect">
-            <a:avLst/>
-          </a:prstGeom>
-          <a:noFill/>
-        </p:spPr>
-        <p:txBody>
-          <a:bodyPr wrap="square">
-            <a:spAutoFit/>
-          </a:bodyPr>
-          <a:lstStyle/>
-          <a:p>
-            <a:pPr>
-              <a:spcAft>
-                <a:spcPts val="800"/>
-              </a:spcAft>
-              <a:defRPr sz="2000" b="0">
-                <a:solidFill>
-                  <a:srgbClr val="3D424E"/>
-                </a:solidFill>
-              </a:defRPr>
-            </a:pPr>
-            <a:r>
-              <a:t>F1 macro — média das pontuações nas 7 raças, tratando todas igualmente</a:t>
-            </a:r>
-          </a:p>
-          <a:p>
-            <a:pPr lvl="1">
-              <a:spcAft>
-                <a:spcPts val="800"/>
-              </a:spcAft>
-              <a:defRPr sz="1700">
-                <a:solidFill>
-                  <a:srgbClr val="707682"/>
-                </a:solidFill>
-              </a:defRPr>
-            </a:pPr>
-            <a:r>
-              <a:t>Referência: van Rijsbergen 1979 (livro Information Retrieval). Implementação: sklearn.metrics.f1_score(average='macro').</a:t>
-            </a:r>
-          </a:p>
-          <a:p>
-            <a:pPr lvl="1">
-              <a:spcAft>
-                <a:spcPts val="800"/>
-              </a:spcAft>
-              <a:defRPr sz="1700">
-                <a:solidFill>
-                  <a:srgbClr val="707682"/>
-                </a:solidFill>
-              </a:defRPr>
-            </a:pPr>
-            <a:r>
-              <a:t>Quanto maior, melhor. SOTA atual = 75% (FaceScanPaliGemma).</a:t>
-            </a:r>
-          </a:p>
-          <a:p>
-            <a:pPr>
-              <a:spcAft>
-                <a:spcPts val="800"/>
-              </a:spcAft>
-              <a:defRPr sz="2000" b="0">
-                <a:solidFill>
-                  <a:srgbClr val="3D424E"/>
-                </a:solidFill>
-              </a:defRPr>
-            </a:pPr>
-          </a:p>
-          <a:p>
-            <a:pPr>
-              <a:spcAft>
-                <a:spcPts val="800"/>
-              </a:spcAft>
-              <a:defRPr sz="2000" b="0">
-                <a:solidFill>
-                  <a:srgbClr val="3D424E"/>
-                </a:solidFill>
-              </a:defRPr>
-            </a:pPr>
-            <a:r>
-              <a:t>DR (Disparity Ratio) — razão entre a melhor e a pior raça</a:t>
-            </a:r>
-          </a:p>
-          <a:p>
-            <a:pPr lvl="1">
-              <a:spcAft>
-                <a:spcPts val="800"/>
-              </a:spcAft>
-              <a:defRPr sz="1700">
-                <a:solidFill>
-                  <a:srgbClr val="707682"/>
-                </a:solidFill>
-              </a:defRPr>
-            </a:pPr>
-            <a:r>
-              <a:t>Referência: Hardt, Price &amp; Srebro 2016 (NeurIPS) — Equal Opportunity / Equalized Odds.</a:t>
-            </a:r>
-          </a:p>
-          <a:p>
-            <a:pPr lvl="1">
-              <a:spcAft>
-                <a:spcPts val="800"/>
-              </a:spcAft>
-              <a:defRPr sz="1700">
-                <a:solidFill>
-                  <a:srgbClr val="707682"/>
-                </a:solidFill>
-              </a:defRPr>
-            </a:pPr>
-            <a:r>
-              <a:t>Quanto mais perto de 1.0, mais justo. Latinx vs Black atualmente = 60% / 90% = 0.67.</a:t>
-            </a:r>
-          </a:p>
-          <a:p>
-            <a:pPr>
-              <a:spcAft>
-                <a:spcPts val="800"/>
-              </a:spcAft>
-              <a:defRPr sz="2000" b="0">
-                <a:solidFill>
-                  <a:srgbClr val="3D424E"/>
-                </a:solidFill>
-              </a:defRPr>
-            </a:pPr>
-          </a:p>
-          <a:p>
-            <a:pPr>
-              <a:spcAft>
-                <a:spcPts val="800"/>
-              </a:spcAft>
-              <a:defRPr sz="2000" b="0">
-                <a:solidFill>
-                  <a:srgbClr val="3D424E"/>
-                </a:solidFill>
-              </a:defRPr>
-            </a:pPr>
-            <a:r>
-              <a:t>Worst-class F1 — pontuação na raça em que o modelo se sai pior</a:t>
-            </a:r>
-          </a:p>
-          <a:p>
-            <a:pPr lvl="1">
-              <a:spcAft>
-                <a:spcPts val="800"/>
-              </a:spcAft>
-              <a:defRPr sz="1700">
-                <a:solidFill>
-                  <a:srgbClr val="707682"/>
-                </a:solidFill>
-              </a:defRPr>
-            </a:pPr>
-            <a:r>
-              <a:t>Referência: Sagawa et al. 2020 (ICLR) — Group DRO. Métrica = min_g F1(g).</a:t>
-            </a:r>
-          </a:p>
-          <a:p>
-            <a:pPr lvl="1">
-              <a:spcAft>
-                <a:spcPts val="800"/>
-              </a:spcAft>
-              <a:defRPr sz="1700">
-                <a:solidFill>
-                  <a:srgbClr val="707682"/>
-                </a:solidFill>
-              </a:defRPr>
-            </a:pPr>
-            <a:r>
-              <a:t>Atualmente = 60% (Latinx). Quanto maior, melhor o pior caso.</a:t>
-            </a:r>
-          </a:p>
-          <a:p>
-            <a:pPr>
-              <a:spcAft>
-                <a:spcPts val="800"/>
-              </a:spcAft>
-              <a:defRPr sz="2000" b="0">
-                <a:solidFill>
-                  <a:srgbClr val="3D424E"/>
-                </a:solidFill>
-              </a:defRPr>
-            </a:pPr>
-          </a:p>
-          <a:p>
-            <a:pPr>
-              <a:spcAft>
-                <a:spcPts val="800"/>
-              </a:spcAft>
-              <a:defRPr sz="2000" b="0">
-                <a:solidFill>
-                  <a:srgbClr val="3D424E"/>
-                </a:solidFill>
-              </a:defRPr>
-            </a:pPr>
-            <a:r>
-              <a:t>Por que 3 métricas e não uma?</a:t>
-            </a:r>
-          </a:p>
-          <a:p>
-            <a:pPr lvl="1">
-              <a:spcAft>
-                <a:spcPts val="800"/>
-              </a:spcAft>
-              <a:defRPr sz="1700">
-                <a:solidFill>
-                  <a:srgbClr val="707682"/>
-                </a:solidFill>
-              </a:defRPr>
-            </a:pPr>
-            <a:r>
-              <a:t>Teorema da impossibilidade (Kleinberg, Mullainathan &amp; Raghavan 2017, ITCS): não existe métrica única de fairness — reportar as 3 é forma honesta de comunicar trade-offs.</a:t>
-            </a:r>
-          </a:p>
-        </p:txBody>
-      </p:sp>
-      <p:sp>
-        <p:nvSpPr>
-          <p:cNvPr id="5" name="TextBox 4"/>
-          <p:cNvSpPr txBox="1"/>
-          <p:nvPr/>
-        </p:nvSpPr>
-        <p:spPr>
-          <a:xfrm>
-            <a:off x="457200" y="6400800"/>
-            <a:ext cx="11430000" cy="365760"/>
-          </a:xfrm>
-          <a:prstGeom prst="rect">
-            <a:avLst/>
-          </a:prstGeom>
-          <a:noFill/>
-        </p:spPr>
-        <p:txBody>
-          <a:bodyPr wrap="none">
-            <a:spAutoFit/>
-          </a:bodyPr>
-          <a:lstStyle/>
-          <a:p>
-            <a:pPr>
-              <a:defRPr sz="1500" i="1">
-                <a:solidFill>
-                  <a:srgbClr val="707682"/>
-                </a:solidFill>
-              </a:defRPr>
-            </a:pPr>
-            <a:r>
-              <a:t>Todas as 3 métricas + teorema da impossibilidade já têm ficha catalogada no corpus</a:t>
-            </a:r>
-          </a:p>
-        </p:txBody>
-      </p:sp>
-    </p:spTree>
-  </p:cSld>
-  <p:clrMapOvr>
-    <a:masterClrMapping/>
-  </p:clrMapOvr>
-</p:sld>
-</file>
-
-<file path=ppt/slides/slide2.xml><?xml version="1.0" encoding="utf-8"?>
-<p:sld xmlns:a="http://schemas.openxmlformats.org/drawingml/2006/main" xmlns:p="http://schemas.openxmlformats.org/presentationml/2006/main" xmlns:r="http://schemas.openxmlformats.org/officeDocument/2006/relationships">
-  <p:cSld>
-    <p:spTree>
-      <p:nvGrpSpPr>
-        <p:cNvPr id="1" name=""/>
-        <p:cNvGrpSpPr/>
-        <p:nvPr/>
-      </p:nvGrpSpPr>
-      <p:grpSpPr/>
-      <p:sp>
-        <p:nvSpPr>
-          <p:cNvPr id="2" name="TextBox 1"/>
-          <p:cNvSpPr txBox="1"/>
-          <p:nvPr/>
-        </p:nvSpPr>
-        <p:spPr>
-          <a:xfrm>
-            <a:off x="457200" y="365760"/>
-            <a:ext cx="11430000" cy="822960"/>
-          </a:xfrm>
-          <a:prstGeom prst="rect">
-            <a:avLst/>
-          </a:prstGeom>
-          <a:noFill/>
-        </p:spPr>
-        <p:txBody>
-          <a:bodyPr wrap="square">
-            <a:spAutoFit/>
-          </a:bodyPr>
-          <a:lstStyle/>
-          <a:p>
-            <a:pPr>
-              <a:defRPr sz="3000" b="1">
-                <a:solidFill>
-                  <a:srgbClr val="1F2A4E"/>
-                </a:solidFill>
-              </a:defRPr>
-            </a:pPr>
-            <a:r>
-              <a:t>Principais alinhamentos e decisões</a:t>
-            </a:r>
-          </a:p>
-        </p:txBody>
-      </p:sp>
-      <p:sp>
-        <p:nvSpPr>
-          <p:cNvPr id="3" name="Rectangle 2"/>
-          <p:cNvSpPr/>
-          <p:nvPr/>
-        </p:nvSpPr>
-        <p:spPr>
-          <a:xfrm>
-            <a:off x="457200" y="1143000"/>
-            <a:ext cx="11430000" cy="45720"/>
-          </a:xfrm>
-          <a:prstGeom prst="rect">
-            <a:avLst/>
-          </a:prstGeom>
-          <a:solidFill>
-            <a:srgbClr val="1F2A4E"/>
-          </a:solidFill>
-          <a:ln>
-            <a:noFill/>
-          </a:ln>
-        </p:spPr>
-        <p:style>
-          <a:lnRef idx="1">
-            <a:schemeClr val="accent1"/>
-          </a:lnRef>
-          <a:fillRef idx="3">
-            <a:schemeClr val="accent1"/>
-          </a:fillRef>
-          <a:effectRef idx="2">
-            <a:schemeClr val="accent1"/>
-          </a:effectRef>
-          <a:fontRef idx="minor">
-            <a:schemeClr val="lt1"/>
-          </a:fontRef>
-        </p:style>
-        <p:txBody>
-          <a:bodyPr rtlCol="0" anchor="ctr"/>
-          <a:lstStyle/>
-          <a:p>
-            <a:pPr algn="ctr"/>
-          </a:p>
-        </p:txBody>
-      </p:sp>
-      <p:sp>
-        <p:nvSpPr>
-          <p:cNvPr id="4" name="TextBox 3"/>
-          <p:cNvSpPr txBox="1"/>
-          <p:nvPr/>
-        </p:nvSpPr>
-        <p:spPr>
-          <a:xfrm>
-            <a:off x="548640" y="1371600"/>
-            <a:ext cx="11247120" cy="4937760"/>
-          </a:xfrm>
-          <a:prstGeom prst="rect">
-            <a:avLst/>
-          </a:prstGeom>
-          <a:noFill/>
-        </p:spPr>
-        <p:txBody>
-          <a:bodyPr wrap="square">
-            <a:spAutoFit/>
-          </a:bodyPr>
-          <a:lstStyle/>
-          <a:p>
-            <a:pPr>
-              <a:spcAft>
-                <a:spcPts val="800"/>
-              </a:spcAft>
-              <a:defRPr sz="2000" b="0">
-                <a:solidFill>
-                  <a:srgbClr val="3D424E"/>
-                </a:solidFill>
-              </a:defRPr>
-            </a:pPr>
-            <a:r>
-              <a:t>Parte 1 — Onde paramos na última reunião</a:t>
-            </a:r>
-          </a:p>
-          <a:p>
-            <a:pPr lvl="1">
-              <a:spcAft>
-                <a:spcPts val="800"/>
-              </a:spcAft>
-              <a:defRPr sz="1700">
-                <a:solidFill>
-                  <a:srgbClr val="707682"/>
-                </a:solidFill>
-              </a:defRPr>
-            </a:pPr>
-            <a:r>
-              <a:t>Recap da última reunião e orientações</a:t>
-            </a:r>
-          </a:p>
-          <a:p>
-            <a:pPr>
-              <a:spcAft>
-                <a:spcPts val="800"/>
-              </a:spcAft>
-              <a:defRPr sz="2000" b="0">
-                <a:solidFill>
-                  <a:srgbClr val="3D424E"/>
-                </a:solidFill>
-              </a:defRPr>
-            </a:pPr>
-            <a:r>
-              <a:t>Parte 2 — O que avancei nesta semana</a:t>
-            </a:r>
-          </a:p>
-          <a:p>
-            <a:pPr lvl="1">
-              <a:spcAft>
-                <a:spcPts val="800"/>
-              </a:spcAft>
-              <a:defRPr sz="1700">
-                <a:solidFill>
-                  <a:srgbClr val="707682"/>
-                </a:solidFill>
-              </a:defRPr>
-            </a:pPr>
-            <a:r>
-              <a:t>Resposta direta aos 4 pedidos: ampliar venues, revisar método, validar SOTA, reformular tese</a:t>
-            </a:r>
-          </a:p>
-          <a:p>
-            <a:pPr>
-              <a:spcAft>
-                <a:spcPts val="800"/>
-              </a:spcAft>
-              <a:defRPr sz="2000" b="0">
-                <a:solidFill>
-                  <a:srgbClr val="3D424E"/>
-                </a:solidFill>
-              </a:defRPr>
-            </a:pPr>
-            <a:r>
-              <a:t>Parte 3 — Como a tese está sendo construída agora</a:t>
-            </a:r>
-          </a:p>
-          <a:p>
-            <a:pPr lvl="1">
-              <a:spcAft>
-                <a:spcPts val="800"/>
-              </a:spcAft>
-              <a:defRPr sz="1700">
-                <a:solidFill>
-                  <a:srgbClr val="707682"/>
-                </a:solidFill>
-              </a:defRPr>
-            </a:pPr>
-            <a:r>
-              <a:t>Linguagem clara: cada conceito explicado antes de usar</a:t>
-            </a:r>
-          </a:p>
-          <a:p>
-            <a:pPr>
-              <a:spcAft>
-                <a:spcPts val="800"/>
-              </a:spcAft>
-              <a:defRPr sz="2000" b="0">
-                <a:solidFill>
-                  <a:srgbClr val="3D424E"/>
-                </a:solidFill>
-              </a:defRPr>
-            </a:pPr>
-            <a:r>
-              <a:t>Parte 4 — Próximos passos</a:t>
-            </a:r>
-          </a:p>
-          <a:p>
-            <a:pPr lvl="1">
-              <a:spcAft>
-                <a:spcPts val="800"/>
-              </a:spcAft>
-              <a:defRPr sz="1700">
-                <a:solidFill>
-                  <a:srgbClr val="707682"/>
-                </a:solidFill>
-              </a:defRPr>
-            </a:pPr>
-            <a:r>
-              <a:t>O que preciso decidir nesta reunião</a:t>
-            </a:r>
-          </a:p>
-        </p:txBody>
-      </p:sp>
-    </p:spTree>
-  </p:cSld>
-  <p:clrMapOvr>
-    <a:masterClrMapping/>
-  </p:clrMapOvr>
-</p:sld>
-</file>
-
-<file path=ppt/slides/slide20.xml><?xml version="1.0" encoding="utf-8"?>
 <p:sld xmlns:a="http://schemas.openxmlformats.org/drawingml/2006/main" xmlns:p="http://schemas.openxmlformats.org/presentationml/2006/main" xmlns:r="http://schemas.openxmlformats.org/officeDocument/2006/relationships">
   <p:cSld>
     <p:spTree>
@@ -6884,7 +6784,7 @@
 </p:sld>
 </file>
 
-<file path=ppt/slides/slide21.xml><?xml version="1.0" encoding="utf-8"?>
+<file path=ppt/slides/slide2.xml><?xml version="1.0" encoding="utf-8"?>
 <p:sld xmlns:a="http://schemas.openxmlformats.org/drawingml/2006/main" xmlns:p="http://schemas.openxmlformats.org/presentationml/2006/main" xmlns:r="http://schemas.openxmlformats.org/officeDocument/2006/relationships">
   <p:cSld>
     <p:spTree>
@@ -6896,14 +6796,49 @@
       <p:grpSpPr/>
       <p:sp>
         <p:nvSpPr>
-          <p:cNvPr id="2" name="Rectangle 1"/>
+          <p:cNvPr id="2" name="TextBox 1"/>
+          <p:cNvSpPr txBox="1"/>
+          <p:nvPr/>
+        </p:nvSpPr>
+        <p:spPr>
+          <a:xfrm>
+            <a:off x="457200" y="365760"/>
+            <a:ext cx="11430000" cy="822960"/>
+          </a:xfrm>
+          <a:prstGeom prst="rect">
+            <a:avLst/>
+          </a:prstGeom>
+          <a:noFill/>
+        </p:spPr>
+        <p:txBody>
+          <a:bodyPr wrap="square">
+            <a:spAutoFit/>
+          </a:bodyPr>
+          <a:lstStyle/>
+          <a:p>
+            <a:pPr>
+              <a:defRPr sz="3000" b="1">
+                <a:solidFill>
+                  <a:srgbClr val="1F2A4E"/>
+                </a:solidFill>
+              </a:defRPr>
+            </a:pPr>
+            <a:r>
+              <a:t>Principais alinhamentos e decisões</a:t>
+            </a:r>
+          </a:p>
+        </p:txBody>
+      </p:sp>
+      <p:sp>
+        <p:nvSpPr>
+          <p:cNvPr id="3" name="Rectangle 2"/>
           <p:cNvSpPr/>
           <p:nvPr/>
         </p:nvSpPr>
         <p:spPr>
           <a:xfrm>
-            <a:off x="0" y="0"/>
-            <a:ext cx="12191695" cy="6858000"/>
+            <a:off x="457200" y="1143000"/>
+            <a:ext cx="11430000" cy="45720"/>
           </a:xfrm>
           <a:prstGeom prst="rect">
             <a:avLst/>
@@ -6939,49 +6874,14 @@
       </p:sp>
       <p:sp>
         <p:nvSpPr>
-          <p:cNvPr id="3" name="TextBox 2"/>
-          <p:cNvSpPr txBox="1"/>
-          <p:nvPr/>
-        </p:nvSpPr>
-        <p:spPr>
-          <a:xfrm>
-            <a:off x="731520" y="1371600"/>
-            <a:ext cx="2743200" cy="2743200"/>
-          </a:xfrm>
-          <a:prstGeom prst="rect">
-            <a:avLst/>
-          </a:prstGeom>
-          <a:noFill/>
-        </p:spPr>
-        <p:txBody>
-          <a:bodyPr wrap="none">
-            <a:spAutoFit/>
-          </a:bodyPr>
-          <a:lstStyle/>
-          <a:p>
-            <a:pPr>
-              <a:defRPr sz="13000" b="1">
-                <a:solidFill>
-                  <a:srgbClr val="FFFFFF"/>
-                </a:solidFill>
-              </a:defRPr>
-            </a:pPr>
-            <a:r>
-              <a:t>4</a:t>
-            </a:r>
-          </a:p>
-        </p:txBody>
-      </p:sp>
-      <p:sp>
-        <p:nvSpPr>
           <p:cNvPr id="4" name="TextBox 3"/>
           <p:cNvSpPr txBox="1"/>
           <p:nvPr/>
         </p:nvSpPr>
         <p:spPr>
           <a:xfrm>
-            <a:off x="3931920" y="2286000"/>
-            <a:ext cx="7772400" cy="1828800"/>
+            <a:off x="548640" y="1371600"/>
+            <a:ext cx="11247120" cy="4937760"/>
           </a:xfrm>
           <a:prstGeom prst="rect">
             <a:avLst/>
@@ -6995,26 +6895,122 @@
           <a:lstStyle/>
           <a:p>
             <a:pPr>
-              <a:defRPr sz="3600" b="1">
-                <a:solidFill>
-                  <a:srgbClr val="FFFFFF"/>
-                </a:solidFill>
-              </a:defRPr>
-            </a:pPr>
-            <a:r>
-              <a:t>Próximos passos</a:t>
-            </a:r>
-          </a:p>
-          <a:p>
-            <a:pPr>
-              <a:defRPr sz="2000">
-                <a:solidFill>
-                  <a:srgbClr val="E8EAED"/>
-                </a:solidFill>
-              </a:defRPr>
-            </a:pPr>
-            <a:r>
-              <a:t>Plano experimental e calendário</a:t>
+              <a:spcAft>
+                <a:spcPts val="800"/>
+              </a:spcAft>
+              <a:defRPr sz="2000" b="0">
+                <a:solidFill>
+                  <a:srgbClr val="3D424E"/>
+                </a:solidFill>
+              </a:defRPr>
+            </a:pPr>
+            <a:r>
+              <a:t>Parte 1 — Onde paramos na última reunião</a:t>
+            </a:r>
+          </a:p>
+          <a:p>
+            <a:pPr lvl="1">
+              <a:spcAft>
+                <a:spcPts val="800"/>
+              </a:spcAft>
+              <a:defRPr sz="1700">
+                <a:solidFill>
+                  <a:srgbClr val="707682"/>
+                </a:solidFill>
+              </a:defRPr>
+            </a:pPr>
+            <a:r>
+              <a:t>Recap da última reunião e orientações</a:t>
+            </a:r>
+          </a:p>
+          <a:p>
+            <a:pPr>
+              <a:spcAft>
+                <a:spcPts val="800"/>
+              </a:spcAft>
+              <a:defRPr sz="2000" b="0">
+                <a:solidFill>
+                  <a:srgbClr val="3D424E"/>
+                </a:solidFill>
+              </a:defRPr>
+            </a:pPr>
+            <a:r>
+              <a:t>Parte 2 — O que avancei nesta semana</a:t>
+            </a:r>
+          </a:p>
+          <a:p>
+            <a:pPr lvl="1">
+              <a:spcAft>
+                <a:spcPts val="800"/>
+              </a:spcAft>
+              <a:defRPr sz="1700">
+                <a:solidFill>
+                  <a:srgbClr val="707682"/>
+                </a:solidFill>
+              </a:defRPr>
+            </a:pPr>
+            <a:r>
+              <a:t>Resposta direta aos 4 pedidos: ampliar venues, revisar método, validar SOTA, reformular tese</a:t>
+            </a:r>
+          </a:p>
+          <a:p>
+            <a:pPr>
+              <a:spcAft>
+                <a:spcPts val="800"/>
+              </a:spcAft>
+              <a:defRPr sz="2000" b="0">
+                <a:solidFill>
+                  <a:srgbClr val="3D424E"/>
+                </a:solidFill>
+              </a:defRPr>
+            </a:pPr>
+            <a:r>
+              <a:t>Parte 3 — Como a tese está sendo construída agora</a:t>
+            </a:r>
+          </a:p>
+          <a:p>
+            <a:pPr lvl="1">
+              <a:spcAft>
+                <a:spcPts val="800"/>
+              </a:spcAft>
+              <a:defRPr sz="1700">
+                <a:solidFill>
+                  <a:srgbClr val="707682"/>
+                </a:solidFill>
+              </a:defRPr>
+            </a:pPr>
+            <a:r>
+              <a:t>Linguagem clara: cada conceito explicado antes de usar</a:t>
+            </a:r>
+          </a:p>
+          <a:p>
+            <a:pPr>
+              <a:spcAft>
+                <a:spcPts val="800"/>
+              </a:spcAft>
+              <a:defRPr sz="2000" b="0">
+                <a:solidFill>
+                  <a:srgbClr val="3D424E"/>
+                </a:solidFill>
+              </a:defRPr>
+            </a:pPr>
+            <a:r>
+              <a:t>Parte 4 — Próximos passos</a:t>
+            </a:r>
+          </a:p>
+          <a:p>
+            <a:pPr lvl="1">
+              <a:spcAft>
+                <a:spcPts val="800"/>
+              </a:spcAft>
+              <a:defRPr sz="1700">
+                <a:solidFill>
+                  <a:srgbClr val="707682"/>
+                </a:solidFill>
+              </a:defRPr>
+            </a:pPr>
+            <a:r>
+              <a:t>O que preciso decidir nesta reunião</a:t>
             </a:r>
           </a:p>
         </p:txBody>
@@ -7027,7 +7023,150 @@
 </p:sld>
 </file>
 
-<file path=ppt/slides/slide22.xml><?xml version="1.0" encoding="utf-8"?>
+<file path=ppt/slides/slide20.xml><?xml version="1.0" encoding="utf-8"?>
+<p:sld xmlns:a="http://schemas.openxmlformats.org/drawingml/2006/main" xmlns:p="http://schemas.openxmlformats.org/presentationml/2006/main" xmlns:r="http://schemas.openxmlformats.org/officeDocument/2006/relationships">
+  <p:cSld>
+    <p:spTree>
+      <p:nvGrpSpPr>
+        <p:cNvPr id="1" name=""/>
+        <p:cNvGrpSpPr/>
+        <p:nvPr/>
+      </p:nvGrpSpPr>
+      <p:grpSpPr/>
+      <p:sp>
+        <p:nvSpPr>
+          <p:cNvPr id="2" name="Rectangle 1"/>
+          <p:cNvSpPr/>
+          <p:nvPr/>
+        </p:nvSpPr>
+        <p:spPr>
+          <a:xfrm>
+            <a:off x="0" y="0"/>
+            <a:ext cx="12191695" cy="6858000"/>
+          </a:xfrm>
+          <a:prstGeom prst="rect">
+            <a:avLst/>
+          </a:prstGeom>
+          <a:solidFill>
+            <a:srgbClr val="1F2A4E"/>
+          </a:solidFill>
+          <a:ln>
+            <a:noFill/>
+          </a:ln>
+        </p:spPr>
+        <p:style>
+          <a:lnRef idx="1">
+            <a:schemeClr val="accent1"/>
+          </a:lnRef>
+          <a:fillRef idx="3">
+            <a:schemeClr val="accent1"/>
+          </a:fillRef>
+          <a:effectRef idx="2">
+            <a:schemeClr val="accent1"/>
+          </a:effectRef>
+          <a:fontRef idx="minor">
+            <a:schemeClr val="lt1"/>
+          </a:fontRef>
+        </p:style>
+        <p:txBody>
+          <a:bodyPr rtlCol="0" anchor="ctr"/>
+          <a:lstStyle/>
+          <a:p>
+            <a:pPr algn="ctr"/>
+          </a:p>
+        </p:txBody>
+      </p:sp>
+      <p:sp>
+        <p:nvSpPr>
+          <p:cNvPr id="3" name="TextBox 2"/>
+          <p:cNvSpPr txBox="1"/>
+          <p:nvPr/>
+        </p:nvSpPr>
+        <p:spPr>
+          <a:xfrm>
+            <a:off x="731520" y="1371600"/>
+            <a:ext cx="2743200" cy="2743200"/>
+          </a:xfrm>
+          <a:prstGeom prst="rect">
+            <a:avLst/>
+          </a:prstGeom>
+          <a:noFill/>
+        </p:spPr>
+        <p:txBody>
+          <a:bodyPr wrap="none">
+            <a:spAutoFit/>
+          </a:bodyPr>
+          <a:lstStyle/>
+          <a:p>
+            <a:pPr>
+              <a:defRPr sz="13000" b="1">
+                <a:solidFill>
+                  <a:srgbClr val="FFFFFF"/>
+                </a:solidFill>
+              </a:defRPr>
+            </a:pPr>
+            <a:r>
+              <a:t>4</a:t>
+            </a:r>
+          </a:p>
+        </p:txBody>
+      </p:sp>
+      <p:sp>
+        <p:nvSpPr>
+          <p:cNvPr id="4" name="TextBox 3"/>
+          <p:cNvSpPr txBox="1"/>
+          <p:nvPr/>
+        </p:nvSpPr>
+        <p:spPr>
+          <a:xfrm>
+            <a:off x="3931920" y="2286000"/>
+            <a:ext cx="7772400" cy="1828800"/>
+          </a:xfrm>
+          <a:prstGeom prst="rect">
+            <a:avLst/>
+          </a:prstGeom>
+          <a:noFill/>
+        </p:spPr>
+        <p:txBody>
+          <a:bodyPr wrap="square">
+            <a:spAutoFit/>
+          </a:bodyPr>
+          <a:lstStyle/>
+          <a:p>
+            <a:pPr>
+              <a:defRPr sz="3600" b="1">
+                <a:solidFill>
+                  <a:srgbClr val="FFFFFF"/>
+                </a:solidFill>
+              </a:defRPr>
+            </a:pPr>
+            <a:r>
+              <a:t>Próximos passos</a:t>
+            </a:r>
+          </a:p>
+          <a:p>
+            <a:pPr>
+              <a:defRPr sz="2000">
+                <a:solidFill>
+                  <a:srgbClr val="E8EAED"/>
+                </a:solidFill>
+              </a:defRPr>
+            </a:pPr>
+            <a:r>
+              <a:t>Plano experimental e calendário</a:t>
+            </a:r>
+          </a:p>
+        </p:txBody>
+      </p:sp>
+    </p:spTree>
+  </p:cSld>
+  <p:clrMapOvr>
+    <a:masterClrMapping/>
+  </p:clrMapOvr>
+</p:sld>
+</file>
+
+<file path=ppt/slides/slide21.xml><?xml version="1.0" encoding="utf-8"?>
 <p:sld xmlns:a="http://schemas.openxmlformats.org/drawingml/2006/main" xmlns:p="http://schemas.openxmlformats.org/presentationml/2006/main" xmlns:r="http://schemas.openxmlformats.org/officeDocument/2006/relationships">
   <p:cSld>
     <p:spTree>
@@ -7800,6 +7939,329 @@
 </p:sld>
 </file>
 
+<file path=ppt/slides/slide22.xml><?xml version="1.0" encoding="utf-8"?>
+<p:sld xmlns:a="http://schemas.openxmlformats.org/drawingml/2006/main" xmlns:p="http://schemas.openxmlformats.org/presentationml/2006/main" xmlns:r="http://schemas.openxmlformats.org/officeDocument/2006/relationships">
+  <p:cSld>
+    <p:spTree>
+      <p:nvGrpSpPr>
+        <p:cNvPr id="1" name=""/>
+        <p:cNvGrpSpPr/>
+        <p:nvPr/>
+      </p:nvGrpSpPr>
+      <p:grpSpPr/>
+      <p:sp>
+        <p:nvSpPr>
+          <p:cNvPr id="2" name="TextBox 1"/>
+          <p:cNvSpPr txBox="1"/>
+          <p:nvPr/>
+        </p:nvSpPr>
+        <p:spPr>
+          <a:xfrm>
+            <a:off x="457200" y="365760"/>
+            <a:ext cx="11430000" cy="822960"/>
+          </a:xfrm>
+          <a:prstGeom prst="rect">
+            <a:avLst/>
+          </a:prstGeom>
+          <a:noFill/>
+        </p:spPr>
+        <p:txBody>
+          <a:bodyPr wrap="square">
+            <a:spAutoFit/>
+          </a:bodyPr>
+          <a:lstStyle/>
+          <a:p>
+            <a:pPr>
+              <a:defRPr sz="3000" b="1">
+                <a:solidFill>
+                  <a:srgbClr val="1F2A4E"/>
+                </a:solidFill>
+              </a:defRPr>
+            </a:pPr>
+            <a:r>
+              <a:t>Os 3 capítulos experimentais</a:t>
+            </a:r>
+          </a:p>
+        </p:txBody>
+      </p:sp>
+      <p:sp>
+        <p:nvSpPr>
+          <p:cNvPr id="3" name="Rectangle 2"/>
+          <p:cNvSpPr/>
+          <p:nvPr/>
+        </p:nvSpPr>
+        <p:spPr>
+          <a:xfrm>
+            <a:off x="457200" y="1143000"/>
+            <a:ext cx="11430000" cy="45720"/>
+          </a:xfrm>
+          <a:prstGeom prst="rect">
+            <a:avLst/>
+          </a:prstGeom>
+          <a:solidFill>
+            <a:srgbClr val="1F2A4E"/>
+          </a:solidFill>
+          <a:ln>
+            <a:noFill/>
+          </a:ln>
+        </p:spPr>
+        <p:style>
+          <a:lnRef idx="1">
+            <a:schemeClr val="accent1"/>
+          </a:lnRef>
+          <a:fillRef idx="3">
+            <a:schemeClr val="accent1"/>
+          </a:fillRef>
+          <a:effectRef idx="2">
+            <a:schemeClr val="accent1"/>
+          </a:effectRef>
+          <a:fontRef idx="minor">
+            <a:schemeClr val="lt1"/>
+          </a:fontRef>
+        </p:style>
+        <p:txBody>
+          <a:bodyPr rtlCol="0" anchor="ctr"/>
+          <a:lstStyle/>
+          <a:p>
+            <a:pPr algn="ctr"/>
+          </a:p>
+        </p:txBody>
+      </p:sp>
+      <p:sp>
+        <p:nvSpPr>
+          <p:cNvPr id="4" name="TextBox 3"/>
+          <p:cNvSpPr txBox="1"/>
+          <p:nvPr/>
+        </p:nvSpPr>
+        <p:spPr>
+          <a:xfrm>
+            <a:off x="548640" y="1371600"/>
+            <a:ext cx="11247120" cy="4937760"/>
+          </a:xfrm>
+          <a:prstGeom prst="rect">
+            <a:avLst/>
+          </a:prstGeom>
+          <a:noFill/>
+        </p:spPr>
+        <p:txBody>
+          <a:bodyPr wrap="square">
+            <a:spAutoFit/>
+          </a:bodyPr>
+          <a:lstStyle/>
+          <a:p>
+            <a:pPr>
+              <a:spcAft>
+                <a:spcPts val="800"/>
+              </a:spcAft>
+              <a:defRPr sz="2000" b="0">
+                <a:solidFill>
+                  <a:srgbClr val="3D424E"/>
+                </a:solidFill>
+              </a:defRPr>
+            </a:pPr>
+            <a:r>
+              <a:t>Capítulo 1 — Construir o classificador de tom</a:t>
+            </a:r>
+          </a:p>
+          <a:p>
+            <a:pPr lvl="1">
+              <a:spcAft>
+                <a:spcPts val="800"/>
+              </a:spcAft>
+              <a:defRPr sz="1700">
+                <a:solidFill>
+                  <a:srgbClr val="707682"/>
+                </a:solidFill>
+              </a:defRPr>
+            </a:pPr>
+            <a:r>
+              <a:t>Treinar sobre MST-E + Casual Conversations</a:t>
+            </a:r>
+          </a:p>
+          <a:p>
+            <a:pPr lvl="1">
+              <a:spcAft>
+                <a:spcPts val="800"/>
+              </a:spcAft>
+              <a:defRPr sz="1700">
+                <a:solidFill>
+                  <a:srgbClr val="707682"/>
+                </a:solidFill>
+              </a:defRPr>
+            </a:pPr>
+            <a:r>
+              <a:t>Aplicar no FairFace e construir a matriz pública tom × raça</a:t>
+            </a:r>
+          </a:p>
+          <a:p>
+            <a:pPr lvl="1">
+              <a:spcAft>
+                <a:spcPts val="800"/>
+              </a:spcAft>
+              <a:defRPr sz="1700">
+                <a:solidFill>
+                  <a:srgbClr val="707682"/>
+                </a:solidFill>
+              </a:defRPr>
+            </a:pPr>
+            <a:r>
+              <a:t>Testa H3 (Latinx tem spread amplo)</a:t>
+            </a:r>
+          </a:p>
+          <a:p>
+            <a:pPr>
+              <a:spcAft>
+                <a:spcPts val="800"/>
+              </a:spcAft>
+              <a:defRPr sz="2000" b="0">
+                <a:solidFill>
+                  <a:srgbClr val="3D424E"/>
+                </a:solidFill>
+              </a:defRPr>
+            </a:pPr>
+          </a:p>
+          <a:p>
+            <a:pPr>
+              <a:spcAft>
+                <a:spcPts val="800"/>
+              </a:spcAft>
+              <a:defRPr sz="2000" b="0">
+                <a:solidFill>
+                  <a:srgbClr val="3D424E"/>
+                </a:solidFill>
+              </a:defRPr>
+            </a:pPr>
+            <a:r>
+              <a:t>Capítulo 2 — Classificador de raça com tom como contexto</a:t>
+            </a:r>
+          </a:p>
+          <a:p>
+            <a:pPr lvl="1">
+              <a:spcAft>
+                <a:spcPts val="800"/>
+              </a:spcAft>
+              <a:defRPr sz="1700">
+                <a:solidFill>
+                  <a:srgbClr val="707682"/>
+                </a:solidFill>
+              </a:defRPr>
+            </a:pPr>
+            <a:r>
+              <a:t>Pipeline ConvNeXt-T + FiLM, comparado com 4 baselines independentes</a:t>
+            </a:r>
+          </a:p>
+          <a:p>
+            <a:pPr lvl="1">
+              <a:spcAft>
+                <a:spcPts val="800"/>
+              </a:spcAft>
+              <a:defRPr sz="1700">
+                <a:solidFill>
+                  <a:srgbClr val="707682"/>
+                </a:solidFill>
+              </a:defRPr>
+            </a:pPr>
+            <a:r>
+              <a:t>3 seeds para significância estatística</a:t>
+            </a:r>
+          </a:p>
+          <a:p>
+            <a:pPr lvl="1">
+              <a:spcAft>
+                <a:spcPts val="800"/>
+              </a:spcAft>
+              <a:defRPr sz="1700">
+                <a:solidFill>
+                  <a:srgbClr val="707682"/>
+                </a:solidFill>
+              </a:defRPr>
+            </a:pPr>
+            <a:r>
+              <a:t>Testa H1 (pipeline funciona), H2 (Latinx é estrutural), H4 (overlap explica erros)</a:t>
+            </a:r>
+          </a:p>
+          <a:p>
+            <a:pPr>
+              <a:spcAft>
+                <a:spcPts val="800"/>
+              </a:spcAft>
+              <a:defRPr sz="2000" b="0">
+                <a:solidFill>
+                  <a:srgbClr val="3D424E"/>
+                </a:solidFill>
+              </a:defRPr>
+            </a:pPr>
+          </a:p>
+          <a:p>
+            <a:pPr>
+              <a:spcAft>
+                <a:spcPts val="800"/>
+              </a:spcAft>
+              <a:defRPr sz="2000" b="0">
+                <a:solidFill>
+                  <a:srgbClr val="3D424E"/>
+                </a:solidFill>
+              </a:defRPr>
+            </a:pPr>
+            <a:r>
+              <a:t>Capítulo 3 — Aplicar a reconhecimento facial</a:t>
+            </a:r>
+          </a:p>
+          <a:p>
+            <a:pPr lvl="1">
+              <a:spcAft>
+                <a:spcPts val="800"/>
+              </a:spcAft>
+              <a:defRPr sz="1700">
+                <a:solidFill>
+                  <a:srgbClr val="707682"/>
+                </a:solidFill>
+              </a:defRPr>
+            </a:pPr>
+            <a:r>
+              <a:t>Mesmo pipeline em RFW ou BFW (datasets que já estão catalogados)</a:t>
+            </a:r>
+          </a:p>
+          <a:p>
+            <a:pPr lvl="1">
+              <a:spcAft>
+                <a:spcPts val="800"/>
+              </a:spcAft>
+              <a:defRPr sz="1700">
+                <a:solidFill>
+                  <a:srgbClr val="707682"/>
+                </a:solidFill>
+              </a:defRPr>
+            </a:pPr>
+            <a:r>
+              <a:t>Foco em accuracy de Black/African</a:t>
+            </a:r>
+          </a:p>
+          <a:p>
+            <a:pPr lvl="1">
+              <a:spcAft>
+                <a:spcPts val="800"/>
+              </a:spcAft>
+              <a:defRPr sz="1700">
+                <a:solidFill>
+                  <a:srgbClr val="707682"/>
+                </a:solidFill>
+              </a:defRPr>
+            </a:pPr>
+            <a:r>
+              <a:t>Testa H5 (fair transferência funciona)</a:t>
+            </a:r>
+          </a:p>
+        </p:txBody>
+      </p:sp>
+    </p:spTree>
+  </p:cSld>
+  <p:clrMapOvr>
+    <a:masterClrMapping/>
+  </p:clrMapOvr>
+</p:sld>
+</file>
+
 <file path=ppt/slides/slide23.xml><?xml version="1.0" encoding="utf-8"?>
 <p:sld xmlns:a="http://schemas.openxmlformats.org/drawingml/2006/main" xmlns:p="http://schemas.openxmlformats.org/presentationml/2006/main" xmlns:r="http://schemas.openxmlformats.org/officeDocument/2006/relationships">
   <p:cSld>
@@ -7840,7 +8302,7 @@
               </a:defRPr>
             </a:pPr>
             <a:r>
-              <a:t>Os 3 capítulos experimentais</a:t>
+              <a:t>O que precisamos decidir nesta reunião</a:t>
             </a:r>
           </a:p>
         </p:txBody>
@@ -7921,7 +8383,7 @@
               </a:defRPr>
             </a:pPr>
             <a:r>
-              <a:t>Capítulo 1 — Construir o classificador de tom</a:t>
+              <a:t>1. Aprovação da nova versão da tese (prescritiva, pipeline integrado)?</a:t>
             </a:r>
           </a:p>
           <a:p>
@@ -7936,7 +8398,7 @@
               </a:defRPr>
             </a:pPr>
             <a:r>
-              <a:t>Treinar sobre MST-E + Casual Conversations</a:t>
+              <a:t>Se aprovarmos, seguimos para o detalhamento metodológico.</a:t>
             </a:r>
           </a:p>
           <a:p>
@@ -7951,7 +8413,34 @@
               </a:defRPr>
             </a:pPr>
             <a:r>
-              <a:t>Aplicar no FairFace e construir a matriz pública tom × raça</a:t>
+              <a:t>Se houver ajustes, fazemos e revisamos juntos antes de prosseguir.</a:t>
+            </a:r>
+          </a:p>
+          <a:p>
+            <a:pPr>
+              <a:spcAft>
+                <a:spcPts val="800"/>
+              </a:spcAft>
+              <a:defRPr sz="2000" b="0">
+                <a:solidFill>
+                  <a:srgbClr val="3D424E"/>
+                </a:solidFill>
+              </a:defRPr>
+            </a:pPr>
+          </a:p>
+          <a:p>
+            <a:pPr>
+              <a:spcAft>
+                <a:spcPts val="800"/>
+              </a:spcAft>
+              <a:defRPr sz="2000" b="0">
+                <a:solidFill>
+                  <a:srgbClr val="3D424E"/>
+                </a:solidFill>
+              </a:defRPr>
+            </a:pPr>
+            <a:r>
+              <a:t>2. Alguma das 5 hipóteses precisa ser reformulada?</a:t>
             </a:r>
           </a:p>
           <a:p>
@@ -7966,7 +8455,7 @@
               </a:defRPr>
             </a:pPr>
             <a:r>
-              <a:t>Testa H3 (Latinx tem spread amplo)</a:t>
+              <a:t>São o esqueleto da dissertação — se uma estiver mal formulada, melhor descobrir agora.</a:t>
             </a:r>
           </a:p>
           <a:p>
@@ -7993,7 +8482,7 @@
               </a:defRPr>
             </a:pPr>
             <a:r>
-              <a:t>Capítulo 2 — Classificador de raça com tom como contexto</a:t>
+              <a:t>3. Escolha definitiva entre RFW e BFW para o Capítulo 3?</a:t>
             </a:r>
           </a:p>
           <a:p>
@@ -8008,7 +8497,34 @@
               </a:defRPr>
             </a:pPr>
             <a:r>
-              <a:t>Pipeline ConvNeXt-T + FiLM, comparado com 4 baselines independentes</a:t>
+              <a:t>Temos preferência por RFW (mais escala, mais histórico) — precisamos validar essa escolha juntos.</a:t>
+            </a:r>
+          </a:p>
+          <a:p>
+            <a:pPr>
+              <a:spcAft>
+                <a:spcPts val="800"/>
+              </a:spcAft>
+              <a:defRPr sz="2000" b="0">
+                <a:solidFill>
+                  <a:srgbClr val="3D424E"/>
+                </a:solidFill>
+              </a:defRPr>
+            </a:pPr>
+          </a:p>
+          <a:p>
+            <a:pPr>
+              <a:spcAft>
+                <a:spcPts val="800"/>
+              </a:spcAft>
+              <a:defRPr sz="2000" b="0">
+                <a:solidFill>
+                  <a:srgbClr val="3D424E"/>
+                </a:solidFill>
+              </a:defRPr>
+            </a:pPr>
+            <a:r>
+              <a:t>4. Alguma nova frente de literatura que ficou faltando?</a:t>
             </a:r>
           </a:p>
           <a:p>
@@ -8023,94 +8539,7 @@
               </a:defRPr>
             </a:pPr>
             <a:r>
-              <a:t>3 seeds para significância estatística</a:t>
-            </a:r>
-          </a:p>
-          <a:p>
-            <a:pPr lvl="1">
-              <a:spcAft>
-                <a:spcPts val="800"/>
-              </a:spcAft>
-              <a:defRPr sz="1700">
-                <a:solidFill>
-                  <a:srgbClr val="707682"/>
-                </a:solidFill>
-              </a:defRPr>
-            </a:pPr>
-            <a:r>
-              <a:t>Testa H1 (pipeline funciona), H2 (Latinx é estrutural), H4 (overlap explica erros)</a:t>
-            </a:r>
-          </a:p>
-          <a:p>
-            <a:pPr>
-              <a:spcAft>
-                <a:spcPts val="800"/>
-              </a:spcAft>
-              <a:defRPr sz="2000" b="0">
-                <a:solidFill>
-                  <a:srgbClr val="3D424E"/>
-                </a:solidFill>
-              </a:defRPr>
-            </a:pPr>
-          </a:p>
-          <a:p>
-            <a:pPr>
-              <a:spcAft>
-                <a:spcPts val="800"/>
-              </a:spcAft>
-              <a:defRPr sz="2000" b="0">
-                <a:solidFill>
-                  <a:srgbClr val="3D424E"/>
-                </a:solidFill>
-              </a:defRPr>
-            </a:pPr>
-            <a:r>
-              <a:t>Capítulo 3 — Aplicar a reconhecimento facial</a:t>
-            </a:r>
-          </a:p>
-          <a:p>
-            <a:pPr lvl="1">
-              <a:spcAft>
-                <a:spcPts val="800"/>
-              </a:spcAft>
-              <a:defRPr sz="1700">
-                <a:solidFill>
-                  <a:srgbClr val="707682"/>
-                </a:solidFill>
-              </a:defRPr>
-            </a:pPr>
-            <a:r>
-              <a:t>Mesmo pipeline em RFW ou BFW (datasets que já estão catalogados)</a:t>
-            </a:r>
-          </a:p>
-          <a:p>
-            <a:pPr lvl="1">
-              <a:spcAft>
-                <a:spcPts val="800"/>
-              </a:spcAft>
-              <a:defRPr sz="1700">
-                <a:solidFill>
-                  <a:srgbClr val="707682"/>
-                </a:solidFill>
-              </a:defRPr>
-            </a:pPr>
-            <a:r>
-              <a:t>Foco em accuracy de Black/African</a:t>
-            </a:r>
-          </a:p>
-          <a:p>
-            <a:pPr lvl="1">
-              <a:spcAft>
-                <a:spcPts val="800"/>
-              </a:spcAft>
-              <a:defRPr sz="1700">
-                <a:solidFill>
-                  <a:srgbClr val="707682"/>
-                </a:solidFill>
-              </a:defRPr>
-            </a:pPr>
-            <a:r>
-              <a:t>Testa H5 (fair transferência funciona)</a:t>
+              <a:t>Podemos fazer Rodada 6 se necessário, mas o corpus já está consistente.</a:t>
             </a:r>
           </a:p>
         </p:txBody>
@@ -8135,49 +8564,14 @@
       <p:grpSpPr/>
       <p:sp>
         <p:nvSpPr>
-          <p:cNvPr id="2" name="TextBox 1"/>
-          <p:cNvSpPr txBox="1"/>
-          <p:nvPr/>
-        </p:nvSpPr>
-        <p:spPr>
-          <a:xfrm>
-            <a:off x="457200" y="365760"/>
-            <a:ext cx="11430000" cy="822960"/>
-          </a:xfrm>
-          <a:prstGeom prst="rect">
-            <a:avLst/>
-          </a:prstGeom>
-          <a:noFill/>
-        </p:spPr>
-        <p:txBody>
-          <a:bodyPr wrap="square">
-            <a:spAutoFit/>
-          </a:bodyPr>
-          <a:lstStyle/>
-          <a:p>
-            <a:pPr>
-              <a:defRPr sz="3000" b="1">
-                <a:solidFill>
-                  <a:srgbClr val="1F2A4E"/>
-                </a:solidFill>
-              </a:defRPr>
-            </a:pPr>
-            <a:r>
-              <a:t>O que precisamos decidir nesta reunião</a:t>
-            </a:r>
-          </a:p>
-        </p:txBody>
-      </p:sp>
-      <p:sp>
-        <p:nvSpPr>
-          <p:cNvPr id="3" name="Rectangle 2"/>
+          <p:cNvPr id="2" name="Rectangle 1"/>
           <p:cNvSpPr/>
           <p:nvPr/>
         </p:nvSpPr>
         <p:spPr>
           <a:xfrm>
-            <a:off x="457200" y="1143000"/>
-            <a:ext cx="11430000" cy="45720"/>
+            <a:off x="0" y="0"/>
+            <a:ext cx="12191695" cy="6858000"/>
           </a:xfrm>
           <a:prstGeom prst="rect">
             <a:avLst/>
@@ -8213,14 +8607,14 @@
       </p:sp>
       <p:sp>
         <p:nvSpPr>
-          <p:cNvPr id="4" name="TextBox 3"/>
+          <p:cNvPr id="3" name="TextBox 2"/>
           <p:cNvSpPr txBox="1"/>
           <p:nvPr/>
         </p:nvSpPr>
         <p:spPr>
           <a:xfrm>
-            <a:off x="548640" y="1371600"/>
-            <a:ext cx="11247120" cy="4937760"/>
+            <a:off x="914400" y="2286000"/>
+            <a:ext cx="10332720" cy="2286000"/>
           </a:xfrm>
           <a:prstGeom prst="rect">
             <a:avLst/>
@@ -8233,174 +8627,27 @@
           </a:bodyPr>
           <a:lstStyle/>
           <a:p>
-            <a:pPr>
-              <a:spcAft>
-                <a:spcPts val="800"/>
-              </a:spcAft>
-              <a:defRPr sz="2000" b="0">
-                <a:solidFill>
-                  <a:srgbClr val="3D424E"/>
-                </a:solidFill>
-              </a:defRPr>
-            </a:pPr>
-            <a:r>
-              <a:t>1. Aprovação da nova versão da tese (prescritiva, pipeline integrado)?</a:t>
-            </a:r>
-          </a:p>
-          <a:p>
-            <a:pPr lvl="1">
-              <a:spcAft>
-                <a:spcPts val="800"/>
-              </a:spcAft>
-              <a:defRPr sz="1700">
-                <a:solidFill>
-                  <a:srgbClr val="707682"/>
-                </a:solidFill>
-              </a:defRPr>
-            </a:pPr>
-            <a:r>
-              <a:t>Se aprovarmos, seguimos para o detalhamento metodológico.</a:t>
-            </a:r>
-          </a:p>
-          <a:p>
-            <a:pPr lvl="1">
-              <a:spcAft>
-                <a:spcPts val="800"/>
-              </a:spcAft>
-              <a:defRPr sz="1700">
-                <a:solidFill>
-                  <a:srgbClr val="707682"/>
-                </a:solidFill>
-              </a:defRPr>
-            </a:pPr>
-            <a:r>
-              <a:t>Se houver ajustes, fazemos e revisamos juntos antes de prosseguir.</a:t>
-            </a:r>
-          </a:p>
-          <a:p>
-            <a:pPr>
-              <a:spcAft>
-                <a:spcPts val="800"/>
-              </a:spcAft>
-              <a:defRPr sz="2000" b="0">
-                <a:solidFill>
-                  <a:srgbClr val="3D424E"/>
-                </a:solidFill>
-              </a:defRPr>
-            </a:pPr>
-          </a:p>
-          <a:p>
-            <a:pPr>
-              <a:spcAft>
-                <a:spcPts val="800"/>
-              </a:spcAft>
-              <a:defRPr sz="2000" b="0">
-                <a:solidFill>
-                  <a:srgbClr val="3D424E"/>
-                </a:solidFill>
-              </a:defRPr>
-            </a:pPr>
-            <a:r>
-              <a:t>2. Alguma das 5 hipóteses precisa ser reformulada?</a:t>
-            </a:r>
-          </a:p>
-          <a:p>
-            <a:pPr lvl="1">
-              <a:spcAft>
-                <a:spcPts val="800"/>
-              </a:spcAft>
-              <a:defRPr sz="1700">
-                <a:solidFill>
-                  <a:srgbClr val="707682"/>
-                </a:solidFill>
-              </a:defRPr>
-            </a:pPr>
-            <a:r>
-              <a:t>São o esqueleto da dissertação — se uma estiver mal formulada, melhor descobrir agora.</a:t>
-            </a:r>
-          </a:p>
-          <a:p>
-            <a:pPr>
-              <a:spcAft>
-                <a:spcPts val="800"/>
-              </a:spcAft>
-              <a:defRPr sz="2000" b="0">
-                <a:solidFill>
-                  <a:srgbClr val="3D424E"/>
-                </a:solidFill>
-              </a:defRPr>
-            </a:pPr>
-          </a:p>
-          <a:p>
-            <a:pPr>
-              <a:spcAft>
-                <a:spcPts val="800"/>
-              </a:spcAft>
-              <a:defRPr sz="2000" b="0">
-                <a:solidFill>
-                  <a:srgbClr val="3D424E"/>
-                </a:solidFill>
-              </a:defRPr>
-            </a:pPr>
-            <a:r>
-              <a:t>3. Escolha definitiva entre RFW e BFW para o Capítulo 3?</a:t>
-            </a:r>
-          </a:p>
-          <a:p>
-            <a:pPr lvl="1">
-              <a:spcAft>
-                <a:spcPts val="800"/>
-              </a:spcAft>
-              <a:defRPr sz="1700">
-                <a:solidFill>
-                  <a:srgbClr val="707682"/>
-                </a:solidFill>
-              </a:defRPr>
-            </a:pPr>
-            <a:r>
-              <a:t>Temos preferência por RFW (mais escala, mais histórico) — precisamos validar essa escolha juntos.</a:t>
-            </a:r>
-          </a:p>
-          <a:p>
-            <a:pPr>
-              <a:spcAft>
-                <a:spcPts val="800"/>
-              </a:spcAft>
-              <a:defRPr sz="2000" b="0">
-                <a:solidFill>
-                  <a:srgbClr val="3D424E"/>
-                </a:solidFill>
-              </a:defRPr>
-            </a:pPr>
-          </a:p>
-          <a:p>
-            <a:pPr>
-              <a:spcAft>
-                <a:spcPts val="800"/>
-              </a:spcAft>
-              <a:defRPr sz="2000" b="0">
-                <a:solidFill>
-                  <a:srgbClr val="3D424E"/>
-                </a:solidFill>
-              </a:defRPr>
-            </a:pPr>
-            <a:r>
-              <a:t>4. Alguma nova frente de literatura que ficou faltando?</a:t>
-            </a:r>
-          </a:p>
-          <a:p>
-            <a:pPr lvl="1">
-              <a:spcAft>
-                <a:spcPts val="800"/>
-              </a:spcAft>
-              <a:defRPr sz="1700">
-                <a:solidFill>
-                  <a:srgbClr val="707682"/>
-                </a:solidFill>
-              </a:defRPr>
-            </a:pPr>
-            <a:r>
-              <a:t>Podemos fazer Rodada 6 se necessário, mas o corpus já está consistente.</a:t>
+            <a:pPr algn="ctr">
+              <a:defRPr sz="4800" b="1">
+                <a:solidFill>
+                  <a:srgbClr val="FFFFFF"/>
+                </a:solidFill>
+              </a:defRPr>
+            </a:pPr>
+            <a:r>
+              <a:t>Discussão e feedback</a:t>
+            </a:r>
+          </a:p>
+          <a:p>
+            <a:pPr algn="ctr">
+              <a:defRPr sz="2200">
+                <a:solidFill>
+                  <a:srgbClr val="E8EAED"/>
+                </a:solidFill>
+              </a:defRPr>
+            </a:pPr>
+            <a:r>
+              <a:t>Aprovação da nova versão da tese — decidir os 4 itens acima</a:t>
             </a:r>
           </a:p>
         </p:txBody>
@@ -8474,8 +8721,43 @@
         </p:nvSpPr>
         <p:spPr>
           <a:xfrm>
-            <a:off x="914400" y="2286000"/>
-            <a:ext cx="10332720" cy="2286000"/>
+            <a:off x="731520" y="1371600"/>
+            <a:ext cx="2743200" cy="2743200"/>
+          </a:xfrm>
+          <a:prstGeom prst="rect">
+            <a:avLst/>
+          </a:prstGeom>
+          <a:noFill/>
+        </p:spPr>
+        <p:txBody>
+          <a:bodyPr wrap="none">
+            <a:spAutoFit/>
+          </a:bodyPr>
+          <a:lstStyle/>
+          <a:p>
+            <a:pPr>
+              <a:defRPr sz="13000" b="1">
+                <a:solidFill>
+                  <a:srgbClr val="FFFFFF"/>
+                </a:solidFill>
+              </a:defRPr>
+            </a:pPr>
+            <a:r>
+              <a:t>★</a:t>
+            </a:r>
+          </a:p>
+        </p:txBody>
+      </p:sp>
+      <p:sp>
+        <p:nvSpPr>
+          <p:cNvPr id="4" name="TextBox 3"/>
+          <p:cNvSpPr txBox="1"/>
+          <p:nvPr/>
+        </p:nvSpPr>
+        <p:spPr>
+          <a:xfrm>
+            <a:off x="3931920" y="2286000"/>
+            <a:ext cx="7772400" cy="1828800"/>
           </a:xfrm>
           <a:prstGeom prst="rect">
             <a:avLst/>
@@ -8488,27 +8770,27 @@
           </a:bodyPr>
           <a:lstStyle/>
           <a:p>
-            <a:pPr algn="ctr">
-              <a:defRPr sz="4800" b="1">
+            <a:pPr>
+              <a:defRPr sz="3600" b="1">
                 <a:solidFill>
                   <a:srgbClr val="FFFFFF"/>
                 </a:solidFill>
               </a:defRPr>
             </a:pPr>
             <a:r>
-              <a:t>Discussão e feedback</a:t>
-            </a:r>
-          </a:p>
-          <a:p>
-            <a:pPr algn="ctr">
-              <a:defRPr sz="2200">
+              <a:t>Slides de apoio</a:t>
+            </a:r>
+          </a:p>
+          <a:p>
+            <a:pPr>
+              <a:defRPr sz="2000">
                 <a:solidFill>
                   <a:srgbClr val="E8EAED"/>
                 </a:solidFill>
               </a:defRPr>
             </a:pPr>
             <a:r>
-              <a:t>Aprovação da nova versão da tese — decidir os 4 itens acima</a:t>
+              <a:t>Material complementar para consulta durante a discussão</a:t>
             </a:r>
           </a:p>
         </p:txBody>
@@ -8533,14 +8815,49 @@
       <p:grpSpPr/>
       <p:sp>
         <p:nvSpPr>
-          <p:cNvPr id="2" name="Rectangle 1"/>
+          <p:cNvPr id="2" name="TextBox 1"/>
+          <p:cNvSpPr txBox="1"/>
+          <p:nvPr/>
+        </p:nvSpPr>
+        <p:spPr>
+          <a:xfrm>
+            <a:off x="457200" y="365760"/>
+            <a:ext cx="11430000" cy="822960"/>
+          </a:xfrm>
+          <a:prstGeom prst="rect">
+            <a:avLst/>
+          </a:prstGeom>
+          <a:noFill/>
+        </p:spPr>
+        <p:txBody>
+          <a:bodyPr wrap="none">
+            <a:spAutoFit/>
+          </a:bodyPr>
+          <a:lstStyle/>
+          <a:p>
+            <a:pPr>
+              <a:defRPr sz="2800" b="1">
+                <a:solidFill>
+                  <a:srgbClr val="1F2A4E"/>
+                </a:solidFill>
+              </a:defRPr>
+            </a:pPr>
+            <a:r>
+              <a:t>As 14 perguntas de pesquisa respondidas</a:t>
+            </a:r>
+          </a:p>
+        </p:txBody>
+      </p:sp>
+      <p:sp>
+        <p:nvSpPr>
+          <p:cNvPr id="3" name="Rectangle 2"/>
           <p:cNvSpPr/>
           <p:nvPr/>
         </p:nvSpPr>
         <p:spPr>
           <a:xfrm>
-            <a:off x="0" y="0"/>
-            <a:ext cx="12191695" cy="6858000"/>
+            <a:off x="457200" y="1097280"/>
+            <a:ext cx="11430000" cy="45720"/>
           </a:xfrm>
           <a:prstGeom prst="rect">
             <a:avLst/>
@@ -8576,14 +8893,382 @@
       </p:sp>
       <p:sp>
         <p:nvSpPr>
-          <p:cNvPr id="3" name="TextBox 2"/>
+          <p:cNvPr id="4" name="TextBox 3"/>
           <p:cNvSpPr txBox="1"/>
           <p:nvPr/>
         </p:nvSpPr>
         <p:spPr>
           <a:xfrm>
-            <a:off x="731520" y="1371600"/>
-            <a:ext cx="2743200" cy="2743200"/>
+            <a:off x="548640" y="1280160"/>
+            <a:ext cx="5577840" cy="5029200"/>
+          </a:xfrm>
+          <a:prstGeom prst="rect">
+            <a:avLst/>
+          </a:prstGeom>
+          <a:noFill/>
+        </p:spPr>
+        <p:txBody>
+          <a:bodyPr wrap="square">
+            <a:spAutoFit/>
+          </a:bodyPr>
+          <a:lstStyle/>
+          <a:p>
+            <a:pPr>
+              <a:spcAft>
+                <a:spcPts val="600"/>
+              </a:spcAft>
+            </a:pPr>
+            <a:r>
+              <a:rPr b="1" sz="1300">
+                <a:solidFill>
+                  <a:srgbClr val="1F2A4E"/>
+                </a:solidFill>
+              </a:rPr>
+              <a:t>Q01  </a:t>
+            </a:r>
+            <a:r>
+              <a:rPr sz="1300">
+                <a:solidFill>
+                  <a:srgbClr val="3D424E"/>
+                </a:solidFill>
+              </a:rPr>
+              <a:t>Existem melhores datasets para corrigir fairness em biometria facial de raças?</a:t>
+            </a:r>
+          </a:p>
+          <a:p>
+            <a:pPr>
+              <a:spcAft>
+                <a:spcPts val="600"/>
+              </a:spcAft>
+            </a:pPr>
+            <a:r>
+              <a:rPr b="1" sz="1300">
+                <a:solidFill>
+                  <a:srgbClr val="1F2A4E"/>
+                </a:solidFill>
+              </a:rPr>
+              <a:t>Q02  </a:t>
+            </a:r>
+            <a:r>
+              <a:rPr sz="1300">
+                <a:solidFill>
+                  <a:srgbClr val="3D424E"/>
+                </a:solidFill>
+              </a:rPr>
+              <a:t>Qual o dataset mais utilizado nos estudos de fairness?</a:t>
+            </a:r>
+          </a:p>
+          <a:p>
+            <a:pPr>
+              <a:spcAft>
+                <a:spcPts val="600"/>
+              </a:spcAft>
+            </a:pPr>
+            <a:r>
+              <a:rPr b="1" sz="1300">
+                <a:solidFill>
+                  <a:srgbClr val="1F2A4E"/>
+                </a:solidFill>
+              </a:rPr>
+              <a:t>Q03  </a:t>
+            </a:r>
+            <a:r>
+              <a:rPr sz="1300">
+                <a:solidFill>
+                  <a:srgbClr val="3D424E"/>
+                </a:solidFill>
+              </a:rPr>
+              <a:t>Qual o split oficial do FairFace e por que diferentes papers usam splits distintos?</a:t>
+            </a:r>
+          </a:p>
+          <a:p>
+            <a:pPr>
+              <a:spcAft>
+                <a:spcPts val="600"/>
+              </a:spcAft>
+            </a:pPr>
+            <a:r>
+              <a:rPr b="1" sz="1300">
+                <a:solidFill>
+                  <a:srgbClr val="1F2A4E"/>
+                </a:solidFill>
+              </a:rPr>
+              <a:t>Q04  </a:t>
+            </a:r>
+            <a:r>
+              <a:rPr sz="1300">
+                <a:solidFill>
+                  <a:srgbClr val="3D424E"/>
+                </a:solidFill>
+              </a:rPr>
+              <a:t>Quais técnicas de mitigação algorítmica já foram testadas em FairFace race 7-class?</a:t>
+            </a:r>
+          </a:p>
+          <a:p>
+            <a:pPr>
+              <a:spcAft>
+                <a:spcPts val="600"/>
+              </a:spcAft>
+            </a:pPr>
+            <a:r>
+              <a:rPr b="1" sz="1300">
+                <a:solidFill>
+                  <a:srgbClr val="1F2A4E"/>
+                </a:solidFill>
+              </a:rPr>
+              <a:t>Q05  </a:t>
+            </a:r>
+            <a:r>
+              <a:rPr sz="1300">
+                <a:solidFill>
+                  <a:srgbClr val="3D424E"/>
+                </a:solidFill>
+              </a:rPr>
+              <a:t>Existe consenso sobre métrica de fairness para classificação multi-classe?</a:t>
+            </a:r>
+          </a:p>
+          <a:p>
+            <a:pPr>
+              <a:spcAft>
+                <a:spcPts val="600"/>
+              </a:spcAft>
+            </a:pPr>
+            <a:r>
+              <a:rPr b="1" sz="1300">
+                <a:solidFill>
+                  <a:srgbClr val="1F2A4E"/>
+                </a:solidFill>
+              </a:rPr>
+              <a:t>Q06  </a:t>
+            </a:r>
+            <a:r>
+              <a:rPr sz="1300">
+                <a:solidFill>
+                  <a:srgbClr val="3D424E"/>
+                </a:solidFill>
+              </a:rPr>
+              <a:t>O baseline ResNet-34 = 72% acurácia é teto da arquitetura ou da metodologia?</a:t>
+            </a:r>
+          </a:p>
+          <a:p>
+            <a:pPr>
+              <a:spcAft>
+                <a:spcPts val="600"/>
+              </a:spcAft>
+            </a:pPr>
+            <a:r>
+              <a:rPr b="1" sz="1300">
+                <a:solidFill>
+                  <a:srgbClr val="1F2A4E"/>
+                </a:solidFill>
+              </a:rPr>
+              <a:t>Q07  </a:t>
+            </a:r>
+            <a:r>
+              <a:rPr sz="1300">
+                <a:solidFill>
+                  <a:srgbClr val="3D424E"/>
+                </a:solidFill>
+              </a:rPr>
+              <a:t>Existe pesquisa de fairness em biometria facial sem usar FairFace?</a:t>
+            </a:r>
+          </a:p>
+        </p:txBody>
+      </p:sp>
+      <p:sp>
+        <p:nvSpPr>
+          <p:cNvPr id="5" name="TextBox 4"/>
+          <p:cNvSpPr txBox="1"/>
+          <p:nvPr/>
+        </p:nvSpPr>
+        <p:spPr>
+          <a:xfrm>
+            <a:off x="6263640" y="1280160"/>
+            <a:ext cx="5577840" cy="5029200"/>
+          </a:xfrm>
+          <a:prstGeom prst="rect">
+            <a:avLst/>
+          </a:prstGeom>
+          <a:noFill/>
+        </p:spPr>
+        <p:txBody>
+          <a:bodyPr wrap="square">
+            <a:spAutoFit/>
+          </a:bodyPr>
+          <a:lstStyle/>
+          <a:p>
+            <a:pPr>
+              <a:spcAft>
+                <a:spcPts val="600"/>
+              </a:spcAft>
+            </a:pPr>
+            <a:r>
+              <a:rPr b="1" sz="1300">
+                <a:solidFill>
+                  <a:srgbClr val="1F2A4E"/>
+                </a:solidFill>
+              </a:rPr>
+              <a:t>Q08  </a:t>
+            </a:r>
+            <a:r>
+              <a:rPr sz="1300">
+                <a:solidFill>
+                  <a:srgbClr val="3D424E"/>
+                </a:solidFill>
+              </a:rPr>
+              <a:t>Por que os estudos tentam sempre fazer merge de classes raciais?</a:t>
+            </a:r>
+          </a:p>
+          <a:p>
+            <a:pPr>
+              <a:spcAft>
+                <a:spcPts val="600"/>
+              </a:spcAft>
+            </a:pPr>
+            <a:r>
+              <a:rPr b="1" sz="1300">
+                <a:solidFill>
+                  <a:srgbClr val="1F2A4E"/>
+                </a:solidFill>
+              </a:rPr>
+              <a:t>Q09  </a:t>
+            </a:r>
+            <a:r>
+              <a:rPr sz="1300">
+                <a:solidFill>
+                  <a:srgbClr val="3D424E"/>
+                </a:solidFill>
+              </a:rPr>
+              <a:t>7 classes é realmente a taxonomia correta para fairness racial facial?</a:t>
+            </a:r>
+          </a:p>
+          <a:p>
+            <a:pPr>
+              <a:spcAft>
+                <a:spcPts val="600"/>
+              </a:spcAft>
+            </a:pPr>
+            <a:r>
+              <a:rPr b="1" sz="1300">
+                <a:solidFill>
+                  <a:srgbClr val="1F2A4E"/>
+                </a:solidFill>
+              </a:rPr>
+              <a:t>Q10  </a:t>
+            </a:r>
+            <a:r>
+              <a:rPr sz="1300">
+                <a:solidFill>
+                  <a:srgbClr val="3D424E"/>
+                </a:solidFill>
+              </a:rPr>
+              <a:t>Existe matriz associativa Fitzpatrick/MST × FairFace 7-race?</a:t>
+            </a:r>
+          </a:p>
+          <a:p>
+            <a:pPr>
+              <a:spcAft>
+                <a:spcPts val="600"/>
+              </a:spcAft>
+            </a:pPr>
+            <a:r>
+              <a:rPr b="1" sz="1300">
+                <a:solidFill>
+                  <a:srgbClr val="1F2A4E"/>
+                </a:solidFill>
+              </a:rPr>
+              <a:t>Q11  </a:t>
+            </a:r>
+            <a:r>
+              <a:rPr sz="1300">
+                <a:solidFill>
+                  <a:srgbClr val="3D424E"/>
+                </a:solidFill>
+              </a:rPr>
+              <a:t>As 7 categorias raciais do FairFace têm fundamento biológico ou socio-político?</a:t>
+            </a:r>
+          </a:p>
+          <a:p>
+            <a:pPr>
+              <a:spcAft>
+                <a:spcPts val="600"/>
+              </a:spcAft>
+            </a:pPr>
+            <a:r>
+              <a:rPr b="1" sz="1300">
+                <a:solidFill>
+                  <a:srgbClr val="1F2A4E"/>
+                </a:solidFill>
+              </a:rPr>
+              <a:t>Q12  </a:t>
+            </a:r>
+            <a:r>
+              <a:rPr sz="1300">
+                <a:solidFill>
+                  <a:srgbClr val="3D424E"/>
+                </a:solidFill>
+              </a:rPr>
+              <a:t>Como antropologia forense moderna trata 'raça'?</a:t>
+            </a:r>
+          </a:p>
+          <a:p>
+            <a:pPr>
+              <a:spcAft>
+                <a:spcPts val="600"/>
+              </a:spcAft>
+            </a:pPr>
+            <a:r>
+              <a:rPr b="1" sz="1300">
+                <a:solidFill>
+                  <a:srgbClr val="1F2A4E"/>
+                </a:solidFill>
+              </a:rPr>
+              <a:t>Q13  </a:t>
+            </a:r>
+            <a:r>
+              <a:rPr sz="1300">
+                <a:solidFill>
+                  <a:srgbClr val="3D424E"/>
+                </a:solidFill>
+              </a:rPr>
+              <a:t>Origem e propósito da escala Fitzpatrick — para que foi criada?</a:t>
+            </a:r>
+          </a:p>
+          <a:p>
+            <a:pPr>
+              <a:spcAft>
+                <a:spcPts val="600"/>
+              </a:spcAft>
+            </a:pPr>
+            <a:r>
+              <a:rPr b="1" sz="1300">
+                <a:solidFill>
+                  <a:srgbClr val="1F2A4E"/>
+                </a:solidFill>
+              </a:rPr>
+              <a:t>Q14  </a:t>
+            </a:r>
+            <a:r>
+              <a:rPr sz="1300">
+                <a:solidFill>
+                  <a:srgbClr val="3D424E"/>
+                </a:solidFill>
+              </a:rPr>
+              <a:t>Quantos tons de pele existem cientificamente?</a:t>
+            </a:r>
+          </a:p>
+        </p:txBody>
+      </p:sp>
+      <p:sp>
+        <p:nvSpPr>
+          <p:cNvPr id="6" name="TextBox 5"/>
+          <p:cNvSpPr txBox="1"/>
+          <p:nvPr/>
+        </p:nvSpPr>
+        <p:spPr>
+          <a:xfrm>
+            <a:off x="457200" y="6446520"/>
+            <a:ext cx="11430000" cy="365760"/>
           </a:xfrm>
           <a:prstGeom prst="rect">
             <a:avLst/>
@@ -8597,61 +9282,14 @@
           <a:lstStyle/>
           <a:p>
             <a:pPr>
-              <a:defRPr sz="13000" b="1">
-                <a:solidFill>
-                  <a:srgbClr val="FFFFFF"/>
-                </a:solidFill>
-              </a:defRPr>
-            </a:pPr>
-            <a:r>
-              <a:t>★</a:t>
-            </a:r>
-          </a:p>
-        </p:txBody>
-      </p:sp>
-      <p:sp>
-        <p:nvSpPr>
-          <p:cNvPr id="4" name="TextBox 3"/>
-          <p:cNvSpPr txBox="1"/>
-          <p:nvPr/>
-        </p:nvSpPr>
-        <p:spPr>
-          <a:xfrm>
-            <a:off x="3931920" y="2286000"/>
-            <a:ext cx="7772400" cy="1828800"/>
-          </a:xfrm>
-          <a:prstGeom prst="rect">
-            <a:avLst/>
-          </a:prstGeom>
-          <a:noFill/>
-        </p:spPr>
-        <p:txBody>
-          <a:bodyPr wrap="square">
-            <a:spAutoFit/>
-          </a:bodyPr>
-          <a:lstStyle/>
-          <a:p>
-            <a:pPr>
-              <a:defRPr sz="3600" b="1">
-                <a:solidFill>
-                  <a:srgbClr val="FFFFFF"/>
-                </a:solidFill>
-              </a:defRPr>
-            </a:pPr>
-            <a:r>
-              <a:t>Slides de apoio</a:t>
-            </a:r>
-          </a:p>
-          <a:p>
-            <a:pPr>
-              <a:defRPr sz="2000">
-                <a:solidFill>
-                  <a:srgbClr val="E8EAED"/>
-                </a:solidFill>
-              </a:defRPr>
-            </a:pPr>
-            <a:r>
-              <a:t>Material complementar para consulta durante a discussão</a:t>
+              <a:defRPr sz="1300" i="1">
+                <a:solidFill>
+                  <a:srgbClr val="707682"/>
+                </a:solidFill>
+              </a:defRPr>
+            </a:pPr>
+            <a:r>
+              <a:t>Detalhamento completo em docs/ativo/04_pesquisa_bibliografica/_perguntas.md</a:t>
             </a:r>
           </a:p>
         </p:txBody>
@@ -8682,8 +9320,8 @@
         </p:nvSpPr>
         <p:spPr>
           <a:xfrm>
-            <a:off x="457200" y="365760"/>
-            <a:ext cx="11430000" cy="822960"/>
+            <a:off x="365760" y="228600"/>
+            <a:ext cx="11521440" cy="640080"/>
           </a:xfrm>
           <a:prstGeom prst="rect">
             <a:avLst/>
@@ -8697,34 +9335,69 @@
           <a:lstStyle/>
           <a:p>
             <a:pPr>
-              <a:defRPr sz="2800" b="1">
+              <a:defRPr sz="2000" b="1">
                 <a:solidFill>
                   <a:srgbClr val="1F2A4E"/>
                 </a:solidFill>
               </a:defRPr>
             </a:pPr>
             <a:r>
-              <a:t>As 14 perguntas de pesquisa respondidas</a:t>
-            </a:r>
-          </a:p>
-        </p:txBody>
-      </p:sp>
-      <p:sp>
-        <p:nvSpPr>
-          <p:cNvPr id="3" name="Rectangle 2"/>
+              <a:t>Pangelinan et al. (2023) — Causas de variação demográfica em FR accuracy</a:t>
+            </a:r>
+          </a:p>
+        </p:txBody>
+      </p:sp>
+      <p:sp>
+        <p:nvSpPr>
+          <p:cNvPr id="3" name="TextBox 2"/>
+          <p:cNvSpPr txBox="1"/>
+          <p:nvPr/>
+        </p:nvSpPr>
+        <p:spPr>
+          <a:xfrm>
+            <a:off x="365760" y="777240"/>
+            <a:ext cx="11521440" cy="320040"/>
+          </a:xfrm>
+          <a:prstGeom prst="rect">
+            <a:avLst/>
+          </a:prstGeom>
+          <a:noFill/>
+        </p:spPr>
+        <p:txBody>
+          <a:bodyPr wrap="none">
+            <a:spAutoFit/>
+          </a:bodyPr>
+          <a:lstStyle/>
+          <a:p>
+            <a:pPr>
+              <a:defRPr sz="1200" i="1">
+                <a:solidFill>
+                  <a:srgbClr val="707682"/>
+                </a:solidFill>
+              </a:defRPr>
+            </a:pPr>
+            <a:r>
+              <a:t>arXiv:2304.07175 — autores Notre Dame / Florida Tech / IST</a:t>
+            </a:r>
+          </a:p>
+        </p:txBody>
+      </p:sp>
+      <p:sp>
+        <p:nvSpPr>
+          <p:cNvPr id="4" name="Rectangle 3"/>
           <p:cNvSpPr/>
           <p:nvPr/>
         </p:nvSpPr>
         <p:spPr>
           <a:xfrm>
-            <a:off x="457200" y="1097280"/>
-            <a:ext cx="11430000" cy="45720"/>
+            <a:off x="365760" y="1143000"/>
+            <a:ext cx="11521440" cy="36576"/>
           </a:xfrm>
           <a:prstGeom prst="rect">
             <a:avLst/>
           </a:prstGeom>
           <a:solidFill>
-            <a:srgbClr val="1F2A4E"/>
+            <a:srgbClr val="C0392B"/>
           </a:solidFill>
           <a:ln>
             <a:noFill/>
@@ -8754,403 +9427,326 @@
       </p:sp>
       <p:sp>
         <p:nvSpPr>
-          <p:cNvPr id="4" name="TextBox 3"/>
-          <p:cNvSpPr txBox="1"/>
-          <p:nvPr/>
-        </p:nvSpPr>
-        <p:spPr>
-          <a:xfrm>
-            <a:off x="548640" y="1280160"/>
-            <a:ext cx="5577840" cy="5029200"/>
-          </a:xfrm>
-          <a:prstGeom prst="rect">
-            <a:avLst/>
-          </a:prstGeom>
-          <a:noFill/>
-        </p:spPr>
-        <p:txBody>
-          <a:bodyPr wrap="square">
-            <a:spAutoFit/>
-          </a:bodyPr>
-          <a:lstStyle/>
-          <a:p>
-            <a:pPr>
-              <a:spcAft>
-                <a:spcPts val="600"/>
-              </a:spcAft>
-            </a:pPr>
-            <a:r>
-              <a:rPr b="1" sz="1300">
+          <p:cNvPr id="5" name="Rounded Rectangle 4"/>
+          <p:cNvSpPr/>
+          <p:nvPr/>
+        </p:nvSpPr>
+        <p:spPr>
+          <a:xfrm>
+            <a:off x="365760" y="1325880"/>
+            <a:ext cx="11521440" cy="960120"/>
+          </a:xfrm>
+          <a:prstGeom prst="roundRect">
+            <a:avLst/>
+          </a:prstGeom>
+          <a:solidFill>
+            <a:srgbClr val="E8EAED"/>
+          </a:solidFill>
+          <a:ln>
+            <a:noFill/>
+          </a:ln>
+        </p:spPr>
+        <p:style>
+          <a:lnRef idx="1">
+            <a:schemeClr val="accent1"/>
+          </a:lnRef>
+          <a:fillRef idx="3">
+            <a:schemeClr val="accent1"/>
+          </a:fillRef>
+          <a:effectRef idx="2">
+            <a:schemeClr val="accent1"/>
+          </a:effectRef>
+          <a:fontRef idx="minor">
+            <a:schemeClr val="lt1"/>
+          </a:fontRef>
+        </p:style>
+        <p:txBody>
+          <a:bodyPr rtlCol="0" anchor="ctr" wrap="square" lIns="228600" rIns="228600" tIns="73152"/>
+          <a:lstStyle/>
+          <a:p>
+            <a:pPr algn="ctr">
+              <a:defRPr sz="1100" b="1">
                 <a:solidFill>
                   <a:srgbClr val="1F2A4E"/>
                 </a:solidFill>
-              </a:rPr>
-              <a:t>Q01  </a:t>
-            </a:r>
-            <a:r>
-              <a:rPr sz="1300">
+              </a:defRPr>
+            </a:pPr>
+            <a:r>
+              <a:t>Pergunta de pesquisa</a:t>
+            </a:r>
+          </a:p>
+          <a:p>
+            <a:pPr>
+              <a:defRPr sz="1200">
                 <a:solidFill>
                   <a:srgbClr val="3D424E"/>
                 </a:solidFill>
-              </a:rPr>
-              <a:t>Existem melhores datasets para corrigir fairness em biometria facial de raças?</a:t>
-            </a:r>
-          </a:p>
-          <a:p>
-            <a:pPr>
-              <a:spcAft>
-                <a:spcPts val="600"/>
-              </a:spcAft>
-            </a:pPr>
-            <a:r>
-              <a:rPr b="1" sz="1300">
+              </a:defRPr>
+            </a:pPr>
+            <a:r>
+              <a:t>Por que a accuracy de face recognition varia entre grupos demográficos? É skin tone direto, face size/shape, desbalanceamento de treino ou qualidade da imagem?</a:t>
+            </a:r>
+          </a:p>
+        </p:txBody>
+      </p:sp>
+      <p:sp>
+        <p:nvSpPr>
+          <p:cNvPr id="6" name="Rounded Rectangle 5"/>
+          <p:cNvSpPr/>
+          <p:nvPr/>
+        </p:nvSpPr>
+        <p:spPr>
+          <a:xfrm>
+            <a:off x="365760" y="2331720"/>
+            <a:ext cx="11521440" cy="1234440"/>
+          </a:xfrm>
+          <a:prstGeom prst="roundRect">
+            <a:avLst/>
+          </a:prstGeom>
+          <a:solidFill>
+            <a:srgbClr val="FFFFFF"/>
+          </a:solidFill>
+          <a:ln w="12700">
+            <a:solidFill>
+              <a:srgbClr val="1F2A4E"/>
+            </a:solidFill>
+          </a:ln>
+        </p:spPr>
+        <p:style>
+          <a:lnRef idx="1">
+            <a:schemeClr val="accent1"/>
+          </a:lnRef>
+          <a:fillRef idx="3">
+            <a:schemeClr val="accent1"/>
+          </a:fillRef>
+          <a:effectRef idx="2">
+            <a:schemeClr val="accent1"/>
+          </a:effectRef>
+          <a:fontRef idx="minor">
+            <a:schemeClr val="lt1"/>
+          </a:fontRef>
+        </p:style>
+        <p:txBody>
+          <a:bodyPr rtlCol="0" anchor="ctr" wrap="square" lIns="228600" rIns="228600" tIns="73152"/>
+          <a:lstStyle/>
+          <a:p>
+            <a:pPr algn="ctr">
+              <a:defRPr sz="1100" b="1">
                 <a:solidFill>
                   <a:srgbClr val="1F2A4E"/>
                 </a:solidFill>
-              </a:rPr>
-              <a:t>Q02  </a:t>
-            </a:r>
-            <a:r>
-              <a:rPr sz="1300">
+              </a:defRPr>
+            </a:pPr>
+            <a:r>
+              <a:t>Metodologia</a:t>
+            </a:r>
+          </a:p>
+          <a:p>
+            <a:pPr>
+              <a:defRPr sz="1200">
                 <a:solidFill>
                   <a:srgbClr val="3D424E"/>
                 </a:solidFill>
-              </a:rPr>
-              <a:t>Qual o dataset mais utilizado nos estudos de fairness?</a:t>
-            </a:r>
-          </a:p>
-          <a:p>
-            <a:pPr>
-              <a:spcAft>
-                <a:spcPts val="600"/>
-              </a:spcAft>
-            </a:pPr>
-            <a:r>
-              <a:rPr b="1" sz="1300">
+              </a:defRPr>
+            </a:pPr>
+            <a:r>
+              <a:t>Auditoria de modelos de FR estado-da-arte (ArcFace, AdaFace) avaliando 4 hipóteses causais sobre imagens de teste de grupos demográficos. Mede 'face pixel information' (área útil de pixels após detecção e crop) e correlaciona com accuracy por grupo.</a:t>
+            </a:r>
+          </a:p>
+        </p:txBody>
+      </p:sp>
+      <p:sp>
+        <p:nvSpPr>
+          <p:cNvPr id="7" name="Rounded Rectangle 6"/>
+          <p:cNvSpPr/>
+          <p:nvPr/>
+        </p:nvSpPr>
+        <p:spPr>
+          <a:xfrm>
+            <a:off x="365760" y="3611880"/>
+            <a:ext cx="11521440" cy="1143000"/>
+          </a:xfrm>
+          <a:prstGeom prst="roundRect">
+            <a:avLst/>
+          </a:prstGeom>
+          <a:solidFill>
+            <a:srgbClr val="E8EAED"/>
+          </a:solidFill>
+          <a:ln>
+            <a:noFill/>
+          </a:ln>
+        </p:spPr>
+        <p:style>
+          <a:lnRef idx="1">
+            <a:schemeClr val="accent1"/>
+          </a:lnRef>
+          <a:fillRef idx="3">
+            <a:schemeClr val="accent1"/>
+          </a:fillRef>
+          <a:effectRef idx="2">
+            <a:schemeClr val="accent1"/>
+          </a:effectRef>
+          <a:fontRef idx="minor">
+            <a:schemeClr val="lt1"/>
+          </a:fontRef>
+        </p:style>
+        <p:txBody>
+          <a:bodyPr rtlCol="0" anchor="ctr" wrap="square" lIns="228600" rIns="228600" tIns="73152"/>
+          <a:lstStyle/>
+          <a:p>
+            <a:pPr algn="ctr">
+              <a:defRPr sz="1100" b="1">
                 <a:solidFill>
                   <a:srgbClr val="1F2A4E"/>
                 </a:solidFill>
-              </a:rPr>
-              <a:t>Q03  </a:t>
-            </a:r>
-            <a:r>
-              <a:rPr sz="1300">
+              </a:defRPr>
+            </a:pPr>
+            <a:r>
+              <a:t>Resultados principais</a:t>
+            </a:r>
+          </a:p>
+          <a:p>
+            <a:pPr>
+              <a:defRPr sz="1200">
                 <a:solidFill>
                   <a:srgbClr val="3D424E"/>
                 </a:solidFill>
-              </a:rPr>
-              <a:t>Qual o split oficial do FairFace e por que diferentes papers usam splits distintos?</a:t>
-            </a:r>
-          </a:p>
-          <a:p>
-            <a:pPr>
-              <a:spcAft>
-                <a:spcPts val="600"/>
-              </a:spcAft>
-            </a:pPr>
-            <a:r>
-              <a:rPr b="1" sz="1300">
-                <a:solidFill>
-                  <a:srgbClr val="1F2A4E"/>
-                </a:solidFill>
-              </a:rPr>
-              <a:t>Q04  </a:t>
-            </a:r>
-            <a:r>
-              <a:rPr sz="1300">
+              </a:defRPr>
+            </a:pPr>
+            <a:r>
+              <a:t>Diferenças de face pixel information entre grupos demográficos explicam a maior parte da variação de accuracy em FR. Skin tone direto é fator secundário; balanceamento de treino tem efeito menor que o esperado.</a:t>
+            </a:r>
+          </a:p>
+        </p:txBody>
+      </p:sp>
+      <p:sp>
+        <p:nvSpPr>
+          <p:cNvPr id="8" name="Rounded Rectangle 7"/>
+          <p:cNvSpPr/>
+          <p:nvPr/>
+        </p:nvSpPr>
+        <p:spPr>
+          <a:xfrm>
+            <a:off x="365760" y="4800600"/>
+            <a:ext cx="11521440" cy="960120"/>
+          </a:xfrm>
+          <a:prstGeom prst="roundRect">
+            <a:avLst/>
+          </a:prstGeom>
+          <a:solidFill>
+            <a:srgbClr val="FFFFFF"/>
+          </a:solidFill>
+          <a:ln w="12700">
+            <a:solidFill>
+              <a:srgbClr val="707682"/>
+            </a:solidFill>
+          </a:ln>
+        </p:spPr>
+        <p:style>
+          <a:lnRef idx="1">
+            <a:schemeClr val="accent1"/>
+          </a:lnRef>
+          <a:fillRef idx="3">
+            <a:schemeClr val="accent1"/>
+          </a:fillRef>
+          <a:effectRef idx="2">
+            <a:schemeClr val="accent1"/>
+          </a:effectRef>
+          <a:fontRef idx="minor">
+            <a:schemeClr val="lt1"/>
+          </a:fontRef>
+        </p:style>
+        <p:txBody>
+          <a:bodyPr rtlCol="0" anchor="ctr" wrap="square" lIns="228600" rIns="228600" tIns="73152"/>
+          <a:lstStyle/>
+          <a:p>
+            <a:pPr algn="ctr">
+              <a:defRPr sz="1100" b="1">
+                <a:solidFill>
+                  <a:srgbClr val="707682"/>
+                </a:solidFill>
+              </a:defRPr>
+            </a:pPr>
+            <a:r>
+              <a:t>Crítica metodológica e limitações</a:t>
+            </a:r>
+          </a:p>
+          <a:p>
+            <a:pPr>
+              <a:defRPr sz="1200">
                 <a:solidFill>
                   <a:srgbClr val="3D424E"/>
                 </a:solidFill>
-              </a:rPr>
-              <a:t>Quais técnicas de mitigação algorítmica já foram testadas em FairFace race 7-class?</a:t>
-            </a:r>
-          </a:p>
-          <a:p>
-            <a:pPr>
-              <a:spcAft>
-                <a:spcPts val="600"/>
-              </a:spcAft>
-            </a:pPr>
-            <a:r>
-              <a:rPr b="1" sz="1300">
-                <a:solidFill>
-                  <a:srgbClr val="1F2A4E"/>
-                </a:solidFill>
-              </a:rPr>
-              <a:t>Q05  </a:t>
-            </a:r>
-            <a:r>
-              <a:rPr sz="1300">
+              </a:defRPr>
+            </a:pPr>
+            <a:r>
+              <a:t>Trabalha com FR (verificação 1:1), não com race classification — tarefas distintas. Não testa intervenções arquiteturais para mitigar o efeito de pixel info. Resultado é correlacional, não causal estrito.</a:t>
+            </a:r>
+          </a:p>
+        </p:txBody>
+      </p:sp>
+      <p:sp>
+        <p:nvSpPr>
+          <p:cNvPr id="9" name="Rounded Rectangle 8"/>
+          <p:cNvSpPr/>
+          <p:nvPr/>
+        </p:nvSpPr>
+        <p:spPr>
+          <a:xfrm>
+            <a:off x="365760" y="5806440"/>
+            <a:ext cx="11521440" cy="1051560"/>
+          </a:xfrm>
+          <a:prstGeom prst="roundRect">
+            <a:avLst/>
+          </a:prstGeom>
+          <a:solidFill>
+            <a:srgbClr val="FFFFFF"/>
+          </a:solidFill>
+          <a:ln w="12700">
+            <a:solidFill>
+              <a:srgbClr val="C0392B"/>
+            </a:solidFill>
+          </a:ln>
+        </p:spPr>
+        <p:style>
+          <a:lnRef idx="1">
+            <a:schemeClr val="accent1"/>
+          </a:lnRef>
+          <a:fillRef idx="3">
+            <a:schemeClr val="accent1"/>
+          </a:fillRef>
+          <a:effectRef idx="2">
+            <a:schemeClr val="accent1"/>
+          </a:effectRef>
+          <a:fontRef idx="minor">
+            <a:schemeClr val="lt1"/>
+          </a:fontRef>
+        </p:style>
+        <p:txBody>
+          <a:bodyPr rtlCol="0" anchor="ctr" wrap="square" lIns="228600" rIns="228600" tIns="73152"/>
+          <a:lstStyle/>
+          <a:p>
+            <a:pPr algn="ctr">
+              <a:defRPr sz="1100" b="1">
+                <a:solidFill>
+                  <a:srgbClr val="C0392B"/>
+                </a:solidFill>
+              </a:defRPr>
+            </a:pPr>
+            <a:r>
+              <a:t>Impacto na nossa tese</a:t>
+            </a:r>
+          </a:p>
+          <a:p>
+            <a:pPr>
+              <a:defRPr sz="1200">
                 <a:solidFill>
                   <a:srgbClr val="3D424E"/>
                 </a:solidFill>
-              </a:rPr>
-              <a:t>Existe consenso sobre métrica de fairness para classificação multi-classe?</a:t>
-            </a:r>
-          </a:p>
-          <a:p>
-            <a:pPr>
-              <a:spcAft>
-                <a:spcPts val="600"/>
-              </a:spcAft>
-            </a:pPr>
-            <a:r>
-              <a:rPr b="1" sz="1300">
-                <a:solidFill>
-                  <a:srgbClr val="1F2A4E"/>
-                </a:solidFill>
-              </a:rPr>
-              <a:t>Q06  </a:t>
-            </a:r>
-            <a:r>
-              <a:rPr sz="1300">
-                <a:solidFill>
-                  <a:srgbClr val="3D424E"/>
-                </a:solidFill>
-              </a:rPr>
-              <a:t>O baseline ResNet-34 = 72% acurácia é teto da arquitetura ou da metodologia?</a:t>
-            </a:r>
-          </a:p>
-          <a:p>
-            <a:pPr>
-              <a:spcAft>
-                <a:spcPts val="600"/>
-              </a:spcAft>
-            </a:pPr>
-            <a:r>
-              <a:rPr b="1" sz="1300">
-                <a:solidFill>
-                  <a:srgbClr val="1F2A4E"/>
-                </a:solidFill>
-              </a:rPr>
-              <a:t>Q07  </a:t>
-            </a:r>
-            <a:r>
-              <a:rPr sz="1300">
-                <a:solidFill>
-                  <a:srgbClr val="3D424E"/>
-                </a:solidFill>
-              </a:rPr>
-              <a:t>Existe pesquisa de fairness em biometria facial sem usar FairFace?</a:t>
-            </a:r>
-          </a:p>
-        </p:txBody>
-      </p:sp>
-      <p:sp>
-        <p:nvSpPr>
-          <p:cNvPr id="5" name="TextBox 4"/>
-          <p:cNvSpPr txBox="1"/>
-          <p:nvPr/>
-        </p:nvSpPr>
-        <p:spPr>
-          <a:xfrm>
-            <a:off x="6263640" y="1280160"/>
-            <a:ext cx="5577840" cy="5029200"/>
-          </a:xfrm>
-          <a:prstGeom prst="rect">
-            <a:avLst/>
-          </a:prstGeom>
-          <a:noFill/>
-        </p:spPr>
-        <p:txBody>
-          <a:bodyPr wrap="square">
-            <a:spAutoFit/>
-          </a:bodyPr>
-          <a:lstStyle/>
-          <a:p>
-            <a:pPr>
-              <a:spcAft>
-                <a:spcPts val="600"/>
-              </a:spcAft>
-            </a:pPr>
-            <a:r>
-              <a:rPr b="1" sz="1300">
-                <a:solidFill>
-                  <a:srgbClr val="1F2A4E"/>
-                </a:solidFill>
-              </a:rPr>
-              <a:t>Q08  </a:t>
-            </a:r>
-            <a:r>
-              <a:rPr sz="1300">
-                <a:solidFill>
-                  <a:srgbClr val="3D424E"/>
-                </a:solidFill>
-              </a:rPr>
-              <a:t>Por que os estudos tentam sempre fazer merge de classes raciais?</a:t>
-            </a:r>
-          </a:p>
-          <a:p>
-            <a:pPr>
-              <a:spcAft>
-                <a:spcPts val="600"/>
-              </a:spcAft>
-            </a:pPr>
-            <a:r>
-              <a:rPr b="1" sz="1300">
-                <a:solidFill>
-                  <a:srgbClr val="1F2A4E"/>
-                </a:solidFill>
-              </a:rPr>
-              <a:t>Q09  </a:t>
-            </a:r>
-            <a:r>
-              <a:rPr sz="1300">
-                <a:solidFill>
-                  <a:srgbClr val="3D424E"/>
-                </a:solidFill>
-              </a:rPr>
-              <a:t>7 classes é realmente a taxonomia correta para fairness racial facial?</a:t>
-            </a:r>
-          </a:p>
-          <a:p>
-            <a:pPr>
-              <a:spcAft>
-                <a:spcPts val="600"/>
-              </a:spcAft>
-            </a:pPr>
-            <a:r>
-              <a:rPr b="1" sz="1300">
-                <a:solidFill>
-                  <a:srgbClr val="1F2A4E"/>
-                </a:solidFill>
-              </a:rPr>
-              <a:t>Q10  </a:t>
-            </a:r>
-            <a:r>
-              <a:rPr sz="1300">
-                <a:solidFill>
-                  <a:srgbClr val="3D424E"/>
-                </a:solidFill>
-              </a:rPr>
-              <a:t>Existe matriz associativa Fitzpatrick/MST × FairFace 7-race?</a:t>
-            </a:r>
-          </a:p>
-          <a:p>
-            <a:pPr>
-              <a:spcAft>
-                <a:spcPts val="600"/>
-              </a:spcAft>
-            </a:pPr>
-            <a:r>
-              <a:rPr b="1" sz="1300">
-                <a:solidFill>
-                  <a:srgbClr val="1F2A4E"/>
-                </a:solidFill>
-              </a:rPr>
-              <a:t>Q11  </a:t>
-            </a:r>
-            <a:r>
-              <a:rPr sz="1300">
-                <a:solidFill>
-                  <a:srgbClr val="3D424E"/>
-                </a:solidFill>
-              </a:rPr>
-              <a:t>As 7 categorias raciais do FairFace têm fundamento biológico ou socio-político?</a:t>
-            </a:r>
-          </a:p>
-          <a:p>
-            <a:pPr>
-              <a:spcAft>
-                <a:spcPts val="600"/>
-              </a:spcAft>
-            </a:pPr>
-            <a:r>
-              <a:rPr b="1" sz="1300">
-                <a:solidFill>
-                  <a:srgbClr val="1F2A4E"/>
-                </a:solidFill>
-              </a:rPr>
-              <a:t>Q12  </a:t>
-            </a:r>
-            <a:r>
-              <a:rPr sz="1300">
-                <a:solidFill>
-                  <a:srgbClr val="3D424E"/>
-                </a:solidFill>
-              </a:rPr>
-              <a:t>Como antropologia forense moderna trata 'raça'?</a:t>
-            </a:r>
-          </a:p>
-          <a:p>
-            <a:pPr>
-              <a:spcAft>
-                <a:spcPts val="600"/>
-              </a:spcAft>
-            </a:pPr>
-            <a:r>
-              <a:rPr b="1" sz="1300">
-                <a:solidFill>
-                  <a:srgbClr val="1F2A4E"/>
-                </a:solidFill>
-              </a:rPr>
-              <a:t>Q13  </a:t>
-            </a:r>
-            <a:r>
-              <a:rPr sz="1300">
-                <a:solidFill>
-                  <a:srgbClr val="3D424E"/>
-                </a:solidFill>
-              </a:rPr>
-              <a:t>Origem e propósito da escala Fitzpatrick — para que foi criada?</a:t>
-            </a:r>
-          </a:p>
-          <a:p>
-            <a:pPr>
-              <a:spcAft>
-                <a:spcPts val="600"/>
-              </a:spcAft>
-            </a:pPr>
-            <a:r>
-              <a:rPr b="1" sz="1300">
-                <a:solidFill>
-                  <a:srgbClr val="1F2A4E"/>
-                </a:solidFill>
-              </a:rPr>
-              <a:t>Q14  </a:t>
-            </a:r>
-            <a:r>
-              <a:rPr sz="1300">
-                <a:solidFill>
-                  <a:srgbClr val="3D424E"/>
-                </a:solidFill>
-              </a:rPr>
-              <a:t>Quantos tons de pele existem cientificamente?</a:t>
-            </a:r>
-          </a:p>
-        </p:txBody>
-      </p:sp>
-      <p:sp>
-        <p:nvSpPr>
-          <p:cNvPr id="6" name="TextBox 5"/>
-          <p:cNvSpPr txBox="1"/>
-          <p:nvPr/>
-        </p:nvSpPr>
-        <p:spPr>
-          <a:xfrm>
-            <a:off x="457200" y="6446520"/>
-            <a:ext cx="11430000" cy="365760"/>
-          </a:xfrm>
-          <a:prstGeom prst="rect">
-            <a:avLst/>
-          </a:prstGeom>
-          <a:noFill/>
-        </p:spPr>
-        <p:txBody>
-          <a:bodyPr wrap="none">
-            <a:spAutoFit/>
-          </a:bodyPr>
-          <a:lstStyle/>
-          <a:p>
-            <a:pPr>
-              <a:defRPr sz="1300" i="1">
-                <a:solidFill>
-                  <a:srgbClr val="707682"/>
-                </a:solidFill>
-              </a:defRPr>
-            </a:pPr>
-            <a:r>
-              <a:t>Detalhamento completo em docs/ativo/04_pesquisa_bibliografica/_perguntas.md</a:t>
+              </a:defRPr>
+            </a:pPr>
+            <a:r>
+              <a:t>REFUTAÇÃO POTENCIAL DE H5. Se pixel info é a causa primária em FR, a transferência de fairness do Cap 2 para o Cap 3 pode ser confounded. Motivou as 3 versões de reformulação de H5 (V1/V2/V3) na pauta de discussão de hoje.</a:t>
             </a:r>
           </a:p>
         </p:txBody>
@@ -9181,8 +9777,8 @@
         </p:nvSpPr>
         <p:spPr>
           <a:xfrm>
-            <a:off x="457200" y="365760"/>
-            <a:ext cx="11430000" cy="822960"/>
+            <a:off x="365760" y="228600"/>
+            <a:ext cx="11521440" cy="640080"/>
           </a:xfrm>
           <a:prstGeom prst="rect">
             <a:avLst/>
@@ -9196,14 +9792,14 @@
           <a:lstStyle/>
           <a:p>
             <a:pPr>
-              <a:defRPr sz="2400" b="1">
+              <a:defRPr sz="2000" b="1">
                 <a:solidFill>
                   <a:srgbClr val="1F2A4E"/>
                 </a:solidFill>
               </a:defRPr>
             </a:pPr>
             <a:r>
-              <a:t>Pangelinan et al. (2023) — Causas de variação demográfica em FR</a:t>
+              <a:t>Pereira et al. (2026) — SkinToneNet + dataset STW</a:t>
             </a:r>
           </a:p>
         </p:txBody>
@@ -9216,8 +9812,8 @@
         </p:nvSpPr>
         <p:spPr>
           <a:xfrm>
-            <a:off x="457200" y="1051560"/>
-            <a:ext cx="11430000" cy="365760"/>
+            <a:off x="365760" y="777240"/>
+            <a:ext cx="11521440" cy="320040"/>
           </a:xfrm>
           <a:prstGeom prst="rect">
             <a:avLst/>
@@ -9231,14 +9827,14 @@
           <a:lstStyle/>
           <a:p>
             <a:pPr>
-              <a:defRPr sz="1400" i="1">
+              <a:defRPr sz="1200" i="1">
                 <a:solidFill>
                   <a:srgbClr val="707682"/>
                 </a:solidFill>
               </a:defRPr>
             </a:pPr>
             <a:r>
-              <a:t>arXiv:2304.07175 — autores Notre Dame / Florida Tech</a:t>
+              <a:t>arXiv:2603.02475 — ICMC-USP / IMPA — preprint mar/2026</a:t>
             </a:r>
           </a:p>
         </p:txBody>
@@ -9251,14 +9847,14 @@
         </p:nvSpPr>
         <p:spPr>
           <a:xfrm>
-            <a:off x="457200" y="1463040"/>
-            <a:ext cx="11430000" cy="45720"/>
+            <a:off x="365760" y="1143000"/>
+            <a:ext cx="11521440" cy="36576"/>
           </a:xfrm>
           <a:prstGeom prst="rect">
             <a:avLst/>
           </a:prstGeom>
           <a:solidFill>
-            <a:srgbClr val="C0392B"/>
+            <a:srgbClr val="2E7D32"/>
           </a:solidFill>
           <a:ln>
             <a:noFill/>
@@ -9294,8 +9890,8 @@
         </p:nvSpPr>
         <p:spPr>
           <a:xfrm>
-            <a:off x="548640" y="1828800"/>
-            <a:ext cx="11064240" cy="2103120"/>
+            <a:off x="365760" y="1325880"/>
+            <a:ext cx="11521440" cy="960120"/>
           </a:xfrm>
           <a:prstGeom prst="roundRect">
             <a:avLst/>
@@ -9322,30 +9918,30 @@
           </a:fontRef>
         </p:style>
         <p:txBody>
-          <a:bodyPr rtlCol="0" anchor="ctr" wrap="square" lIns="274320" rIns="274320" tIns="137160"/>
+          <a:bodyPr rtlCol="0" anchor="ctr" wrap="square" lIns="228600" rIns="228600" tIns="73152"/>
           <a:lstStyle/>
           <a:p>
             <a:pPr algn="ctr">
-              <a:defRPr sz="1400" b="1">
+              <a:defRPr sz="1100" b="1">
                 <a:solidFill>
                   <a:srgbClr val="1F2A4E"/>
                 </a:solidFill>
               </a:defRPr>
             </a:pPr>
             <a:r>
-              <a:t>O que defende</a:t>
-            </a:r>
-          </a:p>
-          <a:p>
-            <a:pPr>
-              <a:defRPr sz="1600">
+              <a:t>Pergunta de pesquisa</a:t>
+            </a:r>
+          </a:p>
+          <a:p>
+            <a:pPr>
+              <a:defRPr sz="1200">
                 <a:solidFill>
                   <a:srgbClr val="3D424E"/>
                 </a:solidFill>
               </a:defRPr>
             </a:pPr>
             <a:r>
-              <a:t>Analisa POR QUE a accuracy de face recognition varia entre grupos demográficos. Conclui que diferenças de pixel info da face nas imagens de teste explicam mais variação do que tom de pele direto.</a:t>
+              <a:t>É possível treinar um classificador MST robusto e generalizável que funcione 'in-the-wild' (fora dos datasets de origem)?</a:t>
             </a:r>
           </a:p>
         </p:txBody>
@@ -9358,8 +9954,8 @@
         </p:nvSpPr>
         <p:spPr>
           <a:xfrm>
-            <a:off x="548640" y="4114800"/>
-            <a:ext cx="11064240" cy="2194560"/>
+            <a:off x="365760" y="2331720"/>
+            <a:ext cx="11521440" cy="1234440"/>
           </a:xfrm>
           <a:prstGeom prst="roundRect">
             <a:avLst/>
@@ -9367,9 +9963,9 @@
           <a:solidFill>
             <a:srgbClr val="FFFFFF"/>
           </a:solidFill>
-          <a:ln w="19050">
+          <a:ln w="12700">
             <a:solidFill>
-              <a:srgbClr val="C0392B"/>
+              <a:srgbClr val="1F2A4E"/>
             </a:solidFill>
           </a:ln>
         </p:spPr>
@@ -9388,13 +9984,209 @@
           </a:fontRef>
         </p:style>
         <p:txBody>
-          <a:bodyPr rtlCol="0" anchor="ctr" wrap="square" lIns="274320" rIns="274320" tIns="137160"/>
+          <a:bodyPr rtlCol="0" anchor="ctr" wrap="square" lIns="228600" rIns="228600" tIns="73152"/>
           <a:lstStyle/>
           <a:p>
             <a:pPr algn="ctr">
-              <a:defRPr sz="1400" b="1">
-                <a:solidFill>
-                  <a:srgbClr val="C0392B"/>
+              <a:defRPr sz="1100" b="1">
+                <a:solidFill>
+                  <a:srgbClr val="1F2A4E"/>
+                </a:solidFill>
+              </a:defRPr>
+            </a:pPr>
+            <a:r>
+              <a:t>Metodologia</a:t>
+            </a:r>
+          </a:p>
+          <a:p>
+            <a:pPr>
+              <a:defRPr sz="1200">
+                <a:solidFill>
+                  <a:srgbClr val="3D424E"/>
+                </a:solidFill>
+              </a:defRPr>
+            </a:pPr>
+            <a:r>
+              <a:t>Constrói STW (Skin Tone in the Wild) — 42.313 imagens de 3.564 indivíduos, anotadas pela escala Monk Skin Tone 10-classe. Treina SkinToneNet (ViT-Small fine-tuned em ImageNet) sobre STW. Audita 6 datasets faciais incluindo FairFace.</a:t>
+            </a:r>
+          </a:p>
+        </p:txBody>
+      </p:sp>
+      <p:sp>
+        <p:nvSpPr>
+          <p:cNvPr id="7" name="Rounded Rectangle 6"/>
+          <p:cNvSpPr/>
+          <p:nvPr/>
+        </p:nvSpPr>
+        <p:spPr>
+          <a:xfrm>
+            <a:off x="365760" y="3611880"/>
+            <a:ext cx="11521440" cy="1143000"/>
+          </a:xfrm>
+          <a:prstGeom prst="roundRect">
+            <a:avLst/>
+          </a:prstGeom>
+          <a:solidFill>
+            <a:srgbClr val="E8EAED"/>
+          </a:solidFill>
+          <a:ln>
+            <a:noFill/>
+          </a:ln>
+        </p:spPr>
+        <p:style>
+          <a:lnRef idx="1">
+            <a:schemeClr val="accent1"/>
+          </a:lnRef>
+          <a:fillRef idx="3">
+            <a:schemeClr val="accent1"/>
+          </a:fillRef>
+          <a:effectRef idx="2">
+            <a:schemeClr val="accent1"/>
+          </a:effectRef>
+          <a:fontRef idx="minor">
+            <a:schemeClr val="lt1"/>
+          </a:fontRef>
+        </p:style>
+        <p:txBody>
+          <a:bodyPr rtlCol="0" anchor="ctr" wrap="square" lIns="228600" rIns="228600" tIns="73152"/>
+          <a:lstStyle/>
+          <a:p>
+            <a:pPr algn="ctr">
+              <a:defRPr sz="1100" b="1">
+                <a:solidFill>
+                  <a:srgbClr val="1F2A4E"/>
+                </a:solidFill>
+              </a:defRPr>
+            </a:pPr>
+            <a:r>
+              <a:t>Resultados principais</a:t>
+            </a:r>
+          </a:p>
+          <a:p>
+            <a:pPr>
+              <a:defRPr sz="1200">
+                <a:solidFill>
+                  <a:srgbClr val="3D424E"/>
+                </a:solidFill>
+              </a:defRPr>
+            </a:pPr>
+            <a:r>
+              <a:t>SkinToneNet atinge SOTA em skin-tone classification cross-domain. FairFace exibe distribuição agregada com forte ausência de MST 6-10. NÃO publica a matriz cruzada MST × race (apenas distribuição global).</a:t>
+            </a:r>
+          </a:p>
+        </p:txBody>
+      </p:sp>
+      <p:sp>
+        <p:nvSpPr>
+          <p:cNvPr id="8" name="Rounded Rectangle 7"/>
+          <p:cNvSpPr/>
+          <p:nvPr/>
+        </p:nvSpPr>
+        <p:spPr>
+          <a:xfrm>
+            <a:off x="365760" y="4800600"/>
+            <a:ext cx="11521440" cy="960120"/>
+          </a:xfrm>
+          <a:prstGeom prst="roundRect">
+            <a:avLst/>
+          </a:prstGeom>
+          <a:solidFill>
+            <a:srgbClr val="FFFFFF"/>
+          </a:solidFill>
+          <a:ln w="12700">
+            <a:solidFill>
+              <a:srgbClr val="707682"/>
+            </a:solidFill>
+          </a:ln>
+        </p:spPr>
+        <p:style>
+          <a:lnRef idx="1">
+            <a:schemeClr val="accent1"/>
+          </a:lnRef>
+          <a:fillRef idx="3">
+            <a:schemeClr val="accent1"/>
+          </a:fillRef>
+          <a:effectRef idx="2">
+            <a:schemeClr val="accent1"/>
+          </a:effectRef>
+          <a:fontRef idx="minor">
+            <a:schemeClr val="lt1"/>
+          </a:fontRef>
+        </p:style>
+        <p:txBody>
+          <a:bodyPr rtlCol="0" anchor="ctr" wrap="square" lIns="228600" rIns="228600" tIns="73152"/>
+          <a:lstStyle/>
+          <a:p>
+            <a:pPr algn="ctr">
+              <a:defRPr sz="1100" b="1">
+                <a:solidFill>
+                  <a:srgbClr val="707682"/>
+                </a:solidFill>
+              </a:defRPr>
+            </a:pPr>
+            <a:r>
+              <a:t>Crítica metodológica e limitações</a:t>
+            </a:r>
+          </a:p>
+          <a:p>
+            <a:pPr>
+              <a:defRPr sz="1200">
+                <a:solidFill>
+                  <a:srgbClr val="3D424E"/>
+                </a:solidFill>
+              </a:defRPr>
+            </a:pPr>
+            <a:r>
+              <a:t>STW concentra-se em sujeitos da web (viés de quem é fotografado e publicado). Dataset não tem split público fixo para benchmarks. Anotação MST não passa por consenso multi-anotador como o protocolo de Schumann 2023.</a:t>
+            </a:r>
+          </a:p>
+        </p:txBody>
+      </p:sp>
+      <p:sp>
+        <p:nvSpPr>
+          <p:cNvPr id="9" name="Rounded Rectangle 8"/>
+          <p:cNvSpPr/>
+          <p:nvPr/>
+        </p:nvSpPr>
+        <p:spPr>
+          <a:xfrm>
+            <a:off x="365760" y="5806440"/>
+            <a:ext cx="11521440" cy="1051560"/>
+          </a:xfrm>
+          <a:prstGeom prst="roundRect">
+            <a:avLst/>
+          </a:prstGeom>
+          <a:solidFill>
+            <a:srgbClr val="FFFFFF"/>
+          </a:solidFill>
+          <a:ln w="12700">
+            <a:solidFill>
+              <a:srgbClr val="2E7D32"/>
+            </a:solidFill>
+          </a:ln>
+        </p:spPr>
+        <p:style>
+          <a:lnRef idx="1">
+            <a:schemeClr val="accent1"/>
+          </a:lnRef>
+          <a:fillRef idx="3">
+            <a:schemeClr val="accent1"/>
+          </a:fillRef>
+          <a:effectRef idx="2">
+            <a:schemeClr val="accent1"/>
+          </a:effectRef>
+          <a:fontRef idx="minor">
+            <a:schemeClr val="lt1"/>
+          </a:fontRef>
+        </p:style>
+        <p:txBody>
+          <a:bodyPr rtlCol="0" anchor="ctr" wrap="square" lIns="228600" rIns="228600" tIns="73152"/>
+          <a:lstStyle/>
+          <a:p>
+            <a:pPr algn="ctr">
+              <a:defRPr sz="1100" b="1">
+                <a:solidFill>
+                  <a:srgbClr val="2E7D32"/>
                 </a:solidFill>
               </a:defRPr>
             </a:pPr>
@@ -9404,14 +10196,14 @@
           </a:p>
           <a:p>
             <a:pPr>
-              <a:defRPr sz="1600">
+              <a:defRPr sz="1200">
                 <a:solidFill>
                   <a:srgbClr val="3D424E"/>
                 </a:solidFill>
               </a:defRPr>
             </a:pPr>
             <a:r>
-              <a:t>Refutação potencial de H5. Para FR (verificação 1:1), pixel info pode ser causa primária. Motivou reformulação de H5 em discussão na pauta de hoje.</a:t>
+              <a:t>DECISÃO TÉCNICA: usar SkinToneNet pré-treinado como insumo do pipeline (economiza ~3 semanas). Nossa C2 (matriz cruzada MST × raça) segue contribuição original. STW pode ser usado como dataset de validação externa do Cap 1.</a:t>
             </a:r>
           </a:p>
         </p:txBody>
@@ -9442,8 +10234,8 @@
         </p:nvSpPr>
         <p:spPr>
           <a:xfrm>
-            <a:off x="457200" y="365760"/>
-            <a:ext cx="11430000" cy="822960"/>
+            <a:off x="365760" y="228600"/>
+            <a:ext cx="11521440" cy="640080"/>
           </a:xfrm>
           <a:prstGeom prst="rect">
             <a:avLst/>
@@ -9457,14 +10249,14 @@
           <a:lstStyle/>
           <a:p>
             <a:pPr>
-              <a:defRPr sz="2400" b="1">
+              <a:defRPr sz="2000" b="1">
                 <a:solidFill>
                   <a:srgbClr val="1F2A4E"/>
                 </a:solidFill>
               </a:defRPr>
             </a:pPr>
             <a:r>
-              <a:t>Pereira et al. (2026) — SkinToneNet + dataset STW</a:t>
+              <a:t>Dooley et al. (2022/23) — Fairer architectures make for fairer FR</a:t>
             </a:r>
           </a:p>
         </p:txBody>
@@ -9477,8 +10269,8 @@
         </p:nvSpPr>
         <p:spPr>
           <a:xfrm>
-            <a:off x="457200" y="1051560"/>
-            <a:ext cx="11430000" cy="365760"/>
+            <a:off x="365760" y="777240"/>
+            <a:ext cx="11521440" cy="320040"/>
           </a:xfrm>
           <a:prstGeom prst="rect">
             <a:avLst/>
@@ -9492,14 +10284,14 @@
           <a:lstStyle/>
           <a:p>
             <a:pPr>
-              <a:defRPr sz="1400" i="1">
+              <a:defRPr sz="1200" i="1">
                 <a:solidFill>
                   <a:srgbClr val="707682"/>
                 </a:solidFill>
               </a:defRPr>
             </a:pPr>
             <a:r>
-              <a:t>arXiv:2603.02475 — autores ICMC-USP / IMPA</a:t>
+              <a:t>arXiv:2210.09943 — Maryland / Bosch / ELLIS / Tübingen — versão dez/2023</a:t>
             </a:r>
           </a:p>
         </p:txBody>
@@ -9512,14 +10304,14 @@
         </p:nvSpPr>
         <p:spPr>
           <a:xfrm>
-            <a:off x="457200" y="1463040"/>
-            <a:ext cx="11430000" cy="45720"/>
+            <a:off x="365760" y="1143000"/>
+            <a:ext cx="11521440" cy="36576"/>
           </a:xfrm>
           <a:prstGeom prst="rect">
             <a:avLst/>
           </a:prstGeom>
           <a:solidFill>
-            <a:srgbClr val="2E7D32"/>
+            <a:srgbClr val="1F2A4E"/>
           </a:solidFill>
           <a:ln>
             <a:noFill/>
@@ -9555,8 +10347,8 @@
         </p:nvSpPr>
         <p:spPr>
           <a:xfrm>
-            <a:off x="548640" y="1828800"/>
-            <a:ext cx="11064240" cy="2103120"/>
+            <a:off x="365760" y="1325880"/>
+            <a:ext cx="11521440" cy="960120"/>
           </a:xfrm>
           <a:prstGeom prst="roundRect">
             <a:avLst/>
@@ -9583,30 +10375,30 @@
           </a:fontRef>
         </p:style>
         <p:txBody>
-          <a:bodyPr rtlCol="0" anchor="ctr" wrap="square" lIns="274320" rIns="274320" tIns="137160"/>
+          <a:bodyPr rtlCol="0" anchor="ctr" wrap="square" lIns="228600" rIns="228600" tIns="73152"/>
           <a:lstStyle/>
           <a:p>
             <a:pPr algn="ctr">
-              <a:defRPr sz="1400" b="1">
+              <a:defRPr sz="1100" b="1">
                 <a:solidFill>
                   <a:srgbClr val="1F2A4E"/>
                 </a:solidFill>
               </a:defRPr>
             </a:pPr>
             <a:r>
-              <a:t>O que defende</a:t>
-            </a:r>
-          </a:p>
-          <a:p>
-            <a:pPr>
-              <a:defRPr sz="1600">
+              <a:t>Pergunta de pesquisa</a:t>
+            </a:r>
+          </a:p>
+          <a:p>
+            <a:pPr>
+              <a:defRPr sz="1200">
                 <a:solidFill>
                   <a:srgbClr val="3D424E"/>
                 </a:solidFill>
               </a:defRPr>
             </a:pPr>
             <a:r>
-              <a:t>Propõe classificador MST (ViT-Small fine-tuned) treinado em dataset STW (42 mil imagens, 3,5 mil indivíduos, MST 10 classes). Audita FairFace e reporta ausência sistêmica de MST 6-10. NÃO publica matriz cruzada MST × raça.</a:t>
+              <a:t>Bias em FR é inerente aos dados de treino ou também emerge da arquitetura escolhida? Existe arquitetura que reduza disparity sem nenhuma intervenção de dados?</a:t>
             </a:r>
           </a:p>
         </p:txBody>
@@ -9619,8 +10411,8 @@
         </p:nvSpPr>
         <p:spPr>
           <a:xfrm>
-            <a:off x="548640" y="4114800"/>
-            <a:ext cx="11064240" cy="2194560"/>
+            <a:off x="365760" y="2331720"/>
+            <a:ext cx="11521440" cy="1234440"/>
           </a:xfrm>
           <a:prstGeom prst="roundRect">
             <a:avLst/>
@@ -9628,9 +10420,9 @@
           <a:solidFill>
             <a:srgbClr val="FFFFFF"/>
           </a:solidFill>
-          <a:ln w="19050">
+          <a:ln w="12700">
             <a:solidFill>
-              <a:srgbClr val="2E7D32"/>
+              <a:srgbClr val="1F2A4E"/>
             </a:solidFill>
           </a:ln>
         </p:spPr>
@@ -9649,13 +10441,209 @@
           </a:fontRef>
         </p:style>
         <p:txBody>
-          <a:bodyPr rtlCol="0" anchor="ctr" wrap="square" lIns="274320" rIns="274320" tIns="137160"/>
+          <a:bodyPr rtlCol="0" anchor="ctr" wrap="square" lIns="228600" rIns="228600" tIns="73152"/>
           <a:lstStyle/>
           <a:p>
             <a:pPr algn="ctr">
-              <a:defRPr sz="1400" b="1">
-                <a:solidFill>
-                  <a:srgbClr val="2E7D32"/>
+              <a:defRPr sz="1100" b="1">
+                <a:solidFill>
+                  <a:srgbClr val="1F2A4E"/>
+                </a:solidFill>
+              </a:defRPr>
+            </a:pPr>
+            <a:r>
+              <a:t>Metodologia</a:t>
+            </a:r>
+          </a:p>
+          <a:p>
+            <a:pPr>
+              <a:defRPr sz="1200">
+                <a:solidFill>
+                  <a:srgbClr val="3D424E"/>
+                </a:solidFill>
+              </a:defRPr>
+            </a:pPr>
+            <a:r>
+              <a:t>Neural Architecture Search (NAS) com objetivo bi-critério: accuracy + fairness (medida por DR / EOD). Busca jointly arquitetura e hiperparâmetros sobre espaço de centenas de candidatos. Avalia em CelebA, RFW, BFW.</a:t>
+            </a:r>
+          </a:p>
+        </p:txBody>
+      </p:sp>
+      <p:sp>
+        <p:nvSpPr>
+          <p:cNvPr id="7" name="Rounded Rectangle 6"/>
+          <p:cNvSpPr/>
+          <p:nvPr/>
+        </p:nvSpPr>
+        <p:spPr>
+          <a:xfrm>
+            <a:off x="365760" y="3611880"/>
+            <a:ext cx="11521440" cy="1143000"/>
+          </a:xfrm>
+          <a:prstGeom prst="roundRect">
+            <a:avLst/>
+          </a:prstGeom>
+          <a:solidFill>
+            <a:srgbClr val="E8EAED"/>
+          </a:solidFill>
+          <a:ln>
+            <a:noFill/>
+          </a:ln>
+        </p:spPr>
+        <p:style>
+          <a:lnRef idx="1">
+            <a:schemeClr val="accent1"/>
+          </a:lnRef>
+          <a:fillRef idx="3">
+            <a:schemeClr val="accent1"/>
+          </a:fillRef>
+          <a:effectRef idx="2">
+            <a:schemeClr val="accent1"/>
+          </a:effectRef>
+          <a:fontRef idx="minor">
+            <a:schemeClr val="lt1"/>
+          </a:fontRef>
+        </p:style>
+        <p:txBody>
+          <a:bodyPr rtlCol="0" anchor="ctr" wrap="square" lIns="228600" rIns="228600" tIns="73152"/>
+          <a:lstStyle/>
+          <a:p>
+            <a:pPr algn="ctr">
+              <a:defRPr sz="1100" b="1">
+                <a:solidFill>
+                  <a:srgbClr val="1F2A4E"/>
+                </a:solidFill>
+              </a:defRPr>
+            </a:pPr>
+            <a:r>
+              <a:t>Resultados principais</a:t>
+            </a:r>
+          </a:p>
+          <a:p>
+            <a:pPr>
+              <a:defRPr sz="1200">
+                <a:solidFill>
+                  <a:srgbClr val="3D424E"/>
+                </a:solidFill>
+              </a:defRPr>
+            </a:pPr>
+            <a:r>
+              <a:t>A frente de Pareto inclui arquiteturas que dominam ResNet-50/100 e MobileNet em accuracy E fairness simultaneamente. Modificações arquiteturais sozinhas (sem dados extra, sem mitigação algorítmica) reduzem disparity em até 30%.</a:t>
+            </a:r>
+          </a:p>
+        </p:txBody>
+      </p:sp>
+      <p:sp>
+        <p:nvSpPr>
+          <p:cNvPr id="8" name="Rounded Rectangle 7"/>
+          <p:cNvSpPr/>
+          <p:nvPr/>
+        </p:nvSpPr>
+        <p:spPr>
+          <a:xfrm>
+            <a:off x="365760" y="4800600"/>
+            <a:ext cx="11521440" cy="960120"/>
+          </a:xfrm>
+          <a:prstGeom prst="roundRect">
+            <a:avLst/>
+          </a:prstGeom>
+          <a:solidFill>
+            <a:srgbClr val="FFFFFF"/>
+          </a:solidFill>
+          <a:ln w="12700">
+            <a:solidFill>
+              <a:srgbClr val="707682"/>
+            </a:solidFill>
+          </a:ln>
+        </p:spPr>
+        <p:style>
+          <a:lnRef idx="1">
+            <a:schemeClr val="accent1"/>
+          </a:lnRef>
+          <a:fillRef idx="3">
+            <a:schemeClr val="accent1"/>
+          </a:fillRef>
+          <a:effectRef idx="2">
+            <a:schemeClr val="accent1"/>
+          </a:effectRef>
+          <a:fontRef idx="minor">
+            <a:schemeClr val="lt1"/>
+          </a:fontRef>
+        </p:style>
+        <p:txBody>
+          <a:bodyPr rtlCol="0" anchor="ctr" wrap="square" lIns="228600" rIns="228600" tIns="73152"/>
+          <a:lstStyle/>
+          <a:p>
+            <a:pPr algn="ctr">
+              <a:defRPr sz="1100" b="1">
+                <a:solidFill>
+                  <a:srgbClr val="707682"/>
+                </a:solidFill>
+              </a:defRPr>
+            </a:pPr>
+            <a:r>
+              <a:t>Crítica metodológica e limitações</a:t>
+            </a:r>
+          </a:p>
+          <a:p>
+            <a:pPr>
+              <a:defRPr sz="1200">
+                <a:solidFill>
+                  <a:srgbClr val="3D424E"/>
+                </a:solidFill>
+              </a:defRPr>
+            </a:pPr>
+            <a:r>
+              <a:t>Custo computacional altíssimo (NAS proibitivo para a maioria). Arquiteturas vencedoras não têm interpretação semântica clara. Não testa em FairFace 7-class race especificamente. ConvNeXt-T não está na busca.</a:t>
+            </a:r>
+          </a:p>
+        </p:txBody>
+      </p:sp>
+      <p:sp>
+        <p:nvSpPr>
+          <p:cNvPr id="9" name="Rounded Rectangle 8"/>
+          <p:cNvSpPr/>
+          <p:nvPr/>
+        </p:nvSpPr>
+        <p:spPr>
+          <a:xfrm>
+            <a:off x="365760" y="5806440"/>
+            <a:ext cx="11521440" cy="1051560"/>
+          </a:xfrm>
+          <a:prstGeom prst="roundRect">
+            <a:avLst/>
+          </a:prstGeom>
+          <a:solidFill>
+            <a:srgbClr val="FFFFFF"/>
+          </a:solidFill>
+          <a:ln w="12700">
+            <a:solidFill>
+              <a:srgbClr val="1F2A4E"/>
+            </a:solidFill>
+          </a:ln>
+        </p:spPr>
+        <p:style>
+          <a:lnRef idx="1">
+            <a:schemeClr val="accent1"/>
+          </a:lnRef>
+          <a:fillRef idx="3">
+            <a:schemeClr val="accent1"/>
+          </a:fillRef>
+          <a:effectRef idx="2">
+            <a:schemeClr val="accent1"/>
+          </a:effectRef>
+          <a:fontRef idx="minor">
+            <a:schemeClr val="lt1"/>
+          </a:fontRef>
+        </p:style>
+        <p:txBody>
+          <a:bodyPr rtlCol="0" anchor="ctr" wrap="square" lIns="228600" rIns="228600" tIns="73152"/>
+          <a:lstStyle/>
+          <a:p>
+            <a:pPr algn="ctr">
+              <a:defRPr sz="1100" b="1">
+                <a:solidFill>
+                  <a:srgbClr val="1F2A4E"/>
                 </a:solidFill>
               </a:defRPr>
             </a:pPr>
@@ -9665,14 +10653,14 @@
           </a:p>
           <a:p>
             <a:pPr>
-              <a:defRPr sz="1600">
+              <a:defRPr sz="1200">
                 <a:solidFill>
                   <a:srgbClr val="3D424E"/>
                 </a:solidFill>
               </a:defRPr>
             </a:pPr>
             <a:r>
-              <a:t>Insumo direto do nosso pipeline: usar SkinToneNet pré-treinado em vez de treinar do zero. Nossa contribuição C2 (matriz cruzada) segue original. Economiza ~3 semanas de cronograma.</a:t>
+              <a:t>REFORÇA H2 (testar se trocar de ResNet-34 para ConvNeXt-T já reduz disparity). Justifica escolha de backbone moderno como ConvNeXt-T. Se H1 falhar mas ConvNeXt-T puro já reduzir disparity, atribuímos parte do efeito à arquitetura.</a:t>
             </a:r>
           </a:p>
         </p:txBody>
@@ -9846,8 +10834,8 @@
         </p:nvSpPr>
         <p:spPr>
           <a:xfrm>
-            <a:off x="457200" y="365760"/>
-            <a:ext cx="11430000" cy="822960"/>
+            <a:off x="365760" y="228600"/>
+            <a:ext cx="11521440" cy="640080"/>
           </a:xfrm>
           <a:prstGeom prst="rect">
             <a:avLst/>
@@ -9861,14 +10849,14 @@
           <a:lstStyle/>
           <a:p>
             <a:pPr>
-              <a:defRPr sz="2400" b="1">
+              <a:defRPr sz="2000" b="1">
                 <a:solidFill>
                   <a:srgbClr val="1F2A4E"/>
                 </a:solidFill>
               </a:defRPr>
             </a:pPr>
             <a:r>
-              <a:t>Dooley et al. (2022) — Fairer architectures make for fairer FR</a:t>
+              <a:t>Aguirre &amp; Dredze (2023) — Transferring fairness via multi-task learning</a:t>
             </a:r>
           </a:p>
         </p:txBody>
@@ -9881,8 +10869,8 @@
         </p:nvSpPr>
         <p:spPr>
           <a:xfrm>
-            <a:off x="457200" y="1051560"/>
-            <a:ext cx="11430000" cy="365760"/>
+            <a:off x="365760" y="777240"/>
+            <a:ext cx="11521440" cy="320040"/>
           </a:xfrm>
           <a:prstGeom prst="rect">
             <a:avLst/>
@@ -9896,14 +10884,14 @@
           <a:lstStyle/>
           <a:p>
             <a:pPr>
-              <a:defRPr sz="1400" i="1">
+              <a:defRPr sz="1200" i="1">
                 <a:solidFill>
                   <a:srgbClr val="707682"/>
                 </a:solidFill>
               </a:defRPr>
             </a:pPr>
             <a:r>
-              <a:t>arXiv:2210.09943 — NAS search para FR fairness</a:t>
+              <a:t>arXiv:2305.12671 — Johns Hopkins (NLP) — versão revisada abr/2024</a:t>
             </a:r>
           </a:p>
         </p:txBody>
@@ -9916,8 +10904,8 @@
         </p:nvSpPr>
         <p:spPr>
           <a:xfrm>
-            <a:off x="457200" y="1463040"/>
-            <a:ext cx="11430000" cy="45720"/>
+            <a:off x="365760" y="1143000"/>
+            <a:ext cx="11521440" cy="36576"/>
           </a:xfrm>
           <a:prstGeom prst="rect">
             <a:avLst/>
@@ -9959,8 +10947,8 @@
         </p:nvSpPr>
         <p:spPr>
           <a:xfrm>
-            <a:off x="548640" y="1828800"/>
-            <a:ext cx="11064240" cy="2103120"/>
+            <a:off x="365760" y="1325880"/>
+            <a:ext cx="11521440" cy="960120"/>
           </a:xfrm>
           <a:prstGeom prst="roundRect">
             <a:avLst/>
@@ -9987,30 +10975,30 @@
           </a:fontRef>
         </p:style>
         <p:txBody>
-          <a:bodyPr rtlCol="0" anchor="ctr" wrap="square" lIns="274320" rIns="274320" tIns="137160"/>
+          <a:bodyPr rtlCol="0" anchor="ctr" wrap="square" lIns="228600" rIns="228600" tIns="73152"/>
           <a:lstStyle/>
           <a:p>
             <a:pPr algn="ctr">
-              <a:defRPr sz="1400" b="1">
+              <a:defRPr sz="1100" b="1">
                 <a:solidFill>
                   <a:srgbClr val="1F2A4E"/>
                 </a:solidFill>
               </a:defRPr>
             </a:pPr>
             <a:r>
-              <a:t>O que defende</a:t>
-            </a:r>
-          </a:p>
-          <a:p>
-            <a:pPr>
-              <a:defRPr sz="1600">
+              <a:t>Pergunta de pesquisa</a:t>
+            </a:r>
+          </a:p>
+          <a:p>
+            <a:pPr>
+              <a:defRPr sz="1200">
                 <a:solidFill>
                   <a:srgbClr val="3D424E"/>
                 </a:solidFill>
               </a:defRPr>
             </a:pPr>
             <a:r>
-              <a:t>Argumenta que biases são inerentes a arquiteturas neurais. Faz busca de arquitetura (NAS) jointly com hiperparâmetros e produz modelos que Pareto-dominam baselines de mitigação tradicionais.</a:t>
+              <a:t>Quando demographic labels estão disponíveis apenas em uma tarefa relacionada (não na tarefa-alvo), é possível transferir fairness via multi-task learning?</a:t>
             </a:r>
           </a:p>
         </p:txBody>
@@ -10023,8 +11011,8 @@
         </p:nvSpPr>
         <p:spPr>
           <a:xfrm>
-            <a:off x="548640" y="4114800"/>
-            <a:ext cx="11064240" cy="2194560"/>
+            <a:off x="365760" y="2331720"/>
+            <a:ext cx="11521440" cy="1234440"/>
           </a:xfrm>
           <a:prstGeom prst="roundRect">
             <a:avLst/>
@@ -10032,7 +11020,7 @@
           <a:solidFill>
             <a:srgbClr val="FFFFFF"/>
           </a:solidFill>
-          <a:ln w="19050">
+          <a:ln w="12700">
             <a:solidFill>
               <a:srgbClr val="1F2A4E"/>
             </a:solidFill>
@@ -10053,30 +11041,226 @@
           </a:fontRef>
         </p:style>
         <p:txBody>
-          <a:bodyPr rtlCol="0" anchor="ctr" wrap="square" lIns="274320" rIns="274320" tIns="137160"/>
+          <a:bodyPr rtlCol="0" anchor="ctr" wrap="square" lIns="228600" rIns="228600" tIns="73152"/>
           <a:lstStyle/>
           <a:p>
             <a:pPr algn="ctr">
-              <a:defRPr sz="1400" b="1">
+              <a:defRPr sz="1100" b="1">
                 <a:solidFill>
                   <a:srgbClr val="1F2A4E"/>
                 </a:solidFill>
               </a:defRPr>
             </a:pPr>
             <a:r>
+              <a:t>Metodologia</a:t>
+            </a:r>
+          </a:p>
+          <a:p>
+            <a:pPr>
+              <a:defRPr sz="1200">
+                <a:solidFill>
+                  <a:srgbClr val="3D424E"/>
+                </a:solidFill>
+              </a:defRPr>
+            </a:pPr>
+            <a:r>
+              <a:t>Adapta single-task fairness loss para framework multi-task. Treina classificador em tarefa-alvo SEM demographic labels usando demographic labels APENAS na tarefa auxiliar. Avalia em datasets de NLP (toxicidade, sentiment) com atributos sensíveis de raça/gênero.</a:t>
+            </a:r>
+          </a:p>
+        </p:txBody>
+      </p:sp>
+      <p:sp>
+        <p:nvSpPr>
+          <p:cNvPr id="7" name="Rounded Rectangle 6"/>
+          <p:cNvSpPr/>
+          <p:nvPr/>
+        </p:nvSpPr>
+        <p:spPr>
+          <a:xfrm>
+            <a:off x="365760" y="3611880"/>
+            <a:ext cx="11521440" cy="1143000"/>
+          </a:xfrm>
+          <a:prstGeom prst="roundRect">
+            <a:avLst/>
+          </a:prstGeom>
+          <a:solidFill>
+            <a:srgbClr val="E8EAED"/>
+          </a:solidFill>
+          <a:ln>
+            <a:noFill/>
+          </a:ln>
+        </p:spPr>
+        <p:style>
+          <a:lnRef idx="1">
+            <a:schemeClr val="accent1"/>
+          </a:lnRef>
+          <a:fillRef idx="3">
+            <a:schemeClr val="accent1"/>
+          </a:fillRef>
+          <a:effectRef idx="2">
+            <a:schemeClr val="accent1"/>
+          </a:effectRef>
+          <a:fontRef idx="minor">
+            <a:schemeClr val="lt1"/>
+          </a:fontRef>
+        </p:style>
+        <p:txBody>
+          <a:bodyPr rtlCol="0" anchor="ctr" wrap="square" lIns="228600" rIns="228600" tIns="73152"/>
+          <a:lstStyle/>
+          <a:p>
+            <a:pPr algn="ctr">
+              <a:defRPr sz="1100" b="1">
+                <a:solidFill>
+                  <a:srgbClr val="1F2A4E"/>
+                </a:solidFill>
+              </a:defRPr>
+            </a:pPr>
+            <a:r>
+              <a:t>Resultados principais</a:t>
+            </a:r>
+          </a:p>
+          <a:p>
+            <a:pPr>
+              <a:defRPr sz="1200">
+                <a:solidFill>
+                  <a:srgbClr val="3D424E"/>
+                </a:solidFill>
+              </a:defRPr>
+            </a:pPr>
+            <a:r>
+              <a:t>Objetivos de fairness demográfico se transferem empiricamente para a tarefa-alvo em todos os datasets testados. Permite intersectional fairness combinando datasets com atributos demográficos diferentes (single-axis).</a:t>
+            </a:r>
+          </a:p>
+        </p:txBody>
+      </p:sp>
+      <p:sp>
+        <p:nvSpPr>
+          <p:cNvPr id="8" name="Rounded Rectangle 7"/>
+          <p:cNvSpPr/>
+          <p:nvPr/>
+        </p:nvSpPr>
+        <p:spPr>
+          <a:xfrm>
+            <a:off x="365760" y="4800600"/>
+            <a:ext cx="11521440" cy="960120"/>
+          </a:xfrm>
+          <a:prstGeom prst="roundRect">
+            <a:avLst/>
+          </a:prstGeom>
+          <a:solidFill>
+            <a:srgbClr val="FFFFFF"/>
+          </a:solidFill>
+          <a:ln w="12700">
+            <a:solidFill>
+              <a:srgbClr val="707682"/>
+            </a:solidFill>
+          </a:ln>
+        </p:spPr>
+        <p:style>
+          <a:lnRef idx="1">
+            <a:schemeClr val="accent1"/>
+          </a:lnRef>
+          <a:fillRef idx="3">
+            <a:schemeClr val="accent1"/>
+          </a:fillRef>
+          <a:effectRef idx="2">
+            <a:schemeClr val="accent1"/>
+          </a:effectRef>
+          <a:fontRef idx="minor">
+            <a:schemeClr val="lt1"/>
+          </a:fontRef>
+        </p:style>
+        <p:txBody>
+          <a:bodyPr rtlCol="0" anchor="ctr" wrap="square" lIns="228600" rIns="228600" tIns="73152"/>
+          <a:lstStyle/>
+          <a:p>
+            <a:pPr algn="ctr">
+              <a:defRPr sz="1100" b="1">
+                <a:solidFill>
+                  <a:srgbClr val="707682"/>
+                </a:solidFill>
+              </a:defRPr>
+            </a:pPr>
+            <a:r>
+              <a:t>Crítica metodológica e limitações</a:t>
+            </a:r>
+          </a:p>
+          <a:p>
+            <a:pPr>
+              <a:defRPr sz="1200">
+                <a:solidFill>
+                  <a:srgbClr val="3D424E"/>
+                </a:solidFill>
+              </a:defRPr>
+            </a:pPr>
+            <a:r>
+              <a:t>Experimentos em NLP — não validados ainda em CV/face. Magnitude da transferência depende de quão correlacionadas estão as tarefas auxiliar e alvo. Não testa robustez sob distribution shift.</a:t>
+            </a:r>
+          </a:p>
+        </p:txBody>
+      </p:sp>
+      <p:sp>
+        <p:nvSpPr>
+          <p:cNvPr id="9" name="Rounded Rectangle 8"/>
+          <p:cNvSpPr/>
+          <p:nvPr/>
+        </p:nvSpPr>
+        <p:spPr>
+          <a:xfrm>
+            <a:off x="365760" y="5806440"/>
+            <a:ext cx="11521440" cy="1051560"/>
+          </a:xfrm>
+          <a:prstGeom prst="roundRect">
+            <a:avLst/>
+          </a:prstGeom>
+          <a:solidFill>
+            <a:srgbClr val="FFFFFF"/>
+          </a:solidFill>
+          <a:ln w="12700">
+            <a:solidFill>
+              <a:srgbClr val="1F2A4E"/>
+            </a:solidFill>
+          </a:ln>
+        </p:spPr>
+        <p:style>
+          <a:lnRef idx="1">
+            <a:schemeClr val="accent1"/>
+          </a:lnRef>
+          <a:fillRef idx="3">
+            <a:schemeClr val="accent1"/>
+          </a:fillRef>
+          <a:effectRef idx="2">
+            <a:schemeClr val="accent1"/>
+          </a:effectRef>
+          <a:fontRef idx="minor">
+            <a:schemeClr val="lt1"/>
+          </a:fontRef>
+        </p:style>
+        <p:txBody>
+          <a:bodyPr rtlCol="0" anchor="ctr" wrap="square" lIns="228600" rIns="228600" tIns="73152"/>
+          <a:lstStyle/>
+          <a:p>
+            <a:pPr algn="ctr">
+              <a:defRPr sz="1100" b="1">
+                <a:solidFill>
+                  <a:srgbClr val="1F2A4E"/>
+                </a:solidFill>
+              </a:defRPr>
+            </a:pPr>
+            <a:r>
               <a:t>Impacto na nossa tese</a:t>
             </a:r>
           </a:p>
           <a:p>
             <a:pPr>
-              <a:defRPr sz="1600">
+              <a:defRPr sz="1200">
                 <a:solidFill>
                   <a:srgbClr val="3D424E"/>
                 </a:solidFill>
               </a:defRPr>
             </a:pPr>
             <a:r>
-              <a:t>Reforça nossa H2: trocar a arquitetura por si só importa. Valida escolha de ConvNeXt-T como backbone moderno. Se H1 falhar mas ConvNeXt-T puro já reduzir disparity, parte do efeito é arquitetural.</a:t>
+              <a:t>REFORÇO EMPÍRICO do princípio teórico do LAFTR. Suporta etapa 3 (race + tom auxiliar) e etapa 5 (transferência para FR) do pipeline. Princípio é independente da modalidade, mas precisamos validar empiricamente em face.</a:t>
             </a:r>
           </a:p>
         </p:txBody>
@@ -10107,8 +11291,8 @@
         </p:nvSpPr>
         <p:spPr>
           <a:xfrm>
-            <a:off x="457200" y="365760"/>
-            <a:ext cx="11430000" cy="822960"/>
+            <a:off x="365760" y="228600"/>
+            <a:ext cx="11521440" cy="640080"/>
           </a:xfrm>
           <a:prstGeom prst="rect">
             <a:avLst/>
@@ -10122,14 +11306,14 @@
           <a:lstStyle/>
           <a:p>
             <a:pPr>
-              <a:defRPr sz="2400" b="1">
+              <a:defRPr sz="2000" b="1">
                 <a:solidFill>
                   <a:srgbClr val="1F2A4E"/>
                 </a:solidFill>
               </a:defRPr>
             </a:pPr>
             <a:r>
-              <a:t>Aguirre &amp; Dredze (2023) — Transferring fairness via multi-task</a:t>
+              <a:t>Kolla &amp; Savadamuthu (2022/23) — Impact of racial distribution in FR training</a:t>
             </a:r>
           </a:p>
         </p:txBody>
@@ -10142,8 +11326,8 @@
         </p:nvSpPr>
         <p:spPr>
           <a:xfrm>
-            <a:off x="457200" y="1051560"/>
-            <a:ext cx="11430000" cy="365760"/>
+            <a:off x="365760" y="777240"/>
+            <a:ext cx="11521440" cy="320040"/>
           </a:xfrm>
           <a:prstGeom prst="rect">
             <a:avLst/>
@@ -10157,14 +11341,14 @@
           <a:lstStyle/>
           <a:p>
             <a:pPr>
-              <a:defRPr sz="1400" i="1">
+              <a:defRPr sz="1200" i="1">
                 <a:solidFill>
                   <a:srgbClr val="707682"/>
                 </a:solidFill>
               </a:defRPr>
             </a:pPr>
             <a:r>
-              <a:t>arXiv:2305.12671 — Johns Hopkins</a:t>
+              <a:t>arXiv:2211.14498 — WACVW 2023 (IEEE/CVF Winter Conf. on Apps. of CV Workshops)</a:t>
             </a:r>
           </a:p>
         </p:txBody>
@@ -10177,8 +11361,8 @@
         </p:nvSpPr>
         <p:spPr>
           <a:xfrm>
-            <a:off x="457200" y="1463040"/>
-            <a:ext cx="11430000" cy="45720"/>
+            <a:off x="365760" y="1143000"/>
+            <a:ext cx="11521440" cy="36576"/>
           </a:xfrm>
           <a:prstGeom prst="rect">
             <a:avLst/>
@@ -10220,8 +11404,8 @@
         </p:nvSpPr>
         <p:spPr>
           <a:xfrm>
-            <a:off x="548640" y="1828800"/>
-            <a:ext cx="11064240" cy="2103120"/>
+            <a:off x="365760" y="1325880"/>
+            <a:ext cx="11521440" cy="960120"/>
           </a:xfrm>
           <a:prstGeom prst="roundRect">
             <a:avLst/>
@@ -10248,30 +11432,30 @@
           </a:fontRef>
         </p:style>
         <p:txBody>
-          <a:bodyPr rtlCol="0" anchor="ctr" wrap="square" lIns="274320" rIns="274320" tIns="137160"/>
+          <a:bodyPr rtlCol="0" anchor="ctr" wrap="square" lIns="228600" rIns="228600" tIns="73152"/>
           <a:lstStyle/>
           <a:p>
             <a:pPr algn="ctr">
-              <a:defRPr sz="1400" b="1">
+              <a:defRPr sz="1100" b="1">
                 <a:solidFill>
                   <a:srgbClr val="1F2A4E"/>
                 </a:solidFill>
               </a:defRPr>
             </a:pPr>
             <a:r>
-              <a:t>O que defende</a:t>
-            </a:r>
-          </a:p>
-          <a:p>
-            <a:pPr>
-              <a:defRPr sz="1600">
+              <a:t>Pergunta de pesquisa</a:t>
+            </a:r>
+          </a:p>
+          <a:p>
+            <a:pPr>
+              <a:defRPr sz="1200">
                 <a:solidFill>
                   <a:srgbClr val="3D424E"/>
                 </a:solidFill>
               </a:defRPr>
             </a:pPr>
             <a:r>
-              <a:t>Adapta uma fairness loss single-task para um framework multi-task e demonstra empiricamente que objetivos de fairness demográfico SE TRANSFEREM entre tarefas que compartilham representação. Domínio dos experimentos é NLP.</a:t>
+              <a:t>Balancear a distribuição racial no dataset de treino é SUFICIENTE para eliminar disparities raciais em face recognition?</a:t>
             </a:r>
           </a:p>
         </p:txBody>
@@ -10284,8 +11468,8 @@
         </p:nvSpPr>
         <p:spPr>
           <a:xfrm>
-            <a:off x="548640" y="4114800"/>
-            <a:ext cx="11064240" cy="2194560"/>
+            <a:off x="365760" y="2331720"/>
+            <a:ext cx="11521440" cy="1234440"/>
           </a:xfrm>
           <a:prstGeom prst="roundRect">
             <a:avLst/>
@@ -10293,7 +11477,7 @@
           <a:solidFill>
             <a:srgbClr val="FFFFFF"/>
           </a:solidFill>
-          <a:ln w="19050">
+          <a:ln w="12700">
             <a:solidFill>
               <a:srgbClr val="1F2A4E"/>
             </a:solidFill>
@@ -10314,30 +11498,226 @@
           </a:fontRef>
         </p:style>
         <p:txBody>
-          <a:bodyPr rtlCol="0" anchor="ctr" wrap="square" lIns="274320" rIns="274320" tIns="137160"/>
+          <a:bodyPr rtlCol="0" anchor="ctr" wrap="square" lIns="228600" rIns="228600" tIns="73152"/>
           <a:lstStyle/>
           <a:p>
             <a:pPr algn="ctr">
-              <a:defRPr sz="1400" b="1">
+              <a:defRPr sz="1100" b="1">
                 <a:solidFill>
                   <a:srgbClr val="1F2A4E"/>
                 </a:solidFill>
               </a:defRPr>
             </a:pPr>
             <a:r>
+              <a:t>Metodologia</a:t>
+            </a:r>
+          </a:p>
+          <a:p>
+            <a:pPr>
+              <a:defRPr sz="1200">
+                <a:solidFill>
+                  <a:srgbClr val="3D424E"/>
+                </a:solidFill>
+              </a:defRPr>
+            </a:pPr>
+            <a:r>
+              <a:t>Treina ArcFace em variantes do dataset MS1MV2 com proporções variáveis de raças (uniforme, skewed-toward-Black, skewed-toward-White). Introduz métrica de 'racial gradation' para medir correlação intra/inter-classe. Avalia em RFW.</a:t>
+            </a:r>
+          </a:p>
+        </p:txBody>
+      </p:sp>
+      <p:sp>
+        <p:nvSpPr>
+          <p:cNvPr id="7" name="Rounded Rectangle 6"/>
+          <p:cNvSpPr/>
+          <p:nvPr/>
+        </p:nvSpPr>
+        <p:spPr>
+          <a:xfrm>
+            <a:off x="365760" y="3611880"/>
+            <a:ext cx="11521440" cy="1143000"/>
+          </a:xfrm>
+          <a:prstGeom prst="roundRect">
+            <a:avLst/>
+          </a:prstGeom>
+          <a:solidFill>
+            <a:srgbClr val="E8EAED"/>
+          </a:solidFill>
+          <a:ln>
+            <a:noFill/>
+          </a:ln>
+        </p:spPr>
+        <p:style>
+          <a:lnRef idx="1">
+            <a:schemeClr val="accent1"/>
+          </a:lnRef>
+          <a:fillRef idx="3">
+            <a:schemeClr val="accent1"/>
+          </a:fillRef>
+          <a:effectRef idx="2">
+            <a:schemeClr val="accent1"/>
+          </a:effectRef>
+          <a:fontRef idx="minor">
+            <a:schemeClr val="lt1"/>
+          </a:fontRef>
+        </p:style>
+        <p:txBody>
+          <a:bodyPr rtlCol="0" anchor="ctr" wrap="square" lIns="228600" rIns="228600" tIns="73152"/>
+          <a:lstStyle/>
+          <a:p>
+            <a:pPr algn="ctr">
+              <a:defRPr sz="1100" b="1">
+                <a:solidFill>
+                  <a:srgbClr val="1F2A4E"/>
+                </a:solidFill>
+              </a:defRPr>
+            </a:pPr>
+            <a:r>
+              <a:t>Resultados principais</a:t>
+            </a:r>
+          </a:p>
+          <a:p>
+            <a:pPr>
+              <a:defRPr sz="1200">
+                <a:solidFill>
+                  <a:srgbClr val="3D424E"/>
+                </a:solidFill>
+              </a:defRPr>
+            </a:pPr>
+            <a:r>
+              <a:t>Distribuição uniforme de raças no treino NÃO garante FR sem viés. Skewed-toward-Black supera uniforme para grupo Black. Qualidade da imagem (resolução, iluminação) introduz disparity adicional que balanceamento não captura.</a:t>
+            </a:r>
+          </a:p>
+        </p:txBody>
+      </p:sp>
+      <p:sp>
+        <p:nvSpPr>
+          <p:cNvPr id="8" name="Rounded Rectangle 7"/>
+          <p:cNvSpPr/>
+          <p:nvPr/>
+        </p:nvSpPr>
+        <p:spPr>
+          <a:xfrm>
+            <a:off x="365760" y="4800600"/>
+            <a:ext cx="11521440" cy="960120"/>
+          </a:xfrm>
+          <a:prstGeom prst="roundRect">
+            <a:avLst/>
+          </a:prstGeom>
+          <a:solidFill>
+            <a:srgbClr val="FFFFFF"/>
+          </a:solidFill>
+          <a:ln w="12700">
+            <a:solidFill>
+              <a:srgbClr val="707682"/>
+            </a:solidFill>
+          </a:ln>
+        </p:spPr>
+        <p:style>
+          <a:lnRef idx="1">
+            <a:schemeClr val="accent1"/>
+          </a:lnRef>
+          <a:fillRef idx="3">
+            <a:schemeClr val="accent1"/>
+          </a:fillRef>
+          <a:effectRef idx="2">
+            <a:schemeClr val="accent1"/>
+          </a:effectRef>
+          <a:fontRef idx="minor">
+            <a:schemeClr val="lt1"/>
+          </a:fontRef>
+        </p:style>
+        <p:txBody>
+          <a:bodyPr rtlCol="0" anchor="ctr" wrap="square" lIns="228600" rIns="228600" tIns="73152"/>
+          <a:lstStyle/>
+          <a:p>
+            <a:pPr algn="ctr">
+              <a:defRPr sz="1100" b="1">
+                <a:solidFill>
+                  <a:srgbClr val="707682"/>
+                </a:solidFill>
+              </a:defRPr>
+            </a:pPr>
+            <a:r>
+              <a:t>Crítica metodológica e limitações</a:t>
+            </a:r>
+          </a:p>
+          <a:p>
+            <a:pPr>
+              <a:defRPr sz="1200">
+                <a:solidFill>
+                  <a:srgbClr val="3D424E"/>
+                </a:solidFill>
+              </a:defRPr>
+            </a:pPr>
+            <a:r>
+              <a:t>Workshop paper (revisão menos profunda). Foco em ArcFace específico — outras losses podem se comportar diferente. Não compara contra intervenções arquiteturais.</a:t>
+            </a:r>
+          </a:p>
+        </p:txBody>
+      </p:sp>
+      <p:sp>
+        <p:nvSpPr>
+          <p:cNvPr id="9" name="Rounded Rectangle 8"/>
+          <p:cNvSpPr/>
+          <p:nvPr/>
+        </p:nvSpPr>
+        <p:spPr>
+          <a:xfrm>
+            <a:off x="365760" y="5806440"/>
+            <a:ext cx="11521440" cy="1051560"/>
+          </a:xfrm>
+          <a:prstGeom prst="roundRect">
+            <a:avLst/>
+          </a:prstGeom>
+          <a:solidFill>
+            <a:srgbClr val="FFFFFF"/>
+          </a:solidFill>
+          <a:ln w="12700">
+            <a:solidFill>
+              <a:srgbClr val="1F2A4E"/>
+            </a:solidFill>
+          </a:ln>
+        </p:spPr>
+        <p:style>
+          <a:lnRef idx="1">
+            <a:schemeClr val="accent1"/>
+          </a:lnRef>
+          <a:fillRef idx="3">
+            <a:schemeClr val="accent1"/>
+          </a:fillRef>
+          <a:effectRef idx="2">
+            <a:schemeClr val="accent1"/>
+          </a:effectRef>
+          <a:fontRef idx="minor">
+            <a:schemeClr val="lt1"/>
+          </a:fontRef>
+        </p:style>
+        <p:txBody>
+          <a:bodyPr rtlCol="0" anchor="ctr" wrap="square" lIns="228600" rIns="228600" tIns="73152"/>
+          <a:lstStyle/>
+          <a:p>
+            <a:pPr algn="ctr">
+              <a:defRPr sz="1100" b="1">
+                <a:solidFill>
+                  <a:srgbClr val="1F2A4E"/>
+                </a:solidFill>
+              </a:defRPr>
+            </a:pPr>
+            <a:r>
               <a:t>Impacto na nossa tese</a:t>
             </a:r>
           </a:p>
           <a:p>
             <a:pPr>
-              <a:defRPr sz="1600">
+              <a:defRPr sz="1200">
                 <a:solidFill>
                   <a:srgbClr val="3D424E"/>
                 </a:solidFill>
               </a:defRPr>
             </a:pPr>
             <a:r>
-              <a:t>Reforço empírico do princípio teórico do LAFTR (Madras 2018). Fortalece as etapas 3 e 5 do pipeline (race classifier condicionado e extensão para FR).</a:t>
+              <a:t>JUSTIFICA INTERVENÇÃO ARQUITETURAL além de balanceamento de dados. FairFace JÁ é balanceado, e o gap Latinx persiste — coerente com nossa tese de que precisamos do FiLM-conditioning. Reforça argumento contra resolver fairness só com dados.</a:t>
             </a:r>
           </a:p>
         </p:txBody>
@@ -10368,8 +11748,8 @@
         </p:nvSpPr>
         <p:spPr>
           <a:xfrm>
-            <a:off x="457200" y="365760"/>
-            <a:ext cx="11430000" cy="822960"/>
+            <a:off x="365760" y="228600"/>
+            <a:ext cx="11521440" cy="640080"/>
           </a:xfrm>
           <a:prstGeom prst="rect">
             <a:avLst/>
@@ -10383,14 +11763,14 @@
           <a:lstStyle/>
           <a:p>
             <a:pPr>
-              <a:defRPr sz="2400" b="1">
+              <a:defRPr sz="2000" b="1">
                 <a:solidFill>
                   <a:srgbClr val="1F2A4E"/>
                 </a:solidFill>
               </a:defRPr>
             </a:pPr>
             <a:r>
-              <a:t>Kolla &amp; Savadamuthu (2022) — Impact of racial distribution in training</a:t>
+              <a:t>Liu et al. (2025) — BNMR: Bayesian Network meta-learning para fairness</a:t>
             </a:r>
           </a:p>
         </p:txBody>
@@ -10403,8 +11783,8 @@
         </p:nvSpPr>
         <p:spPr>
           <a:xfrm>
-            <a:off x="457200" y="1051560"/>
-            <a:ext cx="11430000" cy="365760"/>
+            <a:off x="365760" y="777240"/>
+            <a:ext cx="11521440" cy="320040"/>
           </a:xfrm>
           <a:prstGeom prst="rect">
             <a:avLst/>
@@ -10418,14 +11798,14 @@
           <a:lstStyle/>
           <a:p>
             <a:pPr>
-              <a:defRPr sz="1400" i="1">
+              <a:defRPr sz="1200" i="1">
                 <a:solidFill>
                   <a:srgbClr val="707682"/>
                 </a:solidFill>
               </a:defRPr>
             </a:pPr>
             <a:r>
-              <a:t>arXiv:2211.14498 — WACVW 2023 (IEEE/CVF)</a:t>
+              <a:t>arXiv:2505.01699 — ACM FAccT 2025 (top venue ética AI)</a:t>
             </a:r>
           </a:p>
         </p:txBody>
@@ -10438,8 +11818,8 @@
         </p:nvSpPr>
         <p:spPr>
           <a:xfrm>
-            <a:off x="457200" y="1463040"/>
-            <a:ext cx="11430000" cy="45720"/>
+            <a:off x="365760" y="1143000"/>
+            <a:ext cx="11521440" cy="36576"/>
           </a:xfrm>
           <a:prstGeom prst="rect">
             <a:avLst/>
@@ -10481,8 +11861,8 @@
         </p:nvSpPr>
         <p:spPr>
           <a:xfrm>
-            <a:off x="548640" y="1828800"/>
-            <a:ext cx="11064240" cy="2103120"/>
+            <a:off x="365760" y="1325880"/>
+            <a:ext cx="11521440" cy="960120"/>
           </a:xfrm>
           <a:prstGeom prst="roundRect">
             <a:avLst/>
@@ -10509,30 +11889,30 @@
           </a:fontRef>
         </p:style>
         <p:txBody>
-          <a:bodyPr rtlCol="0" anchor="ctr" wrap="square" lIns="274320" rIns="274320" tIns="137160"/>
+          <a:bodyPr rtlCol="0" anchor="ctr" wrap="square" lIns="228600" rIns="228600" tIns="73152"/>
           <a:lstStyle/>
           <a:p>
             <a:pPr algn="ctr">
-              <a:defRPr sz="1400" b="1">
+              <a:defRPr sz="1100" b="1">
                 <a:solidFill>
                   <a:srgbClr val="1F2A4E"/>
                 </a:solidFill>
               </a:defRPr>
             </a:pPr>
             <a:r>
-              <a:t>O que defende</a:t>
-            </a:r>
-          </a:p>
-          <a:p>
-            <a:pPr>
-              <a:defRPr sz="1600">
+              <a:t>Pergunta de pesquisa</a:t>
+            </a:r>
+          </a:p>
+          <a:p>
+            <a:pPr>
+              <a:defRPr sz="1200">
                 <a:solidFill>
                   <a:srgbClr val="3D424E"/>
                 </a:solidFill>
               </a:defRPr>
             </a:pPr>
             <a:r>
-              <a:t>Investiga o efeito da distribuição racial nos dados de treino sobre disparities de face recognition. Conclui que distribuição uniforme de raças NO TREINO sozinha não garante FR sem viés.</a:t>
+              <a:t>É possível mitigar bias em face attribute classification de forma adaptativa, sem hiperparâmetros de fairness fixos a priori?</a:t>
             </a:r>
           </a:p>
         </p:txBody>
@@ -10545,8 +11925,8 @@
         </p:nvSpPr>
         <p:spPr>
           <a:xfrm>
-            <a:off x="548640" y="4114800"/>
-            <a:ext cx="11064240" cy="2194560"/>
+            <a:off x="365760" y="2331720"/>
+            <a:ext cx="11521440" cy="1234440"/>
           </a:xfrm>
           <a:prstGeom prst="roundRect">
             <a:avLst/>
@@ -10554,7 +11934,7 @@
           <a:solidFill>
             <a:srgbClr val="FFFFFF"/>
           </a:solidFill>
-          <a:ln w="19050">
+          <a:ln w="12700">
             <a:solidFill>
               <a:srgbClr val="1F2A4E"/>
             </a:solidFill>
@@ -10575,175 +11955,44 @@
           </a:fontRef>
         </p:style>
         <p:txBody>
-          <a:bodyPr rtlCol="0" anchor="ctr" wrap="square" lIns="274320" rIns="274320" tIns="137160"/>
+          <a:bodyPr rtlCol="0" anchor="ctr" wrap="square" lIns="228600" rIns="228600" tIns="73152"/>
           <a:lstStyle/>
           <a:p>
             <a:pPr algn="ctr">
-              <a:defRPr sz="1400" b="1">
+              <a:defRPr sz="1100" b="1">
                 <a:solidFill>
                   <a:srgbClr val="1F2A4E"/>
                 </a:solidFill>
               </a:defRPr>
             </a:pPr>
             <a:r>
-              <a:t>Impacto na nossa tese</a:t>
-            </a:r>
-          </a:p>
-          <a:p>
-            <a:pPr>
-              <a:defRPr sz="1600">
+              <a:t>Metodologia</a:t>
+            </a:r>
+          </a:p>
+          <a:p>
+            <a:pPr>
+              <a:defRPr sz="1200">
                 <a:solidFill>
                   <a:srgbClr val="3D424E"/>
                 </a:solidFill>
               </a:defRPr>
             </a:pPr>
             <a:r>
-              <a:t>Reforça necessidade de intervenção arquitetural além de balanceamento de dados. FairFace já é balanceado e o gap Latinx persiste — coerente com a tese de que precisamos do FiLM-conditioning.</a:t>
-            </a:r>
-          </a:p>
-        </p:txBody>
-      </p:sp>
-    </p:spTree>
-  </p:cSld>
-  <p:clrMapOvr>
-    <a:masterClrMapping/>
-  </p:clrMapOvr>
-</p:sld>
-</file>
-
-<file path=ppt/slides/slide33.xml><?xml version="1.0" encoding="utf-8"?>
-<p:sld xmlns:a="http://schemas.openxmlformats.org/drawingml/2006/main" xmlns:p="http://schemas.openxmlformats.org/presentationml/2006/main" xmlns:r="http://schemas.openxmlformats.org/officeDocument/2006/relationships">
-  <p:cSld>
-    <p:spTree>
-      <p:nvGrpSpPr>
-        <p:cNvPr id="1" name=""/>
-        <p:cNvGrpSpPr/>
-        <p:nvPr/>
-      </p:nvGrpSpPr>
-      <p:grpSpPr/>
-      <p:sp>
-        <p:nvSpPr>
-          <p:cNvPr id="2" name="TextBox 1"/>
-          <p:cNvSpPr txBox="1"/>
-          <p:nvPr/>
-        </p:nvSpPr>
-        <p:spPr>
-          <a:xfrm>
-            <a:off x="457200" y="365760"/>
-            <a:ext cx="11430000" cy="822960"/>
-          </a:xfrm>
-          <a:prstGeom prst="rect">
-            <a:avLst/>
-          </a:prstGeom>
-          <a:noFill/>
-        </p:spPr>
-        <p:txBody>
-          <a:bodyPr wrap="none">
-            <a:spAutoFit/>
-          </a:bodyPr>
-          <a:lstStyle/>
-          <a:p>
-            <a:pPr>
-              <a:defRPr sz="2400" b="1">
-                <a:solidFill>
-                  <a:srgbClr val="1F2A4E"/>
-                </a:solidFill>
-              </a:defRPr>
-            </a:pPr>
-            <a:r>
-              <a:t>Liu et al. (2025) — BNMR Bayesian meta-learning</a:t>
-            </a:r>
-          </a:p>
-        </p:txBody>
-      </p:sp>
-      <p:sp>
-        <p:nvSpPr>
-          <p:cNvPr id="3" name="TextBox 2"/>
-          <p:cNvSpPr txBox="1"/>
-          <p:nvPr/>
-        </p:nvSpPr>
-        <p:spPr>
-          <a:xfrm>
-            <a:off x="457200" y="1051560"/>
-            <a:ext cx="11430000" cy="365760"/>
-          </a:xfrm>
-          <a:prstGeom prst="rect">
-            <a:avLst/>
-          </a:prstGeom>
-          <a:noFill/>
-        </p:spPr>
-        <p:txBody>
-          <a:bodyPr wrap="none">
-            <a:spAutoFit/>
-          </a:bodyPr>
-          <a:lstStyle/>
-          <a:p>
-            <a:pPr>
-              <a:defRPr sz="1400" i="1">
-                <a:solidFill>
-                  <a:srgbClr val="707682"/>
-                </a:solidFill>
-              </a:defRPr>
-            </a:pPr>
-            <a:r>
-              <a:t>arXiv:2505.01699 — ACM FAccT 2025</a:t>
-            </a:r>
-          </a:p>
-        </p:txBody>
-      </p:sp>
-      <p:sp>
-        <p:nvSpPr>
-          <p:cNvPr id="4" name="Rectangle 3"/>
+              <a:t>BNMR (Bayesian Network-informed Meta Reweighting): rede bayesiana modela dependências entre atributos faciais (componentes) e calibra meta-learning de sample reweighting durante treino. Tracking dinâmico de viés do modelo em tempo real.</a:t>
+            </a:r>
+          </a:p>
+        </p:txBody>
+      </p:sp>
+      <p:sp>
+        <p:nvSpPr>
+          <p:cNvPr id="7" name="Rounded Rectangle 6"/>
           <p:cNvSpPr/>
           <p:nvPr/>
         </p:nvSpPr>
         <p:spPr>
           <a:xfrm>
-            <a:off x="457200" y="1463040"/>
-            <a:ext cx="11430000" cy="45720"/>
-          </a:xfrm>
-          <a:prstGeom prst="rect">
-            <a:avLst/>
-          </a:prstGeom>
-          <a:solidFill>
-            <a:srgbClr val="1F2A4E"/>
-          </a:solidFill>
-          <a:ln>
-            <a:noFill/>
-          </a:ln>
-        </p:spPr>
-        <p:style>
-          <a:lnRef idx="1">
-            <a:schemeClr val="accent1"/>
-          </a:lnRef>
-          <a:fillRef idx="3">
-            <a:schemeClr val="accent1"/>
-          </a:fillRef>
-          <a:effectRef idx="2">
-            <a:schemeClr val="accent1"/>
-          </a:effectRef>
-          <a:fontRef idx="minor">
-            <a:schemeClr val="lt1"/>
-          </a:fontRef>
-        </p:style>
-        <p:txBody>
-          <a:bodyPr rtlCol="0" anchor="ctr"/>
-          <a:lstStyle/>
-          <a:p>
-            <a:pPr algn="ctr"/>
-          </a:p>
-        </p:txBody>
-      </p:sp>
-      <p:sp>
-        <p:nvSpPr>
-          <p:cNvPr id="5" name="Rounded Rectangle 4"/>
-          <p:cNvSpPr/>
-          <p:nvPr/>
-        </p:nvSpPr>
-        <p:spPr>
-          <a:xfrm>
-            <a:off x="548640" y="1828800"/>
-            <a:ext cx="11064240" cy="2103120"/>
+            <a:off x="365760" y="3611880"/>
+            <a:ext cx="11521440" cy="1143000"/>
           </a:xfrm>
           <a:prstGeom prst="roundRect">
             <a:avLst/>
@@ -10770,44 +12019,44 @@
           </a:fontRef>
         </p:style>
         <p:txBody>
-          <a:bodyPr rtlCol="0" anchor="ctr" wrap="square" lIns="274320" rIns="274320" tIns="137160"/>
+          <a:bodyPr rtlCol="0" anchor="ctr" wrap="square" lIns="228600" rIns="228600" tIns="73152"/>
           <a:lstStyle/>
           <a:p>
             <a:pPr algn="ctr">
-              <a:defRPr sz="1400" b="1">
+              <a:defRPr sz="1100" b="1">
                 <a:solidFill>
                   <a:srgbClr val="1F2A4E"/>
                 </a:solidFill>
               </a:defRPr>
             </a:pPr>
             <a:r>
-              <a:t>O que defende</a:t>
-            </a:r>
-          </a:p>
-          <a:p>
-            <a:pPr>
-              <a:defRPr sz="1600">
+              <a:t>Resultados principais</a:t>
+            </a:r>
+          </a:p>
+          <a:p>
+            <a:pPr>
+              <a:defRPr sz="1200">
                 <a:solidFill>
                   <a:srgbClr val="3D424E"/>
                 </a:solidFill>
               </a:defRPr>
             </a:pPr>
             <a:r>
-              <a:t>Propõe BNMR (Bayesian Network-informed Meta Reweighting): uma rede bayesiana calibra meta-learning de reweighting de amostras durante treino, tracking de viés do modelo em tempo real.</a:t>
-            </a:r>
-          </a:p>
-        </p:txBody>
-      </p:sp>
-      <p:sp>
-        <p:nvSpPr>
-          <p:cNvPr id="6" name="Rounded Rectangle 5"/>
+              <a:t>Supera baselines (FSCL+, Group DRO, AdvDebias) em CelebA em métricas de fairness DEMOGRAPHIC PARITY e EQUAL OPPORTUNITY. Permite calibração adaptativa do trade-off accuracy×fairness sem grid search.</a:t>
+            </a:r>
+          </a:p>
+        </p:txBody>
+      </p:sp>
+      <p:sp>
+        <p:nvSpPr>
+          <p:cNvPr id="8" name="Rounded Rectangle 7"/>
           <p:cNvSpPr/>
           <p:nvPr/>
         </p:nvSpPr>
         <p:spPr>
           <a:xfrm>
-            <a:off x="548640" y="4114800"/>
-            <a:ext cx="11064240" cy="2194560"/>
+            <a:off x="365760" y="4800600"/>
+            <a:ext cx="11521440" cy="960120"/>
           </a:xfrm>
           <a:prstGeom prst="roundRect">
             <a:avLst/>
@@ -10815,9 +12064,9 @@
           <a:solidFill>
             <a:srgbClr val="FFFFFF"/>
           </a:solidFill>
-          <a:ln w="19050">
+          <a:ln w="12700">
             <a:solidFill>
-              <a:srgbClr val="1F2A4E"/>
+              <a:srgbClr val="707682"/>
             </a:solidFill>
           </a:ln>
         </p:spPr>
@@ -10836,11 +12085,77 @@
           </a:fontRef>
         </p:style>
         <p:txBody>
-          <a:bodyPr rtlCol="0" anchor="ctr" wrap="square" lIns="274320" rIns="274320" tIns="137160"/>
+          <a:bodyPr rtlCol="0" anchor="ctr" wrap="square" lIns="228600" rIns="228600" tIns="73152"/>
           <a:lstStyle/>
           <a:p>
             <a:pPr algn="ctr">
-              <a:defRPr sz="1400" b="1">
+              <a:defRPr sz="1100" b="1">
+                <a:solidFill>
+                  <a:srgbClr val="707682"/>
+                </a:solidFill>
+              </a:defRPr>
+            </a:pPr>
+            <a:r>
+              <a:t>Crítica metodológica e limitações</a:t>
+            </a:r>
+          </a:p>
+          <a:p>
+            <a:pPr>
+              <a:defRPr sz="1200">
+                <a:solidFill>
+                  <a:srgbClr val="3D424E"/>
+                </a:solidFill>
+              </a:defRPr>
+            </a:pPr>
+            <a:r>
+              <a:t>Custo computacional adicional da rede bayesiana (precisa ser treinada). Testado em CelebA, não em FairFace race 7-class. Pressupõe que o usuário define corretamente a estrutura causal entre atributos.</a:t>
+            </a:r>
+          </a:p>
+        </p:txBody>
+      </p:sp>
+      <p:sp>
+        <p:nvSpPr>
+          <p:cNvPr id="9" name="Rounded Rectangle 8"/>
+          <p:cNvSpPr/>
+          <p:nvPr/>
+        </p:nvSpPr>
+        <p:spPr>
+          <a:xfrm>
+            <a:off x="365760" y="5806440"/>
+            <a:ext cx="11521440" cy="1051560"/>
+          </a:xfrm>
+          <a:prstGeom prst="roundRect">
+            <a:avLst/>
+          </a:prstGeom>
+          <a:solidFill>
+            <a:srgbClr val="FFFFFF"/>
+          </a:solidFill>
+          <a:ln w="12700">
+            <a:solidFill>
+              <a:srgbClr val="1F2A4E"/>
+            </a:solidFill>
+          </a:ln>
+        </p:spPr>
+        <p:style>
+          <a:lnRef idx="1">
+            <a:schemeClr val="accent1"/>
+          </a:lnRef>
+          <a:fillRef idx="3">
+            <a:schemeClr val="accent1"/>
+          </a:fillRef>
+          <a:effectRef idx="2">
+            <a:schemeClr val="accent1"/>
+          </a:effectRef>
+          <a:fontRef idx="minor">
+            <a:schemeClr val="lt1"/>
+          </a:fontRef>
+        </p:style>
+        <p:txBody>
+          <a:bodyPr rtlCol="0" anchor="ctr" wrap="square" lIns="228600" rIns="228600" tIns="73152"/>
+          <a:lstStyle/>
+          <a:p>
+            <a:pPr algn="ctr">
+              <a:defRPr sz="1100" b="1">
                 <a:solidFill>
                   <a:srgbClr val="1F2A4E"/>
                 </a:solidFill>
@@ -10852,14 +12167,14 @@
           </a:p>
           <a:p>
             <a:pPr>
-              <a:defRPr sz="1600">
+              <a:defRPr sz="1200">
                 <a:solidFill>
                   <a:srgbClr val="3D424E"/>
                 </a:solidFill>
               </a:defRPr>
             </a:pPr>
             <a:r>
-              <a:t>Baseline competitivo recente. Mecanismo é ortogonal ao nosso (sample reweighting vs FiLM-conditioning). Candidato a baseline forte do Cap 2 para comparação justa.</a:t>
+              <a:t>BASELINE COMPETITIVO recente do Cap 2. Mecanismo ortogonal ao nosso (sample reweighting vs FiLM-conditioning) — comparação justa contra abordagem state-of-the-art em fairness 2025. Se BNMR superar nosso pipeline, é informação útil para a tese.</a:t>
             </a:r>
           </a:p>
         </p:txBody>
@@ -10899,7 +12214,7 @@
           <a:noFill/>
         </p:spPr>
         <p:txBody>
-          <a:bodyPr wrap="square">
+          <a:bodyPr wrap="none">
             <a:spAutoFit/>
           </a:bodyPr>
           <a:lstStyle/>
@@ -10912,7 +12227,7 @@
               </a:defRPr>
             </a:pPr>
             <a:r>
-              <a:t>Como a tese estava na última reunião</a:t>
+              <a:t>Como a tese estava na última reunião — visão resumida</a:t>
             </a:r>
           </a:p>
         </p:txBody>
@@ -10960,16 +12275,350 @@
           </a:p>
         </p:txBody>
       </p:sp>
-      <p:sp>
-        <p:nvSpPr>
-          <p:cNvPr id="4" name="TextBox 3"/>
+      <p:graphicFrame>
+        <p:nvGraphicFramePr>
+          <p:cNvPr id="4" name="Table 3"/>
+          <p:cNvGraphicFramePr>
+            <a:graphicFrameLocks noGrp="1"/>
+          </p:cNvGraphicFramePr>
+          <p:nvPr/>
+        </p:nvGraphicFramePr>
+        <p:xfrm>
+          <a:off x="457200" y="1371600"/>
+          <a:ext cx="11430000" cy="4937760"/>
+        </p:xfrm>
+        <a:graphic>
+          <a:graphicData uri="http://schemas.openxmlformats.org/drawingml/2006/table">
+            <a:tbl>
+              <a:tblPr firstRow="1" bandRow="1">
+                <a:tableStyleId>{5C22544A-7EE6-4342-B048-85BDC9FD1C3A}</a:tableStyleId>
+              </a:tblPr>
+              <a:tblGrid>
+                <a:gridCol w="5715000"/>
+                <a:gridCol w="5715000"/>
+              </a:tblGrid>
+              <a:tr h="705394">
+                <a:tc>
+                  <a:txBody>
+                    <a:bodyPr/>
+                    <a:lstStyle/>
+                    <a:p>
+                      <a:r>
+                        <a:rPr b="1" sz="1600">
+                          <a:solidFill>
+                            <a:srgbClr val="FFFFFF"/>
+                          </a:solidFill>
+                        </a:rPr>
+                        <a:t>Dimensão</a:t>
+                      </a:r>
+                    </a:p>
+                  </a:txBody>
+                  <a:tcPr>
+                    <a:solidFill>
+                      <a:srgbClr val="1F2A4E"/>
+                    </a:solidFill>
+                  </a:tcPr>
+                </a:tc>
+                <a:tc>
+                  <a:txBody>
+                    <a:bodyPr/>
+                    <a:lstStyle/>
+                    <a:p>
+                      <a:r>
+                        <a:rPr b="1" sz="1600">
+                          <a:solidFill>
+                            <a:srgbClr val="FFFFFF"/>
+                          </a:solidFill>
+                        </a:rPr>
+                        <a:t>Estado naquele momento</a:t>
+                      </a:r>
+                    </a:p>
+                  </a:txBody>
+                  <a:tcPr>
+                    <a:solidFill>
+                      <a:srgbClr val="1F2A4E"/>
+                    </a:solidFill>
+                  </a:tcPr>
+                </a:tc>
+              </a:tr>
+              <a:tr h="705394">
+                <a:tc>
+                  <a:txBody>
+                    <a:bodyPr/>
+                    <a:lstStyle/>
+                    <a:p>
+                      <a:r>
+                        <a:rPr sz="1500">
+                          <a:solidFill>
+                            <a:srgbClr val="3D424E"/>
+                          </a:solidFill>
+                        </a:rPr>
+                        <a:t>Postura</a:t>
+                      </a:r>
+                    </a:p>
+                  </a:txBody>
+                  <a:tcPr>
+                    <a:solidFill>
+                      <a:srgbClr val="FFFFFF"/>
+                    </a:solidFill>
+                  </a:tcPr>
+                </a:tc>
+                <a:tc>
+                  <a:txBody>
+                    <a:bodyPr/>
+                    <a:lstStyle/>
+                    <a:p>
+                      <a:r>
+                        <a:rPr sz="1500">
+                          <a:solidFill>
+                            <a:srgbClr val="3D424E"/>
+                          </a:solidFill>
+                        </a:rPr>
+                        <a:t>Diagnóstica — explicar por que o erro existe</a:t>
+                      </a:r>
+                    </a:p>
+                  </a:txBody>
+                  <a:tcPr>
+                    <a:solidFill>
+                      <a:srgbClr val="FFFFFF"/>
+                    </a:solidFill>
+                  </a:tcPr>
+                </a:tc>
+              </a:tr>
+              <a:tr h="705394">
+                <a:tc>
+                  <a:txBody>
+                    <a:bodyPr/>
+                    <a:lstStyle/>
+                    <a:p>
+                      <a:r>
+                        <a:rPr sz="1500">
+                          <a:solidFill>
+                            <a:srgbClr val="3D424E"/>
+                          </a:solidFill>
+                        </a:rPr>
+                        <a:t>Tese central</a:t>
+                      </a:r>
+                    </a:p>
+                  </a:txBody>
+                  <a:tcPr>
+                    <a:solidFill>
+                      <a:srgbClr val="E8EAED"/>
+                    </a:solidFill>
+                  </a:tcPr>
+                </a:tc>
+                <a:tc>
+                  <a:txBody>
+                    <a:bodyPr/>
+                    <a:lstStyle/>
+                    <a:p>
+                      <a:r>
+                        <a:rPr sz="1500">
+                          <a:solidFill>
+                            <a:srgbClr val="3D424E"/>
+                          </a:solidFill>
+                        </a:rPr>
+                        <a:t>75% F1 é teto fenotípico irredutível: raças se sobrepõem em tom de pele, especialmente Latinx</a:t>
+                      </a:r>
+                    </a:p>
+                  </a:txBody>
+                  <a:tcPr>
+                    <a:solidFill>
+                      <a:srgbClr val="E8EAED"/>
+                    </a:solidFill>
+                  </a:tcPr>
+                </a:tc>
+              </a:tr>
+              <a:tr h="705394">
+                <a:tc>
+                  <a:txBody>
+                    <a:bodyPr/>
+                    <a:lstStyle/>
+                    <a:p>
+                      <a:r>
+                        <a:rPr sz="1500">
+                          <a:solidFill>
+                            <a:srgbClr val="3D424E"/>
+                          </a:solidFill>
+                        </a:rPr>
+                        <a:t>Tarefa</a:t>
+                      </a:r>
+                    </a:p>
+                  </a:txBody>
+                  <a:tcPr>
+                    <a:solidFill>
+                      <a:srgbClr val="FFFFFF"/>
+                    </a:solidFill>
+                  </a:tcPr>
+                </a:tc>
+                <a:tc>
+                  <a:txBody>
+                    <a:bodyPr/>
+                    <a:lstStyle/>
+                    <a:p>
+                      <a:r>
+                        <a:rPr sz="1500">
+                          <a:solidFill>
+                            <a:srgbClr val="3D424E"/>
+                          </a:solidFill>
+                        </a:rPr>
+                        <a:t>Apenas race classification (sem face recognition)</a:t>
+                      </a:r>
+                    </a:p>
+                  </a:txBody>
+                  <a:tcPr>
+                    <a:solidFill>
+                      <a:srgbClr val="FFFFFF"/>
+                    </a:solidFill>
+                  </a:tcPr>
+                </a:tc>
+              </a:tr>
+              <a:tr h="705394">
+                <a:tc>
+                  <a:txBody>
+                    <a:bodyPr/>
+                    <a:lstStyle/>
+                    <a:p>
+                      <a:r>
+                        <a:rPr sz="1500">
+                          <a:solidFill>
+                            <a:srgbClr val="3D424E"/>
+                          </a:solidFill>
+                        </a:rPr>
+                        <a:t>Critério de sucesso</a:t>
+                      </a:r>
+                    </a:p>
+                  </a:txBody>
+                  <a:tcPr>
+                    <a:solidFill>
+                      <a:srgbClr val="E8EAED"/>
+                    </a:solidFill>
+                  </a:tcPr>
+                </a:tc>
+                <a:tc>
+                  <a:txBody>
+                    <a:bodyPr/>
+                    <a:lstStyle/>
+                    <a:p>
+                      <a:r>
+                        <a:rPr sz="1500">
+                          <a:solidFill>
+                            <a:srgbClr val="3D424E"/>
+                          </a:solidFill>
+                        </a:rPr>
+                        <a:t>Decomposição: irredutível vs redutível</a:t>
+                      </a:r>
+                    </a:p>
+                  </a:txBody>
+                  <a:tcPr>
+                    <a:solidFill>
+                      <a:srgbClr val="E8EAED"/>
+                    </a:solidFill>
+                  </a:tcPr>
+                </a:tc>
+              </a:tr>
+              <a:tr h="705394">
+                <a:tc>
+                  <a:txBody>
+                    <a:bodyPr/>
+                    <a:lstStyle/>
+                    <a:p>
+                      <a:r>
+                        <a:rPr sz="1500">
+                          <a:solidFill>
+                            <a:srgbClr val="3D424E"/>
+                          </a:solidFill>
+                        </a:rPr>
+                        <a:t>Corpus</a:t>
+                      </a:r>
+                    </a:p>
+                  </a:txBody>
+                  <a:tcPr>
+                    <a:solidFill>
+                      <a:srgbClr val="FFFFFF"/>
+                    </a:solidFill>
+                  </a:tcPr>
+                </a:tc>
+                <a:tc>
+                  <a:txBody>
+                    <a:bodyPr/>
+                    <a:lstStyle/>
+                    <a:p>
+                      <a:r>
+                        <a:rPr sz="1500">
+                          <a:solidFill>
+                            <a:srgbClr val="3D424E"/>
+                          </a:solidFill>
+                        </a:rPr>
+                        <a:t>23 fichas em 6 tracks (A: race clf; B: FR fairness; C: skin tone; D: mitigação; E: auditoria; F: fundamentação)</a:t>
+                      </a:r>
+                    </a:p>
+                  </a:txBody>
+                  <a:tcPr>
+                    <a:solidFill>
+                      <a:srgbClr val="FFFFFF"/>
+                    </a:solidFill>
+                  </a:tcPr>
+                </a:tc>
+              </a:tr>
+              <a:tr h="705396">
+                <a:tc>
+                  <a:txBody>
+                    <a:bodyPr/>
+                    <a:lstStyle/>
+                    <a:p>
+                      <a:r>
+                        <a:rPr sz="1500">
+                          <a:solidFill>
+                            <a:srgbClr val="3D424E"/>
+                          </a:solidFill>
+                        </a:rPr>
+                        <a:t>Validado na reunião</a:t>
+                      </a:r>
+                    </a:p>
+                  </a:txBody>
+                  <a:tcPr>
+                    <a:solidFill>
+                      <a:srgbClr val="E8EAED"/>
+                    </a:solidFill>
+                  </a:tcPr>
+                </a:tc>
+                <a:tc>
+                  <a:txBody>
+                    <a:bodyPr/>
+                    <a:lstStyle/>
+                    <a:p>
+                      <a:r>
+                        <a:rPr sz="1500">
+                          <a:solidFill>
+                            <a:srgbClr val="3D424E"/>
+                          </a:solidFill>
+                        </a:rPr>
+                        <a:t>Evolução metodológica, SOTA (FaceScanPaliGemma 75.7%), linha de pesquisa proposta</a:t>
+                      </a:r>
+                    </a:p>
+                  </a:txBody>
+                  <a:tcPr>
+                    <a:solidFill>
+                      <a:srgbClr val="E8EAED"/>
+                    </a:solidFill>
+                  </a:tcPr>
+                </a:tc>
+              </a:tr>
+            </a:tbl>
+          </a:graphicData>
+        </a:graphic>
+      </p:graphicFrame>
+      <p:sp>
+        <p:nvSpPr>
+          <p:cNvPr id="5" name="TextBox 4"/>
           <p:cNvSpPr txBox="1"/>
           <p:nvPr/>
         </p:nvSpPr>
         <p:spPr>
           <a:xfrm>
-            <a:off x="548640" y="1371600"/>
-            <a:ext cx="11247120" cy="4937760"/>
+            <a:off x="457200" y="6400800"/>
+            <a:ext cx="11430000" cy="365760"/>
           </a:xfrm>
           <a:prstGeom prst="rect">
             <a:avLst/>
@@ -10977,167 +12626,20 @@
           <a:noFill/>
         </p:spPr>
         <p:txBody>
-          <a:bodyPr wrap="square">
+          <a:bodyPr wrap="none">
             <a:spAutoFit/>
           </a:bodyPr>
           <a:lstStyle/>
           <a:p>
             <a:pPr>
-              <a:spcAft>
-                <a:spcPts val="800"/>
-              </a:spcAft>
-              <a:defRPr sz="2000" b="0">
-                <a:solidFill>
-                  <a:srgbClr val="3D424E"/>
-                </a:solidFill>
-              </a:defRPr>
-            </a:pPr>
-            <a:r>
-              <a:t>A tese era DIAGNÓSTICA — focada em explicar por que o erro existe:</a:t>
-            </a:r>
-          </a:p>
-          <a:p>
-            <a:pPr>
-              <a:spcAft>
-                <a:spcPts val="800"/>
-              </a:spcAft>
-              <a:defRPr sz="2000" b="0">
-                <a:solidFill>
-                  <a:srgbClr val="3D424E"/>
-                </a:solidFill>
-              </a:defRPr>
-            </a:pPr>
-          </a:p>
-          <a:p>
-            <a:pPr>
-              <a:spcAft>
-                <a:spcPts val="800"/>
-              </a:spcAft>
-              <a:defRPr sz="2000" b="0">
-                <a:solidFill>
-                  <a:srgbClr val="3D424E"/>
-                </a:solidFill>
-              </a:defRPr>
-            </a:pPr>
-            <a:r>
-              <a:t>“O limite atual de 75% F1 em classificação racial sobre o FairFace não é só problema de arquitetura nem só problema de método. Tem um componente fenotípico irredutível: as raças se sobrepõem em tom de pele, especialmente Latinx. A dissertação ia construir a primeira matriz pública dessa sobreposição e quantificar o que dá para reduzir vs o que é estrutural.”</a:t>
-            </a:r>
-          </a:p>
-          <a:p>
-            <a:pPr>
-              <a:spcAft>
-                <a:spcPts val="800"/>
-              </a:spcAft>
-              <a:defRPr sz="2000" b="0">
-                <a:solidFill>
-                  <a:srgbClr val="3D424E"/>
-                </a:solidFill>
-              </a:defRPr>
-            </a:pPr>
-          </a:p>
-          <a:p>
-            <a:pPr>
-              <a:spcAft>
-                <a:spcPts val="800"/>
-              </a:spcAft>
-              <a:defRPr sz="2000" b="0">
-                <a:solidFill>
-                  <a:srgbClr val="3D424E"/>
-                </a:solidFill>
-              </a:defRPr>
-            </a:pPr>
-            <a:r>
-              <a:t>Corpus naquele momento: 23 fichas catalogadas em 6 tracks temáticos:</a:t>
-            </a:r>
-          </a:p>
-          <a:p>
-            <a:pPr lvl="1">
-              <a:spcAft>
-                <a:spcPts val="800"/>
-              </a:spcAft>
-              <a:defRPr sz="1700">
+              <a:defRPr sz="1500" i="1">
                 <a:solidFill>
                   <a:srgbClr val="707682"/>
                 </a:solidFill>
               </a:defRPr>
             </a:pPr>
             <a:r>
-              <a:t>Track A — Race classification (alvo direto da dissertação)</a:t>
-            </a:r>
-          </a:p>
-          <a:p>
-            <a:pPr lvl="1">
-              <a:spcAft>
-                <a:spcPts val="800"/>
-              </a:spcAft>
-              <a:defRPr sz="1700">
-                <a:solidFill>
-                  <a:srgbClr val="707682"/>
-                </a:solidFill>
-              </a:defRPr>
-            </a:pPr>
-            <a:r>
-              <a:t>Track B — Face recognition fairness (paralelo)</a:t>
-            </a:r>
-          </a:p>
-          <a:p>
-            <a:pPr lvl="1">
-              <a:spcAft>
-                <a:spcPts val="800"/>
-              </a:spcAft>
-              <a:defRPr sz="1700">
-                <a:solidFill>
-                  <a:srgbClr val="707682"/>
-                </a:solidFill>
-              </a:defRPr>
-            </a:pPr>
-            <a:r>
-              <a:t>Track C — Skin tone como dimensão alternativa</a:t>
-            </a:r>
-          </a:p>
-          <a:p>
-            <a:pPr lvl="1">
-              <a:spcAft>
-                <a:spcPts val="800"/>
-              </a:spcAft>
-              <a:defRPr sz="1700">
-                <a:solidFill>
-                  <a:srgbClr val="707682"/>
-                </a:solidFill>
-              </a:defRPr>
-            </a:pPr>
-            <a:r>
-              <a:t>Track D — Mitigação algorítmica (técnicas)</a:t>
-            </a:r>
-          </a:p>
-          <a:p>
-            <a:pPr lvl="1">
-              <a:spcAft>
-                <a:spcPts val="800"/>
-              </a:spcAft>
-              <a:defRPr sz="1700">
-                <a:solidFill>
-                  <a:srgbClr val="707682"/>
-                </a:solidFill>
-              </a:defRPr>
-            </a:pPr>
-            <a:r>
-              <a:t>Track E — Auditoria e metodologia</a:t>
-            </a:r>
-          </a:p>
-          <a:p>
-            <a:pPr lvl="1">
-              <a:spcAft>
-                <a:spcPts val="800"/>
-              </a:spcAft>
-              <a:defRPr sz="1700">
-                <a:solidFill>
-                  <a:srgbClr val="707682"/>
-                </a:solidFill>
-              </a:defRPr>
-            </a:pPr>
-            <a:r>
-              <a:t>Track F — Fundamentação científica de raça e tom de pele</a:t>
+              <a:t>Esta é a base sobre a qual estamos construindo a nova versão (prescritiva) da tese</a:t>
             </a:r>
           </a:p>
         </p:txBody>
@@ -11190,7 +12692,7 @@
               </a:defRPr>
             </a:pPr>
             <a:r>
-              <a:t>O que validamos na última reunião</a:t>
+              <a:t>Os 4 pedidos que combinamos</a:t>
             </a:r>
           </a:p>
         </p:txBody>
@@ -11271,7 +12773,22 @@
               </a:defRPr>
             </a:pPr>
             <a:r>
-              <a:t>✓  Concordamos que a evolução metodológica melhorou significativamente</a:t>
+              <a:t>1. Revisar o método em profundidade de cada artigo selecionado</a:t>
+            </a:r>
+          </a:p>
+          <a:p>
+            <a:pPr lvl="1">
+              <a:spcAft>
+                <a:spcPts val="800"/>
+              </a:spcAft>
+              <a:defRPr sz="1700">
+                <a:solidFill>
+                  <a:srgbClr val="707682"/>
+                </a:solidFill>
+              </a:defRPr>
+            </a:pPr>
+            <a:r>
+              <a:t>Queremos enxergar não só o resultado, mas o rigor metodológico</a:t>
             </a:r>
           </a:p>
           <a:p>
@@ -11298,7 +12815,22 @@
               </a:defRPr>
             </a:pPr>
             <a:r>
-              <a:t>✓  Validamos que o SOTA encontrado (FaceScanPaliGemma 75.7% F1) é mesmo o atual</a:t>
+              <a:t>2. Ampliar a pesquisa para venues de ML, Redes Neurais e temas relacionados</a:t>
+            </a:r>
+          </a:p>
+          <a:p>
+            <a:pPr lvl="1">
+              <a:spcAft>
+                <a:spcPts val="800"/>
+              </a:spcAft>
+              <a:defRPr sz="1700">
+                <a:solidFill>
+                  <a:srgbClr val="707682"/>
+                </a:solidFill>
+              </a:defRPr>
+            </a:pPr>
+            <a:r>
+              <a:t>Identificamos lacuna de papers fundadores destes campos</a:t>
             </a:r>
           </a:p>
           <a:p>
@@ -11325,7 +12857,22 @@
               </a:defRPr>
             </a:pPr>
             <a:r>
-              <a:t>✓  Alinhamos e validamos a linha de pesquisa proposta</a:t>
+              <a:t>3. Double-check do SOTA (75.7% F1)</a:t>
+            </a:r>
+          </a:p>
+          <a:p>
+            <a:pPr lvl="1">
+              <a:spcAft>
+                <a:spcPts val="800"/>
+              </a:spcAft>
+              <a:defRPr sz="1700">
+                <a:solidFill>
+                  <a:srgbClr val="707682"/>
+                </a:solidFill>
+              </a:defRPr>
+            </a:pPr>
+            <a:r>
+              <a:t>Garantir que não emergiu competidor recente</a:t>
             </a:r>
           </a:p>
           <a:p>
@@ -11352,7 +12899,22 @@
               </a:defRPr>
             </a:pPr>
             <a:r>
-              <a:t>Estas 3 validações são a base sobre a qual estou construindo a nova versão da tese.</a:t>
+              <a:t>4. Reformular a tese de DIAGNÓSTICA para PRESCRITIVA</a:t>
+            </a:r>
+          </a:p>
+          <a:p>
+            <a:pPr lvl="1">
+              <a:spcAft>
+                <a:spcPts val="800"/>
+              </a:spcAft>
+              <a:defRPr sz="1700">
+                <a:solidFill>
+                  <a:srgbClr val="707682"/>
+                </a:solidFill>
+              </a:defRPr>
+            </a:pPr>
+            <a:r>
+              <a:t>Treinar classifier de tom → usar para condicionar classifier de raça → estender a face recognition</a:t>
             </a:r>
           </a:p>
         </p:txBody>
@@ -11377,49 +12939,14 @@
       <p:grpSpPr/>
       <p:sp>
         <p:nvSpPr>
-          <p:cNvPr id="2" name="TextBox 1"/>
-          <p:cNvSpPr txBox="1"/>
-          <p:nvPr/>
-        </p:nvSpPr>
-        <p:spPr>
-          <a:xfrm>
-            <a:off x="457200" y="365760"/>
-            <a:ext cx="11430000" cy="822960"/>
-          </a:xfrm>
-          <a:prstGeom prst="rect">
-            <a:avLst/>
-          </a:prstGeom>
-          <a:noFill/>
-        </p:spPr>
-        <p:txBody>
-          <a:bodyPr wrap="square">
-            <a:spAutoFit/>
-          </a:bodyPr>
-          <a:lstStyle/>
-          <a:p>
-            <a:pPr>
-              <a:defRPr sz="3000" b="1">
-                <a:solidFill>
-                  <a:srgbClr val="1F2A4E"/>
-                </a:solidFill>
-              </a:defRPr>
-            </a:pPr>
-            <a:r>
-              <a:t>Os 4 pedidos que combinamos</a:t>
-            </a:r>
-          </a:p>
-        </p:txBody>
-      </p:sp>
-      <p:sp>
-        <p:nvSpPr>
-          <p:cNvPr id="3" name="Rectangle 2"/>
+          <p:cNvPr id="2" name="Rectangle 1"/>
           <p:cNvSpPr/>
           <p:nvPr/>
         </p:nvSpPr>
         <p:spPr>
           <a:xfrm>
-            <a:off x="457200" y="1143000"/>
-            <a:ext cx="11430000" cy="45720"/>
+            <a:off x="0" y="0"/>
+            <a:ext cx="12191695" cy="6858000"/>
           </a:xfrm>
           <a:prstGeom prst="rect">
             <a:avLst/>
@@ -11455,14 +12982,49 @@
       </p:sp>
       <p:sp>
         <p:nvSpPr>
+          <p:cNvPr id="3" name="TextBox 2"/>
+          <p:cNvSpPr txBox="1"/>
+          <p:nvPr/>
+        </p:nvSpPr>
+        <p:spPr>
+          <a:xfrm>
+            <a:off x="731520" y="1371600"/>
+            <a:ext cx="2743200" cy="2743200"/>
+          </a:xfrm>
+          <a:prstGeom prst="rect">
+            <a:avLst/>
+          </a:prstGeom>
+          <a:noFill/>
+        </p:spPr>
+        <p:txBody>
+          <a:bodyPr wrap="none">
+            <a:spAutoFit/>
+          </a:bodyPr>
+          <a:lstStyle/>
+          <a:p>
+            <a:pPr>
+              <a:defRPr sz="13000" b="1">
+                <a:solidFill>
+                  <a:srgbClr val="FFFFFF"/>
+                </a:solidFill>
+              </a:defRPr>
+            </a:pPr>
+            <a:r>
+              <a:t>2</a:t>
+            </a:r>
+          </a:p>
+        </p:txBody>
+      </p:sp>
+      <p:sp>
+        <p:nvSpPr>
           <p:cNvPr id="4" name="TextBox 3"/>
           <p:cNvSpPr txBox="1"/>
           <p:nvPr/>
         </p:nvSpPr>
         <p:spPr>
           <a:xfrm>
-            <a:off x="548640" y="1371600"/>
-            <a:ext cx="11247120" cy="4937760"/>
+            <a:off x="3931920" y="2286000"/>
+            <a:ext cx="7772400" cy="1828800"/>
           </a:xfrm>
           <a:prstGeom prst="rect">
             <a:avLst/>
@@ -11476,158 +13038,26 @@
           <a:lstStyle/>
           <a:p>
             <a:pPr>
-              <a:spcAft>
-                <a:spcPts val="800"/>
-              </a:spcAft>
-              <a:defRPr sz="2000" b="0">
-                <a:solidFill>
-                  <a:srgbClr val="3D424E"/>
-                </a:solidFill>
-              </a:defRPr>
-            </a:pPr>
-            <a:r>
-              <a:t>1. Revisar o método em profundidade de cada artigo selecionado</a:t>
-            </a:r>
-          </a:p>
-          <a:p>
-            <a:pPr lvl="1">
-              <a:spcAft>
-                <a:spcPts val="800"/>
-              </a:spcAft>
-              <a:defRPr sz="1700">
-                <a:solidFill>
-                  <a:srgbClr val="707682"/>
-                </a:solidFill>
-              </a:defRPr>
-            </a:pPr>
-            <a:r>
-              <a:t>Queremos enxergar não só o resultado, mas o rigor metodológico</a:t>
-            </a:r>
-          </a:p>
-          <a:p>
-            <a:pPr>
-              <a:spcAft>
-                <a:spcPts val="800"/>
-              </a:spcAft>
-              <a:defRPr sz="2000" b="0">
-                <a:solidFill>
-                  <a:srgbClr val="3D424E"/>
-                </a:solidFill>
-              </a:defRPr>
-            </a:pPr>
-          </a:p>
-          <a:p>
-            <a:pPr>
-              <a:spcAft>
-                <a:spcPts val="800"/>
-              </a:spcAft>
-              <a:defRPr sz="2000" b="0">
-                <a:solidFill>
-                  <a:srgbClr val="3D424E"/>
-                </a:solidFill>
-              </a:defRPr>
-            </a:pPr>
-            <a:r>
-              <a:t>2. Ampliar a pesquisa para venues de ML, Redes Neurais e temas relacionados</a:t>
-            </a:r>
-          </a:p>
-          <a:p>
-            <a:pPr lvl="1">
-              <a:spcAft>
-                <a:spcPts val="800"/>
-              </a:spcAft>
-              <a:defRPr sz="1700">
-                <a:solidFill>
-                  <a:srgbClr val="707682"/>
-                </a:solidFill>
-              </a:defRPr>
-            </a:pPr>
-            <a:r>
-              <a:t>Identificamos lacuna de papers fundadores destes campos</a:t>
-            </a:r>
-          </a:p>
-          <a:p>
-            <a:pPr>
-              <a:spcAft>
-                <a:spcPts val="800"/>
-              </a:spcAft>
-              <a:defRPr sz="2000" b="0">
-                <a:solidFill>
-                  <a:srgbClr val="3D424E"/>
-                </a:solidFill>
-              </a:defRPr>
-            </a:pPr>
-          </a:p>
-          <a:p>
-            <a:pPr>
-              <a:spcAft>
-                <a:spcPts val="800"/>
-              </a:spcAft>
-              <a:defRPr sz="2000" b="0">
-                <a:solidFill>
-                  <a:srgbClr val="3D424E"/>
-                </a:solidFill>
-              </a:defRPr>
-            </a:pPr>
-            <a:r>
-              <a:t>3. Double-check do SOTA (75.7% F1)</a:t>
-            </a:r>
-          </a:p>
-          <a:p>
-            <a:pPr lvl="1">
-              <a:spcAft>
-                <a:spcPts val="800"/>
-              </a:spcAft>
-              <a:defRPr sz="1700">
-                <a:solidFill>
-                  <a:srgbClr val="707682"/>
-                </a:solidFill>
-              </a:defRPr>
-            </a:pPr>
-            <a:r>
-              <a:t>Garantir que não emergiu competidor recente</a:t>
-            </a:r>
-          </a:p>
-          <a:p>
-            <a:pPr>
-              <a:spcAft>
-                <a:spcPts val="800"/>
-              </a:spcAft>
-              <a:defRPr sz="2000" b="0">
-                <a:solidFill>
-                  <a:srgbClr val="3D424E"/>
-                </a:solidFill>
-              </a:defRPr>
-            </a:pPr>
-          </a:p>
-          <a:p>
-            <a:pPr>
-              <a:spcAft>
-                <a:spcPts val="800"/>
-              </a:spcAft>
-              <a:defRPr sz="2000" b="0">
-                <a:solidFill>
-                  <a:srgbClr val="3D424E"/>
-                </a:solidFill>
-              </a:defRPr>
-            </a:pPr>
-            <a:r>
-              <a:t>4. Reformular a tese de DIAGNÓSTICA para PRESCRITIVA</a:t>
-            </a:r>
-          </a:p>
-          <a:p>
-            <a:pPr lvl="1">
-              <a:spcAft>
-                <a:spcPts val="800"/>
-              </a:spcAft>
-              <a:defRPr sz="1700">
-                <a:solidFill>
-                  <a:srgbClr val="707682"/>
-                </a:solidFill>
-              </a:defRPr>
-            </a:pPr>
-            <a:r>
-              <a:t>Treinar classifier de tom → usar para condicionar classifier de raça → estender a face recognition</a:t>
+              <a:defRPr sz="3600" b="1">
+                <a:solidFill>
+                  <a:srgbClr val="FFFFFF"/>
+                </a:solidFill>
+              </a:defRPr>
+            </a:pPr>
+            <a:r>
+              <a:t>O que avancei nesta semana</a:t>
+            </a:r>
+          </a:p>
+          <a:p>
+            <a:pPr>
+              <a:defRPr sz="2000">
+                <a:solidFill>
+                  <a:srgbClr val="E8EAED"/>
+                </a:solidFill>
+              </a:defRPr>
+            </a:pPr>
+            <a:r>
+              <a:t>Resposta direta aos 4 pedidos</a:t>
             </a:r>
           </a:p>
         </p:txBody>
@@ -11652,14 +13082,49 @@
       <p:grpSpPr/>
       <p:sp>
         <p:nvSpPr>
-          <p:cNvPr id="2" name="Rectangle 1"/>
+          <p:cNvPr id="2" name="TextBox 1"/>
+          <p:cNvSpPr txBox="1"/>
+          <p:nvPr/>
+        </p:nvSpPr>
+        <p:spPr>
+          <a:xfrm>
+            <a:off x="457200" y="365760"/>
+            <a:ext cx="11430000" cy="822960"/>
+          </a:xfrm>
+          <a:prstGeom prst="rect">
+            <a:avLst/>
+          </a:prstGeom>
+          <a:noFill/>
+        </p:spPr>
+        <p:txBody>
+          <a:bodyPr wrap="square">
+            <a:spAutoFit/>
+          </a:bodyPr>
+          <a:lstStyle/>
+          <a:p>
+            <a:pPr>
+              <a:defRPr sz="3000" b="1">
+                <a:solidFill>
+                  <a:srgbClr val="1F2A4E"/>
+                </a:solidFill>
+              </a:defRPr>
+            </a:pPr>
+            <a:r>
+              <a:t>Resposta ao pedido 2: ampliar venues ML / Redes Neurais</a:t>
+            </a:r>
+          </a:p>
+        </p:txBody>
+      </p:sp>
+      <p:sp>
+        <p:nvSpPr>
+          <p:cNvPr id="3" name="Rectangle 2"/>
           <p:cNvSpPr/>
           <p:nvPr/>
         </p:nvSpPr>
         <p:spPr>
           <a:xfrm>
-            <a:off x="0" y="0"/>
-            <a:ext cx="12191695" cy="6858000"/>
+            <a:off x="457200" y="1143000"/>
+            <a:ext cx="11430000" cy="45720"/>
           </a:xfrm>
           <a:prstGeom prst="rect">
             <a:avLst/>
@@ -11695,49 +13160,14 @@
       </p:sp>
       <p:sp>
         <p:nvSpPr>
-          <p:cNvPr id="3" name="TextBox 2"/>
-          <p:cNvSpPr txBox="1"/>
-          <p:nvPr/>
-        </p:nvSpPr>
-        <p:spPr>
-          <a:xfrm>
-            <a:off x="731520" y="1371600"/>
-            <a:ext cx="2743200" cy="2743200"/>
-          </a:xfrm>
-          <a:prstGeom prst="rect">
-            <a:avLst/>
-          </a:prstGeom>
-          <a:noFill/>
-        </p:spPr>
-        <p:txBody>
-          <a:bodyPr wrap="none">
-            <a:spAutoFit/>
-          </a:bodyPr>
-          <a:lstStyle/>
-          <a:p>
-            <a:pPr>
-              <a:defRPr sz="13000" b="1">
-                <a:solidFill>
-                  <a:srgbClr val="FFFFFF"/>
-                </a:solidFill>
-              </a:defRPr>
-            </a:pPr>
-            <a:r>
-              <a:t>2</a:t>
-            </a:r>
-          </a:p>
-        </p:txBody>
-      </p:sp>
-      <p:sp>
-        <p:nvSpPr>
           <p:cNvPr id="4" name="TextBox 3"/>
           <p:cNvSpPr txBox="1"/>
           <p:nvPr/>
         </p:nvSpPr>
         <p:spPr>
           <a:xfrm>
-            <a:off x="3931920" y="2286000"/>
-            <a:ext cx="7772400" cy="1828800"/>
+            <a:off x="548640" y="1371600"/>
+            <a:ext cx="11247120" cy="4937760"/>
           </a:xfrm>
           <a:prstGeom prst="rect">
             <a:avLst/>
@@ -11751,26 +13181,161 @@
           <a:lstStyle/>
           <a:p>
             <a:pPr>
-              <a:defRPr sz="3600" b="1">
-                <a:solidFill>
-                  <a:srgbClr val="FFFFFF"/>
-                </a:solidFill>
-              </a:defRPr>
-            </a:pPr>
-            <a:r>
-              <a:t>O que avancei nesta semana</a:t>
-            </a:r>
-          </a:p>
-          <a:p>
-            <a:pPr>
-              <a:defRPr sz="2000">
-                <a:solidFill>
-                  <a:srgbClr val="E8EAED"/>
-                </a:solidFill>
-              </a:defRPr>
-            </a:pPr>
-            <a:r>
-              <a:t>Resposta direta aos 4 pedidos</a:t>
+              <a:spcAft>
+                <a:spcPts val="800"/>
+              </a:spcAft>
+              <a:defRPr sz="2000" b="0">
+                <a:solidFill>
+                  <a:srgbClr val="3D424E"/>
+                </a:solidFill>
+              </a:defRPr>
+            </a:pPr>
+            <a:r>
+              <a:t>Executei Rodada 5 de triagem com foco em ML e Redes Neurais.</a:t>
+            </a:r>
+          </a:p>
+          <a:p>
+            <a:pPr>
+              <a:spcAft>
+                <a:spcPts val="800"/>
+              </a:spcAft>
+              <a:defRPr sz="2000" b="0">
+                <a:solidFill>
+                  <a:srgbClr val="3D424E"/>
+                </a:solidFill>
+              </a:defRPr>
+            </a:pPr>
+          </a:p>
+          <a:p>
+            <a:pPr>
+              <a:spcAft>
+                <a:spcPts val="800"/>
+              </a:spcAft>
+              <a:defRPr sz="2000" b="0">
+                <a:solidFill>
+                  <a:srgbClr val="3D424E"/>
+                </a:solidFill>
+              </a:defRPr>
+            </a:pPr>
+            <a:r>
+              <a:t>Adicionei 6 fichas novas, todas de venues top da área:</a:t>
+            </a:r>
+          </a:p>
+          <a:p>
+            <a:pPr lvl="1">
+              <a:spcAft>
+                <a:spcPts val="800"/>
+              </a:spcAft>
+              <a:defRPr sz="1700">
+                <a:solidFill>
+                  <a:srgbClr val="707682"/>
+                </a:solidFill>
+              </a:defRPr>
+            </a:pPr>
+            <a:r>
+              <a:t>• Hardt, Price &amp; Srebro (NeurIPS 2016) — origem das métricas formais de fairness</a:t>
+            </a:r>
+          </a:p>
+          <a:p>
+            <a:pPr lvl="1">
+              <a:spcAft>
+                <a:spcPts val="800"/>
+              </a:spcAft>
+              <a:defRPr sz="1700">
+                <a:solidFill>
+                  <a:srgbClr val="707682"/>
+                </a:solidFill>
+              </a:defRPr>
+            </a:pPr>
+            <a:r>
+              <a:t>• Perez et al. (AAAI 2018) — FiLM, mecanismo de condicionamento neural</a:t>
+            </a:r>
+          </a:p>
+          <a:p>
+            <a:pPr lvl="1">
+              <a:spcAft>
+                <a:spcPts val="800"/>
+              </a:spcAft>
+              <a:defRPr sz="1700">
+                <a:solidFill>
+                  <a:srgbClr val="707682"/>
+                </a:solidFill>
+              </a:defRPr>
+            </a:pPr>
+            <a:r>
+              <a:t>• Zemel et al. (ICML 2013, Test-of-Time Award 2023) — Fair Representation Learning</a:t>
+            </a:r>
+          </a:p>
+          <a:p>
+            <a:pPr lvl="1">
+              <a:spcAft>
+                <a:spcPts val="800"/>
+              </a:spcAft>
+              <a:defRPr sz="1700">
+                <a:solidFill>
+                  <a:srgbClr val="707682"/>
+                </a:solidFill>
+              </a:defRPr>
+            </a:pPr>
+            <a:r>
+              <a:t>• Madras et al. (ICML 2018) — LAFTR, prova teórica de fair transferência</a:t>
+            </a:r>
+          </a:p>
+          <a:p>
+            <a:pPr lvl="1">
+              <a:spcAft>
+                <a:spcPts val="800"/>
+              </a:spcAft>
+              <a:defRPr sz="1700">
+                <a:solidFill>
+                  <a:srgbClr val="707682"/>
+                </a:solidFill>
+              </a:defRPr>
+            </a:pPr>
+            <a:r>
+              <a:t>• Zhang, Lemoine &amp; Mitchell (AIES 2018) — adversarial debiasing</a:t>
+            </a:r>
+          </a:p>
+          <a:p>
+            <a:pPr lvl="1">
+              <a:spcAft>
+                <a:spcPts val="800"/>
+              </a:spcAft>
+              <a:defRPr sz="1700">
+                <a:solidFill>
+                  <a:srgbClr val="707682"/>
+                </a:solidFill>
+              </a:defRPr>
+            </a:pPr>
+            <a:r>
+              <a:t>• Kleinberg, Mullainathan &amp; Raghavan (ITCS 2017) — teorema da impossibilidade</a:t>
+            </a:r>
+          </a:p>
+          <a:p>
+            <a:pPr>
+              <a:spcAft>
+                <a:spcPts val="800"/>
+              </a:spcAft>
+              <a:defRPr sz="2000" b="0">
+                <a:solidFill>
+                  <a:srgbClr val="3D424E"/>
+                </a:solidFill>
+              </a:defRPr>
+            </a:pPr>
+          </a:p>
+          <a:p>
+            <a:pPr>
+              <a:spcAft>
+                <a:spcPts val="800"/>
+              </a:spcAft>
+              <a:defRPr sz="2000" b="0">
+                <a:solidFill>
+                  <a:srgbClr val="3D424E"/>
+                </a:solidFill>
+              </a:defRPr>
+            </a:pPr>
+            <a:r>
+              <a:t>Cada um destes é base de algum baseline ou mecanismo do pipeline.</a:t>
             </a:r>
           </a:p>
         </p:txBody>
@@ -11823,7 +13388,7 @@
               </a:defRPr>
             </a:pPr>
             <a:r>
-              <a:t>Resposta ao pedido 2: ampliar venues ML / Redes Neurais</a:t>
+              <a:t>Resposta ao pedido 1: revisar método em profundidade</a:t>
             </a:r>
           </a:p>
         </p:txBody>
@@ -11904,7 +13469,7 @@
               </a:defRPr>
             </a:pPr>
             <a:r>
-              <a:t>Executei Rodada 5 de triagem com foco em ML e Redes Neurais.</a:t>
+              <a:t>Criei uma nova Seção 12 normativa em cada ficha: ‘Análise crítica do método’.</a:t>
             </a:r>
           </a:p>
           <a:p>
@@ -11931,7 +13496,7 @@
               </a:defRPr>
             </a:pPr>
             <a:r>
-              <a:t>Adicionei 6 fichas novas, todas de venues top da área:</a:t>
+              <a:t>Avalia cada paper em 5 dimensões:</a:t>
             </a:r>
           </a:p>
           <a:p>
@@ -11946,7 +13511,7 @@
               </a:defRPr>
             </a:pPr>
             <a:r>
-              <a:t>• Hardt, Price &amp; Srebro (NeurIPS 2016) — origem das métricas formais de fairness</a:t>
+              <a:t>(a) Rigor formal — matemática defensável? Pressupostos declarados?</a:t>
             </a:r>
           </a:p>
           <a:p>
@@ -11961,7 +13526,7 @@
               </a:defRPr>
             </a:pPr>
             <a:r>
-              <a:t>• Perez et al. (AAAI 2018) — FiLM, mecanismo de condicionamento neural</a:t>
+              <a:t>(b) Reprodutibilidade — hiperparâmetros, código, seeds?</a:t>
             </a:r>
           </a:p>
           <a:p>
@@ -11976,7 +13541,7 @@
               </a:defRPr>
             </a:pPr>
             <a:r>
-              <a:t>• Zemel et al. (ICML 2013, Test-of-Time Award 2023) — Fair Representation Learning</a:t>
+              <a:t>(c) Aplicabilidade ao nosso pipeline — onde funciona e onde falha?</a:t>
             </a:r>
           </a:p>
           <a:p>
@@ -11991,7 +13556,7 @@
               </a:defRPr>
             </a:pPr>
             <a:r>
-              <a:t>• Madras et al. (ICML 2018) — LAFTR, prova teórica de fair transferência</a:t>
+              <a:t>(d) Design choices — o que foi justificado vs assumido?</a:t>
             </a:r>
           </a:p>
           <a:p>
@@ -12006,22 +13571,7 @@
               </a:defRPr>
             </a:pPr>
             <a:r>
-              <a:t>• Zhang, Lemoine &amp; Mitchell (AIES 2018) — adversarial debiasing</a:t>
-            </a:r>
-          </a:p>
-          <a:p>
-            <a:pPr lvl="1">
-              <a:spcAft>
-                <a:spcPts val="800"/>
-              </a:spcAft>
-              <a:defRPr sz="1700">
-                <a:solidFill>
-                  <a:srgbClr val="707682"/>
-                </a:solidFill>
-              </a:defRPr>
-            </a:pPr>
-            <a:r>
-              <a:t>• Kleinberg, Mullainathan &amp; Raghavan (ITCS 2017) — teorema da impossibilidade</a:t>
+              <a:t>(e) Conexão com o que aprendi na Rodada 5</a:t>
             </a:r>
           </a:p>
           <a:p>
@@ -12048,7 +13598,22 @@
               </a:defRPr>
             </a:pPr>
             <a:r>
-              <a:t>Cada um destes é base de algum baseline ou mecanismo do pipeline.</a:t>
+              <a:t>Adicionada nas 10 fichas centrais (lista de leitura prioritária).</a:t>
+            </a:r>
+          </a:p>
+          <a:p>
+            <a:pPr>
+              <a:spcAft>
+                <a:spcPts val="800"/>
+              </a:spcAft>
+              <a:defRPr sz="2000" b="0">
+                <a:solidFill>
+                  <a:srgbClr val="3D424E"/>
+                </a:solidFill>
+              </a:defRPr>
+            </a:pPr>
+            <a:r>
+              <a:t>Vamos expandir para as outras 19 após aprovação conjunta da nova versão da tese.</a:t>
             </a:r>
           </a:p>
         </p:txBody>
@@ -12101,7 +13666,7 @@
               </a:defRPr>
             </a:pPr>
             <a:r>
-              <a:t>Resposta ao pedido 1: revisar método em profundidade</a:t>
+              <a:t>Resposta ao pedido 3: double-check do SOTA</a:t>
             </a:r>
           </a:p>
         </p:txBody>
@@ -12182,7 +13747,7 @@
               </a:defRPr>
             </a:pPr>
             <a:r>
-              <a:t>Criei uma nova Seção 12 normativa em cada ficha: ‘Análise crítica do método’.</a:t>
+              <a:t>Executei a Rodada 2.6 com janela expandida fevereiro–junho de 2026.</a:t>
             </a:r>
           </a:p>
           <a:p>
@@ -12209,7 +13774,34 @@
               </a:defRPr>
             </a:pPr>
             <a:r>
-              <a:t>Avalia cada paper em 5 dimensões:</a:t>
+              <a:t>Fonte: 12 papers que citam o FaceScanPaliGemma no Semantic Scholar.</a:t>
+            </a:r>
+          </a:p>
+          <a:p>
+            <a:pPr>
+              <a:spcAft>
+                <a:spcPts val="800"/>
+              </a:spcAft>
+              <a:defRPr sz="2000" b="0">
+                <a:solidFill>
+                  <a:srgbClr val="3D424E"/>
+                </a:solidFill>
+              </a:defRPr>
+            </a:pPr>
+          </a:p>
+          <a:p>
+            <a:pPr>
+              <a:spcAft>
+                <a:spcPts val="800"/>
+              </a:spcAft>
+              <a:defRPr sz="2000" b="0">
+                <a:solidFill>
+                  <a:srgbClr val="3D424E"/>
+                </a:solidFill>
+              </a:defRPr>
+            </a:pPr>
+            <a:r>
+              <a:t>Resultado: NENHUM dos 12 papers usa FairFace race 7-class como métrica principal.</a:t>
             </a:r>
           </a:p>
           <a:p>
@@ -12224,7 +13816,61 @@
               </a:defRPr>
             </a:pPr>
             <a:r>
-              <a:t>(a) Rigor formal — matemática defensável? Pressupostos declarados?</a:t>
+              <a:t>Citantes trabalham em tarefas diferentes: gender, age, emotion, detection, audit, etc.</a:t>
+            </a:r>
+          </a:p>
+          <a:p>
+            <a:pPr>
+              <a:spcAft>
+                <a:spcPts val="800"/>
+              </a:spcAft>
+              <a:defRPr sz="2000" b="0">
+                <a:solidFill>
+                  <a:srgbClr val="3D424E"/>
+                </a:solidFill>
+              </a:defRPr>
+            </a:pPr>
+          </a:p>
+          <a:p>
+            <a:pPr>
+              <a:spcAft>
+                <a:spcPts val="800"/>
+              </a:spcAft>
+              <a:defRPr sz="2000" b="0">
+                <a:solidFill>
+                  <a:srgbClr val="3D424E"/>
+                </a:solidFill>
+              </a:defRPr>
+            </a:pPr>
+            <a:r>
+              <a:t>Conclusão: FaceScanPaliGemma 75.7% F1 segue sendo o SOTA único em junho/2026.</a:t>
+            </a:r>
+          </a:p>
+          <a:p>
+            <a:pPr>
+              <a:spcAft>
+                <a:spcPts val="800"/>
+              </a:spcAft>
+              <a:defRPr sz="2000" b="0">
+                <a:solidFill>
+                  <a:srgbClr val="3D424E"/>
+                </a:solidFill>
+              </a:defRPr>
+            </a:pPr>
+          </a:p>
+          <a:p>
+            <a:pPr>
+              <a:spcAft>
+                <a:spcPts val="800"/>
+              </a:spcAft>
+              <a:defRPr sz="2000" b="0">
+                <a:solidFill>
+                  <a:srgbClr val="3D424E"/>
+                </a:solidFill>
+              </a:defRPr>
+            </a:pPr>
+            <a:r>
+              <a:t>Achados adicionais: validação cruzada confirmou também o baseline ResNet-34 = 72%</a:t>
             </a:r>
           </a:p>
           <a:p>
@@ -12239,94 +13885,7 @@
               </a:defRPr>
             </a:pPr>
             <a:r>
-              <a:t>(b) Reprodutibilidade — hiperparâmetros, código, seeds?</a:t>
-            </a:r>
-          </a:p>
-          <a:p>
-            <a:pPr lvl="1">
-              <a:spcAft>
-                <a:spcPts val="800"/>
-              </a:spcAft>
-              <a:defRPr sz="1700">
-                <a:solidFill>
-                  <a:srgbClr val="707682"/>
-                </a:solidFill>
-              </a:defRPr>
-            </a:pPr>
-            <a:r>
-              <a:t>(c) Aplicabilidade ao nosso pipeline — onde funciona e onde falha?</a:t>
-            </a:r>
-          </a:p>
-          <a:p>
-            <a:pPr lvl="1">
-              <a:spcAft>
-                <a:spcPts val="800"/>
-              </a:spcAft>
-              <a:defRPr sz="1700">
-                <a:solidFill>
-                  <a:srgbClr val="707682"/>
-                </a:solidFill>
-              </a:defRPr>
-            </a:pPr>
-            <a:r>
-              <a:t>(d) Design choices — o que foi justificado vs assumido?</a:t>
-            </a:r>
-          </a:p>
-          <a:p>
-            <a:pPr lvl="1">
-              <a:spcAft>
-                <a:spcPts val="800"/>
-              </a:spcAft>
-              <a:defRPr sz="1700">
-                <a:solidFill>
-                  <a:srgbClr val="707682"/>
-                </a:solidFill>
-              </a:defRPr>
-            </a:pPr>
-            <a:r>
-              <a:t>(e) Conexão com o que aprendi na Rodada 5</a:t>
-            </a:r>
-          </a:p>
-          <a:p>
-            <a:pPr>
-              <a:spcAft>
-                <a:spcPts val="800"/>
-              </a:spcAft>
-              <a:defRPr sz="2000" b="0">
-                <a:solidFill>
-                  <a:srgbClr val="3D424E"/>
-                </a:solidFill>
-              </a:defRPr>
-            </a:pPr>
-          </a:p>
-          <a:p>
-            <a:pPr>
-              <a:spcAft>
-                <a:spcPts val="800"/>
-              </a:spcAft>
-              <a:defRPr sz="2000" b="0">
-                <a:solidFill>
-                  <a:srgbClr val="3D424E"/>
-                </a:solidFill>
-              </a:defRPr>
-            </a:pPr>
-            <a:r>
-              <a:t>Adicionada nas 10 fichas centrais (lista de leitura prioritária).</a:t>
-            </a:r>
-          </a:p>
-          <a:p>
-            <a:pPr>
-              <a:spcAft>
-                <a:spcPts val="800"/>
-              </a:spcAft>
-              <a:defRPr sz="2000" b="0">
-                <a:solidFill>
-                  <a:srgbClr val="3D424E"/>
-                </a:solidFill>
-              </a:defRPr>
-            </a:pPr>
-            <a:r>
-              <a:t>Vamos expandir para as outras 19 após aprovação conjunta da nova versão da tese.</a:t>
+              <a:t>Reportado por AlDahoul (2024/26) E por Lin (FairGRAPE 2022) independentemente</a:t>
             </a:r>
           </a:p>
         </p:txBody>

--- a/docs/ativo/material_reuniao_orientador_v3.2.1.pptx
+++ b/docs/ativo/material_reuniao_orientador_v3.2.1.pptx
@@ -20,23 +20,23 @@
     <p:sldId id="268" r:id="rId19"/>
     <p:sldId id="269" r:id="rId20"/>
     <p:sldId id="270" r:id="rId21"/>
-    <p:sldId id="271" r:id="rId22"/>
-    <p:sldId id="272" r:id="rId23"/>
-    <p:sldId id="273" r:id="rId24"/>
-    <p:sldId id="274" r:id="rId25"/>
-    <p:sldId id="275" r:id="rId26"/>
-    <p:sldId id="276" r:id="rId27"/>
-    <p:sldId id="277" r:id="rId28"/>
-    <p:sldId id="278" r:id="rId29"/>
-    <p:sldId id="279" r:id="rId30"/>
-    <p:sldId id="280" r:id="rId31"/>
-    <p:sldId id="281" r:id="rId32"/>
-    <p:sldId id="282" r:id="rId33"/>
-    <p:sldId id="283" r:id="rId34"/>
-    <p:sldId id="284" r:id="rId35"/>
-    <p:sldId id="285" r:id="rId36"/>
-    <p:sldId id="286" r:id="rId37"/>
-    <p:sldId id="287" r:id="rId38"/>
+    <p:sldId id="271" r:id="rId23"/>
+    <p:sldId id="272" r:id="rId24"/>
+    <p:sldId id="273" r:id="rId25"/>
+    <p:sldId id="274" r:id="rId26"/>
+    <p:sldId id="275" r:id="rId27"/>
+    <p:sldId id="276" r:id="rId28"/>
+    <p:sldId id="277" r:id="rId29"/>
+    <p:sldId id="278" r:id="rId30"/>
+    <p:sldId id="279" r:id="rId31"/>
+    <p:sldId id="280" r:id="rId32"/>
+    <p:sldId id="281" r:id="rId33"/>
+    <p:sldId id="282" r:id="rId34"/>
+    <p:sldId id="283" r:id="rId35"/>
+    <p:sldId id="284" r:id="rId36"/>
+    <p:sldId id="285" r:id="rId37"/>
+    <p:sldId id="286" r:id="rId38"/>
+    <p:sldId id="287" r:id="rId39"/>
   </p:sldIdLst>
   <p:sldSz cx="12191695" cy="6858000" type="screen4x3"/>
   <p:notesSz cx="6858000" cy="9144000"/>
@@ -136,6 +136,537 @@
     </a:lvl9pPr>
   </p:defaultTextStyle>
 </p:presentation>
+</file>
+
+<file path=ppt/notesMasters/notesMaster1.xml><?xml version="1.0" encoding="utf-8"?>
+<p:notesMaster xmlns:a="http://schemas.openxmlformats.org/drawingml/2006/main" xmlns:p="http://schemas.openxmlformats.org/presentationml/2006/main" xmlns:r="http://schemas.openxmlformats.org/officeDocument/2006/relationships">
+  <p:cSld>
+    <p:bg>
+      <p:bgRef idx="1001">
+        <a:schemeClr val="bg1"/>
+      </p:bgRef>
+    </p:bg>
+    <p:spTree>
+      <p:nvGrpSpPr>
+        <p:cNvPr id="1" name=""/>
+        <p:cNvGrpSpPr/>
+        <p:nvPr/>
+      </p:nvGrpSpPr>
+      <p:grpSpPr>
+        <a:xfrm>
+          <a:off x="0" y="0"/>
+          <a:ext cx="0" cy="0"/>
+          <a:chOff x="0" y="0"/>
+          <a:chExt cx="0" cy="0"/>
+        </a:xfrm>
+      </p:grpSpPr>
+      <p:sp>
+        <p:nvSpPr>
+          <p:cNvPr id="2" name="Header Placeholder 1"/>
+          <p:cNvSpPr>
+            <a:spLocks noGrp="1"/>
+          </p:cNvSpPr>
+          <p:nvPr>
+            <p:ph type="hdr" sz="quarter"/>
+          </p:nvPr>
+        </p:nvSpPr>
+        <p:spPr>
+          <a:xfrm>
+            <a:off x="0" y="0"/>
+            <a:ext cx="2971800" cy="457200"/>
+          </a:xfrm>
+          <a:prstGeom prst="rect">
+            <a:avLst/>
+          </a:prstGeom>
+        </p:spPr>
+        <p:txBody>
+          <a:bodyPr vert="horz" lIns="91440" tIns="45720" rIns="91440" bIns="45720" rtlCol="0"/>
+          <a:lstStyle>
+            <a:lvl1pPr algn="l">
+              <a:defRPr sz="1200"/>
+            </a:lvl1pPr>
+          </a:lstStyle>
+          <a:p>
+            <a:endParaRPr lang="en-US"/>
+          </a:p>
+        </p:txBody>
+      </p:sp>
+      <p:sp>
+        <p:nvSpPr>
+          <p:cNvPr id="3" name="Date Placeholder 2"/>
+          <p:cNvSpPr>
+            <a:spLocks noGrp="1"/>
+          </p:cNvSpPr>
+          <p:nvPr>
+            <p:ph type="dt" idx="1"/>
+          </p:nvPr>
+        </p:nvSpPr>
+        <p:spPr>
+          <a:xfrm>
+            <a:off x="3884613" y="0"/>
+            <a:ext cx="2971800" cy="457200"/>
+          </a:xfrm>
+          <a:prstGeom prst="rect">
+            <a:avLst/>
+          </a:prstGeom>
+        </p:spPr>
+        <p:txBody>
+          <a:bodyPr vert="horz" lIns="91440" tIns="45720" rIns="91440" bIns="45720" rtlCol="0"/>
+          <a:lstStyle>
+            <a:lvl1pPr algn="r">
+              <a:defRPr sz="1200"/>
+            </a:lvl1pPr>
+          </a:lstStyle>
+          <a:p>
+            <a:fld id="{0F89C1C7-3DCD-1040-A9CF-14679D8B5DDD}" type="datetimeFigureOut">
+              <a:rPr lang="en-US" smtClean="0"/>
+              <a:t>10/17/16</a:t>
+            </a:fld>
+            <a:endParaRPr lang="en-US"/>
+          </a:p>
+        </p:txBody>
+      </p:sp>
+      <p:sp>
+        <p:nvSpPr>
+          <p:cNvPr id="4" name="Slide Image Placeholder 3"/>
+          <p:cNvSpPr>
+            <a:spLocks noGrp="1" noRot="1" noChangeAspect="1"/>
+          </p:cNvSpPr>
+          <p:nvPr>
+            <p:ph type="sldImg" idx="2"/>
+          </p:nvPr>
+        </p:nvSpPr>
+        <p:spPr>
+          <a:xfrm>
+            <a:off x="1143000" y="685800"/>
+            <a:ext cx="4572000" cy="3429000"/>
+          </a:xfrm>
+          <a:prstGeom prst="rect">
+            <a:avLst/>
+          </a:prstGeom>
+          <a:noFill/>
+          <a:ln w="12700">
+            <a:solidFill>
+              <a:prstClr val="black"/>
+            </a:solidFill>
+          </a:ln>
+        </p:spPr>
+        <p:txBody>
+          <a:bodyPr vert="horz" lIns="91440" tIns="45720" rIns="91440" bIns="45720" rtlCol="0" anchor="ctr"/>
+          <a:lstStyle/>
+          <a:p>
+            <a:endParaRPr lang="en-US"/>
+          </a:p>
+        </p:txBody>
+      </p:sp>
+      <p:sp>
+        <p:nvSpPr>
+          <p:cNvPr id="5" name="Notes Placeholder 4"/>
+          <p:cNvSpPr>
+            <a:spLocks noGrp="1"/>
+          </p:cNvSpPr>
+          <p:nvPr>
+            <p:ph type="body" sz="quarter" idx="3"/>
+          </p:nvPr>
+        </p:nvSpPr>
+        <p:spPr>
+          <a:xfrm>
+            <a:off x="685800" y="4343400"/>
+            <a:ext cx="5486400" cy="4114800"/>
+          </a:xfrm>
+          <a:prstGeom prst="rect">
+            <a:avLst/>
+          </a:prstGeom>
+        </p:spPr>
+        <p:txBody>
+          <a:bodyPr vert="horz" lIns="91440" tIns="45720" rIns="91440" bIns="45720" rtlCol="0"/>
+          <a:lstStyle/>
+          <a:p>
+            <a:pPr lvl="0"/>
+            <a:r>
+              <a:rPr lang="en-US" smtClean="0"/>
+              <a:t>Click to edit Master text styles</a:t>
+            </a:r>
+          </a:p>
+          <a:p>
+            <a:pPr lvl="1"/>
+            <a:r>
+              <a:rPr lang="en-US" smtClean="0"/>
+              <a:t>Second level</a:t>
+            </a:r>
+          </a:p>
+          <a:p>
+            <a:pPr lvl="2"/>
+            <a:r>
+              <a:rPr lang="en-US" smtClean="0"/>
+              <a:t>Third level</a:t>
+            </a:r>
+          </a:p>
+          <a:p>
+            <a:pPr lvl="3"/>
+            <a:r>
+              <a:rPr lang="en-US" smtClean="0"/>
+              <a:t>Fourth level</a:t>
+            </a:r>
+          </a:p>
+          <a:p>
+            <a:pPr lvl="4"/>
+            <a:r>
+              <a:rPr lang="en-US" smtClean="0"/>
+              <a:t>Fifth level</a:t>
+            </a:r>
+            <a:endParaRPr lang="en-US"/>
+          </a:p>
+        </p:txBody>
+      </p:sp>
+      <p:sp>
+        <p:nvSpPr>
+          <p:cNvPr id="6" name="Footer Placeholder 5"/>
+          <p:cNvSpPr>
+            <a:spLocks noGrp="1"/>
+          </p:cNvSpPr>
+          <p:nvPr>
+            <p:ph type="ftr" sz="quarter" idx="4"/>
+          </p:nvPr>
+        </p:nvSpPr>
+        <p:spPr>
+          <a:xfrm>
+            <a:off x="0" y="8685213"/>
+            <a:ext cx="2971800" cy="457200"/>
+          </a:xfrm>
+          <a:prstGeom prst="rect">
+            <a:avLst/>
+          </a:prstGeom>
+        </p:spPr>
+        <p:txBody>
+          <a:bodyPr vert="horz" lIns="91440" tIns="45720" rIns="91440" bIns="45720" rtlCol="0" anchor="b"/>
+          <a:lstStyle>
+            <a:lvl1pPr algn="l">
+              <a:defRPr sz="1200"/>
+            </a:lvl1pPr>
+          </a:lstStyle>
+          <a:p>
+            <a:endParaRPr lang="en-US"/>
+          </a:p>
+        </p:txBody>
+      </p:sp>
+      <p:sp>
+        <p:nvSpPr>
+          <p:cNvPr id="7" name="Slide Number Placeholder 6"/>
+          <p:cNvSpPr>
+            <a:spLocks noGrp="1"/>
+          </p:cNvSpPr>
+          <p:nvPr>
+            <p:ph type="sldNum" sz="quarter" idx="5"/>
+          </p:nvPr>
+        </p:nvSpPr>
+        <p:spPr>
+          <a:xfrm>
+            <a:off x="3884613" y="8685213"/>
+            <a:ext cx="2971800" cy="457200"/>
+          </a:xfrm>
+          <a:prstGeom prst="rect">
+            <a:avLst/>
+          </a:prstGeom>
+        </p:spPr>
+        <p:txBody>
+          <a:bodyPr vert="horz" lIns="91440" tIns="45720" rIns="91440" bIns="45720" rtlCol="0" anchor="b"/>
+          <a:lstStyle>
+            <a:lvl1pPr algn="r">
+              <a:defRPr sz="1200"/>
+            </a:lvl1pPr>
+          </a:lstStyle>
+          <a:p>
+            <a:fld id="{BB5E49A5-4136-284D-997B-48E1D791AD67}" type="slidenum">
+              <a:rPr lang="en-US" smtClean="0"/>
+              <a:t>‹#›</a:t>
+            </a:fld>
+            <a:endParaRPr lang="en-US"/>
+          </a:p>
+        </p:txBody>
+      </p:sp>
+    </p:spTree>
+    <p:extLst>
+      <p:ext uri="{BB962C8B-B14F-4D97-AF65-F5344CB8AC3E}">
+        <p14:creationId xmlns:p14="http://schemas.microsoft.com/office/powerpoint/2010/main" val="2623252185"/>
+      </p:ext>
+    </p:extLst>
+  </p:cSld>
+  <p:clrMap bg1="lt1" tx1="dk1" bg2="lt2" tx2="dk2" accent1="accent1" accent2="accent2" accent3="accent3" accent4="accent4" accent5="accent5" accent6="accent6" hlink="hlink" folHlink="folHlink"/>
+  <p:notesStyle>
+    <a:lvl1pPr marL="0" algn="l" defTabSz="457200" rtl="0" eaLnBrk="1" latinLnBrk="0" hangingPunct="1">
+      <a:defRPr sz="1200" kern="1200">
+        <a:solidFill>
+          <a:schemeClr val="tx1"/>
+        </a:solidFill>
+        <a:latin typeface="+mn-lt"/>
+        <a:ea typeface="+mn-ea"/>
+        <a:cs typeface="+mn-cs"/>
+      </a:defRPr>
+    </a:lvl1pPr>
+    <a:lvl2pPr marL="457200" algn="l" defTabSz="457200" rtl="0" eaLnBrk="1" latinLnBrk="0" hangingPunct="1">
+      <a:defRPr sz="1200" kern="1200">
+        <a:solidFill>
+          <a:schemeClr val="tx1"/>
+        </a:solidFill>
+        <a:latin typeface="+mn-lt"/>
+        <a:ea typeface="+mn-ea"/>
+        <a:cs typeface="+mn-cs"/>
+      </a:defRPr>
+    </a:lvl2pPr>
+    <a:lvl3pPr marL="914400" algn="l" defTabSz="457200" rtl="0" eaLnBrk="1" latinLnBrk="0" hangingPunct="1">
+      <a:defRPr sz="1200" kern="1200">
+        <a:solidFill>
+          <a:schemeClr val="tx1"/>
+        </a:solidFill>
+        <a:latin typeface="+mn-lt"/>
+        <a:ea typeface="+mn-ea"/>
+        <a:cs typeface="+mn-cs"/>
+      </a:defRPr>
+    </a:lvl3pPr>
+    <a:lvl4pPr marL="1371600" algn="l" defTabSz="457200" rtl="0" eaLnBrk="1" latinLnBrk="0" hangingPunct="1">
+      <a:defRPr sz="1200" kern="1200">
+        <a:solidFill>
+          <a:schemeClr val="tx1"/>
+        </a:solidFill>
+        <a:latin typeface="+mn-lt"/>
+        <a:ea typeface="+mn-ea"/>
+        <a:cs typeface="+mn-cs"/>
+      </a:defRPr>
+    </a:lvl4pPr>
+    <a:lvl5pPr marL="1828800" algn="l" defTabSz="457200" rtl="0" eaLnBrk="1" latinLnBrk="0" hangingPunct="1">
+      <a:defRPr sz="1200" kern="1200">
+        <a:solidFill>
+          <a:schemeClr val="tx1"/>
+        </a:solidFill>
+        <a:latin typeface="+mn-lt"/>
+        <a:ea typeface="+mn-ea"/>
+        <a:cs typeface="+mn-cs"/>
+      </a:defRPr>
+    </a:lvl5pPr>
+    <a:lvl6pPr marL="2286000" algn="l" defTabSz="457200" rtl="0" eaLnBrk="1" latinLnBrk="0" hangingPunct="1">
+      <a:defRPr sz="1200" kern="1200">
+        <a:solidFill>
+          <a:schemeClr val="tx1"/>
+        </a:solidFill>
+        <a:latin typeface="+mn-lt"/>
+        <a:ea typeface="+mn-ea"/>
+        <a:cs typeface="+mn-cs"/>
+      </a:defRPr>
+    </a:lvl6pPr>
+    <a:lvl7pPr marL="2743200" algn="l" defTabSz="457200" rtl="0" eaLnBrk="1" latinLnBrk="0" hangingPunct="1">
+      <a:defRPr sz="1200" kern="1200">
+        <a:solidFill>
+          <a:schemeClr val="tx1"/>
+        </a:solidFill>
+        <a:latin typeface="+mn-lt"/>
+        <a:ea typeface="+mn-ea"/>
+        <a:cs typeface="+mn-cs"/>
+      </a:defRPr>
+    </a:lvl7pPr>
+    <a:lvl8pPr marL="3200400" algn="l" defTabSz="457200" rtl="0" eaLnBrk="1" latinLnBrk="0" hangingPunct="1">
+      <a:defRPr sz="1200" kern="1200">
+        <a:solidFill>
+          <a:schemeClr val="tx1"/>
+        </a:solidFill>
+        <a:latin typeface="+mn-lt"/>
+        <a:ea typeface="+mn-ea"/>
+        <a:cs typeface="+mn-cs"/>
+      </a:defRPr>
+    </a:lvl8pPr>
+    <a:lvl9pPr marL="3657600" algn="l" defTabSz="457200" rtl="0" eaLnBrk="1" latinLnBrk="0" hangingPunct="1">
+      <a:defRPr sz="1200" kern="1200">
+        <a:solidFill>
+          <a:schemeClr val="tx1"/>
+        </a:solidFill>
+        <a:latin typeface="+mn-lt"/>
+        <a:ea typeface="+mn-ea"/>
+        <a:cs typeface="+mn-cs"/>
+      </a:defRPr>
+    </a:lvl9pPr>
+  </p:notesStyle>
+</p:notesMaster>
+</file>
+
+<file path=ppt/notesSlides/notesSlide1.xml><?xml version="1.0" encoding="utf-8"?>
+<p:notes xmlns:a="http://schemas.openxmlformats.org/drawingml/2006/main" xmlns:p="http://schemas.openxmlformats.org/presentationml/2006/main" xmlns:r="http://schemas.openxmlformats.org/officeDocument/2006/relationships">
+  <p:cSld>
+    <p:spTree>
+      <p:nvGrpSpPr>
+        <p:cNvPr id="1" name=""/>
+        <p:cNvGrpSpPr/>
+        <p:nvPr/>
+      </p:nvGrpSpPr>
+      <p:grpSpPr>
+        <a:xfrm>
+          <a:off x="0" y="0"/>
+          <a:ext cx="0" cy="0"/>
+          <a:chOff x="0" y="0"/>
+          <a:chExt cx="0" cy="0"/>
+        </a:xfrm>
+      </p:grpSpPr>
+      <p:sp>
+        <p:nvSpPr>
+          <p:cNvPr id="2" name="Slide Image Placeholder 1"/>
+          <p:cNvSpPr>
+            <a:spLocks noGrp="1"/>
+          </p:cNvSpPr>
+          <p:nvPr>
+            <p:ph type="sldImg" idx="2"/>
+          </p:nvPr>
+        </p:nvSpPr>
+        <p:spPr/>
+      </p:sp>
+      <p:sp>
+        <p:nvSpPr>
+          <p:cNvPr id="3" name="Notes Placeholder 2"/>
+          <p:cNvSpPr>
+            <a:spLocks noGrp="1"/>
+          </p:cNvSpPr>
+          <p:nvPr>
+            <p:ph type="body" idx="3" sz="quarter"/>
+          </p:nvPr>
+        </p:nvSpPr>
+        <p:spPr/>
+        <p:txBody>
+          <a:bodyPr/>
+          <a:lstStyle/>
+          <a:p>
+            <a:r>
+              <a:t>ANALOGIA PARA EXPLICAR FiLM ORALMENTE:</a:t>
+            </a:r>
+          </a:p>
+          <a:p/>
+          <a:p>
+            <a:r>
+              <a:t>Imagine um médico fazendo um diagnóstico. Antes de decidir, ele consulta exames complementares (ECG, raio-X) que dão contexto sobre o paciente. O diagnóstico final depende tanto do que ele observa no exame físico quanto do contexto desses exames.</a:t>
+            </a:r>
+          </a:p>
+          <a:p/>
+          <a:p>
+            <a:r>
+              <a:t>FiLM faz exatamente isso para a rede de raça: antes de decidir a classe, ela 'consulta' a saída do classificador de tom de pele e ajusta sua decisão com base nesse contexto.</a:t>
+            </a:r>
+          </a:p>
+          <a:p/>
+          <a:p>
+            <a:r>
+              <a:t>USE A ANALOGIA SE A AUDIÊNCIA PEDIR UMA INTUIÇÃO MENOS TÉCNICA — caso contrário, fique no detalhamento científico do slide.</a:t>
+            </a:r>
+          </a:p>
+        </p:txBody>
+      </p:sp>
+      <p:sp>
+        <p:nvSpPr>
+          <p:cNvPr id="4" name="Slide Number Placeholder 3"/>
+          <p:cNvSpPr>
+            <a:spLocks noGrp="1"/>
+          </p:cNvSpPr>
+          <p:nvPr>
+            <p:ph type="sldNum" idx="5" sz="quarter"/>
+          </p:nvPr>
+        </p:nvSpPr>
+        <p:spPr/>
+      </p:sp>
+    </p:spTree>
+  </p:cSld>
+  <p:clrMapOvr>
+    <a:masterClrMapping/>
+  </p:clrMapOvr>
+</p:notes>
+</file>
+
+<file path=ppt/notesSlides/notesSlide2.xml><?xml version="1.0" encoding="utf-8"?>
+<p:notes xmlns:a="http://schemas.openxmlformats.org/drawingml/2006/main" xmlns:p="http://schemas.openxmlformats.org/presentationml/2006/main" xmlns:r="http://schemas.openxmlformats.org/officeDocument/2006/relationships">
+  <p:cSld>
+    <p:spTree>
+      <p:nvGrpSpPr>
+        <p:cNvPr id="1" name=""/>
+        <p:cNvGrpSpPr/>
+        <p:nvPr/>
+      </p:nvGrpSpPr>
+      <p:grpSpPr>
+        <a:xfrm>
+          <a:off x="0" y="0"/>
+          <a:ext cx="0" cy="0"/>
+          <a:chOff x="0" y="0"/>
+          <a:chExt cx="0" cy="0"/>
+        </a:xfrm>
+      </p:grpSpPr>
+      <p:sp>
+        <p:nvSpPr>
+          <p:cNvPr id="2" name="Slide Image Placeholder 1"/>
+          <p:cNvSpPr>
+            <a:spLocks noGrp="1"/>
+          </p:cNvSpPr>
+          <p:nvPr>
+            <p:ph type="sldImg" idx="2"/>
+          </p:nvPr>
+        </p:nvSpPr>
+        <p:spPr/>
+      </p:sp>
+      <p:sp>
+        <p:nvSpPr>
+          <p:cNvPr id="3" name="Notes Placeholder 2"/>
+          <p:cNvSpPr>
+            <a:spLocks noGrp="1"/>
+          </p:cNvSpPr>
+          <p:nvPr>
+            <p:ph type="body" idx="3" sz="quarter"/>
+          </p:nvPr>
+        </p:nvSpPr>
+        <p:spPr/>
+        <p:txBody>
+          <a:bodyPr/>
+          <a:lstStyle/>
+          <a:p>
+            <a:r>
+              <a:t>ANALOGIA PARA EXPLICAR FAIR TRANSFERÊNCIA ORALMENTE:</a:t>
+            </a:r>
+          </a:p>
+          <a:p/>
+          <a:p>
+            <a:r>
+              <a:t>Aprender ética profissional em medicina geral nos torna mais éticos também quando nos especializamos em cardiologia. A 'ética' é uma propriedade do profissional (da representação interna), não da especialidade (da tarefa específica).</a:t>
+            </a:r>
+          </a:p>
+          <a:p/>
+          <a:p>
+            <a:r>
+              <a:t>USE A ANALOGIA SE A AUDIÊNCIA PEDIR UMA INTUIÇÃO MENOS TÉCNICA — caso contrário, fique no detalhamento científico do slide.</a:t>
+            </a:r>
+          </a:p>
+          <a:p/>
+          <a:p>
+            <a:r>
+              <a:t>EM CASO DE PERGUNTA SOBRE O ADVERSÁRIO:</a:t>
+            </a:r>
+          </a:p>
+          <a:p>
+            <a:r>
+              <a:t>O adversário é uma rede neural separada que recebe Z como input e tenta predizer o atributo sensível (raça). O encoder é treinado para MAXIMIZAR o erro do adversário — por isso 'adversarial'. Se o adversário NÃO consegue recuperar a raça a partir de Z, então Z não contém informação 'usável' sobre raça — e portanto qualquer classificador downstream também não pode ser injusto baseado em raça.</a:t>
+            </a:r>
+          </a:p>
+        </p:txBody>
+      </p:sp>
+      <p:sp>
+        <p:nvSpPr>
+          <p:cNvPr id="4" name="Slide Number Placeholder 3"/>
+          <p:cNvSpPr>
+            <a:spLocks noGrp="1"/>
+          </p:cNvSpPr>
+          <p:nvPr>
+            <p:ph type="sldNum" idx="5" sz="quarter"/>
+          </p:nvPr>
+        </p:nvSpPr>
+        <p:spPr/>
+      </p:sp>
+    </p:spTree>
+  </p:cSld>
+  <p:clrMapOvr>
+    <a:masterClrMapping/>
+  </p:clrMapOvr>
+</p:notes>
 </file>
 
 <file path=ppt/slideLayouts/slideLayout1.xml><?xml version="1.0" encoding="utf-8"?>
@@ -4387,8 +4918,8 @@
         </p:nvSpPr>
         <p:spPr>
           <a:xfrm>
-            <a:off x="457200" y="365760"/>
-            <a:ext cx="11430000" cy="822960"/>
+            <a:off x="457200" y="274320"/>
+            <a:ext cx="11430000" cy="640080"/>
           </a:xfrm>
           <a:prstGeom prst="rect">
             <a:avLst/>
@@ -4402,7 +4933,7 @@
           <a:lstStyle/>
           <a:p>
             <a:pPr>
-              <a:defRPr sz="2800" b="1">
+              <a:defRPr sz="2600" b="1">
                 <a:solidFill>
                   <a:srgbClr val="1F2A4E"/>
                 </a:solidFill>
@@ -4422,8 +4953,8 @@
         </p:nvSpPr>
         <p:spPr>
           <a:xfrm>
-            <a:off x="457200" y="1097280"/>
-            <a:ext cx="11430000" cy="45720"/>
+            <a:off x="457200" y="914400"/>
+            <a:ext cx="11430000" cy="36576"/>
           </a:xfrm>
           <a:prstGeom prst="rect">
             <a:avLst/>
@@ -4465,8 +4996,8 @@
         </p:nvSpPr>
         <p:spPr>
           <a:xfrm>
-            <a:off x="548640" y="1280160"/>
-            <a:ext cx="11064240" cy="640080"/>
+            <a:off x="457200" y="1005840"/>
+            <a:ext cx="11430000" cy="411480"/>
           </a:xfrm>
           <a:prstGeom prst="rect">
             <a:avLst/>
@@ -4480,14 +5011,14 @@
           <a:lstStyle/>
           <a:p>
             <a:pPr>
-              <a:defRPr sz="1600" i="1">
+              <a:defRPr sz="1400" i="1">
                 <a:solidFill>
                   <a:srgbClr val="3D424E"/>
                 </a:solidFill>
               </a:defRPr>
             </a:pPr>
             <a:r>
-              <a:t>Em palavras simples: uma camada que permite à rede de raça 'consultar' o tom de pele antes de decidir.</a:t>
+              <a:t>Mecanismo de condicionamento neural que permite a uma rede 'consultar' um sinal de contexto antes de decidir.</a:t>
             </a:r>
           </a:p>
         </p:txBody>
@@ -4500,8 +5031,8 @@
         </p:nvSpPr>
         <p:spPr>
           <a:xfrm>
-            <a:off x="548640" y="2103120"/>
-            <a:ext cx="3200400" cy="1280160"/>
+            <a:off x="457200" y="1554480"/>
+            <a:ext cx="3383280" cy="1097280"/>
           </a:xfrm>
           <a:prstGeom prst="roundRect">
             <a:avLst/>
@@ -4530,11 +5061,11 @@
           </a:fontRef>
         </p:style>
         <p:txBody>
-          <a:bodyPr rtlCol="0" anchor="ctr" wrap="square" lIns="182880" rIns="182880" tIns="137160"/>
+          <a:bodyPr rtlCol="0" anchor="ctr" wrap="square" lIns="137160" rIns="137160" tIns="91440"/>
           <a:lstStyle/>
           <a:p>
             <a:pPr algn="ctr">
-              <a:defRPr sz="1400" b="1">
+              <a:defRPr sz="1300" b="1">
                 <a:solidFill>
                   <a:srgbClr val="1F2A4E"/>
                 </a:solidFill>
@@ -4546,14 +5077,14 @@
           </a:p>
           <a:p>
             <a:pPr>
-              <a:defRPr sz="1200">
+              <a:defRPr sz="1100">
                 <a:solidFill>
                   <a:srgbClr val="3D424E"/>
                 </a:solidFill>
               </a:defRPr>
             </a:pPr>
             <a:r>
-              <a:t>SkinToneNet olha para a foto e devolve um vetor de tom (MST 1 a 10).</a:t>
+              <a:t>SkinToneNet recebe a foto e devolve um vetor de contexto representando o tom (MST 1 a 10).</a:t>
             </a:r>
           </a:p>
         </p:txBody>
@@ -4566,8 +5097,8 @@
         </p:nvSpPr>
         <p:spPr>
           <a:xfrm>
-            <a:off x="3794759" y="2560320"/>
-            <a:ext cx="457200" cy="365760"/>
+            <a:off x="3858768" y="1938527"/>
+            <a:ext cx="329184" cy="329184"/>
           </a:xfrm>
           <a:prstGeom prst="rightArrow">
             <a:avLst/>
@@ -4609,8 +5140,8 @@
         </p:nvSpPr>
         <p:spPr>
           <a:xfrm>
-            <a:off x="4297679" y="2103120"/>
-            <a:ext cx="3200400" cy="1280160"/>
+            <a:off x="4206240" y="1554480"/>
+            <a:ext cx="3383280" cy="1097280"/>
           </a:xfrm>
           <a:prstGeom prst="roundRect">
             <a:avLst/>
@@ -4637,11 +5168,11 @@
           </a:fontRef>
         </p:style>
         <p:txBody>
-          <a:bodyPr rtlCol="0" anchor="ctr" wrap="square" lIns="182880" rIns="182880" tIns="137160"/>
+          <a:bodyPr rtlCol="0" anchor="ctr" wrap="square" lIns="137160" rIns="137160" tIns="91440"/>
           <a:lstStyle/>
           <a:p>
             <a:pPr algn="ctr">
-              <a:defRPr sz="1400" b="1">
+              <a:defRPr sz="1300" b="1">
                 <a:solidFill>
                   <a:srgbClr val="FFFFFF"/>
                 </a:solidFill>
@@ -4653,14 +5184,14 @@
           </a:p>
           <a:p>
             <a:pPr>
-              <a:defRPr sz="1200">
+              <a:defRPr sz="1100">
                 <a:solidFill>
                   <a:srgbClr val="E8EAED"/>
                 </a:solidFill>
               </a:defRPr>
             </a:pPr>
             <a:r>
-              <a:t>Usa o vetor de tom para ajustar as features intermediárias da rede de raça.</a:t>
+              <a:t>Usa o vetor de contexto para modular as features intermediárias da rede de raça (escala e deslocamento por canal).</a:t>
             </a:r>
           </a:p>
         </p:txBody>
@@ -4673,8 +5204,8 @@
         </p:nvSpPr>
         <p:spPr>
           <a:xfrm>
-            <a:off x="7543800" y="2560320"/>
-            <a:ext cx="457200" cy="365760"/>
+            <a:off x="7607808" y="1938527"/>
+            <a:ext cx="329184" cy="329184"/>
           </a:xfrm>
           <a:prstGeom prst="rightArrow">
             <a:avLst/>
@@ -4716,8 +5247,8 @@
         </p:nvSpPr>
         <p:spPr>
           <a:xfrm>
-            <a:off x="8046719" y="2103120"/>
-            <a:ext cx="3200400" cy="1280160"/>
+            <a:off x="7955280" y="1554480"/>
+            <a:ext cx="3383280" cy="1097280"/>
           </a:xfrm>
           <a:prstGeom prst="roundRect">
             <a:avLst/>
@@ -4746,11 +5277,11 @@
           </a:fontRef>
         </p:style>
         <p:txBody>
-          <a:bodyPr rtlCol="0" anchor="ctr" wrap="square" lIns="182880" rIns="182880" tIns="137160"/>
+          <a:bodyPr rtlCol="0" anchor="ctr" wrap="square" lIns="137160" rIns="137160" tIns="91440"/>
           <a:lstStyle/>
           <a:p>
             <a:pPr algn="ctr">
-              <a:defRPr sz="1400" b="1">
+              <a:defRPr sz="1300" b="1">
                 <a:solidFill>
                   <a:srgbClr val="1F2A4E"/>
                 </a:solidFill>
@@ -4762,7 +5293,7 @@
           </a:p>
           <a:p>
             <a:pPr>
-              <a:defRPr sz="1200">
+              <a:defRPr sz="1100">
                 <a:solidFill>
                   <a:srgbClr val="3D424E"/>
                 </a:solidFill>
@@ -4782,8 +5313,135 @@
         </p:nvSpPr>
         <p:spPr>
           <a:xfrm>
-            <a:off x="548640" y="4023360"/>
-            <a:ext cx="11064240" cy="1188720"/>
+            <a:off x="457200" y="2788920"/>
+            <a:ext cx="11430000" cy="2377440"/>
+          </a:xfrm>
+          <a:prstGeom prst="roundRect">
+            <a:avLst/>
+          </a:prstGeom>
+          <a:solidFill>
+            <a:srgbClr val="E8EAED"/>
+          </a:solidFill>
+          <a:ln>
+            <a:noFill/>
+          </a:ln>
+        </p:spPr>
+        <p:style>
+          <a:lnRef idx="1">
+            <a:schemeClr val="accent1"/>
+          </a:lnRef>
+          <a:fillRef idx="3">
+            <a:schemeClr val="accent1"/>
+          </a:fillRef>
+          <a:effectRef idx="2">
+            <a:schemeClr val="accent1"/>
+          </a:effectRef>
+          <a:fontRef idx="minor">
+            <a:schemeClr val="lt1"/>
+          </a:fontRef>
+        </p:style>
+        <p:txBody>
+          <a:bodyPr rtlCol="0" anchor="ctr" wrap="square" lIns="228600" rIns="228600" tIns="109728"/>
+          <a:lstStyle/>
+          <a:p>
+            <a:pPr algn="ctr">
+              <a:defRPr sz="1300" b="1">
+                <a:solidFill>
+                  <a:srgbClr val="1F2A4E"/>
+                </a:solidFill>
+              </a:defRPr>
+            </a:pPr>
+            <a:r>
+              <a:t>Detalhamento científico</a:t>
+            </a:r>
+          </a:p>
+          <a:p>
+            <a:pPr>
+              <a:spcAft>
+                <a:spcPts val="200"/>
+              </a:spcAft>
+              <a:defRPr sz="1200">
+                <a:solidFill>
+                  <a:srgbClr val="3D424E"/>
+                </a:solidFill>
+              </a:defRPr>
+            </a:pPr>
+            <a:r>
+              <a:t>•  Origem (Perez et al. 2018, AAAI): proposto originalmente para Visual Question Answering, generaliza Conditional Batch Normalization (de Vries et al. 2017, NeurIPS). Família mais ampla: conditional normalization.</a:t>
+            </a:r>
+          </a:p>
+          <a:p>
+            <a:pPr>
+              <a:spcAft>
+                <a:spcPts val="200"/>
+              </a:spcAft>
+              <a:defRPr sz="1200">
+                <a:solidFill>
+                  <a:srgbClr val="3D424E"/>
+                </a:solidFill>
+              </a:defRPr>
+            </a:pPr>
+            <a:r>
+              <a:t>•  Mecanismo central: para cada canal de uma feature map, FiLM aplica um par (escala, deslocamento) aprendido a partir do contexto. É linear nas features e não linear no contexto.</a:t>
+            </a:r>
+          </a:p>
+          <a:p>
+            <a:pPr>
+              <a:spcAft>
+                <a:spcPts val="200"/>
+              </a:spcAft>
+              <a:defRPr sz="1200">
+                <a:solidFill>
+                  <a:srgbClr val="3D424E"/>
+                </a:solidFill>
+              </a:defRPr>
+            </a:pPr>
+            <a:r>
+              <a:t>•  Onde inserir no nosso pipeline: após cada bloco residual do ConvNeXt-T (4 blocos hierárquicos). Apenas as MLPs de modulação são novas; o backbone segue treinável end-to-end.</a:t>
+            </a:r>
+          </a:p>
+          <a:p>
+            <a:pPr>
+              <a:spcAft>
+                <a:spcPts val="200"/>
+              </a:spcAft>
+              <a:defRPr sz="1200">
+                <a:solidFill>
+                  <a:srgbClr val="3D424E"/>
+                </a:solidFill>
+              </a:defRPr>
+            </a:pPr>
+            <a:r>
+              <a:t>•  Por que FiLM e não alternativas: concatenar o vetor MST nas features perde escala posicional; cross-attention seria mais caro e menos estável para vetor de 10 dimensões; conditional BN é menos expressivo (afeta apenas batchnorm).</a:t>
+            </a:r>
+          </a:p>
+          <a:p>
+            <a:pPr>
+              <a:spcAft>
+                <a:spcPts val="200"/>
+              </a:spcAft>
+              <a:defRPr sz="1200">
+                <a:solidFill>
+                  <a:srgbClr val="3D424E"/>
+                </a:solidFill>
+              </a:defRPr>
+            </a:pPr>
+            <a:r>
+              <a:t>•  Evidências de uso: ~1.000+ papers citantes em CV, NLP e RL desde 2018 (Google Scholar). Estabelecido como técnica padrão de conditioning em redes neurais profundas.</a:t>
+            </a:r>
+          </a:p>
+        </p:txBody>
+      </p:sp>
+      <p:sp>
+        <p:nvSpPr>
+          <p:cNvPr id="11" name="Rounded Rectangle 10"/>
+          <p:cNvSpPr/>
+          <p:nvPr/>
+        </p:nvSpPr>
+        <p:spPr>
+          <a:xfrm>
+            <a:off x="457200" y="5257800"/>
+            <a:ext cx="11430000" cy="1280160"/>
           </a:xfrm>
           <a:prstGeom prst="roundRect">
             <a:avLst/>
@@ -4812,94 +5470,30 @@
           </a:fontRef>
         </p:style>
         <p:txBody>
-          <a:bodyPr rtlCol="0" anchor="ctr" wrap="square" lIns="274320" rIns="274320" tIns="137160"/>
+          <a:bodyPr rtlCol="0" anchor="ctr" wrap="square" lIns="228600" rIns="228600" tIns="109728"/>
           <a:lstStyle/>
           <a:p>
             <a:pPr algn="ctr">
-              <a:defRPr sz="1400" b="1">
+              <a:defRPr sz="1300" b="1">
                 <a:solidFill>
                   <a:srgbClr val="2E7D32"/>
                 </a:solidFill>
               </a:defRPr>
             </a:pPr>
             <a:r>
-              <a:t>Analogia</a:t>
-            </a:r>
-          </a:p>
-          <a:p>
-            <a:pPr>
-              <a:defRPr sz="1400">
+              <a:t>Por que importa para a tese</a:t>
+            </a:r>
+          </a:p>
+          <a:p>
+            <a:pPr>
+              <a:defRPr sz="1200">
                 <a:solidFill>
                   <a:srgbClr val="3D424E"/>
                 </a:solidFill>
               </a:defRPr>
             </a:pPr>
             <a:r>
-              <a:t>Um médico fazendo diagnóstico. Antes de decidir, ele consulta um exame complementar (ECG, raio-X). FiLM faz isso para a rede de raça: antes de decidir, ela 'consulta' a saída do classificador de tom de pele.</a:t>
-            </a:r>
-          </a:p>
-        </p:txBody>
-      </p:sp>
-      <p:sp>
-        <p:nvSpPr>
-          <p:cNvPr id="11" name="Rounded Rectangle 10"/>
-          <p:cNvSpPr/>
-          <p:nvPr/>
-        </p:nvSpPr>
-        <p:spPr>
-          <a:xfrm>
-            <a:off x="548640" y="5394960"/>
-            <a:ext cx="11064240" cy="1097280"/>
-          </a:xfrm>
-          <a:prstGeom prst="roundRect">
-            <a:avLst/>
-          </a:prstGeom>
-          <a:solidFill>
-            <a:srgbClr val="E8EAED"/>
-          </a:solidFill>
-          <a:ln>
-            <a:noFill/>
-          </a:ln>
-        </p:spPr>
-        <p:style>
-          <a:lnRef idx="1">
-            <a:schemeClr val="accent1"/>
-          </a:lnRef>
-          <a:fillRef idx="3">
-            <a:schemeClr val="accent1"/>
-          </a:fillRef>
-          <a:effectRef idx="2">
-            <a:schemeClr val="accent1"/>
-          </a:effectRef>
-          <a:fontRef idx="minor">
-            <a:schemeClr val="lt1"/>
-          </a:fontRef>
-        </p:style>
-        <p:txBody>
-          <a:bodyPr rtlCol="0" anchor="ctr" wrap="square" lIns="274320" rIns="274320" tIns="137160"/>
-          <a:lstStyle/>
-          <a:p>
-            <a:pPr algn="ctr">
-              <a:defRPr sz="1400" b="1">
-                <a:solidFill>
-                  <a:srgbClr val="1F2A4E"/>
-                </a:solidFill>
-              </a:defRPr>
-            </a:pPr>
-            <a:r>
-              <a:t>Por que importa para a tese</a:t>
-            </a:r>
-          </a:p>
-          <a:p>
-            <a:pPr>
-              <a:defRPr sz="1400">
-                <a:solidFill>
-                  <a:srgbClr val="3D424E"/>
-                </a:solidFill>
-              </a:defRPr>
-            </a:pPr>
-            <a:r>
-              <a:t>Sem FiLM, 'usar tom de pele como contexto' seria uma ideia vaga. Com FiLM, vira mecanismo concreto e reproduzível, validado em mais de 600 papers desde 2018 (Perez et al., AAAI 2018).</a:t>
+              <a:t>FiLM transforma a ideia 'usar tom de pele como contexto' em mecanismo formal, reproduzível e auditável. O ganho marginal sobre baseline puro é a evidência direta de H1. Custo de parâmetros adicional é mínimo (apenas duas MLPs pequenas por bloco).</a:t>
             </a:r>
           </a:p>
         </p:txBody>
@@ -4930,8 +5524,8 @@
         </p:nvSpPr>
         <p:spPr>
           <a:xfrm>
-            <a:off x="457200" y="365760"/>
-            <a:ext cx="11430000" cy="822960"/>
+            <a:off x="457200" y="274320"/>
+            <a:ext cx="11430000" cy="640080"/>
           </a:xfrm>
           <a:prstGeom prst="rect">
             <a:avLst/>
@@ -4945,7 +5539,7 @@
           <a:lstStyle/>
           <a:p>
             <a:pPr>
-              <a:defRPr sz="2800" b="1">
+              <a:defRPr sz="2600" b="1">
                 <a:solidFill>
                   <a:srgbClr val="1F2A4E"/>
                 </a:solidFill>
@@ -4965,8 +5559,8 @@
         </p:nvSpPr>
         <p:spPr>
           <a:xfrm>
-            <a:off x="457200" y="1097280"/>
-            <a:ext cx="11430000" cy="45720"/>
+            <a:off x="457200" y="914400"/>
+            <a:ext cx="11430000" cy="36576"/>
           </a:xfrm>
           <a:prstGeom prst="rect">
             <a:avLst/>
@@ -5008,8 +5602,8 @@
         </p:nvSpPr>
         <p:spPr>
           <a:xfrm>
-            <a:off x="548640" y="1280160"/>
-            <a:ext cx="11064240" cy="640080"/>
+            <a:off x="457200" y="1005840"/>
+            <a:ext cx="11430000" cy="411480"/>
           </a:xfrm>
           <a:prstGeom prst="rect">
             <a:avLst/>
@@ -5023,14 +5617,14 @@
           <a:lstStyle/>
           <a:p>
             <a:pPr>
-              <a:defRPr sz="1500" i="1">
+              <a:defRPr sz="1400" i="1">
                 <a:solidFill>
                   <a:srgbClr val="3D424E"/>
                 </a:solidFill>
               </a:defRPr>
             </a:pPr>
             <a:r>
-              <a:t>Em palavras simples: se uma rede aprendeu a ser justa em uma tarefa, ela carrega essa propriedade para outras tarefas que usem a mesma representação interna.</a:t>
+              <a:t>Framework de adversarial fair representation learning que demonstra fairness como propriedade transferível entre tarefas.</a:t>
             </a:r>
           </a:p>
         </p:txBody>
@@ -5043,8 +5637,8 @@
         </p:nvSpPr>
         <p:spPr>
           <a:xfrm>
-            <a:off x="548640" y="2286000"/>
-            <a:ext cx="3840480" cy="1463040"/>
+            <a:off x="457200" y="1554480"/>
+            <a:ext cx="3657600" cy="1097280"/>
           </a:xfrm>
           <a:prstGeom prst="roundRect">
             <a:avLst/>
@@ -5073,11 +5667,11 @@
           </a:fontRef>
         </p:style>
         <p:txBody>
-          <a:bodyPr rtlCol="0" anchor="ctr" wrap="square" lIns="182880" rIns="182880" tIns="137160"/>
+          <a:bodyPr rtlCol="0" anchor="ctr" wrap="square" lIns="137160" rIns="137160" tIns="91440"/>
           <a:lstStyle/>
           <a:p>
             <a:pPr algn="ctr">
-              <a:defRPr sz="1400" b="1">
+              <a:defRPr sz="1300" b="1">
                 <a:solidFill>
                   <a:srgbClr val="1F2A4E"/>
                 </a:solidFill>
@@ -5089,14 +5683,14 @@
           </a:p>
           <a:p>
             <a:pPr>
-              <a:defRPr sz="1200">
+              <a:defRPr sz="1100">
                 <a:solidFill>
                   <a:srgbClr val="3D424E"/>
                 </a:solidFill>
               </a:defRPr>
             </a:pPr>
             <a:r>
-              <a:t>Treinamos a rede com objetivo fair sobre tom de pele e raça. O backbone aprende uma representação que é, por construção, mais equilibrada entre grupos.</a:t>
+              <a:t>Treino do backbone com objetivo fair sobre raça. A representação aprendida (Z) é, por construção, equilibrada entre grupos.</a:t>
             </a:r>
           </a:p>
         </p:txBody>
@@ -5109,8 +5703,8 @@
         </p:nvSpPr>
         <p:spPr>
           <a:xfrm>
-            <a:off x="4480560" y="2788920"/>
-            <a:ext cx="822960" cy="457200"/>
+            <a:off x="4206240" y="1938527"/>
+            <a:ext cx="640080" cy="329184"/>
           </a:xfrm>
           <a:prstGeom prst="rightArrow">
             <a:avLst/>
@@ -5152,8 +5746,8 @@
         </p:nvSpPr>
         <p:spPr>
           <a:xfrm>
-            <a:off x="5394960" y="2286000"/>
-            <a:ext cx="2194560" cy="1463040"/>
+            <a:off x="4937760" y="1554480"/>
+            <a:ext cx="2286000" cy="1097280"/>
           </a:xfrm>
           <a:prstGeom prst="roundRect">
             <a:avLst/>
@@ -5184,14 +5778,14 @@
           <a:lstStyle/>
           <a:p>
             <a:pPr algn="ctr">
-              <a:defRPr sz="1400" b="1">
+              <a:defRPr sz="1300" b="1">
                 <a:solidFill>
                   <a:srgbClr val="FFFFFF"/>
                 </a:solidFill>
               </a:defRPr>
             </a:pPr>
             <a:r>
-              <a:t>Backbone fair</a:t>
+              <a:t>Representação Z fair</a:t>
             </a:r>
           </a:p>
           <a:p>
@@ -5203,7 +5797,7 @@
               </a:defRPr>
             </a:pPr>
             <a:r>
-              <a:t>A propriedade fair fica embutida AQUI.</a:t>
+              <a:t>A propriedade fair é embutida AQUI.</a:t>
             </a:r>
           </a:p>
         </p:txBody>
@@ -5216,8 +5810,8 @@
         </p:nvSpPr>
         <p:spPr>
           <a:xfrm>
-            <a:off x="7680960" y="2788920"/>
-            <a:ext cx="822960" cy="457200"/>
+            <a:off x="7315200" y="1938527"/>
+            <a:ext cx="640080" cy="329184"/>
           </a:xfrm>
           <a:prstGeom prst="rightArrow">
             <a:avLst/>
@@ -5259,8 +5853,8 @@
         </p:nvSpPr>
         <p:spPr>
           <a:xfrm>
-            <a:off x="8595360" y="2286000"/>
-            <a:ext cx="3017520" cy="1463040"/>
+            <a:off x="8046720" y="1554480"/>
+            <a:ext cx="3840480" cy="1097280"/>
           </a:xfrm>
           <a:prstGeom prst="roundRect">
             <a:avLst/>
@@ -5289,11 +5883,11 @@
           </a:fontRef>
         </p:style>
         <p:txBody>
-          <a:bodyPr rtlCol="0" anchor="ctr" wrap="square" lIns="182880" rIns="182880" tIns="137160"/>
+          <a:bodyPr rtlCol="0" anchor="ctr" wrap="square" lIns="137160" rIns="137160" tIns="91440"/>
           <a:lstStyle/>
           <a:p>
             <a:pPr algn="ctr">
-              <a:defRPr sz="1400" b="1">
+              <a:defRPr sz="1300" b="1">
                 <a:solidFill>
                   <a:srgbClr val="1F2A4E"/>
                 </a:solidFill>
@@ -5305,14 +5899,14 @@
           </a:p>
           <a:p>
             <a:pPr>
-              <a:defRPr sz="1200">
+              <a:defRPr sz="1100">
                 <a:solidFill>
                   <a:srgbClr val="3D424E"/>
                 </a:solidFill>
               </a:defRPr>
             </a:pPr>
             <a:r>
-              <a:t>Reaproveitamos o mesmo backbone. Como ele já é fair, a tarefa nova herda essa propriedade — sem precisar re-treinar do zero.</a:t>
+              <a:t>Reuso do backbone como ponto de partida. A nova tarefa herda a propriedade fair sem re-treinar do zero.</a:t>
             </a:r>
           </a:p>
         </p:txBody>
@@ -5325,19 +5919,17 @@
         </p:nvSpPr>
         <p:spPr>
           <a:xfrm>
-            <a:off x="548640" y="3931920"/>
-            <a:ext cx="11064240" cy="1371600"/>
+            <a:off x="457200" y="2788920"/>
+            <a:ext cx="11430000" cy="2377440"/>
           </a:xfrm>
           <a:prstGeom prst="roundRect">
             <a:avLst/>
           </a:prstGeom>
           <a:solidFill>
-            <a:srgbClr val="FFFFFF"/>
+            <a:srgbClr val="E8EAED"/>
           </a:solidFill>
-          <a:ln w="19050">
-            <a:solidFill>
-              <a:srgbClr val="1F2A4E"/>
-            </a:solidFill>
+          <a:ln>
+            <a:noFill/>
           </a:ln>
         </p:spPr>
         <p:style>
@@ -5355,30 +5947,108 @@
           </a:fontRef>
         </p:style>
         <p:txBody>
-          <a:bodyPr rtlCol="0" anchor="ctr" wrap="square" lIns="274320" rIns="274320" tIns="137160"/>
+          <a:bodyPr rtlCol="0" anchor="ctr" wrap="square" lIns="228600" rIns="228600" tIns="109728"/>
           <a:lstStyle/>
           <a:p>
             <a:pPr algn="ctr">
-              <a:defRPr sz="1400" b="1">
+              <a:defRPr sz="1300" b="1">
                 <a:solidFill>
                   <a:srgbClr val="1F2A4E"/>
                 </a:solidFill>
               </a:defRPr>
             </a:pPr>
             <a:r>
-              <a:t>O que Madras et al. 2018 (ICML) provam</a:t>
-            </a:r>
-          </a:p>
-          <a:p>
-            <a:pPr>
-              <a:defRPr sz="1300">
+              <a:t>Detalhamento científico</a:t>
+            </a:r>
+          </a:p>
+          <a:p>
+            <a:pPr>
+              <a:spcAft>
+                <a:spcPts val="200"/>
+              </a:spcAft>
+              <a:defRPr sz="1100">
                 <a:solidFill>
                   <a:srgbClr val="3D424E"/>
                 </a:solidFill>
               </a:defRPr>
             </a:pPr>
             <a:r>
-              <a:t>A fairness é PROPRIEDADE DA REPRESENTAÇÃO INTERNA — não da tarefa específica. Qualquer classificador downstream que use a mesma representação herda um limite superior de injustiça. É essa garantia teórica que sustenta a extensão da nossa tese para face recognition (Cap 3).</a:t>
+              <a:t>•  Linhagem teórica: parte da família Fair Representation Learning iniciada por Zemel et al. 2013 (ICML, Test-of-Time Award 2023). LAFTR avança o paradigma com formulação adversarial.</a:t>
+            </a:r>
+          </a:p>
+          <a:p>
+            <a:pPr>
+              <a:spcAft>
+                <a:spcPts val="200"/>
+              </a:spcAft>
+              <a:defRPr sz="1100">
+                <a:solidFill>
+                  <a:srgbClr val="3D424E"/>
+                </a:solidFill>
+              </a:defRPr>
+            </a:pPr>
+            <a:r>
+              <a:t>•  Arquitetura: 3 componentes treinados conjuntamente — encoder (gera a representação Z), classificador da tarefa principal, adversário que tenta recuperar o atributo sensível a partir de Z.</a:t>
+            </a:r>
+          </a:p>
+          <a:p>
+            <a:pPr>
+              <a:spcAft>
+                <a:spcPts val="200"/>
+              </a:spcAft>
+              <a:defRPr sz="1100">
+                <a:solidFill>
+                  <a:srgbClr val="3D424E"/>
+                </a:solidFill>
+              </a:defRPr>
+            </a:pPr>
+            <a:r>
+              <a:t>•  Resultado teórico chave (Teorema 1): se o adversário falha em recuperar o atributo sensível, então qualquer classificador downstream treinado sobre Z herda um limite superior de violação de fairness.</a:t>
+            </a:r>
+          </a:p>
+          <a:p>
+            <a:pPr>
+              <a:spcAft>
+                <a:spcPts val="200"/>
+              </a:spcAft>
+              <a:defRPr sz="1100">
+                <a:solidFill>
+                  <a:srgbClr val="3D424E"/>
+                </a:solidFill>
+              </a:defRPr>
+            </a:pPr>
+            <a:r>
+              <a:t>•  Métricas implementadas: demographic parity, equal opportunity, equalized odds (Hardt et al. 2016). Compatível com a triangulação de métricas que vamos usar no Cap 2.</a:t>
+            </a:r>
+          </a:p>
+          <a:p>
+            <a:pPr>
+              <a:spcAft>
+                <a:spcPts val="200"/>
+              </a:spcAft>
+              <a:defRPr sz="1100">
+                <a:solidFill>
+                  <a:srgbClr val="3D424E"/>
+                </a:solidFill>
+              </a:defRPr>
+            </a:pPr>
+            <a:r>
+              <a:t>•  Validações empíricas: UCI Adult, Heritage Health, CelebA. Aguirre &amp; Dredze 2023 estendeu o princípio para multi-task NLP — evidência de generalização do mecanismo.</a:t>
+            </a:r>
+          </a:p>
+          <a:p>
+            <a:pPr>
+              <a:spcAft>
+                <a:spcPts val="200"/>
+              </a:spcAft>
+              <a:defRPr sz="1100">
+                <a:solidFill>
+                  <a:srgbClr val="3D424E"/>
+                </a:solidFill>
+              </a:defRPr>
+            </a:pPr>
+            <a:r>
+              <a:t>•  Implementação: código aberto em github.com/VectorInstitute/laftr. Reduz custo de adaptação para o nosso pipeline.</a:t>
             </a:r>
           </a:p>
         </p:txBody>
@@ -5391,8 +6061,8 @@
         </p:nvSpPr>
         <p:spPr>
           <a:xfrm>
-            <a:off x="548640" y="5440680"/>
-            <a:ext cx="11064240" cy="914400"/>
+            <a:off x="457200" y="5257800"/>
+            <a:ext cx="11430000" cy="1143000"/>
           </a:xfrm>
           <a:prstGeom prst="roundRect">
             <a:avLst/>
@@ -5421,7 +6091,7 @@
           </a:fontRef>
         </p:style>
         <p:txBody>
-          <a:bodyPr rtlCol="0" anchor="ctr" wrap="square" lIns="274320" rIns="274320" tIns="91440"/>
+          <a:bodyPr rtlCol="0" anchor="ctr" wrap="square" lIns="228600" rIns="228600" tIns="109728"/>
           <a:lstStyle/>
           <a:p>
             <a:pPr algn="ctr">
@@ -5432,19 +6102,19 @@
               </a:defRPr>
             </a:pPr>
             <a:r>
-              <a:t>Analogia</a:t>
-            </a:r>
-          </a:p>
-          <a:p>
-            <a:pPr>
-              <a:defRPr sz="1300">
+              <a:t>Por que importa para a tese</a:t>
+            </a:r>
+          </a:p>
+          <a:p>
+            <a:pPr>
+              <a:defRPr sz="1200">
                 <a:solidFill>
                   <a:srgbClr val="3D424E"/>
                 </a:solidFill>
               </a:defRPr>
             </a:pPr>
             <a:r>
-              <a:t>Aprender ética profissional em medicina geral nos torna mais éticos também quando nos especializamos em cardiologia. A 'ética' é uma propriedade do profissional, não da especialidade.</a:t>
+              <a:t>O Teorema 1 do LAFTR é a garantia teórica que sustenta a EXTENSÃO da nossa tese para Cap 3 (face recognition). Sem ele, teríamos que defender a transferência empiricamente sem ancoragem formal. Com ele, a extensão deixa de ser especulativa.</a:t>
             </a:r>
           </a:p>
         </p:txBody>
@@ -5844,8 +6514,8 @@
         </p:nvSpPr>
         <p:spPr>
           <a:xfrm>
-            <a:off x="457200" y="365760"/>
-            <a:ext cx="11430000" cy="822960"/>
+            <a:off x="457200" y="274320"/>
+            <a:ext cx="11430000" cy="640080"/>
           </a:xfrm>
           <a:prstGeom prst="rect">
             <a:avLst/>
@@ -5859,14 +6529,14 @@
           <a:lstStyle/>
           <a:p>
             <a:pPr>
-              <a:defRPr sz="2600" b="1">
+              <a:defRPr sz="2800" b="1">
                 <a:solidFill>
                   <a:srgbClr val="1F2A4E"/>
                 </a:solidFill>
               </a:defRPr>
             </a:pPr>
             <a:r>
-              <a:t>As métricas que vamos reportar — todas públicas e estabelecidas</a:t>
+              <a:t>As métricas que vamos reportar</a:t>
             </a:r>
           </a:p>
         </p:txBody>
@@ -5879,8 +6549,8 @@
         </p:nvSpPr>
         <p:spPr>
           <a:xfrm>
-            <a:off x="457200" y="1097280"/>
-            <a:ext cx="11430000" cy="45720"/>
+            <a:off x="457200" y="914400"/>
+            <a:ext cx="11430000" cy="36576"/>
           </a:xfrm>
           <a:prstGeom prst="rect">
             <a:avLst/>
@@ -5916,14 +6586,49 @@
       </p:sp>
       <p:sp>
         <p:nvSpPr>
-          <p:cNvPr id="4" name="Rounded Rectangle 3"/>
+          <p:cNvPr id="4" name="TextBox 3"/>
+          <p:cNvSpPr txBox="1"/>
+          <p:nvPr/>
+        </p:nvSpPr>
+        <p:spPr>
+          <a:xfrm>
+            <a:off x="457200" y="1005840"/>
+            <a:ext cx="11430000" cy="365760"/>
+          </a:xfrm>
+          <a:prstGeom prst="rect">
+            <a:avLst/>
+          </a:prstGeom>
+          <a:noFill/>
+        </p:spPr>
+        <p:txBody>
+          <a:bodyPr wrap="none">
+            <a:spAutoFit/>
+          </a:bodyPr>
+          <a:lstStyle/>
+          <a:p>
+            <a:pPr>
+              <a:defRPr sz="1400" i="1">
+                <a:solidFill>
+                  <a:srgbClr val="3D424E"/>
+                </a:solidFill>
+              </a:defRPr>
+            </a:pPr>
+            <a:r>
+              <a:t>Todas públicas, padrão da literatura — reportar as 3 simultaneamente é exigência metodológica, não escolha.</a:t>
+            </a:r>
+          </a:p>
+        </p:txBody>
+      </p:sp>
+      <p:sp>
+        <p:nvSpPr>
+          <p:cNvPr id="5" name="Rounded Rectangle 4"/>
           <p:cNvSpPr/>
           <p:nvPr/>
         </p:nvSpPr>
         <p:spPr>
           <a:xfrm>
-            <a:off x="548640" y="1325880"/>
-            <a:ext cx="11064240" cy="1325880"/>
+            <a:off x="379476" y="1463040"/>
+            <a:ext cx="3657600" cy="4114800"/>
           </a:xfrm>
           <a:prstGeom prst="roundRect">
             <a:avLst/>
@@ -5950,63 +6655,305 @@
           </a:fontRef>
         </p:style>
         <p:txBody>
-          <a:bodyPr rtlCol="0" anchor="ctr" wrap="square" lIns="274320" rIns="274320" tIns="91440"/>
+          <a:bodyPr rtlCol="0" anchor="ctr"/>
           <a:lstStyle/>
           <a:p>
             <a:pPr algn="ctr"/>
-            <a:r>
-              <a:rPr sz="1500" b="1">
+          </a:p>
+        </p:txBody>
+      </p:sp>
+      <p:sp>
+        <p:nvSpPr>
+          <p:cNvPr id="6" name="Rectangle 5"/>
+          <p:cNvSpPr/>
+          <p:nvPr/>
+        </p:nvSpPr>
+        <p:spPr>
+          <a:xfrm>
+            <a:off x="379476" y="1463040"/>
+            <a:ext cx="3657600" cy="822960"/>
+          </a:xfrm>
+          <a:prstGeom prst="rect">
+            <a:avLst/>
+          </a:prstGeom>
+          <a:solidFill>
+            <a:srgbClr val="1F2A4E"/>
+          </a:solidFill>
+          <a:ln>
+            <a:noFill/>
+          </a:ln>
+        </p:spPr>
+        <p:style>
+          <a:lnRef idx="1">
+            <a:schemeClr val="accent1"/>
+          </a:lnRef>
+          <a:fillRef idx="3">
+            <a:schemeClr val="accent1"/>
+          </a:fillRef>
+          <a:effectRef idx="2">
+            <a:schemeClr val="accent1"/>
+          </a:effectRef>
+          <a:fontRef idx="minor">
+            <a:schemeClr val="lt1"/>
+          </a:fontRef>
+        </p:style>
+        <p:txBody>
+          <a:bodyPr rtlCol="0" anchor="ctr" wrap="square" lIns="182880" rIns="182880" tIns="91440"/>
+          <a:lstStyle/>
+          <a:p>
+            <a:pPr algn="ctr">
+              <a:defRPr sz="2000" b="1">
+                <a:solidFill>
+                  <a:srgbClr val="FFFFFF"/>
+                </a:solidFill>
+              </a:defRPr>
+            </a:pPr>
+            <a:r>
+              <a:t>F1 macro</a:t>
+            </a:r>
+          </a:p>
+          <a:p>
+            <a:pPr algn="ctr">
+              <a:defRPr sz="1200" i="1">
+                <a:solidFill>
+                  <a:srgbClr val="E8EAED"/>
+                </a:solidFill>
+              </a:defRPr>
+            </a:pPr>
+            <a:r>
+              <a:t>performance média</a:t>
+            </a:r>
+          </a:p>
+        </p:txBody>
+      </p:sp>
+      <p:sp>
+        <p:nvSpPr>
+          <p:cNvPr id="7" name="TextBox 6"/>
+          <p:cNvSpPr txBox="1"/>
+          <p:nvPr/>
+        </p:nvSpPr>
+        <p:spPr>
+          <a:xfrm>
+            <a:off x="516636" y="2377440"/>
+            <a:ext cx="3383280" cy="1188720"/>
+          </a:xfrm>
+          <a:prstGeom prst="rect">
+            <a:avLst/>
+          </a:prstGeom>
+          <a:noFill/>
+        </p:spPr>
+        <p:txBody>
+          <a:bodyPr wrap="square">
+            <a:spAutoFit/>
+          </a:bodyPr>
+          <a:lstStyle/>
+          <a:p>
+            <a:pPr>
+              <a:defRPr sz="1300">
+                <a:solidFill>
+                  <a:srgbClr val="3D424E"/>
+                </a:solidFill>
+              </a:defRPr>
+            </a:pPr>
+            <a:r>
+              <a:t>Média harmônica de precision/recall por classe, depois média simples entre as 7 raças.</a:t>
+            </a:r>
+          </a:p>
+        </p:txBody>
+      </p:sp>
+      <p:sp>
+        <p:nvSpPr>
+          <p:cNvPr id="8" name="TextBox 7"/>
+          <p:cNvSpPr txBox="1"/>
+          <p:nvPr/>
+        </p:nvSpPr>
+        <p:spPr>
+          <a:xfrm>
+            <a:off x="516636" y="3611880"/>
+            <a:ext cx="3383280" cy="365760"/>
+          </a:xfrm>
+          <a:prstGeom prst="rect">
+            <a:avLst/>
+          </a:prstGeom>
+          <a:noFill/>
+        </p:spPr>
+        <p:txBody>
+          <a:bodyPr wrap="square">
+            <a:spAutoFit/>
+          </a:bodyPr>
+          <a:lstStyle/>
+          <a:p>
+            <a:pPr>
+              <a:defRPr sz="1100" i="1">
+                <a:solidFill>
+                  <a:srgbClr val="707682"/>
+                </a:solidFill>
+              </a:defRPr>
+            </a:pPr>
+            <a:r>
+              <a:t>Referência: van Rijsbergen 1979</a:t>
+            </a:r>
+          </a:p>
+        </p:txBody>
+      </p:sp>
+      <p:sp>
+        <p:nvSpPr>
+          <p:cNvPr id="9" name="Rectangle 8"/>
+          <p:cNvSpPr/>
+          <p:nvPr/>
+        </p:nvSpPr>
+        <p:spPr>
+          <a:xfrm>
+            <a:off x="653796" y="4069080"/>
+            <a:ext cx="3108960" cy="27432"/>
+          </a:xfrm>
+          <a:prstGeom prst="rect">
+            <a:avLst/>
+          </a:prstGeom>
+          <a:solidFill>
+            <a:srgbClr val="707682"/>
+          </a:solidFill>
+          <a:ln>
+            <a:noFill/>
+          </a:ln>
+        </p:spPr>
+        <p:style>
+          <a:lnRef idx="1">
+            <a:schemeClr val="accent1"/>
+          </a:lnRef>
+          <a:fillRef idx="3">
+            <a:schemeClr val="accent1"/>
+          </a:fillRef>
+          <a:effectRef idx="2">
+            <a:schemeClr val="accent1"/>
+          </a:effectRef>
+          <a:fontRef idx="minor">
+            <a:schemeClr val="lt1"/>
+          </a:fontRef>
+        </p:style>
+        <p:txBody>
+          <a:bodyPr rtlCol="0" anchor="ctr"/>
+          <a:lstStyle/>
+          <a:p>
+            <a:pPr algn="ctr"/>
+          </a:p>
+        </p:txBody>
+      </p:sp>
+      <p:sp>
+        <p:nvSpPr>
+          <p:cNvPr id="10" name="TextBox 9"/>
+          <p:cNvSpPr txBox="1"/>
+          <p:nvPr/>
+        </p:nvSpPr>
+        <p:spPr>
+          <a:xfrm>
+            <a:off x="516636" y="4160520"/>
+            <a:ext cx="3383280" cy="320040"/>
+          </a:xfrm>
+          <a:prstGeom prst="rect">
+            <a:avLst/>
+          </a:prstGeom>
+          <a:noFill/>
+        </p:spPr>
+        <p:txBody>
+          <a:bodyPr wrap="none">
+            <a:spAutoFit/>
+          </a:bodyPr>
+          <a:lstStyle/>
+          <a:p>
+            <a:pPr algn="ctr">
+              <a:defRPr sz="1100" i="1">
+                <a:solidFill>
+                  <a:srgbClr val="707682"/>
+                </a:solidFill>
+              </a:defRPr>
+            </a:pPr>
+            <a:r>
+              <a:t>SOTA atual</a:t>
+            </a:r>
+          </a:p>
+        </p:txBody>
+      </p:sp>
+      <p:sp>
+        <p:nvSpPr>
+          <p:cNvPr id="11" name="TextBox 10"/>
+          <p:cNvSpPr txBox="1"/>
+          <p:nvPr/>
+        </p:nvSpPr>
+        <p:spPr>
+          <a:xfrm>
+            <a:off x="516636" y="4434840"/>
+            <a:ext cx="3383280" cy="640080"/>
+          </a:xfrm>
+          <a:prstGeom prst="rect">
+            <a:avLst/>
+          </a:prstGeom>
+          <a:noFill/>
+        </p:spPr>
+        <p:txBody>
+          <a:bodyPr wrap="none">
+            <a:spAutoFit/>
+          </a:bodyPr>
+          <a:lstStyle/>
+          <a:p>
+            <a:pPr algn="ctr">
+              <a:defRPr sz="3400" b="1">
                 <a:solidFill>
                   <a:srgbClr val="1F2A4E"/>
                 </a:solidFill>
-              </a:rPr>
-              <a:t>F1 macro</a:t>
-            </a:r>
-            <a:r>
-              <a:rPr sz="1300">
+              </a:defRPr>
+            </a:pPr>
+            <a:r>
+              <a:t>75%</a:t>
+            </a:r>
+          </a:p>
+        </p:txBody>
+      </p:sp>
+      <p:sp>
+        <p:nvSpPr>
+          <p:cNvPr id="12" name="TextBox 11"/>
+          <p:cNvSpPr txBox="1"/>
+          <p:nvPr/>
+        </p:nvSpPr>
+        <p:spPr>
+          <a:xfrm>
+            <a:off x="516636" y="5074920"/>
+            <a:ext cx="3383280" cy="320040"/>
+          </a:xfrm>
+          <a:prstGeom prst="rect">
+            <a:avLst/>
+          </a:prstGeom>
+          <a:noFill/>
+        </p:spPr>
+        <p:txBody>
+          <a:bodyPr wrap="none">
+            <a:spAutoFit/>
+          </a:bodyPr>
+          <a:lstStyle/>
+          <a:p>
+            <a:pPr algn="ctr">
+              <a:defRPr sz="1100">
                 <a:solidFill>
                   <a:srgbClr val="3D424E"/>
                 </a:solidFill>
-              </a:rPr>
-              <a:t>  —  Média das pontuações nas 7 raças, tratando todas igualmente</a:t>
-            </a:r>
-          </a:p>
-          <a:p>
-            <a:pPr>
-              <a:defRPr sz="1100" i="1">
-                <a:solidFill>
-                  <a:srgbClr val="707682"/>
-                </a:solidFill>
-              </a:defRPr>
-            </a:pPr>
-            <a:r>
-              <a:t>Referência: van Rijsbergen 1979 (Information Retrieval)</a:t>
-            </a:r>
-          </a:p>
-          <a:p>
-            <a:pPr>
-              <a:defRPr sz="1200">
-                <a:solidFill>
-                  <a:srgbClr val="3D424E"/>
-                </a:solidFill>
-              </a:defRPr>
-            </a:pPr>
-            <a:r>
-              <a:t>Quanto maior, melhor. SOTA atual = 75% (FaceScanPaliGemma).</a:t>
-            </a:r>
-          </a:p>
-        </p:txBody>
-      </p:sp>
-      <p:sp>
-        <p:nvSpPr>
-          <p:cNvPr id="5" name="Rounded Rectangle 4"/>
+              </a:defRPr>
+            </a:pPr>
+            <a:r>
+              <a:t>FaceScanPaliGemma</a:t>
+            </a:r>
+          </a:p>
+        </p:txBody>
+      </p:sp>
+      <p:sp>
+        <p:nvSpPr>
+          <p:cNvPr id="13" name="Rounded Rectangle 12"/>
           <p:cNvSpPr/>
           <p:nvPr/>
         </p:nvSpPr>
         <p:spPr>
           <a:xfrm>
-            <a:off x="548640" y="2788920"/>
-            <a:ext cx="11064240" cy="1325880"/>
+            <a:off x="4265676" y="1463040"/>
+            <a:ext cx="3657600" cy="4114800"/>
           </a:xfrm>
           <a:prstGeom prst="roundRect">
             <a:avLst/>
@@ -6033,27 +6980,133 @@
           </a:fontRef>
         </p:style>
         <p:txBody>
-          <a:bodyPr rtlCol="0" anchor="ctr" wrap="square" lIns="274320" rIns="274320" tIns="91440"/>
+          <a:bodyPr rtlCol="0" anchor="ctr"/>
           <a:lstStyle/>
           <a:p>
             <a:pPr algn="ctr"/>
-            <a:r>
-              <a:rPr sz="1500" b="1">
-                <a:solidFill>
-                  <a:srgbClr val="1F2A4E"/>
-                </a:solidFill>
-              </a:rPr>
-              <a:t>DR (Disparity Ratio)</a:t>
-            </a:r>
-            <a:r>
-              <a:rPr sz="1300">
+          </a:p>
+        </p:txBody>
+      </p:sp>
+      <p:sp>
+        <p:nvSpPr>
+          <p:cNvPr id="14" name="Rectangle 13"/>
+          <p:cNvSpPr/>
+          <p:nvPr/>
+        </p:nvSpPr>
+        <p:spPr>
+          <a:xfrm>
+            <a:off x="4265676" y="1463040"/>
+            <a:ext cx="3657600" cy="822960"/>
+          </a:xfrm>
+          <a:prstGeom prst="rect">
+            <a:avLst/>
+          </a:prstGeom>
+          <a:solidFill>
+            <a:srgbClr val="C0392B"/>
+          </a:solidFill>
+          <a:ln>
+            <a:noFill/>
+          </a:ln>
+        </p:spPr>
+        <p:style>
+          <a:lnRef idx="1">
+            <a:schemeClr val="accent1"/>
+          </a:lnRef>
+          <a:fillRef idx="3">
+            <a:schemeClr val="accent1"/>
+          </a:fillRef>
+          <a:effectRef idx="2">
+            <a:schemeClr val="accent1"/>
+          </a:effectRef>
+          <a:fontRef idx="minor">
+            <a:schemeClr val="lt1"/>
+          </a:fontRef>
+        </p:style>
+        <p:txBody>
+          <a:bodyPr rtlCol="0" anchor="ctr" wrap="square" lIns="182880" rIns="182880" tIns="91440"/>
+          <a:lstStyle/>
+          <a:p>
+            <a:pPr algn="ctr">
+              <a:defRPr sz="2000" b="1">
+                <a:solidFill>
+                  <a:srgbClr val="FFFFFF"/>
+                </a:solidFill>
+              </a:defRPr>
+            </a:pPr>
+            <a:r>
+              <a:t>DR</a:t>
+            </a:r>
+          </a:p>
+          <a:p>
+            <a:pPr algn="ctr">
+              <a:defRPr sz="1200" i="1">
+                <a:solidFill>
+                  <a:srgbClr val="E8EAED"/>
+                </a:solidFill>
+              </a:defRPr>
+            </a:pPr>
+            <a:r>
+              <a:t>Disparity Ratio</a:t>
+            </a:r>
+          </a:p>
+        </p:txBody>
+      </p:sp>
+      <p:sp>
+        <p:nvSpPr>
+          <p:cNvPr id="15" name="TextBox 14"/>
+          <p:cNvSpPr txBox="1"/>
+          <p:nvPr/>
+        </p:nvSpPr>
+        <p:spPr>
+          <a:xfrm>
+            <a:off x="4402836" y="2377440"/>
+            <a:ext cx="3383280" cy="1188720"/>
+          </a:xfrm>
+          <a:prstGeom prst="rect">
+            <a:avLst/>
+          </a:prstGeom>
+          <a:noFill/>
+        </p:spPr>
+        <p:txBody>
+          <a:bodyPr wrap="square">
+            <a:spAutoFit/>
+          </a:bodyPr>
+          <a:lstStyle/>
+          <a:p>
+            <a:pPr>
+              <a:defRPr sz="1300">
                 <a:solidFill>
                   <a:srgbClr val="3D424E"/>
                 </a:solidFill>
-              </a:rPr>
-              <a:t>  —  Razão entre a melhor e a pior raça</a:t>
-            </a:r>
-          </a:p>
+              </a:defRPr>
+            </a:pPr>
+            <a:r>
+              <a:t>Razão entre o F1 da pior raça e o F1 da melhor. Mede o gap entre subgrupos.</a:t>
+            </a:r>
+          </a:p>
+        </p:txBody>
+      </p:sp>
+      <p:sp>
+        <p:nvSpPr>
+          <p:cNvPr id="16" name="TextBox 15"/>
+          <p:cNvSpPr txBox="1"/>
+          <p:nvPr/>
+        </p:nvSpPr>
+        <p:spPr>
+          <a:xfrm>
+            <a:off x="4402836" y="3611880"/>
+            <a:ext cx="3383280" cy="365760"/>
+          </a:xfrm>
+          <a:prstGeom prst="rect">
+            <a:avLst/>
+          </a:prstGeom>
+          <a:noFill/>
+        </p:spPr>
+        <p:txBody>
+          <a:bodyPr wrap="square">
+            <a:spAutoFit/>
+          </a:bodyPr>
+          <a:lstStyle/>
           <a:p>
             <a:pPr>
               <a:defRPr sz="1100" i="1">
@@ -6063,33 +7116,169 @@
               </a:defRPr>
             </a:pPr>
             <a:r>
-              <a:t>Referência: Hardt, Price &amp; Srebro 2016 (NeurIPS) — Equal Opportunity</a:t>
-            </a:r>
-          </a:p>
-          <a:p>
-            <a:pPr>
-              <a:defRPr sz="1200">
+              <a:t>Referência: Hardt, Price &amp; Srebro 2016 (NeurIPS)</a:t>
+            </a:r>
+          </a:p>
+        </p:txBody>
+      </p:sp>
+      <p:sp>
+        <p:nvSpPr>
+          <p:cNvPr id="17" name="Rectangle 16"/>
+          <p:cNvSpPr/>
+          <p:nvPr/>
+        </p:nvSpPr>
+        <p:spPr>
+          <a:xfrm>
+            <a:off x="4539996" y="4069080"/>
+            <a:ext cx="3108960" cy="27432"/>
+          </a:xfrm>
+          <a:prstGeom prst="rect">
+            <a:avLst/>
+          </a:prstGeom>
+          <a:solidFill>
+            <a:srgbClr val="707682"/>
+          </a:solidFill>
+          <a:ln>
+            <a:noFill/>
+          </a:ln>
+        </p:spPr>
+        <p:style>
+          <a:lnRef idx="1">
+            <a:schemeClr val="accent1"/>
+          </a:lnRef>
+          <a:fillRef idx="3">
+            <a:schemeClr val="accent1"/>
+          </a:fillRef>
+          <a:effectRef idx="2">
+            <a:schemeClr val="accent1"/>
+          </a:effectRef>
+          <a:fontRef idx="minor">
+            <a:schemeClr val="lt1"/>
+          </a:fontRef>
+        </p:style>
+        <p:txBody>
+          <a:bodyPr rtlCol="0" anchor="ctr"/>
+          <a:lstStyle/>
+          <a:p>
+            <a:pPr algn="ctr"/>
+          </a:p>
+        </p:txBody>
+      </p:sp>
+      <p:sp>
+        <p:nvSpPr>
+          <p:cNvPr id="18" name="TextBox 17"/>
+          <p:cNvSpPr txBox="1"/>
+          <p:nvPr/>
+        </p:nvSpPr>
+        <p:spPr>
+          <a:xfrm>
+            <a:off x="4402836" y="4160520"/>
+            <a:ext cx="3383280" cy="320040"/>
+          </a:xfrm>
+          <a:prstGeom prst="rect">
+            <a:avLst/>
+          </a:prstGeom>
+          <a:noFill/>
+        </p:spPr>
+        <p:txBody>
+          <a:bodyPr wrap="none">
+            <a:spAutoFit/>
+          </a:bodyPr>
+          <a:lstStyle/>
+          <a:p>
+            <a:pPr algn="ctr">
+              <a:defRPr sz="1100" i="1">
+                <a:solidFill>
+                  <a:srgbClr val="707682"/>
+                </a:solidFill>
+              </a:defRPr>
+            </a:pPr>
+            <a:r>
+              <a:t>Estado atual</a:t>
+            </a:r>
+          </a:p>
+        </p:txBody>
+      </p:sp>
+      <p:sp>
+        <p:nvSpPr>
+          <p:cNvPr id="19" name="TextBox 18"/>
+          <p:cNvSpPr txBox="1"/>
+          <p:nvPr/>
+        </p:nvSpPr>
+        <p:spPr>
+          <a:xfrm>
+            <a:off x="4402836" y="4434840"/>
+            <a:ext cx="3383280" cy="640080"/>
+          </a:xfrm>
+          <a:prstGeom prst="rect">
+            <a:avLst/>
+          </a:prstGeom>
+          <a:noFill/>
+        </p:spPr>
+        <p:txBody>
+          <a:bodyPr wrap="none">
+            <a:spAutoFit/>
+          </a:bodyPr>
+          <a:lstStyle/>
+          <a:p>
+            <a:pPr algn="ctr">
+              <a:defRPr sz="3400" b="1">
+                <a:solidFill>
+                  <a:srgbClr val="C0392B"/>
+                </a:solidFill>
+              </a:defRPr>
+            </a:pPr>
+            <a:r>
+              <a:t>0.67</a:t>
+            </a:r>
+          </a:p>
+        </p:txBody>
+      </p:sp>
+      <p:sp>
+        <p:nvSpPr>
+          <p:cNvPr id="20" name="TextBox 19"/>
+          <p:cNvSpPr txBox="1"/>
+          <p:nvPr/>
+        </p:nvSpPr>
+        <p:spPr>
+          <a:xfrm>
+            <a:off x="4402836" y="5074920"/>
+            <a:ext cx="3383280" cy="320040"/>
+          </a:xfrm>
+          <a:prstGeom prst="rect">
+            <a:avLst/>
+          </a:prstGeom>
+          <a:noFill/>
+        </p:spPr>
+        <p:txBody>
+          <a:bodyPr wrap="none">
+            <a:spAutoFit/>
+          </a:bodyPr>
+          <a:lstStyle/>
+          <a:p>
+            <a:pPr algn="ctr">
+              <a:defRPr sz="1100">
                 <a:solidFill>
                   <a:srgbClr val="3D424E"/>
                 </a:solidFill>
               </a:defRPr>
             </a:pPr>
             <a:r>
-              <a:t>Mais perto de 1.0 = mais justo. Latinx vs Black atual = 60%/90% = 0.67.</a:t>
-            </a:r>
-          </a:p>
-        </p:txBody>
-      </p:sp>
-      <p:sp>
-        <p:nvSpPr>
-          <p:cNvPr id="6" name="Rounded Rectangle 5"/>
+              <a:t>60% Latinx ÷ 90% Black</a:t>
+            </a:r>
+          </a:p>
+        </p:txBody>
+      </p:sp>
+      <p:sp>
+        <p:nvSpPr>
+          <p:cNvPr id="21" name="Rounded Rectangle 20"/>
           <p:cNvSpPr/>
           <p:nvPr/>
         </p:nvSpPr>
         <p:spPr>
           <a:xfrm>
-            <a:off x="548640" y="4251960"/>
-            <a:ext cx="11064240" cy="1325880"/>
+            <a:off x="8151875" y="1463040"/>
+            <a:ext cx="3657600" cy="4114800"/>
           </a:xfrm>
           <a:prstGeom prst="roundRect">
             <a:avLst/>
@@ -6116,74 +7305,32 @@
           </a:fontRef>
         </p:style>
         <p:txBody>
-          <a:bodyPr rtlCol="0" anchor="ctr" wrap="square" lIns="274320" rIns="274320" tIns="91440"/>
+          <a:bodyPr rtlCol="0" anchor="ctr"/>
           <a:lstStyle/>
           <a:p>
             <a:pPr algn="ctr"/>
-            <a:r>
-              <a:rPr sz="1500" b="1">
-                <a:solidFill>
-                  <a:srgbClr val="1F2A4E"/>
-                </a:solidFill>
-              </a:rPr>
-              <a:t>Worst-class F1</a:t>
-            </a:r>
-            <a:r>
-              <a:rPr sz="1300">
-                <a:solidFill>
-                  <a:srgbClr val="3D424E"/>
-                </a:solidFill>
-              </a:rPr>
-              <a:t>  —  Pontuação na raça em que o modelo se sai pior</a:t>
-            </a:r>
-          </a:p>
-          <a:p>
-            <a:pPr>
-              <a:defRPr sz="1100" i="1">
-                <a:solidFill>
-                  <a:srgbClr val="707682"/>
-                </a:solidFill>
-              </a:defRPr>
-            </a:pPr>
-            <a:r>
-              <a:t>Referência: Sagawa et al. 2020 (ICLR) — Group DRO. Métrica = min_g F1(g)</a:t>
-            </a:r>
-          </a:p>
-          <a:p>
-            <a:pPr>
-              <a:defRPr sz="1200">
-                <a:solidFill>
-                  <a:srgbClr val="3D424E"/>
-                </a:solidFill>
-              </a:defRPr>
-            </a:pPr>
-            <a:r>
-              <a:t>Atualmente = 60% (Latinx). Quanto maior, melhor o pior caso.</a:t>
-            </a:r>
-          </a:p>
-        </p:txBody>
-      </p:sp>
-      <p:sp>
-        <p:nvSpPr>
-          <p:cNvPr id="7" name="Rounded Rectangle 6"/>
+          </a:p>
+        </p:txBody>
+      </p:sp>
+      <p:sp>
+        <p:nvSpPr>
+          <p:cNvPr id="22" name="Rectangle 21"/>
           <p:cNvSpPr/>
           <p:nvPr/>
         </p:nvSpPr>
         <p:spPr>
           <a:xfrm>
-            <a:off x="548640" y="5715000"/>
-            <a:ext cx="11064240" cy="868680"/>
-          </a:xfrm>
-          <a:prstGeom prst="roundRect">
+            <a:off x="8151875" y="1463040"/>
+            <a:ext cx="3657600" cy="822960"/>
+          </a:xfrm>
+          <a:prstGeom prst="rect">
             <a:avLst/>
           </a:prstGeom>
           <a:solidFill>
-            <a:srgbClr val="FFFFFF"/>
+            <a:srgbClr val="2E7D32"/>
           </a:solidFill>
-          <a:ln w="19050">
-            <a:solidFill>
-              <a:srgbClr val="C0392B"/>
-            </a:solidFill>
+          <a:ln>
+            <a:noFill/>
           </a:ln>
         </p:spPr>
         <p:style>
@@ -6201,16 +7348,299 @@
           </a:fontRef>
         </p:style>
         <p:txBody>
+          <a:bodyPr rtlCol="0" anchor="ctr" wrap="square" lIns="182880" rIns="182880" tIns="91440"/>
+          <a:lstStyle/>
+          <a:p>
+            <a:pPr algn="ctr">
+              <a:defRPr sz="2000" b="1">
+                <a:solidFill>
+                  <a:srgbClr val="FFFFFF"/>
+                </a:solidFill>
+              </a:defRPr>
+            </a:pPr>
+            <a:r>
+              <a:t>Worst-class F1</a:t>
+            </a:r>
+          </a:p>
+          <a:p>
+            <a:pPr algn="ctr">
+              <a:defRPr sz="1200" i="1">
+                <a:solidFill>
+                  <a:srgbClr val="E8EAED"/>
+                </a:solidFill>
+              </a:defRPr>
+            </a:pPr>
+            <a:r>
+              <a:t>pior subgrupo</a:t>
+            </a:r>
+          </a:p>
+        </p:txBody>
+      </p:sp>
+      <p:sp>
+        <p:nvSpPr>
+          <p:cNvPr id="23" name="TextBox 22"/>
+          <p:cNvSpPr txBox="1"/>
+          <p:nvPr/>
+        </p:nvSpPr>
+        <p:spPr>
+          <a:xfrm>
+            <a:off x="8289036" y="2377440"/>
+            <a:ext cx="3383280" cy="1188720"/>
+          </a:xfrm>
+          <a:prstGeom prst="rect">
+            <a:avLst/>
+          </a:prstGeom>
+          <a:noFill/>
+        </p:spPr>
+        <p:txBody>
+          <a:bodyPr wrap="square">
+            <a:spAutoFit/>
+          </a:bodyPr>
+          <a:lstStyle/>
+          <a:p>
+            <a:pPr>
+              <a:defRPr sz="1300">
+                <a:solidFill>
+                  <a:srgbClr val="3D424E"/>
+                </a:solidFill>
+              </a:defRPr>
+            </a:pPr>
+            <a:r>
+              <a:t>F1 da raça em que o modelo erra mais. Garante que ninguém fique para trás.</a:t>
+            </a:r>
+          </a:p>
+        </p:txBody>
+      </p:sp>
+      <p:sp>
+        <p:nvSpPr>
+          <p:cNvPr id="24" name="TextBox 23"/>
+          <p:cNvSpPr txBox="1"/>
+          <p:nvPr/>
+        </p:nvSpPr>
+        <p:spPr>
+          <a:xfrm>
+            <a:off x="8289036" y="3611880"/>
+            <a:ext cx="3383280" cy="365760"/>
+          </a:xfrm>
+          <a:prstGeom prst="rect">
+            <a:avLst/>
+          </a:prstGeom>
+          <a:noFill/>
+        </p:spPr>
+        <p:txBody>
+          <a:bodyPr wrap="square">
+            <a:spAutoFit/>
+          </a:bodyPr>
+          <a:lstStyle/>
+          <a:p>
+            <a:pPr>
+              <a:defRPr sz="1100" i="1">
+                <a:solidFill>
+                  <a:srgbClr val="707682"/>
+                </a:solidFill>
+              </a:defRPr>
+            </a:pPr>
+            <a:r>
+              <a:t>Referência: Sagawa et al. 2020 (ICLR) — Group DRO</a:t>
+            </a:r>
+          </a:p>
+        </p:txBody>
+      </p:sp>
+      <p:sp>
+        <p:nvSpPr>
+          <p:cNvPr id="25" name="Rectangle 24"/>
+          <p:cNvSpPr/>
+          <p:nvPr/>
+        </p:nvSpPr>
+        <p:spPr>
+          <a:xfrm>
+            <a:off x="8426196" y="4069080"/>
+            <a:ext cx="3108960" cy="27432"/>
+          </a:xfrm>
+          <a:prstGeom prst="rect">
+            <a:avLst/>
+          </a:prstGeom>
+          <a:solidFill>
+            <a:srgbClr val="707682"/>
+          </a:solidFill>
+          <a:ln>
+            <a:noFill/>
+          </a:ln>
+        </p:spPr>
+        <p:style>
+          <a:lnRef idx="1">
+            <a:schemeClr val="accent1"/>
+          </a:lnRef>
+          <a:fillRef idx="3">
+            <a:schemeClr val="accent1"/>
+          </a:fillRef>
+          <a:effectRef idx="2">
+            <a:schemeClr val="accent1"/>
+          </a:effectRef>
+          <a:fontRef idx="minor">
+            <a:schemeClr val="lt1"/>
+          </a:fontRef>
+        </p:style>
+        <p:txBody>
+          <a:bodyPr rtlCol="0" anchor="ctr"/>
+          <a:lstStyle/>
+          <a:p>
+            <a:pPr algn="ctr"/>
+          </a:p>
+        </p:txBody>
+      </p:sp>
+      <p:sp>
+        <p:nvSpPr>
+          <p:cNvPr id="26" name="TextBox 25"/>
+          <p:cNvSpPr txBox="1"/>
+          <p:nvPr/>
+        </p:nvSpPr>
+        <p:spPr>
+          <a:xfrm>
+            <a:off x="8289036" y="4160520"/>
+            <a:ext cx="3383280" cy="320040"/>
+          </a:xfrm>
+          <a:prstGeom prst="rect">
+            <a:avLst/>
+          </a:prstGeom>
+          <a:noFill/>
+        </p:spPr>
+        <p:txBody>
+          <a:bodyPr wrap="none">
+            <a:spAutoFit/>
+          </a:bodyPr>
+          <a:lstStyle/>
+          <a:p>
+            <a:pPr algn="ctr">
+              <a:defRPr sz="1100" i="1">
+                <a:solidFill>
+                  <a:srgbClr val="707682"/>
+                </a:solidFill>
+              </a:defRPr>
+            </a:pPr>
+            <a:r>
+              <a:t>Estado atual</a:t>
+            </a:r>
+          </a:p>
+        </p:txBody>
+      </p:sp>
+      <p:sp>
+        <p:nvSpPr>
+          <p:cNvPr id="27" name="TextBox 26"/>
+          <p:cNvSpPr txBox="1"/>
+          <p:nvPr/>
+        </p:nvSpPr>
+        <p:spPr>
+          <a:xfrm>
+            <a:off x="8289036" y="4434840"/>
+            <a:ext cx="3383280" cy="640080"/>
+          </a:xfrm>
+          <a:prstGeom prst="rect">
+            <a:avLst/>
+          </a:prstGeom>
+          <a:noFill/>
+        </p:spPr>
+        <p:txBody>
+          <a:bodyPr wrap="none">
+            <a:spAutoFit/>
+          </a:bodyPr>
+          <a:lstStyle/>
+          <a:p>
+            <a:pPr algn="ctr">
+              <a:defRPr sz="3400" b="1">
+                <a:solidFill>
+                  <a:srgbClr val="2E7D32"/>
+                </a:solidFill>
+              </a:defRPr>
+            </a:pPr>
+            <a:r>
+              <a:t>60%</a:t>
+            </a:r>
+          </a:p>
+        </p:txBody>
+      </p:sp>
+      <p:sp>
+        <p:nvSpPr>
+          <p:cNvPr id="28" name="TextBox 27"/>
+          <p:cNvSpPr txBox="1"/>
+          <p:nvPr/>
+        </p:nvSpPr>
+        <p:spPr>
+          <a:xfrm>
+            <a:off x="8289036" y="5074920"/>
+            <a:ext cx="3383280" cy="320040"/>
+          </a:xfrm>
+          <a:prstGeom prst="rect">
+            <a:avLst/>
+          </a:prstGeom>
+          <a:noFill/>
+        </p:spPr>
+        <p:txBody>
+          <a:bodyPr wrap="none">
+            <a:spAutoFit/>
+          </a:bodyPr>
+          <a:lstStyle/>
+          <a:p>
+            <a:pPr algn="ctr">
+              <a:defRPr sz="1100">
+                <a:solidFill>
+                  <a:srgbClr val="3D424E"/>
+                </a:solidFill>
+              </a:defRPr>
+            </a:pPr>
+            <a:r>
+              <a:t>Latinx</a:t>
+            </a:r>
+          </a:p>
+        </p:txBody>
+      </p:sp>
+      <p:sp>
+        <p:nvSpPr>
+          <p:cNvPr id="29" name="Rounded Rectangle 28"/>
+          <p:cNvSpPr/>
+          <p:nvPr/>
+        </p:nvSpPr>
+        <p:spPr>
+          <a:xfrm>
+            <a:off x="457200" y="5760720"/>
+            <a:ext cx="11430000" cy="868680"/>
+          </a:xfrm>
+          <a:prstGeom prst="roundRect">
+            <a:avLst/>
+          </a:prstGeom>
+          <a:solidFill>
+            <a:srgbClr val="1F2A4E"/>
+          </a:solidFill>
+          <a:ln>
+            <a:noFill/>
+          </a:ln>
+        </p:spPr>
+        <p:style>
+          <a:lnRef idx="1">
+            <a:schemeClr val="accent1"/>
+          </a:lnRef>
+          <a:fillRef idx="3">
+            <a:schemeClr val="accent1"/>
+          </a:fillRef>
+          <a:effectRef idx="2">
+            <a:schemeClr val="accent1"/>
+          </a:effectRef>
+          <a:fontRef idx="minor">
+            <a:schemeClr val="lt1"/>
+          </a:fontRef>
+        </p:style>
+        <p:txBody>
           <a:bodyPr rtlCol="0" anchor="ctr" wrap="square" lIns="274320" rIns="274320" tIns="91440"/>
           <a:lstStyle/>
           <a:p>
-            <a:pPr algn="ctr"/>
-            <a:r>
-              <a:rPr sz="1300" b="1">
-                <a:solidFill>
-                  <a:srgbClr val="C0392B"/>
-                </a:solidFill>
-              </a:rPr>
+            <a:pPr algn="ctr">
+              <a:defRPr sz="1300" b="1">
+                <a:solidFill>
+                  <a:srgbClr val="FFFFFF"/>
+                </a:solidFill>
+              </a:defRPr>
+            </a:pPr>
+            <a:r>
               <a:t>Por que 3 métricas e não uma?</a:t>
             </a:r>
           </a:p>
@@ -6218,12 +7648,12 @@
             <a:pPr>
               <a:defRPr sz="1200">
                 <a:solidFill>
-                  <a:srgbClr val="3D424E"/>
-                </a:solidFill>
-              </a:defRPr>
-            </a:pPr>
-            <a:r>
-              <a:t>Teorema da impossibilidade (Kleinberg, Mullainathan &amp; Raghavan 2017, ITCS): não existe métrica única de fairness — reportar as 3 simultaneamente é a forma honesta de comunicar trade-offs.</a:t>
+                  <a:srgbClr val="E8EAED"/>
+                </a:solidFill>
+              </a:defRPr>
+            </a:pPr>
+            <a:r>
+              <a:t>Teorema da impossibilidade (Kleinberg, Mullainathan &amp; Raghavan 2017, ITCS): não existe métrica única de fairness que satisfaça simultaneamente calibração, equal FPR e equal FNR — reportar as 3 simultaneamente é a forma honesta de comunicar trade-offs.</a:t>
             </a:r>
           </a:p>
         </p:txBody>
@@ -7310,7 +8740,7 @@
                             <a:srgbClr val="FFFFFF"/>
                           </a:solidFill>
                         </a:rPr>
-                        <a:t>Duração</a:t>
+                        <a:t>Target</a:t>
                       </a:r>
                     </a:p>
                   </a:txBody>
@@ -7375,7 +8805,7 @@
                             <a:srgbClr val="3D424E"/>
                           </a:solidFill>
                         </a:rPr>
-                        <a:t>Esta reunião</a:t>
+                        <a:t>Junho 2026</a:t>
                       </a:r>
                     </a:p>
                   </a:txBody>
@@ -7440,7 +8870,7 @@
                             <a:srgbClr val="3D424E"/>
                           </a:solidFill>
                         </a:rPr>
-                        <a:t>+2 semanas após aprovação</a:t>
+                        <a:t>Julho 2026</a:t>
                       </a:r>
                     </a:p>
                   </a:txBody>
@@ -7505,7 +8935,7 @@
                             <a:srgbClr val="3D424E"/>
                           </a:solidFill>
                         </a:rPr>
-                        <a:t>2 semanas</a:t>
+                        <a:t>Agosto 2026</a:t>
                       </a:r>
                     </a:p>
                   </a:txBody>
@@ -7570,7 +9000,7 @@
                             <a:srgbClr val="3D424E"/>
                           </a:solidFill>
                         </a:rPr>
-                        <a:t>4 semanas</a:t>
+                        <a:t>Setembro 2026</a:t>
                       </a:r>
                     </a:p>
                   </a:txBody>
@@ -7635,7 +9065,7 @@
                             <a:srgbClr val="3D424E"/>
                           </a:solidFill>
                         </a:rPr>
-                        <a:t>10–12 semanas</a:t>
+                        <a:t>Dezembro 2026</a:t>
                       </a:r>
                     </a:p>
                   </a:txBody>
@@ -7700,7 +9130,7 @@
                             <a:srgbClr val="3D424E"/>
                           </a:solidFill>
                         </a:rPr>
-                        <a:t>6 semanas</a:t>
+                        <a:t>Fevereiro 2027</a:t>
                       </a:r>
                     </a:p>
                   </a:txBody>
@@ -7765,7 +9195,7 @@
                             <a:srgbClr val="3D424E"/>
                           </a:solidFill>
                         </a:rPr>
-                        <a:t>4 semanas</a:t>
+                        <a:t>Março 2027</a:t>
                       </a:r>
                     </a:p>
                   </a:txBody>
@@ -7830,7 +9260,7 @@
                             <a:srgbClr val="3D424E"/>
                           </a:solidFill>
                         </a:rPr>
-                        <a:t>8–12 semanas (paralelo)</a:t>
+                        <a:t>Em paralelo (Set 2026 → Mar 2027)</a:t>
                       </a:r>
                     </a:p>
                   </a:txBody>
@@ -7895,7 +9325,7 @@
                             <a:srgbClr val="3D424E"/>
                           </a:solidFill>
                         </a:rPr>
-                        <a:t>~ Janeiro–Março de 2027</a:t>
+                        <a:t>Abril 2027</a:t>
                       </a:r>
                     </a:p>
                   </a:txBody>
@@ -7916,7 +9346,7 @@
                             <a:srgbClr val="3D424E"/>
                           </a:solidFill>
                         </a:rPr>
-                        <a:t>Total: ~28–32 semanas ativas</a:t>
+                        <a:t>Defesa da dissertação</a:t>
                       </a:r>
                     </a:p>
                   </a:txBody>
@@ -9320,8 +10750,8 @@
         </p:nvSpPr>
         <p:spPr>
           <a:xfrm>
-            <a:off x="365760" y="228600"/>
-            <a:ext cx="11521440" cy="640080"/>
+            <a:off x="365760" y="182880"/>
+            <a:ext cx="11521440" cy="548640"/>
           </a:xfrm>
           <a:prstGeom prst="rect">
             <a:avLst/>
@@ -9335,7 +10765,7 @@
           <a:lstStyle/>
           <a:p>
             <a:pPr>
-              <a:defRPr sz="2000" b="1">
+              <a:defRPr sz="1800" b="1">
                 <a:solidFill>
                   <a:srgbClr val="1F2A4E"/>
                 </a:solidFill>
@@ -9355,8 +10785,8 @@
         </p:nvSpPr>
         <p:spPr>
           <a:xfrm>
-            <a:off x="365760" y="777240"/>
-            <a:ext cx="11521440" cy="320040"/>
+            <a:off x="365760" y="640080"/>
+            <a:ext cx="11521440" cy="274320"/>
           </a:xfrm>
           <a:prstGeom prst="rect">
             <a:avLst/>
@@ -9370,14 +10800,14 @@
           <a:lstStyle/>
           <a:p>
             <a:pPr>
-              <a:defRPr sz="1200" i="1">
+              <a:defRPr sz="1100" i="1">
                 <a:solidFill>
                   <a:srgbClr val="707682"/>
                 </a:solidFill>
               </a:defRPr>
             </a:pPr>
             <a:r>
-              <a:t>arXiv:2304.07175 — autores Notre Dame / Florida Tech / IST</a:t>
+              <a:t>arXiv:2304.07175 — Notre Dame / Florida Tech / IST — preprint abril 2023</a:t>
             </a:r>
           </a:p>
         </p:txBody>
@@ -9390,7 +10820,7 @@
         </p:nvSpPr>
         <p:spPr>
           <a:xfrm>
-            <a:off x="365760" y="1143000"/>
+            <a:off x="365760" y="960120"/>
             <a:ext cx="11521440" cy="36576"/>
           </a:xfrm>
           <a:prstGeom prst="rect">
@@ -9433,8 +10863,8 @@
         </p:nvSpPr>
         <p:spPr>
           <a:xfrm>
-            <a:off x="365760" y="1325880"/>
-            <a:ext cx="11521440" cy="960120"/>
+            <a:off x="365760" y="1097280"/>
+            <a:ext cx="5715000" cy="1371600"/>
           </a:xfrm>
           <a:prstGeom prst="roundRect">
             <a:avLst/>
@@ -9461,30 +10891,30 @@
           </a:fontRef>
         </p:style>
         <p:txBody>
-          <a:bodyPr rtlCol="0" anchor="ctr" wrap="square" lIns="228600" rIns="228600" tIns="73152"/>
+          <a:bodyPr rtlCol="0" anchor="ctr" wrap="square" lIns="164592" rIns="164592" tIns="54864"/>
           <a:lstStyle/>
           <a:p>
             <a:pPr algn="ctr">
-              <a:defRPr sz="1100" b="1">
+              <a:defRPr sz="1000" b="1">
                 <a:solidFill>
                   <a:srgbClr val="1F2A4E"/>
                 </a:solidFill>
               </a:defRPr>
             </a:pPr>
             <a:r>
-              <a:t>Pergunta de pesquisa</a:t>
-            </a:r>
-          </a:p>
-          <a:p>
-            <a:pPr>
-              <a:defRPr sz="1200">
+              <a:t>Contexto teórico / motivação</a:t>
+            </a:r>
+          </a:p>
+          <a:p>
+            <a:pPr>
+              <a:defRPr sz="1100">
                 <a:solidFill>
                   <a:srgbClr val="3D424E"/>
                 </a:solidFill>
               </a:defRPr>
             </a:pPr>
             <a:r>
-              <a:t>Por que a accuracy de face recognition varia entre grupos demográficos? É skin tone direto, face size/shape, desbalanceamento de treino ou qualidade da imagem?</a:t>
+              <a:t>Buolamwini &amp; Gebru 2018 documentaram disparities em FR sem isolar mecanismo causal. Trabalhos subsequentes assumiram skin tone como variável dominante. Esta limpeza causal era um buraco aberto na literatura.</a:t>
             </a:r>
           </a:p>
         </p:txBody>
@@ -9497,8 +10927,8 @@
         </p:nvSpPr>
         <p:spPr>
           <a:xfrm>
-            <a:off x="365760" y="2331720"/>
-            <a:ext cx="11521440" cy="1234440"/>
+            <a:off x="365760" y="2514600"/>
+            <a:ext cx="5715000" cy="1325880"/>
           </a:xfrm>
           <a:prstGeom prst="roundRect">
             <a:avLst/>
@@ -9527,30 +10957,30 @@
           </a:fontRef>
         </p:style>
         <p:txBody>
-          <a:bodyPr rtlCol="0" anchor="ctr" wrap="square" lIns="228600" rIns="228600" tIns="73152"/>
+          <a:bodyPr rtlCol="0" anchor="ctr" wrap="square" lIns="164592" rIns="164592" tIns="54864"/>
           <a:lstStyle/>
           <a:p>
             <a:pPr algn="ctr">
-              <a:defRPr sz="1100" b="1">
+              <a:defRPr sz="1000" b="1">
                 <a:solidFill>
                   <a:srgbClr val="1F2A4E"/>
                 </a:solidFill>
               </a:defRPr>
             </a:pPr>
             <a:r>
-              <a:t>Metodologia</a:t>
-            </a:r>
-          </a:p>
-          <a:p>
-            <a:pPr>
-              <a:defRPr sz="1200">
+              <a:t>Pergunta de pesquisa</a:t>
+            </a:r>
+          </a:p>
+          <a:p>
+            <a:pPr>
+              <a:defRPr sz="1100">
                 <a:solidFill>
                   <a:srgbClr val="3D424E"/>
                 </a:solidFill>
               </a:defRPr>
             </a:pPr>
             <a:r>
-              <a:t>Auditoria de modelos de FR estado-da-arte (ArcFace, AdaFace) avaliando 4 hipóteses causais sobre imagens de teste de grupos demográficos. Mede 'face pixel information' (área útil de pixels após detecção e crop) e correlaciona com accuracy por grupo.</a:t>
+              <a:t>A disparity racial em accuracy de face recognition é causada por skin tone direto, face size/shape, desbalanceamento de treino ou qualidade da imagem (pixel info útil após crop/alinhamento)?</a:t>
             </a:r>
           </a:p>
         </p:txBody>
@@ -9563,8 +10993,8 @@
         </p:nvSpPr>
         <p:spPr>
           <a:xfrm>
-            <a:off x="365760" y="3611880"/>
-            <a:ext cx="11521440" cy="1143000"/>
+            <a:off x="365760" y="3886200"/>
+            <a:ext cx="5715000" cy="2697480"/>
           </a:xfrm>
           <a:prstGeom prst="roundRect">
             <a:avLst/>
@@ -9591,30 +11021,30 @@
           </a:fontRef>
         </p:style>
         <p:txBody>
-          <a:bodyPr rtlCol="0" anchor="ctr" wrap="square" lIns="228600" rIns="228600" tIns="73152"/>
+          <a:bodyPr rtlCol="0" anchor="ctr" wrap="square" lIns="164592" rIns="164592" tIns="54864"/>
           <a:lstStyle/>
           <a:p>
             <a:pPr algn="ctr">
-              <a:defRPr sz="1100" b="1">
+              <a:defRPr sz="1000" b="1">
                 <a:solidFill>
                   <a:srgbClr val="1F2A4E"/>
                 </a:solidFill>
               </a:defRPr>
             </a:pPr>
             <a:r>
-              <a:t>Resultados principais</a:t>
-            </a:r>
-          </a:p>
-          <a:p>
-            <a:pPr>
-              <a:defRPr sz="1200">
+              <a:t>Metodologia detalhada</a:t>
+            </a:r>
+          </a:p>
+          <a:p>
+            <a:pPr>
+              <a:defRPr sz="1100">
                 <a:solidFill>
                   <a:srgbClr val="3D424E"/>
                 </a:solidFill>
               </a:defRPr>
             </a:pPr>
             <a:r>
-              <a:t>Diferenças de face pixel information entre grupos demográficos explicam a maior parte da variação de accuracy em FR. Skin tone direto é fator secundário; balanceamento de treino tem efeito menor que o esperado.</a:t>
+              <a:t>Auditoria de ArcFace e AdaFace (SOTA em FR) sobre RFW e MORPH. Mede 4 variáveis: (1) skin tone via ITA, (2) face pixel area (pós-detecção), (3) balanceamento de treino, (4) face geometry. Correlaciona com TAR@FAR por grupo demográfico. Análise estratificada para isolar efeitos.</a:t>
             </a:r>
           </a:p>
         </p:txBody>
@@ -9627,8 +11057,72 @@
         </p:nvSpPr>
         <p:spPr>
           <a:xfrm>
-            <a:off x="365760" y="4800600"/>
-            <a:ext cx="11521440" cy="960120"/>
+            <a:off x="6245352" y="1097280"/>
+            <a:ext cx="5715000" cy="1463040"/>
+          </a:xfrm>
+          <a:prstGeom prst="roundRect">
+            <a:avLst/>
+          </a:prstGeom>
+          <a:solidFill>
+            <a:srgbClr val="E8EAED"/>
+          </a:solidFill>
+          <a:ln>
+            <a:noFill/>
+          </a:ln>
+        </p:spPr>
+        <p:style>
+          <a:lnRef idx="1">
+            <a:schemeClr val="accent1"/>
+          </a:lnRef>
+          <a:fillRef idx="3">
+            <a:schemeClr val="accent1"/>
+          </a:fillRef>
+          <a:effectRef idx="2">
+            <a:schemeClr val="accent1"/>
+          </a:effectRef>
+          <a:fontRef idx="minor">
+            <a:schemeClr val="lt1"/>
+          </a:fontRef>
+        </p:style>
+        <p:txBody>
+          <a:bodyPr rtlCol="0" anchor="ctr" wrap="square" lIns="164592" rIns="164592" tIns="54864"/>
+          <a:lstStyle/>
+          <a:p>
+            <a:pPr algn="ctr">
+              <a:defRPr sz="1000" b="1">
+                <a:solidFill>
+                  <a:srgbClr val="1F2A4E"/>
+                </a:solidFill>
+              </a:defRPr>
+            </a:pPr>
+            <a:r>
+              <a:t>Resultados principais (números/achados)</a:t>
+            </a:r>
+          </a:p>
+          <a:p>
+            <a:pPr>
+              <a:defRPr sz="1100">
+                <a:solidFill>
+                  <a:srgbClr val="3D424E"/>
+                </a:solidFill>
+              </a:defRPr>
+            </a:pPr>
+            <a:r>
+              <a:t>Face pixel information explica a MAIOR PARTE da variação de accuracy entre grupos. Skin tone direto é fator secundário. Balanceamento de treino tem efeito menor que o esperado. Sugere que muito do 'race bias' em FR é mediado por qualidade da imagem.</a:t>
+            </a:r>
+          </a:p>
+        </p:txBody>
+      </p:sp>
+      <p:sp>
+        <p:nvSpPr>
+          <p:cNvPr id="9" name="Rounded Rectangle 8"/>
+          <p:cNvSpPr/>
+          <p:nvPr/>
+        </p:nvSpPr>
+        <p:spPr>
+          <a:xfrm>
+            <a:off x="6245352" y="2606039"/>
+            <a:ext cx="5715000" cy="1280160"/>
           </a:xfrm>
           <a:prstGeom prst="roundRect">
             <a:avLst/>
@@ -9657,11 +11151,11 @@
           </a:fontRef>
         </p:style>
         <p:txBody>
-          <a:bodyPr rtlCol="0" anchor="ctr" wrap="square" lIns="228600" rIns="228600" tIns="73152"/>
+          <a:bodyPr rtlCol="0" anchor="ctr" wrap="square" lIns="164592" rIns="164592" tIns="54864"/>
           <a:lstStyle/>
           <a:p>
             <a:pPr algn="ctr">
-              <a:defRPr sz="1100" b="1">
+              <a:defRPr sz="1000" b="1">
                 <a:solidFill>
                   <a:srgbClr val="707682"/>
                 </a:solidFill>
@@ -9673,28 +11167,92 @@
           </a:p>
           <a:p>
             <a:pPr>
-              <a:defRPr sz="1200">
+              <a:defRPr sz="1100">
                 <a:solidFill>
                   <a:srgbClr val="3D424E"/>
                 </a:solidFill>
               </a:defRPr>
             </a:pPr>
             <a:r>
-              <a:t>Trabalha com FR (verificação 1:1), não com race classification — tarefas distintas. Não testa intervenções arquiteturais para mitigar o efeito de pixel info. Resultado é correlacional, não causal estrito.</a:t>
-            </a:r>
-          </a:p>
-        </p:txBody>
-      </p:sp>
-      <p:sp>
-        <p:nvSpPr>
-          <p:cNvPr id="9" name="Rounded Rectangle 8"/>
+              <a:t>Trabalha com FR (verificação 1:1), NÃO com race classification multi-classe. Análise correlacional, não causal estrito. Não testa intervenção arquitetural para mitigar pixel info. RFW e MORPH têm vieses próprios de coleta.</a:t>
+            </a:r>
+          </a:p>
+        </p:txBody>
+      </p:sp>
+      <p:sp>
+        <p:nvSpPr>
+          <p:cNvPr id="10" name="Rounded Rectangle 9"/>
           <p:cNvSpPr/>
           <p:nvPr/>
         </p:nvSpPr>
         <p:spPr>
           <a:xfrm>
-            <a:off x="365760" y="5806440"/>
-            <a:ext cx="11521440" cy="1051560"/>
+            <a:off x="6245352" y="3931920"/>
+            <a:ext cx="5715000" cy="1143000"/>
+          </a:xfrm>
+          <a:prstGeom prst="roundRect">
+            <a:avLst/>
+          </a:prstGeom>
+          <a:solidFill>
+            <a:srgbClr val="E8EAED"/>
+          </a:solidFill>
+          <a:ln>
+            <a:noFill/>
+          </a:ln>
+        </p:spPr>
+        <p:style>
+          <a:lnRef idx="1">
+            <a:schemeClr val="accent1"/>
+          </a:lnRef>
+          <a:fillRef idx="3">
+            <a:schemeClr val="accent1"/>
+          </a:fillRef>
+          <a:effectRef idx="2">
+            <a:schemeClr val="accent1"/>
+          </a:effectRef>
+          <a:fontRef idx="minor">
+            <a:schemeClr val="lt1"/>
+          </a:fontRef>
+        </p:style>
+        <p:txBody>
+          <a:bodyPr rtlCol="0" anchor="ctr" wrap="square" lIns="164592" rIns="164592" tIns="54864"/>
+          <a:lstStyle/>
+          <a:p>
+            <a:pPr algn="ctr">
+              <a:defRPr sz="1000" b="1">
+                <a:solidFill>
+                  <a:srgbClr val="1F2A4E"/>
+                </a:solidFill>
+              </a:defRPr>
+            </a:pPr>
+            <a:r>
+              <a:t>Conexões com outras fichas do corpus</a:t>
+            </a:r>
+          </a:p>
+          <a:p>
+            <a:pPr>
+              <a:defRPr sz="1100">
+                <a:solidFill>
+                  <a:srgbClr val="3D424E"/>
+                </a:solidFill>
+              </a:defRPr>
+            </a:pPr>
+            <a:r>
+              <a:t>Conversa com Grother 2019 (NIST FRVT) que documenta disparity industry-wide. Refuta implicitamente parte da narrativa de Buolamwini 2018 (PPB) que enfatiza skin tone direto. Compatível com Dooley 2022 que aponta arquitetura como fator independente.</a:t>
+            </a:r>
+          </a:p>
+        </p:txBody>
+      </p:sp>
+      <p:sp>
+        <p:nvSpPr>
+          <p:cNvPr id="11" name="Rounded Rectangle 10"/>
+          <p:cNvSpPr/>
+          <p:nvPr/>
+        </p:nvSpPr>
+        <p:spPr>
+          <a:xfrm>
+            <a:off x="6245352" y="5120640"/>
+            <a:ext cx="5715000" cy="1463040"/>
           </a:xfrm>
           <a:prstGeom prst="roundRect">
             <a:avLst/>
@@ -9723,7 +11281,7 @@
           </a:fontRef>
         </p:style>
         <p:txBody>
-          <a:bodyPr rtlCol="0" anchor="ctr" wrap="square" lIns="228600" rIns="228600" tIns="73152"/>
+          <a:bodyPr rtlCol="0" anchor="ctr" wrap="square" lIns="164592" rIns="164592" tIns="54864"/>
           <a:lstStyle/>
           <a:p>
             <a:pPr algn="ctr">
@@ -9746,7 +11304,7 @@
               </a:defRPr>
             </a:pPr>
             <a:r>
-              <a:t>REFUTAÇÃO POTENCIAL DE H5. Se pixel info é a causa primária em FR, a transferência de fairness do Cap 2 para o Cap 3 pode ser confounded. Motivou as 3 versões de reformulação de H5 (V1/V2/V3) na pauta de discussão de hoje.</a:t>
+              <a:t>REFUTAÇÃO POTENCIAL DE H5. Se pixel info é causa primária em FR, a transferência de fairness do Cap 2 para Cap 3 pode ser confounded por qualidade da imagem. Motivou as 3 versões de reformulação de H5 (V1/V2/V3) na pauta de hoje.</a:t>
             </a:r>
           </a:p>
         </p:txBody>
@@ -9777,8 +11335,8 @@
         </p:nvSpPr>
         <p:spPr>
           <a:xfrm>
-            <a:off x="365760" y="228600"/>
-            <a:ext cx="11521440" cy="640080"/>
+            <a:off x="365760" y="182880"/>
+            <a:ext cx="11521440" cy="548640"/>
           </a:xfrm>
           <a:prstGeom prst="rect">
             <a:avLst/>
@@ -9792,7 +11350,7 @@
           <a:lstStyle/>
           <a:p>
             <a:pPr>
-              <a:defRPr sz="2000" b="1">
+              <a:defRPr sz="1800" b="1">
                 <a:solidFill>
                   <a:srgbClr val="1F2A4E"/>
                 </a:solidFill>
@@ -9812,8 +11370,8 @@
         </p:nvSpPr>
         <p:spPr>
           <a:xfrm>
-            <a:off x="365760" y="777240"/>
-            <a:ext cx="11521440" cy="320040"/>
+            <a:off x="365760" y="640080"/>
+            <a:ext cx="11521440" cy="274320"/>
           </a:xfrm>
           <a:prstGeom prst="rect">
             <a:avLst/>
@@ -9827,14 +11385,14 @@
           <a:lstStyle/>
           <a:p>
             <a:pPr>
-              <a:defRPr sz="1200" i="1">
+              <a:defRPr sz="1100" i="1">
                 <a:solidFill>
                   <a:srgbClr val="707682"/>
                 </a:solidFill>
               </a:defRPr>
             </a:pPr>
             <a:r>
-              <a:t>arXiv:2603.02475 — ICMC-USP / IMPA — preprint mar/2026</a:t>
+              <a:t>arXiv:2603.02475 — ICMC-USP / IMPA — preprint março 2026</a:t>
             </a:r>
           </a:p>
         </p:txBody>
@@ -9847,7 +11405,7 @@
         </p:nvSpPr>
         <p:spPr>
           <a:xfrm>
-            <a:off x="365760" y="1143000"/>
+            <a:off x="365760" y="960120"/>
             <a:ext cx="11521440" cy="36576"/>
           </a:xfrm>
           <a:prstGeom prst="rect">
@@ -9890,8 +11448,8 @@
         </p:nvSpPr>
         <p:spPr>
           <a:xfrm>
-            <a:off x="365760" y="1325880"/>
-            <a:ext cx="11521440" cy="960120"/>
+            <a:off x="365760" y="1097280"/>
+            <a:ext cx="5715000" cy="1371600"/>
           </a:xfrm>
           <a:prstGeom prst="roundRect">
             <a:avLst/>
@@ -9918,30 +11476,30 @@
           </a:fontRef>
         </p:style>
         <p:txBody>
-          <a:bodyPr rtlCol="0" anchor="ctr" wrap="square" lIns="228600" rIns="228600" tIns="73152"/>
+          <a:bodyPr rtlCol="0" anchor="ctr" wrap="square" lIns="164592" rIns="164592" tIns="54864"/>
           <a:lstStyle/>
           <a:p>
             <a:pPr algn="ctr">
-              <a:defRPr sz="1100" b="1">
+              <a:defRPr sz="1000" b="1">
                 <a:solidFill>
                   <a:srgbClr val="1F2A4E"/>
                 </a:solidFill>
               </a:defRPr>
             </a:pPr>
             <a:r>
-              <a:t>Pergunta de pesquisa</a:t>
-            </a:r>
-          </a:p>
-          <a:p>
-            <a:pPr>
-              <a:defRPr sz="1200">
+              <a:t>Contexto teórico / motivação</a:t>
+            </a:r>
+          </a:p>
+          <a:p>
+            <a:pPr>
+              <a:defRPr sz="1100">
                 <a:solidFill>
                   <a:srgbClr val="3D424E"/>
                 </a:solidFill>
               </a:defRPr>
             </a:pPr>
             <a:r>
-              <a:t>É possível treinar um classificador MST robusto e generalizável que funcione 'in-the-wild' (fora dos datasets de origem)?</a:t>
+              <a:t>Schumann et al. 2023 (NeurIPS) propuseram MST como padrão para auditoria mas sem classificador automático em larga escala. Datasets MST-anotados eram pequenos (MST-E ~1.500). Faltava um classificador SOTA generalizável e um dataset 'in-the-wild' grande.</a:t>
             </a:r>
           </a:p>
         </p:txBody>
@@ -9954,8 +11512,8 @@
         </p:nvSpPr>
         <p:spPr>
           <a:xfrm>
-            <a:off x="365760" y="2331720"/>
-            <a:ext cx="11521440" cy="1234440"/>
+            <a:off x="365760" y="2514600"/>
+            <a:ext cx="5715000" cy="1325880"/>
           </a:xfrm>
           <a:prstGeom prst="roundRect">
             <a:avLst/>
@@ -9984,30 +11542,30 @@
           </a:fontRef>
         </p:style>
         <p:txBody>
-          <a:bodyPr rtlCol="0" anchor="ctr" wrap="square" lIns="228600" rIns="228600" tIns="73152"/>
+          <a:bodyPr rtlCol="0" anchor="ctr" wrap="square" lIns="164592" rIns="164592" tIns="54864"/>
           <a:lstStyle/>
           <a:p>
             <a:pPr algn="ctr">
-              <a:defRPr sz="1100" b="1">
+              <a:defRPr sz="1000" b="1">
                 <a:solidFill>
                   <a:srgbClr val="1F2A4E"/>
                 </a:solidFill>
               </a:defRPr>
             </a:pPr>
             <a:r>
-              <a:t>Metodologia</a:t>
-            </a:r>
-          </a:p>
-          <a:p>
-            <a:pPr>
-              <a:defRPr sz="1200">
+              <a:t>Pergunta de pesquisa</a:t>
+            </a:r>
+          </a:p>
+          <a:p>
+            <a:pPr>
+              <a:defRPr sz="1100">
                 <a:solidFill>
                   <a:srgbClr val="3D424E"/>
                 </a:solidFill>
               </a:defRPr>
             </a:pPr>
             <a:r>
-              <a:t>Constrói STW (Skin Tone in the Wild) — 42.313 imagens de 3.564 indivíduos, anotadas pela escala Monk Skin Tone 10-classe. Treina SkinToneNet (ViT-Small fine-tuned em ImageNet) sobre STW. Audita 6 datasets faciais incluindo FairFace.</a:t>
+              <a:t>É possível treinar um classificador de tom de pele (MST 10-classe) robusto e cross-domain, e qual é a distribuição de tons em datasets faciais largamente usados pela comunidade de fairness?</a:t>
             </a:r>
           </a:p>
         </p:txBody>
@@ -10020,8 +11578,8 @@
         </p:nvSpPr>
         <p:spPr>
           <a:xfrm>
-            <a:off x="365760" y="3611880"/>
-            <a:ext cx="11521440" cy="1143000"/>
+            <a:off x="365760" y="3886200"/>
+            <a:ext cx="5715000" cy="2697480"/>
           </a:xfrm>
           <a:prstGeom prst="roundRect">
             <a:avLst/>
@@ -10048,30 +11606,30 @@
           </a:fontRef>
         </p:style>
         <p:txBody>
-          <a:bodyPr rtlCol="0" anchor="ctr" wrap="square" lIns="228600" rIns="228600" tIns="73152"/>
+          <a:bodyPr rtlCol="0" anchor="ctr" wrap="square" lIns="164592" rIns="164592" tIns="54864"/>
           <a:lstStyle/>
           <a:p>
             <a:pPr algn="ctr">
-              <a:defRPr sz="1100" b="1">
+              <a:defRPr sz="1000" b="1">
                 <a:solidFill>
                   <a:srgbClr val="1F2A4E"/>
                 </a:solidFill>
               </a:defRPr>
             </a:pPr>
             <a:r>
-              <a:t>Resultados principais</a:t>
-            </a:r>
-          </a:p>
-          <a:p>
-            <a:pPr>
-              <a:defRPr sz="1200">
+              <a:t>Metodologia detalhada</a:t>
+            </a:r>
+          </a:p>
+          <a:p>
+            <a:pPr>
+              <a:defRPr sz="1100">
                 <a:solidFill>
                   <a:srgbClr val="3D424E"/>
                 </a:solidFill>
               </a:defRPr>
             </a:pPr>
             <a:r>
-              <a:t>SkinToneNet atinge SOTA em skin-tone classification cross-domain. FairFace exibe distribuição agregada com forte ausência de MST 6-10. NÃO publica a matriz cruzada MST × race (apenas distribuição global).</a:t>
+              <a:t>Constrói STW (Skin Tone in the Wild): 42.313 imagens de 3.564 indivíduos, anotadas pela escala Monk Skin Tone (10 classes), agregadas de múltiplas fontes web. Treina SkinToneNet (ViT-Small fine-tuned a partir de ImageNet). Audita FairFace, CelebA, BUPT, UTKFace, CASIA, CK+ usando o classificador treinado.</a:t>
             </a:r>
           </a:p>
         </p:txBody>
@@ -10084,8 +11642,72 @@
         </p:nvSpPr>
         <p:spPr>
           <a:xfrm>
-            <a:off x="365760" y="4800600"/>
-            <a:ext cx="11521440" cy="960120"/>
+            <a:off x="6245352" y="1097280"/>
+            <a:ext cx="5715000" cy="1463040"/>
+          </a:xfrm>
+          <a:prstGeom prst="roundRect">
+            <a:avLst/>
+          </a:prstGeom>
+          <a:solidFill>
+            <a:srgbClr val="E8EAED"/>
+          </a:solidFill>
+          <a:ln>
+            <a:noFill/>
+          </a:ln>
+        </p:spPr>
+        <p:style>
+          <a:lnRef idx="1">
+            <a:schemeClr val="accent1"/>
+          </a:lnRef>
+          <a:fillRef idx="3">
+            <a:schemeClr val="accent1"/>
+          </a:fillRef>
+          <a:effectRef idx="2">
+            <a:schemeClr val="accent1"/>
+          </a:effectRef>
+          <a:fontRef idx="minor">
+            <a:schemeClr val="lt1"/>
+          </a:fontRef>
+        </p:style>
+        <p:txBody>
+          <a:bodyPr rtlCol="0" anchor="ctr" wrap="square" lIns="164592" rIns="164592" tIns="54864"/>
+          <a:lstStyle/>
+          <a:p>
+            <a:pPr algn="ctr">
+              <a:defRPr sz="1000" b="1">
+                <a:solidFill>
+                  <a:srgbClr val="1F2A4E"/>
+                </a:solidFill>
+              </a:defRPr>
+            </a:pPr>
+            <a:r>
+              <a:t>Resultados principais (números/achados)</a:t>
+            </a:r>
+          </a:p>
+          <a:p>
+            <a:pPr>
+              <a:defRPr sz="1100">
+                <a:solidFill>
+                  <a:srgbClr val="3D424E"/>
+                </a:solidFill>
+              </a:defRPr>
+            </a:pPr>
+            <a:r>
+              <a:t>SkinToneNet atinge SOTA em skin-tone classification cross-domain (precisão &gt;90% out-of-distribution). FairFace exibe distribuição AGREGADA com forte ausência de MST 6-10 (subrepresentação severa de pele escura). NÃO publica matriz cruzada MST × race — apenas distribuição global.</a:t>
+            </a:r>
+          </a:p>
+        </p:txBody>
+      </p:sp>
+      <p:sp>
+        <p:nvSpPr>
+          <p:cNvPr id="9" name="Rounded Rectangle 8"/>
+          <p:cNvSpPr/>
+          <p:nvPr/>
+        </p:nvSpPr>
+        <p:spPr>
+          <a:xfrm>
+            <a:off x="6245352" y="2606039"/>
+            <a:ext cx="5715000" cy="1280160"/>
           </a:xfrm>
           <a:prstGeom prst="roundRect">
             <a:avLst/>
@@ -10114,11 +11736,11 @@
           </a:fontRef>
         </p:style>
         <p:txBody>
-          <a:bodyPr rtlCol="0" anchor="ctr" wrap="square" lIns="228600" rIns="228600" tIns="73152"/>
+          <a:bodyPr rtlCol="0" anchor="ctr" wrap="square" lIns="164592" rIns="164592" tIns="54864"/>
           <a:lstStyle/>
           <a:p>
             <a:pPr algn="ctr">
-              <a:defRPr sz="1100" b="1">
+              <a:defRPr sz="1000" b="1">
                 <a:solidFill>
                   <a:srgbClr val="707682"/>
                 </a:solidFill>
@@ -10130,28 +11752,92 @@
           </a:p>
           <a:p>
             <a:pPr>
-              <a:defRPr sz="1200">
+              <a:defRPr sz="1100">
                 <a:solidFill>
                   <a:srgbClr val="3D424E"/>
                 </a:solidFill>
               </a:defRPr>
             </a:pPr>
             <a:r>
-              <a:t>STW concentra-se em sujeitos da web (viés de quem é fotografado e publicado). Dataset não tem split público fixo para benchmarks. Anotação MST não passa por consenso multi-anotador como o protocolo de Schumann 2023.</a:t>
-            </a:r>
-          </a:p>
-        </p:txBody>
-      </p:sp>
-      <p:sp>
-        <p:nvSpPr>
-          <p:cNvPr id="9" name="Rounded Rectangle 8"/>
+              <a:t>STW concentra sujeitos de imagens web (viés de quem é fotografado e publicado). Dataset não tem split público fixo para benchmarks reprodutíveis. Anotação MST sem protocolo multi-anotador como Schumann 2023. Apenas um classificador (ViT-Small) avaliado.</a:t>
+            </a:r>
+          </a:p>
+        </p:txBody>
+      </p:sp>
+      <p:sp>
+        <p:nvSpPr>
+          <p:cNvPr id="10" name="Rounded Rectangle 9"/>
           <p:cNvSpPr/>
           <p:nvPr/>
         </p:nvSpPr>
         <p:spPr>
           <a:xfrm>
-            <a:off x="365760" y="5806440"/>
-            <a:ext cx="11521440" cy="1051560"/>
+            <a:off x="6245352" y="3931920"/>
+            <a:ext cx="5715000" cy="1143000"/>
+          </a:xfrm>
+          <a:prstGeom prst="roundRect">
+            <a:avLst/>
+          </a:prstGeom>
+          <a:solidFill>
+            <a:srgbClr val="E8EAED"/>
+          </a:solidFill>
+          <a:ln>
+            <a:noFill/>
+          </a:ln>
+        </p:spPr>
+        <p:style>
+          <a:lnRef idx="1">
+            <a:schemeClr val="accent1"/>
+          </a:lnRef>
+          <a:fillRef idx="3">
+            <a:schemeClr val="accent1"/>
+          </a:fillRef>
+          <a:effectRef idx="2">
+            <a:schemeClr val="accent1"/>
+          </a:effectRef>
+          <a:fontRef idx="minor">
+            <a:schemeClr val="lt1"/>
+          </a:fontRef>
+        </p:style>
+        <p:txBody>
+          <a:bodyPr rtlCol="0" anchor="ctr" wrap="square" lIns="164592" rIns="164592" tIns="54864"/>
+          <a:lstStyle/>
+          <a:p>
+            <a:pPr algn="ctr">
+              <a:defRPr sz="1000" b="1">
+                <a:solidFill>
+                  <a:srgbClr val="1F2A4E"/>
+                </a:solidFill>
+              </a:defRPr>
+            </a:pPr>
+            <a:r>
+              <a:t>Conexões com outras fichas do corpus</a:t>
+            </a:r>
+          </a:p>
+          <a:p>
+            <a:pPr>
+              <a:defRPr sz="1100">
+                <a:solidFill>
+                  <a:srgbClr val="3D424E"/>
+                </a:solidFill>
+              </a:defRPr>
+            </a:pPr>
+            <a:r>
+              <a:t>Estende Schumann et al. 2023 (MST scale + protocolo) com classificador SOTA. Conversa com Dominguez-Catena et al. 2024 (DSAP) que auditou datasets via métricas unificadas. Insumo direto para nossa C2 (matriz cruzada MST × race do FairFace).</a:t>
+            </a:r>
+          </a:p>
+        </p:txBody>
+      </p:sp>
+      <p:sp>
+        <p:nvSpPr>
+          <p:cNvPr id="11" name="Rounded Rectangle 10"/>
+          <p:cNvSpPr/>
+          <p:nvPr/>
+        </p:nvSpPr>
+        <p:spPr>
+          <a:xfrm>
+            <a:off x="6245352" y="5120640"/>
+            <a:ext cx="5715000" cy="1463040"/>
           </a:xfrm>
           <a:prstGeom prst="roundRect">
             <a:avLst/>
@@ -10180,7 +11866,7 @@
           </a:fontRef>
         </p:style>
         <p:txBody>
-          <a:bodyPr rtlCol="0" anchor="ctr" wrap="square" lIns="228600" rIns="228600" tIns="73152"/>
+          <a:bodyPr rtlCol="0" anchor="ctr" wrap="square" lIns="164592" rIns="164592" tIns="54864"/>
           <a:lstStyle/>
           <a:p>
             <a:pPr algn="ctr">
@@ -10203,7 +11889,7 @@
               </a:defRPr>
             </a:pPr>
             <a:r>
-              <a:t>DECISÃO TÉCNICA: usar SkinToneNet pré-treinado como insumo do pipeline (economiza ~3 semanas). Nossa C2 (matriz cruzada MST × raça) segue contribuição original. STW pode ser usado como dataset de validação externa do Cap 1.</a:t>
+              <a:t>DECISÃO TÉCNICA: usar SkinToneNet pré-treinado como insumo do pipeline (economiza ~3 semanas de cronograma). Nossa C2 (matriz cruzada MST × raça) segue contribuição original. STW pode ser dataset de validação externa do Cap 1.</a:t>
             </a:r>
           </a:p>
         </p:txBody>
@@ -10234,8 +11920,8 @@
         </p:nvSpPr>
         <p:spPr>
           <a:xfrm>
-            <a:off x="365760" y="228600"/>
-            <a:ext cx="11521440" cy="640080"/>
+            <a:off x="365760" y="182880"/>
+            <a:ext cx="11521440" cy="548640"/>
           </a:xfrm>
           <a:prstGeom prst="rect">
             <a:avLst/>
@@ -10249,7 +11935,7 @@
           <a:lstStyle/>
           <a:p>
             <a:pPr>
-              <a:defRPr sz="2000" b="1">
+              <a:defRPr sz="1800" b="1">
                 <a:solidFill>
                   <a:srgbClr val="1F2A4E"/>
                 </a:solidFill>
@@ -10269,8 +11955,8 @@
         </p:nvSpPr>
         <p:spPr>
           <a:xfrm>
-            <a:off x="365760" y="777240"/>
-            <a:ext cx="11521440" cy="320040"/>
+            <a:off x="365760" y="640080"/>
+            <a:ext cx="11521440" cy="274320"/>
           </a:xfrm>
           <a:prstGeom prst="rect">
             <a:avLst/>
@@ -10284,14 +11970,14 @@
           <a:lstStyle/>
           <a:p>
             <a:pPr>
-              <a:defRPr sz="1200" i="1">
+              <a:defRPr sz="1100" i="1">
                 <a:solidFill>
                   <a:srgbClr val="707682"/>
                 </a:solidFill>
               </a:defRPr>
             </a:pPr>
             <a:r>
-              <a:t>arXiv:2210.09943 — Maryland / Bosch / ELLIS / Tübingen — versão dez/2023</a:t>
+              <a:t>arXiv:2210.09943 — Maryland / Bosch / ELLIS / Tübingen — versão dez 2023</a:t>
             </a:r>
           </a:p>
         </p:txBody>
@@ -10304,7 +11990,7 @@
         </p:nvSpPr>
         <p:spPr>
           <a:xfrm>
-            <a:off x="365760" y="1143000"/>
+            <a:off x="365760" y="960120"/>
             <a:ext cx="11521440" cy="36576"/>
           </a:xfrm>
           <a:prstGeom prst="rect">
@@ -10347,8 +12033,8 @@
         </p:nvSpPr>
         <p:spPr>
           <a:xfrm>
-            <a:off x="365760" y="1325880"/>
-            <a:ext cx="11521440" cy="960120"/>
+            <a:off x="365760" y="1097280"/>
+            <a:ext cx="5715000" cy="1371600"/>
           </a:xfrm>
           <a:prstGeom prst="roundRect">
             <a:avLst/>
@@ -10375,30 +12061,30 @@
           </a:fontRef>
         </p:style>
         <p:txBody>
-          <a:bodyPr rtlCol="0" anchor="ctr" wrap="square" lIns="228600" rIns="228600" tIns="73152"/>
+          <a:bodyPr rtlCol="0" anchor="ctr" wrap="square" lIns="164592" rIns="164592" tIns="54864"/>
           <a:lstStyle/>
           <a:p>
             <a:pPr algn="ctr">
-              <a:defRPr sz="1100" b="1">
+              <a:defRPr sz="1000" b="1">
                 <a:solidFill>
                   <a:srgbClr val="1F2A4E"/>
                 </a:solidFill>
               </a:defRPr>
             </a:pPr>
             <a:r>
-              <a:t>Pergunta de pesquisa</a:t>
-            </a:r>
-          </a:p>
-          <a:p>
-            <a:pPr>
-              <a:defRPr sz="1200">
+              <a:t>Contexto teórico / motivação</a:t>
+            </a:r>
+          </a:p>
+          <a:p>
+            <a:pPr>
+              <a:defRPr sz="1100">
                 <a:solidFill>
                   <a:srgbClr val="3D424E"/>
                 </a:solidFill>
               </a:defRPr>
             </a:pPr>
             <a:r>
-              <a:t>Bias em FR é inerente aos dados de treino ou também emerge da arquitetura escolhida? Existe arquitetura que reduza disparity sem nenhuma intervenção de dados?</a:t>
+              <a:t>A literatura de fairness mitigation focava majoritariamente em dados (re-sampling) e loss functions (FSCL, Group DRO). Arquitetura era assumida como variável neutra. Faltava investigação sobre se NAS pode encontrar arquiteturas inerentemente mais fair.</a:t>
             </a:r>
           </a:p>
         </p:txBody>
@@ -10411,8 +12097,8 @@
         </p:nvSpPr>
         <p:spPr>
           <a:xfrm>
-            <a:off x="365760" y="2331720"/>
-            <a:ext cx="11521440" cy="1234440"/>
+            <a:off x="365760" y="2514600"/>
+            <a:ext cx="5715000" cy="1325880"/>
           </a:xfrm>
           <a:prstGeom prst="roundRect">
             <a:avLst/>
@@ -10441,30 +12127,30 @@
           </a:fontRef>
         </p:style>
         <p:txBody>
-          <a:bodyPr rtlCol="0" anchor="ctr" wrap="square" lIns="228600" rIns="228600" tIns="73152"/>
+          <a:bodyPr rtlCol="0" anchor="ctr" wrap="square" lIns="164592" rIns="164592" tIns="54864"/>
           <a:lstStyle/>
           <a:p>
             <a:pPr algn="ctr">
-              <a:defRPr sz="1100" b="1">
+              <a:defRPr sz="1000" b="1">
                 <a:solidFill>
                   <a:srgbClr val="1F2A4E"/>
                 </a:solidFill>
               </a:defRPr>
             </a:pPr>
             <a:r>
-              <a:t>Metodologia</a:t>
-            </a:r>
-          </a:p>
-          <a:p>
-            <a:pPr>
-              <a:defRPr sz="1200">
+              <a:t>Pergunta de pesquisa</a:t>
+            </a:r>
+          </a:p>
+          <a:p>
+            <a:pPr>
+              <a:defRPr sz="1100">
                 <a:solidFill>
                   <a:srgbClr val="3D424E"/>
                 </a:solidFill>
               </a:defRPr>
             </a:pPr>
             <a:r>
-              <a:t>Neural Architecture Search (NAS) com objetivo bi-critério: accuracy + fairness (medida por DR / EOD). Busca jointly arquitetura e hiperparâmetros sobre espaço de centenas de candidatos. Avalia em CelebA, RFW, BFW.</a:t>
+              <a:t>Bias em FR é apenas consequência dos dados de treino ou também emerge da arquitetura? Existe arquitetura que reduza disparity sem qualquer intervenção em dados ou loss?</a:t>
             </a:r>
           </a:p>
         </p:txBody>
@@ -10477,8 +12163,8 @@
         </p:nvSpPr>
         <p:spPr>
           <a:xfrm>
-            <a:off x="365760" y="3611880"/>
-            <a:ext cx="11521440" cy="1143000"/>
+            <a:off x="365760" y="3886200"/>
+            <a:ext cx="5715000" cy="2697480"/>
           </a:xfrm>
           <a:prstGeom prst="roundRect">
             <a:avLst/>
@@ -10505,30 +12191,30 @@
           </a:fontRef>
         </p:style>
         <p:txBody>
-          <a:bodyPr rtlCol="0" anchor="ctr" wrap="square" lIns="228600" rIns="228600" tIns="73152"/>
+          <a:bodyPr rtlCol="0" anchor="ctr" wrap="square" lIns="164592" rIns="164592" tIns="54864"/>
           <a:lstStyle/>
           <a:p>
             <a:pPr algn="ctr">
-              <a:defRPr sz="1100" b="1">
+              <a:defRPr sz="1000" b="1">
                 <a:solidFill>
                   <a:srgbClr val="1F2A4E"/>
                 </a:solidFill>
               </a:defRPr>
             </a:pPr>
             <a:r>
-              <a:t>Resultados principais</a:t>
-            </a:r>
-          </a:p>
-          <a:p>
-            <a:pPr>
-              <a:defRPr sz="1200">
+              <a:t>Metodologia detalhada</a:t>
+            </a:r>
+          </a:p>
+          <a:p>
+            <a:pPr>
+              <a:defRPr sz="1100">
                 <a:solidFill>
                   <a:srgbClr val="3D424E"/>
                 </a:solidFill>
               </a:defRPr>
             </a:pPr>
             <a:r>
-              <a:t>A frente de Pareto inclui arquiteturas que dominam ResNet-50/100 e MobileNet em accuracy E fairness simultaneamente. Modificações arquiteturais sozinhas (sem dados extra, sem mitigação algorítmica) reduzem disparity em até 30%.</a:t>
+              <a:t>Neural Architecture Search (NAS) bi-objetivo: accuracy E fairness (medida por DR / EOD). Busca jointly arquitetura + hiperparâmetros em espaço de centenas de candidatos. Datasets de avaliação: CelebA, RFW, BFW. Métricas: TAR@FAR por grupo + Demographic Parity Difference.</a:t>
             </a:r>
           </a:p>
         </p:txBody>
@@ -10541,8 +12227,72 @@
         </p:nvSpPr>
         <p:spPr>
           <a:xfrm>
-            <a:off x="365760" y="4800600"/>
-            <a:ext cx="11521440" cy="960120"/>
+            <a:off x="6245352" y="1097280"/>
+            <a:ext cx="5715000" cy="1463040"/>
+          </a:xfrm>
+          <a:prstGeom prst="roundRect">
+            <a:avLst/>
+          </a:prstGeom>
+          <a:solidFill>
+            <a:srgbClr val="E8EAED"/>
+          </a:solidFill>
+          <a:ln>
+            <a:noFill/>
+          </a:ln>
+        </p:spPr>
+        <p:style>
+          <a:lnRef idx="1">
+            <a:schemeClr val="accent1"/>
+          </a:lnRef>
+          <a:fillRef idx="3">
+            <a:schemeClr val="accent1"/>
+          </a:fillRef>
+          <a:effectRef idx="2">
+            <a:schemeClr val="accent1"/>
+          </a:effectRef>
+          <a:fontRef idx="minor">
+            <a:schemeClr val="lt1"/>
+          </a:fontRef>
+        </p:style>
+        <p:txBody>
+          <a:bodyPr rtlCol="0" anchor="ctr" wrap="square" lIns="164592" rIns="164592" tIns="54864"/>
+          <a:lstStyle/>
+          <a:p>
+            <a:pPr algn="ctr">
+              <a:defRPr sz="1000" b="1">
+                <a:solidFill>
+                  <a:srgbClr val="1F2A4E"/>
+                </a:solidFill>
+              </a:defRPr>
+            </a:pPr>
+            <a:r>
+              <a:t>Resultados principais (números/achados)</a:t>
+            </a:r>
+          </a:p>
+          <a:p>
+            <a:pPr>
+              <a:defRPr sz="1100">
+                <a:solidFill>
+                  <a:srgbClr val="3D424E"/>
+                </a:solidFill>
+              </a:defRPr>
+            </a:pPr>
+            <a:r>
+              <a:t>Frente de Pareto inclui arquiteturas que DOMINAM ResNet-50/100 e MobileNet em accuracy E fairness simultaneamente. Modificações arquiteturais SOZINHAS (sem dados extra, sem mitigação algorítmica) reduzem disparity em até 30%. Arquiteturas vencedoras têm padrões distintos (mais skip connections, menos depth).</a:t>
+            </a:r>
+          </a:p>
+        </p:txBody>
+      </p:sp>
+      <p:sp>
+        <p:nvSpPr>
+          <p:cNvPr id="9" name="Rounded Rectangle 8"/>
+          <p:cNvSpPr/>
+          <p:nvPr/>
+        </p:nvSpPr>
+        <p:spPr>
+          <a:xfrm>
+            <a:off x="6245352" y="2606039"/>
+            <a:ext cx="5715000" cy="1280160"/>
           </a:xfrm>
           <a:prstGeom prst="roundRect">
             <a:avLst/>
@@ -10571,11 +12321,11 @@
           </a:fontRef>
         </p:style>
         <p:txBody>
-          <a:bodyPr rtlCol="0" anchor="ctr" wrap="square" lIns="228600" rIns="228600" tIns="73152"/>
+          <a:bodyPr rtlCol="0" anchor="ctr" wrap="square" lIns="164592" rIns="164592" tIns="54864"/>
           <a:lstStyle/>
           <a:p>
             <a:pPr algn="ctr">
-              <a:defRPr sz="1100" b="1">
+              <a:defRPr sz="1000" b="1">
                 <a:solidFill>
                   <a:srgbClr val="707682"/>
                 </a:solidFill>
@@ -10587,28 +12337,92 @@
           </a:p>
           <a:p>
             <a:pPr>
-              <a:defRPr sz="1200">
+              <a:defRPr sz="1100">
                 <a:solidFill>
                   <a:srgbClr val="3D424E"/>
                 </a:solidFill>
               </a:defRPr>
             </a:pPr>
             <a:r>
-              <a:t>Custo computacional altíssimo (NAS proibitivo para a maioria). Arquiteturas vencedoras não têm interpretação semântica clara. Não testa em FairFace 7-class race especificamente. ConvNeXt-T não está na busca.</a:t>
-            </a:r>
-          </a:p>
-        </p:txBody>
-      </p:sp>
-      <p:sp>
-        <p:nvSpPr>
-          <p:cNvPr id="9" name="Rounded Rectangle 8"/>
+              <a:t>Custo computacional altíssimo — NAS proibitivo para a maioria dos labs. Arquiteturas vencedoras não têm interpretação semântica clara (por que essa estrutura é mais fair?). Não testa em FairFace 7-class race especificamente. ConvNeXt-T não está no espaço de busca.</a:t>
+            </a:r>
+          </a:p>
+        </p:txBody>
+      </p:sp>
+      <p:sp>
+        <p:nvSpPr>
+          <p:cNvPr id="10" name="Rounded Rectangle 9"/>
           <p:cNvSpPr/>
           <p:nvPr/>
         </p:nvSpPr>
         <p:spPr>
           <a:xfrm>
-            <a:off x="365760" y="5806440"/>
-            <a:ext cx="11521440" cy="1051560"/>
+            <a:off x="6245352" y="3931920"/>
+            <a:ext cx="5715000" cy="1143000"/>
+          </a:xfrm>
+          <a:prstGeom prst="roundRect">
+            <a:avLst/>
+          </a:prstGeom>
+          <a:solidFill>
+            <a:srgbClr val="E8EAED"/>
+          </a:solidFill>
+          <a:ln>
+            <a:noFill/>
+          </a:ln>
+        </p:spPr>
+        <p:style>
+          <a:lnRef idx="1">
+            <a:schemeClr val="accent1"/>
+          </a:lnRef>
+          <a:fillRef idx="3">
+            <a:schemeClr val="accent1"/>
+          </a:fillRef>
+          <a:effectRef idx="2">
+            <a:schemeClr val="accent1"/>
+          </a:effectRef>
+          <a:fontRef idx="minor">
+            <a:schemeClr val="lt1"/>
+          </a:fontRef>
+        </p:style>
+        <p:txBody>
+          <a:bodyPr rtlCol="0" anchor="ctr" wrap="square" lIns="164592" rIns="164592" tIns="54864"/>
+          <a:lstStyle/>
+          <a:p>
+            <a:pPr algn="ctr">
+              <a:defRPr sz="1000" b="1">
+                <a:solidFill>
+                  <a:srgbClr val="1F2A4E"/>
+                </a:solidFill>
+              </a:defRPr>
+            </a:pPr>
+            <a:r>
+              <a:t>Conexões com outras fichas do corpus</a:t>
+            </a:r>
+          </a:p>
+          <a:p>
+            <a:pPr>
+              <a:defRPr sz="1100">
+                <a:solidFill>
+                  <a:srgbClr val="3D424E"/>
+                </a:solidFill>
+              </a:defRPr>
+            </a:pPr>
+            <a:r>
+              <a:t>Conversa com Manzoor &amp; Rattani 2024 (FineFACE) que também aposta em mudança arquitetural (cross-layer attention). Implicitamente reforça preocupação de Lin et al. 2022 (FairGRAPE) com modificações estruturais. Contrasta com Park et al. 2022 (FSCL) que muda apenas a loss.</a:t>
+            </a:r>
+          </a:p>
+        </p:txBody>
+      </p:sp>
+      <p:sp>
+        <p:nvSpPr>
+          <p:cNvPr id="11" name="Rounded Rectangle 10"/>
+          <p:cNvSpPr/>
+          <p:nvPr/>
+        </p:nvSpPr>
+        <p:spPr>
+          <a:xfrm>
+            <a:off x="6245352" y="5120640"/>
+            <a:ext cx="5715000" cy="1463040"/>
           </a:xfrm>
           <a:prstGeom prst="roundRect">
             <a:avLst/>
@@ -10637,7 +12451,7 @@
           </a:fontRef>
         </p:style>
         <p:txBody>
-          <a:bodyPr rtlCol="0" anchor="ctr" wrap="square" lIns="228600" rIns="228600" tIns="73152"/>
+          <a:bodyPr rtlCol="0" anchor="ctr" wrap="square" lIns="164592" rIns="164592" tIns="54864"/>
           <a:lstStyle/>
           <a:p>
             <a:pPr algn="ctr">
@@ -10660,7 +12474,7 @@
               </a:defRPr>
             </a:pPr>
             <a:r>
-              <a:t>REFORÇA H2 (testar se trocar de ResNet-34 para ConvNeXt-T já reduz disparity). Justifica escolha de backbone moderno como ConvNeXt-T. Se H1 falhar mas ConvNeXt-T puro já reduzir disparity, atribuímos parte do efeito à arquitetura.</a:t>
+              <a:t>REFORÇA H2 (testar se trocar de ResNet-34 para ConvNeXt-T já reduz disparity). Justifica escolha de backbone moderno. Se H1 falhar mas ConvNeXt-T puro já reduzir disparity, parte do efeito é atribuível à arquitetura — resultado científico válido.</a:t>
             </a:r>
           </a:p>
         </p:txBody>
@@ -10834,8 +12648,8 @@
         </p:nvSpPr>
         <p:spPr>
           <a:xfrm>
-            <a:off x="365760" y="228600"/>
-            <a:ext cx="11521440" cy="640080"/>
+            <a:off x="365760" y="182880"/>
+            <a:ext cx="11521440" cy="548640"/>
           </a:xfrm>
           <a:prstGeom prst="rect">
             <a:avLst/>
@@ -10849,7 +12663,7 @@
           <a:lstStyle/>
           <a:p>
             <a:pPr>
-              <a:defRPr sz="2000" b="1">
+              <a:defRPr sz="1800" b="1">
                 <a:solidFill>
                   <a:srgbClr val="1F2A4E"/>
                 </a:solidFill>
@@ -10869,8 +12683,8 @@
         </p:nvSpPr>
         <p:spPr>
           <a:xfrm>
-            <a:off x="365760" y="777240"/>
-            <a:ext cx="11521440" cy="320040"/>
+            <a:off x="365760" y="640080"/>
+            <a:ext cx="11521440" cy="274320"/>
           </a:xfrm>
           <a:prstGeom prst="rect">
             <a:avLst/>
@@ -10884,14 +12698,14 @@
           <a:lstStyle/>
           <a:p>
             <a:pPr>
-              <a:defRPr sz="1200" i="1">
+              <a:defRPr sz="1100" i="1">
                 <a:solidFill>
                   <a:srgbClr val="707682"/>
                 </a:solidFill>
               </a:defRPr>
             </a:pPr>
             <a:r>
-              <a:t>arXiv:2305.12671 — Johns Hopkins (NLP) — versão revisada abr/2024</a:t>
+              <a:t>arXiv:2305.12671 — Johns Hopkins (NLP) — versão revisada abr 2024</a:t>
             </a:r>
           </a:p>
         </p:txBody>
@@ -10904,7 +12718,7 @@
         </p:nvSpPr>
         <p:spPr>
           <a:xfrm>
-            <a:off x="365760" y="1143000"/>
+            <a:off x="365760" y="960120"/>
             <a:ext cx="11521440" cy="36576"/>
           </a:xfrm>
           <a:prstGeom prst="rect">
@@ -10947,8 +12761,8 @@
         </p:nvSpPr>
         <p:spPr>
           <a:xfrm>
-            <a:off x="365760" y="1325880"/>
-            <a:ext cx="11521440" cy="960120"/>
+            <a:off x="365760" y="1097280"/>
+            <a:ext cx="5715000" cy="1371600"/>
           </a:xfrm>
           <a:prstGeom prst="roundRect">
             <a:avLst/>
@@ -10975,30 +12789,30 @@
           </a:fontRef>
         </p:style>
         <p:txBody>
-          <a:bodyPr rtlCol="0" anchor="ctr" wrap="square" lIns="228600" rIns="228600" tIns="73152"/>
+          <a:bodyPr rtlCol="0" anchor="ctr" wrap="square" lIns="164592" rIns="164592" tIns="54864"/>
           <a:lstStyle/>
           <a:p>
             <a:pPr algn="ctr">
-              <a:defRPr sz="1100" b="1">
+              <a:defRPr sz="1000" b="1">
                 <a:solidFill>
                   <a:srgbClr val="1F2A4E"/>
                 </a:solidFill>
               </a:defRPr>
             </a:pPr>
             <a:r>
-              <a:t>Pergunta de pesquisa</a:t>
-            </a:r>
-          </a:p>
-          <a:p>
-            <a:pPr>
-              <a:defRPr sz="1200">
+              <a:t>Contexto teórico / motivação</a:t>
+            </a:r>
+          </a:p>
+          <a:p>
+            <a:pPr>
+              <a:defRPr sz="1100">
                 <a:solidFill>
                   <a:srgbClr val="3D424E"/>
                 </a:solidFill>
               </a:defRPr>
             </a:pPr>
             <a:r>
-              <a:t>Quando demographic labels estão disponíveis apenas em uma tarefa relacionada (não na tarefa-alvo), é possível transferir fairness via multi-task learning?</a:t>
+              <a:t>LAFTR (Madras 2018) provou teoricamente que fairness pode transferir entre tarefas via representação compartilhada, mas a validação empírica era limitada. Quando demographic labels existem em uma tarefa mas não na outra, esse princípio teórico tinha utilidade prática não explorada.</a:t>
             </a:r>
           </a:p>
         </p:txBody>
@@ -11011,8 +12825,8 @@
         </p:nvSpPr>
         <p:spPr>
           <a:xfrm>
-            <a:off x="365760" y="2331720"/>
-            <a:ext cx="11521440" cy="1234440"/>
+            <a:off x="365760" y="2514600"/>
+            <a:ext cx="5715000" cy="1325880"/>
           </a:xfrm>
           <a:prstGeom prst="roundRect">
             <a:avLst/>
@@ -11041,30 +12855,30 @@
           </a:fontRef>
         </p:style>
         <p:txBody>
-          <a:bodyPr rtlCol="0" anchor="ctr" wrap="square" lIns="228600" rIns="228600" tIns="73152"/>
+          <a:bodyPr rtlCol="0" anchor="ctr" wrap="square" lIns="164592" rIns="164592" tIns="54864"/>
           <a:lstStyle/>
           <a:p>
             <a:pPr algn="ctr">
-              <a:defRPr sz="1100" b="1">
+              <a:defRPr sz="1000" b="1">
                 <a:solidFill>
                   <a:srgbClr val="1F2A4E"/>
                 </a:solidFill>
               </a:defRPr>
             </a:pPr>
             <a:r>
-              <a:t>Metodologia</a:t>
-            </a:r>
-          </a:p>
-          <a:p>
-            <a:pPr>
-              <a:defRPr sz="1200">
+              <a:t>Pergunta de pesquisa</a:t>
+            </a:r>
+          </a:p>
+          <a:p>
+            <a:pPr>
+              <a:defRPr sz="1100">
                 <a:solidFill>
                   <a:srgbClr val="3D424E"/>
                 </a:solidFill>
               </a:defRPr>
             </a:pPr>
             <a:r>
-              <a:t>Adapta single-task fairness loss para framework multi-task. Treina classificador em tarefa-alvo SEM demographic labels usando demographic labels APENAS na tarefa auxiliar. Avalia em datasets de NLP (toxicidade, sentiment) com atributos sensíveis de raça/gênero.</a:t>
+              <a:t>Quando demographic labels estão disponíveis APENAS em uma tarefa relacionada (não na tarefa-alvo), é possível transferir fairness via multi-task learning? Em que magnitude e sob quais condições?</a:t>
             </a:r>
           </a:p>
         </p:txBody>
@@ -11077,8 +12891,8 @@
         </p:nvSpPr>
         <p:spPr>
           <a:xfrm>
-            <a:off x="365760" y="3611880"/>
-            <a:ext cx="11521440" cy="1143000"/>
+            <a:off x="365760" y="3886200"/>
+            <a:ext cx="5715000" cy="2697480"/>
           </a:xfrm>
           <a:prstGeom prst="roundRect">
             <a:avLst/>
@@ -11105,30 +12919,30 @@
           </a:fontRef>
         </p:style>
         <p:txBody>
-          <a:bodyPr rtlCol="0" anchor="ctr" wrap="square" lIns="228600" rIns="228600" tIns="73152"/>
+          <a:bodyPr rtlCol="0" anchor="ctr" wrap="square" lIns="164592" rIns="164592" tIns="54864"/>
           <a:lstStyle/>
           <a:p>
             <a:pPr algn="ctr">
-              <a:defRPr sz="1100" b="1">
+              <a:defRPr sz="1000" b="1">
                 <a:solidFill>
                   <a:srgbClr val="1F2A4E"/>
                 </a:solidFill>
               </a:defRPr>
             </a:pPr>
             <a:r>
-              <a:t>Resultados principais</a:t>
-            </a:r>
-          </a:p>
-          <a:p>
-            <a:pPr>
-              <a:defRPr sz="1200">
+              <a:t>Metodologia detalhada</a:t>
+            </a:r>
+          </a:p>
+          <a:p>
+            <a:pPr>
+              <a:defRPr sz="1100">
                 <a:solidFill>
                   <a:srgbClr val="3D424E"/>
                 </a:solidFill>
               </a:defRPr>
             </a:pPr>
             <a:r>
-              <a:t>Objetivos de fairness demográfico se transferem empiricamente para a tarefa-alvo em todos os datasets testados. Permite intersectional fairness combinando datasets com atributos demográficos diferentes (single-axis).</a:t>
+              <a:t>Adapta single-task fairness loss para framework multi-task. Treina classificador na tarefa-alvo SEM demographic labels, usando demographic labels APENAS na tarefa auxiliar. Avalia em datasets de NLP (toxicidade Jigsaw, sentiment Twitter) com atributos sensíveis de raça e gênero. Compara contra single-task baseline e contra multi-task sem fairness loss auxiliar.</a:t>
             </a:r>
           </a:p>
         </p:txBody>
@@ -11141,8 +12955,72 @@
         </p:nvSpPr>
         <p:spPr>
           <a:xfrm>
-            <a:off x="365760" y="4800600"/>
-            <a:ext cx="11521440" cy="960120"/>
+            <a:off x="6245352" y="1097280"/>
+            <a:ext cx="5715000" cy="1463040"/>
+          </a:xfrm>
+          <a:prstGeom prst="roundRect">
+            <a:avLst/>
+          </a:prstGeom>
+          <a:solidFill>
+            <a:srgbClr val="E8EAED"/>
+          </a:solidFill>
+          <a:ln>
+            <a:noFill/>
+          </a:ln>
+        </p:spPr>
+        <p:style>
+          <a:lnRef idx="1">
+            <a:schemeClr val="accent1"/>
+          </a:lnRef>
+          <a:fillRef idx="3">
+            <a:schemeClr val="accent1"/>
+          </a:fillRef>
+          <a:effectRef idx="2">
+            <a:schemeClr val="accent1"/>
+          </a:effectRef>
+          <a:fontRef idx="minor">
+            <a:schemeClr val="lt1"/>
+          </a:fontRef>
+        </p:style>
+        <p:txBody>
+          <a:bodyPr rtlCol="0" anchor="ctr" wrap="square" lIns="164592" rIns="164592" tIns="54864"/>
+          <a:lstStyle/>
+          <a:p>
+            <a:pPr algn="ctr">
+              <a:defRPr sz="1000" b="1">
+                <a:solidFill>
+                  <a:srgbClr val="1F2A4E"/>
+                </a:solidFill>
+              </a:defRPr>
+            </a:pPr>
+            <a:r>
+              <a:t>Resultados principais (números/achados)</a:t>
+            </a:r>
+          </a:p>
+          <a:p>
+            <a:pPr>
+              <a:defRPr sz="1100">
+                <a:solidFill>
+                  <a:srgbClr val="3D424E"/>
+                </a:solidFill>
+              </a:defRPr>
+            </a:pPr>
+            <a:r>
+              <a:t>Objetivos de fairness demográfico se transferem empiricamente para a tarefa-alvo em todos os datasets testados. Permite intersectional fairness combinando datasets com atributos demográficos diferentes (single-axis). Magnitude da transferência: ~70-80% da redução de disparity vista em single-task fair.</a:t>
+            </a:r>
+          </a:p>
+        </p:txBody>
+      </p:sp>
+      <p:sp>
+        <p:nvSpPr>
+          <p:cNvPr id="9" name="Rounded Rectangle 8"/>
+          <p:cNvSpPr/>
+          <p:nvPr/>
+        </p:nvSpPr>
+        <p:spPr>
+          <a:xfrm>
+            <a:off x="6245352" y="2606039"/>
+            <a:ext cx="5715000" cy="1280160"/>
           </a:xfrm>
           <a:prstGeom prst="roundRect">
             <a:avLst/>
@@ -11171,11 +13049,11 @@
           </a:fontRef>
         </p:style>
         <p:txBody>
-          <a:bodyPr rtlCol="0" anchor="ctr" wrap="square" lIns="228600" rIns="228600" tIns="73152"/>
+          <a:bodyPr rtlCol="0" anchor="ctr" wrap="square" lIns="164592" rIns="164592" tIns="54864"/>
           <a:lstStyle/>
           <a:p>
             <a:pPr algn="ctr">
-              <a:defRPr sz="1100" b="1">
+              <a:defRPr sz="1000" b="1">
                 <a:solidFill>
                   <a:srgbClr val="707682"/>
                 </a:solidFill>
@@ -11187,28 +13065,92 @@
           </a:p>
           <a:p>
             <a:pPr>
-              <a:defRPr sz="1200">
+              <a:defRPr sz="1100">
                 <a:solidFill>
                   <a:srgbClr val="3D424E"/>
                 </a:solidFill>
               </a:defRPr>
             </a:pPr>
             <a:r>
-              <a:t>Experimentos em NLP — não validados ainda em CV/face. Magnitude da transferência depende de quão correlacionadas estão as tarefas auxiliar e alvo. Não testa robustez sob distribution shift.</a:t>
-            </a:r>
-          </a:p>
-        </p:txBody>
-      </p:sp>
-      <p:sp>
-        <p:nvSpPr>
-          <p:cNvPr id="9" name="Rounded Rectangle 8"/>
+              <a:t>Experimentos em NLP — não validados em CV/face. Magnitude da transferência depende de correlação entre tarefas auxiliar e alvo. Não testa robustez sob distribution shift. Único atributo sensível por experimento.</a:t>
+            </a:r>
+          </a:p>
+        </p:txBody>
+      </p:sp>
+      <p:sp>
+        <p:nvSpPr>
+          <p:cNvPr id="10" name="Rounded Rectangle 9"/>
           <p:cNvSpPr/>
           <p:nvPr/>
         </p:nvSpPr>
         <p:spPr>
           <a:xfrm>
-            <a:off x="365760" y="5806440"/>
-            <a:ext cx="11521440" cy="1051560"/>
+            <a:off x="6245352" y="3931920"/>
+            <a:ext cx="5715000" cy="1143000"/>
+          </a:xfrm>
+          <a:prstGeom prst="roundRect">
+            <a:avLst/>
+          </a:prstGeom>
+          <a:solidFill>
+            <a:srgbClr val="E8EAED"/>
+          </a:solidFill>
+          <a:ln>
+            <a:noFill/>
+          </a:ln>
+        </p:spPr>
+        <p:style>
+          <a:lnRef idx="1">
+            <a:schemeClr val="accent1"/>
+          </a:lnRef>
+          <a:fillRef idx="3">
+            <a:schemeClr val="accent1"/>
+          </a:fillRef>
+          <a:effectRef idx="2">
+            <a:schemeClr val="accent1"/>
+          </a:effectRef>
+          <a:fontRef idx="minor">
+            <a:schemeClr val="lt1"/>
+          </a:fontRef>
+        </p:style>
+        <p:txBody>
+          <a:bodyPr rtlCol="0" anchor="ctr" wrap="square" lIns="164592" rIns="164592" tIns="54864"/>
+          <a:lstStyle/>
+          <a:p>
+            <a:pPr algn="ctr">
+              <a:defRPr sz="1000" b="1">
+                <a:solidFill>
+                  <a:srgbClr val="1F2A4E"/>
+                </a:solidFill>
+              </a:defRPr>
+            </a:pPr>
+            <a:r>
+              <a:t>Conexões com outras fichas do corpus</a:t>
+            </a:r>
+          </a:p>
+          <a:p>
+            <a:pPr>
+              <a:defRPr sz="1100">
+                <a:solidFill>
+                  <a:srgbClr val="3D424E"/>
+                </a:solidFill>
+              </a:defRPr>
+            </a:pPr>
+            <a:r>
+              <a:t>Reforço empírico direto de Madras et al. 2018 (LAFTR). Conversa com Zemel et al. 2013 (LFR — paradigma fundador). Compatível com Hardt et al. 2016 (métricas de fairness).</a:t>
+            </a:r>
+          </a:p>
+        </p:txBody>
+      </p:sp>
+      <p:sp>
+        <p:nvSpPr>
+          <p:cNvPr id="11" name="Rounded Rectangle 10"/>
+          <p:cNvSpPr/>
+          <p:nvPr/>
+        </p:nvSpPr>
+        <p:spPr>
+          <a:xfrm>
+            <a:off x="6245352" y="5120640"/>
+            <a:ext cx="5715000" cy="1463040"/>
           </a:xfrm>
           <a:prstGeom prst="roundRect">
             <a:avLst/>
@@ -11237,7 +13179,7 @@
           </a:fontRef>
         </p:style>
         <p:txBody>
-          <a:bodyPr rtlCol="0" anchor="ctr" wrap="square" lIns="228600" rIns="228600" tIns="73152"/>
+          <a:bodyPr rtlCol="0" anchor="ctr" wrap="square" lIns="164592" rIns="164592" tIns="54864"/>
           <a:lstStyle/>
           <a:p>
             <a:pPr algn="ctr">
@@ -11260,7 +13202,7 @@
               </a:defRPr>
             </a:pPr>
             <a:r>
-              <a:t>REFORÇO EMPÍRICO do princípio teórico do LAFTR. Suporta etapa 3 (race + tom auxiliar) e etapa 5 (transferência para FR) do pipeline. Princípio é independente da modalidade, mas precisamos validar empiricamente em face.</a:t>
+              <a:t>REFORÇO EMPÍRICO do princípio teórico do LAFTR. Suporta etapa 3 (race + tom auxiliar) e etapa 5 (transferência para FR) do pipeline. Princípio é independente da modalidade, mas precisamos validar empiricamente em face — é o que faremos no Cap 3.</a:t>
             </a:r>
           </a:p>
         </p:txBody>
@@ -11291,8 +13233,8 @@
         </p:nvSpPr>
         <p:spPr>
           <a:xfrm>
-            <a:off x="365760" y="228600"/>
-            <a:ext cx="11521440" cy="640080"/>
+            <a:off x="365760" y="182880"/>
+            <a:ext cx="11521440" cy="548640"/>
           </a:xfrm>
           <a:prstGeom prst="rect">
             <a:avLst/>
@@ -11306,7 +13248,7 @@
           <a:lstStyle/>
           <a:p>
             <a:pPr>
-              <a:defRPr sz="2000" b="1">
+              <a:defRPr sz="1800" b="1">
                 <a:solidFill>
                   <a:srgbClr val="1F2A4E"/>
                 </a:solidFill>
@@ -11326,8 +13268,8 @@
         </p:nvSpPr>
         <p:spPr>
           <a:xfrm>
-            <a:off x="365760" y="777240"/>
-            <a:ext cx="11521440" cy="320040"/>
+            <a:off x="365760" y="640080"/>
+            <a:ext cx="11521440" cy="274320"/>
           </a:xfrm>
           <a:prstGeom prst="rect">
             <a:avLst/>
@@ -11341,14 +13283,14 @@
           <a:lstStyle/>
           <a:p>
             <a:pPr>
-              <a:defRPr sz="1200" i="1">
+              <a:defRPr sz="1100" i="1">
                 <a:solidFill>
                   <a:srgbClr val="707682"/>
                 </a:solidFill>
               </a:defRPr>
             </a:pPr>
             <a:r>
-              <a:t>arXiv:2211.14498 — WACVW 2023 (IEEE/CVF Winter Conf. on Apps. of CV Workshops)</a:t>
+              <a:t>arXiv:2211.14498 — WACVW 2023 (IEEE/CVF Winter Conf. Workshops)</a:t>
             </a:r>
           </a:p>
         </p:txBody>
@@ -11361,7 +13303,7 @@
         </p:nvSpPr>
         <p:spPr>
           <a:xfrm>
-            <a:off x="365760" y="1143000"/>
+            <a:off x="365760" y="960120"/>
             <a:ext cx="11521440" cy="36576"/>
           </a:xfrm>
           <a:prstGeom prst="rect">
@@ -11404,8 +13346,8 @@
         </p:nvSpPr>
         <p:spPr>
           <a:xfrm>
-            <a:off x="365760" y="1325880"/>
-            <a:ext cx="11521440" cy="960120"/>
+            <a:off x="365760" y="1097280"/>
+            <a:ext cx="5715000" cy="1371600"/>
           </a:xfrm>
           <a:prstGeom prst="roundRect">
             <a:avLst/>
@@ -11432,30 +13374,30 @@
           </a:fontRef>
         </p:style>
         <p:txBody>
-          <a:bodyPr rtlCol="0" anchor="ctr" wrap="square" lIns="228600" rIns="228600" tIns="73152"/>
+          <a:bodyPr rtlCol="0" anchor="ctr" wrap="square" lIns="164592" rIns="164592" tIns="54864"/>
           <a:lstStyle/>
           <a:p>
             <a:pPr algn="ctr">
-              <a:defRPr sz="1100" b="1">
+              <a:defRPr sz="1000" b="1">
                 <a:solidFill>
                   <a:srgbClr val="1F2A4E"/>
                 </a:solidFill>
               </a:defRPr>
             </a:pPr>
             <a:r>
-              <a:t>Pergunta de pesquisa</a:t>
-            </a:r>
-          </a:p>
-          <a:p>
-            <a:pPr>
-              <a:defRPr sz="1200">
+              <a:t>Contexto teórico / motivação</a:t>
+            </a:r>
+          </a:p>
+          <a:p>
+            <a:pPr>
+              <a:defRPr sz="1100">
                 <a:solidFill>
                   <a:srgbClr val="3D424E"/>
                 </a:solidFill>
               </a:defRPr>
             </a:pPr>
             <a:r>
-              <a:t>Balancear a distribuição racial no dataset de treino é SUFICIENTE para eliminar disparities raciais em face recognition?</a:t>
+              <a:t>A linha de mitigação 'rebalancear o dataset' (Karkkainen &amp; Joo 2021 com FairFace) era assumida como suficiente. Mas se balanceamento bastasse, o gap Latinx no FairFace já estaria resolvido — e não está. Faltava investigação sistemática do limite dessa abordagem.</a:t>
             </a:r>
           </a:p>
         </p:txBody>
@@ -11468,8 +13410,8 @@
         </p:nvSpPr>
         <p:spPr>
           <a:xfrm>
-            <a:off x="365760" y="2331720"/>
-            <a:ext cx="11521440" cy="1234440"/>
+            <a:off x="365760" y="2514600"/>
+            <a:ext cx="5715000" cy="1325880"/>
           </a:xfrm>
           <a:prstGeom prst="roundRect">
             <a:avLst/>
@@ -11498,30 +13440,30 @@
           </a:fontRef>
         </p:style>
         <p:txBody>
-          <a:bodyPr rtlCol="0" anchor="ctr" wrap="square" lIns="228600" rIns="228600" tIns="73152"/>
+          <a:bodyPr rtlCol="0" anchor="ctr" wrap="square" lIns="164592" rIns="164592" tIns="54864"/>
           <a:lstStyle/>
           <a:p>
             <a:pPr algn="ctr">
-              <a:defRPr sz="1100" b="1">
+              <a:defRPr sz="1000" b="1">
                 <a:solidFill>
                   <a:srgbClr val="1F2A4E"/>
                 </a:solidFill>
               </a:defRPr>
             </a:pPr>
             <a:r>
-              <a:t>Metodologia</a:t>
-            </a:r>
-          </a:p>
-          <a:p>
-            <a:pPr>
-              <a:defRPr sz="1200">
+              <a:t>Pergunta de pesquisa</a:t>
+            </a:r>
+          </a:p>
+          <a:p>
+            <a:pPr>
+              <a:defRPr sz="1100">
                 <a:solidFill>
                   <a:srgbClr val="3D424E"/>
                 </a:solidFill>
               </a:defRPr>
             </a:pPr>
             <a:r>
-              <a:t>Treina ArcFace em variantes do dataset MS1MV2 com proporções variáveis de raças (uniforme, skewed-toward-Black, skewed-toward-White). Introduz métrica de 'racial gradation' para medir correlação intra/inter-classe. Avalia em RFW.</a:t>
+              <a:t>Balancear a distribuição racial no dataset de treino é SUFICIENTE para eliminar disparities raciais em face recognition? Em que cenários falha?</a:t>
             </a:r>
           </a:p>
         </p:txBody>
@@ -11534,8 +13476,8 @@
         </p:nvSpPr>
         <p:spPr>
           <a:xfrm>
-            <a:off x="365760" y="3611880"/>
-            <a:ext cx="11521440" cy="1143000"/>
+            <a:off x="365760" y="3886200"/>
+            <a:ext cx="5715000" cy="2697480"/>
           </a:xfrm>
           <a:prstGeom prst="roundRect">
             <a:avLst/>
@@ -11562,30 +13504,30 @@
           </a:fontRef>
         </p:style>
         <p:txBody>
-          <a:bodyPr rtlCol="0" anchor="ctr" wrap="square" lIns="228600" rIns="228600" tIns="73152"/>
+          <a:bodyPr rtlCol="0" anchor="ctr" wrap="square" lIns="164592" rIns="164592" tIns="54864"/>
           <a:lstStyle/>
           <a:p>
             <a:pPr algn="ctr">
-              <a:defRPr sz="1100" b="1">
+              <a:defRPr sz="1000" b="1">
                 <a:solidFill>
                   <a:srgbClr val="1F2A4E"/>
                 </a:solidFill>
               </a:defRPr>
             </a:pPr>
             <a:r>
-              <a:t>Resultados principais</a:t>
-            </a:r>
-          </a:p>
-          <a:p>
-            <a:pPr>
-              <a:defRPr sz="1200">
+              <a:t>Metodologia detalhada</a:t>
+            </a:r>
+          </a:p>
+          <a:p>
+            <a:pPr>
+              <a:defRPr sz="1100">
                 <a:solidFill>
                   <a:srgbClr val="3D424E"/>
                 </a:solidFill>
               </a:defRPr>
             </a:pPr>
             <a:r>
-              <a:t>Distribuição uniforme de raças no treino NÃO garante FR sem viés. Skewed-toward-Black supera uniforme para grupo Black. Qualidade da imagem (resolução, iluminação) introduz disparity adicional que balanceamento não captura.</a:t>
+              <a:t>Treina ArcFace em variantes do dataset MS1MV2 com proporções variáveis de raças: uniforme (33% cada), skewed-toward-Black (60% Black), skewed-toward-White (60% White). Introduz métrica 'racial gradation' para medir correlação intra/inter-classe. Avalia em RFW e auditoria estratificada por qualidade da imagem.</a:t>
             </a:r>
           </a:p>
         </p:txBody>
@@ -11598,8 +13540,72 @@
         </p:nvSpPr>
         <p:spPr>
           <a:xfrm>
-            <a:off x="365760" y="4800600"/>
-            <a:ext cx="11521440" cy="960120"/>
+            <a:off x="6245352" y="1097280"/>
+            <a:ext cx="5715000" cy="1463040"/>
+          </a:xfrm>
+          <a:prstGeom prst="roundRect">
+            <a:avLst/>
+          </a:prstGeom>
+          <a:solidFill>
+            <a:srgbClr val="E8EAED"/>
+          </a:solidFill>
+          <a:ln>
+            <a:noFill/>
+          </a:ln>
+        </p:spPr>
+        <p:style>
+          <a:lnRef idx="1">
+            <a:schemeClr val="accent1"/>
+          </a:lnRef>
+          <a:fillRef idx="3">
+            <a:schemeClr val="accent1"/>
+          </a:fillRef>
+          <a:effectRef idx="2">
+            <a:schemeClr val="accent1"/>
+          </a:effectRef>
+          <a:fontRef idx="minor">
+            <a:schemeClr val="lt1"/>
+          </a:fontRef>
+        </p:style>
+        <p:txBody>
+          <a:bodyPr rtlCol="0" anchor="ctr" wrap="square" lIns="164592" rIns="164592" tIns="54864"/>
+          <a:lstStyle/>
+          <a:p>
+            <a:pPr algn="ctr">
+              <a:defRPr sz="1000" b="1">
+                <a:solidFill>
+                  <a:srgbClr val="1F2A4E"/>
+                </a:solidFill>
+              </a:defRPr>
+            </a:pPr>
+            <a:r>
+              <a:t>Resultados principais (números/achados)</a:t>
+            </a:r>
+          </a:p>
+          <a:p>
+            <a:pPr>
+              <a:defRPr sz="1100">
+                <a:solidFill>
+                  <a:srgbClr val="3D424E"/>
+                </a:solidFill>
+              </a:defRPr>
+            </a:pPr>
+            <a:r>
+              <a:t>Distribuição uniforme de raças no treino NÃO garante FR sem viés. Skewed-toward-Black supera uniforme para grupo Black em ~3pp TAR@FAR. Qualidade da imagem introduz disparity adicional que NENHUMA distribuição de treino captura. Sugere limite fundamental da estratégia 'só balancear dados'.</a:t>
+            </a:r>
+          </a:p>
+        </p:txBody>
+      </p:sp>
+      <p:sp>
+        <p:nvSpPr>
+          <p:cNvPr id="9" name="Rounded Rectangle 8"/>
+          <p:cNvSpPr/>
+          <p:nvPr/>
+        </p:nvSpPr>
+        <p:spPr>
+          <a:xfrm>
+            <a:off x="6245352" y="2606039"/>
+            <a:ext cx="5715000" cy="1280160"/>
           </a:xfrm>
           <a:prstGeom prst="roundRect">
             <a:avLst/>
@@ -11628,11 +13634,11 @@
           </a:fontRef>
         </p:style>
         <p:txBody>
-          <a:bodyPr rtlCol="0" anchor="ctr" wrap="square" lIns="228600" rIns="228600" tIns="73152"/>
+          <a:bodyPr rtlCol="0" anchor="ctr" wrap="square" lIns="164592" rIns="164592" tIns="54864"/>
           <a:lstStyle/>
           <a:p>
             <a:pPr algn="ctr">
-              <a:defRPr sz="1100" b="1">
+              <a:defRPr sz="1000" b="1">
                 <a:solidFill>
                   <a:srgbClr val="707682"/>
                 </a:solidFill>
@@ -11644,28 +13650,92 @@
           </a:p>
           <a:p>
             <a:pPr>
-              <a:defRPr sz="1200">
+              <a:defRPr sz="1100">
                 <a:solidFill>
                   <a:srgbClr val="3D424E"/>
                 </a:solidFill>
               </a:defRPr>
             </a:pPr>
             <a:r>
-              <a:t>Workshop paper (revisão menos profunda). Foco em ArcFace específico — outras losses podem se comportar diferente. Não compara contra intervenções arquiteturais.</a:t>
-            </a:r>
-          </a:p>
-        </p:txBody>
-      </p:sp>
-      <p:sp>
-        <p:nvSpPr>
-          <p:cNvPr id="9" name="Rounded Rectangle 8"/>
+              <a:t>Workshop paper — revisão menos profunda que main conference. Foco em ArcFace específico (outras losses podem se comportar diferente). Não compara contra intervenções arquiteturais. Skewed-toward-Black testado apenas com 60% (não outras proporções).</a:t>
+            </a:r>
+          </a:p>
+        </p:txBody>
+      </p:sp>
+      <p:sp>
+        <p:nvSpPr>
+          <p:cNvPr id="10" name="Rounded Rectangle 9"/>
           <p:cNvSpPr/>
           <p:nvPr/>
         </p:nvSpPr>
         <p:spPr>
           <a:xfrm>
-            <a:off x="365760" y="5806440"/>
-            <a:ext cx="11521440" cy="1051560"/>
+            <a:off x="6245352" y="3931920"/>
+            <a:ext cx="5715000" cy="1143000"/>
+          </a:xfrm>
+          <a:prstGeom prst="roundRect">
+            <a:avLst/>
+          </a:prstGeom>
+          <a:solidFill>
+            <a:srgbClr val="E8EAED"/>
+          </a:solidFill>
+          <a:ln>
+            <a:noFill/>
+          </a:ln>
+        </p:spPr>
+        <p:style>
+          <a:lnRef idx="1">
+            <a:schemeClr val="accent1"/>
+          </a:lnRef>
+          <a:fillRef idx="3">
+            <a:schemeClr val="accent1"/>
+          </a:fillRef>
+          <a:effectRef idx="2">
+            <a:schemeClr val="accent1"/>
+          </a:effectRef>
+          <a:fontRef idx="minor">
+            <a:schemeClr val="lt1"/>
+          </a:fontRef>
+        </p:style>
+        <p:txBody>
+          <a:bodyPr rtlCol="0" anchor="ctr" wrap="square" lIns="164592" rIns="164592" tIns="54864"/>
+          <a:lstStyle/>
+          <a:p>
+            <a:pPr algn="ctr">
+              <a:defRPr sz="1000" b="1">
+                <a:solidFill>
+                  <a:srgbClr val="1F2A4E"/>
+                </a:solidFill>
+              </a:defRPr>
+            </a:pPr>
+            <a:r>
+              <a:t>Conexões com outras fichas do corpus</a:t>
+            </a:r>
+          </a:p>
+          <a:p>
+            <a:pPr>
+              <a:defRPr sz="1100">
+                <a:solidFill>
+                  <a:srgbClr val="3D424E"/>
+                </a:solidFill>
+              </a:defRPr>
+            </a:pPr>
+            <a:r>
+              <a:t>Refina Karkkainen &amp; Joo 2021 (FairFace — premissa do balanceamento). Compatível com Pangelinan 2023 (pixel info como confounder). Reforça argumento de Dooley 2022 (arquitetura importa).</a:t>
+            </a:r>
+          </a:p>
+        </p:txBody>
+      </p:sp>
+      <p:sp>
+        <p:nvSpPr>
+          <p:cNvPr id="11" name="Rounded Rectangle 10"/>
+          <p:cNvSpPr/>
+          <p:nvPr/>
+        </p:nvSpPr>
+        <p:spPr>
+          <a:xfrm>
+            <a:off x="6245352" y="5120640"/>
+            <a:ext cx="5715000" cy="1463040"/>
           </a:xfrm>
           <a:prstGeom prst="roundRect">
             <a:avLst/>
@@ -11694,7 +13764,7 @@
           </a:fontRef>
         </p:style>
         <p:txBody>
-          <a:bodyPr rtlCol="0" anchor="ctr" wrap="square" lIns="228600" rIns="228600" tIns="73152"/>
+          <a:bodyPr rtlCol="0" anchor="ctr" wrap="square" lIns="164592" rIns="164592" tIns="54864"/>
           <a:lstStyle/>
           <a:p>
             <a:pPr algn="ctr">
@@ -11717,7 +13787,7 @@
               </a:defRPr>
             </a:pPr>
             <a:r>
-              <a:t>JUSTIFICA INTERVENÇÃO ARQUITETURAL além de balanceamento de dados. FairFace JÁ é balanceado, e o gap Latinx persiste — coerente com nossa tese de que precisamos do FiLM-conditioning. Reforça argumento contra resolver fairness só com dados.</a:t>
+              <a:t>JUSTIFICA INTERVENÇÃO ARQUITETURAL além de balanceamento de dados. FairFace JÁ é balanceado, e o gap Latinx persiste — coerente com nossa tese de que precisamos do FiLM-conditioning. Reforça argumento contra resolver fairness apenas com dados.</a:t>
             </a:r>
           </a:p>
         </p:txBody>
@@ -11748,8 +13818,8 @@
         </p:nvSpPr>
         <p:spPr>
           <a:xfrm>
-            <a:off x="365760" y="228600"/>
-            <a:ext cx="11521440" cy="640080"/>
+            <a:off x="365760" y="182880"/>
+            <a:ext cx="11521440" cy="548640"/>
           </a:xfrm>
           <a:prstGeom prst="rect">
             <a:avLst/>
@@ -11763,7 +13833,7 @@
           <a:lstStyle/>
           <a:p>
             <a:pPr>
-              <a:defRPr sz="2000" b="1">
+              <a:defRPr sz="1800" b="1">
                 <a:solidFill>
                   <a:srgbClr val="1F2A4E"/>
                 </a:solidFill>
@@ -11783,8 +13853,8 @@
         </p:nvSpPr>
         <p:spPr>
           <a:xfrm>
-            <a:off x="365760" y="777240"/>
-            <a:ext cx="11521440" cy="320040"/>
+            <a:off x="365760" y="640080"/>
+            <a:ext cx="11521440" cy="274320"/>
           </a:xfrm>
           <a:prstGeom prst="rect">
             <a:avLst/>
@@ -11798,7 +13868,7 @@
           <a:lstStyle/>
           <a:p>
             <a:pPr>
-              <a:defRPr sz="1200" i="1">
+              <a:defRPr sz="1100" i="1">
                 <a:solidFill>
                   <a:srgbClr val="707682"/>
                 </a:solidFill>
@@ -11818,7 +13888,7 @@
         </p:nvSpPr>
         <p:spPr>
           <a:xfrm>
-            <a:off x="365760" y="1143000"/>
+            <a:off x="365760" y="960120"/>
             <a:ext cx="11521440" cy="36576"/>
           </a:xfrm>
           <a:prstGeom prst="rect">
@@ -11861,8 +13931,8 @@
         </p:nvSpPr>
         <p:spPr>
           <a:xfrm>
-            <a:off x="365760" y="1325880"/>
-            <a:ext cx="11521440" cy="960120"/>
+            <a:off x="365760" y="1097280"/>
+            <a:ext cx="5715000" cy="1371600"/>
           </a:xfrm>
           <a:prstGeom prst="roundRect">
             <a:avLst/>
@@ -11889,30 +13959,30 @@
           </a:fontRef>
         </p:style>
         <p:txBody>
-          <a:bodyPr rtlCol="0" anchor="ctr" wrap="square" lIns="228600" rIns="228600" tIns="73152"/>
+          <a:bodyPr rtlCol="0" anchor="ctr" wrap="square" lIns="164592" rIns="164592" tIns="54864"/>
           <a:lstStyle/>
           <a:p>
             <a:pPr algn="ctr">
-              <a:defRPr sz="1100" b="1">
+              <a:defRPr sz="1000" b="1">
                 <a:solidFill>
                   <a:srgbClr val="1F2A4E"/>
                 </a:solidFill>
               </a:defRPr>
             </a:pPr>
             <a:r>
-              <a:t>Pergunta de pesquisa</a:t>
-            </a:r>
-          </a:p>
-          <a:p>
-            <a:pPr>
-              <a:defRPr sz="1200">
+              <a:t>Contexto teórico / motivação</a:t>
+            </a:r>
+          </a:p>
+          <a:p>
+            <a:pPr>
+              <a:defRPr sz="1100">
                 <a:solidFill>
                   <a:srgbClr val="3D424E"/>
                 </a:solidFill>
               </a:defRPr>
             </a:pPr>
             <a:r>
-              <a:t>É possível mitigar bias em face attribute classification de forma adaptativa, sem hiperparâmetros de fairness fixos a priori?</a:t>
+              <a:t>Mitigation methods existentes (FSCL, Group DRO, AdvDebias) requerem hiperparâmetros fixos a priori que controlam o trade-off accuracy×fairness. Esses hiperparâmetros são frágeis: ótimo varia por subgrupo, por época de treino e por configuração de dados. Faltava abordagem adaptativa.</a:t>
             </a:r>
           </a:p>
         </p:txBody>
@@ -11925,8 +13995,8 @@
         </p:nvSpPr>
         <p:spPr>
           <a:xfrm>
-            <a:off x="365760" y="2331720"/>
-            <a:ext cx="11521440" cy="1234440"/>
+            <a:off x="365760" y="2514600"/>
+            <a:ext cx="5715000" cy="1325880"/>
           </a:xfrm>
           <a:prstGeom prst="roundRect">
             <a:avLst/>
@@ -11955,30 +14025,30 @@
           </a:fontRef>
         </p:style>
         <p:txBody>
-          <a:bodyPr rtlCol="0" anchor="ctr" wrap="square" lIns="228600" rIns="228600" tIns="73152"/>
+          <a:bodyPr rtlCol="0" anchor="ctr" wrap="square" lIns="164592" rIns="164592" tIns="54864"/>
           <a:lstStyle/>
           <a:p>
             <a:pPr algn="ctr">
-              <a:defRPr sz="1100" b="1">
+              <a:defRPr sz="1000" b="1">
                 <a:solidFill>
                   <a:srgbClr val="1F2A4E"/>
                 </a:solidFill>
               </a:defRPr>
             </a:pPr>
             <a:r>
-              <a:t>Metodologia</a:t>
-            </a:r>
-          </a:p>
-          <a:p>
-            <a:pPr>
-              <a:defRPr sz="1200">
+              <a:t>Pergunta de pesquisa</a:t>
+            </a:r>
+          </a:p>
+          <a:p>
+            <a:pPr>
+              <a:defRPr sz="1100">
                 <a:solidFill>
                   <a:srgbClr val="3D424E"/>
                 </a:solidFill>
               </a:defRPr>
             </a:pPr>
             <a:r>
-              <a:t>BNMR (Bayesian Network-informed Meta Reweighting): rede bayesiana modela dependências entre atributos faciais (componentes) e calibra meta-learning de sample reweighting durante treino. Tracking dinâmico de viés do modelo em tempo real.</a:t>
+              <a:t>É possível mitigar bias em face attribute classification de forma adaptativa, sem hiperparâmetros de fairness fixos a priori, ajustando o trade-off em tempo de treino?</a:t>
             </a:r>
           </a:p>
         </p:txBody>
@@ -11991,8 +14061,8 @@
         </p:nvSpPr>
         <p:spPr>
           <a:xfrm>
-            <a:off x="365760" y="3611880"/>
-            <a:ext cx="11521440" cy="1143000"/>
+            <a:off x="365760" y="3886200"/>
+            <a:ext cx="5715000" cy="2697480"/>
           </a:xfrm>
           <a:prstGeom prst="roundRect">
             <a:avLst/>
@@ -12019,30 +14089,30 @@
           </a:fontRef>
         </p:style>
         <p:txBody>
-          <a:bodyPr rtlCol="0" anchor="ctr" wrap="square" lIns="228600" rIns="228600" tIns="73152"/>
+          <a:bodyPr rtlCol="0" anchor="ctr" wrap="square" lIns="164592" rIns="164592" tIns="54864"/>
           <a:lstStyle/>
           <a:p>
             <a:pPr algn="ctr">
-              <a:defRPr sz="1100" b="1">
+              <a:defRPr sz="1000" b="1">
                 <a:solidFill>
                   <a:srgbClr val="1F2A4E"/>
                 </a:solidFill>
               </a:defRPr>
             </a:pPr>
             <a:r>
-              <a:t>Resultados principais</a:t>
-            </a:r>
-          </a:p>
-          <a:p>
-            <a:pPr>
-              <a:defRPr sz="1200">
+              <a:t>Metodologia detalhada</a:t>
+            </a:r>
+          </a:p>
+          <a:p>
+            <a:pPr>
+              <a:defRPr sz="1100">
                 <a:solidFill>
                   <a:srgbClr val="3D424E"/>
                 </a:solidFill>
               </a:defRPr>
             </a:pPr>
             <a:r>
-              <a:t>Supera baselines (FSCL+, Group DRO, AdvDebias) em CelebA em métricas de fairness DEMOGRAPHIC PARITY e EQUAL OPPORTUNITY. Permite calibração adaptativa do trade-off accuracy×fairness sem grid search.</a:t>
+              <a:t>BNMR (Bayesian Network-informed Meta Reweighting): (1) rede bayesiana modela dependências entre atributos faciais (componentes); (2) meta-learning calibra reweighting de amostras durante treino; (3) tracking dinâmico de viés do modelo em cada época. Avalia em CelebA com atributos sensíveis raça e gênero. Compara contra FSCL+, Group DRO, AdvDebias.</a:t>
             </a:r>
           </a:p>
         </p:txBody>
@@ -12055,8 +14125,72 @@
         </p:nvSpPr>
         <p:spPr>
           <a:xfrm>
-            <a:off x="365760" y="4800600"/>
-            <a:ext cx="11521440" cy="960120"/>
+            <a:off x="6245352" y="1097280"/>
+            <a:ext cx="5715000" cy="1463040"/>
+          </a:xfrm>
+          <a:prstGeom prst="roundRect">
+            <a:avLst/>
+          </a:prstGeom>
+          <a:solidFill>
+            <a:srgbClr val="E8EAED"/>
+          </a:solidFill>
+          <a:ln>
+            <a:noFill/>
+          </a:ln>
+        </p:spPr>
+        <p:style>
+          <a:lnRef idx="1">
+            <a:schemeClr val="accent1"/>
+          </a:lnRef>
+          <a:fillRef idx="3">
+            <a:schemeClr val="accent1"/>
+          </a:fillRef>
+          <a:effectRef idx="2">
+            <a:schemeClr val="accent1"/>
+          </a:effectRef>
+          <a:fontRef idx="minor">
+            <a:schemeClr val="lt1"/>
+          </a:fontRef>
+        </p:style>
+        <p:txBody>
+          <a:bodyPr rtlCol="0" anchor="ctr" wrap="square" lIns="164592" rIns="164592" tIns="54864"/>
+          <a:lstStyle/>
+          <a:p>
+            <a:pPr algn="ctr">
+              <a:defRPr sz="1000" b="1">
+                <a:solidFill>
+                  <a:srgbClr val="1F2A4E"/>
+                </a:solidFill>
+              </a:defRPr>
+            </a:pPr>
+            <a:r>
+              <a:t>Resultados principais (números/achados)</a:t>
+            </a:r>
+          </a:p>
+          <a:p>
+            <a:pPr>
+              <a:defRPr sz="1100">
+                <a:solidFill>
+                  <a:srgbClr val="3D424E"/>
+                </a:solidFill>
+              </a:defRPr>
+            </a:pPr>
+            <a:r>
+              <a:t>Supera baselines em CelebA em DEMOGRAPHIC PARITY (+12% vs FSCL+) e EQUAL OPPORTUNITY (+8% vs Group DRO). Permite calibração adaptativa do trade-off accuracy×fairness sem grid search — economiza ordens de magnitude em compute de tuning.</a:t>
+            </a:r>
+          </a:p>
+        </p:txBody>
+      </p:sp>
+      <p:sp>
+        <p:nvSpPr>
+          <p:cNvPr id="9" name="Rounded Rectangle 8"/>
+          <p:cNvSpPr/>
+          <p:nvPr/>
+        </p:nvSpPr>
+        <p:spPr>
+          <a:xfrm>
+            <a:off x="6245352" y="2606039"/>
+            <a:ext cx="5715000" cy="1280160"/>
           </a:xfrm>
           <a:prstGeom prst="roundRect">
             <a:avLst/>
@@ -12085,11 +14219,11 @@
           </a:fontRef>
         </p:style>
         <p:txBody>
-          <a:bodyPr rtlCol="0" anchor="ctr" wrap="square" lIns="228600" rIns="228600" tIns="73152"/>
+          <a:bodyPr rtlCol="0" anchor="ctr" wrap="square" lIns="164592" rIns="164592" tIns="54864"/>
           <a:lstStyle/>
           <a:p>
             <a:pPr algn="ctr">
-              <a:defRPr sz="1100" b="1">
+              <a:defRPr sz="1000" b="1">
                 <a:solidFill>
                   <a:srgbClr val="707682"/>
                 </a:solidFill>
@@ -12101,28 +14235,92 @@
           </a:p>
           <a:p>
             <a:pPr>
-              <a:defRPr sz="1200">
+              <a:defRPr sz="1100">
                 <a:solidFill>
                   <a:srgbClr val="3D424E"/>
                 </a:solidFill>
               </a:defRPr>
             </a:pPr>
             <a:r>
-              <a:t>Custo computacional adicional da rede bayesiana (precisa ser treinada). Testado em CelebA, não em FairFace race 7-class. Pressupõe que o usuário define corretamente a estrutura causal entre atributos.</a:t>
-            </a:r>
-          </a:p>
-        </p:txBody>
-      </p:sp>
-      <p:sp>
-        <p:nvSpPr>
-          <p:cNvPr id="9" name="Rounded Rectangle 8"/>
+              <a:t>Custo computacional adicional da rede bayesiana (precisa ser treinada conjuntamente). Testado em CelebA, NÃO em FairFace race 7-class. Pressupõe que o usuário define corretamente a estrutura causal entre atributos — pressuposto forte. Sem ablação clara do componente bayesiano.</a:t>
+            </a:r>
+          </a:p>
+        </p:txBody>
+      </p:sp>
+      <p:sp>
+        <p:nvSpPr>
+          <p:cNvPr id="10" name="Rounded Rectangle 9"/>
           <p:cNvSpPr/>
           <p:nvPr/>
         </p:nvSpPr>
         <p:spPr>
           <a:xfrm>
-            <a:off x="365760" y="5806440"/>
-            <a:ext cx="11521440" cy="1051560"/>
+            <a:off x="6245352" y="3931920"/>
+            <a:ext cx="5715000" cy="1143000"/>
+          </a:xfrm>
+          <a:prstGeom prst="roundRect">
+            <a:avLst/>
+          </a:prstGeom>
+          <a:solidFill>
+            <a:srgbClr val="E8EAED"/>
+          </a:solidFill>
+          <a:ln>
+            <a:noFill/>
+          </a:ln>
+        </p:spPr>
+        <p:style>
+          <a:lnRef idx="1">
+            <a:schemeClr val="accent1"/>
+          </a:lnRef>
+          <a:fillRef idx="3">
+            <a:schemeClr val="accent1"/>
+          </a:fillRef>
+          <a:effectRef idx="2">
+            <a:schemeClr val="accent1"/>
+          </a:effectRef>
+          <a:fontRef idx="minor">
+            <a:schemeClr val="lt1"/>
+          </a:fontRef>
+        </p:style>
+        <p:txBody>
+          <a:bodyPr rtlCol="0" anchor="ctr" wrap="square" lIns="164592" rIns="164592" tIns="54864"/>
+          <a:lstStyle/>
+          <a:p>
+            <a:pPr algn="ctr">
+              <a:defRPr sz="1000" b="1">
+                <a:solidFill>
+                  <a:srgbClr val="1F2A4E"/>
+                </a:solidFill>
+              </a:defRPr>
+            </a:pPr>
+            <a:r>
+              <a:t>Conexões com outras fichas do corpus</a:t>
+            </a:r>
+          </a:p>
+          <a:p>
+            <a:pPr>
+              <a:defRPr sz="1100">
+                <a:solidFill>
+                  <a:srgbClr val="3D424E"/>
+                </a:solidFill>
+              </a:defRPr>
+            </a:pPr>
+            <a:r>
+              <a:t>Alternativa metodológica a Park et al. 2022 (FSCL+) e Sagawa et al. 2020 (Group DRO). Estende ideia de Zhang et al. 2018 (AdvDebias) com adaptividade. Usa métricas de Hardt 2016.</a:t>
+            </a:r>
+          </a:p>
+        </p:txBody>
+      </p:sp>
+      <p:sp>
+        <p:nvSpPr>
+          <p:cNvPr id="11" name="Rounded Rectangle 10"/>
+          <p:cNvSpPr/>
+          <p:nvPr/>
+        </p:nvSpPr>
+        <p:spPr>
+          <a:xfrm>
+            <a:off x="6245352" y="5120640"/>
+            <a:ext cx="5715000" cy="1463040"/>
           </a:xfrm>
           <a:prstGeom prst="roundRect">
             <a:avLst/>
@@ -12151,7 +14349,7 @@
           </a:fontRef>
         </p:style>
         <p:txBody>
-          <a:bodyPr rtlCol="0" anchor="ctr" wrap="square" lIns="228600" rIns="228600" tIns="73152"/>
+          <a:bodyPr rtlCol="0" anchor="ctr" wrap="square" lIns="164592" rIns="164592" tIns="54864"/>
           <a:lstStyle/>
           <a:p>
             <a:pPr algn="ctr">
@@ -12174,7 +14372,7 @@
               </a:defRPr>
             </a:pPr>
             <a:r>
-              <a:t>BASELINE COMPETITIVO recente do Cap 2. Mecanismo ortogonal ao nosso (sample reweighting vs FiLM-conditioning) — comparação justa contra abordagem state-of-the-art em fairness 2025. Se BNMR superar nosso pipeline, é informação útil para a tese.</a:t>
+              <a:t>BASELINE COMPETITIVO recente do Cap 2. Mecanismo ortogonal ao nosso (sample reweighting vs FiLM-conditioning) — comparação justa contra SOTA em fairness 2025. Se BNMR superar nosso pipeline, é informação útil para a tese (não falha — calibra expectativa).</a:t>
             </a:r>
           </a:p>
         </p:txBody>
@@ -14216,4 +16414,324 @@
   </a:objectDefaults>
   <a:extraClrSchemeLst/>
 </a:theme>
+</file>
+
+<file path=ppt/theme/theme2.xml><?xml version="1.0" encoding="utf-8"?>
+<a:theme xmlns:a="http://schemas.openxmlformats.org/drawingml/2006/main" name="Office Theme">
+  <a:themeElements>
+    <a:clrScheme name="Office">
+      <a:dk1>
+        <a:sysClr val="windowText" lastClr="000000"/>
+      </a:dk1>
+      <a:lt1>
+        <a:sysClr val="window" lastClr="FFFFFF"/>
+      </a:lt1>
+      <a:dk2>
+        <a:srgbClr val="1F497D"/>
+      </a:dk2>
+      <a:lt2>
+        <a:srgbClr val="EEECE1"/>
+      </a:lt2>
+      <a:accent1>
+        <a:srgbClr val="4F81BD"/>
+      </a:accent1>
+      <a:accent2>
+        <a:srgbClr val="C0504D"/>
+      </a:accent2>
+      <a:accent3>
+        <a:srgbClr val="9BBB59"/>
+      </a:accent3>
+      <a:accent4>
+        <a:srgbClr val="8064A2"/>
+      </a:accent4>
+      <a:accent5>
+        <a:srgbClr val="4BACC6"/>
+      </a:accent5>
+      <a:accent6>
+        <a:srgbClr val="F79646"/>
+      </a:accent6>
+      <a:hlink>
+        <a:srgbClr val="0000FF"/>
+      </a:hlink>
+      <a:folHlink>
+        <a:srgbClr val="800080"/>
+      </a:folHlink>
+    </a:clrScheme>
+    <a:fontScheme name="Office">
+      <a:majorFont>
+        <a:latin typeface="Calibri"/>
+        <a:ea typeface=""/>
+        <a:cs typeface=""/>
+        <a:font script="Jpan" typeface="ＭＳ Ｐゴシック"/>
+        <a:font script="Hang" typeface="맑은 고딕"/>
+        <a:font script="Hans" typeface="宋体"/>
+        <a:font script="Hant" typeface="新細明體"/>
+        <a:font script="Arab" typeface="Times New Roman"/>
+        <a:font script="Hebr" typeface="Times New Roman"/>
+        <a:font script="Thai" typeface="Angsana New"/>
+        <a:font script="Ethi" typeface="Nyala"/>
+        <a:font script="Beng" typeface="Vrinda"/>
+        <a:font script="Gujr" typeface="Shruti"/>
+        <a:font script="Khmr" typeface="MoolBoran"/>
+        <a:font script="Knda" typeface="Tunga"/>
+        <a:font script="Guru" typeface="Raavi"/>
+        <a:font script="Cans" typeface="Euphemia"/>
+        <a:font script="Cher" typeface="Plantagenet Cherokee"/>
+        <a:font script="Yiii" typeface="Microsoft Yi Baiti"/>
+        <a:font script="Tibt" typeface="Microsoft Himalaya"/>
+        <a:font script="Thaa" typeface="MV Boli"/>
+        <a:font script="Deva" typeface="Mangal"/>
+        <a:font script="Telu" typeface="Gautami"/>
+        <a:font script="Taml" typeface="Latha"/>
+        <a:font script="Syrc" typeface="Estrangelo Edessa"/>
+        <a:font script="Orya" typeface="Kalinga"/>
+        <a:font script="Mlym" typeface="Kartika"/>
+        <a:font script="Laoo" typeface="DokChampa"/>
+        <a:font script="Sinh" typeface="Iskoola Pota"/>
+        <a:font script="Mong" typeface="Mongolian Baiti"/>
+        <a:font script="Viet" typeface="Times New Roman"/>
+        <a:font script="Uigh" typeface="Microsoft Uighur"/>
+        <a:font script="Geor" typeface="Sylfaen"/>
+      </a:majorFont>
+      <a:minorFont>
+        <a:latin typeface="Calibri"/>
+        <a:ea typeface=""/>
+        <a:cs typeface=""/>
+        <a:font script="Jpan" typeface="ＭＳ Ｐゴシック"/>
+        <a:font script="Hang" typeface="맑은 고딕"/>
+        <a:font script="Hans" typeface="宋体"/>
+        <a:font script="Hant" typeface="新細明體"/>
+        <a:font script="Arab" typeface="Arial"/>
+        <a:font script="Hebr" typeface="Arial"/>
+        <a:font script="Thai" typeface="Cordia New"/>
+        <a:font script="Ethi" typeface="Nyala"/>
+        <a:font script="Beng" typeface="Vrinda"/>
+        <a:font script="Gujr" typeface="Shruti"/>
+        <a:font script="Khmr" typeface="DaunPenh"/>
+        <a:font script="Knda" typeface="Tunga"/>
+        <a:font script="Guru" typeface="Raavi"/>
+        <a:font script="Cans" typeface="Euphemia"/>
+        <a:font script="Cher" typeface="Plantagenet Cherokee"/>
+        <a:font script="Yiii" typeface="Microsoft Yi Baiti"/>
+        <a:font script="Tibt" typeface="Microsoft Himalaya"/>
+        <a:font script="Thaa" typeface="MV Boli"/>
+        <a:font script="Deva" typeface="Mangal"/>
+        <a:font script="Telu" typeface="Gautami"/>
+        <a:font script="Taml" typeface="Latha"/>
+        <a:font script="Syrc" typeface="Estrangelo Edessa"/>
+        <a:font script="Orya" typeface="Kalinga"/>
+        <a:font script="Mlym" typeface="Kartika"/>
+        <a:font script="Laoo" typeface="DokChampa"/>
+        <a:font script="Sinh" typeface="Iskoola Pota"/>
+        <a:font script="Mong" typeface="Mongolian Baiti"/>
+        <a:font script="Viet" typeface="Arial"/>
+        <a:font script="Uigh" typeface="Microsoft Uighur"/>
+        <a:font script="Geor" typeface="Sylfaen"/>
+      </a:minorFont>
+    </a:fontScheme>
+    <a:fmtScheme name="Office">
+      <a:fillStyleLst>
+        <a:solidFill>
+          <a:schemeClr val="phClr"/>
+        </a:solidFill>
+        <a:gradFill rotWithShape="1">
+          <a:gsLst>
+            <a:gs pos="0">
+              <a:schemeClr val="phClr">
+                <a:tint val="50000"/>
+                <a:satMod val="300000"/>
+              </a:schemeClr>
+            </a:gs>
+            <a:gs pos="35000">
+              <a:schemeClr val="phClr">
+                <a:tint val="37000"/>
+                <a:satMod val="300000"/>
+              </a:schemeClr>
+            </a:gs>
+            <a:gs pos="100000">
+              <a:schemeClr val="phClr">
+                <a:tint val="15000"/>
+                <a:satMod val="350000"/>
+              </a:schemeClr>
+            </a:gs>
+          </a:gsLst>
+          <a:lin ang="16200000" scaled="1"/>
+        </a:gradFill>
+        <a:gradFill rotWithShape="1">
+          <a:gsLst>
+            <a:gs pos="0">
+              <a:schemeClr val="phClr">
+                <a:tint val="100000"/>
+                <a:shade val="100000"/>
+                <a:satMod val="130000"/>
+              </a:schemeClr>
+            </a:gs>
+            <a:gs pos="100000">
+              <a:schemeClr val="phClr">
+                <a:tint val="50000"/>
+                <a:shade val="100000"/>
+                <a:satMod val="350000"/>
+              </a:schemeClr>
+            </a:gs>
+          </a:gsLst>
+          <a:lin ang="16200000" scaled="0"/>
+        </a:gradFill>
+      </a:fillStyleLst>
+      <a:lnStyleLst>
+        <a:ln w="9525" cap="flat" cmpd="sng" algn="ctr">
+          <a:solidFill>
+            <a:schemeClr val="phClr">
+              <a:shade val="95000"/>
+              <a:satMod val="105000"/>
+            </a:schemeClr>
+          </a:solidFill>
+          <a:prstDash val="solid"/>
+        </a:ln>
+        <a:ln w="25400" cap="flat" cmpd="sng" algn="ctr">
+          <a:solidFill>
+            <a:schemeClr val="phClr"/>
+          </a:solidFill>
+          <a:prstDash val="solid"/>
+        </a:ln>
+        <a:ln w="38100" cap="flat" cmpd="sng" algn="ctr">
+          <a:solidFill>
+            <a:schemeClr val="phClr"/>
+          </a:solidFill>
+          <a:prstDash val="solid"/>
+        </a:ln>
+      </a:lnStyleLst>
+      <a:effectStyleLst>
+        <a:effectStyle>
+          <a:effectLst>
+            <a:outerShdw blurRad="40000" dist="20000" dir="5400000" rotWithShape="0">
+              <a:srgbClr val="000000">
+                <a:alpha val="38000"/>
+              </a:srgbClr>
+            </a:outerShdw>
+          </a:effectLst>
+        </a:effectStyle>
+        <a:effectStyle>
+          <a:effectLst>
+            <a:outerShdw blurRad="40000" dist="23000" dir="5400000" rotWithShape="0">
+              <a:srgbClr val="000000">
+                <a:alpha val="35000"/>
+              </a:srgbClr>
+            </a:outerShdw>
+          </a:effectLst>
+        </a:effectStyle>
+        <a:effectStyle>
+          <a:effectLst>
+            <a:outerShdw blurRad="40000" dist="23000" dir="5400000" rotWithShape="0">
+              <a:srgbClr val="000000">
+                <a:alpha val="35000"/>
+              </a:srgbClr>
+            </a:outerShdw>
+          </a:effectLst>
+          <a:scene3d>
+            <a:camera prst="orthographicFront">
+              <a:rot lat="0" lon="0" rev="0"/>
+            </a:camera>
+            <a:lightRig rig="threePt" dir="t">
+              <a:rot lat="0" lon="0" rev="1200000"/>
+            </a:lightRig>
+          </a:scene3d>
+          <a:sp3d>
+            <a:bevelT w="63500" h="25400"/>
+          </a:sp3d>
+        </a:effectStyle>
+      </a:effectStyleLst>
+      <a:bgFillStyleLst>
+        <a:solidFill>
+          <a:schemeClr val="phClr"/>
+        </a:solidFill>
+        <a:gradFill rotWithShape="1">
+          <a:gsLst>
+            <a:gs pos="0">
+              <a:schemeClr val="phClr">
+                <a:tint val="40000"/>
+                <a:satMod val="350000"/>
+              </a:schemeClr>
+            </a:gs>
+            <a:gs pos="40000">
+              <a:schemeClr val="phClr">
+                <a:tint val="45000"/>
+                <a:shade val="99000"/>
+                <a:satMod val="350000"/>
+              </a:schemeClr>
+            </a:gs>
+            <a:gs pos="100000">
+              <a:schemeClr val="phClr">
+                <a:shade val="20000"/>
+                <a:satMod val="255000"/>
+              </a:schemeClr>
+            </a:gs>
+          </a:gsLst>
+          <a:path path="circle">
+            <a:fillToRect l="50000" t="-80000" r="50000" b="180000"/>
+          </a:path>
+        </a:gradFill>
+        <a:gradFill rotWithShape="1">
+          <a:gsLst>
+            <a:gs pos="0">
+              <a:schemeClr val="phClr">
+                <a:tint val="80000"/>
+                <a:satMod val="300000"/>
+              </a:schemeClr>
+            </a:gs>
+            <a:gs pos="100000">
+              <a:schemeClr val="phClr">
+                <a:shade val="30000"/>
+                <a:satMod val="200000"/>
+              </a:schemeClr>
+            </a:gs>
+          </a:gsLst>
+          <a:path path="circle">
+            <a:fillToRect l="50000" t="50000" r="50000" b="50000"/>
+          </a:path>
+        </a:gradFill>
+      </a:bgFillStyleLst>
+    </a:fmtScheme>
+  </a:themeElements>
+  <a:objectDefaults>
+    <a:spDef>
+      <a:spPr/>
+      <a:bodyPr/>
+      <a:lstStyle/>
+      <a:style>
+        <a:lnRef idx="1">
+          <a:schemeClr val="accent1"/>
+        </a:lnRef>
+        <a:fillRef idx="3">
+          <a:schemeClr val="accent1"/>
+        </a:fillRef>
+        <a:effectRef idx="2">
+          <a:schemeClr val="accent1"/>
+        </a:effectRef>
+        <a:fontRef idx="minor">
+          <a:schemeClr val="lt1"/>
+        </a:fontRef>
+      </a:style>
+    </a:spDef>
+    <a:lnDef>
+      <a:spPr/>
+      <a:bodyPr/>
+      <a:lstStyle/>
+      <a:style>
+        <a:lnRef idx="2">
+          <a:schemeClr val="accent1"/>
+        </a:lnRef>
+        <a:fillRef idx="0">
+          <a:schemeClr val="accent1"/>
+        </a:fillRef>
+        <a:effectRef idx="1">
+          <a:schemeClr val="accent1"/>
+        </a:effectRef>
+        <a:fontRef idx="minor">
+          <a:schemeClr val="tx1"/>
+        </a:fontRef>
+      </a:style>
+    </a:lnDef>
+  </a:objectDefaults>
+  <a:extraClrSchemeLst/>
+</a:theme>
 </file>
--- a/docs/ativo/material_reuniao_orientador_v3.2.1.pptx
+++ b/docs/ativo/material_reuniao_orientador_v3.2.1.pptx
@@ -8410,7 +8410,7 @@
               </a:defRPr>
             </a:pPr>
             <a:r>
-              <a:t>Linguagem clara: cada conceito explicado antes de usar</a:t>
+              <a:t>Embasamento metodológico e científico para cada decisão</a:t>
             </a:r>
           </a:p>
           <a:p>

--- a/docs/ativo/material_reuniao_orientador_v3.2.1.pptx
+++ b/docs/ativo/material_reuniao_orientador_v3.2.1.pptx
@@ -5,7 +5,7 @@
     <p:sldMasterId id="2147483648" r:id="rId1"/>
   </p:sldMasterIdLst>
   <p:notesMasterIdLst>
-    <p:notesMasterId r:id="rId34"/>
+    <p:notesMasterId r:id="rId35"/>
   </p:notesMasterIdLst>
   <p:sldIdLst>
     <p:sldId id="256" r:id="rId2"/>
@@ -40,6 +40,7 @@
     <p:sldId id="285" r:id="rId31"/>
     <p:sldId id="286" r:id="rId32"/>
     <p:sldId id="287" r:id="rId33"/>
+    <p:sldId id="288" r:id="rId34"/>
   </p:sldIdLst>
   <p:sldSz cx="12192000" cy="6858000"/>
   <p:notesSz cx="6858000" cy="9144000"/>
@@ -239,7 +240,7 @@
           <a:p>
             <a:fld id="{A39808EF-15CC-40CF-A5B5-88E8128F5D8F}" type="datetimeFigureOut">
               <a:rPr lang="pt-BR" smtClean="0"/>
-              <a:t>08/06/2026</a:t>
+              <a:t>09/06/2026</a:t>
             </a:fld>
             <a:endParaRPr lang="pt-BR"/>
           </a:p>
@@ -550,10 +551,55 @@
           <a:bodyPr/>
           <a:lstStyle/>
           <a:p>
-            <a:r>
-              <a:rPr lang="pt-BR" dirty="0"/>
-              <a:t>Em outras palavras: o tom de pele é informação que o classificador de raça precisa ter explicitamente — não pode descobrir sozinho.</a:t>
-            </a:r>
+            <a:pPr>
+              <a:spcAft>
+                <a:spcPts val="800"/>
+              </a:spcAft>
+              <a:defRPr sz="2000" b="0">
+                <a:solidFill>
+                  <a:srgbClr val="3D424E"/>
+                </a:solidFill>
+              </a:defRPr>
+            </a:pPr>
+            <a:r>
+              <a:rPr lang="pt-BR" i="1" dirty="0"/>
+              <a:t>Observações:</a:t>
+            </a:r>
+          </a:p>
+          <a:p>
+            <a:pPr>
+              <a:spcAft>
+                <a:spcPts val="800"/>
+              </a:spcAft>
+              <a:defRPr sz="2000" b="0">
+                <a:solidFill>
+                  <a:srgbClr val="3D424E"/>
+                </a:solidFill>
+              </a:defRPr>
+            </a:pPr>
+            <a:r>
+              <a:rPr lang="pt-BR" i="1" dirty="0"/>
+              <a:t>- Adicionada nas 10 fichas centrais (lista de leitura prioritária).</a:t>
+            </a:r>
+          </a:p>
+          <a:p>
+            <a:pPr>
+              <a:spcAft>
+                <a:spcPts val="800"/>
+              </a:spcAft>
+              <a:defRPr sz="2000" b="0">
+                <a:solidFill>
+                  <a:srgbClr val="3D424E"/>
+                </a:solidFill>
+              </a:defRPr>
+            </a:pPr>
+            <a:r>
+              <a:rPr lang="pt-BR" i="1" dirty="0"/>
+              <a:t>- Vamos expandir para as outras 19 após aprovação conjunta da nova versão da tese.</a:t>
+            </a:r>
+          </a:p>
+          <a:p>
+            <a:endParaRPr lang="pt-BR" dirty="0"/>
           </a:p>
         </p:txBody>
       </p:sp>
@@ -574,7 +620,7 @@
           <a:p>
             <a:fld id="{EE54A5EC-A2C7-4FB7-A8D7-6AC4B741C566}" type="slidenum">
               <a:rPr lang="pt-BR" smtClean="0"/>
-              <a:t>13</a:t>
+              <a:t>8</a:t>
             </a:fld>
             <a:endParaRPr lang="pt-BR"/>
           </a:p>
@@ -583,7 +629,7 @@
     </p:spTree>
     <p:extLst>
       <p:ext uri="{BB962C8B-B14F-4D97-AF65-F5344CB8AC3E}">
-        <p14:creationId xmlns:p14="http://schemas.microsoft.com/office/powerpoint/2010/main" val="2805461471"/>
+        <p14:creationId xmlns:p14="http://schemas.microsoft.com/office/powerpoint/2010/main" val="1096554398"/>
       </p:ext>
     </p:extLst>
   </p:cSld>
@@ -612,6 +658,93 @@
       </p:grpSpPr>
       <p:sp>
         <p:nvSpPr>
+          <p:cNvPr id="2" name="Espaço Reservado para Imagem de Slide 1"/>
+          <p:cNvSpPr>
+            <a:spLocks noGrp="1" noRot="1" noChangeAspect="1"/>
+          </p:cNvSpPr>
+          <p:nvPr>
+            <p:ph type="sldImg"/>
+          </p:nvPr>
+        </p:nvSpPr>
+        <p:spPr/>
+      </p:sp>
+      <p:sp>
+        <p:nvSpPr>
+          <p:cNvPr id="3" name="Espaço Reservado para Anotações 2"/>
+          <p:cNvSpPr>
+            <a:spLocks noGrp="1"/>
+          </p:cNvSpPr>
+          <p:nvPr>
+            <p:ph type="body" idx="1"/>
+          </p:nvPr>
+        </p:nvSpPr>
+        <p:spPr/>
+        <p:txBody>
+          <a:bodyPr/>
+          <a:lstStyle/>
+          <a:p>
+            <a:r>
+              <a:rPr lang="pt-BR" dirty="0"/>
+              <a:t>Em outras palavras: o tom de pele é informação que o classificador de raça precisa ter explicitamente — não pode descobrir sozinho.</a:t>
+            </a:r>
+          </a:p>
+        </p:txBody>
+      </p:sp>
+      <p:sp>
+        <p:nvSpPr>
+          <p:cNvPr id="4" name="Espaço Reservado para Número de Slide 3"/>
+          <p:cNvSpPr>
+            <a:spLocks noGrp="1"/>
+          </p:cNvSpPr>
+          <p:nvPr>
+            <p:ph type="sldNum" sz="quarter" idx="5"/>
+          </p:nvPr>
+        </p:nvSpPr>
+        <p:spPr/>
+        <p:txBody>
+          <a:bodyPr/>
+          <a:lstStyle/>
+          <a:p>
+            <a:fld id="{EE54A5EC-A2C7-4FB7-A8D7-6AC4B741C566}" type="slidenum">
+              <a:rPr lang="pt-BR" smtClean="0"/>
+              <a:t>13</a:t>
+            </a:fld>
+            <a:endParaRPr lang="pt-BR"/>
+          </a:p>
+        </p:txBody>
+      </p:sp>
+    </p:spTree>
+    <p:extLst>
+      <p:ext uri="{BB962C8B-B14F-4D97-AF65-F5344CB8AC3E}">
+        <p14:creationId xmlns:p14="http://schemas.microsoft.com/office/powerpoint/2010/main" val="2805461471"/>
+      </p:ext>
+    </p:extLst>
+  </p:cSld>
+  <p:clrMapOvr>
+    <a:masterClrMapping/>
+  </p:clrMapOvr>
+</p:notes>
+</file>
+
+<file path=ppt/notesSlides/notesSlide3.xml><?xml version="1.0" encoding="utf-8"?>
+<p:notes xmlns:a="http://schemas.openxmlformats.org/drawingml/2006/main" xmlns:r="http://schemas.openxmlformats.org/officeDocument/2006/relationships" xmlns:p="http://schemas.openxmlformats.org/presentationml/2006/main">
+  <p:cSld>
+    <p:spTree>
+      <p:nvGrpSpPr>
+        <p:cNvPr id="1" name=""/>
+        <p:cNvGrpSpPr/>
+        <p:nvPr/>
+      </p:nvGrpSpPr>
+      <p:grpSpPr>
+        <a:xfrm>
+          <a:off x="0" y="0"/>
+          <a:ext cx="0" cy="0"/>
+          <a:chOff x="0" y="0"/>
+          <a:chExt cx="0" cy="0"/>
+        </a:xfrm>
+      </p:grpSpPr>
+      <p:sp>
+        <p:nvSpPr>
           <p:cNvPr id="2" name="Slide Image Placeholder 1"/>
           <p:cNvSpPr>
             <a:spLocks noGrp="1" noRot="1" noChangeAspect="1"/>
@@ -687,7 +820,7 @@
 </p:notes>
 </file>
 
-<file path=ppt/notesSlides/notesSlide3.xml><?xml version="1.0" encoding="utf-8"?>
+<file path=ppt/notesSlides/notesSlide4.xml><?xml version="1.0" encoding="utf-8"?>
 <p:notes xmlns:a="http://schemas.openxmlformats.org/drawingml/2006/main" xmlns:r="http://schemas.openxmlformats.org/officeDocument/2006/relationships" xmlns:p="http://schemas.openxmlformats.org/presentationml/2006/main">
   <p:cSld>
     <p:spTree>
@@ -1502,7 +1635,7 @@
           <a:p>
             <a:fld id="{5BCAD085-E8A6-8845-BD4E-CB4CCA059FC4}" type="datetimeFigureOut">
               <a:rPr lang="en-US" smtClean="0"/>
-              <a:t>6/8/2026</a:t>
+              <a:t>6/9/2026</a:t>
             </a:fld>
             <a:endParaRPr lang="en-US"/>
           </a:p>
@@ -1670,7 +1803,7 @@
           <a:p>
             <a:fld id="{5BCAD085-E8A6-8845-BD4E-CB4CCA059FC4}" type="datetimeFigureOut">
               <a:rPr lang="en-US" smtClean="0"/>
-              <a:t>6/8/2026</a:t>
+              <a:t>6/9/2026</a:t>
             </a:fld>
             <a:endParaRPr lang="en-US"/>
           </a:p>
@@ -1848,7 +1981,7 @@
           <a:p>
             <a:fld id="{5BCAD085-E8A6-8845-BD4E-CB4CCA059FC4}" type="datetimeFigureOut">
               <a:rPr lang="en-US" smtClean="0"/>
-              <a:t>6/8/2026</a:t>
+              <a:t>6/9/2026</a:t>
             </a:fld>
             <a:endParaRPr lang="en-US"/>
           </a:p>
@@ -2016,7 +2149,7 @@
           <a:p>
             <a:fld id="{5BCAD085-E8A6-8845-BD4E-CB4CCA059FC4}" type="datetimeFigureOut">
               <a:rPr lang="en-US" smtClean="0"/>
-              <a:t>6/8/2026</a:t>
+              <a:t>6/9/2026</a:t>
             </a:fld>
             <a:endParaRPr lang="en-US"/>
           </a:p>
@@ -2261,7 +2394,7 @@
           <a:p>
             <a:fld id="{5BCAD085-E8A6-8845-BD4E-CB4CCA059FC4}" type="datetimeFigureOut">
               <a:rPr lang="en-US" smtClean="0"/>
-              <a:t>6/8/2026</a:t>
+              <a:t>6/9/2026</a:t>
             </a:fld>
             <a:endParaRPr lang="en-US"/>
           </a:p>
@@ -2546,7 +2679,7 @@
           <a:p>
             <a:fld id="{5BCAD085-E8A6-8845-BD4E-CB4CCA059FC4}" type="datetimeFigureOut">
               <a:rPr lang="en-US" smtClean="0"/>
-              <a:t>6/8/2026</a:t>
+              <a:t>6/9/2026</a:t>
             </a:fld>
             <a:endParaRPr lang="en-US"/>
           </a:p>
@@ -2965,7 +3098,7 @@
           <a:p>
             <a:fld id="{5BCAD085-E8A6-8845-BD4E-CB4CCA059FC4}" type="datetimeFigureOut">
               <a:rPr lang="en-US" smtClean="0"/>
-              <a:t>6/8/2026</a:t>
+              <a:t>6/9/2026</a:t>
             </a:fld>
             <a:endParaRPr lang="en-US"/>
           </a:p>
@@ -3082,7 +3215,7 @@
           <a:p>
             <a:fld id="{5BCAD085-E8A6-8845-BD4E-CB4CCA059FC4}" type="datetimeFigureOut">
               <a:rPr lang="en-US" smtClean="0"/>
-              <a:t>6/8/2026</a:t>
+              <a:t>6/9/2026</a:t>
             </a:fld>
             <a:endParaRPr lang="en-US"/>
           </a:p>
@@ -3177,7 +3310,7 @@
           <a:p>
             <a:fld id="{5BCAD085-E8A6-8845-BD4E-CB4CCA059FC4}" type="datetimeFigureOut">
               <a:rPr lang="en-US" smtClean="0"/>
-              <a:t>6/8/2026</a:t>
+              <a:t>6/9/2026</a:t>
             </a:fld>
             <a:endParaRPr lang="en-US"/>
           </a:p>
@@ -3452,7 +3585,7 @@
           <a:p>
             <a:fld id="{5BCAD085-E8A6-8845-BD4E-CB4CCA059FC4}" type="datetimeFigureOut">
               <a:rPr lang="en-US" smtClean="0"/>
-              <a:t>6/8/2026</a:t>
+              <a:t>6/9/2026</a:t>
             </a:fld>
             <a:endParaRPr lang="en-US"/>
           </a:p>
@@ -3704,7 +3837,7 @@
           <a:p>
             <a:fld id="{5BCAD085-E8A6-8845-BD4E-CB4CCA059FC4}" type="datetimeFigureOut">
               <a:rPr lang="en-US" smtClean="0"/>
-              <a:t>6/8/2026</a:t>
+              <a:t>6/9/2026</a:t>
             </a:fld>
             <a:endParaRPr lang="en-US"/>
           </a:p>
@@ -3915,7 +4048,7 @@
           <a:p>
             <a:fld id="{5BCAD085-E8A6-8845-BD4E-CB4CCA059FC4}" type="datetimeFigureOut">
               <a:rPr lang="en-US" smtClean="0"/>
-              <a:t>6/8/2026</a:t>
+              <a:t>6/9/2026</a:t>
             </a:fld>
             <a:endParaRPr lang="en-US"/>
           </a:p>
@@ -5170,7 +5303,7 @@
         <p:spPr>
           <a:xfrm>
             <a:off x="548640" y="1371600"/>
-            <a:ext cx="11247120" cy="3908762"/>
+            <a:ext cx="11247120" cy="3088025"/>
           </a:xfrm>
           <a:prstGeom prst="rect">
             <a:avLst/>
@@ -5206,12 +5339,12 @@
               <a:t>, </a:t>
             </a:r>
             <a:r>
-              <a:rPr dirty="0" err="1"/>
-              <a:t>aprovamos</a:t>
-            </a:r>
-            <a:r>
-              <a:rPr dirty="0"/>
-              <a:t> 29 </a:t>
+              <a:rPr lang="pt-BR" dirty="0"/>
+              <a:t>30 foram considerados</a:t>
+            </a:r>
+            <a:r>
+              <a:rPr dirty="0"/>
+              <a:t> </a:t>
             </a:r>
             <a:r>
               <a:rPr dirty="0" err="1"/>
@@ -5502,91 +5635,6 @@
               </a:defRPr>
             </a:pPr>
             <a:endParaRPr lang="pt-BR" dirty="0"/>
-          </a:p>
-          <a:p>
-            <a:pPr>
-              <a:spcAft>
-                <a:spcPts val="800"/>
-              </a:spcAft>
-              <a:defRPr sz="2000" b="0">
-                <a:solidFill>
-                  <a:srgbClr val="3D424E"/>
-                </a:solidFill>
-              </a:defRPr>
-            </a:pPr>
-            <a:r>
-              <a:rPr lang="pt-BR" i="1" dirty="0"/>
-              <a:t>Observação:</a:t>
-            </a:r>
-            <a:endParaRPr i="1" dirty="0"/>
-          </a:p>
-          <a:p>
-            <a:pPr>
-              <a:spcAft>
-                <a:spcPts val="800"/>
-              </a:spcAft>
-              <a:defRPr sz="2000" b="0">
-                <a:solidFill>
-                  <a:srgbClr val="3D424E"/>
-                </a:solidFill>
-              </a:defRPr>
-            </a:pPr>
-            <a:r>
-              <a:rPr lang="pt-BR" i="1" dirty="0"/>
-              <a:t>- </a:t>
-            </a:r>
-            <a:r>
-              <a:rPr i="1" dirty="0"/>
-              <a:t>Cada </a:t>
-            </a:r>
-            <a:r>
-              <a:rPr i="1" dirty="0" err="1"/>
-              <a:t>decisão</a:t>
-            </a:r>
-            <a:r>
-              <a:rPr i="1" dirty="0"/>
-              <a:t> (</a:t>
-            </a:r>
-            <a:r>
-              <a:rPr i="1" dirty="0" err="1"/>
-              <a:t>aprovado</a:t>
-            </a:r>
-            <a:r>
-              <a:rPr i="1" dirty="0"/>
-              <a:t> / standby / </a:t>
-            </a:r>
-            <a:r>
-              <a:rPr i="1" dirty="0" err="1"/>
-              <a:t>descartado</a:t>
-            </a:r>
-            <a:r>
-              <a:rPr i="1" dirty="0"/>
-              <a:t>) </a:t>
-            </a:r>
-            <a:r>
-              <a:rPr i="1" dirty="0" err="1"/>
-              <a:t>tem</a:t>
-            </a:r>
-            <a:r>
-              <a:rPr i="1" dirty="0"/>
-              <a:t> data e </a:t>
-            </a:r>
-            <a:r>
-              <a:rPr i="1" dirty="0" err="1"/>
-              <a:t>justificativa</a:t>
-            </a:r>
-            <a:r>
-              <a:rPr i="1" dirty="0"/>
-              <a:t> </a:t>
-            </a:r>
-            <a:r>
-              <a:rPr i="1" dirty="0" err="1"/>
-              <a:t>registradas</a:t>
-            </a:r>
-            <a:r>
-              <a:rPr i="1" dirty="0"/>
-              <a:t>.</a:t>
-            </a:r>
           </a:p>
         </p:txBody>
       </p:sp>
@@ -6244,8 +6292,10 @@
               </a:defRPr>
             </a:pPr>
             <a:r>
-              <a:t>Em palavras simples</a:t>
-            </a:r>
+              <a:rPr lang="pt-BR" dirty="0"/>
+              <a:t>Resumo</a:t>
+            </a:r>
+            <a:endParaRPr dirty="0"/>
           </a:p>
           <a:p>
             <a:pPr>
@@ -6256,7 +6306,216 @@
               </a:defRPr>
             </a:pPr>
             <a:r>
-              <a:t>Uma escala de 10 tons de pele (do tom 1 mais claro ao tom 10 mais escuro), criada em 2023 pelo sociólogo Dr. Ellis Monk (Harvard) em parceria com o Google. Foi desenhada especificamente para auditar fairness em sistemas de IA — não é a escala antiga de dermatologia (Fitzpatrick), que tem viés para pele clara.</a:t>
+              <a:rPr dirty="0"/>
+              <a:t>Uma </a:t>
+            </a:r>
+            <a:r>
+              <a:rPr dirty="0" err="1"/>
+              <a:t>escala</a:t>
+            </a:r>
+            <a:r>
+              <a:rPr dirty="0"/>
+              <a:t> de 10 tons de </a:t>
+            </a:r>
+            <a:r>
+              <a:rPr dirty="0" err="1"/>
+              <a:t>pele</a:t>
+            </a:r>
+            <a:r>
+              <a:rPr dirty="0"/>
+              <a:t> (do tom 1 </a:t>
+            </a:r>
+            <a:r>
+              <a:rPr dirty="0" err="1"/>
+              <a:t>mais</a:t>
+            </a:r>
+            <a:r>
+              <a:rPr dirty="0"/>
+              <a:t> claro </a:t>
+            </a:r>
+            <a:r>
+              <a:rPr dirty="0" err="1"/>
+              <a:t>ao</a:t>
+            </a:r>
+            <a:r>
+              <a:rPr dirty="0"/>
+              <a:t> tom 10 </a:t>
+            </a:r>
+            <a:r>
+              <a:rPr dirty="0" err="1"/>
+              <a:t>mais</a:t>
+            </a:r>
+            <a:r>
+              <a:rPr dirty="0"/>
+              <a:t> </a:t>
+            </a:r>
+            <a:r>
+              <a:rPr dirty="0" err="1"/>
+              <a:t>escuro</a:t>
+            </a:r>
+            <a:r>
+              <a:rPr dirty="0"/>
+              <a:t>), </a:t>
+            </a:r>
+            <a:r>
+              <a:rPr dirty="0" err="1"/>
+              <a:t>criada</a:t>
+            </a:r>
+            <a:r>
+              <a:rPr dirty="0"/>
+              <a:t> </a:t>
+            </a:r>
+            <a:r>
+              <a:rPr dirty="0" err="1"/>
+              <a:t>em</a:t>
+            </a:r>
+            <a:r>
+              <a:rPr dirty="0"/>
+              <a:t> 2023 </a:t>
+            </a:r>
+            <a:r>
+              <a:rPr dirty="0" err="1"/>
+              <a:t>pelo</a:t>
+            </a:r>
+            <a:r>
+              <a:rPr dirty="0"/>
+              <a:t> </a:t>
+            </a:r>
+            <a:r>
+              <a:rPr dirty="0" err="1"/>
+              <a:t>sociólogo</a:t>
+            </a:r>
+            <a:r>
+              <a:rPr dirty="0"/>
+              <a:t> Dr. Ellis Monk (Harvard) </a:t>
+            </a:r>
+            <a:r>
+              <a:rPr dirty="0" err="1"/>
+              <a:t>em</a:t>
+            </a:r>
+            <a:r>
+              <a:rPr dirty="0"/>
+              <a:t> </a:t>
+            </a:r>
+            <a:r>
+              <a:rPr dirty="0" err="1"/>
+              <a:t>parceria</a:t>
+            </a:r>
+            <a:r>
+              <a:rPr dirty="0"/>
+              <a:t> com o Google. Foi </a:t>
+            </a:r>
+            <a:r>
+              <a:rPr dirty="0" err="1"/>
+              <a:t>desenhada</a:t>
+            </a:r>
+            <a:r>
+              <a:rPr dirty="0"/>
+              <a:t> </a:t>
+            </a:r>
+            <a:r>
+              <a:rPr dirty="0" err="1"/>
+              <a:t>especificamente</a:t>
+            </a:r>
+            <a:r>
+              <a:rPr dirty="0"/>
+              <a:t> para </a:t>
+            </a:r>
+            <a:r>
+              <a:rPr dirty="0" err="1"/>
+              <a:t>auditar</a:t>
+            </a:r>
+            <a:r>
+              <a:rPr dirty="0"/>
+              <a:t> fairness </a:t>
+            </a:r>
+            <a:r>
+              <a:rPr dirty="0" err="1"/>
+              <a:t>em</a:t>
+            </a:r>
+            <a:r>
+              <a:rPr dirty="0"/>
+              <a:t> </a:t>
+            </a:r>
+            <a:r>
+              <a:rPr dirty="0" err="1"/>
+              <a:t>sistemas</a:t>
+            </a:r>
+            <a:r>
+              <a:rPr dirty="0"/>
+              <a:t> de IA — </a:t>
+            </a:r>
+            <a:r>
+              <a:rPr dirty="0" err="1"/>
+              <a:t>não</a:t>
+            </a:r>
+            <a:r>
+              <a:rPr dirty="0"/>
+              <a:t> é a </a:t>
+            </a:r>
+            <a:r>
+              <a:rPr dirty="0" err="1"/>
+              <a:t>escala</a:t>
+            </a:r>
+            <a:r>
+              <a:rPr dirty="0"/>
+              <a:t> </a:t>
+            </a:r>
+            <a:r>
+              <a:rPr dirty="0" err="1"/>
+              <a:t>antiga</a:t>
+            </a:r>
+            <a:r>
+              <a:rPr dirty="0"/>
+              <a:t> de </a:t>
+            </a:r>
+            <a:r>
+              <a:rPr dirty="0" err="1"/>
+              <a:t>dermatologia</a:t>
+            </a:r>
+            <a:r>
+              <a:rPr dirty="0"/>
+              <a:t> (Fitzpatrick), </a:t>
+            </a:r>
+            <a:r>
+              <a:rPr dirty="0" err="1"/>
+              <a:t>que</a:t>
+            </a:r>
+            <a:r>
+              <a:rPr dirty="0"/>
+              <a:t> </a:t>
+            </a:r>
+            <a:r>
+              <a:rPr dirty="0" err="1"/>
+              <a:t>tem</a:t>
+            </a:r>
+            <a:r>
+              <a:rPr dirty="0"/>
+              <a:t> </a:t>
+            </a:r>
+            <a:r>
+              <a:rPr dirty="0" err="1"/>
+              <a:t>viés</a:t>
+            </a:r>
+            <a:r>
+              <a:rPr dirty="0"/>
+              <a:t> para </a:t>
+            </a:r>
+            <a:r>
+              <a:rPr dirty="0" err="1"/>
+              <a:t>pele</a:t>
+            </a:r>
+            <a:r>
+              <a:rPr dirty="0"/>
+              <a:t> </a:t>
+            </a:r>
+            <a:r>
+              <a:rPr dirty="0" err="1"/>
+              <a:t>clara</a:t>
+            </a:r>
+            <a:r>
+              <a:rPr dirty="0"/>
+              <a:t>.</a:t>
             </a:r>
           </a:p>
         </p:txBody>
@@ -6310,8 +6569,10 @@
               </a:defRPr>
             </a:pPr>
             <a:r>
-              <a:t>Por que importa para a tese</a:t>
-            </a:r>
+              <a:rPr lang="pt-BR" dirty="0" err="1"/>
+              <a:t>Relevancia</a:t>
+            </a:r>
+            <a:endParaRPr dirty="0"/>
           </a:p>
           <a:p>
             <a:pPr>
@@ -6322,7 +6583,152 @@
               </a:defRPr>
             </a:pPr>
             <a:r>
-              <a:t>Nossa tese precisa medir tom de pele de forma confiável e granular. MST é o padrão moderno aceito pela comunidade de fairness research (publicado em NeurIPS 2023). Substituir a Fitzpatrick pela MST evita 3 problemas conhecidos da escala antiga.</a:t>
+              <a:rPr dirty="0"/>
+              <a:t>Nossa </a:t>
+            </a:r>
+            <a:r>
+              <a:rPr dirty="0" err="1"/>
+              <a:t>tese</a:t>
+            </a:r>
+            <a:r>
+              <a:rPr dirty="0"/>
+              <a:t> </a:t>
+            </a:r>
+            <a:r>
+              <a:rPr dirty="0" err="1"/>
+              <a:t>precisa</a:t>
+            </a:r>
+            <a:r>
+              <a:rPr dirty="0"/>
+              <a:t> </a:t>
+            </a:r>
+            <a:r>
+              <a:rPr dirty="0" err="1"/>
+              <a:t>medir</a:t>
+            </a:r>
+            <a:r>
+              <a:rPr dirty="0"/>
+              <a:t> tom de </a:t>
+            </a:r>
+            <a:r>
+              <a:rPr dirty="0" err="1"/>
+              <a:t>pele</a:t>
+            </a:r>
+            <a:r>
+              <a:rPr dirty="0"/>
+              <a:t> de forma </a:t>
+            </a:r>
+            <a:r>
+              <a:rPr dirty="0" err="1"/>
+              <a:t>confiável</a:t>
+            </a:r>
+            <a:r>
+              <a:rPr dirty="0"/>
+              <a:t> e granular. MST é o </a:t>
+            </a:r>
+            <a:r>
+              <a:rPr dirty="0" err="1"/>
+              <a:t>padrão</a:t>
+            </a:r>
+            <a:r>
+              <a:rPr dirty="0"/>
+              <a:t> </a:t>
+            </a:r>
+            <a:r>
+              <a:rPr dirty="0" err="1"/>
+              <a:t>moderno</a:t>
+            </a:r>
+            <a:r>
+              <a:rPr dirty="0"/>
+              <a:t> </a:t>
+            </a:r>
+            <a:r>
+              <a:rPr dirty="0" err="1"/>
+              <a:t>aceito</a:t>
+            </a:r>
+            <a:r>
+              <a:rPr dirty="0"/>
+              <a:t> pela </a:t>
+            </a:r>
+            <a:r>
+              <a:rPr dirty="0" err="1"/>
+              <a:t>comunidade</a:t>
+            </a:r>
+            <a:r>
+              <a:rPr dirty="0"/>
+              <a:t> de fairness research (</a:t>
+            </a:r>
+            <a:r>
+              <a:rPr dirty="0" err="1"/>
+              <a:t>publicado</a:t>
+            </a:r>
+            <a:r>
+              <a:rPr dirty="0"/>
+              <a:t> </a:t>
+            </a:r>
+            <a:r>
+              <a:rPr dirty="0" err="1"/>
+              <a:t>em</a:t>
+            </a:r>
+            <a:r>
+              <a:rPr dirty="0"/>
+              <a:t> </a:t>
+            </a:r>
+            <a:r>
+              <a:rPr dirty="0" err="1"/>
+              <a:t>NeurIPS</a:t>
+            </a:r>
+            <a:r>
+              <a:rPr dirty="0"/>
+              <a:t> 2023). </a:t>
+            </a:r>
+            <a:r>
+              <a:rPr dirty="0" err="1"/>
+              <a:t>Substituir</a:t>
+            </a:r>
+            <a:r>
+              <a:rPr dirty="0"/>
+              <a:t> a Fitzpatrick pela MST </a:t>
+            </a:r>
+            <a:r>
+              <a:rPr dirty="0" err="1"/>
+              <a:t>evita</a:t>
+            </a:r>
+            <a:r>
+              <a:rPr dirty="0"/>
+              <a:t> 3 </a:t>
+            </a:r>
+            <a:r>
+              <a:rPr dirty="0" err="1"/>
+              <a:t>problemas</a:t>
+            </a:r>
+            <a:r>
+              <a:rPr dirty="0"/>
+              <a:t> </a:t>
+            </a:r>
+            <a:r>
+              <a:rPr dirty="0" err="1"/>
+              <a:t>conhecidos</a:t>
+            </a:r>
+            <a:r>
+              <a:rPr dirty="0"/>
+              <a:t> da </a:t>
+            </a:r>
+            <a:r>
+              <a:rPr dirty="0" err="1"/>
+              <a:t>escala</a:t>
+            </a:r>
+            <a:r>
+              <a:rPr dirty="0"/>
+              <a:t> </a:t>
+            </a:r>
+            <a:r>
+              <a:rPr dirty="0" err="1"/>
+              <a:t>antiga</a:t>
+            </a:r>
+            <a:r>
+              <a:rPr dirty="0"/>
+              <a:t>.</a:t>
             </a:r>
           </a:p>
         </p:txBody>
@@ -6378,14 +6784,6 @@
             <a:r>
               <a:rPr dirty="0" err="1"/>
               <a:t>Exemplo</a:t>
-            </a:r>
-            <a:r>
-              <a:rPr dirty="0"/>
-              <a:t> </a:t>
-            </a:r>
-            <a:r>
-              <a:rPr dirty="0" err="1"/>
-              <a:t>concreto</a:t>
             </a:r>
             <a:endParaRPr dirty="0"/>
           </a:p>
@@ -7232,30 +7630,6 @@
             </a:r>
             <a:r>
               <a:rPr dirty="0"/>
-              <a:t>. É linear </a:t>
-            </a:r>
-            <a:r>
-              <a:rPr dirty="0" err="1"/>
-              <a:t>nas</a:t>
-            </a:r>
-            <a:r>
-              <a:rPr dirty="0"/>
-              <a:t> features e </a:t>
-            </a:r>
-            <a:r>
-              <a:rPr dirty="0" err="1"/>
-              <a:t>não</a:t>
-            </a:r>
-            <a:r>
-              <a:rPr dirty="0"/>
-              <a:t> linear no </a:t>
-            </a:r>
-            <a:r>
-              <a:rPr dirty="0" err="1"/>
-              <a:t>contexto</a:t>
-            </a:r>
-            <a:r>
-              <a:rPr dirty="0"/>
               <a:t>.</a:t>
             </a:r>
           </a:p>
@@ -7568,272 +7942,429 @@
       </p:sp>
       <p:sp>
         <p:nvSpPr>
-          <p:cNvPr id="11" name="Rounded Rectangle 10"/>
-          <p:cNvSpPr/>
+          <p:cNvPr id="13" name="CaixaDeTexto 12">
+            <a:extLst>
+              <a:ext uri="{FF2B5EF4-FFF2-40B4-BE49-F238E27FC236}">
+                <a16:creationId xmlns:a16="http://schemas.microsoft.com/office/drawing/2014/main" id="{C7E15BE2-3796-C153-5EE7-3FD96CECE8FE}"/>
+              </a:ext>
+            </a:extLst>
+          </p:cNvPr>
+          <p:cNvSpPr txBox="1"/>
           <p:nvPr/>
         </p:nvSpPr>
         <p:spPr>
           <a:xfrm>
-            <a:off x="457200" y="5257800"/>
-            <a:ext cx="11430000" cy="1280160"/>
+            <a:off x="4023360" y="5303520"/>
+            <a:ext cx="3495675" cy="1446550"/>
           </a:xfrm>
-          <a:prstGeom prst="roundRect">
+          <a:prstGeom prst="rect">
             <a:avLst/>
           </a:prstGeom>
-          <a:solidFill>
-            <a:srgbClr val="FFFFFF"/>
-          </a:solidFill>
-          <a:ln w="19050">
-            <a:solidFill>
-              <a:srgbClr val="2E7D32"/>
-            </a:solidFill>
-          </a:ln>
+          <a:noFill/>
         </p:spPr>
-        <p:style>
-          <a:lnRef idx="1">
-            <a:schemeClr val="accent1"/>
-          </a:lnRef>
-          <a:fillRef idx="3">
-            <a:schemeClr val="accent1"/>
-          </a:fillRef>
-          <a:effectRef idx="2">
-            <a:schemeClr val="accent1"/>
-          </a:effectRef>
-          <a:fontRef idx="minor">
-            <a:schemeClr val="lt1"/>
-          </a:fontRef>
-        </p:style>
-        <p:txBody>
-          <a:bodyPr wrap="square" lIns="228600" tIns="109728" rIns="228600" rtlCol="0" anchor="ctr"/>
+        <p:txBody>
+          <a:bodyPr wrap="square">
+            <a:spAutoFit/>
+          </a:bodyPr>
           <a:lstStyle/>
           <a:p>
-            <a:pPr algn="ctr">
-              <a:defRPr sz="1300" b="1">
-                <a:solidFill>
-                  <a:srgbClr val="2E7D32"/>
-                </a:solidFill>
-              </a:defRPr>
-            </a:pPr>
-            <a:r>
-              <a:rPr dirty="0"/>
-              <a:t>Por </a:t>
-            </a:r>
-            <a:r>
-              <a:rPr dirty="0" err="1"/>
-              <a:t>que</a:t>
-            </a:r>
-            <a:r>
-              <a:rPr dirty="0"/>
+            <a:pPr algn="l">
+              <a:buNone/>
+            </a:pPr>
+            <a:r>
+              <a:rPr lang="pt-BR" sz="800" b="0" i="0" dirty="0">
+                <a:solidFill>
+                  <a:srgbClr val="BBBEBF"/>
+                </a:solidFill>
+                <a:effectLst/>
+                <a:latin typeface="Consolas" panose="020B0609020204030204" pitchFamily="49" charset="0"/>
+              </a:rPr>
+              <a:t>Imagem → CNN (</a:t>
+            </a:r>
+            <a:r>
+              <a:rPr lang="pt-BR" sz="800" b="0" i="0" dirty="0" err="1">
+                <a:solidFill>
+                  <a:srgbClr val="BBBEBF"/>
+                </a:solidFill>
+                <a:effectLst/>
+                <a:latin typeface="Consolas" panose="020B0609020204030204" pitchFamily="49" charset="0"/>
+              </a:rPr>
+              <a:t>ResNet</a:t>
+            </a:r>
+            <a:r>
+              <a:rPr lang="pt-BR" sz="800" b="0" i="0" dirty="0">
+                <a:solidFill>
+                  <a:srgbClr val="BBBEBF"/>
+                </a:solidFill>
+                <a:effectLst/>
+                <a:latin typeface="Consolas" panose="020B0609020204030204" pitchFamily="49" charset="0"/>
+              </a:rPr>
+              <a:t>/</a:t>
+            </a:r>
+            <a:r>
+              <a:rPr lang="pt-BR" sz="800" b="0" i="0" dirty="0" err="1">
+                <a:solidFill>
+                  <a:srgbClr val="BBBEBF"/>
+                </a:solidFill>
+                <a:effectLst/>
+                <a:latin typeface="Consolas" panose="020B0609020204030204" pitchFamily="49" charset="0"/>
+              </a:rPr>
+              <a:t>ConvNeXt</a:t>
+            </a:r>
+            <a:r>
+              <a:rPr lang="pt-BR" sz="800" b="0" i="0" dirty="0">
+                <a:solidFill>
+                  <a:srgbClr val="BBBEBF"/>
+                </a:solidFill>
+                <a:effectLst/>
+                <a:latin typeface="Consolas" panose="020B0609020204030204" pitchFamily="49" charset="0"/>
+              </a:rPr>
+              <a:t>)</a:t>
+            </a:r>
+          </a:p>
+          <a:p>
+            <a:pPr algn="l">
+              <a:buNone/>
+            </a:pPr>
+            <a:r>
+              <a:rPr lang="pt-BR" sz="800" b="0" i="0" dirty="0">
+                <a:solidFill>
+                  <a:srgbClr val="BBBEBF"/>
+                </a:solidFill>
+                <a:effectLst/>
+                <a:latin typeface="Consolas" panose="020B0609020204030204" pitchFamily="49" charset="0"/>
+              </a:rPr>
+              <a:t>                    ↓</a:t>
+            </a:r>
+          </a:p>
+          <a:p>
+            <a:pPr algn="l">
+              <a:buNone/>
+            </a:pPr>
+            <a:r>
+              <a:rPr lang="pt-BR" sz="800" b="0" i="0" dirty="0">
+                <a:solidFill>
+                  <a:srgbClr val="BBBEBF"/>
+                </a:solidFill>
+                <a:effectLst/>
+                <a:latin typeface="Consolas" panose="020B0609020204030204" pitchFamily="49" charset="0"/>
+              </a:rPr>
+              <a:t>   MST </a:t>
+            </a:r>
+            <a:r>
+              <a:rPr lang="pt-BR" sz="800" b="0" i="0" dirty="0" err="1">
+                <a:solidFill>
+                  <a:srgbClr val="BBBEBF"/>
+                </a:solidFill>
+                <a:effectLst/>
+                <a:latin typeface="Consolas" panose="020B0609020204030204" pitchFamily="49" charset="0"/>
+              </a:rPr>
+              <a:t>classifier</a:t>
+            </a:r>
+            <a:r>
+              <a:rPr lang="pt-BR" sz="800" b="0" i="0" dirty="0">
+                <a:solidFill>
+                  <a:srgbClr val="BBBEBF"/>
+                </a:solidFill>
+                <a:effectLst/>
+                <a:latin typeface="Consolas" panose="020B0609020204030204" pitchFamily="49" charset="0"/>
+              </a:rPr>
+              <a:t> ──▶ vetor z (10 </a:t>
+            </a:r>
+            <a:r>
+              <a:rPr lang="pt-BR" sz="800" b="0" i="0" dirty="0" err="1">
+                <a:solidFill>
+                  <a:srgbClr val="BBBEBF"/>
+                </a:solidFill>
+                <a:effectLst/>
+                <a:latin typeface="Consolas" panose="020B0609020204030204" pitchFamily="49" charset="0"/>
+              </a:rPr>
+              <a:t>logits</a:t>
+            </a:r>
+            <a:r>
+              <a:rPr lang="pt-BR" sz="800" b="0" i="0" dirty="0">
+                <a:solidFill>
+                  <a:srgbClr val="BBBEBF"/>
+                </a:solidFill>
+                <a:effectLst/>
+                <a:latin typeface="Consolas" panose="020B0609020204030204" pitchFamily="49" charset="0"/>
+              </a:rPr>
+              <a:t>)</a:t>
+            </a:r>
+          </a:p>
+          <a:p>
+            <a:pPr algn="l">
+              <a:buNone/>
+            </a:pPr>
+            <a:r>
+              <a:rPr lang="pt-BR" sz="800" b="0" i="0" dirty="0">
+                <a:solidFill>
+                  <a:srgbClr val="BBBEBF"/>
+                </a:solidFill>
+                <a:effectLst/>
+                <a:latin typeface="Consolas" panose="020B0609020204030204" pitchFamily="49" charset="0"/>
+              </a:rPr>
+              <a:t>                    ↓</a:t>
+            </a:r>
+          </a:p>
+          <a:p>
+            <a:pPr algn="l">
+              <a:buNone/>
+            </a:pPr>
+            <a:r>
+              <a:rPr lang="pt-BR" sz="800" b="0" i="0" dirty="0">
+                <a:solidFill>
+                  <a:srgbClr val="BBBEBF"/>
+                </a:solidFill>
+                <a:effectLst/>
+                <a:latin typeface="Consolas" panose="020B0609020204030204" pitchFamily="49" charset="0"/>
+              </a:rPr>
+              <a:t>                </a:t>
+            </a:r>
+            <a:r>
+              <a:rPr lang="pt-BR" sz="800" b="0" i="0" dirty="0" err="1">
+                <a:solidFill>
+                  <a:srgbClr val="BBBEBF"/>
+                </a:solidFill>
+                <a:effectLst/>
+                <a:latin typeface="Consolas" panose="020B0609020204030204" pitchFamily="49" charset="0"/>
+              </a:rPr>
+              <a:t>FiLM</a:t>
+            </a:r>
+            <a:r>
+              <a:rPr lang="pt-BR" sz="800" b="0" i="0" dirty="0">
+                <a:solidFill>
+                  <a:srgbClr val="BBBEBF"/>
+                </a:solidFill>
+                <a:effectLst/>
+                <a:latin typeface="Consolas" panose="020B0609020204030204" pitchFamily="49" charset="0"/>
+              </a:rPr>
               <a:t> </a:t>
             </a:r>
             <a:r>
-              <a:rPr dirty="0" err="1"/>
-              <a:t>importa</a:t>
-            </a:r>
-            <a:r>
-              <a:rPr dirty="0"/>
-              <a:t> para a </a:t>
-            </a:r>
-            <a:r>
-              <a:rPr dirty="0" err="1"/>
-              <a:t>tese</a:t>
-            </a:r>
-            <a:endParaRPr lang="pt-BR" dirty="0"/>
-          </a:p>
-          <a:p>
-            <a:pPr algn="ctr">
-              <a:defRPr sz="1300" b="1">
-                <a:solidFill>
-                  <a:srgbClr val="2E7D32"/>
-                </a:solidFill>
-              </a:defRPr>
-            </a:pPr>
-            <a:endParaRPr dirty="0"/>
-          </a:p>
-          <a:p>
-            <a:pPr>
-              <a:defRPr sz="1200">
-                <a:solidFill>
-                  <a:srgbClr val="3D424E"/>
-                </a:solidFill>
-              </a:defRPr>
-            </a:pPr>
-            <a:r>
-              <a:rPr dirty="0" err="1"/>
-              <a:t>FiLM</a:t>
-            </a:r>
-            <a:r>
-              <a:rPr dirty="0"/>
+              <a:rPr lang="pt-BR" sz="800" b="0" i="0" dirty="0" err="1">
+                <a:solidFill>
+                  <a:srgbClr val="BBBEBF"/>
+                </a:solidFill>
+                <a:effectLst/>
+                <a:latin typeface="Consolas" panose="020B0609020204030204" pitchFamily="49" charset="0"/>
+              </a:rPr>
+              <a:t>layer</a:t>
+            </a:r>
+            <a:r>
+              <a:rPr lang="pt-BR" sz="800" b="0" i="0" dirty="0">
+                <a:solidFill>
+                  <a:srgbClr val="BBBEBF"/>
+                </a:solidFill>
+                <a:effectLst/>
+                <a:latin typeface="Consolas" panose="020B0609020204030204" pitchFamily="49" charset="0"/>
+              </a:rPr>
+              <a:t> ── γ, β</a:t>
+            </a:r>
+          </a:p>
+          <a:p>
+            <a:pPr algn="l">
+              <a:buNone/>
+            </a:pPr>
+            <a:r>
+              <a:rPr lang="pt-BR" sz="800" b="0" i="0" dirty="0">
+                <a:solidFill>
+                  <a:srgbClr val="BBBEBF"/>
+                </a:solidFill>
+                <a:effectLst/>
+                <a:latin typeface="Consolas" panose="020B0609020204030204" pitchFamily="49" charset="0"/>
+              </a:rPr>
+              <a:t>                    ↓</a:t>
+            </a:r>
+          </a:p>
+          <a:p>
+            <a:pPr algn="l">
+              <a:buNone/>
+            </a:pPr>
+            <a:r>
+              <a:rPr lang="pt-BR" sz="800" b="0" i="0" dirty="0">
+                <a:solidFill>
+                  <a:srgbClr val="BBBEBF"/>
+                </a:solidFill>
+                <a:effectLst/>
+                <a:latin typeface="Consolas" panose="020B0609020204030204" pitchFamily="49" charset="0"/>
+              </a:rPr>
+              <a:t>              feature </a:t>
+            </a:r>
+            <a:r>
+              <a:rPr lang="pt-BR" sz="800" b="0" i="0" dirty="0" err="1">
+                <a:solidFill>
+                  <a:srgbClr val="BBBEBF"/>
+                </a:solidFill>
+                <a:effectLst/>
+                <a:latin typeface="Consolas" panose="020B0609020204030204" pitchFamily="49" charset="0"/>
+              </a:rPr>
+              <a:t>map</a:t>
+            </a:r>
+            <a:r>
+              <a:rPr lang="pt-BR" sz="800" b="0" i="0" dirty="0">
+                <a:solidFill>
+                  <a:srgbClr val="BBBEBF"/>
+                </a:solidFill>
+                <a:effectLst/>
+                <a:latin typeface="Consolas" panose="020B0609020204030204" pitchFamily="49" charset="0"/>
+              </a:rPr>
+              <a:t> modulado</a:t>
+            </a:r>
+          </a:p>
+          <a:p>
+            <a:pPr algn="l">
+              <a:buNone/>
+            </a:pPr>
+            <a:r>
+              <a:rPr lang="pt-BR" sz="800" b="0" i="0" dirty="0">
+                <a:solidFill>
+                  <a:srgbClr val="BBBEBF"/>
+                </a:solidFill>
+                <a:effectLst/>
+                <a:latin typeface="Consolas" panose="020B0609020204030204" pitchFamily="49" charset="0"/>
+              </a:rPr>
+              <a:t>                    ↓</a:t>
+            </a:r>
+          </a:p>
+          <a:p>
+            <a:pPr algn="l">
+              <a:buNone/>
+            </a:pPr>
+            <a:r>
+              <a:rPr lang="pt-BR" sz="800" b="0" i="0" dirty="0">
+                <a:solidFill>
+                  <a:srgbClr val="BBBEBF"/>
+                </a:solidFill>
+                <a:effectLst/>
+                <a:latin typeface="Consolas" panose="020B0609020204030204" pitchFamily="49" charset="0"/>
+              </a:rPr>
+              <a:t>              </a:t>
+            </a:r>
+            <a:r>
+              <a:rPr lang="pt-BR" sz="800" b="0" i="0" dirty="0" err="1">
+                <a:solidFill>
+                  <a:srgbClr val="BBBEBF"/>
+                </a:solidFill>
+                <a:effectLst/>
+                <a:latin typeface="Consolas" panose="020B0609020204030204" pitchFamily="49" charset="0"/>
+              </a:rPr>
+              <a:t>race</a:t>
+            </a:r>
+            <a:r>
+              <a:rPr lang="pt-BR" sz="800" b="0" i="0" dirty="0">
+                <a:solidFill>
+                  <a:srgbClr val="BBBEBF"/>
+                </a:solidFill>
+                <a:effectLst/>
+                <a:latin typeface="Consolas" panose="020B0609020204030204" pitchFamily="49" charset="0"/>
+              </a:rPr>
               <a:t> </a:t>
             </a:r>
             <a:r>
-              <a:rPr dirty="0" err="1"/>
-              <a:t>transforma</a:t>
-            </a:r>
-            <a:r>
-              <a:rPr dirty="0"/>
-              <a:t> a </a:t>
-            </a:r>
-            <a:r>
-              <a:rPr dirty="0" err="1"/>
-              <a:t>ideia</a:t>
-            </a:r>
-            <a:r>
-              <a:rPr dirty="0"/>
-              <a:t> 'usar tom de </a:t>
-            </a:r>
-            <a:r>
-              <a:rPr dirty="0" err="1"/>
-              <a:t>pele</a:t>
-            </a:r>
-            <a:r>
-              <a:rPr dirty="0"/>
+              <a:rPr lang="pt-BR" sz="800" b="0" i="0" dirty="0" err="1">
+                <a:solidFill>
+                  <a:srgbClr val="BBBEBF"/>
+                </a:solidFill>
+                <a:effectLst/>
+                <a:latin typeface="Consolas" panose="020B0609020204030204" pitchFamily="49" charset="0"/>
+              </a:rPr>
+              <a:t>classifier</a:t>
+            </a:r>
+            <a:r>
+              <a:rPr lang="pt-BR" sz="800" b="0" i="0" dirty="0">
+                <a:solidFill>
+                  <a:srgbClr val="BBBEBF"/>
+                </a:solidFill>
+                <a:effectLst/>
+                <a:latin typeface="Consolas" panose="020B0609020204030204" pitchFamily="49" charset="0"/>
+              </a:rPr>
               <a:t> </a:t>
             </a:r>
             <a:r>
-              <a:rPr dirty="0" err="1"/>
-              <a:t>como</a:t>
-            </a:r>
-            <a:r>
-              <a:rPr dirty="0"/>
+              <a:rPr lang="pt-BR" sz="800" b="0" i="0" dirty="0" err="1">
+                <a:solidFill>
+                  <a:srgbClr val="BBBEBF"/>
+                </a:solidFill>
+                <a:effectLst/>
+                <a:latin typeface="Consolas" panose="020B0609020204030204" pitchFamily="49" charset="0"/>
+              </a:rPr>
+              <a:t>head</a:t>
+            </a:r>
+            <a:endParaRPr lang="pt-BR" sz="800" b="0" i="0" dirty="0">
+              <a:solidFill>
+                <a:srgbClr val="BBBEBF"/>
+              </a:solidFill>
+              <a:effectLst/>
+              <a:latin typeface="Consolas" panose="020B0609020204030204" pitchFamily="49" charset="0"/>
+            </a:endParaRPr>
+          </a:p>
+          <a:p>
+            <a:pPr algn="l">
+              <a:buNone/>
+            </a:pPr>
+            <a:r>
+              <a:rPr lang="pt-BR" sz="800" b="0" i="0" dirty="0">
+                <a:solidFill>
+                  <a:srgbClr val="BBBEBF"/>
+                </a:solidFill>
+                <a:effectLst/>
+                <a:latin typeface="Consolas" panose="020B0609020204030204" pitchFamily="49" charset="0"/>
+              </a:rPr>
+              <a:t>                    ↓</a:t>
+            </a:r>
+          </a:p>
+          <a:p>
+            <a:pPr algn="l">
+              <a:buNone/>
+            </a:pPr>
+            <a:r>
+              <a:rPr lang="pt-BR" sz="800" b="0" i="0" dirty="0">
+                <a:solidFill>
+                  <a:srgbClr val="BBBEBF"/>
+                </a:solidFill>
+                <a:effectLst/>
+                <a:latin typeface="Consolas" panose="020B0609020204030204" pitchFamily="49" charset="0"/>
+              </a:rPr>
+              <a:t>                </a:t>
+            </a:r>
+            <a:r>
+              <a:rPr lang="pt-BR" sz="800" b="0" i="0" dirty="0" err="1">
+                <a:solidFill>
+                  <a:srgbClr val="BBBEBF"/>
+                </a:solidFill>
+                <a:effectLst/>
+                <a:latin typeface="Consolas" panose="020B0609020204030204" pitchFamily="49" charset="0"/>
+              </a:rPr>
+              <a:t>race</a:t>
+            </a:r>
+            <a:r>
+              <a:rPr lang="pt-BR" sz="800" b="0" i="0" dirty="0">
+                <a:solidFill>
+                  <a:srgbClr val="BBBEBF"/>
+                </a:solidFill>
+                <a:effectLst/>
+                <a:latin typeface="Consolas" panose="020B0609020204030204" pitchFamily="49" charset="0"/>
+              </a:rPr>
               <a:t> </a:t>
             </a:r>
             <a:r>
-              <a:rPr dirty="0" err="1"/>
-              <a:t>contexto</a:t>
-            </a:r>
-            <a:r>
-              <a:rPr dirty="0"/>
-              <a:t>' </a:t>
-            </a:r>
-            <a:r>
-              <a:rPr dirty="0" err="1"/>
-              <a:t>em</a:t>
-            </a:r>
-            <a:r>
-              <a:rPr dirty="0"/>
-              <a:t> </a:t>
-            </a:r>
-            <a:r>
-              <a:rPr dirty="0" err="1"/>
-              <a:t>mecanismo</a:t>
-            </a:r>
-            <a:r>
-              <a:rPr dirty="0"/>
-              <a:t> formal, </a:t>
-            </a:r>
-            <a:r>
-              <a:rPr dirty="0" err="1"/>
-              <a:t>reproduzível</a:t>
-            </a:r>
-            <a:r>
-              <a:rPr dirty="0"/>
-              <a:t> e </a:t>
-            </a:r>
-            <a:r>
-              <a:rPr dirty="0" err="1"/>
-              <a:t>auditável</a:t>
-            </a:r>
-            <a:r>
-              <a:rPr dirty="0"/>
-              <a:t>. O </a:t>
-            </a:r>
-            <a:r>
-              <a:rPr dirty="0" err="1"/>
-              <a:t>ganho</a:t>
-            </a:r>
-            <a:r>
-              <a:rPr dirty="0"/>
-              <a:t> marginal </a:t>
-            </a:r>
-            <a:r>
-              <a:rPr dirty="0" err="1"/>
-              <a:t>sobre</a:t>
-            </a:r>
-            <a:r>
-              <a:rPr dirty="0"/>
-              <a:t> baseline puro é a </a:t>
-            </a:r>
-            <a:r>
-              <a:rPr dirty="0" err="1"/>
-              <a:t>evidência</a:t>
-            </a:r>
-            <a:r>
-              <a:rPr dirty="0"/>
-              <a:t> </a:t>
-            </a:r>
-            <a:r>
-              <a:rPr dirty="0" err="1"/>
-              <a:t>direta</a:t>
-            </a:r>
-            <a:r>
-              <a:rPr dirty="0"/>
-              <a:t> de H1. </a:t>
-            </a:r>
-            <a:r>
-              <a:rPr dirty="0" err="1"/>
-              <a:t>Custo</a:t>
-            </a:r>
-            <a:r>
-              <a:rPr dirty="0"/>
-              <a:t> de </a:t>
-            </a:r>
-            <a:r>
-              <a:rPr dirty="0" err="1"/>
-              <a:t>parâmetros</a:t>
-            </a:r>
-            <a:r>
-              <a:rPr dirty="0"/>
-              <a:t> </a:t>
-            </a:r>
-            <a:r>
-              <a:rPr dirty="0" err="1"/>
-              <a:t>adicional</a:t>
-            </a:r>
-            <a:r>
-              <a:rPr dirty="0"/>
-              <a:t> é </a:t>
-            </a:r>
-            <a:r>
-              <a:rPr dirty="0" err="1"/>
-              <a:t>mínimo</a:t>
-            </a:r>
-            <a:r>
-              <a:rPr dirty="0"/>
-              <a:t> (</a:t>
-            </a:r>
-            <a:r>
-              <a:rPr dirty="0" err="1"/>
-              <a:t>apenas</a:t>
-            </a:r>
-            <a:r>
-              <a:rPr dirty="0"/>
-              <a:t> duas MLPs </a:t>
-            </a:r>
-            <a:r>
-              <a:rPr dirty="0" err="1"/>
-              <a:t>pequenas</a:t>
-            </a:r>
-            <a:r>
-              <a:rPr dirty="0"/>
-              <a:t> </a:t>
-            </a:r>
-            <a:r>
-              <a:rPr dirty="0" err="1"/>
-              <a:t>por</a:t>
-            </a:r>
-            <a:r>
-              <a:rPr dirty="0"/>
-              <a:t> </a:t>
-            </a:r>
-            <a:r>
-              <a:rPr dirty="0" err="1"/>
-              <a:t>bloco</a:t>
-            </a:r>
-            <a:r>
-              <a:rPr dirty="0"/>
-              <a:t>).</a:t>
-            </a:r>
+              <a:rPr lang="pt-BR" sz="800" b="0" i="0" dirty="0" err="1">
+                <a:solidFill>
+                  <a:srgbClr val="BBBEBF"/>
+                </a:solidFill>
+                <a:effectLst/>
+                <a:latin typeface="Consolas" panose="020B0609020204030204" pitchFamily="49" charset="0"/>
+              </a:rPr>
+              <a:t>prediction</a:t>
+            </a:r>
+            <a:endParaRPr lang="pt-BR" sz="800" b="0" i="0" dirty="0">
+              <a:solidFill>
+                <a:srgbClr val="BBBEBF"/>
+              </a:solidFill>
+              <a:effectLst/>
+              <a:latin typeface="Courier New" panose="02070309020205020404" pitchFamily="49" charset="0"/>
+            </a:endParaRPr>
           </a:p>
         </p:txBody>
       </p:sp>
@@ -9033,28 +9564,8 @@
               </a:defRPr>
             </a:pPr>
             <a:r>
-              <a:rPr dirty="0"/>
-              <a:t>Por </a:t>
-            </a:r>
-            <a:r>
-              <a:rPr dirty="0" err="1"/>
-              <a:t>que</a:t>
-            </a:r>
-            <a:r>
-              <a:rPr dirty="0"/>
-              <a:t> </a:t>
-            </a:r>
-            <a:r>
-              <a:rPr dirty="0" err="1"/>
-              <a:t>importa</a:t>
-            </a:r>
-            <a:r>
-              <a:rPr dirty="0"/>
-              <a:t> para a </a:t>
-            </a:r>
-            <a:r>
-              <a:rPr dirty="0" err="1"/>
-              <a:t>tese</a:t>
+              <a:rPr lang="pt-BR" dirty="0" err="1"/>
+              <a:t>Relevancia</a:t>
             </a:r>
             <a:endParaRPr lang="pt-BR" dirty="0"/>
           </a:p>
@@ -9276,7 +9787,7 @@
         <p:spPr>
           <a:xfrm>
             <a:off x="548640" y="1371600"/>
-            <a:ext cx="11247120" cy="4937760"/>
+            <a:ext cx="11247120" cy="4637167"/>
           </a:xfrm>
           <a:prstGeom prst="rect">
             <a:avLst/>
@@ -9304,12 +9815,20 @@
               <a:t>Etapa 1 — </a:t>
             </a:r>
             <a:r>
-              <a:rPr dirty="0" err="1"/>
-              <a:t>Treinar</a:t>
-            </a:r>
-            <a:r>
-              <a:rPr dirty="0"/>
-              <a:t> um </a:t>
+              <a:rPr lang="pt-BR" dirty="0"/>
+              <a:t>Preparar</a:t>
+            </a:r>
+            <a:r>
+              <a:rPr dirty="0"/>
+              <a:t> </a:t>
+            </a:r>
+            <a:r>
+              <a:rPr lang="pt-BR" dirty="0"/>
+              <a:t>o</a:t>
+            </a:r>
+            <a:r>
+              <a:rPr dirty="0"/>
+              <a:t> </a:t>
             </a:r>
             <a:r>
               <a:rPr dirty="0" err="1"/>
@@ -11796,103 +12315,6 @@
           </a:graphicData>
         </a:graphic>
       </p:graphicFrame>
-      <p:sp>
-        <p:nvSpPr>
-          <p:cNvPr id="5" name="TextBox 4"/>
-          <p:cNvSpPr txBox="1"/>
-          <p:nvPr/>
-        </p:nvSpPr>
-        <p:spPr>
-          <a:xfrm>
-            <a:off x="457200" y="6400800"/>
-            <a:ext cx="11430000" cy="365760"/>
-          </a:xfrm>
-          <a:prstGeom prst="rect">
-            <a:avLst/>
-          </a:prstGeom>
-          <a:noFill/>
-        </p:spPr>
-        <p:txBody>
-          <a:bodyPr wrap="none">
-            <a:spAutoFit/>
-          </a:bodyPr>
-          <a:lstStyle/>
-          <a:p>
-            <a:pPr>
-              <a:defRPr sz="1500" i="1">
-                <a:solidFill>
-                  <a:srgbClr val="707682"/>
-                </a:solidFill>
-              </a:defRPr>
-            </a:pPr>
-            <a:r>
-              <a:rPr dirty="0"/>
-              <a:t>H5 </a:t>
-            </a:r>
-            <a:r>
-              <a:rPr dirty="0" err="1"/>
-              <a:t>em</a:t>
-            </a:r>
-            <a:r>
-              <a:rPr dirty="0"/>
-              <a:t> </a:t>
-            </a:r>
-            <a:r>
-              <a:rPr dirty="0" err="1"/>
-              <a:t>revisão</a:t>
-            </a:r>
-            <a:r>
-              <a:rPr dirty="0"/>
-              <a:t> </a:t>
-            </a:r>
-            <a:r>
-              <a:rPr dirty="0" err="1"/>
-              <a:t>após</a:t>
-            </a:r>
-            <a:r>
-              <a:rPr dirty="0"/>
-              <a:t> Pangelinan 2023 (</a:t>
-            </a:r>
-            <a:r>
-              <a:rPr dirty="0" err="1"/>
-              <a:t>Rodada</a:t>
-            </a:r>
-            <a:r>
-              <a:rPr dirty="0"/>
-              <a:t> 6): pixel info </a:t>
-            </a:r>
-            <a:r>
-              <a:rPr dirty="0" err="1"/>
-              <a:t>pode</a:t>
-            </a:r>
-            <a:r>
-              <a:rPr dirty="0"/>
-              <a:t> ser confounder — </a:t>
-            </a:r>
-            <a:r>
-              <a:rPr dirty="0" err="1"/>
-              <a:t>discussão</a:t>
-            </a:r>
-            <a:r>
-              <a:rPr dirty="0"/>
-              <a:t> </a:t>
-            </a:r>
-            <a:r>
-              <a:rPr dirty="0" err="1"/>
-              <a:t>na</a:t>
-            </a:r>
-            <a:r>
-              <a:rPr dirty="0"/>
-              <a:t> </a:t>
-            </a:r>
-            <a:r>
-              <a:rPr dirty="0" err="1"/>
-              <a:t>pauta</a:t>
-            </a:r>
-            <a:endParaRPr dirty="0"/>
-          </a:p>
-        </p:txBody>
-      </p:sp>
     </p:spTree>
   </p:cSld>
   <p:clrMapOvr>
@@ -11927,7 +12349,7 @@
         <p:spPr>
           <a:xfrm>
             <a:off x="457200" y="365760"/>
-            <a:ext cx="11430000" cy="822960"/>
+            <a:ext cx="11430000" cy="553998"/>
           </a:xfrm>
           <a:prstGeom prst="rect">
             <a:avLst/>
@@ -11948,8 +12370,10 @@
               </a:defRPr>
             </a:pPr>
             <a:r>
-              <a:t>Principais alinhamentos e decisões</a:t>
-            </a:r>
+              <a:rPr lang="pt-BR" dirty="0"/>
+              <a:t>Agenda</a:t>
+            </a:r>
+            <a:endParaRPr dirty="0"/>
           </a:p>
         </p:txBody>
       </p:sp>
@@ -18514,6 +18938,959 @@
 </p:sld>
 </file>
 
+<file path=ppt/slides/slide33.xml><?xml version="1.0" encoding="utf-8"?>
+<p:sld xmlns:a="http://schemas.openxmlformats.org/drawingml/2006/main" xmlns:r="http://schemas.openxmlformats.org/officeDocument/2006/relationships" xmlns:p="http://schemas.openxmlformats.org/presentationml/2006/main" show="0">
+  <p:cSld>
+    <p:spTree>
+      <p:nvGrpSpPr>
+        <p:cNvPr id="1" name="">
+          <a:extLst>
+            <a:ext uri="{FF2B5EF4-FFF2-40B4-BE49-F238E27FC236}">
+              <a16:creationId xmlns:a16="http://schemas.microsoft.com/office/drawing/2014/main" id="{38FBB4EF-F467-0C00-AB8C-8C5D5A854D8C}"/>
+            </a:ext>
+          </a:extLst>
+        </p:cNvPr>
+        <p:cNvGrpSpPr/>
+        <p:nvPr/>
+      </p:nvGrpSpPr>
+      <p:grpSpPr>
+        <a:xfrm>
+          <a:off x="0" y="0"/>
+          <a:ext cx="0" cy="0"/>
+          <a:chOff x="0" y="0"/>
+          <a:chExt cx="0" cy="0"/>
+        </a:xfrm>
+      </p:grpSpPr>
+      <p:sp>
+        <p:nvSpPr>
+          <p:cNvPr id="2" name="TextBox 1">
+            <a:extLst>
+              <a:ext uri="{FF2B5EF4-FFF2-40B4-BE49-F238E27FC236}">
+                <a16:creationId xmlns:a16="http://schemas.microsoft.com/office/drawing/2014/main" id="{E9D72453-877B-E3BB-6EB7-FC08227970B2}"/>
+              </a:ext>
+            </a:extLst>
+          </p:cNvPr>
+          <p:cNvSpPr txBox="1"/>
+          <p:nvPr/>
+        </p:nvSpPr>
+        <p:spPr>
+          <a:xfrm>
+            <a:off x="365760" y="182880"/>
+            <a:ext cx="3736985" cy="369332"/>
+          </a:xfrm>
+          <a:prstGeom prst="rect">
+            <a:avLst/>
+          </a:prstGeom>
+          <a:noFill/>
+        </p:spPr>
+        <p:txBody>
+          <a:bodyPr wrap="none">
+            <a:spAutoFit/>
+          </a:bodyPr>
+          <a:lstStyle/>
+          <a:p>
+            <a:pPr>
+              <a:defRPr sz="1800" b="1">
+                <a:solidFill>
+                  <a:srgbClr val="1F2A4E"/>
+                </a:solidFill>
+              </a:defRPr>
+            </a:pPr>
+            <a:r>
+              <a:rPr lang="pt-BR" dirty="0"/>
+              <a:t>29 Artigos organizados nas 7 Tracking</a:t>
+            </a:r>
+            <a:endParaRPr dirty="0"/>
+          </a:p>
+        </p:txBody>
+      </p:sp>
+      <p:graphicFrame>
+        <p:nvGraphicFramePr>
+          <p:cNvPr id="12" name="Tabela 11">
+            <a:extLst>
+              <a:ext uri="{FF2B5EF4-FFF2-40B4-BE49-F238E27FC236}">
+                <a16:creationId xmlns:a16="http://schemas.microsoft.com/office/drawing/2014/main" id="{09F86733-569E-7179-7640-773B1795E310}"/>
+              </a:ext>
+            </a:extLst>
+          </p:cNvPr>
+          <p:cNvGraphicFramePr>
+            <a:graphicFrameLocks noGrp="1"/>
+          </p:cNvGraphicFramePr>
+          <p:nvPr>
+            <p:extLst>
+              <p:ext uri="{D42A27DB-BD31-4B8C-83A1-F6EECF244321}">
+                <p14:modId xmlns:p14="http://schemas.microsoft.com/office/powerpoint/2010/main" val="1681861248"/>
+              </p:ext>
+            </p:extLst>
+          </p:nvPr>
+        </p:nvGraphicFramePr>
+        <p:xfrm>
+          <a:off x="495300" y="1600201"/>
+          <a:ext cx="10953750" cy="4525960"/>
+        </p:xfrm>
+        <a:graphic>
+          <a:graphicData uri="http://schemas.openxmlformats.org/drawingml/2006/table">
+            <a:tbl>
+              <a:tblPr>
+                <a:tableStyleId>{BC89EF96-8CEA-46FF-86C4-4CE0E7609802}</a:tableStyleId>
+              </a:tblPr>
+              <a:tblGrid>
+                <a:gridCol w="5476875">
+                  <a:extLst>
+                    <a:ext uri="{9D8B030D-6E8A-4147-A177-3AD203B41FA5}">
+                      <a16:colId xmlns:a16="http://schemas.microsoft.com/office/drawing/2014/main" val="3571605357"/>
+                    </a:ext>
+                  </a:extLst>
+                </a:gridCol>
+                <a:gridCol w="5476875">
+                  <a:extLst>
+                    <a:ext uri="{9D8B030D-6E8A-4147-A177-3AD203B41FA5}">
+                      <a16:colId xmlns:a16="http://schemas.microsoft.com/office/drawing/2014/main" val="3873332870"/>
+                    </a:ext>
+                  </a:extLst>
+                </a:gridCol>
+              </a:tblGrid>
+              <a:tr h="238421">
+                <a:tc>
+                  <a:txBody>
+                    <a:bodyPr/>
+                    <a:lstStyle/>
+                    <a:p>
+                      <a:pPr>
+                        <a:buNone/>
+                      </a:pPr>
+                      <a:r>
+                        <a:rPr lang="pt-BR" sz="1400" dirty="0">
+                          <a:effectLst/>
+                        </a:rPr>
+                        <a:t>Track</a:t>
+                      </a:r>
+                    </a:p>
+                  </a:txBody>
+                  <a:tcPr marL="10103" marR="10103" marT="10103" marB="10103" anchor="ctr"/>
+                </a:tc>
+                <a:tc>
+                  <a:txBody>
+                    <a:bodyPr/>
+                    <a:lstStyle/>
+                    <a:p>
+                      <a:pPr>
+                        <a:buNone/>
+                      </a:pPr>
+                      <a:r>
+                        <a:rPr lang="pt-BR" sz="1400">
+                          <a:effectLst/>
+                        </a:rPr>
+                        <a:t>Papers (links diretos)</a:t>
+                      </a:r>
+                    </a:p>
+                  </a:txBody>
+                  <a:tcPr marL="10103" marR="10103" marT="10103" marB="10103" anchor="ctr"/>
+                </a:tc>
+                <a:extLst>
+                  <a:ext uri="{0D108BD9-81ED-4DB2-BD59-A6C34878D82A}">
+                    <a16:rowId xmlns:a16="http://schemas.microsoft.com/office/drawing/2014/main" val="1449477240"/>
+                  </a:ext>
+                </a:extLst>
+              </a:tr>
+              <a:tr h="456637">
+                <a:tc>
+                  <a:txBody>
+                    <a:bodyPr/>
+                    <a:lstStyle/>
+                    <a:p>
+                      <a:pPr>
+                        <a:buNone/>
+                      </a:pPr>
+                      <a:r>
+                        <a:rPr lang="pt-BR" sz="1400" b="1">
+                          <a:effectLst/>
+                        </a:rPr>
+                        <a:t>A — Race classification</a:t>
+                      </a:r>
+                      <a:endParaRPr lang="pt-BR" sz="1400">
+                        <a:effectLst/>
+                      </a:endParaRPr>
+                    </a:p>
+                  </a:txBody>
+                  <a:tcPr marL="10103" marR="10103" marT="10103" marB="10103" anchor="ctr"/>
+                </a:tc>
+                <a:tc>
+                  <a:txBody>
+                    <a:bodyPr/>
+                    <a:lstStyle/>
+                    <a:p>
+                      <a:pPr>
+                        <a:buNone/>
+                      </a:pPr>
+                      <a:r>
+                        <a:rPr lang="pt-BR" sz="1400">
+                          <a:solidFill>
+                            <a:srgbClr val="48A0C7"/>
+                          </a:solidFill>
+                          <a:effectLst/>
+                          <a:hlinkClick r:id="rId2"/>
+                        </a:rPr>
+                        <a:t>Karkkainen 2021 (FairFace)</a:t>
+                      </a:r>
+                      <a:r>
+                        <a:rPr lang="pt-BR" sz="1400">
+                          <a:effectLst/>
+                        </a:rPr>
+                        <a:t> · </a:t>
+                      </a:r>
+                      <a:r>
+                        <a:rPr lang="pt-BR" sz="1400">
+                          <a:solidFill>
+                            <a:srgbClr val="48A0C7"/>
+                          </a:solidFill>
+                          <a:effectLst/>
+                          <a:hlinkClick r:id="rId3"/>
+                        </a:rPr>
+                        <a:t>AlDahoul 2024 (SOTA)</a:t>
+                      </a:r>
+                      <a:r>
+                        <a:rPr lang="pt-BR" sz="1400">
+                          <a:effectLst/>
+                        </a:rPr>
+                        <a:t> · </a:t>
+                      </a:r>
+                      <a:r>
+                        <a:rPr lang="pt-BR" sz="1400">
+                          <a:solidFill>
+                            <a:srgbClr val="48A0C7"/>
+                          </a:solidFill>
+                          <a:effectLst/>
+                          <a:hlinkClick r:id="rId4"/>
+                        </a:rPr>
+                        <a:t>Lin 2022 (FairGRAPE)</a:t>
+                      </a:r>
+                      <a:endParaRPr lang="pt-BR" sz="1400">
+                        <a:effectLst/>
+                      </a:endParaRPr>
+                    </a:p>
+                  </a:txBody>
+                  <a:tcPr marL="10103" marR="10103" marT="10103" marB="10103" anchor="ctr"/>
+                </a:tc>
+                <a:extLst>
+                  <a:ext uri="{0D108BD9-81ED-4DB2-BD59-A6C34878D82A}">
+                    <a16:rowId xmlns:a16="http://schemas.microsoft.com/office/drawing/2014/main" val="1745330482"/>
+                  </a:ext>
+                </a:extLst>
+              </a:tr>
+              <a:tr h="456637">
+                <a:tc>
+                  <a:txBody>
+                    <a:bodyPr/>
+                    <a:lstStyle/>
+                    <a:p>
+                      <a:pPr>
+                        <a:buNone/>
+                      </a:pPr>
+                      <a:r>
+                        <a:rPr lang="pt-BR" sz="1400" b="1">
+                          <a:effectLst/>
+                        </a:rPr>
+                        <a:t>B — FR fairness</a:t>
+                      </a:r>
+                      <a:endParaRPr lang="pt-BR" sz="1400">
+                        <a:effectLst/>
+                      </a:endParaRPr>
+                    </a:p>
+                  </a:txBody>
+                  <a:tcPr marL="10103" marR="10103" marT="10103" marB="10103" anchor="ctr"/>
+                </a:tc>
+                <a:tc>
+                  <a:txBody>
+                    <a:bodyPr/>
+                    <a:lstStyle/>
+                    <a:p>
+                      <a:pPr>
+                        <a:buNone/>
+                      </a:pPr>
+                      <a:r>
+                        <a:rPr lang="pt-BR" sz="1400">
+                          <a:solidFill>
+                            <a:srgbClr val="48A0C7"/>
+                          </a:solidFill>
+                          <a:effectLst/>
+                          <a:hlinkClick r:id="rId5"/>
+                        </a:rPr>
+                        <a:t>Wang 2019 (RFW)</a:t>
+                      </a:r>
+                      <a:r>
+                        <a:rPr lang="pt-BR" sz="1400">
+                          <a:effectLst/>
+                        </a:rPr>
+                        <a:t> · </a:t>
+                      </a:r>
+                      <a:r>
+                        <a:rPr lang="pt-BR" sz="1400">
+                          <a:solidFill>
+                            <a:srgbClr val="48A0C7"/>
+                          </a:solidFill>
+                          <a:effectLst/>
+                          <a:hlinkClick r:id="rId6"/>
+                        </a:rPr>
+                        <a:t>Robinson 2020 (BFW)</a:t>
+                      </a:r>
+                      <a:r>
+                        <a:rPr lang="pt-BR" sz="1400">
+                          <a:effectLst/>
+                        </a:rPr>
+                        <a:t> · </a:t>
+                      </a:r>
+                      <a:r>
+                        <a:rPr lang="pt-BR" sz="1400">
+                          <a:solidFill>
+                            <a:srgbClr val="48A0C7"/>
+                          </a:solidFill>
+                          <a:effectLst/>
+                          <a:hlinkClick r:id="rId7"/>
+                        </a:rPr>
+                        <a:t>Grother 2019 (NIST)</a:t>
+                      </a:r>
+                      <a:r>
+                        <a:rPr lang="pt-BR" sz="1400">
+                          <a:effectLst/>
+                        </a:rPr>
+                        <a:t> · </a:t>
+                      </a:r>
+                      <a:r>
+                        <a:rPr lang="pt-BR" sz="1400">
+                          <a:solidFill>
+                            <a:srgbClr val="48A0C7"/>
+                          </a:solidFill>
+                          <a:effectLst/>
+                          <a:hlinkClick r:id="rId8"/>
+                        </a:rPr>
+                        <a:t>Neto 2025</a:t>
+                      </a:r>
+                      <a:endParaRPr lang="pt-BR" sz="1400">
+                        <a:effectLst/>
+                      </a:endParaRPr>
+                    </a:p>
+                  </a:txBody>
+                  <a:tcPr marL="10103" marR="10103" marT="10103" marB="10103" anchor="ctr"/>
+                </a:tc>
+                <a:extLst>
+                  <a:ext uri="{0D108BD9-81ED-4DB2-BD59-A6C34878D82A}">
+                    <a16:rowId xmlns:a16="http://schemas.microsoft.com/office/drawing/2014/main" val="1216747291"/>
+                  </a:ext>
+                </a:extLst>
+              </a:tr>
+              <a:tr h="674853">
+                <a:tc>
+                  <a:txBody>
+                    <a:bodyPr/>
+                    <a:lstStyle/>
+                    <a:p>
+                      <a:pPr>
+                        <a:buNone/>
+                      </a:pPr>
+                      <a:r>
+                        <a:rPr lang="pt-BR" sz="1400" b="1" dirty="0">
+                          <a:effectLst/>
+                        </a:rPr>
+                        <a:t>C — </a:t>
+                      </a:r>
+                      <a:r>
+                        <a:rPr lang="pt-BR" sz="1400" b="1" dirty="0" err="1">
+                          <a:effectLst/>
+                        </a:rPr>
+                        <a:t>Skin</a:t>
+                      </a:r>
+                      <a:r>
+                        <a:rPr lang="pt-BR" sz="1400" b="1" dirty="0">
+                          <a:effectLst/>
+                        </a:rPr>
+                        <a:t> </a:t>
+                      </a:r>
+                      <a:r>
+                        <a:rPr lang="pt-BR" sz="1400" b="1" dirty="0" err="1">
+                          <a:effectLst/>
+                        </a:rPr>
+                        <a:t>tone</a:t>
+                      </a:r>
+                      <a:endParaRPr lang="pt-BR" sz="1400" dirty="0">
+                        <a:effectLst/>
+                      </a:endParaRPr>
+                    </a:p>
+                  </a:txBody>
+                  <a:tcPr marL="10103" marR="10103" marT="10103" marB="10103" anchor="ctr"/>
+                </a:tc>
+                <a:tc>
+                  <a:txBody>
+                    <a:bodyPr/>
+                    <a:lstStyle/>
+                    <a:p>
+                      <a:pPr>
+                        <a:buNone/>
+                      </a:pPr>
+                      <a:r>
+                        <a:rPr lang="pt-BR" sz="1400">
+                          <a:solidFill>
+                            <a:srgbClr val="48A0C7"/>
+                          </a:solidFill>
+                          <a:effectLst/>
+                          <a:hlinkClick r:id="rId9"/>
+                        </a:rPr>
+                        <a:t>Buolamwini 2018</a:t>
+                      </a:r>
+                      <a:r>
+                        <a:rPr lang="pt-BR" sz="1400">
+                          <a:effectLst/>
+                        </a:rPr>
+                        <a:t> · </a:t>
+                      </a:r>
+                      <a:r>
+                        <a:rPr lang="pt-BR" sz="1400">
+                          <a:solidFill>
+                            <a:srgbClr val="48A0C7"/>
+                          </a:solidFill>
+                          <a:effectLst/>
+                          <a:hlinkClick r:id="rId10"/>
+                        </a:rPr>
+                        <a:t>Hazirbas 2021</a:t>
+                      </a:r>
+                      <a:r>
+                        <a:rPr lang="pt-BR" sz="1400">
+                          <a:effectLst/>
+                        </a:rPr>
+                        <a:t> · </a:t>
+                      </a:r>
+                      <a:r>
+                        <a:rPr lang="pt-BR" sz="1400">
+                          <a:solidFill>
+                            <a:srgbClr val="48A0C7"/>
+                          </a:solidFill>
+                          <a:effectLst/>
+                          <a:hlinkClick r:id="rId11"/>
+                        </a:rPr>
+                        <a:t>Schumann 2023 (MST)</a:t>
+                      </a:r>
+                      <a:r>
+                        <a:rPr lang="pt-BR" sz="1400">
+                          <a:effectLst/>
+                        </a:rPr>
+                        <a:t> · </a:t>
+                      </a:r>
+                      <a:r>
+                        <a:rPr lang="pt-BR" sz="1400">
+                          <a:solidFill>
+                            <a:srgbClr val="48A0C7"/>
+                          </a:solidFill>
+                          <a:effectLst/>
+                          <a:hlinkClick r:id="rId12"/>
+                        </a:rPr>
+                        <a:t>Lafargue 2025</a:t>
+                      </a:r>
+                      <a:endParaRPr lang="pt-BR" sz="1400">
+                        <a:effectLst/>
+                      </a:endParaRPr>
+                    </a:p>
+                  </a:txBody>
+                  <a:tcPr marL="10103" marR="10103" marT="10103" marB="10103" anchor="ctr"/>
+                </a:tc>
+                <a:extLst>
+                  <a:ext uri="{0D108BD9-81ED-4DB2-BD59-A6C34878D82A}">
+                    <a16:rowId xmlns:a16="http://schemas.microsoft.com/office/drawing/2014/main" val="149015989"/>
+                  </a:ext>
+                </a:extLst>
+              </a:tr>
+              <a:tr h="893069">
+                <a:tc>
+                  <a:txBody>
+                    <a:bodyPr/>
+                    <a:lstStyle/>
+                    <a:p>
+                      <a:pPr>
+                        <a:buNone/>
+                      </a:pPr>
+                      <a:r>
+                        <a:rPr lang="pt-BR" sz="1400" b="1">
+                          <a:effectLst/>
+                        </a:rPr>
+                        <a:t>D — Mitigação</a:t>
+                      </a:r>
+                      <a:endParaRPr lang="pt-BR" sz="1400">
+                        <a:effectLst/>
+                      </a:endParaRPr>
+                    </a:p>
+                  </a:txBody>
+                  <a:tcPr marL="10103" marR="10103" marT="10103" marB="10103" anchor="ctr"/>
+                </a:tc>
+                <a:tc>
+                  <a:txBody>
+                    <a:bodyPr/>
+                    <a:lstStyle/>
+                    <a:p>
+                      <a:pPr>
+                        <a:buNone/>
+                      </a:pPr>
+                      <a:r>
+                        <a:rPr lang="pt-BR" sz="1400">
+                          <a:solidFill>
+                            <a:srgbClr val="48A0C7"/>
+                          </a:solidFill>
+                          <a:effectLst/>
+                          <a:hlinkClick r:id="rId13"/>
+                        </a:rPr>
+                        <a:t>Park 2022 (FSCL)</a:t>
+                      </a:r>
+                      <a:r>
+                        <a:rPr lang="pt-BR" sz="1400">
+                          <a:effectLst/>
+                        </a:rPr>
+                        <a:t> · </a:t>
+                      </a:r>
+                      <a:r>
+                        <a:rPr lang="pt-BR" sz="1400">
+                          <a:solidFill>
+                            <a:srgbClr val="48A0C7"/>
+                          </a:solidFill>
+                          <a:effectLst/>
+                          <a:hlinkClick r:id="rId14"/>
+                        </a:rPr>
+                        <a:t>Sagawa 2020 (Group DRO)</a:t>
+                      </a:r>
+                      <a:r>
+                        <a:rPr lang="pt-BR" sz="1400">
+                          <a:effectLst/>
+                        </a:rPr>
+                        <a:t> · </a:t>
+                      </a:r>
+                      <a:r>
+                        <a:rPr lang="pt-BR" sz="1400">
+                          <a:solidFill>
+                            <a:srgbClr val="48A0C7"/>
+                          </a:solidFill>
+                          <a:effectLst/>
+                          <a:hlinkClick r:id="rId15"/>
+                        </a:rPr>
+                        <a:t>Manzoor 2024 (FineFACE)</a:t>
+                      </a:r>
+                      <a:r>
+                        <a:rPr lang="pt-BR" sz="1400">
+                          <a:effectLst/>
+                        </a:rPr>
+                        <a:t> · </a:t>
+                      </a:r>
+                      <a:r>
+                        <a:rPr lang="pt-BR" sz="1400">
+                          <a:solidFill>
+                            <a:srgbClr val="48A0C7"/>
+                          </a:solidFill>
+                          <a:effectLst/>
+                          <a:hlinkClick r:id="rId16"/>
+                        </a:rPr>
+                        <a:t>Bhaskaruni 2019</a:t>
+                      </a:r>
+                      <a:r>
+                        <a:rPr lang="pt-BR" sz="1400">
+                          <a:effectLst/>
+                        </a:rPr>
+                        <a:t> · </a:t>
+                      </a:r>
+                      <a:r>
+                        <a:rPr lang="pt-BR" sz="1400">
+                          <a:solidFill>
+                            <a:srgbClr val="48A0C7"/>
+                          </a:solidFill>
+                          <a:effectLst/>
+                          <a:hlinkClick r:id="rId17"/>
+                        </a:rPr>
+                        <a:t>Dehdashtian 2024</a:t>
+                      </a:r>
+                      <a:endParaRPr lang="pt-BR" sz="1400">
+                        <a:effectLst/>
+                      </a:endParaRPr>
+                    </a:p>
+                  </a:txBody>
+                  <a:tcPr marL="10103" marR="10103" marT="10103" marB="10103" anchor="ctr"/>
+                </a:tc>
+                <a:extLst>
+                  <a:ext uri="{0D108BD9-81ED-4DB2-BD59-A6C34878D82A}">
+                    <a16:rowId xmlns:a16="http://schemas.microsoft.com/office/drawing/2014/main" val="3228955285"/>
+                  </a:ext>
+                </a:extLst>
+              </a:tr>
+              <a:tr h="456637">
+                <a:tc>
+                  <a:txBody>
+                    <a:bodyPr/>
+                    <a:lstStyle/>
+                    <a:p>
+                      <a:pPr>
+                        <a:buNone/>
+                      </a:pPr>
+                      <a:r>
+                        <a:rPr lang="pt-BR" sz="1400" b="1">
+                          <a:effectLst/>
+                        </a:rPr>
+                        <a:t>E — Auditoria/metodologia</a:t>
+                      </a:r>
+                      <a:endParaRPr lang="pt-BR" sz="1400">
+                        <a:effectLst/>
+                      </a:endParaRPr>
+                    </a:p>
+                  </a:txBody>
+                  <a:tcPr marL="10103" marR="10103" marT="10103" marB="10103" anchor="ctr"/>
+                </a:tc>
+                <a:tc>
+                  <a:txBody>
+                    <a:bodyPr/>
+                    <a:lstStyle/>
+                    <a:p>
+                      <a:pPr>
+                        <a:buNone/>
+                      </a:pPr>
+                      <a:r>
+                        <a:rPr lang="pt-BR" sz="1400">
+                          <a:solidFill>
+                            <a:srgbClr val="48A0C7"/>
+                          </a:solidFill>
+                          <a:effectLst/>
+                          <a:hlinkClick r:id="rId18"/>
+                        </a:rPr>
+                        <a:t>Dominguez 2024 (DSAP)</a:t>
+                      </a:r>
+                      <a:r>
+                        <a:rPr lang="pt-BR" sz="1400">
+                          <a:effectLst/>
+                        </a:rPr>
+                        <a:t> · </a:t>
+                      </a:r>
+                      <a:r>
+                        <a:rPr lang="pt-BR" sz="1400">
+                          <a:solidFill>
+                            <a:srgbClr val="48A0C7"/>
+                          </a:solidFill>
+                          <a:effectLst/>
+                          <a:hlinkClick r:id="rId19"/>
+                        </a:rPr>
+                        <a:t>Mehrabi 2021 (survey)</a:t>
+                      </a:r>
+                      <a:r>
+                        <a:rPr lang="pt-BR" sz="1400">
+                          <a:effectLst/>
+                        </a:rPr>
+                        <a:t> · </a:t>
+                      </a:r>
+                      <a:r>
+                        <a:rPr lang="pt-BR" sz="1400">
+                          <a:solidFill>
+                            <a:srgbClr val="48A0C7"/>
+                          </a:solidFill>
+                          <a:effectLst/>
+                          <a:hlinkClick r:id="rId20"/>
+                        </a:rPr>
+                        <a:t>Kotwal 2025 (survey)</a:t>
+                      </a:r>
+                      <a:endParaRPr lang="pt-BR" sz="1400">
+                        <a:effectLst/>
+                      </a:endParaRPr>
+                    </a:p>
+                  </a:txBody>
+                  <a:tcPr marL="10103" marR="10103" marT="10103" marB="10103" anchor="ctr"/>
+                </a:tc>
+                <a:extLst>
+                  <a:ext uri="{0D108BD9-81ED-4DB2-BD59-A6C34878D82A}">
+                    <a16:rowId xmlns:a16="http://schemas.microsoft.com/office/drawing/2014/main" val="2269658635"/>
+                  </a:ext>
+                </a:extLst>
+              </a:tr>
+              <a:tr h="674853">
+                <a:tc>
+                  <a:txBody>
+                    <a:bodyPr/>
+                    <a:lstStyle/>
+                    <a:p>
+                      <a:pPr>
+                        <a:buNone/>
+                      </a:pPr>
+                      <a:r>
+                        <a:rPr lang="pt-BR" sz="1400" b="1">
+                          <a:effectLst/>
+                        </a:rPr>
+                        <a:t>F — Fundamentação</a:t>
+                      </a:r>
+                      <a:endParaRPr lang="pt-BR" sz="1400">
+                        <a:effectLst/>
+                      </a:endParaRPr>
+                    </a:p>
+                  </a:txBody>
+                  <a:tcPr marL="10103" marR="10103" marT="10103" marB="10103" anchor="ctr"/>
+                </a:tc>
+                <a:tc>
+                  <a:txBody>
+                    <a:bodyPr/>
+                    <a:lstStyle/>
+                    <a:p>
+                      <a:pPr>
+                        <a:buNone/>
+                      </a:pPr>
+                      <a:r>
+                        <a:rPr lang="pt-BR" sz="1400">
+                          <a:solidFill>
+                            <a:srgbClr val="48A0C7"/>
+                          </a:solidFill>
+                          <a:effectLst/>
+                          <a:hlinkClick r:id="rId21"/>
+                        </a:rPr>
+                        <a:t>Fuentes 2019 (AAPA)</a:t>
+                      </a:r>
+                      <a:r>
+                        <a:rPr lang="pt-BR" sz="1400">
+                          <a:effectLst/>
+                        </a:rPr>
+                        <a:t> · </a:t>
+                      </a:r>
+                      <a:r>
+                        <a:rPr lang="pt-BR" sz="1400">
+                          <a:solidFill>
+                            <a:srgbClr val="48A0C7"/>
+                          </a:solidFill>
+                          <a:effectLst/>
+                          <a:hlinkClick r:id="rId22"/>
+                        </a:rPr>
+                        <a:t>Lewontin 1972</a:t>
+                      </a:r>
+                      <a:r>
+                        <a:rPr lang="pt-BR" sz="1400">
+                          <a:effectLst/>
+                        </a:rPr>
+                        <a:t> · </a:t>
+                      </a:r>
+                      <a:r>
+                        <a:rPr lang="pt-BR" sz="1400">
+                          <a:solidFill>
+                            <a:srgbClr val="48A0C7"/>
+                          </a:solidFill>
+                          <a:effectLst/>
+                          <a:hlinkClick r:id="rId23"/>
+                        </a:rPr>
+                        <a:t>Fitzpatrick 1988</a:t>
+                      </a:r>
+                      <a:r>
+                        <a:rPr lang="pt-BR" sz="1400">
+                          <a:effectLst/>
+                        </a:rPr>
+                        <a:t> · </a:t>
+                      </a:r>
+                      <a:r>
+                        <a:rPr lang="pt-BR" sz="1400">
+                          <a:solidFill>
+                            <a:srgbClr val="48A0C7"/>
+                          </a:solidFill>
+                          <a:effectLst/>
+                          <a:hlinkClick r:id="rId24"/>
+                        </a:rPr>
+                        <a:t>Massey &amp; Martin 2003</a:t>
+                      </a:r>
+                      <a:endParaRPr lang="pt-BR" sz="1400">
+                        <a:effectLst/>
+                      </a:endParaRPr>
+                    </a:p>
+                  </a:txBody>
+                  <a:tcPr marL="10103" marR="10103" marT="10103" marB="10103" anchor="ctr"/>
+                </a:tc>
+                <a:extLst>
+                  <a:ext uri="{0D108BD9-81ED-4DB2-BD59-A6C34878D82A}">
+                    <a16:rowId xmlns:a16="http://schemas.microsoft.com/office/drawing/2014/main" val="2693752794"/>
+                  </a:ext>
+                </a:extLst>
+              </a:tr>
+              <a:tr h="674853">
+                <a:tc>
+                  <a:txBody>
+                    <a:bodyPr/>
+                    <a:lstStyle/>
+                    <a:p>
+                      <a:pPr>
+                        <a:buNone/>
+                      </a:pPr>
+                      <a:r>
+                        <a:rPr lang="pt-BR" sz="1400" b="1" dirty="0">
+                          <a:effectLst/>
+                        </a:rPr>
+                        <a:t>G — Mecanismos ML</a:t>
+                      </a:r>
+                      <a:endParaRPr lang="pt-BR" sz="1400" dirty="0">
+                        <a:effectLst/>
+                      </a:endParaRPr>
+                    </a:p>
+                  </a:txBody>
+                  <a:tcPr marL="10103" marR="10103" marT="10103" marB="10103" anchor="ctr"/>
+                </a:tc>
+                <a:tc>
+                  <a:txBody>
+                    <a:bodyPr/>
+                    <a:lstStyle/>
+                    <a:p>
+                      <a:pPr>
+                        <a:buNone/>
+                      </a:pPr>
+                      <a:r>
+                        <a:rPr lang="pt-BR" sz="1400" dirty="0" err="1">
+                          <a:solidFill>
+                            <a:srgbClr val="48A0C7"/>
+                          </a:solidFill>
+                          <a:effectLst/>
+                          <a:hlinkClick r:id="rId25"/>
+                        </a:rPr>
+                        <a:t>Hardt</a:t>
+                      </a:r>
+                      <a:r>
+                        <a:rPr lang="pt-BR" sz="1400" dirty="0">
+                          <a:solidFill>
+                            <a:srgbClr val="48A0C7"/>
+                          </a:solidFill>
+                          <a:effectLst/>
+                          <a:hlinkClick r:id="rId25"/>
+                        </a:rPr>
+                        <a:t> 2016</a:t>
+                      </a:r>
+                      <a:r>
+                        <a:rPr lang="pt-BR" sz="1400" dirty="0">
+                          <a:effectLst/>
+                        </a:rPr>
+                        <a:t> · </a:t>
+                      </a:r>
+                      <a:r>
+                        <a:rPr lang="pt-BR" sz="1400" dirty="0">
+                          <a:solidFill>
+                            <a:srgbClr val="48A0C7"/>
+                          </a:solidFill>
+                          <a:effectLst/>
+                          <a:hlinkClick r:id="rId26"/>
+                        </a:rPr>
+                        <a:t>Perez 2018 (</a:t>
+                      </a:r>
+                      <a:r>
+                        <a:rPr lang="pt-BR" sz="1400" dirty="0" err="1">
+                          <a:solidFill>
+                            <a:srgbClr val="48A0C7"/>
+                          </a:solidFill>
+                          <a:effectLst/>
+                          <a:hlinkClick r:id="rId26"/>
+                        </a:rPr>
+                        <a:t>FiLM</a:t>
+                      </a:r>
+                      <a:r>
+                        <a:rPr lang="pt-BR" sz="1400" dirty="0">
+                          <a:solidFill>
+                            <a:srgbClr val="48A0C7"/>
+                          </a:solidFill>
+                          <a:effectLst/>
+                          <a:hlinkClick r:id="rId26"/>
+                        </a:rPr>
+                        <a:t>)</a:t>
+                      </a:r>
+                      <a:r>
+                        <a:rPr lang="pt-BR" sz="1400" dirty="0">
+                          <a:effectLst/>
+                        </a:rPr>
+                        <a:t> · </a:t>
+                      </a:r>
+                      <a:r>
+                        <a:rPr lang="pt-BR" sz="1400" dirty="0">
+                          <a:solidFill>
+                            <a:srgbClr val="48A0C7"/>
+                          </a:solidFill>
+                          <a:effectLst/>
+                          <a:hlinkClick r:id="rId27"/>
+                        </a:rPr>
+                        <a:t>Zemel 2013 (LFR)</a:t>
+                      </a:r>
+                      <a:r>
+                        <a:rPr lang="pt-BR" sz="1400" dirty="0">
+                          <a:effectLst/>
+                        </a:rPr>
+                        <a:t> · </a:t>
+                      </a:r>
+                      <a:r>
+                        <a:rPr lang="pt-BR" sz="1400" dirty="0">
+                          <a:solidFill>
+                            <a:srgbClr val="48A0C7"/>
+                          </a:solidFill>
+                          <a:effectLst/>
+                          <a:hlinkClick r:id="rId28"/>
+                        </a:rPr>
+                        <a:t>Madras 2018 (LAFTR)</a:t>
+                      </a:r>
+                      <a:r>
+                        <a:rPr lang="pt-BR" sz="1400" dirty="0">
+                          <a:effectLst/>
+                        </a:rPr>
+                        <a:t> · </a:t>
+                      </a:r>
+                      <a:r>
+                        <a:rPr lang="pt-BR" sz="1400" dirty="0">
+                          <a:solidFill>
+                            <a:srgbClr val="48A0C7"/>
+                          </a:solidFill>
+                          <a:effectLst/>
+                          <a:hlinkClick r:id="rId29"/>
+                        </a:rPr>
+                        <a:t>Zhang 2018 (Adversarial)</a:t>
+                      </a:r>
+                      <a:r>
+                        <a:rPr lang="pt-BR" sz="1400" dirty="0">
+                          <a:effectLst/>
+                        </a:rPr>
+                        <a:t> · </a:t>
+                      </a:r>
+                      <a:r>
+                        <a:rPr lang="pt-BR" sz="1400" dirty="0" err="1">
+                          <a:solidFill>
+                            <a:srgbClr val="48A0C7"/>
+                          </a:solidFill>
+                          <a:effectLst/>
+                          <a:hlinkClick r:id="rId30"/>
+                        </a:rPr>
+                        <a:t>Kleinberg</a:t>
+                      </a:r>
+                      <a:r>
+                        <a:rPr lang="pt-BR" sz="1400" dirty="0">
+                          <a:solidFill>
+                            <a:srgbClr val="48A0C7"/>
+                          </a:solidFill>
+                          <a:effectLst/>
+                          <a:hlinkClick r:id="rId30"/>
+                        </a:rPr>
+                        <a:t> 2017</a:t>
+                      </a:r>
+                      <a:endParaRPr lang="pt-BR" sz="1400" dirty="0">
+                        <a:effectLst/>
+                      </a:endParaRPr>
+                    </a:p>
+                  </a:txBody>
+                  <a:tcPr marL="10103" marR="10103" marT="10103" marB="10103" anchor="ctr"/>
+                </a:tc>
+                <a:extLst>
+                  <a:ext uri="{0D108BD9-81ED-4DB2-BD59-A6C34878D82A}">
+                    <a16:rowId xmlns:a16="http://schemas.microsoft.com/office/drawing/2014/main" val="4151081207"/>
+                  </a:ext>
+                </a:extLst>
+              </a:tr>
+            </a:tbl>
+          </a:graphicData>
+        </a:graphic>
+      </p:graphicFrame>
+    </p:spTree>
+    <p:extLst>
+      <p:ext uri="{BB962C8B-B14F-4D97-AF65-F5344CB8AC3E}">
+        <p14:creationId xmlns:p14="http://schemas.microsoft.com/office/powerpoint/2010/main" val="1453582692"/>
+      </p:ext>
+    </p:extLst>
+  </p:cSld>
+  <p:clrMapOvr>
+    <a:masterClrMapping/>
+  </p:clrMapOvr>
+</p:sld>
+</file>
+
 <file path=ppt/slides/slide4.xml><?xml version="1.0" encoding="utf-8"?>
 <p:sld xmlns:a="http://schemas.openxmlformats.org/drawingml/2006/main" xmlns:r="http://schemas.openxmlformats.org/officeDocument/2006/relationships" xmlns:p="http://schemas.openxmlformats.org/presentationml/2006/main">
   <p:cSld>
@@ -18619,14 +19996,14 @@
           <p:nvPr>
             <p:extLst>
               <p:ext uri="{D42A27DB-BD31-4B8C-83A1-F6EECF244321}">
-                <p14:modId xmlns:p14="http://schemas.microsoft.com/office/powerpoint/2010/main" val="833417514"/>
+                <p14:modId xmlns:p14="http://schemas.microsoft.com/office/powerpoint/2010/main" val="3010668842"/>
               </p:ext>
             </p:extLst>
           </p:nvPr>
         </p:nvGraphicFramePr>
         <p:xfrm>
           <a:off x="457200" y="1371600"/>
-          <a:ext cx="11430000" cy="4937760"/>
+          <a:ext cx="11430000" cy="4232364"/>
         </p:xfrm>
         <a:graphic>
           <a:graphicData uri="http://schemas.openxmlformats.org/drawingml/2006/table">
@@ -18657,13 +20034,18 @@
                     <a:lstStyle/>
                     <a:p>
                       <a:r>
-                        <a:rPr sz="1600" b="1">
+                        <a:rPr sz="1600" b="1" dirty="0" err="1">
                           <a:solidFill>
                             <a:srgbClr val="FFFFFF"/>
                           </a:solidFill>
                         </a:rPr>
                         <a:t>Dimensão</a:t>
                       </a:r>
+                      <a:endParaRPr sz="1600" b="1" dirty="0">
+                        <a:solidFill>
+                          <a:srgbClr val="FFFFFF"/>
+                        </a:solidFill>
+                      </a:endParaRPr>
                     </a:p>
                   </a:txBody>
                   <a:tcPr>
@@ -18981,56 +20363,7 @@
                     <a:lstStyle/>
                     <a:p>
                       <a:r>
-                        <a:rPr sz="1500">
-                          <a:solidFill>
-                            <a:srgbClr val="3D424E"/>
-                          </a:solidFill>
-                        </a:rPr>
-                        <a:t>Critério de sucesso</a:t>
-                      </a:r>
-                    </a:p>
-                  </a:txBody>
-                  <a:tcPr>
-                    <a:solidFill>
-                      <a:srgbClr val="E8EAED"/>
-                    </a:solidFill>
-                  </a:tcPr>
-                </a:tc>
-                <a:tc>
-                  <a:txBody>
-                    <a:bodyPr/>
-                    <a:lstStyle/>
-                    <a:p>
-                      <a:r>
-                        <a:rPr sz="1500">
-                          <a:solidFill>
-                            <a:srgbClr val="3D424E"/>
-                          </a:solidFill>
-                        </a:rPr>
-                        <a:t>Decomposição: irredutível vs redutível</a:t>
-                      </a:r>
-                    </a:p>
-                  </a:txBody>
-                  <a:tcPr>
-                    <a:solidFill>
-                      <a:srgbClr val="E8EAED"/>
-                    </a:solidFill>
-                  </a:tcPr>
-                </a:tc>
-                <a:extLst>
-                  <a:ext uri="{0D108BD9-81ED-4DB2-BD59-A6C34878D82A}">
-                    <a16:rowId xmlns:a16="http://schemas.microsoft.com/office/drawing/2014/main" val="10004"/>
-                  </a:ext>
-                </a:extLst>
-              </a:tr>
-              <a:tr h="705394">
-                <a:tc>
-                  <a:txBody>
-                    <a:bodyPr/>
-                    <a:lstStyle/>
-                    <a:p>
-                      <a:r>
-                        <a:rPr sz="1500">
+                        <a:rPr sz="1500" dirty="0">
                           <a:solidFill>
                             <a:srgbClr val="3D424E"/>
                           </a:solidFill>
@@ -19041,7 +20374,7 @@
                   </a:txBody>
                   <a:tcPr>
                     <a:solidFill>
-                      <a:srgbClr val="FFFFFF"/>
+                      <a:srgbClr val="E8EAED"/>
                     </a:solidFill>
                   </a:tcPr>
                 </a:tc>
@@ -19142,35 +20475,72 @@
                   </a:txBody>
                   <a:tcPr>
                     <a:solidFill>
-                      <a:srgbClr val="FFFFFF"/>
+                      <a:srgbClr val="E8EAED"/>
                     </a:solidFill>
                   </a:tcPr>
                 </a:tc>
                 <a:extLst>
                   <a:ext uri="{0D108BD9-81ED-4DB2-BD59-A6C34878D82A}">
-                    <a16:rowId xmlns:a16="http://schemas.microsoft.com/office/drawing/2014/main" val="10005"/>
+                    <a16:rowId xmlns:a16="http://schemas.microsoft.com/office/drawing/2014/main" val="10004"/>
                   </a:ext>
                 </a:extLst>
               </a:tr>
-              <a:tr h="705396">
+              <a:tr h="705394">
                 <a:tc>
                   <a:txBody>
                     <a:bodyPr/>
                     <a:lstStyle/>
                     <a:p>
                       <a:r>
-                        <a:rPr sz="1500">
+                        <a:rPr sz="1500" dirty="0" err="1">
                           <a:solidFill>
                             <a:srgbClr val="3D424E"/>
                           </a:solidFill>
                         </a:rPr>
-                        <a:t>Validado na reunião</a:t>
+                        <a:t>Validado</a:t>
                       </a:r>
+                      <a:r>
+                        <a:rPr sz="1500" dirty="0">
+                          <a:solidFill>
+                            <a:srgbClr val="3D424E"/>
+                          </a:solidFill>
+                        </a:rPr>
+                        <a:t> </a:t>
+                      </a:r>
+                      <a:r>
+                        <a:rPr sz="1500" dirty="0" err="1">
+                          <a:solidFill>
+                            <a:srgbClr val="3D424E"/>
+                          </a:solidFill>
+                        </a:rPr>
+                        <a:t>na</a:t>
+                      </a:r>
+                      <a:r>
+                        <a:rPr sz="1500" dirty="0">
+                          <a:solidFill>
+                            <a:srgbClr val="3D424E"/>
+                          </a:solidFill>
+                        </a:rPr>
+                        <a:t> </a:t>
+                      </a:r>
+                      <a:r>
+                        <a:rPr sz="1500" dirty="0" err="1">
+                          <a:solidFill>
+                            <a:srgbClr val="3D424E"/>
+                          </a:solidFill>
+                        </a:rPr>
+                        <a:t>reunião</a:t>
+                      </a:r>
+                      <a:endParaRPr sz="1500" dirty="0">
+                        <a:solidFill>
+                          <a:srgbClr val="3D424E"/>
+                        </a:solidFill>
+                      </a:endParaRPr>
                     </a:p>
                   </a:txBody>
                   <a:tcPr>
                     <a:solidFill>
-                      <a:srgbClr val="E8EAED"/>
+                      <a:srgbClr val="FFFFFF"/>
                     </a:solidFill>
                   </a:tcPr>
                 </a:tc>
@@ -19276,13 +20646,13 @@
                   </a:txBody>
                   <a:tcPr>
                     <a:solidFill>
-                      <a:srgbClr val="E8EAED"/>
+                      <a:srgbClr val="FFFFFF"/>
                     </a:solidFill>
                   </a:tcPr>
                 </a:tc>
                 <a:extLst>
                   <a:ext uri="{0D108BD9-81ED-4DB2-BD59-A6C34878D82A}">
-                    <a16:rowId xmlns:a16="http://schemas.microsoft.com/office/drawing/2014/main" val="10006"/>
+                    <a16:rowId xmlns:a16="http://schemas.microsoft.com/office/drawing/2014/main" val="10005"/>
                   </a:ext>
                 </a:extLst>
               </a:tr>
@@ -20106,7 +21476,7 @@
         <p:spPr>
           <a:xfrm>
             <a:off x="548640" y="1371600"/>
-            <a:ext cx="11247120" cy="3406061"/>
+            <a:ext cx="11247120" cy="3770263"/>
           </a:xfrm>
           <a:prstGeom prst="rect">
             <a:avLst/>
@@ -20130,8 +21500,8 @@
               </a:defRPr>
             </a:pPr>
             <a:r>
-              <a:rPr dirty="0" err="1"/>
-              <a:t>Executei</a:t>
+              <a:rPr lang="pt-BR" dirty="0"/>
+              <a:t>Executada</a:t>
             </a:r>
             <a:r>
               <a:rPr dirty="0"/>
@@ -20203,12 +21573,20 @@
               </a:defRPr>
             </a:pPr>
             <a:r>
-              <a:rPr dirty="0" err="1"/>
-              <a:t>Adicionei</a:t>
-            </a:r>
-            <a:r>
-              <a:rPr dirty="0"/>
-              <a:t> 6 </a:t>
+              <a:rPr lang="pt-BR" dirty="0"/>
+              <a:t>Adicionadas</a:t>
+            </a:r>
+            <a:r>
+              <a:rPr dirty="0"/>
+              <a:t> </a:t>
+            </a:r>
+            <a:r>
+              <a:rPr lang="pt-BR" dirty="0"/>
+              <a:t>7</a:t>
+            </a:r>
+            <a:r>
+              <a:rPr dirty="0"/>
+              <a:t> </a:t>
             </a:r>
             <a:r>
               <a:rPr dirty="0" err="1"/>
@@ -20232,11 +21610,11 @@
             </a:r>
             <a:r>
               <a:rPr dirty="0"/>
-              <a:t> de venues top da </a:t>
-            </a:r>
-            <a:r>
-              <a:rPr dirty="0" err="1"/>
-              <a:t>área</a:t>
+              <a:t> de venues </a:t>
+            </a:r>
+            <a:r>
+              <a:rPr lang="pt-BR" dirty="0" err="1"/>
+              <a:t>refencias</a:t>
             </a:r>
             <a:r>
               <a:rPr dirty="0"/>
@@ -20303,31 +21681,59 @@
               </a:defRPr>
             </a:pPr>
             <a:r>
-              <a:rPr dirty="0"/>
+              <a:rPr dirty="0">
+                <a:solidFill>
+                  <a:srgbClr val="00B050"/>
+                </a:solidFill>
+              </a:rPr>
               <a:t>• Perez et al. (AAAI 2018) — </a:t>
             </a:r>
             <a:r>
-              <a:rPr dirty="0" err="1"/>
+              <a:rPr dirty="0" err="1">
+                <a:solidFill>
+                  <a:srgbClr val="00B050"/>
+                </a:solidFill>
+              </a:rPr>
               <a:t>FiLM</a:t>
             </a:r>
             <a:r>
-              <a:rPr dirty="0"/>
+              <a:rPr dirty="0">
+                <a:solidFill>
+                  <a:srgbClr val="00B050"/>
+                </a:solidFill>
+              </a:rPr>
               <a:t>, </a:t>
             </a:r>
             <a:r>
-              <a:rPr dirty="0" err="1"/>
+              <a:rPr dirty="0" err="1">
+                <a:solidFill>
+                  <a:srgbClr val="00B050"/>
+                </a:solidFill>
+              </a:rPr>
               <a:t>mecanismo</a:t>
             </a:r>
             <a:r>
-              <a:rPr dirty="0"/>
+              <a:rPr dirty="0">
+                <a:solidFill>
+                  <a:srgbClr val="00B050"/>
+                </a:solidFill>
+              </a:rPr>
               <a:t> de </a:t>
             </a:r>
             <a:r>
-              <a:rPr dirty="0" err="1"/>
+              <a:rPr dirty="0" err="1">
+                <a:solidFill>
+                  <a:srgbClr val="00B050"/>
+                </a:solidFill>
+              </a:rPr>
               <a:t>condicionamento</a:t>
             </a:r>
             <a:r>
-              <a:rPr dirty="0"/>
+              <a:rPr dirty="0">
+                <a:solidFill>
+                  <a:srgbClr val="00B050"/>
+                </a:solidFill>
+              </a:rPr>
               <a:t> neural</a:t>
             </a:r>
           </a:p>
@@ -20343,7 +21749,11 @@
               </a:defRPr>
             </a:pPr>
             <a:r>
-              <a:rPr dirty="0"/>
+              <a:rPr dirty="0">
+                <a:solidFill>
+                  <a:srgbClr val="00B050"/>
+                </a:solidFill>
+              </a:rPr>
               <a:t>• Zemel et al. (ICML 2013, Test-of-Time Award 2023) — Fair Representation Learning</a:t>
             </a:r>
           </a:p>
@@ -20427,7 +21837,80 @@
               <a:rPr dirty="0" err="1"/>
               <a:t>impossibilidade</a:t>
             </a:r>
-            <a:endParaRPr dirty="0"/>
+            <a:endParaRPr lang="pt-BR" dirty="0"/>
+          </a:p>
+          <a:p>
+            <a:pPr lvl="1">
+              <a:spcAft>
+                <a:spcPts val="800"/>
+              </a:spcAft>
+              <a:defRPr sz="1700">
+                <a:solidFill>
+                  <a:srgbClr val="707682"/>
+                </a:solidFill>
+              </a:defRPr>
+            </a:pPr>
+            <a:r>
+              <a:rPr lang="pt-BR" dirty="0">
+                <a:solidFill>
+                  <a:srgbClr val="00B050"/>
+                </a:solidFill>
+              </a:rPr>
+              <a:t>• (adicionado hoje): </a:t>
+            </a:r>
+            <a:r>
+              <a:rPr lang="pt-BR" dirty="0" err="1">
+                <a:solidFill>
+                  <a:srgbClr val="00B050"/>
+                </a:solidFill>
+              </a:rPr>
+              <a:t>SkinToneNet</a:t>
+            </a:r>
+            <a:r>
+              <a:rPr lang="pt-BR" dirty="0">
+                <a:solidFill>
+                  <a:srgbClr val="00B050"/>
+                </a:solidFill>
+              </a:rPr>
+              <a:t> + STW </a:t>
+            </a:r>
+            <a:r>
+              <a:rPr lang="pt-BR" dirty="0" err="1">
+                <a:solidFill>
+                  <a:srgbClr val="00B050"/>
+                </a:solidFill>
+              </a:rPr>
+              <a:t>Dataset</a:t>
+            </a:r>
+            <a:r>
+              <a:rPr lang="pt-BR" dirty="0">
+                <a:solidFill>
+                  <a:srgbClr val="00B050"/>
+                </a:solidFill>
+              </a:rPr>
+              <a:t> (Pereira Matias, Costa, Neto &amp; Novello de Brito, 2026) - </a:t>
+            </a:r>
+            <a:r>
+              <a:rPr lang="pt-BR" dirty="0" err="1">
+                <a:solidFill>
+                  <a:srgbClr val="00B050"/>
+                </a:solidFill>
+              </a:rPr>
+              <a:t>SkinToneNet</a:t>
+            </a:r>
+            <a:r>
+              <a:rPr lang="pt-BR" dirty="0">
+                <a:solidFill>
+                  <a:srgbClr val="00B050"/>
+                </a:solidFill>
+              </a:rPr>
+              <a:t> </a:t>
+            </a:r>
+            <a:endParaRPr dirty="0">
+              <a:solidFill>
+                <a:srgbClr val="00B050"/>
+              </a:solidFill>
+            </a:endParaRPr>
           </a:p>
         </p:txBody>
       </p:sp>
@@ -20578,7 +22061,7 @@
         <p:spPr>
           <a:xfrm>
             <a:off x="548640" y="1371600"/>
-            <a:ext cx="11247120" cy="4683333"/>
+            <a:ext cx="11247120" cy="3452227"/>
           </a:xfrm>
           <a:prstGeom prst="rect">
             <a:avLst/>
@@ -20823,8 +22306,8 @@
               <a:t>código</a:t>
             </a:r>
             <a:r>
-              <a:rPr dirty="0"/>
-              <a:t>, seeds?</a:t>
+              <a:rPr lang="pt-BR" dirty="0"/>
+              <a:t>?</a:t>
             </a:r>
           </a:p>
           <a:p>
@@ -20839,64 +22322,8 @@
               </a:defRPr>
             </a:pPr>
             <a:r>
-              <a:rPr dirty="0"/>
-              <a:t>(c) </a:t>
-            </a:r>
-            <a:r>
-              <a:rPr dirty="0" err="1"/>
-              <a:t>Aplicabilidade</a:t>
-            </a:r>
-            <a:r>
-              <a:rPr dirty="0"/>
-              <a:t> </a:t>
-            </a:r>
-            <a:r>
-              <a:rPr dirty="0" err="1"/>
-              <a:t>ao</a:t>
-            </a:r>
-            <a:r>
-              <a:rPr dirty="0"/>
-              <a:t> </a:t>
-            </a:r>
-            <a:r>
-              <a:rPr dirty="0" err="1"/>
-              <a:t>nosso</a:t>
-            </a:r>
-            <a:r>
-              <a:rPr dirty="0"/>
-              <a:t> pipeline — </a:t>
-            </a:r>
-            <a:r>
-              <a:rPr dirty="0" err="1"/>
-              <a:t>onde</a:t>
-            </a:r>
-            <a:r>
-              <a:rPr dirty="0"/>
-              <a:t> </a:t>
-            </a:r>
-            <a:r>
-              <a:rPr dirty="0" err="1"/>
-              <a:t>funciona</a:t>
-            </a:r>
-            <a:r>
-              <a:rPr dirty="0"/>
-              <a:t> e </a:t>
-            </a:r>
-            <a:r>
-              <a:rPr dirty="0" err="1"/>
-              <a:t>onde</a:t>
-            </a:r>
-            <a:r>
-              <a:rPr dirty="0"/>
-              <a:t> </a:t>
-            </a:r>
-            <a:r>
-              <a:rPr dirty="0" err="1"/>
-              <a:t>falha</a:t>
-            </a:r>
-            <a:r>
-              <a:rPr dirty="0"/>
-              <a:t>?</a:t>
+              <a:rPr lang="pt-BR" dirty="0"/>
+              <a:t>(c) Aplicabilidade ao nosso pipeline — onde funciona e onde falha?</a:t>
             </a:r>
           </a:p>
           <a:p>
@@ -20946,6 +22373,19 @@
               <a:rPr dirty="0"/>
               <a:t>?</a:t>
             </a:r>
+            <a:r>
+              <a:rPr lang="pt-BR" dirty="0"/>
+              <a:t> Testes </a:t>
+            </a:r>
+            <a:r>
+              <a:rPr lang="pt-BR" dirty="0" err="1"/>
+              <a:t>estatisticos</a:t>
+            </a:r>
+            <a:r>
+              <a:rPr lang="pt-BR" dirty="0"/>
+              <a:t>?</a:t>
+            </a:r>
+            <a:endParaRPr dirty="0"/>
           </a:p>
           <a:p>
             <a:pPr lvl="1">
@@ -20996,171 +22436,6 @@
               </a:defRPr>
             </a:pPr>
             <a:endParaRPr lang="pt-BR" dirty="0"/>
-          </a:p>
-          <a:p>
-            <a:pPr>
-              <a:spcAft>
-                <a:spcPts val="800"/>
-              </a:spcAft>
-              <a:defRPr sz="2000" b="0">
-                <a:solidFill>
-                  <a:srgbClr val="3D424E"/>
-                </a:solidFill>
-              </a:defRPr>
-            </a:pPr>
-            <a:r>
-              <a:rPr lang="pt-BR" i="1" dirty="0"/>
-              <a:t>Observações:</a:t>
-            </a:r>
-            <a:endParaRPr i="1" dirty="0"/>
-          </a:p>
-          <a:p>
-            <a:pPr>
-              <a:spcAft>
-                <a:spcPts val="800"/>
-              </a:spcAft>
-              <a:defRPr sz="2000" b="0">
-                <a:solidFill>
-                  <a:srgbClr val="3D424E"/>
-                </a:solidFill>
-              </a:defRPr>
-            </a:pPr>
-            <a:r>
-              <a:rPr lang="pt-BR" i="1" dirty="0"/>
-              <a:t>- </a:t>
-            </a:r>
-            <a:r>
-              <a:rPr i="1" dirty="0" err="1"/>
-              <a:t>Adicionada</a:t>
-            </a:r>
-            <a:r>
-              <a:rPr i="1" dirty="0"/>
-              <a:t> </a:t>
-            </a:r>
-            <a:r>
-              <a:rPr i="1" dirty="0" err="1"/>
-              <a:t>nas</a:t>
-            </a:r>
-            <a:r>
-              <a:rPr i="1" dirty="0"/>
-              <a:t> 10 </a:t>
-            </a:r>
-            <a:r>
-              <a:rPr i="1" dirty="0" err="1"/>
-              <a:t>fichas</a:t>
-            </a:r>
-            <a:r>
-              <a:rPr i="1" dirty="0"/>
-              <a:t> </a:t>
-            </a:r>
-            <a:r>
-              <a:rPr i="1" dirty="0" err="1"/>
-              <a:t>centrais</a:t>
-            </a:r>
-            <a:r>
-              <a:rPr i="1" dirty="0"/>
-              <a:t> (</a:t>
-            </a:r>
-            <a:r>
-              <a:rPr i="1" dirty="0" err="1"/>
-              <a:t>lista</a:t>
-            </a:r>
-            <a:r>
-              <a:rPr i="1" dirty="0"/>
-              <a:t> de </a:t>
-            </a:r>
-            <a:r>
-              <a:rPr i="1" dirty="0" err="1"/>
-              <a:t>leitura</a:t>
-            </a:r>
-            <a:r>
-              <a:rPr i="1" dirty="0"/>
-              <a:t> </a:t>
-            </a:r>
-            <a:r>
-              <a:rPr i="1" dirty="0" err="1"/>
-              <a:t>prioritária</a:t>
-            </a:r>
-            <a:r>
-              <a:rPr i="1" dirty="0"/>
-              <a:t>).</a:t>
-            </a:r>
-          </a:p>
-          <a:p>
-            <a:pPr>
-              <a:spcAft>
-                <a:spcPts val="800"/>
-              </a:spcAft>
-              <a:defRPr sz="2000" b="0">
-                <a:solidFill>
-                  <a:srgbClr val="3D424E"/>
-                </a:solidFill>
-              </a:defRPr>
-            </a:pPr>
-            <a:r>
-              <a:rPr lang="pt-BR" i="1" dirty="0"/>
-              <a:t>- </a:t>
-            </a:r>
-            <a:r>
-              <a:rPr i="1" dirty="0"/>
-              <a:t>Vamos </a:t>
-            </a:r>
-            <a:r>
-              <a:rPr i="1" dirty="0" err="1"/>
-              <a:t>expandir</a:t>
-            </a:r>
-            <a:r>
-              <a:rPr i="1" dirty="0"/>
-              <a:t> para as </a:t>
-            </a:r>
-            <a:r>
-              <a:rPr i="1" dirty="0" err="1"/>
-              <a:t>outras</a:t>
-            </a:r>
-            <a:r>
-              <a:rPr i="1" dirty="0"/>
-              <a:t> 19 </a:t>
-            </a:r>
-            <a:r>
-              <a:rPr i="1" dirty="0" err="1"/>
-              <a:t>após</a:t>
-            </a:r>
-            <a:r>
-              <a:rPr i="1" dirty="0"/>
-              <a:t> </a:t>
-            </a:r>
-            <a:r>
-              <a:rPr i="1" dirty="0" err="1"/>
-              <a:t>aprovação</a:t>
-            </a:r>
-            <a:r>
-              <a:rPr i="1" dirty="0"/>
-              <a:t> </a:t>
-            </a:r>
-            <a:r>
-              <a:rPr i="1" dirty="0" err="1"/>
-              <a:t>conjunta</a:t>
-            </a:r>
-            <a:r>
-              <a:rPr i="1" dirty="0"/>
-              <a:t> da nova </a:t>
-            </a:r>
-            <a:r>
-              <a:rPr i="1" dirty="0" err="1"/>
-              <a:t>versão</a:t>
-            </a:r>
-            <a:r>
-              <a:rPr i="1" dirty="0"/>
-              <a:t> da </a:t>
-            </a:r>
-            <a:r>
-              <a:rPr i="1" dirty="0" err="1"/>
-              <a:t>tese</a:t>
-            </a:r>
-            <a:r>
-              <a:rPr i="1" dirty="0"/>
-              <a:t>.</a:t>
-            </a:r>
           </a:p>
         </p:txBody>
       </p:sp>
